--- a/downloads/presentations/modules/arc-260.pptx
+++ b/downloads/presentations/modules/arc-260.pptx
@@ -3613,13 +3613,11 @@
             </a:avLst>
           </a:prstGeom>
           <a:solidFill>
-            <a:srgbClr val="FFFFFF">
-              <a:alpha val="88000"/>
-            </a:srgbClr>
+            <a:srgbClr val="FFFFFF"/>
           </a:solidFill>
           <a:ln w="12700">
             <a:solidFill>
-              <a:srgbClr val="D6E8F2"/>
+              <a:srgbClr val="B9D7E6"/>
             </a:solidFill>
             <a:prstDash val="solid"/>
           </a:ln>
@@ -3627,30 +3625,42 @@
       </p:sp>
       <p:sp>
         <p:nvSpPr>
-          <p:cNvPr id="14" name="Shape 12"/>
-          <p:cNvSpPr/>
-          <p:nvPr/>
-        </p:nvSpPr>
-        <p:spPr>
-          <a:xfrm>
-            <a:off x="7927848" y="3319272"/>
-            <a:ext cx="792480" cy="749808"/>
-          </a:xfrm>
-          <a:prstGeom prst="roundRect">
-            <a:avLst>
-              <a:gd name="adj" fmla="val 14634"/>
-            </a:avLst>
-          </a:prstGeom>
-          <a:solidFill>
-            <a:srgbClr val="0068B7"/>
-          </a:solidFill>
-          <a:ln w="12700">
-            <a:solidFill>
-              <a:srgbClr val="0068B7"/>
-            </a:solidFill>
-            <a:prstDash val="solid"/>
-          </a:ln>
-        </p:spPr>
+          <p:cNvPr id="14" name="Text 12"/>
+          <p:cNvSpPr/>
+          <p:nvPr/>
+        </p:nvSpPr>
+        <p:spPr>
+          <a:xfrm>
+            <a:off x="7799832" y="2935224"/>
+            <a:ext cx="3145536" cy="256032"/>
+          </a:xfrm>
+          <a:prstGeom prst="rect">
+            <a:avLst/>
+          </a:prstGeom>
+          <a:noFill/>
+          <a:ln/>
+        </p:spPr>
+        <p:txBody>
+          <a:bodyPr wrap="square" lIns="0" tIns="0" rIns="0" bIns="0" rtlCol="0" anchor="ctr"/>
+          <a:lstStyle/>
+          <a:p>
+            <a:pPr indent="0" marL="0">
+              <a:buNone/>
+            </a:pPr>
+            <a:r>
+              <a:rPr lang="en-US" sz="1300" b="1" dirty="0">
+                <a:solidFill>
+                  <a:srgbClr val="0068B7"/>
+                </a:solidFill>
+                <a:latin typeface="Aptos" pitchFamily="34" charset="0"/>
+                <a:ea typeface="Aptos" pitchFamily="34" charset="-122"/>
+                <a:cs typeface="Aptos" pitchFamily="34" charset="-120"/>
+              </a:rPr>
+              <a:t>Concept checkpoints</a:t>
+            </a:r>
+            <a:endParaRPr lang="en-US" sz="1300" dirty="0"/>
+          </a:p>
+        </p:txBody>
       </p:sp>
       <p:sp>
         <p:nvSpPr>
@@ -3660,240 +3670,67 @@
         </p:nvSpPr>
         <p:spPr>
           <a:xfrm>
-            <a:off x="8001000" y="3511296"/>
-            <a:ext cx="646176" cy="310896"/>
-          </a:xfrm>
-          <a:prstGeom prst="rect">
-            <a:avLst/>
-          </a:prstGeom>
-          <a:noFill/>
-          <a:ln/>
-        </p:spPr>
-        <p:txBody>
-          <a:bodyPr wrap="square" lIns="0" tIns="0" rIns="0" bIns="0" rtlCol="0" anchor="ctr">
+            <a:off x="7818120" y="3300984"/>
+            <a:ext cx="3090672" cy="877824"/>
+          </a:xfrm>
+          <a:prstGeom prst="rect">
+            <a:avLst/>
+          </a:prstGeom>
+          <a:noFill/>
+          <a:ln/>
+        </p:spPr>
+        <p:txBody>
+          <a:bodyPr wrap="square" lIns="254" tIns="254" rIns="254" bIns="254" rtlCol="0" anchor="t">
             <a:normAutofit/>
           </a:bodyPr>
           <a:lstStyle/>
           <a:p>
-            <a:pPr algn="ctr" indent="0" marL="0">
-              <a:buNone/>
-            </a:pPr>
-            <a:r>
-              <a:rPr lang="en-US" sz="1500" b="1" dirty="0">
-                <a:solidFill>
-                  <a:srgbClr val="FFFFFF"/>
-                </a:solidFill>
-                <a:latin typeface="Aptos" pitchFamily="34" charset="0"/>
-                <a:ea typeface="Aptos" pitchFamily="34" charset="-122"/>
-                <a:cs typeface="Aptos" pitchFamily="34" charset="-120"/>
-              </a:rPr>
-              <a:t>Plan</a:t>
-            </a:r>
-            <a:endParaRPr lang="en-US" sz="1500" dirty="0"/>
+            <a:r>
+              <a:rPr lang="en-US" sz="1380" dirty="0">
+                <a:solidFill>
+                  <a:srgbClr val="17364A"/>
+                </a:solidFill>
+                <a:latin typeface="Aptos" pitchFamily="34" charset="0"/>
+                <a:ea typeface="Aptos" pitchFamily="34" charset="-122"/>
+                <a:cs typeface="Aptos" pitchFamily="34" charset="-120"/>
+              </a:rPr>
+              <a:t>Read-only versus write-back.</a:t>
+            </a:r>
+            <a:endParaRPr lang="en-US" sz="1380" dirty="0"/>
+          </a:p>
+          <a:p>
+            <a:r>
+              <a:rPr lang="en-US" sz="1380" dirty="0">
+                <a:solidFill>
+                  <a:srgbClr val="17364A"/>
+                </a:solidFill>
+                <a:latin typeface="Aptos" pitchFamily="34" charset="0"/>
+                <a:ea typeface="Aptos" pitchFamily="34" charset="-122"/>
+                <a:cs typeface="Aptos" pitchFamily="34" charset="-120"/>
+              </a:rPr>
+              <a:t>Read-only access allows a tool to view or retrieve information.</a:t>
+            </a:r>
+            <a:endParaRPr lang="en-US" sz="1380" dirty="0"/>
+          </a:p>
+          <a:p>
+            <a:r>
+              <a:rPr lang="en-US" sz="1380" dirty="0">
+                <a:solidFill>
+                  <a:srgbClr val="17364A"/>
+                </a:solidFill>
+                <a:latin typeface="Aptos" pitchFamily="34" charset="0"/>
+                <a:ea typeface="Aptos" pitchFamily="34" charset="-122"/>
+                <a:cs typeface="Aptos" pitchFamily="34" charset="-120"/>
+              </a:rPr>
+              <a:t>Write-back allows a tool to update, create, or delete information.</a:t>
+            </a:r>
+            <a:endParaRPr lang="en-US" sz="1380" dirty="0"/>
           </a:p>
         </p:txBody>
       </p:sp>
       <p:sp>
         <p:nvSpPr>
           <p:cNvPr id="16" name="Shape 14"/>
-          <p:cNvSpPr/>
-          <p:nvPr/>
-        </p:nvSpPr>
-        <p:spPr>
-          <a:xfrm>
-            <a:off x="8976360" y="3319272"/>
-            <a:ext cx="792480" cy="749808"/>
-          </a:xfrm>
-          <a:prstGeom prst="roundRect">
-            <a:avLst>
-              <a:gd name="adj" fmla="val 14634"/>
-            </a:avLst>
-          </a:prstGeom>
-          <a:solidFill>
-            <a:srgbClr val="2F8A28"/>
-          </a:solidFill>
-          <a:ln w="12700">
-            <a:solidFill>
-              <a:srgbClr val="2F8A28"/>
-            </a:solidFill>
-            <a:prstDash val="solid"/>
-          </a:ln>
-        </p:spPr>
-      </p:sp>
-      <p:sp>
-        <p:nvSpPr>
-          <p:cNvPr id="17" name="Text 15"/>
-          <p:cNvSpPr/>
-          <p:nvPr/>
-        </p:nvSpPr>
-        <p:spPr>
-          <a:xfrm>
-            <a:off x="9049512" y="3511296"/>
-            <a:ext cx="646176" cy="310896"/>
-          </a:xfrm>
-          <a:prstGeom prst="rect">
-            <a:avLst/>
-          </a:prstGeom>
-          <a:noFill/>
-          <a:ln/>
-        </p:spPr>
-        <p:txBody>
-          <a:bodyPr wrap="square" lIns="0" tIns="0" rIns="0" bIns="0" rtlCol="0" anchor="ctr">
-            <a:normAutofit/>
-          </a:bodyPr>
-          <a:lstStyle/>
-          <a:p>
-            <a:pPr algn="ctr" indent="0" marL="0">
-              <a:buNone/>
-            </a:pPr>
-            <a:r>
-              <a:rPr lang="en-US" sz="1500" b="1" dirty="0">
-                <a:solidFill>
-                  <a:srgbClr val="FFFFFF"/>
-                </a:solidFill>
-                <a:latin typeface="Aptos" pitchFamily="34" charset="0"/>
-                <a:ea typeface="Aptos" pitchFamily="34" charset="-122"/>
-                <a:cs typeface="Aptos" pitchFamily="34" charset="-120"/>
-              </a:rPr>
-              <a:t>Do</a:t>
-            </a:r>
-            <a:endParaRPr lang="en-US" sz="1500" dirty="0"/>
-          </a:p>
-        </p:txBody>
-      </p:sp>
-      <p:sp>
-        <p:nvSpPr>
-          <p:cNvPr id="18" name="Shape 16"/>
-          <p:cNvSpPr/>
-          <p:nvPr/>
-        </p:nvSpPr>
-        <p:spPr>
-          <a:xfrm>
-            <a:off x="10024872" y="3319272"/>
-            <a:ext cx="792480" cy="749808"/>
-          </a:xfrm>
-          <a:prstGeom prst="roundRect">
-            <a:avLst>
-              <a:gd name="adj" fmla="val 14634"/>
-            </a:avLst>
-          </a:prstGeom>
-          <a:solidFill>
-            <a:srgbClr val="D69A2D"/>
-          </a:solidFill>
-          <a:ln w="12700">
-            <a:solidFill>
-              <a:srgbClr val="D69A2D"/>
-            </a:solidFill>
-            <a:prstDash val="solid"/>
-          </a:ln>
-        </p:spPr>
-      </p:sp>
-      <p:sp>
-        <p:nvSpPr>
-          <p:cNvPr id="19" name="Text 17"/>
-          <p:cNvSpPr/>
-          <p:nvPr/>
-        </p:nvSpPr>
-        <p:spPr>
-          <a:xfrm>
-            <a:off x="10098024" y="3511296"/>
-            <a:ext cx="646176" cy="310896"/>
-          </a:xfrm>
-          <a:prstGeom prst="rect">
-            <a:avLst/>
-          </a:prstGeom>
-          <a:noFill/>
-          <a:ln/>
-        </p:spPr>
-        <p:txBody>
-          <a:bodyPr wrap="square" lIns="0" tIns="0" rIns="0" bIns="0" rtlCol="0" anchor="ctr">
-            <a:normAutofit/>
-          </a:bodyPr>
-          <a:lstStyle/>
-          <a:p>
-            <a:pPr algn="ctr" indent="0" marL="0">
-              <a:buNone/>
-            </a:pPr>
-            <a:r>
-              <a:rPr lang="en-US" sz="1500" b="1" dirty="0">
-                <a:solidFill>
-                  <a:srgbClr val="FFFFFF"/>
-                </a:solidFill>
-                <a:latin typeface="Aptos" pitchFamily="34" charset="0"/>
-                <a:ea typeface="Aptos" pitchFamily="34" charset="-122"/>
-                <a:cs typeface="Aptos" pitchFamily="34" charset="-120"/>
-              </a:rPr>
-              <a:t>Review</a:t>
-            </a:r>
-            <a:endParaRPr lang="en-US" sz="1500" dirty="0"/>
-          </a:p>
-        </p:txBody>
-      </p:sp>
-      <p:sp>
-        <p:nvSpPr>
-          <p:cNvPr id="20" name="Shape 18"/>
-          <p:cNvSpPr/>
-          <p:nvPr/>
-        </p:nvSpPr>
-        <p:spPr>
-          <a:xfrm>
-            <a:off x="8293608" y="4389120"/>
-            <a:ext cx="2157984" cy="0"/>
-          </a:xfrm>
-          <a:prstGeom prst="line">
-            <a:avLst/>
-          </a:prstGeom>
-          <a:noFill/>
-          <a:ln w="25400">
-            <a:solidFill>
-              <a:srgbClr val="8ABBD8"/>
-            </a:solidFill>
-            <a:prstDash val="solid"/>
-          </a:ln>
-        </p:spPr>
-      </p:sp>
-      <p:sp>
-        <p:nvSpPr>
-          <p:cNvPr id="21" name="Text 19"/>
-          <p:cNvSpPr/>
-          <p:nvPr/>
-        </p:nvSpPr>
-        <p:spPr>
-          <a:xfrm>
-            <a:off x="7909560" y="3977640"/>
-            <a:ext cx="2926080" cy="182880"/>
-          </a:xfrm>
-          <a:prstGeom prst="rect">
-            <a:avLst/>
-          </a:prstGeom>
-          <a:noFill/>
-          <a:ln/>
-        </p:spPr>
-        <p:txBody>
-          <a:bodyPr wrap="square" lIns="0" tIns="0" rIns="0" bIns="0" rtlCol="0" anchor="ctr"/>
-          <a:lstStyle/>
-          <a:p>
-            <a:pPr algn="ctr" indent="0" marL="0">
-              <a:buNone/>
-            </a:pPr>
-            <a:r>
-              <a:rPr lang="en-US" sz="1000" dirty="0">
-                <a:solidFill>
-                  <a:srgbClr val="003A63"/>
-                </a:solidFill>
-                <a:latin typeface="Aptos" pitchFamily="34" charset="0"/>
-                <a:ea typeface="Aptos" pitchFamily="34" charset="-122"/>
-                <a:cs typeface="Aptos" pitchFamily="34" charset="-120"/>
-              </a:rPr>
-              <a:t>Dependencies visible</a:t>
-            </a:r>
-            <a:endParaRPr lang="en-US" sz="1000" dirty="0"/>
-          </a:p>
-        </p:txBody>
-      </p:sp>
-      <p:sp>
-        <p:nvSpPr>
-          <p:cNvPr id="22" name="Shape 20"/>
           <p:cNvSpPr/>
           <p:nvPr/>
         </p:nvSpPr>
@@ -3920,7 +3757,7 @@
       </p:sp>
       <p:sp>
         <p:nvSpPr>
-          <p:cNvPr id="23" name="Text 21"/>
+          <p:cNvPr id="17" name="Text 15"/>
           <p:cNvSpPr/>
           <p:nvPr/>
         </p:nvSpPr>
@@ -3959,7 +3796,7 @@
       </p:sp>
       <p:sp>
         <p:nvSpPr>
-          <p:cNvPr id="24" name="Text 22"/>
+          <p:cNvPr id="18" name="Text 16"/>
           <p:cNvSpPr/>
           <p:nvPr/>
         </p:nvSpPr>
@@ -4467,13 +4304,11 @@
             </a:avLst>
           </a:prstGeom>
           <a:solidFill>
-            <a:srgbClr val="FFFFFF">
-              <a:alpha val="88000"/>
-            </a:srgbClr>
+            <a:srgbClr val="FFFFFF"/>
           </a:solidFill>
           <a:ln w="12700">
             <a:solidFill>
-              <a:srgbClr val="D6E8F2"/>
+              <a:srgbClr val="B9D7E6"/>
             </a:solidFill>
             <a:prstDash val="solid"/>
           </a:ln>
@@ -4481,30 +4316,42 @@
       </p:sp>
       <p:sp>
         <p:nvSpPr>
-          <p:cNvPr id="14" name="Shape 12"/>
-          <p:cNvSpPr/>
-          <p:nvPr/>
-        </p:nvSpPr>
-        <p:spPr>
-          <a:xfrm>
-            <a:off x="7927848" y="3319272"/>
-            <a:ext cx="792480" cy="749808"/>
-          </a:xfrm>
-          <a:prstGeom prst="roundRect">
-            <a:avLst>
-              <a:gd name="adj" fmla="val 14634"/>
-            </a:avLst>
-          </a:prstGeom>
-          <a:solidFill>
-            <a:srgbClr val="0068B7"/>
-          </a:solidFill>
-          <a:ln w="12700">
-            <a:solidFill>
-              <a:srgbClr val="0068B7"/>
-            </a:solidFill>
-            <a:prstDash val="solid"/>
-          </a:ln>
-        </p:spPr>
+          <p:cNvPr id="14" name="Text 12"/>
+          <p:cNvSpPr/>
+          <p:nvPr/>
+        </p:nvSpPr>
+        <p:spPr>
+          <a:xfrm>
+            <a:off x="7799832" y="2935224"/>
+            <a:ext cx="3145536" cy="256032"/>
+          </a:xfrm>
+          <a:prstGeom prst="rect">
+            <a:avLst/>
+          </a:prstGeom>
+          <a:noFill/>
+          <a:ln/>
+        </p:spPr>
+        <p:txBody>
+          <a:bodyPr wrap="square" lIns="0" tIns="0" rIns="0" bIns="0" rtlCol="0" anchor="ctr"/>
+          <a:lstStyle/>
+          <a:p>
+            <a:pPr indent="0" marL="0">
+              <a:buNone/>
+            </a:pPr>
+            <a:r>
+              <a:rPr lang="en-US" sz="1300" b="1" dirty="0">
+                <a:solidFill>
+                  <a:srgbClr val="0068B7"/>
+                </a:solidFill>
+                <a:latin typeface="Aptos" pitchFamily="34" charset="0"/>
+                <a:ea typeface="Aptos" pitchFamily="34" charset="-122"/>
+                <a:cs typeface="Aptos" pitchFamily="34" charset="-120"/>
+              </a:rPr>
+              <a:t>Concept checkpoints</a:t>
+            </a:r>
+            <a:endParaRPr lang="en-US" sz="1300" dirty="0"/>
+          </a:p>
+        </p:txBody>
       </p:sp>
       <p:sp>
         <p:nvSpPr>
@@ -4514,240 +4361,67 @@
         </p:nvSpPr>
         <p:spPr>
           <a:xfrm>
-            <a:off x="8001000" y="3511296"/>
-            <a:ext cx="646176" cy="310896"/>
-          </a:xfrm>
-          <a:prstGeom prst="rect">
-            <a:avLst/>
-          </a:prstGeom>
-          <a:noFill/>
-          <a:ln/>
-        </p:spPr>
-        <p:txBody>
-          <a:bodyPr wrap="square" lIns="0" tIns="0" rIns="0" bIns="0" rtlCol="0" anchor="ctr">
+            <a:off x="7818120" y="3300984"/>
+            <a:ext cx="3090672" cy="877824"/>
+          </a:xfrm>
+          <a:prstGeom prst="rect">
+            <a:avLst/>
+          </a:prstGeom>
+          <a:noFill/>
+          <a:ln/>
+        </p:spPr>
+        <p:txBody>
+          <a:bodyPr wrap="square" lIns="254" tIns="254" rIns="254" bIns="254" rtlCol="0" anchor="t">
             <a:normAutofit/>
           </a:bodyPr>
           <a:lstStyle/>
           <a:p>
-            <a:pPr algn="ctr" indent="0" marL="0">
-              <a:buNone/>
-            </a:pPr>
-            <a:r>
-              <a:rPr lang="en-US" sz="1500" b="1" dirty="0">
-                <a:solidFill>
-                  <a:srgbClr val="FFFFFF"/>
-                </a:solidFill>
-                <a:latin typeface="Aptos" pitchFamily="34" charset="0"/>
-                <a:ea typeface="Aptos" pitchFamily="34" charset="-122"/>
-                <a:cs typeface="Aptos" pitchFamily="34" charset="-120"/>
-              </a:rPr>
-              <a:t>Plan</a:t>
-            </a:r>
-            <a:endParaRPr lang="en-US" sz="1500" dirty="0"/>
+            <a:r>
+              <a:rPr lang="en-US" sz="1380" dirty="0">
+                <a:solidFill>
+                  <a:srgbClr val="17364A"/>
+                </a:solidFill>
+                <a:latin typeface="Aptos" pitchFamily="34" charset="0"/>
+                <a:ea typeface="Aptos" pitchFamily="34" charset="-122"/>
+                <a:cs typeface="Aptos" pitchFamily="34" charset="-120"/>
+              </a:rPr>
+              <a:t>An AI tool may be configured to review new environmental health complaints as they arrive.</a:t>
+            </a:r>
+            <a:endParaRPr lang="en-US" sz="1380" dirty="0"/>
+          </a:p>
+          <a:p>
+            <a:r>
+              <a:rPr lang="en-US" sz="1380" dirty="0">
+                <a:solidFill>
+                  <a:srgbClr val="17364A"/>
+                </a:solidFill>
+                <a:latin typeface="Aptos" pitchFamily="34" charset="0"/>
+                <a:ea typeface="Aptos" pitchFamily="34" charset="-122"/>
+                <a:cs typeface="Aptos" pitchFamily="34" charset="-120"/>
+              </a:rPr>
+              <a:t>This workflow could improve triage, but it must log the AI classification, preserve the.</a:t>
+            </a:r>
+            <a:endParaRPr lang="en-US" sz="1380" dirty="0"/>
+          </a:p>
+          <a:p>
+            <a:r>
+              <a:rPr lang="en-US" sz="1380" dirty="0">
+                <a:solidFill>
+                  <a:srgbClr val="17364A"/>
+                </a:solidFill>
+                <a:latin typeface="Aptos" pitchFamily="34" charset="0"/>
+                <a:ea typeface="Aptos" pitchFamily="34" charset="-122"/>
+                <a:cs typeface="Aptos" pitchFamily="34" charset="-120"/>
+              </a:rPr>
+              <a:t>A higher-risk example is an agentic tool that updates a case management system after.</a:t>
+            </a:r>
+            <a:endParaRPr lang="en-US" sz="1380" dirty="0"/>
           </a:p>
         </p:txBody>
       </p:sp>
       <p:sp>
         <p:nvSpPr>
           <p:cNvPr id="16" name="Shape 14"/>
-          <p:cNvSpPr/>
-          <p:nvPr/>
-        </p:nvSpPr>
-        <p:spPr>
-          <a:xfrm>
-            <a:off x="8976360" y="3319272"/>
-            <a:ext cx="792480" cy="749808"/>
-          </a:xfrm>
-          <a:prstGeom prst="roundRect">
-            <a:avLst>
-              <a:gd name="adj" fmla="val 14634"/>
-            </a:avLst>
-          </a:prstGeom>
-          <a:solidFill>
-            <a:srgbClr val="2F8A28"/>
-          </a:solidFill>
-          <a:ln w="12700">
-            <a:solidFill>
-              <a:srgbClr val="2F8A28"/>
-            </a:solidFill>
-            <a:prstDash val="solid"/>
-          </a:ln>
-        </p:spPr>
-      </p:sp>
-      <p:sp>
-        <p:nvSpPr>
-          <p:cNvPr id="17" name="Text 15"/>
-          <p:cNvSpPr/>
-          <p:nvPr/>
-        </p:nvSpPr>
-        <p:spPr>
-          <a:xfrm>
-            <a:off x="9049512" y="3511296"/>
-            <a:ext cx="646176" cy="310896"/>
-          </a:xfrm>
-          <a:prstGeom prst="rect">
-            <a:avLst/>
-          </a:prstGeom>
-          <a:noFill/>
-          <a:ln/>
-        </p:spPr>
-        <p:txBody>
-          <a:bodyPr wrap="square" lIns="0" tIns="0" rIns="0" bIns="0" rtlCol="0" anchor="ctr">
-            <a:normAutofit/>
-          </a:bodyPr>
-          <a:lstStyle/>
-          <a:p>
-            <a:pPr algn="ctr" indent="0" marL="0">
-              <a:buNone/>
-            </a:pPr>
-            <a:r>
-              <a:rPr lang="en-US" sz="1500" b="1" dirty="0">
-                <a:solidFill>
-                  <a:srgbClr val="FFFFFF"/>
-                </a:solidFill>
-                <a:latin typeface="Aptos" pitchFamily="34" charset="0"/>
-                <a:ea typeface="Aptos" pitchFamily="34" charset="-122"/>
-                <a:cs typeface="Aptos" pitchFamily="34" charset="-120"/>
-              </a:rPr>
-              <a:t>Do</a:t>
-            </a:r>
-            <a:endParaRPr lang="en-US" sz="1500" dirty="0"/>
-          </a:p>
-        </p:txBody>
-      </p:sp>
-      <p:sp>
-        <p:nvSpPr>
-          <p:cNvPr id="18" name="Shape 16"/>
-          <p:cNvSpPr/>
-          <p:nvPr/>
-        </p:nvSpPr>
-        <p:spPr>
-          <a:xfrm>
-            <a:off x="10024872" y="3319272"/>
-            <a:ext cx="792480" cy="749808"/>
-          </a:xfrm>
-          <a:prstGeom prst="roundRect">
-            <a:avLst>
-              <a:gd name="adj" fmla="val 14634"/>
-            </a:avLst>
-          </a:prstGeom>
-          <a:solidFill>
-            <a:srgbClr val="D69A2D"/>
-          </a:solidFill>
-          <a:ln w="12700">
-            <a:solidFill>
-              <a:srgbClr val="D69A2D"/>
-            </a:solidFill>
-            <a:prstDash val="solid"/>
-          </a:ln>
-        </p:spPr>
-      </p:sp>
-      <p:sp>
-        <p:nvSpPr>
-          <p:cNvPr id="19" name="Text 17"/>
-          <p:cNvSpPr/>
-          <p:nvPr/>
-        </p:nvSpPr>
-        <p:spPr>
-          <a:xfrm>
-            <a:off x="10098024" y="3511296"/>
-            <a:ext cx="646176" cy="310896"/>
-          </a:xfrm>
-          <a:prstGeom prst="rect">
-            <a:avLst/>
-          </a:prstGeom>
-          <a:noFill/>
-          <a:ln/>
-        </p:spPr>
-        <p:txBody>
-          <a:bodyPr wrap="square" lIns="0" tIns="0" rIns="0" bIns="0" rtlCol="0" anchor="ctr">
-            <a:normAutofit/>
-          </a:bodyPr>
-          <a:lstStyle/>
-          <a:p>
-            <a:pPr algn="ctr" indent="0" marL="0">
-              <a:buNone/>
-            </a:pPr>
-            <a:r>
-              <a:rPr lang="en-US" sz="1500" b="1" dirty="0">
-                <a:solidFill>
-                  <a:srgbClr val="FFFFFF"/>
-                </a:solidFill>
-                <a:latin typeface="Aptos" pitchFamily="34" charset="0"/>
-                <a:ea typeface="Aptos" pitchFamily="34" charset="-122"/>
-                <a:cs typeface="Aptos" pitchFamily="34" charset="-120"/>
-              </a:rPr>
-              <a:t>Review</a:t>
-            </a:r>
-            <a:endParaRPr lang="en-US" sz="1500" dirty="0"/>
-          </a:p>
-        </p:txBody>
-      </p:sp>
-      <p:sp>
-        <p:nvSpPr>
-          <p:cNvPr id="20" name="Shape 18"/>
-          <p:cNvSpPr/>
-          <p:nvPr/>
-        </p:nvSpPr>
-        <p:spPr>
-          <a:xfrm>
-            <a:off x="8293608" y="4389120"/>
-            <a:ext cx="2157984" cy="0"/>
-          </a:xfrm>
-          <a:prstGeom prst="line">
-            <a:avLst/>
-          </a:prstGeom>
-          <a:noFill/>
-          <a:ln w="25400">
-            <a:solidFill>
-              <a:srgbClr val="8ABBD8"/>
-            </a:solidFill>
-            <a:prstDash val="solid"/>
-          </a:ln>
-        </p:spPr>
-      </p:sp>
-      <p:sp>
-        <p:nvSpPr>
-          <p:cNvPr id="21" name="Text 19"/>
-          <p:cNvSpPr/>
-          <p:nvPr/>
-        </p:nvSpPr>
-        <p:spPr>
-          <a:xfrm>
-            <a:off x="7909560" y="3977640"/>
-            <a:ext cx="2926080" cy="182880"/>
-          </a:xfrm>
-          <a:prstGeom prst="rect">
-            <a:avLst/>
-          </a:prstGeom>
-          <a:noFill/>
-          <a:ln/>
-        </p:spPr>
-        <p:txBody>
-          <a:bodyPr wrap="square" lIns="0" tIns="0" rIns="0" bIns="0" rtlCol="0" anchor="ctr"/>
-          <a:lstStyle/>
-          <a:p>
-            <a:pPr algn="ctr" indent="0" marL="0">
-              <a:buNone/>
-            </a:pPr>
-            <a:r>
-              <a:rPr lang="en-US" sz="1000" dirty="0">
-                <a:solidFill>
-                  <a:srgbClr val="003A63"/>
-                </a:solidFill>
-                <a:latin typeface="Aptos" pitchFamily="34" charset="0"/>
-                <a:ea typeface="Aptos" pitchFamily="34" charset="-122"/>
-                <a:cs typeface="Aptos" pitchFamily="34" charset="-120"/>
-              </a:rPr>
-              <a:t>Dependencies visible</a:t>
-            </a:r>
-            <a:endParaRPr lang="en-US" sz="1000" dirty="0"/>
-          </a:p>
-        </p:txBody>
-      </p:sp>
-      <p:sp>
-        <p:nvSpPr>
-          <p:cNvPr id="22" name="Shape 20"/>
           <p:cNvSpPr/>
           <p:nvPr/>
         </p:nvSpPr>
@@ -4774,7 +4448,7 @@
       </p:sp>
       <p:sp>
         <p:nvSpPr>
-          <p:cNvPr id="23" name="Text 21"/>
+          <p:cNvPr id="17" name="Text 15"/>
           <p:cNvSpPr/>
           <p:nvPr/>
         </p:nvSpPr>
@@ -4813,7 +4487,7 @@
       </p:sp>
       <p:sp>
         <p:nvSpPr>
-          <p:cNvPr id="24" name="Text 22"/>
+          <p:cNvPr id="18" name="Text 16"/>
           <p:cNvSpPr/>
           <p:nvPr/>
         </p:nvSpPr>
@@ -5321,13 +4995,11 @@
             </a:avLst>
           </a:prstGeom>
           <a:solidFill>
-            <a:srgbClr val="FFFFFF">
-              <a:alpha val="88000"/>
-            </a:srgbClr>
+            <a:srgbClr val="FFFFFF"/>
           </a:solidFill>
           <a:ln w="12700">
             <a:solidFill>
-              <a:srgbClr val="D6E8F2"/>
+              <a:srgbClr val="B9D7E6"/>
             </a:solidFill>
             <a:prstDash val="solid"/>
           </a:ln>
@@ -5335,30 +5007,42 @@
       </p:sp>
       <p:sp>
         <p:nvSpPr>
-          <p:cNvPr id="14" name="Shape 12"/>
-          <p:cNvSpPr/>
-          <p:nvPr/>
-        </p:nvSpPr>
-        <p:spPr>
-          <a:xfrm>
-            <a:off x="7927848" y="3319272"/>
-            <a:ext cx="792480" cy="749808"/>
-          </a:xfrm>
-          <a:prstGeom prst="roundRect">
-            <a:avLst>
-              <a:gd name="adj" fmla="val 14634"/>
-            </a:avLst>
-          </a:prstGeom>
-          <a:solidFill>
-            <a:srgbClr val="0068B7"/>
-          </a:solidFill>
-          <a:ln w="12700">
-            <a:solidFill>
-              <a:srgbClr val="0068B7"/>
-            </a:solidFill>
-            <a:prstDash val="solid"/>
-          </a:ln>
-        </p:spPr>
+          <p:cNvPr id="14" name="Text 12"/>
+          <p:cNvSpPr/>
+          <p:nvPr/>
+        </p:nvSpPr>
+        <p:spPr>
+          <a:xfrm>
+            <a:off x="7799832" y="2935224"/>
+            <a:ext cx="3145536" cy="256032"/>
+          </a:xfrm>
+          <a:prstGeom prst="rect">
+            <a:avLst/>
+          </a:prstGeom>
+          <a:noFill/>
+          <a:ln/>
+        </p:spPr>
+        <p:txBody>
+          <a:bodyPr wrap="square" lIns="0" tIns="0" rIns="0" bIns="0" rtlCol="0" anchor="ctr"/>
+          <a:lstStyle/>
+          <a:p>
+            <a:pPr indent="0" marL="0">
+              <a:buNone/>
+            </a:pPr>
+            <a:r>
+              <a:rPr lang="en-US" sz="1300" b="1" dirty="0">
+                <a:solidFill>
+                  <a:srgbClr val="0068B7"/>
+                </a:solidFill>
+                <a:latin typeface="Aptos" pitchFamily="34" charset="0"/>
+                <a:ea typeface="Aptos" pitchFamily="34" charset="-122"/>
+                <a:cs typeface="Aptos" pitchFamily="34" charset="-120"/>
+              </a:rPr>
+              <a:t>Concept checkpoints</a:t>
+            </a:r>
+            <a:endParaRPr lang="en-US" sz="1300" dirty="0"/>
+          </a:p>
+        </p:txBody>
       </p:sp>
       <p:sp>
         <p:nvSpPr>
@@ -5368,240 +5052,67 @@
         </p:nvSpPr>
         <p:spPr>
           <a:xfrm>
-            <a:off x="8001000" y="3511296"/>
-            <a:ext cx="646176" cy="310896"/>
-          </a:xfrm>
-          <a:prstGeom prst="rect">
-            <a:avLst/>
-          </a:prstGeom>
-          <a:noFill/>
-          <a:ln/>
-        </p:spPr>
-        <p:txBody>
-          <a:bodyPr wrap="square" lIns="0" tIns="0" rIns="0" bIns="0" rtlCol="0" anchor="ctr">
+            <a:off x="7818120" y="3300984"/>
+            <a:ext cx="3090672" cy="877824"/>
+          </a:xfrm>
+          <a:prstGeom prst="rect">
+            <a:avLst/>
+          </a:prstGeom>
+          <a:noFill/>
+          <a:ln/>
+        </p:spPr>
+        <p:txBody>
+          <a:bodyPr wrap="square" lIns="254" tIns="254" rIns="254" bIns="254" rtlCol="0" anchor="t">
             <a:normAutofit/>
           </a:bodyPr>
           <a:lstStyle/>
           <a:p>
-            <a:pPr algn="ctr" indent="0" marL="0">
-              <a:buNone/>
-            </a:pPr>
-            <a:r>
-              <a:rPr lang="en-US" sz="1500" b="1" dirty="0">
-                <a:solidFill>
-                  <a:srgbClr val="FFFFFF"/>
-                </a:solidFill>
-                <a:latin typeface="Aptos" pitchFamily="34" charset="0"/>
-                <a:ea typeface="Aptos" pitchFamily="34" charset="-122"/>
-                <a:cs typeface="Aptos" pitchFamily="34" charset="-120"/>
-              </a:rPr>
-              <a:t>Plan</a:t>
-            </a:r>
-            <a:endParaRPr lang="en-US" sz="1500" dirty="0"/>
+            <a:r>
+              <a:rPr lang="en-US" sz="1380" dirty="0">
+                <a:solidFill>
+                  <a:srgbClr val="17364A"/>
+                </a:solidFill>
+                <a:latin typeface="Aptos" pitchFamily="34" charset="0"/>
+                <a:ea typeface="Aptos" pitchFamily="34" charset="-122"/>
+                <a:cs typeface="Aptos" pitchFamily="34" charset="-120"/>
+              </a:rPr>
+              <a:t>Staff should ask what data the AI tool needs, whether the access is read-only or.</a:t>
+            </a:r>
+            <a:endParaRPr lang="en-US" sz="1380" dirty="0"/>
+          </a:p>
+          <a:p>
+            <a:r>
+              <a:rPr lang="en-US" sz="1380" dirty="0">
+                <a:solidFill>
+                  <a:srgbClr val="17364A"/>
+                </a:solidFill>
+                <a:latin typeface="Aptos" pitchFamily="34" charset="0"/>
+                <a:ea typeface="Aptos" pitchFamily="34" charset="-122"/>
+                <a:cs typeface="Aptos" pitchFamily="34" charset="-120"/>
+              </a:rPr>
+              <a:t>Permissions should follow least privilege, meaning the tool receives only the access.</a:t>
+            </a:r>
+            <a:endParaRPr lang="en-US" sz="1380" dirty="0"/>
+          </a:p>
+          <a:p>
+            <a:r>
+              <a:rPr lang="en-US" sz="1380" dirty="0">
+                <a:solidFill>
+                  <a:srgbClr val="17364A"/>
+                </a:solidFill>
+                <a:latin typeface="Aptos" pitchFamily="34" charset="0"/>
+                <a:ea typeface="Aptos" pitchFamily="34" charset="-122"/>
+                <a:cs typeface="Aptos" pitchFamily="34" charset="-120"/>
+              </a:rPr>
+              <a:t>Event-driven workflows should be designed with failure in mind.</a:t>
+            </a:r>
+            <a:endParaRPr lang="en-US" sz="1380" dirty="0"/>
           </a:p>
         </p:txBody>
       </p:sp>
       <p:sp>
         <p:nvSpPr>
           <p:cNvPr id="16" name="Shape 14"/>
-          <p:cNvSpPr/>
-          <p:nvPr/>
-        </p:nvSpPr>
-        <p:spPr>
-          <a:xfrm>
-            <a:off x="8976360" y="3319272"/>
-            <a:ext cx="792480" cy="749808"/>
-          </a:xfrm>
-          <a:prstGeom prst="roundRect">
-            <a:avLst>
-              <a:gd name="adj" fmla="val 14634"/>
-            </a:avLst>
-          </a:prstGeom>
-          <a:solidFill>
-            <a:srgbClr val="2F8A28"/>
-          </a:solidFill>
-          <a:ln w="12700">
-            <a:solidFill>
-              <a:srgbClr val="2F8A28"/>
-            </a:solidFill>
-            <a:prstDash val="solid"/>
-          </a:ln>
-        </p:spPr>
-      </p:sp>
-      <p:sp>
-        <p:nvSpPr>
-          <p:cNvPr id="17" name="Text 15"/>
-          <p:cNvSpPr/>
-          <p:nvPr/>
-        </p:nvSpPr>
-        <p:spPr>
-          <a:xfrm>
-            <a:off x="9049512" y="3511296"/>
-            <a:ext cx="646176" cy="310896"/>
-          </a:xfrm>
-          <a:prstGeom prst="rect">
-            <a:avLst/>
-          </a:prstGeom>
-          <a:noFill/>
-          <a:ln/>
-        </p:spPr>
-        <p:txBody>
-          <a:bodyPr wrap="square" lIns="0" tIns="0" rIns="0" bIns="0" rtlCol="0" anchor="ctr">
-            <a:normAutofit/>
-          </a:bodyPr>
-          <a:lstStyle/>
-          <a:p>
-            <a:pPr algn="ctr" indent="0" marL="0">
-              <a:buNone/>
-            </a:pPr>
-            <a:r>
-              <a:rPr lang="en-US" sz="1500" b="1" dirty="0">
-                <a:solidFill>
-                  <a:srgbClr val="FFFFFF"/>
-                </a:solidFill>
-                <a:latin typeface="Aptos" pitchFamily="34" charset="0"/>
-                <a:ea typeface="Aptos" pitchFamily="34" charset="-122"/>
-                <a:cs typeface="Aptos" pitchFamily="34" charset="-120"/>
-              </a:rPr>
-              <a:t>Do</a:t>
-            </a:r>
-            <a:endParaRPr lang="en-US" sz="1500" dirty="0"/>
-          </a:p>
-        </p:txBody>
-      </p:sp>
-      <p:sp>
-        <p:nvSpPr>
-          <p:cNvPr id="18" name="Shape 16"/>
-          <p:cNvSpPr/>
-          <p:nvPr/>
-        </p:nvSpPr>
-        <p:spPr>
-          <a:xfrm>
-            <a:off x="10024872" y="3319272"/>
-            <a:ext cx="792480" cy="749808"/>
-          </a:xfrm>
-          <a:prstGeom prst="roundRect">
-            <a:avLst>
-              <a:gd name="adj" fmla="val 14634"/>
-            </a:avLst>
-          </a:prstGeom>
-          <a:solidFill>
-            <a:srgbClr val="D69A2D"/>
-          </a:solidFill>
-          <a:ln w="12700">
-            <a:solidFill>
-              <a:srgbClr val="D69A2D"/>
-            </a:solidFill>
-            <a:prstDash val="solid"/>
-          </a:ln>
-        </p:spPr>
-      </p:sp>
-      <p:sp>
-        <p:nvSpPr>
-          <p:cNvPr id="19" name="Text 17"/>
-          <p:cNvSpPr/>
-          <p:nvPr/>
-        </p:nvSpPr>
-        <p:spPr>
-          <a:xfrm>
-            <a:off x="10098024" y="3511296"/>
-            <a:ext cx="646176" cy="310896"/>
-          </a:xfrm>
-          <a:prstGeom prst="rect">
-            <a:avLst/>
-          </a:prstGeom>
-          <a:noFill/>
-          <a:ln/>
-        </p:spPr>
-        <p:txBody>
-          <a:bodyPr wrap="square" lIns="0" tIns="0" rIns="0" bIns="0" rtlCol="0" anchor="ctr">
-            <a:normAutofit/>
-          </a:bodyPr>
-          <a:lstStyle/>
-          <a:p>
-            <a:pPr algn="ctr" indent="0" marL="0">
-              <a:buNone/>
-            </a:pPr>
-            <a:r>
-              <a:rPr lang="en-US" sz="1500" b="1" dirty="0">
-                <a:solidFill>
-                  <a:srgbClr val="FFFFFF"/>
-                </a:solidFill>
-                <a:latin typeface="Aptos" pitchFamily="34" charset="0"/>
-                <a:ea typeface="Aptos" pitchFamily="34" charset="-122"/>
-                <a:cs typeface="Aptos" pitchFamily="34" charset="-120"/>
-              </a:rPr>
-              <a:t>Review</a:t>
-            </a:r>
-            <a:endParaRPr lang="en-US" sz="1500" dirty="0"/>
-          </a:p>
-        </p:txBody>
-      </p:sp>
-      <p:sp>
-        <p:nvSpPr>
-          <p:cNvPr id="20" name="Shape 18"/>
-          <p:cNvSpPr/>
-          <p:nvPr/>
-        </p:nvSpPr>
-        <p:spPr>
-          <a:xfrm>
-            <a:off x="8293608" y="4389120"/>
-            <a:ext cx="2157984" cy="0"/>
-          </a:xfrm>
-          <a:prstGeom prst="line">
-            <a:avLst/>
-          </a:prstGeom>
-          <a:noFill/>
-          <a:ln w="25400">
-            <a:solidFill>
-              <a:srgbClr val="8ABBD8"/>
-            </a:solidFill>
-            <a:prstDash val="solid"/>
-          </a:ln>
-        </p:spPr>
-      </p:sp>
-      <p:sp>
-        <p:nvSpPr>
-          <p:cNvPr id="21" name="Text 19"/>
-          <p:cNvSpPr/>
-          <p:nvPr/>
-        </p:nvSpPr>
-        <p:spPr>
-          <a:xfrm>
-            <a:off x="7909560" y="3977640"/>
-            <a:ext cx="2926080" cy="182880"/>
-          </a:xfrm>
-          <a:prstGeom prst="rect">
-            <a:avLst/>
-          </a:prstGeom>
-          <a:noFill/>
-          <a:ln/>
-        </p:spPr>
-        <p:txBody>
-          <a:bodyPr wrap="square" lIns="0" tIns="0" rIns="0" bIns="0" rtlCol="0" anchor="ctr"/>
-          <a:lstStyle/>
-          <a:p>
-            <a:pPr algn="ctr" indent="0" marL="0">
-              <a:buNone/>
-            </a:pPr>
-            <a:r>
-              <a:rPr lang="en-US" sz="1000" dirty="0">
-                <a:solidFill>
-                  <a:srgbClr val="003A63"/>
-                </a:solidFill>
-                <a:latin typeface="Aptos" pitchFamily="34" charset="0"/>
-                <a:ea typeface="Aptos" pitchFamily="34" charset="-122"/>
-                <a:cs typeface="Aptos" pitchFamily="34" charset="-120"/>
-              </a:rPr>
-              <a:t>Dependencies visible</a:t>
-            </a:r>
-            <a:endParaRPr lang="en-US" sz="1000" dirty="0"/>
-          </a:p>
-        </p:txBody>
-      </p:sp>
-      <p:sp>
-        <p:nvSpPr>
-          <p:cNvPr id="22" name="Shape 20"/>
           <p:cNvSpPr/>
           <p:nvPr/>
         </p:nvSpPr>
@@ -5628,7 +5139,7 @@
       </p:sp>
       <p:sp>
         <p:nvSpPr>
-          <p:cNvPr id="23" name="Text 21"/>
+          <p:cNvPr id="17" name="Text 15"/>
           <p:cNvSpPr/>
           <p:nvPr/>
         </p:nvSpPr>
@@ -5667,7 +5178,7 @@
       </p:sp>
       <p:sp>
         <p:nvSpPr>
-          <p:cNvPr id="24" name="Text 22"/>
+          <p:cNvPr id="18" name="Text 16"/>
           <p:cNvSpPr/>
           <p:nvPr/>
         </p:nvSpPr>
@@ -6175,13 +5686,11 @@
             </a:avLst>
           </a:prstGeom>
           <a:solidFill>
-            <a:srgbClr val="FFFFFF">
-              <a:alpha val="88000"/>
-            </a:srgbClr>
+            <a:srgbClr val="FFFFFF"/>
           </a:solidFill>
           <a:ln w="12700">
             <a:solidFill>
-              <a:srgbClr val="D6E8F2"/>
+              <a:srgbClr val="B9D7E6"/>
             </a:solidFill>
             <a:prstDash val="solid"/>
           </a:ln>
@@ -6189,26 +5698,42 @@
       </p:sp>
       <p:sp>
         <p:nvSpPr>
-          <p:cNvPr id="14" name="Shape 12"/>
-          <p:cNvSpPr/>
-          <p:nvPr/>
-        </p:nvSpPr>
-        <p:spPr>
-          <a:xfrm>
-            <a:off x="8046720" y="3108960"/>
-            <a:ext cx="2651760" cy="896112"/>
-          </a:xfrm>
-          <a:prstGeom prst="arc">
-            <a:avLst/>
-          </a:prstGeom>
-          <a:noFill/>
-          <a:ln w="25400">
-            <a:solidFill>
-              <a:srgbClr val="0068B7"/>
-            </a:solidFill>
-            <a:prstDash val="solid"/>
-          </a:ln>
-        </p:spPr>
+          <p:cNvPr id="14" name="Text 12"/>
+          <p:cNvSpPr/>
+          <p:nvPr/>
+        </p:nvSpPr>
+        <p:spPr>
+          <a:xfrm>
+            <a:off x="7799832" y="2935224"/>
+            <a:ext cx="3145536" cy="256032"/>
+          </a:xfrm>
+          <a:prstGeom prst="rect">
+            <a:avLst/>
+          </a:prstGeom>
+          <a:noFill/>
+          <a:ln/>
+        </p:spPr>
+        <p:txBody>
+          <a:bodyPr wrap="square" lIns="0" tIns="0" rIns="0" bIns="0" rtlCol="0" anchor="ctr"/>
+          <a:lstStyle/>
+          <a:p>
+            <a:pPr indent="0" marL="0">
+              <a:buNone/>
+            </a:pPr>
+            <a:r>
+              <a:rPr lang="en-US" sz="1300" b="1" dirty="0">
+                <a:solidFill>
+                  <a:srgbClr val="0068B7"/>
+                </a:solidFill>
+                <a:latin typeface="Aptos" pitchFamily="34" charset="0"/>
+                <a:ea typeface="Aptos" pitchFamily="34" charset="-122"/>
+                <a:cs typeface="Aptos" pitchFamily="34" charset="-120"/>
+              </a:rPr>
+              <a:t>Concept checkpoints</a:t>
+            </a:r>
+            <a:endParaRPr lang="en-US" sz="1300" dirty="0"/>
+          </a:p>
+        </p:txBody>
       </p:sp>
       <p:sp>
         <p:nvSpPr>
@@ -6218,102 +5743,67 @@
         </p:nvSpPr>
         <p:spPr>
           <a:xfrm>
-            <a:off x="7909560" y="3099816"/>
-            <a:ext cx="2926080" cy="256032"/>
-          </a:xfrm>
-          <a:prstGeom prst="rect">
-            <a:avLst/>
-          </a:prstGeom>
-          <a:noFill/>
-          <a:ln/>
-        </p:spPr>
-        <p:txBody>
-          <a:bodyPr wrap="square" lIns="0" tIns="0" rIns="0" bIns="0" rtlCol="0" anchor="ctr"/>
-          <a:lstStyle/>
-          <a:p>
-            <a:pPr algn="ctr" indent="0" marL="0">
-              <a:buNone/>
-            </a:pPr>
-            <a:r>
-              <a:rPr lang="en-US" sz="1500" b="1" dirty="0">
-                <a:solidFill>
-                  <a:srgbClr val="003A63"/>
-                </a:solidFill>
-                <a:latin typeface="Aptos" pitchFamily="34" charset="0"/>
-                <a:ea typeface="Aptos" pitchFamily="34" charset="-122"/>
-                <a:cs typeface="Aptos" pitchFamily="34" charset="-120"/>
-              </a:rPr>
-              <a:t>Risk</a:t>
-            </a:r>
-            <a:endParaRPr lang="en-US" sz="1500" dirty="0"/>
+            <a:off x="7818120" y="3300984"/>
+            <a:ext cx="3090672" cy="877824"/>
+          </a:xfrm>
+          <a:prstGeom prst="rect">
+            <a:avLst/>
+          </a:prstGeom>
+          <a:noFill/>
+          <a:ln/>
+        </p:spPr>
+        <p:txBody>
+          <a:bodyPr wrap="square" lIns="254" tIns="254" rIns="254" bIns="254" rtlCol="0" anchor="t">
+            <a:normAutofit/>
+          </a:bodyPr>
+          <a:lstStyle/>
+          <a:p>
+            <a:r>
+              <a:rPr lang="en-US" sz="1380" dirty="0">
+                <a:solidFill>
+                  <a:srgbClr val="17364A"/>
+                </a:solidFill>
+                <a:latin typeface="Aptos" pitchFamily="34" charset="0"/>
+                <a:ea typeface="Aptos" pitchFamily="34" charset="-122"/>
+                <a:cs typeface="Aptos" pitchFamily="34" charset="-120"/>
+              </a:rPr>
+              <a:t>Guardrails include least-privilege scopes, role-based access, periodic access review, and.</a:t>
+            </a:r>
+            <a:endParaRPr lang="en-US" sz="1380" dirty="0"/>
+          </a:p>
+          <a:p>
+            <a:r>
+              <a:rPr lang="en-US" sz="1380" dirty="0">
+                <a:solidFill>
+                  <a:srgbClr val="17364A"/>
+                </a:solidFill>
+                <a:latin typeface="Aptos" pitchFamily="34" charset="0"/>
+                <a:ea typeface="Aptos" pitchFamily="34" charset="-122"/>
+                <a:cs typeface="Aptos" pitchFamily="34" charset="-120"/>
+              </a:rPr>
+              <a:t>Unreviewed write-back.</a:t>
+            </a:r>
+            <a:endParaRPr lang="en-US" sz="1380" dirty="0"/>
+          </a:p>
+          <a:p>
+            <a:r>
+              <a:rPr lang="en-US" sz="1380" dirty="0">
+                <a:solidFill>
+                  <a:srgbClr val="17364A"/>
+                </a:solidFill>
+                <a:latin typeface="Aptos" pitchFamily="34" charset="0"/>
+                <a:ea typeface="Aptos" pitchFamily="34" charset="-122"/>
+                <a:cs typeface="Aptos" pitchFamily="34" charset="-120"/>
+              </a:rPr>
+              <a:t>Automated updates can alter official records without adequate oversight.</a:t>
+            </a:r>
+            <a:endParaRPr lang="en-US" sz="1380" dirty="0"/>
           </a:p>
         </p:txBody>
       </p:sp>
       <p:sp>
         <p:nvSpPr>
           <p:cNvPr id="16" name="Shape 14"/>
-          <p:cNvSpPr/>
-          <p:nvPr/>
-        </p:nvSpPr>
-        <p:spPr>
-          <a:xfrm>
-            <a:off x="8366760" y="3639312"/>
-            <a:ext cx="2011680" cy="0"/>
-          </a:xfrm>
-          <a:prstGeom prst="line">
-            <a:avLst/>
-          </a:prstGeom>
-          <a:noFill/>
-          <a:ln w="63500">
-            <a:solidFill>
-              <a:srgbClr val="2F8A28"/>
-            </a:solidFill>
-            <a:prstDash val="solid"/>
-          </a:ln>
-        </p:spPr>
-      </p:sp>
-      <p:sp>
-        <p:nvSpPr>
-          <p:cNvPr id="17" name="Text 15"/>
-          <p:cNvSpPr/>
-          <p:nvPr/>
-        </p:nvSpPr>
-        <p:spPr>
-          <a:xfrm>
-            <a:off x="7909560" y="3849624"/>
-            <a:ext cx="2926080" cy="164592"/>
-          </a:xfrm>
-          <a:prstGeom prst="rect">
-            <a:avLst/>
-          </a:prstGeom>
-          <a:noFill/>
-          <a:ln/>
-        </p:spPr>
-        <p:txBody>
-          <a:bodyPr wrap="square" lIns="0" tIns="0" rIns="0" bIns="0" rtlCol="0" anchor="ctr"/>
-          <a:lstStyle/>
-          <a:p>
-            <a:pPr algn="ctr" indent="0" marL="0">
-              <a:buNone/>
-            </a:pPr>
-            <a:r>
-              <a:rPr lang="en-US" sz="900" dirty="0">
-                <a:solidFill>
-                  <a:srgbClr val="003A63"/>
-                </a:solidFill>
-                <a:latin typeface="Aptos" pitchFamily="34" charset="0"/>
-                <a:ea typeface="Aptos" pitchFamily="34" charset="-122"/>
-                <a:cs typeface="Aptos" pitchFamily="34" charset="-120"/>
-              </a:rPr>
-              <a:t>Human review</a:t>
-            </a:r>
-            <a:endParaRPr lang="en-US" sz="900" dirty="0"/>
-          </a:p>
-        </p:txBody>
-      </p:sp>
-      <p:sp>
-        <p:nvSpPr>
-          <p:cNvPr id="18" name="Shape 16"/>
           <p:cNvSpPr/>
           <p:nvPr/>
         </p:nvSpPr>
@@ -6340,7 +5830,7 @@
       </p:sp>
       <p:sp>
         <p:nvSpPr>
-          <p:cNvPr id="19" name="Text 17"/>
+          <p:cNvPr id="17" name="Text 15"/>
           <p:cNvSpPr/>
           <p:nvPr/>
         </p:nvSpPr>
@@ -6379,7 +5869,7 @@
       </p:sp>
       <p:sp>
         <p:nvSpPr>
-          <p:cNvPr id="20" name="Text 18"/>
+          <p:cNvPr id="18" name="Text 16"/>
           <p:cNvSpPr/>
           <p:nvPr/>
         </p:nvSpPr>
@@ -6887,13 +6377,11 @@
             </a:avLst>
           </a:prstGeom>
           <a:solidFill>
-            <a:srgbClr val="FFFFFF">
-              <a:alpha val="88000"/>
-            </a:srgbClr>
+            <a:srgbClr val="FFFFFF"/>
           </a:solidFill>
           <a:ln w="12700">
             <a:solidFill>
-              <a:srgbClr val="D6E8F2"/>
+              <a:srgbClr val="B9D7E6"/>
             </a:solidFill>
             <a:prstDash val="solid"/>
           </a:ln>
@@ -6901,26 +6389,42 @@
       </p:sp>
       <p:sp>
         <p:nvSpPr>
-          <p:cNvPr id="14" name="Shape 12"/>
-          <p:cNvSpPr/>
-          <p:nvPr/>
-        </p:nvSpPr>
-        <p:spPr>
-          <a:xfrm>
-            <a:off x="8046720" y="3108960"/>
-            <a:ext cx="2651760" cy="896112"/>
-          </a:xfrm>
-          <a:prstGeom prst="arc">
-            <a:avLst/>
-          </a:prstGeom>
-          <a:noFill/>
-          <a:ln w="25400">
-            <a:solidFill>
-              <a:srgbClr val="0068B7"/>
-            </a:solidFill>
-            <a:prstDash val="solid"/>
-          </a:ln>
-        </p:spPr>
+          <p:cNvPr id="14" name="Text 12"/>
+          <p:cNvSpPr/>
+          <p:nvPr/>
+        </p:nvSpPr>
+        <p:spPr>
+          <a:xfrm>
+            <a:off x="7799832" y="2935224"/>
+            <a:ext cx="3145536" cy="256032"/>
+          </a:xfrm>
+          <a:prstGeom prst="rect">
+            <a:avLst/>
+          </a:prstGeom>
+          <a:noFill/>
+          <a:ln/>
+        </p:spPr>
+        <p:txBody>
+          <a:bodyPr wrap="square" lIns="0" tIns="0" rIns="0" bIns="0" rtlCol="0" anchor="ctr"/>
+          <a:lstStyle/>
+          <a:p>
+            <a:pPr indent="0" marL="0">
+              <a:buNone/>
+            </a:pPr>
+            <a:r>
+              <a:rPr lang="en-US" sz="1300" b="1" dirty="0">
+                <a:solidFill>
+                  <a:srgbClr val="0068B7"/>
+                </a:solidFill>
+                <a:latin typeface="Aptos" pitchFamily="34" charset="0"/>
+                <a:ea typeface="Aptos" pitchFamily="34" charset="-122"/>
+                <a:cs typeface="Aptos" pitchFamily="34" charset="-120"/>
+              </a:rPr>
+              <a:t>Concept checkpoints</a:t>
+            </a:r>
+            <a:endParaRPr lang="en-US" sz="1300" dirty="0"/>
+          </a:p>
+        </p:txBody>
       </p:sp>
       <p:sp>
         <p:nvSpPr>
@@ -6930,102 +6434,67 @@
         </p:nvSpPr>
         <p:spPr>
           <a:xfrm>
-            <a:off x="7909560" y="3099816"/>
-            <a:ext cx="2926080" cy="256032"/>
-          </a:xfrm>
-          <a:prstGeom prst="rect">
-            <a:avLst/>
-          </a:prstGeom>
-          <a:noFill/>
-          <a:ln/>
-        </p:spPr>
-        <p:txBody>
-          <a:bodyPr wrap="square" lIns="0" tIns="0" rIns="0" bIns="0" rtlCol="0" anchor="ctr"/>
-          <a:lstStyle/>
-          <a:p>
-            <a:pPr algn="ctr" indent="0" marL="0">
-              <a:buNone/>
-            </a:pPr>
-            <a:r>
-              <a:rPr lang="en-US" sz="1500" b="1" dirty="0">
-                <a:solidFill>
-                  <a:srgbClr val="003A63"/>
-                </a:solidFill>
-                <a:latin typeface="Aptos" pitchFamily="34" charset="0"/>
-                <a:ea typeface="Aptos" pitchFamily="34" charset="-122"/>
-                <a:cs typeface="Aptos" pitchFamily="34" charset="-120"/>
-              </a:rPr>
-              <a:t>Risk</a:t>
-            </a:r>
-            <a:endParaRPr lang="en-US" sz="1500" dirty="0"/>
+            <a:off x="7818120" y="3300984"/>
+            <a:ext cx="3090672" cy="877824"/>
+          </a:xfrm>
+          <a:prstGeom prst="rect">
+            <a:avLst/>
+          </a:prstGeom>
+          <a:noFill/>
+          <a:ln/>
+        </p:spPr>
+        <p:txBody>
+          <a:bodyPr wrap="square" lIns="254" tIns="254" rIns="254" bIns="254" rtlCol="0" anchor="t">
+            <a:normAutofit/>
+          </a:bodyPr>
+          <a:lstStyle/>
+          <a:p>
+            <a:r>
+              <a:rPr lang="en-US" sz="1380" dirty="0">
+                <a:solidFill>
+                  <a:srgbClr val="17364A"/>
+                </a:solidFill>
+                <a:latin typeface="Aptos" pitchFamily="34" charset="0"/>
+                <a:ea typeface="Aptos" pitchFamily="34" charset="-122"/>
+                <a:cs typeface="Aptos" pitchFamily="34" charset="-120"/>
+              </a:rPr>
+              <a:t>Poor error handling.</a:t>
+            </a:r>
+            <a:endParaRPr lang="en-US" sz="1380" dirty="0"/>
+          </a:p>
+          <a:p>
+            <a:r>
+              <a:rPr lang="en-US" sz="1380" dirty="0">
+                <a:solidFill>
+                  <a:srgbClr val="17364A"/>
+                </a:solidFill>
+                <a:latin typeface="Aptos" pitchFamily="34" charset="0"/>
+                <a:ea typeface="Aptos" pitchFamily="34" charset="-122"/>
+                <a:cs typeface="Aptos" pitchFamily="34" charset="-120"/>
+              </a:rPr>
+              <a:t>Failed API calls may produce incomplete workflows.</a:t>
+            </a:r>
+            <a:endParaRPr lang="en-US" sz="1380" dirty="0"/>
+          </a:p>
+          <a:p>
+            <a:r>
+              <a:rPr lang="en-US" sz="1380" dirty="0">
+                <a:solidFill>
+                  <a:srgbClr val="17364A"/>
+                </a:solidFill>
+                <a:latin typeface="Aptos" pitchFamily="34" charset="0"/>
+                <a:ea typeface="Aptos" pitchFamily="34" charset="-122"/>
+                <a:cs typeface="Aptos" pitchFamily="34" charset="-120"/>
+              </a:rPr>
+              <a:t>Guardrails include status indicators, retry rules, exception queues, and staff notification.</a:t>
+            </a:r>
+            <a:endParaRPr lang="en-US" sz="1380" dirty="0"/>
           </a:p>
         </p:txBody>
       </p:sp>
       <p:sp>
         <p:nvSpPr>
           <p:cNvPr id="16" name="Shape 14"/>
-          <p:cNvSpPr/>
-          <p:nvPr/>
-        </p:nvSpPr>
-        <p:spPr>
-          <a:xfrm>
-            <a:off x="8366760" y="3639312"/>
-            <a:ext cx="2011680" cy="0"/>
-          </a:xfrm>
-          <a:prstGeom prst="line">
-            <a:avLst/>
-          </a:prstGeom>
-          <a:noFill/>
-          <a:ln w="63500">
-            <a:solidFill>
-              <a:srgbClr val="2F8A28"/>
-            </a:solidFill>
-            <a:prstDash val="solid"/>
-          </a:ln>
-        </p:spPr>
-      </p:sp>
-      <p:sp>
-        <p:nvSpPr>
-          <p:cNvPr id="17" name="Text 15"/>
-          <p:cNvSpPr/>
-          <p:nvPr/>
-        </p:nvSpPr>
-        <p:spPr>
-          <a:xfrm>
-            <a:off x="7909560" y="3849624"/>
-            <a:ext cx="2926080" cy="164592"/>
-          </a:xfrm>
-          <a:prstGeom prst="rect">
-            <a:avLst/>
-          </a:prstGeom>
-          <a:noFill/>
-          <a:ln/>
-        </p:spPr>
-        <p:txBody>
-          <a:bodyPr wrap="square" lIns="0" tIns="0" rIns="0" bIns="0" rtlCol="0" anchor="ctr"/>
-          <a:lstStyle/>
-          <a:p>
-            <a:pPr algn="ctr" indent="0" marL="0">
-              <a:buNone/>
-            </a:pPr>
-            <a:r>
-              <a:rPr lang="en-US" sz="900" dirty="0">
-                <a:solidFill>
-                  <a:srgbClr val="003A63"/>
-                </a:solidFill>
-                <a:latin typeface="Aptos" pitchFamily="34" charset="0"/>
-                <a:ea typeface="Aptos" pitchFamily="34" charset="-122"/>
-                <a:cs typeface="Aptos" pitchFamily="34" charset="-120"/>
-              </a:rPr>
-              <a:t>Human review</a:t>
-            </a:r>
-            <a:endParaRPr lang="en-US" sz="900" dirty="0"/>
-          </a:p>
-        </p:txBody>
-      </p:sp>
-      <p:sp>
-        <p:nvSpPr>
-          <p:cNvPr id="18" name="Shape 16"/>
           <p:cNvSpPr/>
           <p:nvPr/>
         </p:nvSpPr>
@@ -7052,7 +6521,7 @@
       </p:sp>
       <p:sp>
         <p:nvSpPr>
-          <p:cNvPr id="19" name="Text 17"/>
+          <p:cNvPr id="17" name="Text 15"/>
           <p:cNvSpPr/>
           <p:nvPr/>
         </p:nvSpPr>
@@ -7091,7 +6560,7 @@
       </p:sp>
       <p:sp>
         <p:nvSpPr>
-          <p:cNvPr id="20" name="Text 18"/>
+          <p:cNvPr id="18" name="Text 16"/>
           <p:cNvSpPr/>
           <p:nvPr/>
         </p:nvSpPr>
@@ -7599,13 +7068,11 @@
             </a:avLst>
           </a:prstGeom>
           <a:solidFill>
-            <a:srgbClr val="FFFFFF">
-              <a:alpha val="88000"/>
-            </a:srgbClr>
+            <a:srgbClr val="FFFFFF"/>
           </a:solidFill>
           <a:ln w="12700">
             <a:solidFill>
-              <a:srgbClr val="D6E8F2"/>
+              <a:srgbClr val="B9D7E6"/>
             </a:solidFill>
             <a:prstDash val="solid"/>
           </a:ln>
@@ -7613,30 +7080,42 @@
       </p:sp>
       <p:sp>
         <p:nvSpPr>
-          <p:cNvPr id="14" name="Shape 12"/>
-          <p:cNvSpPr/>
-          <p:nvPr/>
-        </p:nvSpPr>
-        <p:spPr>
-          <a:xfrm>
-            <a:off x="7927848" y="3319272"/>
-            <a:ext cx="792480" cy="749808"/>
-          </a:xfrm>
-          <a:prstGeom prst="roundRect">
-            <a:avLst>
-              <a:gd name="adj" fmla="val 14634"/>
-            </a:avLst>
-          </a:prstGeom>
-          <a:solidFill>
-            <a:srgbClr val="0068B7"/>
-          </a:solidFill>
-          <a:ln w="12700">
-            <a:solidFill>
-              <a:srgbClr val="0068B7"/>
-            </a:solidFill>
-            <a:prstDash val="solid"/>
-          </a:ln>
-        </p:spPr>
+          <p:cNvPr id="14" name="Text 12"/>
+          <p:cNvSpPr/>
+          <p:nvPr/>
+        </p:nvSpPr>
+        <p:spPr>
+          <a:xfrm>
+            <a:off x="7799832" y="2935224"/>
+            <a:ext cx="3145536" cy="256032"/>
+          </a:xfrm>
+          <a:prstGeom prst="rect">
+            <a:avLst/>
+          </a:prstGeom>
+          <a:noFill/>
+          <a:ln/>
+        </p:spPr>
+        <p:txBody>
+          <a:bodyPr wrap="square" lIns="0" tIns="0" rIns="0" bIns="0" rtlCol="0" anchor="ctr"/>
+          <a:lstStyle/>
+          <a:p>
+            <a:pPr indent="0" marL="0">
+              <a:buNone/>
+            </a:pPr>
+            <a:r>
+              <a:rPr lang="en-US" sz="1300" b="1" dirty="0">
+                <a:solidFill>
+                  <a:srgbClr val="0068B7"/>
+                </a:solidFill>
+                <a:latin typeface="Aptos" pitchFamily="34" charset="0"/>
+                <a:ea typeface="Aptos" pitchFamily="34" charset="-122"/>
+                <a:cs typeface="Aptos" pitchFamily="34" charset="-120"/>
+              </a:rPr>
+              <a:t>Concept checkpoints</a:t>
+            </a:r>
+            <a:endParaRPr lang="en-US" sz="1300" dirty="0"/>
+          </a:p>
+        </p:txBody>
       </p:sp>
       <p:sp>
         <p:nvSpPr>
@@ -7646,240 +7125,67 @@
         </p:nvSpPr>
         <p:spPr>
           <a:xfrm>
-            <a:off x="8001000" y="3511296"/>
-            <a:ext cx="646176" cy="310896"/>
-          </a:xfrm>
-          <a:prstGeom prst="rect">
-            <a:avLst/>
-          </a:prstGeom>
-          <a:noFill/>
-          <a:ln/>
-        </p:spPr>
-        <p:txBody>
-          <a:bodyPr wrap="square" lIns="0" tIns="0" rIns="0" bIns="0" rtlCol="0" anchor="ctr">
+            <a:off x="7818120" y="3300984"/>
+            <a:ext cx="3090672" cy="877824"/>
+          </a:xfrm>
+          <a:prstGeom prst="rect">
+            <a:avLst/>
+          </a:prstGeom>
+          <a:noFill/>
+          <a:ln/>
+        </p:spPr>
+        <p:txBody>
+          <a:bodyPr wrap="square" lIns="254" tIns="254" rIns="254" bIns="254" rtlCol="0" anchor="t">
             <a:normAutofit/>
           </a:bodyPr>
           <a:lstStyle/>
           <a:p>
-            <a:pPr algn="ctr" indent="0" marL="0">
-              <a:buNone/>
-            </a:pPr>
-            <a:r>
-              <a:rPr lang="en-US" sz="1500" b="1" dirty="0">
-                <a:solidFill>
-                  <a:srgbClr val="FFFFFF"/>
-                </a:solidFill>
-                <a:latin typeface="Aptos" pitchFamily="34" charset="0"/>
-                <a:ea typeface="Aptos" pitchFamily="34" charset="-122"/>
-                <a:cs typeface="Aptos" pitchFamily="34" charset="-120"/>
-              </a:rPr>
-              <a:t>Plan</a:t>
-            </a:r>
-            <a:endParaRPr lang="en-US" sz="1500" dirty="0"/>
+            <a:r>
+              <a:rPr lang="en-US" sz="1380" dirty="0">
+                <a:solidFill>
+                  <a:srgbClr val="17364A"/>
+                </a:solidFill>
+                <a:latin typeface="Aptos" pitchFamily="34" charset="0"/>
+                <a:ea typeface="Aptos" pitchFamily="34" charset="-122"/>
+                <a:cs typeface="Aptos" pitchFamily="34" charset="-120"/>
+              </a:rPr>
+              <a:t>Generative AI may use APIs to retrieve source material for summaries.</a:t>
+            </a:r>
+            <a:endParaRPr lang="en-US" sz="1380" dirty="0"/>
+          </a:p>
+          <a:p>
+            <a:r>
+              <a:rPr lang="en-US" sz="1380" dirty="0">
+                <a:solidFill>
+                  <a:srgbClr val="17364A"/>
+                </a:solidFill>
+                <a:latin typeface="Aptos" pitchFamily="34" charset="0"/>
+                <a:ea typeface="Aptos" pitchFamily="34" charset="-122"/>
+                <a:cs typeface="Aptos" pitchFamily="34" charset="-120"/>
+              </a:rPr>
+              <a:t>Predictive tools may call services that return risk scores or features.</a:t>
+            </a:r>
+            <a:endParaRPr lang="en-US" sz="1380" dirty="0"/>
+          </a:p>
+          <a:p>
+            <a:r>
+              <a:rPr lang="en-US" sz="1380" dirty="0">
+                <a:solidFill>
+                  <a:srgbClr val="17364A"/>
+                </a:solidFill>
+                <a:latin typeface="Aptos" pitchFamily="34" charset="0"/>
+                <a:ea typeface="Aptos" pitchFamily="34" charset="-122"/>
+                <a:cs typeface="Aptos" pitchFamily="34" charset="-120"/>
+              </a:rPr>
+              <a:t>RAG systems may use APIs to retrieve approved documents.</a:t>
+            </a:r>
+            <a:endParaRPr lang="en-US" sz="1380" dirty="0"/>
           </a:p>
         </p:txBody>
       </p:sp>
       <p:sp>
         <p:nvSpPr>
           <p:cNvPr id="16" name="Shape 14"/>
-          <p:cNvSpPr/>
-          <p:nvPr/>
-        </p:nvSpPr>
-        <p:spPr>
-          <a:xfrm>
-            <a:off x="8976360" y="3319272"/>
-            <a:ext cx="792480" cy="749808"/>
-          </a:xfrm>
-          <a:prstGeom prst="roundRect">
-            <a:avLst>
-              <a:gd name="adj" fmla="val 14634"/>
-            </a:avLst>
-          </a:prstGeom>
-          <a:solidFill>
-            <a:srgbClr val="2F8A28"/>
-          </a:solidFill>
-          <a:ln w="12700">
-            <a:solidFill>
-              <a:srgbClr val="2F8A28"/>
-            </a:solidFill>
-            <a:prstDash val="solid"/>
-          </a:ln>
-        </p:spPr>
-      </p:sp>
-      <p:sp>
-        <p:nvSpPr>
-          <p:cNvPr id="17" name="Text 15"/>
-          <p:cNvSpPr/>
-          <p:nvPr/>
-        </p:nvSpPr>
-        <p:spPr>
-          <a:xfrm>
-            <a:off x="9049512" y="3511296"/>
-            <a:ext cx="646176" cy="310896"/>
-          </a:xfrm>
-          <a:prstGeom prst="rect">
-            <a:avLst/>
-          </a:prstGeom>
-          <a:noFill/>
-          <a:ln/>
-        </p:spPr>
-        <p:txBody>
-          <a:bodyPr wrap="square" lIns="0" tIns="0" rIns="0" bIns="0" rtlCol="0" anchor="ctr">
-            <a:normAutofit/>
-          </a:bodyPr>
-          <a:lstStyle/>
-          <a:p>
-            <a:pPr algn="ctr" indent="0" marL="0">
-              <a:buNone/>
-            </a:pPr>
-            <a:r>
-              <a:rPr lang="en-US" sz="1500" b="1" dirty="0">
-                <a:solidFill>
-                  <a:srgbClr val="FFFFFF"/>
-                </a:solidFill>
-                <a:latin typeface="Aptos" pitchFamily="34" charset="0"/>
-                <a:ea typeface="Aptos" pitchFamily="34" charset="-122"/>
-                <a:cs typeface="Aptos" pitchFamily="34" charset="-120"/>
-              </a:rPr>
-              <a:t>Do</a:t>
-            </a:r>
-            <a:endParaRPr lang="en-US" sz="1500" dirty="0"/>
-          </a:p>
-        </p:txBody>
-      </p:sp>
-      <p:sp>
-        <p:nvSpPr>
-          <p:cNvPr id="18" name="Shape 16"/>
-          <p:cNvSpPr/>
-          <p:nvPr/>
-        </p:nvSpPr>
-        <p:spPr>
-          <a:xfrm>
-            <a:off x="10024872" y="3319272"/>
-            <a:ext cx="792480" cy="749808"/>
-          </a:xfrm>
-          <a:prstGeom prst="roundRect">
-            <a:avLst>
-              <a:gd name="adj" fmla="val 14634"/>
-            </a:avLst>
-          </a:prstGeom>
-          <a:solidFill>
-            <a:srgbClr val="D69A2D"/>
-          </a:solidFill>
-          <a:ln w="12700">
-            <a:solidFill>
-              <a:srgbClr val="D69A2D"/>
-            </a:solidFill>
-            <a:prstDash val="solid"/>
-          </a:ln>
-        </p:spPr>
-      </p:sp>
-      <p:sp>
-        <p:nvSpPr>
-          <p:cNvPr id="19" name="Text 17"/>
-          <p:cNvSpPr/>
-          <p:nvPr/>
-        </p:nvSpPr>
-        <p:spPr>
-          <a:xfrm>
-            <a:off x="10098024" y="3511296"/>
-            <a:ext cx="646176" cy="310896"/>
-          </a:xfrm>
-          <a:prstGeom prst="rect">
-            <a:avLst/>
-          </a:prstGeom>
-          <a:noFill/>
-          <a:ln/>
-        </p:spPr>
-        <p:txBody>
-          <a:bodyPr wrap="square" lIns="0" tIns="0" rIns="0" bIns="0" rtlCol="0" anchor="ctr">
-            <a:normAutofit/>
-          </a:bodyPr>
-          <a:lstStyle/>
-          <a:p>
-            <a:pPr algn="ctr" indent="0" marL="0">
-              <a:buNone/>
-            </a:pPr>
-            <a:r>
-              <a:rPr lang="en-US" sz="1500" b="1" dirty="0">
-                <a:solidFill>
-                  <a:srgbClr val="FFFFFF"/>
-                </a:solidFill>
-                <a:latin typeface="Aptos" pitchFamily="34" charset="0"/>
-                <a:ea typeface="Aptos" pitchFamily="34" charset="-122"/>
-                <a:cs typeface="Aptos" pitchFamily="34" charset="-120"/>
-              </a:rPr>
-              <a:t>Review</a:t>
-            </a:r>
-            <a:endParaRPr lang="en-US" sz="1500" dirty="0"/>
-          </a:p>
-        </p:txBody>
-      </p:sp>
-      <p:sp>
-        <p:nvSpPr>
-          <p:cNvPr id="20" name="Shape 18"/>
-          <p:cNvSpPr/>
-          <p:nvPr/>
-        </p:nvSpPr>
-        <p:spPr>
-          <a:xfrm>
-            <a:off x="8293608" y="4389120"/>
-            <a:ext cx="2157984" cy="0"/>
-          </a:xfrm>
-          <a:prstGeom prst="line">
-            <a:avLst/>
-          </a:prstGeom>
-          <a:noFill/>
-          <a:ln w="25400">
-            <a:solidFill>
-              <a:srgbClr val="8ABBD8"/>
-            </a:solidFill>
-            <a:prstDash val="solid"/>
-          </a:ln>
-        </p:spPr>
-      </p:sp>
-      <p:sp>
-        <p:nvSpPr>
-          <p:cNvPr id="21" name="Text 19"/>
-          <p:cNvSpPr/>
-          <p:nvPr/>
-        </p:nvSpPr>
-        <p:spPr>
-          <a:xfrm>
-            <a:off x="7909560" y="3977640"/>
-            <a:ext cx="2926080" cy="182880"/>
-          </a:xfrm>
-          <a:prstGeom prst="rect">
-            <a:avLst/>
-          </a:prstGeom>
-          <a:noFill/>
-          <a:ln/>
-        </p:spPr>
-        <p:txBody>
-          <a:bodyPr wrap="square" lIns="0" tIns="0" rIns="0" bIns="0" rtlCol="0" anchor="ctr"/>
-          <a:lstStyle/>
-          <a:p>
-            <a:pPr algn="ctr" indent="0" marL="0">
-              <a:buNone/>
-            </a:pPr>
-            <a:r>
-              <a:rPr lang="en-US" sz="1000" dirty="0">
-                <a:solidFill>
-                  <a:srgbClr val="003A63"/>
-                </a:solidFill>
-                <a:latin typeface="Aptos" pitchFamily="34" charset="0"/>
-                <a:ea typeface="Aptos" pitchFamily="34" charset="-122"/>
-                <a:cs typeface="Aptos" pitchFamily="34" charset="-120"/>
-              </a:rPr>
-              <a:t>Dependencies visible</a:t>
-            </a:r>
-            <a:endParaRPr lang="en-US" sz="1000" dirty="0"/>
-          </a:p>
-        </p:txBody>
-      </p:sp>
-      <p:sp>
-        <p:nvSpPr>
-          <p:cNvPr id="22" name="Shape 20"/>
           <p:cNvSpPr/>
           <p:nvPr/>
         </p:nvSpPr>
@@ -7906,7 +7212,7 @@
       </p:sp>
       <p:sp>
         <p:nvSpPr>
-          <p:cNvPr id="23" name="Text 21"/>
+          <p:cNvPr id="17" name="Text 15"/>
           <p:cNvSpPr/>
           <p:nvPr/>
         </p:nvSpPr>
@@ -7945,7 +7251,7 @@
       </p:sp>
       <p:sp>
         <p:nvSpPr>
-          <p:cNvPr id="24" name="Text 22"/>
+          <p:cNvPr id="18" name="Text 16"/>
           <p:cNvSpPr/>
           <p:nvPr/>
         </p:nvSpPr>
@@ -8453,13 +7759,11 @@
             </a:avLst>
           </a:prstGeom>
           <a:solidFill>
-            <a:srgbClr val="FFFFFF">
-              <a:alpha val="88000"/>
-            </a:srgbClr>
+            <a:srgbClr val="FFFFFF"/>
           </a:solidFill>
           <a:ln w="12700">
             <a:solidFill>
-              <a:srgbClr val="D6E8F2"/>
+              <a:srgbClr val="B9D7E6"/>
             </a:solidFill>
             <a:prstDash val="solid"/>
           </a:ln>
@@ -8467,30 +7771,42 @@
       </p:sp>
       <p:sp>
         <p:nvSpPr>
-          <p:cNvPr id="14" name="Shape 12"/>
-          <p:cNvSpPr/>
-          <p:nvPr/>
-        </p:nvSpPr>
-        <p:spPr>
-          <a:xfrm>
-            <a:off x="7927848" y="3319272"/>
-            <a:ext cx="792480" cy="749808"/>
-          </a:xfrm>
-          <a:prstGeom prst="roundRect">
-            <a:avLst>
-              <a:gd name="adj" fmla="val 14634"/>
-            </a:avLst>
-          </a:prstGeom>
-          <a:solidFill>
-            <a:srgbClr val="0068B7"/>
-          </a:solidFill>
-          <a:ln w="12700">
-            <a:solidFill>
-              <a:srgbClr val="0068B7"/>
-            </a:solidFill>
-            <a:prstDash val="solid"/>
-          </a:ln>
-        </p:spPr>
+          <p:cNvPr id="14" name="Text 12"/>
+          <p:cNvSpPr/>
+          <p:nvPr/>
+        </p:nvSpPr>
+        <p:spPr>
+          <a:xfrm>
+            <a:off x="7799832" y="2935224"/>
+            <a:ext cx="3145536" cy="256032"/>
+          </a:xfrm>
+          <a:prstGeom prst="rect">
+            <a:avLst/>
+          </a:prstGeom>
+          <a:noFill/>
+          <a:ln/>
+        </p:spPr>
+        <p:txBody>
+          <a:bodyPr wrap="square" lIns="0" tIns="0" rIns="0" bIns="0" rtlCol="0" anchor="ctr"/>
+          <a:lstStyle/>
+          <a:p>
+            <a:pPr indent="0" marL="0">
+              <a:buNone/>
+            </a:pPr>
+            <a:r>
+              <a:rPr lang="en-US" sz="1300" b="1" dirty="0">
+                <a:solidFill>
+                  <a:srgbClr val="0068B7"/>
+                </a:solidFill>
+                <a:latin typeface="Aptos" pitchFamily="34" charset="0"/>
+                <a:ea typeface="Aptos" pitchFamily="34" charset="-122"/>
+                <a:cs typeface="Aptos" pitchFamily="34" charset="-120"/>
+              </a:rPr>
+              <a:t>Concept checkpoints</a:t>
+            </a:r>
+            <a:endParaRPr lang="en-US" sz="1300" dirty="0"/>
+          </a:p>
+        </p:txBody>
       </p:sp>
       <p:sp>
         <p:nvSpPr>
@@ -8500,240 +7816,67 @@
         </p:nvSpPr>
         <p:spPr>
           <a:xfrm>
-            <a:off x="8001000" y="3511296"/>
-            <a:ext cx="646176" cy="310896"/>
-          </a:xfrm>
-          <a:prstGeom prst="rect">
-            <a:avLst/>
-          </a:prstGeom>
-          <a:noFill/>
-          <a:ln/>
-        </p:spPr>
-        <p:txBody>
-          <a:bodyPr wrap="square" lIns="0" tIns="0" rIns="0" bIns="0" rtlCol="0" anchor="ctr">
+            <a:off x="7818120" y="3300984"/>
+            <a:ext cx="3090672" cy="877824"/>
+          </a:xfrm>
+          <a:prstGeom prst="rect">
+            <a:avLst/>
+          </a:prstGeom>
+          <a:noFill/>
+          <a:ln/>
+        </p:spPr>
+        <p:txBody>
+          <a:bodyPr wrap="square" lIns="254" tIns="254" rIns="254" bIns="254" rtlCol="0" anchor="t">
             <a:normAutofit/>
           </a:bodyPr>
           <a:lstStyle/>
           <a:p>
-            <a:pPr algn="ctr" indent="0" marL="0">
-              <a:buNone/>
-            </a:pPr>
-            <a:r>
-              <a:rPr lang="en-US" sz="1500" b="1" dirty="0">
-                <a:solidFill>
-                  <a:srgbClr val="FFFFFF"/>
-                </a:solidFill>
-                <a:latin typeface="Aptos" pitchFamily="34" charset="0"/>
-                <a:ea typeface="Aptos" pitchFamily="34" charset="-122"/>
-                <a:cs typeface="Aptos" pitchFamily="34" charset="-120"/>
-              </a:rPr>
-              <a:t>Plan</a:t>
-            </a:r>
-            <a:endParaRPr lang="en-US" sz="1500" dirty="0"/>
+            <a:r>
+              <a:rPr lang="en-US" sz="1380" dirty="0">
+                <a:solidFill>
+                  <a:srgbClr val="17364A"/>
+                </a:solidFill>
+                <a:latin typeface="Aptos" pitchFamily="34" charset="0"/>
+                <a:ea typeface="Aptos" pitchFamily="34" charset="-122"/>
+                <a:cs typeface="Aptos" pitchFamily="34" charset="-120"/>
+              </a:rPr>
+              <a:t>Which workflows in your agency are triggered by new data or status changes?</a:t>
+            </a:r>
+            <a:endParaRPr lang="en-US" sz="1380" dirty="0"/>
+          </a:p>
+          <a:p>
+            <a:r>
+              <a:rPr lang="en-US" sz="1380" dirty="0">
+                <a:solidFill>
+                  <a:srgbClr val="17364A"/>
+                </a:solidFill>
+                <a:latin typeface="Aptos" pitchFamily="34" charset="0"/>
+                <a:ea typeface="Aptos" pitchFamily="34" charset="-122"/>
+                <a:cs typeface="Aptos" pitchFamily="34" charset="-120"/>
+              </a:rPr>
+              <a:t>Which AI-supported actions should be read-only?</a:t>
+            </a:r>
+            <a:endParaRPr lang="en-US" sz="1380" dirty="0"/>
+          </a:p>
+          <a:p>
+            <a:r>
+              <a:rPr lang="en-US" sz="1380" dirty="0">
+                <a:solidFill>
+                  <a:srgbClr val="17364A"/>
+                </a:solidFill>
+                <a:latin typeface="Aptos" pitchFamily="34" charset="0"/>
+                <a:ea typeface="Aptos" pitchFamily="34" charset="-122"/>
+                <a:cs typeface="Aptos" pitchFamily="34" charset="-120"/>
+              </a:rPr>
+              <a:t>Which actions would require human approval before write-back?</a:t>
+            </a:r>
+            <a:endParaRPr lang="en-US" sz="1380" dirty="0"/>
           </a:p>
         </p:txBody>
       </p:sp>
       <p:sp>
         <p:nvSpPr>
           <p:cNvPr id="16" name="Shape 14"/>
-          <p:cNvSpPr/>
-          <p:nvPr/>
-        </p:nvSpPr>
-        <p:spPr>
-          <a:xfrm>
-            <a:off x="8976360" y="3319272"/>
-            <a:ext cx="792480" cy="749808"/>
-          </a:xfrm>
-          <a:prstGeom prst="roundRect">
-            <a:avLst>
-              <a:gd name="adj" fmla="val 14634"/>
-            </a:avLst>
-          </a:prstGeom>
-          <a:solidFill>
-            <a:srgbClr val="2F8A28"/>
-          </a:solidFill>
-          <a:ln w="12700">
-            <a:solidFill>
-              <a:srgbClr val="2F8A28"/>
-            </a:solidFill>
-            <a:prstDash val="solid"/>
-          </a:ln>
-        </p:spPr>
-      </p:sp>
-      <p:sp>
-        <p:nvSpPr>
-          <p:cNvPr id="17" name="Text 15"/>
-          <p:cNvSpPr/>
-          <p:nvPr/>
-        </p:nvSpPr>
-        <p:spPr>
-          <a:xfrm>
-            <a:off x="9049512" y="3511296"/>
-            <a:ext cx="646176" cy="310896"/>
-          </a:xfrm>
-          <a:prstGeom prst="rect">
-            <a:avLst/>
-          </a:prstGeom>
-          <a:noFill/>
-          <a:ln/>
-        </p:spPr>
-        <p:txBody>
-          <a:bodyPr wrap="square" lIns="0" tIns="0" rIns="0" bIns="0" rtlCol="0" anchor="ctr">
-            <a:normAutofit/>
-          </a:bodyPr>
-          <a:lstStyle/>
-          <a:p>
-            <a:pPr algn="ctr" indent="0" marL="0">
-              <a:buNone/>
-            </a:pPr>
-            <a:r>
-              <a:rPr lang="en-US" sz="1500" b="1" dirty="0">
-                <a:solidFill>
-                  <a:srgbClr val="FFFFFF"/>
-                </a:solidFill>
-                <a:latin typeface="Aptos" pitchFamily="34" charset="0"/>
-                <a:ea typeface="Aptos" pitchFamily="34" charset="-122"/>
-                <a:cs typeface="Aptos" pitchFamily="34" charset="-120"/>
-              </a:rPr>
-              <a:t>Do</a:t>
-            </a:r>
-            <a:endParaRPr lang="en-US" sz="1500" dirty="0"/>
-          </a:p>
-        </p:txBody>
-      </p:sp>
-      <p:sp>
-        <p:nvSpPr>
-          <p:cNvPr id="18" name="Shape 16"/>
-          <p:cNvSpPr/>
-          <p:nvPr/>
-        </p:nvSpPr>
-        <p:spPr>
-          <a:xfrm>
-            <a:off x="10024872" y="3319272"/>
-            <a:ext cx="792480" cy="749808"/>
-          </a:xfrm>
-          <a:prstGeom prst="roundRect">
-            <a:avLst>
-              <a:gd name="adj" fmla="val 14634"/>
-            </a:avLst>
-          </a:prstGeom>
-          <a:solidFill>
-            <a:srgbClr val="D69A2D"/>
-          </a:solidFill>
-          <a:ln w="12700">
-            <a:solidFill>
-              <a:srgbClr val="D69A2D"/>
-            </a:solidFill>
-            <a:prstDash val="solid"/>
-          </a:ln>
-        </p:spPr>
-      </p:sp>
-      <p:sp>
-        <p:nvSpPr>
-          <p:cNvPr id="19" name="Text 17"/>
-          <p:cNvSpPr/>
-          <p:nvPr/>
-        </p:nvSpPr>
-        <p:spPr>
-          <a:xfrm>
-            <a:off x="10098024" y="3511296"/>
-            <a:ext cx="646176" cy="310896"/>
-          </a:xfrm>
-          <a:prstGeom prst="rect">
-            <a:avLst/>
-          </a:prstGeom>
-          <a:noFill/>
-          <a:ln/>
-        </p:spPr>
-        <p:txBody>
-          <a:bodyPr wrap="square" lIns="0" tIns="0" rIns="0" bIns="0" rtlCol="0" anchor="ctr">
-            <a:normAutofit/>
-          </a:bodyPr>
-          <a:lstStyle/>
-          <a:p>
-            <a:pPr algn="ctr" indent="0" marL="0">
-              <a:buNone/>
-            </a:pPr>
-            <a:r>
-              <a:rPr lang="en-US" sz="1500" b="1" dirty="0">
-                <a:solidFill>
-                  <a:srgbClr val="FFFFFF"/>
-                </a:solidFill>
-                <a:latin typeface="Aptos" pitchFamily="34" charset="0"/>
-                <a:ea typeface="Aptos" pitchFamily="34" charset="-122"/>
-                <a:cs typeface="Aptos" pitchFamily="34" charset="-120"/>
-              </a:rPr>
-              <a:t>Review</a:t>
-            </a:r>
-            <a:endParaRPr lang="en-US" sz="1500" dirty="0"/>
-          </a:p>
-        </p:txBody>
-      </p:sp>
-      <p:sp>
-        <p:nvSpPr>
-          <p:cNvPr id="20" name="Shape 18"/>
-          <p:cNvSpPr/>
-          <p:nvPr/>
-        </p:nvSpPr>
-        <p:spPr>
-          <a:xfrm>
-            <a:off x="8293608" y="4389120"/>
-            <a:ext cx="2157984" cy="0"/>
-          </a:xfrm>
-          <a:prstGeom prst="line">
-            <a:avLst/>
-          </a:prstGeom>
-          <a:noFill/>
-          <a:ln w="25400">
-            <a:solidFill>
-              <a:srgbClr val="8ABBD8"/>
-            </a:solidFill>
-            <a:prstDash val="solid"/>
-          </a:ln>
-        </p:spPr>
-      </p:sp>
-      <p:sp>
-        <p:nvSpPr>
-          <p:cNvPr id="21" name="Text 19"/>
-          <p:cNvSpPr/>
-          <p:nvPr/>
-        </p:nvSpPr>
-        <p:spPr>
-          <a:xfrm>
-            <a:off x="7909560" y="3977640"/>
-            <a:ext cx="2926080" cy="182880"/>
-          </a:xfrm>
-          <a:prstGeom prst="rect">
-            <a:avLst/>
-          </a:prstGeom>
-          <a:noFill/>
-          <a:ln/>
-        </p:spPr>
-        <p:txBody>
-          <a:bodyPr wrap="square" lIns="0" tIns="0" rIns="0" bIns="0" rtlCol="0" anchor="ctr"/>
-          <a:lstStyle/>
-          <a:p>
-            <a:pPr algn="ctr" indent="0" marL="0">
-              <a:buNone/>
-            </a:pPr>
-            <a:r>
-              <a:rPr lang="en-US" sz="1000" dirty="0">
-                <a:solidFill>
-                  <a:srgbClr val="003A63"/>
-                </a:solidFill>
-                <a:latin typeface="Aptos" pitchFamily="34" charset="0"/>
-                <a:ea typeface="Aptos" pitchFamily="34" charset="-122"/>
-                <a:cs typeface="Aptos" pitchFamily="34" charset="-120"/>
-              </a:rPr>
-              <a:t>Dependencies visible</a:t>
-            </a:r>
-            <a:endParaRPr lang="en-US" sz="1000" dirty="0"/>
-          </a:p>
-        </p:txBody>
-      </p:sp>
-      <p:sp>
-        <p:nvSpPr>
-          <p:cNvPr id="22" name="Shape 20"/>
           <p:cNvSpPr/>
           <p:nvPr/>
         </p:nvSpPr>
@@ -8760,7 +7903,7 @@
       </p:sp>
       <p:sp>
         <p:nvSpPr>
-          <p:cNvPr id="23" name="Text 21"/>
+          <p:cNvPr id="17" name="Text 15"/>
           <p:cNvSpPr/>
           <p:nvPr/>
         </p:nvSpPr>
@@ -8799,7 +7942,7 @@
       </p:sp>
       <p:sp>
         <p:nvSpPr>
-          <p:cNvPr id="24" name="Text 22"/>
+          <p:cNvPr id="18" name="Text 16"/>
           <p:cNvSpPr/>
           <p:nvPr/>
         </p:nvSpPr>
@@ -9293,13 +8436,11 @@
             </a:avLst>
           </a:prstGeom>
           <a:solidFill>
-            <a:srgbClr val="FFFFFF">
-              <a:alpha val="88000"/>
-            </a:srgbClr>
+            <a:srgbClr val="FFFFFF"/>
           </a:solidFill>
           <a:ln w="12700">
             <a:solidFill>
-              <a:srgbClr val="D6E8F2"/>
+              <a:srgbClr val="B9D7E6"/>
             </a:solidFill>
             <a:prstDash val="solid"/>
           </a:ln>
@@ -9307,30 +8448,42 @@
       </p:sp>
       <p:sp>
         <p:nvSpPr>
-          <p:cNvPr id="14" name="Shape 12"/>
-          <p:cNvSpPr/>
-          <p:nvPr/>
-        </p:nvSpPr>
-        <p:spPr>
-          <a:xfrm>
-            <a:off x="7927848" y="3319272"/>
-            <a:ext cx="792480" cy="749808"/>
-          </a:xfrm>
-          <a:prstGeom prst="roundRect">
-            <a:avLst>
-              <a:gd name="adj" fmla="val 14634"/>
-            </a:avLst>
-          </a:prstGeom>
-          <a:solidFill>
-            <a:srgbClr val="0068B7"/>
-          </a:solidFill>
-          <a:ln w="12700">
-            <a:solidFill>
-              <a:srgbClr val="0068B7"/>
-            </a:solidFill>
-            <a:prstDash val="solid"/>
-          </a:ln>
-        </p:spPr>
+          <p:cNvPr id="14" name="Text 12"/>
+          <p:cNvSpPr/>
+          <p:nvPr/>
+        </p:nvSpPr>
+        <p:spPr>
+          <a:xfrm>
+            <a:off x="7799832" y="2935224"/>
+            <a:ext cx="3145536" cy="256032"/>
+          </a:xfrm>
+          <a:prstGeom prst="rect">
+            <a:avLst/>
+          </a:prstGeom>
+          <a:noFill/>
+          <a:ln/>
+        </p:spPr>
+        <p:txBody>
+          <a:bodyPr wrap="square" lIns="0" tIns="0" rIns="0" bIns="0" rtlCol="0" anchor="ctr"/>
+          <a:lstStyle/>
+          <a:p>
+            <a:pPr indent="0" marL="0">
+              <a:buNone/>
+            </a:pPr>
+            <a:r>
+              <a:rPr lang="en-US" sz="1300" b="1" dirty="0">
+                <a:solidFill>
+                  <a:srgbClr val="0068B7"/>
+                </a:solidFill>
+                <a:latin typeface="Aptos" pitchFamily="34" charset="0"/>
+                <a:ea typeface="Aptos" pitchFamily="34" charset="-122"/>
+                <a:cs typeface="Aptos" pitchFamily="34" charset="-120"/>
+              </a:rPr>
+              <a:t>Concept checkpoints</a:t>
+            </a:r>
+            <a:endParaRPr lang="en-US" sz="1300" dirty="0"/>
+          </a:p>
+        </p:txBody>
       </p:sp>
       <p:sp>
         <p:nvSpPr>
@@ -9340,240 +8493,53 @@
         </p:nvSpPr>
         <p:spPr>
           <a:xfrm>
-            <a:off x="8001000" y="3511296"/>
-            <a:ext cx="646176" cy="310896"/>
-          </a:xfrm>
-          <a:prstGeom prst="rect">
-            <a:avLst/>
-          </a:prstGeom>
-          <a:noFill/>
-          <a:ln/>
-        </p:spPr>
-        <p:txBody>
-          <a:bodyPr wrap="square" lIns="0" tIns="0" rIns="0" bIns="0" rtlCol="0" anchor="ctr">
+            <a:off x="7818120" y="3300984"/>
+            <a:ext cx="3090672" cy="877824"/>
+          </a:xfrm>
+          <a:prstGeom prst="rect">
+            <a:avLst/>
+          </a:prstGeom>
+          <a:noFill/>
+          <a:ln/>
+        </p:spPr>
+        <p:txBody>
+          <a:bodyPr wrap="square" lIns="254" tIns="254" rIns="254" bIns="254" rtlCol="0" anchor="t">
             <a:normAutofit/>
           </a:bodyPr>
           <a:lstStyle/>
           <a:p>
-            <a:pPr algn="ctr" indent="0" marL="0">
-              <a:buNone/>
-            </a:pPr>
-            <a:r>
-              <a:rPr lang="en-US" sz="1500" b="1" dirty="0">
-                <a:solidFill>
-                  <a:srgbClr val="FFFFFF"/>
-                </a:solidFill>
-                <a:latin typeface="Aptos" pitchFamily="34" charset="0"/>
-                <a:ea typeface="Aptos" pitchFamily="34" charset="-122"/>
-                <a:cs typeface="Aptos" pitchFamily="34" charset="-120"/>
-              </a:rPr>
-              <a:t>Plan</a:t>
-            </a:r>
-            <a:endParaRPr lang="en-US" sz="1500" dirty="0"/>
+            <a:r>
+              <a:rPr lang="en-US" sz="1380" dirty="0">
+                <a:solidFill>
+                  <a:srgbClr val="17364A"/>
+                </a:solidFill>
+                <a:latin typeface="Aptos" pitchFamily="34" charset="0"/>
+                <a:ea typeface="Aptos" pitchFamily="34" charset="-122"/>
+                <a:cs typeface="Aptos" pitchFamily="34" charset="-120"/>
+              </a:rPr>
+              <a:t>What logs are needed to reconstruct what happened?</a:t>
+            </a:r>
+            <a:endParaRPr lang="en-US" sz="1380" dirty="0"/>
+          </a:p>
+          <a:p>
+            <a:r>
+              <a:rPr lang="en-US" sz="1380" dirty="0">
+                <a:solidFill>
+                  <a:srgbClr val="17364A"/>
+                </a:solidFill>
+                <a:latin typeface="Aptos" pitchFamily="34" charset="0"/>
+                <a:ea typeface="Aptos" pitchFamily="34" charset="-122"/>
+                <a:cs typeface="Aptos" pitchFamily="34" charset="-120"/>
+              </a:rPr>
+              <a:t>What should happen if an API call fails or returns unexpected data?</a:t>
+            </a:r>
+            <a:endParaRPr lang="en-US" sz="1380" dirty="0"/>
           </a:p>
         </p:txBody>
       </p:sp>
       <p:sp>
         <p:nvSpPr>
           <p:cNvPr id="16" name="Shape 14"/>
-          <p:cNvSpPr/>
-          <p:nvPr/>
-        </p:nvSpPr>
-        <p:spPr>
-          <a:xfrm>
-            <a:off x="8976360" y="3319272"/>
-            <a:ext cx="792480" cy="749808"/>
-          </a:xfrm>
-          <a:prstGeom prst="roundRect">
-            <a:avLst>
-              <a:gd name="adj" fmla="val 14634"/>
-            </a:avLst>
-          </a:prstGeom>
-          <a:solidFill>
-            <a:srgbClr val="2F8A28"/>
-          </a:solidFill>
-          <a:ln w="12700">
-            <a:solidFill>
-              <a:srgbClr val="2F8A28"/>
-            </a:solidFill>
-            <a:prstDash val="solid"/>
-          </a:ln>
-        </p:spPr>
-      </p:sp>
-      <p:sp>
-        <p:nvSpPr>
-          <p:cNvPr id="17" name="Text 15"/>
-          <p:cNvSpPr/>
-          <p:nvPr/>
-        </p:nvSpPr>
-        <p:spPr>
-          <a:xfrm>
-            <a:off x="9049512" y="3511296"/>
-            <a:ext cx="646176" cy="310896"/>
-          </a:xfrm>
-          <a:prstGeom prst="rect">
-            <a:avLst/>
-          </a:prstGeom>
-          <a:noFill/>
-          <a:ln/>
-        </p:spPr>
-        <p:txBody>
-          <a:bodyPr wrap="square" lIns="0" tIns="0" rIns="0" bIns="0" rtlCol="0" anchor="ctr">
-            <a:normAutofit/>
-          </a:bodyPr>
-          <a:lstStyle/>
-          <a:p>
-            <a:pPr algn="ctr" indent="0" marL="0">
-              <a:buNone/>
-            </a:pPr>
-            <a:r>
-              <a:rPr lang="en-US" sz="1500" b="1" dirty="0">
-                <a:solidFill>
-                  <a:srgbClr val="FFFFFF"/>
-                </a:solidFill>
-                <a:latin typeface="Aptos" pitchFamily="34" charset="0"/>
-                <a:ea typeface="Aptos" pitchFamily="34" charset="-122"/>
-                <a:cs typeface="Aptos" pitchFamily="34" charset="-120"/>
-              </a:rPr>
-              <a:t>Do</a:t>
-            </a:r>
-            <a:endParaRPr lang="en-US" sz="1500" dirty="0"/>
-          </a:p>
-        </p:txBody>
-      </p:sp>
-      <p:sp>
-        <p:nvSpPr>
-          <p:cNvPr id="18" name="Shape 16"/>
-          <p:cNvSpPr/>
-          <p:nvPr/>
-        </p:nvSpPr>
-        <p:spPr>
-          <a:xfrm>
-            <a:off x="10024872" y="3319272"/>
-            <a:ext cx="792480" cy="749808"/>
-          </a:xfrm>
-          <a:prstGeom prst="roundRect">
-            <a:avLst>
-              <a:gd name="adj" fmla="val 14634"/>
-            </a:avLst>
-          </a:prstGeom>
-          <a:solidFill>
-            <a:srgbClr val="D69A2D"/>
-          </a:solidFill>
-          <a:ln w="12700">
-            <a:solidFill>
-              <a:srgbClr val="D69A2D"/>
-            </a:solidFill>
-            <a:prstDash val="solid"/>
-          </a:ln>
-        </p:spPr>
-      </p:sp>
-      <p:sp>
-        <p:nvSpPr>
-          <p:cNvPr id="19" name="Text 17"/>
-          <p:cNvSpPr/>
-          <p:nvPr/>
-        </p:nvSpPr>
-        <p:spPr>
-          <a:xfrm>
-            <a:off x="10098024" y="3511296"/>
-            <a:ext cx="646176" cy="310896"/>
-          </a:xfrm>
-          <a:prstGeom prst="rect">
-            <a:avLst/>
-          </a:prstGeom>
-          <a:noFill/>
-          <a:ln/>
-        </p:spPr>
-        <p:txBody>
-          <a:bodyPr wrap="square" lIns="0" tIns="0" rIns="0" bIns="0" rtlCol="0" anchor="ctr">
-            <a:normAutofit/>
-          </a:bodyPr>
-          <a:lstStyle/>
-          <a:p>
-            <a:pPr algn="ctr" indent="0" marL="0">
-              <a:buNone/>
-            </a:pPr>
-            <a:r>
-              <a:rPr lang="en-US" sz="1500" b="1" dirty="0">
-                <a:solidFill>
-                  <a:srgbClr val="FFFFFF"/>
-                </a:solidFill>
-                <a:latin typeface="Aptos" pitchFamily="34" charset="0"/>
-                <a:ea typeface="Aptos" pitchFamily="34" charset="-122"/>
-                <a:cs typeface="Aptos" pitchFamily="34" charset="-120"/>
-              </a:rPr>
-              <a:t>Review</a:t>
-            </a:r>
-            <a:endParaRPr lang="en-US" sz="1500" dirty="0"/>
-          </a:p>
-        </p:txBody>
-      </p:sp>
-      <p:sp>
-        <p:nvSpPr>
-          <p:cNvPr id="20" name="Shape 18"/>
-          <p:cNvSpPr/>
-          <p:nvPr/>
-        </p:nvSpPr>
-        <p:spPr>
-          <a:xfrm>
-            <a:off x="8293608" y="4389120"/>
-            <a:ext cx="2157984" cy="0"/>
-          </a:xfrm>
-          <a:prstGeom prst="line">
-            <a:avLst/>
-          </a:prstGeom>
-          <a:noFill/>
-          <a:ln w="25400">
-            <a:solidFill>
-              <a:srgbClr val="8ABBD8"/>
-            </a:solidFill>
-            <a:prstDash val="solid"/>
-          </a:ln>
-        </p:spPr>
-      </p:sp>
-      <p:sp>
-        <p:nvSpPr>
-          <p:cNvPr id="21" name="Text 19"/>
-          <p:cNvSpPr/>
-          <p:nvPr/>
-        </p:nvSpPr>
-        <p:spPr>
-          <a:xfrm>
-            <a:off x="7909560" y="3977640"/>
-            <a:ext cx="2926080" cy="182880"/>
-          </a:xfrm>
-          <a:prstGeom prst="rect">
-            <a:avLst/>
-          </a:prstGeom>
-          <a:noFill/>
-          <a:ln/>
-        </p:spPr>
-        <p:txBody>
-          <a:bodyPr wrap="square" lIns="0" tIns="0" rIns="0" bIns="0" rtlCol="0" anchor="ctr"/>
-          <a:lstStyle/>
-          <a:p>
-            <a:pPr algn="ctr" indent="0" marL="0">
-              <a:buNone/>
-            </a:pPr>
-            <a:r>
-              <a:rPr lang="en-US" sz="1000" dirty="0">
-                <a:solidFill>
-                  <a:srgbClr val="003A63"/>
-                </a:solidFill>
-                <a:latin typeface="Aptos" pitchFamily="34" charset="0"/>
-                <a:ea typeface="Aptos" pitchFamily="34" charset="-122"/>
-                <a:cs typeface="Aptos" pitchFamily="34" charset="-120"/>
-              </a:rPr>
-              <a:t>Dependencies visible</a:t>
-            </a:r>
-            <a:endParaRPr lang="en-US" sz="1000" dirty="0"/>
-          </a:p>
-        </p:txBody>
-      </p:sp>
-      <p:sp>
-        <p:nvSpPr>
-          <p:cNvPr id="22" name="Shape 20"/>
           <p:cNvSpPr/>
           <p:nvPr/>
         </p:nvSpPr>
@@ -9600,7 +8566,7 @@
       </p:sp>
       <p:sp>
         <p:nvSpPr>
-          <p:cNvPr id="23" name="Text 21"/>
+          <p:cNvPr id="17" name="Text 15"/>
           <p:cNvSpPr/>
           <p:nvPr/>
         </p:nvSpPr>
@@ -9639,7 +8605,7 @@
       </p:sp>
       <p:sp>
         <p:nvSpPr>
-          <p:cNvPr id="24" name="Text 22"/>
+          <p:cNvPr id="18" name="Text 16"/>
           <p:cNvSpPr/>
           <p:nvPr/>
         </p:nvSpPr>
@@ -10133,13 +9099,11 @@
             </a:avLst>
           </a:prstGeom>
           <a:solidFill>
-            <a:srgbClr val="FFFFFF">
-              <a:alpha val="88000"/>
-            </a:srgbClr>
+            <a:srgbClr val="FFFFFF"/>
           </a:solidFill>
           <a:ln w="12700">
             <a:solidFill>
-              <a:srgbClr val="D6E8F2"/>
+              <a:srgbClr val="B9D7E6"/>
             </a:solidFill>
             <a:prstDash val="solid"/>
           </a:ln>
@@ -10147,30 +9111,42 @@
       </p:sp>
       <p:sp>
         <p:nvSpPr>
-          <p:cNvPr id="14" name="Shape 12"/>
-          <p:cNvSpPr/>
-          <p:nvPr/>
-        </p:nvSpPr>
-        <p:spPr>
-          <a:xfrm>
-            <a:off x="7927848" y="3319272"/>
-            <a:ext cx="792480" cy="749808"/>
-          </a:xfrm>
-          <a:prstGeom prst="roundRect">
-            <a:avLst>
-              <a:gd name="adj" fmla="val 14634"/>
-            </a:avLst>
-          </a:prstGeom>
-          <a:solidFill>
-            <a:srgbClr val="0068B7"/>
-          </a:solidFill>
-          <a:ln w="12700">
-            <a:solidFill>
-              <a:srgbClr val="0068B7"/>
-            </a:solidFill>
-            <a:prstDash val="solid"/>
-          </a:ln>
-        </p:spPr>
+          <p:cNvPr id="14" name="Text 12"/>
+          <p:cNvSpPr/>
+          <p:nvPr/>
+        </p:nvSpPr>
+        <p:spPr>
+          <a:xfrm>
+            <a:off x="7799832" y="2935224"/>
+            <a:ext cx="3145536" cy="256032"/>
+          </a:xfrm>
+          <a:prstGeom prst="rect">
+            <a:avLst/>
+          </a:prstGeom>
+          <a:noFill/>
+          <a:ln/>
+        </p:spPr>
+        <p:txBody>
+          <a:bodyPr wrap="square" lIns="0" tIns="0" rIns="0" bIns="0" rtlCol="0" anchor="ctr"/>
+          <a:lstStyle/>
+          <a:p>
+            <a:pPr indent="0" marL="0">
+              <a:buNone/>
+            </a:pPr>
+            <a:r>
+              <a:rPr lang="en-US" sz="1300" b="1" dirty="0">
+                <a:solidFill>
+                  <a:srgbClr val="0068B7"/>
+                </a:solidFill>
+                <a:latin typeface="Aptos" pitchFamily="34" charset="0"/>
+                <a:ea typeface="Aptos" pitchFamily="34" charset="-122"/>
+                <a:cs typeface="Aptos" pitchFamily="34" charset="-120"/>
+              </a:rPr>
+              <a:t>Concept checkpoints</a:t>
+            </a:r>
+            <a:endParaRPr lang="en-US" sz="1300" dirty="0"/>
+          </a:p>
+        </p:txBody>
       </p:sp>
       <p:sp>
         <p:nvSpPr>
@@ -10180,240 +9156,53 @@
         </p:nvSpPr>
         <p:spPr>
           <a:xfrm>
-            <a:off x="8001000" y="3511296"/>
-            <a:ext cx="646176" cy="310896"/>
-          </a:xfrm>
-          <a:prstGeom prst="rect">
-            <a:avLst/>
-          </a:prstGeom>
-          <a:noFill/>
-          <a:ln/>
-        </p:spPr>
-        <p:txBody>
-          <a:bodyPr wrap="square" lIns="0" tIns="0" rIns="0" bIns="0" rtlCol="0" anchor="ctr">
+            <a:off x="7818120" y="3300984"/>
+            <a:ext cx="3090672" cy="877824"/>
+          </a:xfrm>
+          <a:prstGeom prst="rect">
+            <a:avLst/>
+          </a:prstGeom>
+          <a:noFill/>
+          <a:ln/>
+        </p:spPr>
+        <p:txBody>
+          <a:bodyPr wrap="square" lIns="254" tIns="254" rIns="254" bIns="254" rtlCol="0" anchor="t">
             <a:normAutofit/>
           </a:bodyPr>
           <a:lstStyle/>
           <a:p>
-            <a:pPr algn="ctr" indent="0" marL="0">
-              <a:buNone/>
-            </a:pPr>
-            <a:r>
-              <a:rPr lang="en-US" sz="1500" b="1" dirty="0">
-                <a:solidFill>
-                  <a:srgbClr val="FFFFFF"/>
-                </a:solidFill>
-                <a:latin typeface="Aptos" pitchFamily="34" charset="0"/>
-                <a:ea typeface="Aptos" pitchFamily="34" charset="-122"/>
-                <a:cs typeface="Aptos" pitchFamily="34" charset="-120"/>
-              </a:rPr>
-              <a:t>Plan</a:t>
-            </a:r>
-            <a:endParaRPr lang="en-US" sz="1500" dirty="0"/>
+            <a:r>
+              <a:rPr lang="en-US" sz="1380" dirty="0">
+                <a:solidFill>
+                  <a:srgbClr val="17364A"/>
+                </a:solidFill>
+                <a:latin typeface="Aptos" pitchFamily="34" charset="0"/>
+                <a:ea typeface="Aptos" pitchFamily="34" charset="-122"/>
+                <a:cs typeface="Aptos" pitchFamily="34" charset="-120"/>
+              </a:rPr>
+              <a:t>Create an API and event workflow review worksheet for one proposed AI integration.</a:t>
+            </a:r>
+            <a:endParaRPr lang="en-US" sz="1380" dirty="0"/>
+          </a:p>
+          <a:p>
+            <a:r>
+              <a:rPr lang="en-US" sz="1380" dirty="0">
+                <a:solidFill>
+                  <a:srgbClr val="17364A"/>
+                </a:solidFill>
+                <a:latin typeface="Aptos" pitchFamily="34" charset="0"/>
+                <a:ea typeface="Aptos" pitchFamily="34" charset="-122"/>
+                <a:cs typeface="Aptos" pitchFamily="34" charset="-120"/>
+              </a:rPr>
+              <a:t>Include the triggering event, systems involved, data exchanged, read/write permissions,.</a:t>
+            </a:r>
+            <a:endParaRPr lang="en-US" sz="1380" dirty="0"/>
           </a:p>
         </p:txBody>
       </p:sp>
       <p:sp>
         <p:nvSpPr>
           <p:cNvPr id="16" name="Shape 14"/>
-          <p:cNvSpPr/>
-          <p:nvPr/>
-        </p:nvSpPr>
-        <p:spPr>
-          <a:xfrm>
-            <a:off x="8976360" y="3319272"/>
-            <a:ext cx="792480" cy="749808"/>
-          </a:xfrm>
-          <a:prstGeom prst="roundRect">
-            <a:avLst>
-              <a:gd name="adj" fmla="val 14634"/>
-            </a:avLst>
-          </a:prstGeom>
-          <a:solidFill>
-            <a:srgbClr val="2F8A28"/>
-          </a:solidFill>
-          <a:ln w="12700">
-            <a:solidFill>
-              <a:srgbClr val="2F8A28"/>
-            </a:solidFill>
-            <a:prstDash val="solid"/>
-          </a:ln>
-        </p:spPr>
-      </p:sp>
-      <p:sp>
-        <p:nvSpPr>
-          <p:cNvPr id="17" name="Text 15"/>
-          <p:cNvSpPr/>
-          <p:nvPr/>
-        </p:nvSpPr>
-        <p:spPr>
-          <a:xfrm>
-            <a:off x="9049512" y="3511296"/>
-            <a:ext cx="646176" cy="310896"/>
-          </a:xfrm>
-          <a:prstGeom prst="rect">
-            <a:avLst/>
-          </a:prstGeom>
-          <a:noFill/>
-          <a:ln/>
-        </p:spPr>
-        <p:txBody>
-          <a:bodyPr wrap="square" lIns="0" tIns="0" rIns="0" bIns="0" rtlCol="0" anchor="ctr">
-            <a:normAutofit/>
-          </a:bodyPr>
-          <a:lstStyle/>
-          <a:p>
-            <a:pPr algn="ctr" indent="0" marL="0">
-              <a:buNone/>
-            </a:pPr>
-            <a:r>
-              <a:rPr lang="en-US" sz="1500" b="1" dirty="0">
-                <a:solidFill>
-                  <a:srgbClr val="FFFFFF"/>
-                </a:solidFill>
-                <a:latin typeface="Aptos" pitchFamily="34" charset="0"/>
-                <a:ea typeface="Aptos" pitchFamily="34" charset="-122"/>
-                <a:cs typeface="Aptos" pitchFamily="34" charset="-120"/>
-              </a:rPr>
-              <a:t>Do</a:t>
-            </a:r>
-            <a:endParaRPr lang="en-US" sz="1500" dirty="0"/>
-          </a:p>
-        </p:txBody>
-      </p:sp>
-      <p:sp>
-        <p:nvSpPr>
-          <p:cNvPr id="18" name="Shape 16"/>
-          <p:cNvSpPr/>
-          <p:nvPr/>
-        </p:nvSpPr>
-        <p:spPr>
-          <a:xfrm>
-            <a:off x="10024872" y="3319272"/>
-            <a:ext cx="792480" cy="749808"/>
-          </a:xfrm>
-          <a:prstGeom prst="roundRect">
-            <a:avLst>
-              <a:gd name="adj" fmla="val 14634"/>
-            </a:avLst>
-          </a:prstGeom>
-          <a:solidFill>
-            <a:srgbClr val="D69A2D"/>
-          </a:solidFill>
-          <a:ln w="12700">
-            <a:solidFill>
-              <a:srgbClr val="D69A2D"/>
-            </a:solidFill>
-            <a:prstDash val="solid"/>
-          </a:ln>
-        </p:spPr>
-      </p:sp>
-      <p:sp>
-        <p:nvSpPr>
-          <p:cNvPr id="19" name="Text 17"/>
-          <p:cNvSpPr/>
-          <p:nvPr/>
-        </p:nvSpPr>
-        <p:spPr>
-          <a:xfrm>
-            <a:off x="10098024" y="3511296"/>
-            <a:ext cx="646176" cy="310896"/>
-          </a:xfrm>
-          <a:prstGeom prst="rect">
-            <a:avLst/>
-          </a:prstGeom>
-          <a:noFill/>
-          <a:ln/>
-        </p:spPr>
-        <p:txBody>
-          <a:bodyPr wrap="square" lIns="0" tIns="0" rIns="0" bIns="0" rtlCol="0" anchor="ctr">
-            <a:normAutofit/>
-          </a:bodyPr>
-          <a:lstStyle/>
-          <a:p>
-            <a:pPr algn="ctr" indent="0" marL="0">
-              <a:buNone/>
-            </a:pPr>
-            <a:r>
-              <a:rPr lang="en-US" sz="1500" b="1" dirty="0">
-                <a:solidFill>
-                  <a:srgbClr val="FFFFFF"/>
-                </a:solidFill>
-                <a:latin typeface="Aptos" pitchFamily="34" charset="0"/>
-                <a:ea typeface="Aptos" pitchFamily="34" charset="-122"/>
-                <a:cs typeface="Aptos" pitchFamily="34" charset="-120"/>
-              </a:rPr>
-              <a:t>Review</a:t>
-            </a:r>
-            <a:endParaRPr lang="en-US" sz="1500" dirty="0"/>
-          </a:p>
-        </p:txBody>
-      </p:sp>
-      <p:sp>
-        <p:nvSpPr>
-          <p:cNvPr id="20" name="Shape 18"/>
-          <p:cNvSpPr/>
-          <p:nvPr/>
-        </p:nvSpPr>
-        <p:spPr>
-          <a:xfrm>
-            <a:off x="8293608" y="4389120"/>
-            <a:ext cx="2157984" cy="0"/>
-          </a:xfrm>
-          <a:prstGeom prst="line">
-            <a:avLst/>
-          </a:prstGeom>
-          <a:noFill/>
-          <a:ln w="25400">
-            <a:solidFill>
-              <a:srgbClr val="8ABBD8"/>
-            </a:solidFill>
-            <a:prstDash val="solid"/>
-          </a:ln>
-        </p:spPr>
-      </p:sp>
-      <p:sp>
-        <p:nvSpPr>
-          <p:cNvPr id="21" name="Text 19"/>
-          <p:cNvSpPr/>
-          <p:nvPr/>
-        </p:nvSpPr>
-        <p:spPr>
-          <a:xfrm>
-            <a:off x="7909560" y="3977640"/>
-            <a:ext cx="2926080" cy="182880"/>
-          </a:xfrm>
-          <a:prstGeom prst="rect">
-            <a:avLst/>
-          </a:prstGeom>
-          <a:noFill/>
-          <a:ln/>
-        </p:spPr>
-        <p:txBody>
-          <a:bodyPr wrap="square" lIns="0" tIns="0" rIns="0" bIns="0" rtlCol="0" anchor="ctr"/>
-          <a:lstStyle/>
-          <a:p>
-            <a:pPr algn="ctr" indent="0" marL="0">
-              <a:buNone/>
-            </a:pPr>
-            <a:r>
-              <a:rPr lang="en-US" sz="1000" dirty="0">
-                <a:solidFill>
-                  <a:srgbClr val="003A63"/>
-                </a:solidFill>
-                <a:latin typeface="Aptos" pitchFamily="34" charset="0"/>
-                <a:ea typeface="Aptos" pitchFamily="34" charset="-122"/>
-                <a:cs typeface="Aptos" pitchFamily="34" charset="-120"/>
-              </a:rPr>
-              <a:t>Dependencies visible</a:t>
-            </a:r>
-            <a:endParaRPr lang="en-US" sz="1000" dirty="0"/>
-          </a:p>
-        </p:txBody>
-      </p:sp>
-      <p:sp>
-        <p:nvSpPr>
-          <p:cNvPr id="22" name="Shape 20"/>
           <p:cNvSpPr/>
           <p:nvPr/>
         </p:nvSpPr>
@@ -10440,7 +9229,7 @@
       </p:sp>
       <p:sp>
         <p:nvSpPr>
-          <p:cNvPr id="23" name="Text 21"/>
+          <p:cNvPr id="17" name="Text 15"/>
           <p:cNvSpPr/>
           <p:nvPr/>
         </p:nvSpPr>
@@ -10479,7 +9268,7 @@
       </p:sp>
       <p:sp>
         <p:nvSpPr>
-          <p:cNvPr id="24" name="Text 22"/>
+          <p:cNvPr id="18" name="Text 16"/>
           <p:cNvSpPr/>
           <p:nvPr/>
         </p:nvSpPr>
@@ -10987,13 +9776,11 @@
             </a:avLst>
           </a:prstGeom>
           <a:solidFill>
-            <a:srgbClr val="FFFFFF">
-              <a:alpha val="88000"/>
-            </a:srgbClr>
+            <a:srgbClr val="FFFFFF"/>
           </a:solidFill>
           <a:ln w="12700">
             <a:solidFill>
-              <a:srgbClr val="D6E8F2"/>
+              <a:srgbClr val="B9D7E6"/>
             </a:solidFill>
             <a:prstDash val="solid"/>
           </a:ln>
@@ -11001,30 +9788,42 @@
       </p:sp>
       <p:sp>
         <p:nvSpPr>
-          <p:cNvPr id="14" name="Shape 12"/>
-          <p:cNvSpPr/>
-          <p:nvPr/>
-        </p:nvSpPr>
-        <p:spPr>
-          <a:xfrm>
-            <a:off x="7927848" y="3319272"/>
-            <a:ext cx="792480" cy="749808"/>
-          </a:xfrm>
-          <a:prstGeom prst="roundRect">
-            <a:avLst>
-              <a:gd name="adj" fmla="val 14634"/>
-            </a:avLst>
-          </a:prstGeom>
-          <a:solidFill>
-            <a:srgbClr val="0068B7"/>
-          </a:solidFill>
-          <a:ln w="12700">
-            <a:solidFill>
-              <a:srgbClr val="0068B7"/>
-            </a:solidFill>
-            <a:prstDash val="solid"/>
-          </a:ln>
-        </p:spPr>
+          <p:cNvPr id="14" name="Text 12"/>
+          <p:cNvSpPr/>
+          <p:nvPr/>
+        </p:nvSpPr>
+        <p:spPr>
+          <a:xfrm>
+            <a:off x="7799832" y="2935224"/>
+            <a:ext cx="3145536" cy="256032"/>
+          </a:xfrm>
+          <a:prstGeom prst="rect">
+            <a:avLst/>
+          </a:prstGeom>
+          <a:noFill/>
+          <a:ln/>
+        </p:spPr>
+        <p:txBody>
+          <a:bodyPr wrap="square" lIns="0" tIns="0" rIns="0" bIns="0" rtlCol="0" anchor="ctr"/>
+          <a:lstStyle/>
+          <a:p>
+            <a:pPr indent="0" marL="0">
+              <a:buNone/>
+            </a:pPr>
+            <a:r>
+              <a:rPr lang="en-US" sz="1300" b="1" dirty="0">
+                <a:solidFill>
+                  <a:srgbClr val="0068B7"/>
+                </a:solidFill>
+                <a:latin typeface="Aptos" pitchFamily="34" charset="0"/>
+                <a:ea typeface="Aptos" pitchFamily="34" charset="-122"/>
+                <a:cs typeface="Aptos" pitchFamily="34" charset="-120"/>
+              </a:rPr>
+              <a:t>Concept checkpoints</a:t>
+            </a:r>
+            <a:endParaRPr lang="en-US" sz="1300" dirty="0"/>
+          </a:p>
+        </p:txBody>
       </p:sp>
       <p:sp>
         <p:nvSpPr>
@@ -11034,240 +9833,67 @@
         </p:nvSpPr>
         <p:spPr>
           <a:xfrm>
-            <a:off x="8001000" y="3511296"/>
-            <a:ext cx="646176" cy="310896"/>
-          </a:xfrm>
-          <a:prstGeom prst="rect">
-            <a:avLst/>
-          </a:prstGeom>
-          <a:noFill/>
-          <a:ln/>
-        </p:spPr>
-        <p:txBody>
-          <a:bodyPr wrap="square" lIns="0" tIns="0" rIns="0" bIns="0" rtlCol="0" anchor="ctr">
+            <a:off x="7818120" y="3300984"/>
+            <a:ext cx="3090672" cy="877824"/>
+          </a:xfrm>
+          <a:prstGeom prst="rect">
+            <a:avLst/>
+          </a:prstGeom>
+          <a:noFill/>
+          <a:ln/>
+        </p:spPr>
+        <p:txBody>
+          <a:bodyPr wrap="square" lIns="254" tIns="254" rIns="254" bIns="254" rtlCol="0" anchor="t">
             <a:normAutofit/>
           </a:bodyPr>
           <a:lstStyle/>
           <a:p>
-            <a:pPr algn="ctr" indent="0" marL="0">
-              <a:buNone/>
-            </a:pPr>
-            <a:r>
-              <a:rPr lang="en-US" sz="1500" b="1" dirty="0">
-                <a:solidFill>
-                  <a:srgbClr val="FFFFFF"/>
-                </a:solidFill>
-                <a:latin typeface="Aptos" pitchFamily="34" charset="0"/>
-                <a:ea typeface="Aptos" pitchFamily="34" charset="-122"/>
-                <a:cs typeface="Aptos" pitchFamily="34" charset="-120"/>
-              </a:rPr>
-              <a:t>Plan</a:t>
-            </a:r>
-            <a:endParaRPr lang="en-US" sz="1500" dirty="0"/>
+            <a:r>
+              <a:rPr lang="en-US" sz="1380" dirty="0">
+                <a:solidFill>
+                  <a:srgbClr val="17364A"/>
+                </a:solidFill>
+                <a:latin typeface="Aptos" pitchFamily="34" charset="0"/>
+                <a:ea typeface="Aptos" pitchFamily="34" charset="-122"/>
+                <a:cs typeface="Aptos" pitchFamily="34" charset="-120"/>
+              </a:rPr>
+              <a:t>API and event workflow worksheet</a:t>
+            </a:r>
+            <a:endParaRPr lang="en-US" sz="1380" dirty="0"/>
+          </a:p>
+          <a:p>
+            <a:r>
+              <a:rPr lang="en-US" sz="1380" dirty="0">
+                <a:solidFill>
+                  <a:srgbClr val="17364A"/>
+                </a:solidFill>
+                <a:latin typeface="Aptos" pitchFamily="34" charset="0"/>
+                <a:ea typeface="Aptos" pitchFamily="34" charset="-122"/>
+                <a:cs typeface="Aptos" pitchFamily="34" charset="-120"/>
+              </a:rPr>
+              <a:t>Integration risk questions</a:t>
+            </a:r>
+            <a:endParaRPr lang="en-US" sz="1380" dirty="0"/>
+          </a:p>
+          <a:p>
+            <a:r>
+              <a:rPr lang="en-US" sz="1380" dirty="0">
+                <a:solidFill>
+                  <a:srgbClr val="17364A"/>
+                </a:solidFill>
+                <a:latin typeface="Aptos" pitchFamily="34" charset="0"/>
+                <a:ea typeface="Aptos" pitchFamily="34" charset="-122"/>
+                <a:cs typeface="Aptos" pitchFamily="34" charset="-120"/>
+              </a:rPr>
+              <a:t>Access control recommendations</a:t>
+            </a:r>
+            <a:endParaRPr lang="en-US" sz="1380" dirty="0"/>
           </a:p>
         </p:txBody>
       </p:sp>
       <p:sp>
         <p:nvSpPr>
           <p:cNvPr id="16" name="Shape 14"/>
-          <p:cNvSpPr/>
-          <p:nvPr/>
-        </p:nvSpPr>
-        <p:spPr>
-          <a:xfrm>
-            <a:off x="8976360" y="3319272"/>
-            <a:ext cx="792480" cy="749808"/>
-          </a:xfrm>
-          <a:prstGeom prst="roundRect">
-            <a:avLst>
-              <a:gd name="adj" fmla="val 14634"/>
-            </a:avLst>
-          </a:prstGeom>
-          <a:solidFill>
-            <a:srgbClr val="2F8A28"/>
-          </a:solidFill>
-          <a:ln w="12700">
-            <a:solidFill>
-              <a:srgbClr val="2F8A28"/>
-            </a:solidFill>
-            <a:prstDash val="solid"/>
-          </a:ln>
-        </p:spPr>
-      </p:sp>
-      <p:sp>
-        <p:nvSpPr>
-          <p:cNvPr id="17" name="Text 15"/>
-          <p:cNvSpPr/>
-          <p:nvPr/>
-        </p:nvSpPr>
-        <p:spPr>
-          <a:xfrm>
-            <a:off x="9049512" y="3511296"/>
-            <a:ext cx="646176" cy="310896"/>
-          </a:xfrm>
-          <a:prstGeom prst="rect">
-            <a:avLst/>
-          </a:prstGeom>
-          <a:noFill/>
-          <a:ln/>
-        </p:spPr>
-        <p:txBody>
-          <a:bodyPr wrap="square" lIns="0" tIns="0" rIns="0" bIns="0" rtlCol="0" anchor="ctr">
-            <a:normAutofit/>
-          </a:bodyPr>
-          <a:lstStyle/>
-          <a:p>
-            <a:pPr algn="ctr" indent="0" marL="0">
-              <a:buNone/>
-            </a:pPr>
-            <a:r>
-              <a:rPr lang="en-US" sz="1500" b="1" dirty="0">
-                <a:solidFill>
-                  <a:srgbClr val="FFFFFF"/>
-                </a:solidFill>
-                <a:latin typeface="Aptos" pitchFamily="34" charset="0"/>
-                <a:ea typeface="Aptos" pitchFamily="34" charset="-122"/>
-                <a:cs typeface="Aptos" pitchFamily="34" charset="-120"/>
-              </a:rPr>
-              <a:t>Do</a:t>
-            </a:r>
-            <a:endParaRPr lang="en-US" sz="1500" dirty="0"/>
-          </a:p>
-        </p:txBody>
-      </p:sp>
-      <p:sp>
-        <p:nvSpPr>
-          <p:cNvPr id="18" name="Shape 16"/>
-          <p:cNvSpPr/>
-          <p:nvPr/>
-        </p:nvSpPr>
-        <p:spPr>
-          <a:xfrm>
-            <a:off x="10024872" y="3319272"/>
-            <a:ext cx="792480" cy="749808"/>
-          </a:xfrm>
-          <a:prstGeom prst="roundRect">
-            <a:avLst>
-              <a:gd name="adj" fmla="val 14634"/>
-            </a:avLst>
-          </a:prstGeom>
-          <a:solidFill>
-            <a:srgbClr val="D69A2D"/>
-          </a:solidFill>
-          <a:ln w="12700">
-            <a:solidFill>
-              <a:srgbClr val="D69A2D"/>
-            </a:solidFill>
-            <a:prstDash val="solid"/>
-          </a:ln>
-        </p:spPr>
-      </p:sp>
-      <p:sp>
-        <p:nvSpPr>
-          <p:cNvPr id="19" name="Text 17"/>
-          <p:cNvSpPr/>
-          <p:nvPr/>
-        </p:nvSpPr>
-        <p:spPr>
-          <a:xfrm>
-            <a:off x="10098024" y="3511296"/>
-            <a:ext cx="646176" cy="310896"/>
-          </a:xfrm>
-          <a:prstGeom prst="rect">
-            <a:avLst/>
-          </a:prstGeom>
-          <a:noFill/>
-          <a:ln/>
-        </p:spPr>
-        <p:txBody>
-          <a:bodyPr wrap="square" lIns="0" tIns="0" rIns="0" bIns="0" rtlCol="0" anchor="ctr">
-            <a:normAutofit/>
-          </a:bodyPr>
-          <a:lstStyle/>
-          <a:p>
-            <a:pPr algn="ctr" indent="0" marL="0">
-              <a:buNone/>
-            </a:pPr>
-            <a:r>
-              <a:rPr lang="en-US" sz="1500" b="1" dirty="0">
-                <a:solidFill>
-                  <a:srgbClr val="FFFFFF"/>
-                </a:solidFill>
-                <a:latin typeface="Aptos" pitchFamily="34" charset="0"/>
-                <a:ea typeface="Aptos" pitchFamily="34" charset="-122"/>
-                <a:cs typeface="Aptos" pitchFamily="34" charset="-120"/>
-              </a:rPr>
-              <a:t>Review</a:t>
-            </a:r>
-            <a:endParaRPr lang="en-US" sz="1500" dirty="0"/>
-          </a:p>
-        </p:txBody>
-      </p:sp>
-      <p:sp>
-        <p:nvSpPr>
-          <p:cNvPr id="20" name="Shape 18"/>
-          <p:cNvSpPr/>
-          <p:nvPr/>
-        </p:nvSpPr>
-        <p:spPr>
-          <a:xfrm>
-            <a:off x="8293608" y="4389120"/>
-            <a:ext cx="2157984" cy="0"/>
-          </a:xfrm>
-          <a:prstGeom prst="line">
-            <a:avLst/>
-          </a:prstGeom>
-          <a:noFill/>
-          <a:ln w="25400">
-            <a:solidFill>
-              <a:srgbClr val="8ABBD8"/>
-            </a:solidFill>
-            <a:prstDash val="solid"/>
-          </a:ln>
-        </p:spPr>
-      </p:sp>
-      <p:sp>
-        <p:nvSpPr>
-          <p:cNvPr id="21" name="Text 19"/>
-          <p:cNvSpPr/>
-          <p:nvPr/>
-        </p:nvSpPr>
-        <p:spPr>
-          <a:xfrm>
-            <a:off x="7909560" y="3977640"/>
-            <a:ext cx="2926080" cy="182880"/>
-          </a:xfrm>
-          <a:prstGeom prst="rect">
-            <a:avLst/>
-          </a:prstGeom>
-          <a:noFill/>
-          <a:ln/>
-        </p:spPr>
-        <p:txBody>
-          <a:bodyPr wrap="square" lIns="0" tIns="0" rIns="0" bIns="0" rtlCol="0" anchor="ctr"/>
-          <a:lstStyle/>
-          <a:p>
-            <a:pPr algn="ctr" indent="0" marL="0">
-              <a:buNone/>
-            </a:pPr>
-            <a:r>
-              <a:rPr lang="en-US" sz="1000" dirty="0">
-                <a:solidFill>
-                  <a:srgbClr val="003A63"/>
-                </a:solidFill>
-                <a:latin typeface="Aptos" pitchFamily="34" charset="0"/>
-                <a:ea typeface="Aptos" pitchFamily="34" charset="-122"/>
-                <a:cs typeface="Aptos" pitchFamily="34" charset="-120"/>
-              </a:rPr>
-              <a:t>Dependencies visible</a:t>
-            </a:r>
-            <a:endParaRPr lang="en-US" sz="1000" dirty="0"/>
-          </a:p>
-        </p:txBody>
-      </p:sp>
-      <p:sp>
-        <p:nvSpPr>
-          <p:cNvPr id="22" name="Shape 20"/>
           <p:cNvSpPr/>
           <p:nvPr/>
         </p:nvSpPr>
@@ -11294,7 +9920,7 @@
       </p:sp>
       <p:sp>
         <p:nvSpPr>
-          <p:cNvPr id="23" name="Text 21"/>
+          <p:cNvPr id="17" name="Text 15"/>
           <p:cNvSpPr/>
           <p:nvPr/>
         </p:nvSpPr>
@@ -11333,7 +9959,7 @@
       </p:sp>
       <p:sp>
         <p:nvSpPr>
-          <p:cNvPr id="24" name="Text 22"/>
+          <p:cNvPr id="18" name="Text 16"/>
           <p:cNvSpPr/>
           <p:nvPr/>
         </p:nvSpPr>
@@ -11866,20 +10492,20 @@
         </p:nvSpPr>
         <p:spPr>
           <a:xfrm>
-            <a:off x="7635240" y="3730752"/>
-            <a:ext cx="1033272" cy="749808"/>
+            <a:off x="7909560" y="3675888"/>
+            <a:ext cx="3154680" cy="1691640"/>
           </a:xfrm>
           <a:prstGeom prst="roundRect">
             <a:avLst>
-              <a:gd name="adj" fmla="val 14634"/>
+              <a:gd name="adj" fmla="val 6486"/>
             </a:avLst>
           </a:prstGeom>
           <a:solidFill>
-            <a:srgbClr val="0068B7"/>
+            <a:srgbClr val="FFFFFF"/>
           </a:solidFill>
           <a:ln w="12700">
             <a:solidFill>
-              <a:srgbClr val="0068B7"/>
+              <a:srgbClr val="B9D7E6"/>
             </a:solidFill>
             <a:prstDash val="solid"/>
           </a:ln>
@@ -11893,172 +10519,100 @@
         </p:nvSpPr>
         <p:spPr>
           <a:xfrm>
-            <a:off x="7708392" y="3922776"/>
-            <a:ext cx="886968" cy="310896"/>
-          </a:xfrm>
-          <a:prstGeom prst="rect">
-            <a:avLst/>
-          </a:prstGeom>
-          <a:noFill/>
-          <a:ln/>
-        </p:spPr>
-        <p:txBody>
-          <a:bodyPr wrap="square" lIns="0" tIns="0" rIns="0" bIns="0" rtlCol="0" anchor="ctr">
+            <a:off x="8074152" y="3822192"/>
+            <a:ext cx="2825496" cy="256032"/>
+          </a:xfrm>
+          <a:prstGeom prst="rect">
+            <a:avLst/>
+          </a:prstGeom>
+          <a:noFill/>
+          <a:ln/>
+        </p:spPr>
+        <p:txBody>
+          <a:bodyPr wrap="square" lIns="0" tIns="0" rIns="0" bIns="0" rtlCol="0" anchor="ctr"/>
+          <a:lstStyle/>
+          <a:p>
+            <a:pPr indent="0" marL="0">
+              <a:buNone/>
+            </a:pPr>
+            <a:r>
+              <a:rPr lang="en-US" sz="1300" b="1" dirty="0">
+                <a:solidFill>
+                  <a:srgbClr val="0068B7"/>
+                </a:solidFill>
+                <a:latin typeface="Aptos" pitchFamily="34" charset="0"/>
+                <a:ea typeface="Aptos" pitchFamily="34" charset="-122"/>
+                <a:cs typeface="Aptos" pitchFamily="34" charset="-120"/>
+              </a:rPr>
+              <a:t>Learning sequence</a:t>
+            </a:r>
+            <a:endParaRPr lang="en-US" sz="1300" dirty="0"/>
+          </a:p>
+        </p:txBody>
+      </p:sp>
+      <p:sp>
+        <p:nvSpPr>
+          <p:cNvPr id="15" name="Text 13"/>
+          <p:cNvSpPr/>
+          <p:nvPr/>
+        </p:nvSpPr>
+        <p:spPr>
+          <a:xfrm>
+            <a:off x="8092440" y="4187952"/>
+            <a:ext cx="2770632" cy="1033272"/>
+          </a:xfrm>
+          <a:prstGeom prst="rect">
+            <a:avLst/>
+          </a:prstGeom>
+          <a:noFill/>
+          <a:ln/>
+        </p:spPr>
+        <p:txBody>
+          <a:bodyPr wrap="square" lIns="254" tIns="254" rIns="254" bIns="254" rtlCol="0" anchor="t">
             <a:normAutofit/>
           </a:bodyPr>
           <a:lstStyle/>
           <a:p>
-            <a:pPr algn="ctr" indent="0" marL="0">
-              <a:buNone/>
-            </a:pPr>
-            <a:r>
-              <a:rPr lang="en-US" sz="1500" b="1" dirty="0">
-                <a:solidFill>
-                  <a:srgbClr val="FFFFFF"/>
-                </a:solidFill>
-                <a:latin typeface="Aptos" pitchFamily="34" charset="0"/>
-                <a:ea typeface="Aptos" pitchFamily="34" charset="-122"/>
-                <a:cs typeface="Aptos" pitchFamily="34" charset="-120"/>
-              </a:rPr>
-              <a:t>Learn</a:t>
-            </a:r>
-            <a:endParaRPr lang="en-US" sz="1500" dirty="0"/>
-          </a:p>
-        </p:txBody>
-      </p:sp>
-      <p:sp>
-        <p:nvSpPr>
-          <p:cNvPr id="15" name="Shape 13"/>
-          <p:cNvSpPr/>
-          <p:nvPr/>
-        </p:nvSpPr>
-        <p:spPr>
-          <a:xfrm>
-            <a:off x="8924544" y="3730752"/>
-            <a:ext cx="1033272" cy="749808"/>
-          </a:xfrm>
-          <a:prstGeom prst="roundRect">
-            <a:avLst>
-              <a:gd name="adj" fmla="val 14634"/>
-            </a:avLst>
-          </a:prstGeom>
-          <a:solidFill>
-            <a:srgbClr val="2F8A28"/>
-          </a:solidFill>
-          <a:ln w="12700">
-            <a:solidFill>
-              <a:srgbClr val="2F8A28"/>
-            </a:solidFill>
-            <a:prstDash val="solid"/>
-          </a:ln>
-        </p:spPr>
-      </p:sp>
-      <p:sp>
-        <p:nvSpPr>
-          <p:cNvPr id="16" name="Text 14"/>
-          <p:cNvSpPr/>
-          <p:nvPr/>
-        </p:nvSpPr>
-        <p:spPr>
-          <a:xfrm>
-            <a:off x="8997696" y="3922776"/>
-            <a:ext cx="886968" cy="310896"/>
-          </a:xfrm>
-          <a:prstGeom prst="rect">
-            <a:avLst/>
-          </a:prstGeom>
-          <a:noFill/>
-          <a:ln/>
-        </p:spPr>
-        <p:txBody>
-          <a:bodyPr wrap="square" lIns="0" tIns="0" rIns="0" bIns="0" rtlCol="0" anchor="ctr">
-            <a:normAutofit/>
-          </a:bodyPr>
-          <a:lstStyle/>
-          <a:p>
-            <a:pPr algn="ctr" indent="0" marL="0">
-              <a:buNone/>
-            </a:pPr>
-            <a:r>
-              <a:rPr lang="en-US" sz="1500" b="1" dirty="0">
-                <a:solidFill>
-                  <a:srgbClr val="FFFFFF"/>
-                </a:solidFill>
-                <a:latin typeface="Aptos" pitchFamily="34" charset="0"/>
-                <a:ea typeface="Aptos" pitchFamily="34" charset="-122"/>
-                <a:cs typeface="Aptos" pitchFamily="34" charset="-120"/>
-              </a:rPr>
-              <a:t>Apply</a:t>
-            </a:r>
-            <a:endParaRPr lang="en-US" sz="1500" dirty="0"/>
-          </a:p>
-        </p:txBody>
-      </p:sp>
-      <p:sp>
-        <p:nvSpPr>
-          <p:cNvPr id="17" name="Shape 15"/>
-          <p:cNvSpPr/>
-          <p:nvPr/>
-        </p:nvSpPr>
-        <p:spPr>
-          <a:xfrm>
-            <a:off x="10213848" y="3730752"/>
-            <a:ext cx="1033272" cy="749808"/>
-          </a:xfrm>
-          <a:prstGeom prst="roundRect">
-            <a:avLst>
-              <a:gd name="adj" fmla="val 14634"/>
-            </a:avLst>
-          </a:prstGeom>
-          <a:solidFill>
-            <a:srgbClr val="6A4CA3"/>
-          </a:solidFill>
-          <a:ln w="12700">
-            <a:solidFill>
-              <a:srgbClr val="6A4CA3"/>
-            </a:solidFill>
-            <a:prstDash val="solid"/>
-          </a:ln>
-        </p:spPr>
-      </p:sp>
-      <p:sp>
-        <p:nvSpPr>
-          <p:cNvPr id="18" name="Text 16"/>
-          <p:cNvSpPr/>
-          <p:nvPr/>
-        </p:nvSpPr>
-        <p:spPr>
-          <a:xfrm>
-            <a:off x="10287000" y="3922776"/>
-            <a:ext cx="886968" cy="310896"/>
-          </a:xfrm>
-          <a:prstGeom prst="rect">
-            <a:avLst/>
-          </a:prstGeom>
-          <a:noFill/>
-          <a:ln/>
-        </p:spPr>
-        <p:txBody>
-          <a:bodyPr wrap="square" lIns="0" tIns="0" rIns="0" bIns="0" rtlCol="0" anchor="ctr">
-            <a:normAutofit/>
-          </a:bodyPr>
-          <a:lstStyle/>
-          <a:p>
-            <a:pPr algn="ctr" indent="0" marL="0">
-              <a:buNone/>
-            </a:pPr>
-            <a:r>
-              <a:rPr lang="en-US" sz="1500" b="1" dirty="0">
-                <a:solidFill>
-                  <a:srgbClr val="FFFFFF"/>
-                </a:solidFill>
-                <a:latin typeface="Aptos" pitchFamily="34" charset="0"/>
-                <a:ea typeface="Aptos" pitchFamily="34" charset="-122"/>
-                <a:cs typeface="Aptos" pitchFamily="34" charset="-120"/>
-              </a:rPr>
-              <a:t>Document</a:t>
-            </a:r>
-            <a:endParaRPr lang="en-US" sz="1500" dirty="0"/>
+            <a:r>
+              <a:rPr lang="en-US" sz="1380" dirty="0">
+                <a:solidFill>
+                  <a:srgbClr val="17364A"/>
+                </a:solidFill>
+                <a:latin typeface="Aptos" pitchFamily="34" charset="0"/>
+                <a:ea typeface="Aptos" pitchFamily="34" charset="-122"/>
+                <a:cs typeface="Aptos" pitchFamily="34" charset="-120"/>
+              </a:rPr>
+              <a:t>Read the module for shared vocabulary and context.</a:t>
+            </a:r>
+            <a:endParaRPr lang="en-US" sz="1380" dirty="0"/>
+          </a:p>
+          <a:p>
+            <a:r>
+              <a:rPr lang="en-US" sz="1380" dirty="0">
+                <a:solidFill>
+                  <a:srgbClr val="17364A"/>
+                </a:solidFill>
+                <a:latin typeface="Aptos" pitchFamily="34" charset="0"/>
+                <a:ea typeface="Aptos" pitchFamily="34" charset="-122"/>
+                <a:cs typeface="Aptos" pitchFamily="34" charset="-120"/>
+              </a:rPr>
+              <a:t>Complete the practical exercise to apply the concept.</a:t>
+            </a:r>
+            <a:endParaRPr lang="en-US" sz="1380" dirty="0"/>
+          </a:p>
+          <a:p>
+            <a:r>
+              <a:rPr lang="en-US" sz="1380" dirty="0">
+                <a:solidFill>
+                  <a:srgbClr val="17364A"/>
+                </a:solidFill>
+                <a:latin typeface="Aptos" pitchFamily="34" charset="0"/>
+                <a:ea typeface="Aptos" pitchFamily="34" charset="-122"/>
+                <a:cs typeface="Aptos" pitchFamily="34" charset="-120"/>
+              </a:rPr>
+              <a:t>Use the notes and references for deeper review.</a:t>
+            </a:r>
+            <a:endParaRPr lang="en-US" sz="1380" dirty="0"/>
           </a:p>
         </p:txBody>
       </p:sp>
@@ -12503,13 +11057,11 @@
             </a:avLst>
           </a:prstGeom>
           <a:solidFill>
-            <a:srgbClr val="FFFFFF">
-              <a:alpha val="88000"/>
-            </a:srgbClr>
+            <a:srgbClr val="FFFFFF"/>
           </a:solidFill>
           <a:ln w="12700">
             <a:solidFill>
-              <a:srgbClr val="D6E8F2"/>
+              <a:srgbClr val="B9D7E6"/>
             </a:solidFill>
             <a:prstDash val="solid"/>
           </a:ln>
@@ -12517,30 +11069,42 @@
       </p:sp>
       <p:sp>
         <p:nvSpPr>
-          <p:cNvPr id="14" name="Shape 12"/>
-          <p:cNvSpPr/>
-          <p:nvPr/>
-        </p:nvSpPr>
-        <p:spPr>
-          <a:xfrm>
-            <a:off x="7927848" y="3319272"/>
-            <a:ext cx="792480" cy="749808"/>
-          </a:xfrm>
-          <a:prstGeom prst="roundRect">
-            <a:avLst>
-              <a:gd name="adj" fmla="val 14634"/>
-            </a:avLst>
-          </a:prstGeom>
-          <a:solidFill>
-            <a:srgbClr val="0068B7"/>
-          </a:solidFill>
-          <a:ln w="12700">
-            <a:solidFill>
-              <a:srgbClr val="0068B7"/>
-            </a:solidFill>
-            <a:prstDash val="solid"/>
-          </a:ln>
-        </p:spPr>
+          <p:cNvPr id="14" name="Text 12"/>
+          <p:cNvSpPr/>
+          <p:nvPr/>
+        </p:nvSpPr>
+        <p:spPr>
+          <a:xfrm>
+            <a:off x="7799832" y="2935224"/>
+            <a:ext cx="3145536" cy="256032"/>
+          </a:xfrm>
+          <a:prstGeom prst="rect">
+            <a:avLst/>
+          </a:prstGeom>
+          <a:noFill/>
+          <a:ln/>
+        </p:spPr>
+        <p:txBody>
+          <a:bodyPr wrap="square" lIns="0" tIns="0" rIns="0" bIns="0" rtlCol="0" anchor="ctr"/>
+          <a:lstStyle/>
+          <a:p>
+            <a:pPr indent="0" marL="0">
+              <a:buNone/>
+            </a:pPr>
+            <a:r>
+              <a:rPr lang="en-US" sz="1300" b="1" dirty="0">
+                <a:solidFill>
+                  <a:srgbClr val="0068B7"/>
+                </a:solidFill>
+                <a:latin typeface="Aptos" pitchFamily="34" charset="0"/>
+                <a:ea typeface="Aptos" pitchFamily="34" charset="-122"/>
+                <a:cs typeface="Aptos" pitchFamily="34" charset="-120"/>
+              </a:rPr>
+              <a:t>Concept checkpoints</a:t>
+            </a:r>
+            <a:endParaRPr lang="en-US" sz="1300" dirty="0"/>
+          </a:p>
+        </p:txBody>
       </p:sp>
       <p:sp>
         <p:nvSpPr>
@@ -12550,240 +11114,39 @@
         </p:nvSpPr>
         <p:spPr>
           <a:xfrm>
-            <a:off x="8001000" y="3511296"/>
-            <a:ext cx="646176" cy="310896"/>
-          </a:xfrm>
-          <a:prstGeom prst="rect">
-            <a:avLst/>
-          </a:prstGeom>
-          <a:noFill/>
-          <a:ln/>
-        </p:spPr>
-        <p:txBody>
-          <a:bodyPr wrap="square" lIns="0" tIns="0" rIns="0" bIns="0" rtlCol="0" anchor="ctr">
+            <a:off x="7818120" y="3300984"/>
+            <a:ext cx="3090672" cy="877824"/>
+          </a:xfrm>
+          <a:prstGeom prst="rect">
+            <a:avLst/>
+          </a:prstGeom>
+          <a:noFill/>
+          <a:ln/>
+        </p:spPr>
+        <p:txBody>
+          <a:bodyPr wrap="square" lIns="254" tIns="254" rIns="254" bIns="254" rtlCol="0" anchor="t">
             <a:normAutofit/>
           </a:bodyPr>
           <a:lstStyle/>
           <a:p>
-            <a:pPr algn="ctr" indent="0" marL="0">
-              <a:buNone/>
-            </a:pPr>
-            <a:r>
-              <a:rPr lang="en-US" sz="1500" b="1" dirty="0">
-                <a:solidFill>
-                  <a:srgbClr val="FFFFFF"/>
-                </a:solidFill>
-                <a:latin typeface="Aptos" pitchFamily="34" charset="0"/>
-                <a:ea typeface="Aptos" pitchFamily="34" charset="-122"/>
-                <a:cs typeface="Aptos" pitchFamily="34" charset="-120"/>
-              </a:rPr>
-              <a:t>Plan</a:t>
-            </a:r>
-            <a:endParaRPr lang="en-US" sz="1500" dirty="0"/>
+            <a:r>
+              <a:rPr lang="en-US" sz="1380" dirty="0">
+                <a:solidFill>
+                  <a:srgbClr val="17364A"/>
+                </a:solidFill>
+                <a:latin typeface="Aptos" pitchFamily="34" charset="0"/>
+                <a:ea typeface="Aptos" pitchFamily="34" charset="-122"/>
+                <a:cs typeface="Aptos" pitchFamily="34" charset="-120"/>
+              </a:rPr>
+              <a:t>Audit log requirements</a:t>
+            </a:r>
+            <a:endParaRPr lang="en-US" sz="1380" dirty="0"/>
           </a:p>
         </p:txBody>
       </p:sp>
       <p:sp>
         <p:nvSpPr>
           <p:cNvPr id="16" name="Shape 14"/>
-          <p:cNvSpPr/>
-          <p:nvPr/>
-        </p:nvSpPr>
-        <p:spPr>
-          <a:xfrm>
-            <a:off x="8976360" y="3319272"/>
-            <a:ext cx="792480" cy="749808"/>
-          </a:xfrm>
-          <a:prstGeom prst="roundRect">
-            <a:avLst>
-              <a:gd name="adj" fmla="val 14634"/>
-            </a:avLst>
-          </a:prstGeom>
-          <a:solidFill>
-            <a:srgbClr val="2F8A28"/>
-          </a:solidFill>
-          <a:ln w="12700">
-            <a:solidFill>
-              <a:srgbClr val="2F8A28"/>
-            </a:solidFill>
-            <a:prstDash val="solid"/>
-          </a:ln>
-        </p:spPr>
-      </p:sp>
-      <p:sp>
-        <p:nvSpPr>
-          <p:cNvPr id="17" name="Text 15"/>
-          <p:cNvSpPr/>
-          <p:nvPr/>
-        </p:nvSpPr>
-        <p:spPr>
-          <a:xfrm>
-            <a:off x="9049512" y="3511296"/>
-            <a:ext cx="646176" cy="310896"/>
-          </a:xfrm>
-          <a:prstGeom prst="rect">
-            <a:avLst/>
-          </a:prstGeom>
-          <a:noFill/>
-          <a:ln/>
-        </p:spPr>
-        <p:txBody>
-          <a:bodyPr wrap="square" lIns="0" tIns="0" rIns="0" bIns="0" rtlCol="0" anchor="ctr">
-            <a:normAutofit/>
-          </a:bodyPr>
-          <a:lstStyle/>
-          <a:p>
-            <a:pPr algn="ctr" indent="0" marL="0">
-              <a:buNone/>
-            </a:pPr>
-            <a:r>
-              <a:rPr lang="en-US" sz="1500" b="1" dirty="0">
-                <a:solidFill>
-                  <a:srgbClr val="FFFFFF"/>
-                </a:solidFill>
-                <a:latin typeface="Aptos" pitchFamily="34" charset="0"/>
-                <a:ea typeface="Aptos" pitchFamily="34" charset="-122"/>
-                <a:cs typeface="Aptos" pitchFamily="34" charset="-120"/>
-              </a:rPr>
-              <a:t>Do</a:t>
-            </a:r>
-            <a:endParaRPr lang="en-US" sz="1500" dirty="0"/>
-          </a:p>
-        </p:txBody>
-      </p:sp>
-      <p:sp>
-        <p:nvSpPr>
-          <p:cNvPr id="18" name="Shape 16"/>
-          <p:cNvSpPr/>
-          <p:nvPr/>
-        </p:nvSpPr>
-        <p:spPr>
-          <a:xfrm>
-            <a:off x="10024872" y="3319272"/>
-            <a:ext cx="792480" cy="749808"/>
-          </a:xfrm>
-          <a:prstGeom prst="roundRect">
-            <a:avLst>
-              <a:gd name="adj" fmla="val 14634"/>
-            </a:avLst>
-          </a:prstGeom>
-          <a:solidFill>
-            <a:srgbClr val="D69A2D"/>
-          </a:solidFill>
-          <a:ln w="12700">
-            <a:solidFill>
-              <a:srgbClr val="D69A2D"/>
-            </a:solidFill>
-            <a:prstDash val="solid"/>
-          </a:ln>
-        </p:spPr>
-      </p:sp>
-      <p:sp>
-        <p:nvSpPr>
-          <p:cNvPr id="19" name="Text 17"/>
-          <p:cNvSpPr/>
-          <p:nvPr/>
-        </p:nvSpPr>
-        <p:spPr>
-          <a:xfrm>
-            <a:off x="10098024" y="3511296"/>
-            <a:ext cx="646176" cy="310896"/>
-          </a:xfrm>
-          <a:prstGeom prst="rect">
-            <a:avLst/>
-          </a:prstGeom>
-          <a:noFill/>
-          <a:ln/>
-        </p:spPr>
-        <p:txBody>
-          <a:bodyPr wrap="square" lIns="0" tIns="0" rIns="0" bIns="0" rtlCol="0" anchor="ctr">
-            <a:normAutofit/>
-          </a:bodyPr>
-          <a:lstStyle/>
-          <a:p>
-            <a:pPr algn="ctr" indent="0" marL="0">
-              <a:buNone/>
-            </a:pPr>
-            <a:r>
-              <a:rPr lang="en-US" sz="1500" b="1" dirty="0">
-                <a:solidFill>
-                  <a:srgbClr val="FFFFFF"/>
-                </a:solidFill>
-                <a:latin typeface="Aptos" pitchFamily="34" charset="0"/>
-                <a:ea typeface="Aptos" pitchFamily="34" charset="-122"/>
-                <a:cs typeface="Aptos" pitchFamily="34" charset="-120"/>
-              </a:rPr>
-              <a:t>Review</a:t>
-            </a:r>
-            <a:endParaRPr lang="en-US" sz="1500" dirty="0"/>
-          </a:p>
-        </p:txBody>
-      </p:sp>
-      <p:sp>
-        <p:nvSpPr>
-          <p:cNvPr id="20" name="Shape 18"/>
-          <p:cNvSpPr/>
-          <p:nvPr/>
-        </p:nvSpPr>
-        <p:spPr>
-          <a:xfrm>
-            <a:off x="8293608" y="4389120"/>
-            <a:ext cx="2157984" cy="0"/>
-          </a:xfrm>
-          <a:prstGeom prst="line">
-            <a:avLst/>
-          </a:prstGeom>
-          <a:noFill/>
-          <a:ln w="25400">
-            <a:solidFill>
-              <a:srgbClr val="8ABBD8"/>
-            </a:solidFill>
-            <a:prstDash val="solid"/>
-          </a:ln>
-        </p:spPr>
-      </p:sp>
-      <p:sp>
-        <p:nvSpPr>
-          <p:cNvPr id="21" name="Text 19"/>
-          <p:cNvSpPr/>
-          <p:nvPr/>
-        </p:nvSpPr>
-        <p:spPr>
-          <a:xfrm>
-            <a:off x="7909560" y="3977640"/>
-            <a:ext cx="2926080" cy="182880"/>
-          </a:xfrm>
-          <a:prstGeom prst="rect">
-            <a:avLst/>
-          </a:prstGeom>
-          <a:noFill/>
-          <a:ln/>
-        </p:spPr>
-        <p:txBody>
-          <a:bodyPr wrap="square" lIns="0" tIns="0" rIns="0" bIns="0" rtlCol="0" anchor="ctr"/>
-          <a:lstStyle/>
-          <a:p>
-            <a:pPr algn="ctr" indent="0" marL="0">
-              <a:buNone/>
-            </a:pPr>
-            <a:r>
-              <a:rPr lang="en-US" sz="1000" dirty="0">
-                <a:solidFill>
-                  <a:srgbClr val="003A63"/>
-                </a:solidFill>
-                <a:latin typeface="Aptos" pitchFamily="34" charset="0"/>
-                <a:ea typeface="Aptos" pitchFamily="34" charset="-122"/>
-                <a:cs typeface="Aptos" pitchFamily="34" charset="-120"/>
-              </a:rPr>
-              <a:t>Dependencies visible</a:t>
-            </a:r>
-            <a:endParaRPr lang="en-US" sz="1000" dirty="0"/>
-          </a:p>
-        </p:txBody>
-      </p:sp>
-      <p:sp>
-        <p:nvSpPr>
-          <p:cNvPr id="22" name="Shape 20"/>
           <p:cNvSpPr/>
           <p:nvPr/>
         </p:nvSpPr>
@@ -12810,7 +11173,7 @@
       </p:sp>
       <p:sp>
         <p:nvSpPr>
-          <p:cNvPr id="23" name="Text 21"/>
+          <p:cNvPr id="17" name="Text 15"/>
           <p:cNvSpPr/>
           <p:nvPr/>
         </p:nvSpPr>
@@ -12849,7 +11212,7 @@
       </p:sp>
       <p:sp>
         <p:nvSpPr>
-          <p:cNvPr id="24" name="Text 22"/>
+          <p:cNvPr id="18" name="Text 16"/>
           <p:cNvSpPr/>
           <p:nvPr/>
         </p:nvSpPr>
@@ -13357,13 +11720,11 @@
             </a:avLst>
           </a:prstGeom>
           <a:solidFill>
-            <a:srgbClr val="FFFFFF">
-              <a:alpha val="88000"/>
-            </a:srgbClr>
+            <a:srgbClr val="FFFFFF"/>
           </a:solidFill>
           <a:ln w="12700">
             <a:solidFill>
-              <a:srgbClr val="D6E8F2"/>
+              <a:srgbClr val="B9D7E6"/>
             </a:solidFill>
             <a:prstDash val="solid"/>
           </a:ln>
@@ -13371,30 +11732,42 @@
       </p:sp>
       <p:sp>
         <p:nvSpPr>
-          <p:cNvPr id="14" name="Shape 12"/>
-          <p:cNvSpPr/>
-          <p:nvPr/>
-        </p:nvSpPr>
-        <p:spPr>
-          <a:xfrm>
-            <a:off x="7927848" y="3319272"/>
-            <a:ext cx="792480" cy="749808"/>
-          </a:xfrm>
-          <a:prstGeom prst="roundRect">
-            <a:avLst>
-              <a:gd name="adj" fmla="val 14634"/>
-            </a:avLst>
-          </a:prstGeom>
-          <a:solidFill>
-            <a:srgbClr val="0068B7"/>
-          </a:solidFill>
-          <a:ln w="12700">
-            <a:solidFill>
-              <a:srgbClr val="0068B7"/>
-            </a:solidFill>
-            <a:prstDash val="solid"/>
-          </a:ln>
-        </p:spPr>
+          <p:cNvPr id="14" name="Text 12"/>
+          <p:cNvSpPr/>
+          <p:nvPr/>
+        </p:nvSpPr>
+        <p:spPr>
+          <a:xfrm>
+            <a:off x="7799832" y="2935224"/>
+            <a:ext cx="3145536" cy="256032"/>
+          </a:xfrm>
+          <a:prstGeom prst="rect">
+            <a:avLst/>
+          </a:prstGeom>
+          <a:noFill/>
+          <a:ln/>
+        </p:spPr>
+        <p:txBody>
+          <a:bodyPr wrap="square" lIns="0" tIns="0" rIns="0" bIns="0" rtlCol="0" anchor="ctr"/>
+          <a:lstStyle/>
+          <a:p>
+            <a:pPr indent="0" marL="0">
+              <a:buNone/>
+            </a:pPr>
+            <a:r>
+              <a:rPr lang="en-US" sz="1300" b="1" dirty="0">
+                <a:solidFill>
+                  <a:srgbClr val="0068B7"/>
+                </a:solidFill>
+                <a:latin typeface="Aptos" pitchFamily="34" charset="0"/>
+                <a:ea typeface="Aptos" pitchFamily="34" charset="-122"/>
+                <a:cs typeface="Aptos" pitchFamily="34" charset="-120"/>
+              </a:rPr>
+              <a:t>Concept checkpoints</a:t>
+            </a:r>
+            <a:endParaRPr lang="en-US" sz="1300" dirty="0"/>
+          </a:p>
+        </p:txBody>
       </p:sp>
       <p:sp>
         <p:nvSpPr>
@@ -13404,240 +11777,67 @@
         </p:nvSpPr>
         <p:spPr>
           <a:xfrm>
-            <a:off x="8001000" y="3511296"/>
-            <a:ext cx="646176" cy="310896"/>
-          </a:xfrm>
-          <a:prstGeom prst="rect">
-            <a:avLst/>
-          </a:prstGeom>
-          <a:noFill/>
-          <a:ln/>
-        </p:spPr>
-        <p:txBody>
-          <a:bodyPr wrap="square" lIns="0" tIns="0" rIns="0" bIns="0" rtlCol="0" anchor="ctr">
+            <a:off x="7818120" y="3300984"/>
+            <a:ext cx="3090672" cy="877824"/>
+          </a:xfrm>
+          <a:prstGeom prst="rect">
+            <a:avLst/>
+          </a:prstGeom>
+          <a:noFill/>
+          <a:ln/>
+        </p:spPr>
+        <p:txBody>
+          <a:bodyPr wrap="square" lIns="254" tIns="254" rIns="254" bIns="254" rtlCol="0" anchor="t">
             <a:normAutofit/>
           </a:bodyPr>
           <a:lstStyle/>
           <a:p>
-            <a:pPr algn="ctr" indent="0" marL="0">
-              <a:buNone/>
-            </a:pPr>
-            <a:r>
-              <a:rPr lang="en-US" sz="1500" b="1" dirty="0">
-                <a:solidFill>
-                  <a:srgbClr val="FFFFFF"/>
-                </a:solidFill>
-                <a:latin typeface="Aptos" pitchFamily="34" charset="0"/>
-                <a:ea typeface="Aptos" pitchFamily="34" charset="-122"/>
-                <a:cs typeface="Aptos" pitchFamily="34" charset="-120"/>
-              </a:rPr>
-              <a:t>Plan</a:t>
-            </a:r>
-            <a:endParaRPr lang="en-US" sz="1500" dirty="0"/>
+            <a:r>
+              <a:rPr lang="en-US" sz="1380" dirty="0">
+                <a:solidFill>
+                  <a:srgbClr val="17364A"/>
+                </a:solidFill>
+                <a:latin typeface="Aptos" pitchFamily="34" charset="0"/>
+                <a:ea typeface="Aptos" pitchFamily="34" charset="-122"/>
+                <a:cs typeface="Aptos" pitchFamily="34" charset="-120"/>
+              </a:rPr>
+              <a:t>API and event workflow worksheet</a:t>
+            </a:r>
+            <a:endParaRPr lang="en-US" sz="1380" dirty="0"/>
+          </a:p>
+          <a:p>
+            <a:r>
+              <a:rPr lang="en-US" sz="1380" dirty="0">
+                <a:solidFill>
+                  <a:srgbClr val="17364A"/>
+                </a:solidFill>
+                <a:latin typeface="Aptos" pitchFamily="34" charset="0"/>
+                <a:ea typeface="Aptos" pitchFamily="34" charset="-122"/>
+                <a:cs typeface="Aptos" pitchFamily="34" charset="-120"/>
+              </a:rPr>
+              <a:t>Integration risk questions</a:t>
+            </a:r>
+            <a:endParaRPr lang="en-US" sz="1380" dirty="0"/>
+          </a:p>
+          <a:p>
+            <a:r>
+              <a:rPr lang="en-US" sz="1380" dirty="0">
+                <a:solidFill>
+                  <a:srgbClr val="17364A"/>
+                </a:solidFill>
+                <a:latin typeface="Aptos" pitchFamily="34" charset="0"/>
+                <a:ea typeface="Aptos" pitchFamily="34" charset="-122"/>
+                <a:cs typeface="Aptos" pitchFamily="34" charset="-120"/>
+              </a:rPr>
+              <a:t>Access control recommendations</a:t>
+            </a:r>
+            <a:endParaRPr lang="en-US" sz="1380" dirty="0"/>
           </a:p>
         </p:txBody>
       </p:sp>
       <p:sp>
         <p:nvSpPr>
           <p:cNvPr id="16" name="Shape 14"/>
-          <p:cNvSpPr/>
-          <p:nvPr/>
-        </p:nvSpPr>
-        <p:spPr>
-          <a:xfrm>
-            <a:off x="8976360" y="3319272"/>
-            <a:ext cx="792480" cy="749808"/>
-          </a:xfrm>
-          <a:prstGeom prst="roundRect">
-            <a:avLst>
-              <a:gd name="adj" fmla="val 14634"/>
-            </a:avLst>
-          </a:prstGeom>
-          <a:solidFill>
-            <a:srgbClr val="2F8A28"/>
-          </a:solidFill>
-          <a:ln w="12700">
-            <a:solidFill>
-              <a:srgbClr val="2F8A28"/>
-            </a:solidFill>
-            <a:prstDash val="solid"/>
-          </a:ln>
-        </p:spPr>
-      </p:sp>
-      <p:sp>
-        <p:nvSpPr>
-          <p:cNvPr id="17" name="Text 15"/>
-          <p:cNvSpPr/>
-          <p:nvPr/>
-        </p:nvSpPr>
-        <p:spPr>
-          <a:xfrm>
-            <a:off x="9049512" y="3511296"/>
-            <a:ext cx="646176" cy="310896"/>
-          </a:xfrm>
-          <a:prstGeom prst="rect">
-            <a:avLst/>
-          </a:prstGeom>
-          <a:noFill/>
-          <a:ln/>
-        </p:spPr>
-        <p:txBody>
-          <a:bodyPr wrap="square" lIns="0" tIns="0" rIns="0" bIns="0" rtlCol="0" anchor="ctr">
-            <a:normAutofit/>
-          </a:bodyPr>
-          <a:lstStyle/>
-          <a:p>
-            <a:pPr algn="ctr" indent="0" marL="0">
-              <a:buNone/>
-            </a:pPr>
-            <a:r>
-              <a:rPr lang="en-US" sz="1500" b="1" dirty="0">
-                <a:solidFill>
-                  <a:srgbClr val="FFFFFF"/>
-                </a:solidFill>
-                <a:latin typeface="Aptos" pitchFamily="34" charset="0"/>
-                <a:ea typeface="Aptos" pitchFamily="34" charset="-122"/>
-                <a:cs typeface="Aptos" pitchFamily="34" charset="-120"/>
-              </a:rPr>
-              <a:t>Do</a:t>
-            </a:r>
-            <a:endParaRPr lang="en-US" sz="1500" dirty="0"/>
-          </a:p>
-        </p:txBody>
-      </p:sp>
-      <p:sp>
-        <p:nvSpPr>
-          <p:cNvPr id="18" name="Shape 16"/>
-          <p:cNvSpPr/>
-          <p:nvPr/>
-        </p:nvSpPr>
-        <p:spPr>
-          <a:xfrm>
-            <a:off x="10024872" y="3319272"/>
-            <a:ext cx="792480" cy="749808"/>
-          </a:xfrm>
-          <a:prstGeom prst="roundRect">
-            <a:avLst>
-              <a:gd name="adj" fmla="val 14634"/>
-            </a:avLst>
-          </a:prstGeom>
-          <a:solidFill>
-            <a:srgbClr val="D69A2D"/>
-          </a:solidFill>
-          <a:ln w="12700">
-            <a:solidFill>
-              <a:srgbClr val="D69A2D"/>
-            </a:solidFill>
-            <a:prstDash val="solid"/>
-          </a:ln>
-        </p:spPr>
-      </p:sp>
-      <p:sp>
-        <p:nvSpPr>
-          <p:cNvPr id="19" name="Text 17"/>
-          <p:cNvSpPr/>
-          <p:nvPr/>
-        </p:nvSpPr>
-        <p:spPr>
-          <a:xfrm>
-            <a:off x="10098024" y="3511296"/>
-            <a:ext cx="646176" cy="310896"/>
-          </a:xfrm>
-          <a:prstGeom prst="rect">
-            <a:avLst/>
-          </a:prstGeom>
-          <a:noFill/>
-          <a:ln/>
-        </p:spPr>
-        <p:txBody>
-          <a:bodyPr wrap="square" lIns="0" tIns="0" rIns="0" bIns="0" rtlCol="0" anchor="ctr">
-            <a:normAutofit/>
-          </a:bodyPr>
-          <a:lstStyle/>
-          <a:p>
-            <a:pPr algn="ctr" indent="0" marL="0">
-              <a:buNone/>
-            </a:pPr>
-            <a:r>
-              <a:rPr lang="en-US" sz="1500" b="1" dirty="0">
-                <a:solidFill>
-                  <a:srgbClr val="FFFFFF"/>
-                </a:solidFill>
-                <a:latin typeface="Aptos" pitchFamily="34" charset="0"/>
-                <a:ea typeface="Aptos" pitchFamily="34" charset="-122"/>
-                <a:cs typeface="Aptos" pitchFamily="34" charset="-120"/>
-              </a:rPr>
-              <a:t>Review</a:t>
-            </a:r>
-            <a:endParaRPr lang="en-US" sz="1500" dirty="0"/>
-          </a:p>
-        </p:txBody>
-      </p:sp>
-      <p:sp>
-        <p:nvSpPr>
-          <p:cNvPr id="20" name="Shape 18"/>
-          <p:cNvSpPr/>
-          <p:nvPr/>
-        </p:nvSpPr>
-        <p:spPr>
-          <a:xfrm>
-            <a:off x="8293608" y="4389120"/>
-            <a:ext cx="2157984" cy="0"/>
-          </a:xfrm>
-          <a:prstGeom prst="line">
-            <a:avLst/>
-          </a:prstGeom>
-          <a:noFill/>
-          <a:ln w="25400">
-            <a:solidFill>
-              <a:srgbClr val="8ABBD8"/>
-            </a:solidFill>
-            <a:prstDash val="solid"/>
-          </a:ln>
-        </p:spPr>
-      </p:sp>
-      <p:sp>
-        <p:nvSpPr>
-          <p:cNvPr id="21" name="Text 19"/>
-          <p:cNvSpPr/>
-          <p:nvPr/>
-        </p:nvSpPr>
-        <p:spPr>
-          <a:xfrm>
-            <a:off x="7909560" y="3977640"/>
-            <a:ext cx="2926080" cy="182880"/>
-          </a:xfrm>
-          <a:prstGeom prst="rect">
-            <a:avLst/>
-          </a:prstGeom>
-          <a:noFill/>
-          <a:ln/>
-        </p:spPr>
-        <p:txBody>
-          <a:bodyPr wrap="square" lIns="0" tIns="0" rIns="0" bIns="0" rtlCol="0" anchor="ctr"/>
-          <a:lstStyle/>
-          <a:p>
-            <a:pPr algn="ctr" indent="0" marL="0">
-              <a:buNone/>
-            </a:pPr>
-            <a:r>
-              <a:rPr lang="en-US" sz="1000" dirty="0">
-                <a:solidFill>
-                  <a:srgbClr val="003A63"/>
-                </a:solidFill>
-                <a:latin typeface="Aptos" pitchFamily="34" charset="0"/>
-                <a:ea typeface="Aptos" pitchFamily="34" charset="-122"/>
-                <a:cs typeface="Aptos" pitchFamily="34" charset="-120"/>
-              </a:rPr>
-              <a:t>Dependencies visible</a:t>
-            </a:r>
-            <a:endParaRPr lang="en-US" sz="1000" dirty="0"/>
-          </a:p>
-        </p:txBody>
-      </p:sp>
-      <p:sp>
-        <p:nvSpPr>
-          <p:cNvPr id="22" name="Shape 20"/>
           <p:cNvSpPr/>
           <p:nvPr/>
         </p:nvSpPr>
@@ -13664,7 +11864,7 @@
       </p:sp>
       <p:sp>
         <p:nvSpPr>
-          <p:cNvPr id="23" name="Text 21"/>
+          <p:cNvPr id="17" name="Text 15"/>
           <p:cNvSpPr/>
           <p:nvPr/>
         </p:nvSpPr>
@@ -13703,7 +11903,7 @@
       </p:sp>
       <p:sp>
         <p:nvSpPr>
-          <p:cNvPr id="24" name="Text 22"/>
+          <p:cNvPr id="18" name="Text 16"/>
           <p:cNvSpPr/>
           <p:nvPr/>
         </p:nvSpPr>
@@ -14211,13 +12411,11 @@
             </a:avLst>
           </a:prstGeom>
           <a:solidFill>
-            <a:srgbClr val="FFFFFF">
-              <a:alpha val="88000"/>
-            </a:srgbClr>
+            <a:srgbClr val="FFFFFF"/>
           </a:solidFill>
           <a:ln w="12700">
             <a:solidFill>
-              <a:srgbClr val="D6E8F2"/>
+              <a:srgbClr val="B9D7E6"/>
             </a:solidFill>
             <a:prstDash val="solid"/>
           </a:ln>
@@ -14225,30 +12423,42 @@
       </p:sp>
       <p:sp>
         <p:nvSpPr>
-          <p:cNvPr id="14" name="Shape 12"/>
-          <p:cNvSpPr/>
-          <p:nvPr/>
-        </p:nvSpPr>
-        <p:spPr>
-          <a:xfrm>
-            <a:off x="7927848" y="3319272"/>
-            <a:ext cx="792480" cy="749808"/>
-          </a:xfrm>
-          <a:prstGeom prst="roundRect">
-            <a:avLst>
-              <a:gd name="adj" fmla="val 14634"/>
-            </a:avLst>
-          </a:prstGeom>
-          <a:solidFill>
-            <a:srgbClr val="0068B7"/>
-          </a:solidFill>
-          <a:ln w="12700">
-            <a:solidFill>
-              <a:srgbClr val="0068B7"/>
-            </a:solidFill>
-            <a:prstDash val="solid"/>
-          </a:ln>
-        </p:spPr>
+          <p:cNvPr id="14" name="Text 12"/>
+          <p:cNvSpPr/>
+          <p:nvPr/>
+        </p:nvSpPr>
+        <p:spPr>
+          <a:xfrm>
+            <a:off x="7799832" y="2935224"/>
+            <a:ext cx="3145536" cy="256032"/>
+          </a:xfrm>
+          <a:prstGeom prst="rect">
+            <a:avLst/>
+          </a:prstGeom>
+          <a:noFill/>
+          <a:ln/>
+        </p:spPr>
+        <p:txBody>
+          <a:bodyPr wrap="square" lIns="0" tIns="0" rIns="0" bIns="0" rtlCol="0" anchor="ctr"/>
+          <a:lstStyle/>
+          <a:p>
+            <a:pPr indent="0" marL="0">
+              <a:buNone/>
+            </a:pPr>
+            <a:r>
+              <a:rPr lang="en-US" sz="1300" b="1" dirty="0">
+                <a:solidFill>
+                  <a:srgbClr val="0068B7"/>
+                </a:solidFill>
+                <a:latin typeface="Aptos" pitchFamily="34" charset="0"/>
+                <a:ea typeface="Aptos" pitchFamily="34" charset="-122"/>
+                <a:cs typeface="Aptos" pitchFamily="34" charset="-120"/>
+              </a:rPr>
+              <a:t>Concept checkpoints</a:t>
+            </a:r>
+            <a:endParaRPr lang="en-US" sz="1300" dirty="0"/>
+          </a:p>
+        </p:txBody>
       </p:sp>
       <p:sp>
         <p:nvSpPr>
@@ -14258,240 +12468,67 @@
         </p:nvSpPr>
         <p:spPr>
           <a:xfrm>
-            <a:off x="8001000" y="3511296"/>
-            <a:ext cx="646176" cy="310896"/>
-          </a:xfrm>
-          <a:prstGeom prst="rect">
-            <a:avLst/>
-          </a:prstGeom>
-          <a:noFill/>
-          <a:ln/>
-        </p:spPr>
-        <p:txBody>
-          <a:bodyPr wrap="square" lIns="0" tIns="0" rIns="0" bIns="0" rtlCol="0" anchor="ctr">
+            <a:off x="7818120" y="3300984"/>
+            <a:ext cx="3090672" cy="877824"/>
+          </a:xfrm>
+          <a:prstGeom prst="rect">
+            <a:avLst/>
+          </a:prstGeom>
+          <a:noFill/>
+          <a:ln/>
+        </p:spPr>
+        <p:txBody>
+          <a:bodyPr wrap="square" lIns="254" tIns="254" rIns="254" bIns="254" rtlCol="0" anchor="t">
             <a:normAutofit/>
           </a:bodyPr>
           <a:lstStyle/>
           <a:p>
-            <a:pPr algn="ctr" indent="0" marL="0">
-              <a:buNone/>
-            </a:pPr>
-            <a:r>
-              <a:rPr lang="en-US" sz="1500" b="1" dirty="0">
-                <a:solidFill>
-                  <a:srgbClr val="FFFFFF"/>
-                </a:solidFill>
-                <a:latin typeface="Aptos" pitchFamily="34" charset="0"/>
-                <a:ea typeface="Aptos" pitchFamily="34" charset="-122"/>
-                <a:cs typeface="Aptos" pitchFamily="34" charset="-120"/>
-              </a:rPr>
-              <a:t>Plan</a:t>
-            </a:r>
-            <a:endParaRPr lang="en-US" sz="1500" dirty="0"/>
+            <a:r>
+              <a:rPr lang="en-US" sz="1380" dirty="0">
+                <a:solidFill>
+                  <a:srgbClr val="17364A"/>
+                </a:solidFill>
+                <a:latin typeface="Aptos" pitchFamily="34" charset="0"/>
+                <a:ea typeface="Aptos" pitchFamily="34" charset="-122"/>
+                <a:cs typeface="Aptos" pitchFamily="34" charset="-120"/>
+              </a:rPr>
+              <a:t>1.</a:t>
+            </a:r>
+            <a:endParaRPr lang="en-US" sz="1380" dirty="0"/>
+          </a:p>
+          <a:p>
+            <a:r>
+              <a:rPr lang="en-US" sz="1380" dirty="0">
+                <a:solidFill>
+                  <a:srgbClr val="17364A"/>
+                </a:solidFill>
+                <a:latin typeface="Aptos" pitchFamily="34" charset="0"/>
+                <a:ea typeface="Aptos" pitchFamily="34" charset="-122"/>
+                <a:cs typeface="Aptos" pitchFamily="34" charset="-120"/>
+              </a:rPr>
+              <a:t>What does an API allow systems to do?</a:t>
+            </a:r>
+            <a:endParaRPr lang="en-US" sz="1380" dirty="0"/>
+          </a:p>
+          <a:p>
+            <a:r>
+              <a:rPr lang="en-US" sz="1380" dirty="0">
+                <a:solidFill>
+                  <a:srgbClr val="17364A"/>
+                </a:solidFill>
+                <a:latin typeface="Aptos" pitchFamily="34" charset="0"/>
+                <a:ea typeface="Aptos" pitchFamily="34" charset="-122"/>
+                <a:cs typeface="Aptos" pitchFamily="34" charset="-120"/>
+              </a:rPr>
+              <a:t>2.</a:t>
+            </a:r>
+            <a:endParaRPr lang="en-US" sz="1380" dirty="0"/>
           </a:p>
         </p:txBody>
       </p:sp>
       <p:sp>
         <p:nvSpPr>
           <p:cNvPr id="16" name="Shape 14"/>
-          <p:cNvSpPr/>
-          <p:nvPr/>
-        </p:nvSpPr>
-        <p:spPr>
-          <a:xfrm>
-            <a:off x="8976360" y="3319272"/>
-            <a:ext cx="792480" cy="749808"/>
-          </a:xfrm>
-          <a:prstGeom prst="roundRect">
-            <a:avLst>
-              <a:gd name="adj" fmla="val 14634"/>
-            </a:avLst>
-          </a:prstGeom>
-          <a:solidFill>
-            <a:srgbClr val="2F8A28"/>
-          </a:solidFill>
-          <a:ln w="12700">
-            <a:solidFill>
-              <a:srgbClr val="2F8A28"/>
-            </a:solidFill>
-            <a:prstDash val="solid"/>
-          </a:ln>
-        </p:spPr>
-      </p:sp>
-      <p:sp>
-        <p:nvSpPr>
-          <p:cNvPr id="17" name="Text 15"/>
-          <p:cNvSpPr/>
-          <p:nvPr/>
-        </p:nvSpPr>
-        <p:spPr>
-          <a:xfrm>
-            <a:off x="9049512" y="3511296"/>
-            <a:ext cx="646176" cy="310896"/>
-          </a:xfrm>
-          <a:prstGeom prst="rect">
-            <a:avLst/>
-          </a:prstGeom>
-          <a:noFill/>
-          <a:ln/>
-        </p:spPr>
-        <p:txBody>
-          <a:bodyPr wrap="square" lIns="0" tIns="0" rIns="0" bIns="0" rtlCol="0" anchor="ctr">
-            <a:normAutofit/>
-          </a:bodyPr>
-          <a:lstStyle/>
-          <a:p>
-            <a:pPr algn="ctr" indent="0" marL="0">
-              <a:buNone/>
-            </a:pPr>
-            <a:r>
-              <a:rPr lang="en-US" sz="1500" b="1" dirty="0">
-                <a:solidFill>
-                  <a:srgbClr val="FFFFFF"/>
-                </a:solidFill>
-                <a:latin typeface="Aptos" pitchFamily="34" charset="0"/>
-                <a:ea typeface="Aptos" pitchFamily="34" charset="-122"/>
-                <a:cs typeface="Aptos" pitchFamily="34" charset="-120"/>
-              </a:rPr>
-              <a:t>Do</a:t>
-            </a:r>
-            <a:endParaRPr lang="en-US" sz="1500" dirty="0"/>
-          </a:p>
-        </p:txBody>
-      </p:sp>
-      <p:sp>
-        <p:nvSpPr>
-          <p:cNvPr id="18" name="Shape 16"/>
-          <p:cNvSpPr/>
-          <p:nvPr/>
-        </p:nvSpPr>
-        <p:spPr>
-          <a:xfrm>
-            <a:off x="10024872" y="3319272"/>
-            <a:ext cx="792480" cy="749808"/>
-          </a:xfrm>
-          <a:prstGeom prst="roundRect">
-            <a:avLst>
-              <a:gd name="adj" fmla="val 14634"/>
-            </a:avLst>
-          </a:prstGeom>
-          <a:solidFill>
-            <a:srgbClr val="D69A2D"/>
-          </a:solidFill>
-          <a:ln w="12700">
-            <a:solidFill>
-              <a:srgbClr val="D69A2D"/>
-            </a:solidFill>
-            <a:prstDash val="solid"/>
-          </a:ln>
-        </p:spPr>
-      </p:sp>
-      <p:sp>
-        <p:nvSpPr>
-          <p:cNvPr id="19" name="Text 17"/>
-          <p:cNvSpPr/>
-          <p:nvPr/>
-        </p:nvSpPr>
-        <p:spPr>
-          <a:xfrm>
-            <a:off x="10098024" y="3511296"/>
-            <a:ext cx="646176" cy="310896"/>
-          </a:xfrm>
-          <a:prstGeom prst="rect">
-            <a:avLst/>
-          </a:prstGeom>
-          <a:noFill/>
-          <a:ln/>
-        </p:spPr>
-        <p:txBody>
-          <a:bodyPr wrap="square" lIns="0" tIns="0" rIns="0" bIns="0" rtlCol="0" anchor="ctr">
-            <a:normAutofit/>
-          </a:bodyPr>
-          <a:lstStyle/>
-          <a:p>
-            <a:pPr algn="ctr" indent="0" marL="0">
-              <a:buNone/>
-            </a:pPr>
-            <a:r>
-              <a:rPr lang="en-US" sz="1500" b="1" dirty="0">
-                <a:solidFill>
-                  <a:srgbClr val="FFFFFF"/>
-                </a:solidFill>
-                <a:latin typeface="Aptos" pitchFamily="34" charset="0"/>
-                <a:ea typeface="Aptos" pitchFamily="34" charset="-122"/>
-                <a:cs typeface="Aptos" pitchFamily="34" charset="-120"/>
-              </a:rPr>
-              <a:t>Review</a:t>
-            </a:r>
-            <a:endParaRPr lang="en-US" sz="1500" dirty="0"/>
-          </a:p>
-        </p:txBody>
-      </p:sp>
-      <p:sp>
-        <p:nvSpPr>
-          <p:cNvPr id="20" name="Shape 18"/>
-          <p:cNvSpPr/>
-          <p:nvPr/>
-        </p:nvSpPr>
-        <p:spPr>
-          <a:xfrm>
-            <a:off x="8293608" y="4389120"/>
-            <a:ext cx="2157984" cy="0"/>
-          </a:xfrm>
-          <a:prstGeom prst="line">
-            <a:avLst/>
-          </a:prstGeom>
-          <a:noFill/>
-          <a:ln w="25400">
-            <a:solidFill>
-              <a:srgbClr val="8ABBD8"/>
-            </a:solidFill>
-            <a:prstDash val="solid"/>
-          </a:ln>
-        </p:spPr>
-      </p:sp>
-      <p:sp>
-        <p:nvSpPr>
-          <p:cNvPr id="21" name="Text 19"/>
-          <p:cNvSpPr/>
-          <p:nvPr/>
-        </p:nvSpPr>
-        <p:spPr>
-          <a:xfrm>
-            <a:off x="7909560" y="3977640"/>
-            <a:ext cx="2926080" cy="182880"/>
-          </a:xfrm>
-          <a:prstGeom prst="rect">
-            <a:avLst/>
-          </a:prstGeom>
-          <a:noFill/>
-          <a:ln/>
-        </p:spPr>
-        <p:txBody>
-          <a:bodyPr wrap="square" lIns="0" tIns="0" rIns="0" bIns="0" rtlCol="0" anchor="ctr"/>
-          <a:lstStyle/>
-          <a:p>
-            <a:pPr algn="ctr" indent="0" marL="0">
-              <a:buNone/>
-            </a:pPr>
-            <a:r>
-              <a:rPr lang="en-US" sz="1000" dirty="0">
-                <a:solidFill>
-                  <a:srgbClr val="003A63"/>
-                </a:solidFill>
-                <a:latin typeface="Aptos" pitchFamily="34" charset="0"/>
-                <a:ea typeface="Aptos" pitchFamily="34" charset="-122"/>
-                <a:cs typeface="Aptos" pitchFamily="34" charset="-120"/>
-              </a:rPr>
-              <a:t>Dependencies visible</a:t>
-            </a:r>
-            <a:endParaRPr lang="en-US" sz="1000" dirty="0"/>
-          </a:p>
-        </p:txBody>
-      </p:sp>
-      <p:sp>
-        <p:nvSpPr>
-          <p:cNvPr id="22" name="Shape 20"/>
           <p:cNvSpPr/>
           <p:nvPr/>
         </p:nvSpPr>
@@ -14518,7 +12555,7 @@
       </p:sp>
       <p:sp>
         <p:nvSpPr>
-          <p:cNvPr id="23" name="Text 21"/>
+          <p:cNvPr id="17" name="Text 15"/>
           <p:cNvSpPr/>
           <p:nvPr/>
         </p:nvSpPr>
@@ -14557,7 +12594,7 @@
       </p:sp>
       <p:sp>
         <p:nvSpPr>
-          <p:cNvPr id="24" name="Text 22"/>
+          <p:cNvPr id="18" name="Text 16"/>
           <p:cNvSpPr/>
           <p:nvPr/>
         </p:nvSpPr>
@@ -15065,13 +13102,11 @@
             </a:avLst>
           </a:prstGeom>
           <a:solidFill>
-            <a:srgbClr val="FFFFFF">
-              <a:alpha val="88000"/>
-            </a:srgbClr>
+            <a:srgbClr val="FFFFFF"/>
           </a:solidFill>
           <a:ln w="12700">
             <a:solidFill>
-              <a:srgbClr val="D6E8F2"/>
+              <a:srgbClr val="B9D7E6"/>
             </a:solidFill>
             <a:prstDash val="solid"/>
           </a:ln>
@@ -15079,30 +13114,42 @@
       </p:sp>
       <p:sp>
         <p:nvSpPr>
-          <p:cNvPr id="14" name="Shape 12"/>
-          <p:cNvSpPr/>
-          <p:nvPr/>
-        </p:nvSpPr>
-        <p:spPr>
-          <a:xfrm>
-            <a:off x="7927848" y="3319272"/>
-            <a:ext cx="792480" cy="749808"/>
-          </a:xfrm>
-          <a:prstGeom prst="roundRect">
-            <a:avLst>
-              <a:gd name="adj" fmla="val 14634"/>
-            </a:avLst>
-          </a:prstGeom>
-          <a:solidFill>
-            <a:srgbClr val="0068B7"/>
-          </a:solidFill>
-          <a:ln w="12700">
-            <a:solidFill>
-              <a:srgbClr val="0068B7"/>
-            </a:solidFill>
-            <a:prstDash val="solid"/>
-          </a:ln>
-        </p:spPr>
+          <p:cNvPr id="14" name="Text 12"/>
+          <p:cNvSpPr/>
+          <p:nvPr/>
+        </p:nvSpPr>
+        <p:spPr>
+          <a:xfrm>
+            <a:off x="7799832" y="2935224"/>
+            <a:ext cx="3145536" cy="256032"/>
+          </a:xfrm>
+          <a:prstGeom prst="rect">
+            <a:avLst/>
+          </a:prstGeom>
+          <a:noFill/>
+          <a:ln/>
+        </p:spPr>
+        <p:txBody>
+          <a:bodyPr wrap="square" lIns="0" tIns="0" rIns="0" bIns="0" rtlCol="0" anchor="ctr"/>
+          <a:lstStyle/>
+          <a:p>
+            <a:pPr indent="0" marL="0">
+              <a:buNone/>
+            </a:pPr>
+            <a:r>
+              <a:rPr lang="en-US" sz="1300" b="1" dirty="0">
+                <a:solidFill>
+                  <a:srgbClr val="0068B7"/>
+                </a:solidFill>
+                <a:latin typeface="Aptos" pitchFamily="34" charset="0"/>
+                <a:ea typeface="Aptos" pitchFamily="34" charset="-122"/>
+                <a:cs typeface="Aptos" pitchFamily="34" charset="-120"/>
+              </a:rPr>
+              <a:t>Concept checkpoints</a:t>
+            </a:r>
+            <a:endParaRPr lang="en-US" sz="1300" dirty="0"/>
+          </a:p>
+        </p:txBody>
       </p:sp>
       <p:sp>
         <p:nvSpPr>
@@ -15112,240 +13159,67 @@
         </p:nvSpPr>
         <p:spPr>
           <a:xfrm>
-            <a:off x="8001000" y="3511296"/>
-            <a:ext cx="646176" cy="310896"/>
-          </a:xfrm>
-          <a:prstGeom prst="rect">
-            <a:avLst/>
-          </a:prstGeom>
-          <a:noFill/>
-          <a:ln/>
-        </p:spPr>
-        <p:txBody>
-          <a:bodyPr wrap="square" lIns="0" tIns="0" rIns="0" bIns="0" rtlCol="0" anchor="ctr">
+            <a:off x="7818120" y="3300984"/>
+            <a:ext cx="3090672" cy="877824"/>
+          </a:xfrm>
+          <a:prstGeom prst="rect">
+            <a:avLst/>
+          </a:prstGeom>
+          <a:noFill/>
+          <a:ln/>
+        </p:spPr>
+        <p:txBody>
+          <a:bodyPr wrap="square" lIns="254" tIns="254" rIns="254" bIns="254" rtlCol="0" anchor="t">
             <a:normAutofit/>
           </a:bodyPr>
           <a:lstStyle/>
           <a:p>
-            <a:pPr algn="ctr" indent="0" marL="0">
-              <a:buNone/>
-            </a:pPr>
-            <a:r>
-              <a:rPr lang="en-US" sz="1500" b="1" dirty="0">
-                <a:solidFill>
-                  <a:srgbClr val="FFFFFF"/>
-                </a:solidFill>
-                <a:latin typeface="Aptos" pitchFamily="34" charset="0"/>
-                <a:ea typeface="Aptos" pitchFamily="34" charset="-122"/>
-                <a:cs typeface="Aptos" pitchFamily="34" charset="-120"/>
-              </a:rPr>
-              <a:t>Plan</a:t>
-            </a:r>
-            <a:endParaRPr lang="en-US" sz="1500" dirty="0"/>
+            <a:r>
+              <a:rPr lang="en-US" sz="1380" dirty="0">
+                <a:solidFill>
+                  <a:srgbClr val="17364A"/>
+                </a:solidFill>
+                <a:latin typeface="Aptos" pitchFamily="34" charset="0"/>
+                <a:ea typeface="Aptos" pitchFamily="34" charset="-122"/>
+                <a:cs typeface="Aptos" pitchFamily="34" charset="-120"/>
+              </a:rPr>
+              <a:t>HL7 FHIR API documentation: https://hl7.org/fhir/</a:t>
+            </a:r>
+            <a:endParaRPr lang="en-US" sz="1380" dirty="0"/>
+          </a:p>
+          <a:p>
+            <a:r>
+              <a:rPr lang="en-US" sz="1380" dirty="0">
+                <a:solidFill>
+                  <a:srgbClr val="17364A"/>
+                </a:solidFill>
+                <a:latin typeface="Aptos" pitchFamily="34" charset="0"/>
+                <a:ea typeface="Aptos" pitchFamily="34" charset="-122"/>
+                <a:cs typeface="Aptos" pitchFamily="34" charset="-120"/>
+              </a:rPr>
+              <a:t>ONC interoperability resources</a:t>
+            </a:r>
+            <a:endParaRPr lang="en-US" sz="1380" dirty="0"/>
+          </a:p>
+          <a:p>
+            <a:r>
+              <a:rPr lang="en-US" sz="1380" dirty="0">
+                <a:solidFill>
+                  <a:srgbClr val="17364A"/>
+                </a:solidFill>
+                <a:latin typeface="Aptos" pitchFamily="34" charset="0"/>
+                <a:ea typeface="Aptos" pitchFamily="34" charset="-122"/>
+                <a:cs typeface="Aptos" pitchFamily="34" charset="-120"/>
+              </a:rPr>
+              <a:t>Agency cybersecurity and access control policies</a:t>
+            </a:r>
+            <a:endParaRPr lang="en-US" sz="1380" dirty="0"/>
           </a:p>
         </p:txBody>
       </p:sp>
       <p:sp>
         <p:nvSpPr>
           <p:cNvPr id="16" name="Shape 14"/>
-          <p:cNvSpPr/>
-          <p:nvPr/>
-        </p:nvSpPr>
-        <p:spPr>
-          <a:xfrm>
-            <a:off x="8976360" y="3319272"/>
-            <a:ext cx="792480" cy="749808"/>
-          </a:xfrm>
-          <a:prstGeom prst="roundRect">
-            <a:avLst>
-              <a:gd name="adj" fmla="val 14634"/>
-            </a:avLst>
-          </a:prstGeom>
-          <a:solidFill>
-            <a:srgbClr val="2F8A28"/>
-          </a:solidFill>
-          <a:ln w="12700">
-            <a:solidFill>
-              <a:srgbClr val="2F8A28"/>
-            </a:solidFill>
-            <a:prstDash val="solid"/>
-          </a:ln>
-        </p:spPr>
-      </p:sp>
-      <p:sp>
-        <p:nvSpPr>
-          <p:cNvPr id="17" name="Text 15"/>
-          <p:cNvSpPr/>
-          <p:nvPr/>
-        </p:nvSpPr>
-        <p:spPr>
-          <a:xfrm>
-            <a:off x="9049512" y="3511296"/>
-            <a:ext cx="646176" cy="310896"/>
-          </a:xfrm>
-          <a:prstGeom prst="rect">
-            <a:avLst/>
-          </a:prstGeom>
-          <a:noFill/>
-          <a:ln/>
-        </p:spPr>
-        <p:txBody>
-          <a:bodyPr wrap="square" lIns="0" tIns="0" rIns="0" bIns="0" rtlCol="0" anchor="ctr">
-            <a:normAutofit/>
-          </a:bodyPr>
-          <a:lstStyle/>
-          <a:p>
-            <a:pPr algn="ctr" indent="0" marL="0">
-              <a:buNone/>
-            </a:pPr>
-            <a:r>
-              <a:rPr lang="en-US" sz="1500" b="1" dirty="0">
-                <a:solidFill>
-                  <a:srgbClr val="FFFFFF"/>
-                </a:solidFill>
-                <a:latin typeface="Aptos" pitchFamily="34" charset="0"/>
-                <a:ea typeface="Aptos" pitchFamily="34" charset="-122"/>
-                <a:cs typeface="Aptos" pitchFamily="34" charset="-120"/>
-              </a:rPr>
-              <a:t>Do</a:t>
-            </a:r>
-            <a:endParaRPr lang="en-US" sz="1500" dirty="0"/>
-          </a:p>
-        </p:txBody>
-      </p:sp>
-      <p:sp>
-        <p:nvSpPr>
-          <p:cNvPr id="18" name="Shape 16"/>
-          <p:cNvSpPr/>
-          <p:nvPr/>
-        </p:nvSpPr>
-        <p:spPr>
-          <a:xfrm>
-            <a:off x="10024872" y="3319272"/>
-            <a:ext cx="792480" cy="749808"/>
-          </a:xfrm>
-          <a:prstGeom prst="roundRect">
-            <a:avLst>
-              <a:gd name="adj" fmla="val 14634"/>
-            </a:avLst>
-          </a:prstGeom>
-          <a:solidFill>
-            <a:srgbClr val="D69A2D"/>
-          </a:solidFill>
-          <a:ln w="12700">
-            <a:solidFill>
-              <a:srgbClr val="D69A2D"/>
-            </a:solidFill>
-            <a:prstDash val="solid"/>
-          </a:ln>
-        </p:spPr>
-      </p:sp>
-      <p:sp>
-        <p:nvSpPr>
-          <p:cNvPr id="19" name="Text 17"/>
-          <p:cNvSpPr/>
-          <p:nvPr/>
-        </p:nvSpPr>
-        <p:spPr>
-          <a:xfrm>
-            <a:off x="10098024" y="3511296"/>
-            <a:ext cx="646176" cy="310896"/>
-          </a:xfrm>
-          <a:prstGeom prst="rect">
-            <a:avLst/>
-          </a:prstGeom>
-          <a:noFill/>
-          <a:ln/>
-        </p:spPr>
-        <p:txBody>
-          <a:bodyPr wrap="square" lIns="0" tIns="0" rIns="0" bIns="0" rtlCol="0" anchor="ctr">
-            <a:normAutofit/>
-          </a:bodyPr>
-          <a:lstStyle/>
-          <a:p>
-            <a:pPr algn="ctr" indent="0" marL="0">
-              <a:buNone/>
-            </a:pPr>
-            <a:r>
-              <a:rPr lang="en-US" sz="1500" b="1" dirty="0">
-                <a:solidFill>
-                  <a:srgbClr val="FFFFFF"/>
-                </a:solidFill>
-                <a:latin typeface="Aptos" pitchFamily="34" charset="0"/>
-                <a:ea typeface="Aptos" pitchFamily="34" charset="-122"/>
-                <a:cs typeface="Aptos" pitchFamily="34" charset="-120"/>
-              </a:rPr>
-              <a:t>Review</a:t>
-            </a:r>
-            <a:endParaRPr lang="en-US" sz="1500" dirty="0"/>
-          </a:p>
-        </p:txBody>
-      </p:sp>
-      <p:sp>
-        <p:nvSpPr>
-          <p:cNvPr id="20" name="Shape 18"/>
-          <p:cNvSpPr/>
-          <p:nvPr/>
-        </p:nvSpPr>
-        <p:spPr>
-          <a:xfrm>
-            <a:off x="8293608" y="4389120"/>
-            <a:ext cx="2157984" cy="0"/>
-          </a:xfrm>
-          <a:prstGeom prst="line">
-            <a:avLst/>
-          </a:prstGeom>
-          <a:noFill/>
-          <a:ln w="25400">
-            <a:solidFill>
-              <a:srgbClr val="8ABBD8"/>
-            </a:solidFill>
-            <a:prstDash val="solid"/>
-          </a:ln>
-        </p:spPr>
-      </p:sp>
-      <p:sp>
-        <p:nvSpPr>
-          <p:cNvPr id="21" name="Text 19"/>
-          <p:cNvSpPr/>
-          <p:nvPr/>
-        </p:nvSpPr>
-        <p:spPr>
-          <a:xfrm>
-            <a:off x="7909560" y="3977640"/>
-            <a:ext cx="2926080" cy="182880"/>
-          </a:xfrm>
-          <a:prstGeom prst="rect">
-            <a:avLst/>
-          </a:prstGeom>
-          <a:noFill/>
-          <a:ln/>
-        </p:spPr>
-        <p:txBody>
-          <a:bodyPr wrap="square" lIns="0" tIns="0" rIns="0" bIns="0" rtlCol="0" anchor="ctr"/>
-          <a:lstStyle/>
-          <a:p>
-            <a:pPr algn="ctr" indent="0" marL="0">
-              <a:buNone/>
-            </a:pPr>
-            <a:r>
-              <a:rPr lang="en-US" sz="1000" dirty="0">
-                <a:solidFill>
-                  <a:srgbClr val="003A63"/>
-                </a:solidFill>
-                <a:latin typeface="Aptos" pitchFamily="34" charset="0"/>
-                <a:ea typeface="Aptos" pitchFamily="34" charset="-122"/>
-                <a:cs typeface="Aptos" pitchFamily="34" charset="-120"/>
-              </a:rPr>
-              <a:t>Dependencies visible</a:t>
-            </a:r>
-            <a:endParaRPr lang="en-US" sz="1000" dirty="0"/>
-          </a:p>
-        </p:txBody>
-      </p:sp>
-      <p:sp>
-        <p:nvSpPr>
-          <p:cNvPr id="22" name="Shape 20"/>
           <p:cNvSpPr/>
           <p:nvPr/>
         </p:nvSpPr>
@@ -15372,7 +13246,7 @@
       </p:sp>
       <p:sp>
         <p:nvSpPr>
-          <p:cNvPr id="23" name="Text 21"/>
+          <p:cNvPr id="17" name="Text 15"/>
           <p:cNvSpPr/>
           <p:nvPr/>
         </p:nvSpPr>
@@ -15411,7 +13285,7 @@
       </p:sp>
       <p:sp>
         <p:nvSpPr>
-          <p:cNvPr id="24" name="Text 22"/>
+          <p:cNvPr id="18" name="Text 16"/>
           <p:cNvSpPr/>
           <p:nvPr/>
         </p:nvSpPr>
@@ -15924,20 +13798,20 @@
         </p:nvSpPr>
         <p:spPr>
           <a:xfrm>
-            <a:off x="7818120" y="3977640"/>
-            <a:ext cx="972312" cy="749808"/>
+            <a:off x="8046720" y="3794760"/>
+            <a:ext cx="3063240" cy="1600200"/>
           </a:xfrm>
           <a:prstGeom prst="roundRect">
             <a:avLst>
-              <a:gd name="adj" fmla="val 14634"/>
+              <a:gd name="adj" fmla="val 6857"/>
             </a:avLst>
           </a:prstGeom>
           <a:solidFill>
-            <a:srgbClr val="0068B7"/>
+            <a:srgbClr val="FFFFFF"/>
           </a:solidFill>
           <a:ln w="12700">
             <a:solidFill>
-              <a:srgbClr val="0068B7"/>
+              <a:srgbClr val="B9D7E6"/>
             </a:solidFill>
             <a:prstDash val="solid"/>
           </a:ln>
@@ -15951,172 +13825,100 @@
         </p:nvSpPr>
         <p:spPr>
           <a:xfrm>
-            <a:off x="7891272" y="4169664"/>
-            <a:ext cx="826008" cy="310896"/>
-          </a:xfrm>
-          <a:prstGeom prst="rect">
-            <a:avLst/>
-          </a:prstGeom>
-          <a:noFill/>
-          <a:ln/>
-        </p:spPr>
-        <p:txBody>
-          <a:bodyPr wrap="square" lIns="0" tIns="0" rIns="0" bIns="0" rtlCol="0" anchor="ctr">
+            <a:off x="8211312" y="3941064"/>
+            <a:ext cx="2734056" cy="256032"/>
+          </a:xfrm>
+          <a:prstGeom prst="rect">
+            <a:avLst/>
+          </a:prstGeom>
+          <a:noFill/>
+          <a:ln/>
+        </p:spPr>
+        <p:txBody>
+          <a:bodyPr wrap="square" lIns="0" tIns="0" rIns="0" bIns="0" rtlCol="0" anchor="ctr"/>
+          <a:lstStyle/>
+          <a:p>
+            <a:pPr indent="0" marL="0">
+              <a:buNone/>
+            </a:pPr>
+            <a:r>
+              <a:rPr lang="en-US" sz="1300" b="1" dirty="0">
+                <a:solidFill>
+                  <a:srgbClr val="0068B7"/>
+                </a:solidFill>
+                <a:latin typeface="Aptos" pitchFamily="34" charset="0"/>
+                <a:ea typeface="Aptos" pitchFamily="34" charset="-122"/>
+                <a:cs typeface="Aptos" pitchFamily="34" charset="-120"/>
+              </a:rPr>
+              <a:t>Use the play links to</a:t>
+            </a:r>
+            <a:endParaRPr lang="en-US" sz="1300" dirty="0"/>
+          </a:p>
+        </p:txBody>
+      </p:sp>
+      <p:sp>
+        <p:nvSpPr>
+          <p:cNvPr id="15" name="Text 13"/>
+          <p:cNvSpPr/>
+          <p:nvPr/>
+        </p:nvSpPr>
+        <p:spPr>
+          <a:xfrm>
+            <a:off x="8229600" y="4306824"/>
+            <a:ext cx="2679192" cy="941832"/>
+          </a:xfrm>
+          <a:prstGeom prst="rect">
+            <a:avLst/>
+          </a:prstGeom>
+          <a:noFill/>
+          <a:ln/>
+        </p:spPr>
+        <p:txBody>
+          <a:bodyPr wrap="square" lIns="254" tIns="254" rIns="254" bIns="254" rtlCol="0" anchor="t">
             <a:normAutofit/>
           </a:bodyPr>
           <a:lstStyle/>
           <a:p>
-            <a:pPr algn="ctr" indent="0" marL="0">
-              <a:buNone/>
-            </a:pPr>
-            <a:r>
-              <a:rPr lang="en-US" sz="1500" b="1" dirty="0">
-                <a:solidFill>
-                  <a:srgbClr val="FFFFFF"/>
-                </a:solidFill>
-                <a:latin typeface="Aptos" pitchFamily="34" charset="0"/>
-                <a:ea typeface="Aptos" pitchFamily="34" charset="-122"/>
-                <a:cs typeface="Aptos" pitchFamily="34" charset="-120"/>
-              </a:rPr>
-              <a:t>Lesson</a:t>
-            </a:r>
-            <a:endParaRPr lang="en-US" sz="1500" dirty="0"/>
-          </a:p>
-        </p:txBody>
-      </p:sp>
-      <p:sp>
-        <p:nvSpPr>
-          <p:cNvPr id="15" name="Shape 13"/>
-          <p:cNvSpPr/>
-          <p:nvPr/>
-        </p:nvSpPr>
-        <p:spPr>
-          <a:xfrm>
-            <a:off x="9046464" y="3977640"/>
-            <a:ext cx="972312" cy="749808"/>
-          </a:xfrm>
-          <a:prstGeom prst="roundRect">
-            <a:avLst>
-              <a:gd name="adj" fmla="val 14634"/>
-            </a:avLst>
-          </a:prstGeom>
-          <a:solidFill>
-            <a:srgbClr val="2F8A28"/>
-          </a:solidFill>
-          <a:ln w="12700">
-            <a:solidFill>
-              <a:srgbClr val="2F8A28"/>
-            </a:solidFill>
-            <a:prstDash val="solid"/>
-          </a:ln>
-        </p:spPr>
-      </p:sp>
-      <p:sp>
-        <p:nvSpPr>
-          <p:cNvPr id="16" name="Text 14"/>
-          <p:cNvSpPr/>
-          <p:nvPr/>
-        </p:nvSpPr>
-        <p:spPr>
-          <a:xfrm>
-            <a:off x="9119616" y="4169664"/>
-            <a:ext cx="826008" cy="310896"/>
-          </a:xfrm>
-          <a:prstGeom prst="rect">
-            <a:avLst/>
-          </a:prstGeom>
-          <a:noFill/>
-          <a:ln/>
-        </p:spPr>
-        <p:txBody>
-          <a:bodyPr wrap="square" lIns="0" tIns="0" rIns="0" bIns="0" rtlCol="0" anchor="ctr">
-            <a:normAutofit/>
-          </a:bodyPr>
-          <a:lstStyle/>
-          <a:p>
-            <a:pPr algn="ctr" indent="0" marL="0">
-              <a:buNone/>
-            </a:pPr>
-            <a:r>
-              <a:rPr lang="en-US" sz="1500" b="1" dirty="0">
-                <a:solidFill>
-                  <a:srgbClr val="FFFFFF"/>
-                </a:solidFill>
-                <a:latin typeface="Aptos" pitchFamily="34" charset="0"/>
-                <a:ea typeface="Aptos" pitchFamily="34" charset="-122"/>
-                <a:cs typeface="Aptos" pitchFamily="34" charset="-120"/>
-              </a:rPr>
-              <a:t>Plays</a:t>
-            </a:r>
-            <a:endParaRPr lang="en-US" sz="1500" dirty="0"/>
-          </a:p>
-        </p:txBody>
-      </p:sp>
-      <p:sp>
-        <p:nvSpPr>
-          <p:cNvPr id="17" name="Shape 15"/>
-          <p:cNvSpPr/>
-          <p:nvPr/>
-        </p:nvSpPr>
-        <p:spPr>
-          <a:xfrm>
-            <a:off x="10274808" y="3977640"/>
-            <a:ext cx="972312" cy="749808"/>
-          </a:xfrm>
-          <a:prstGeom prst="roundRect">
-            <a:avLst>
-              <a:gd name="adj" fmla="val 14634"/>
-            </a:avLst>
-          </a:prstGeom>
-          <a:solidFill>
-            <a:srgbClr val="6A4CA3"/>
-          </a:solidFill>
-          <a:ln w="12700">
-            <a:solidFill>
-              <a:srgbClr val="6A4CA3"/>
-            </a:solidFill>
-            <a:prstDash val="solid"/>
-          </a:ln>
-        </p:spPr>
-      </p:sp>
-      <p:sp>
-        <p:nvSpPr>
-          <p:cNvPr id="18" name="Text 16"/>
-          <p:cNvSpPr/>
-          <p:nvPr/>
-        </p:nvSpPr>
-        <p:spPr>
-          <a:xfrm>
-            <a:off x="10347960" y="4169664"/>
-            <a:ext cx="826008" cy="310896"/>
-          </a:xfrm>
-          <a:prstGeom prst="rect">
-            <a:avLst/>
-          </a:prstGeom>
-          <a:noFill/>
-          <a:ln/>
-        </p:spPr>
-        <p:txBody>
-          <a:bodyPr wrap="square" lIns="0" tIns="0" rIns="0" bIns="0" rtlCol="0" anchor="ctr">
-            <a:normAutofit/>
-          </a:bodyPr>
-          <a:lstStyle/>
-          <a:p>
-            <a:pPr algn="ctr" indent="0" marL="0">
-              <a:buNone/>
-            </a:pPr>
-            <a:r>
-              <a:rPr lang="en-US" sz="1500" b="1" dirty="0">
-                <a:solidFill>
-                  <a:srgbClr val="FFFFFF"/>
-                </a:solidFill>
-                <a:latin typeface="Aptos" pitchFamily="34" charset="0"/>
-                <a:ea typeface="Aptos" pitchFamily="34" charset="-122"/>
-                <a:cs typeface="Aptos" pitchFamily="34" charset="-120"/>
-              </a:rPr>
-              <a:t>Action</a:t>
-            </a:r>
-            <a:endParaRPr lang="en-US" sz="1500" dirty="0"/>
+            <a:r>
+              <a:rPr lang="en-US" sz="1380" dirty="0">
+                <a:solidFill>
+                  <a:srgbClr val="17364A"/>
+                </a:solidFill>
+                <a:latin typeface="Aptos" pitchFamily="34" charset="0"/>
+                <a:ea typeface="Aptos" pitchFamily="34" charset="-122"/>
+                <a:cs typeface="Aptos" pitchFamily="34" charset="-120"/>
+              </a:rPr>
+              <a:t>Locate the decision point in the playbook sequence.</a:t>
+            </a:r>
+            <a:endParaRPr lang="en-US" sz="1380" dirty="0"/>
+          </a:p>
+          <a:p>
+            <a:r>
+              <a:rPr lang="en-US" sz="1380" dirty="0">
+                <a:solidFill>
+                  <a:srgbClr val="17364A"/>
+                </a:solidFill>
+                <a:latin typeface="Aptos" pitchFamily="34" charset="0"/>
+                <a:ea typeface="Aptos" pitchFamily="34" charset="-122"/>
+                <a:cs typeface="Aptos" pitchFamily="34" charset="-120"/>
+              </a:rPr>
+              <a:t>Identify who should participate in the work.</a:t>
+            </a:r>
+            <a:endParaRPr lang="en-US" sz="1380" dirty="0"/>
+          </a:p>
+          <a:p>
+            <a:r>
+              <a:rPr lang="en-US" sz="1380" dirty="0">
+                <a:solidFill>
+                  <a:srgbClr val="17364A"/>
+                </a:solidFill>
+                <a:latin typeface="Aptos" pitchFamily="34" charset="0"/>
+                <a:ea typeface="Aptos" pitchFamily="34" charset="-122"/>
+                <a:cs typeface="Aptos" pitchFamily="34" charset="-120"/>
+              </a:rPr>
+              <a:t>Document the review, approval, or implementation step.</a:t>
+            </a:r>
+            <a:endParaRPr lang="en-US" sz="1380" dirty="0"/>
           </a:p>
         </p:txBody>
       </p:sp>
@@ -16594,20 +14396,20 @@
         </p:nvSpPr>
         <p:spPr>
           <a:xfrm>
-            <a:off x="7818120" y="3977640"/>
-            <a:ext cx="972312" cy="749808"/>
+            <a:off x="8046720" y="3794760"/>
+            <a:ext cx="3063240" cy="1600200"/>
           </a:xfrm>
           <a:prstGeom prst="roundRect">
             <a:avLst>
-              <a:gd name="adj" fmla="val 14634"/>
+              <a:gd name="adj" fmla="val 6857"/>
             </a:avLst>
           </a:prstGeom>
           <a:solidFill>
-            <a:srgbClr val="0068B7"/>
+            <a:srgbClr val="FFFFFF"/>
           </a:solidFill>
           <a:ln w="12700">
             <a:solidFill>
-              <a:srgbClr val="0068B7"/>
+              <a:srgbClr val="B9D7E6"/>
             </a:solidFill>
             <a:prstDash val="solid"/>
           </a:ln>
@@ -16621,172 +14423,100 @@
         </p:nvSpPr>
         <p:spPr>
           <a:xfrm>
-            <a:off x="7891272" y="4169664"/>
-            <a:ext cx="826008" cy="310896"/>
-          </a:xfrm>
-          <a:prstGeom prst="rect">
-            <a:avLst/>
-          </a:prstGeom>
-          <a:noFill/>
-          <a:ln/>
-        </p:spPr>
-        <p:txBody>
-          <a:bodyPr wrap="square" lIns="0" tIns="0" rIns="0" bIns="0" rtlCol="0" anchor="ctr">
+            <a:off x="8211312" y="3941064"/>
+            <a:ext cx="2734056" cy="256032"/>
+          </a:xfrm>
+          <a:prstGeom prst="rect">
+            <a:avLst/>
+          </a:prstGeom>
+          <a:noFill/>
+          <a:ln/>
+        </p:spPr>
+        <p:txBody>
+          <a:bodyPr wrap="square" lIns="0" tIns="0" rIns="0" bIns="0" rtlCol="0" anchor="ctr"/>
+          <a:lstStyle/>
+          <a:p>
+            <a:pPr indent="0" marL="0">
+              <a:buNone/>
+            </a:pPr>
+            <a:r>
+              <a:rPr lang="en-US" sz="1300" b="1" dirty="0">
+                <a:solidFill>
+                  <a:srgbClr val="0068B7"/>
+                </a:solidFill>
+                <a:latin typeface="Aptos" pitchFamily="34" charset="0"/>
+                <a:ea typeface="Aptos" pitchFamily="34" charset="-122"/>
+                <a:cs typeface="Aptos" pitchFamily="34" charset="-120"/>
+              </a:rPr>
+              <a:t>Tool selection cues</a:t>
+            </a:r>
+            <a:endParaRPr lang="en-US" sz="1300" dirty="0"/>
+          </a:p>
+        </p:txBody>
+      </p:sp>
+      <p:sp>
+        <p:nvSpPr>
+          <p:cNvPr id="15" name="Text 13"/>
+          <p:cNvSpPr/>
+          <p:nvPr/>
+        </p:nvSpPr>
+        <p:spPr>
+          <a:xfrm>
+            <a:off x="8229600" y="4306824"/>
+            <a:ext cx="2679192" cy="941832"/>
+          </a:xfrm>
+          <a:prstGeom prst="rect">
+            <a:avLst/>
+          </a:prstGeom>
+          <a:noFill/>
+          <a:ln/>
+        </p:spPr>
+        <p:txBody>
+          <a:bodyPr wrap="square" lIns="254" tIns="254" rIns="254" bIns="254" rtlCol="0" anchor="t">
             <a:normAutofit/>
           </a:bodyPr>
           <a:lstStyle/>
           <a:p>
-            <a:pPr algn="ctr" indent="0" marL="0">
-              <a:buNone/>
-            </a:pPr>
-            <a:r>
-              <a:rPr lang="en-US" sz="1500" b="1" dirty="0">
-                <a:solidFill>
-                  <a:srgbClr val="FFFFFF"/>
-                </a:solidFill>
-                <a:latin typeface="Aptos" pitchFamily="34" charset="0"/>
-                <a:ea typeface="Aptos" pitchFamily="34" charset="-122"/>
-                <a:cs typeface="Aptos" pitchFamily="34" charset="-120"/>
-              </a:rPr>
-              <a:t>Concept</a:t>
-            </a:r>
-            <a:endParaRPr lang="en-US" sz="1500" dirty="0"/>
-          </a:p>
-        </p:txBody>
-      </p:sp>
-      <p:sp>
-        <p:nvSpPr>
-          <p:cNvPr id="15" name="Shape 13"/>
-          <p:cNvSpPr/>
-          <p:nvPr/>
-        </p:nvSpPr>
-        <p:spPr>
-          <a:xfrm>
-            <a:off x="9046464" y="3977640"/>
-            <a:ext cx="972312" cy="749808"/>
-          </a:xfrm>
-          <a:prstGeom prst="roundRect">
-            <a:avLst>
-              <a:gd name="adj" fmla="val 14634"/>
-            </a:avLst>
-          </a:prstGeom>
-          <a:solidFill>
-            <a:srgbClr val="2F8A28"/>
-          </a:solidFill>
-          <a:ln w="12700">
-            <a:solidFill>
-              <a:srgbClr val="2F8A28"/>
-            </a:solidFill>
-            <a:prstDash val="solid"/>
-          </a:ln>
-        </p:spPr>
-      </p:sp>
-      <p:sp>
-        <p:nvSpPr>
-          <p:cNvPr id="16" name="Text 14"/>
-          <p:cNvSpPr/>
-          <p:nvPr/>
-        </p:nvSpPr>
-        <p:spPr>
-          <a:xfrm>
-            <a:off x="9119616" y="4169664"/>
-            <a:ext cx="826008" cy="310896"/>
-          </a:xfrm>
-          <a:prstGeom prst="rect">
-            <a:avLst/>
-          </a:prstGeom>
-          <a:noFill/>
-          <a:ln/>
-        </p:spPr>
-        <p:txBody>
-          <a:bodyPr wrap="square" lIns="0" tIns="0" rIns="0" bIns="0" rtlCol="0" anchor="ctr">
-            <a:normAutofit/>
-          </a:bodyPr>
-          <a:lstStyle/>
-          <a:p>
-            <a:pPr algn="ctr" indent="0" marL="0">
-              <a:buNone/>
-            </a:pPr>
-            <a:r>
-              <a:rPr lang="en-US" sz="1500" b="1" dirty="0">
-                <a:solidFill>
-                  <a:srgbClr val="FFFFFF"/>
-                </a:solidFill>
-                <a:latin typeface="Aptos" pitchFamily="34" charset="0"/>
-                <a:ea typeface="Aptos" pitchFamily="34" charset="-122"/>
-                <a:cs typeface="Aptos" pitchFamily="34" charset="-120"/>
-              </a:rPr>
-              <a:t>Tool</a:t>
-            </a:r>
-            <a:endParaRPr lang="en-US" sz="1500" dirty="0"/>
-          </a:p>
-        </p:txBody>
-      </p:sp>
-      <p:sp>
-        <p:nvSpPr>
-          <p:cNvPr id="17" name="Shape 15"/>
-          <p:cNvSpPr/>
-          <p:nvPr/>
-        </p:nvSpPr>
-        <p:spPr>
-          <a:xfrm>
-            <a:off x="10274808" y="3977640"/>
-            <a:ext cx="972312" cy="749808"/>
-          </a:xfrm>
-          <a:prstGeom prst="roundRect">
-            <a:avLst>
-              <a:gd name="adj" fmla="val 14634"/>
-            </a:avLst>
-          </a:prstGeom>
-          <a:solidFill>
-            <a:srgbClr val="D69A2D"/>
-          </a:solidFill>
-          <a:ln w="12700">
-            <a:solidFill>
-              <a:srgbClr val="D69A2D"/>
-            </a:solidFill>
-            <a:prstDash val="solid"/>
-          </a:ln>
-        </p:spPr>
-      </p:sp>
-      <p:sp>
-        <p:nvSpPr>
-          <p:cNvPr id="18" name="Text 16"/>
-          <p:cNvSpPr/>
-          <p:nvPr/>
-        </p:nvSpPr>
-        <p:spPr>
-          <a:xfrm>
-            <a:off x="10347960" y="4169664"/>
-            <a:ext cx="826008" cy="310896"/>
-          </a:xfrm>
-          <a:prstGeom prst="rect">
-            <a:avLst/>
-          </a:prstGeom>
-          <a:noFill/>
-          <a:ln/>
-        </p:spPr>
-        <p:txBody>
-          <a:bodyPr wrap="square" lIns="0" tIns="0" rIns="0" bIns="0" rtlCol="0" anchor="ctr">
-            <a:normAutofit/>
-          </a:bodyPr>
-          <a:lstStyle/>
-          <a:p>
-            <a:pPr algn="ctr" indent="0" marL="0">
-              <a:buNone/>
-            </a:pPr>
-            <a:r>
-              <a:rPr lang="en-US" sz="1500" b="1" dirty="0">
-                <a:solidFill>
-                  <a:srgbClr val="FFFFFF"/>
-                </a:solidFill>
-                <a:latin typeface="Aptos" pitchFamily="34" charset="0"/>
-                <a:ea typeface="Aptos" pitchFamily="34" charset="-122"/>
-                <a:cs typeface="Aptos" pitchFamily="34" charset="-120"/>
-              </a:rPr>
-              <a:t>Artifact</a:t>
-            </a:r>
-            <a:endParaRPr lang="en-US" sz="1500" dirty="0"/>
+            <a:r>
+              <a:rPr lang="en-US" sz="1380" dirty="0">
+                <a:solidFill>
+                  <a:srgbClr val="17364A"/>
+                </a:solidFill>
+                <a:latin typeface="Aptos" pitchFamily="34" charset="0"/>
+                <a:ea typeface="Aptos" pitchFamily="34" charset="-122"/>
+                <a:cs typeface="Aptos" pitchFamily="34" charset="-120"/>
+              </a:rPr>
+              <a:t>Use a tool when no comparable local process exists.</a:t>
+            </a:r>
+            <a:endParaRPr lang="en-US" sz="1380" dirty="0"/>
+          </a:p>
+          <a:p>
+            <a:r>
+              <a:rPr lang="en-US" sz="1380" dirty="0">
+                <a:solidFill>
+                  <a:srgbClr val="17364A"/>
+                </a:solidFill>
+                <a:latin typeface="Aptos" pitchFamily="34" charset="0"/>
+                <a:ea typeface="Aptos" pitchFamily="34" charset="-122"/>
+                <a:cs typeface="Aptos" pitchFamily="34" charset="-120"/>
+              </a:rPr>
+              <a:t>Adapt existing department templates when they already fit the purpose.</a:t>
+            </a:r>
+            <a:endParaRPr lang="en-US" sz="1380" dirty="0"/>
+          </a:p>
+          <a:p>
+            <a:r>
+              <a:rPr lang="en-US" sz="1380" dirty="0">
+                <a:solidFill>
+                  <a:srgbClr val="17364A"/>
+                </a:solidFill>
+                <a:latin typeface="Aptos" pitchFamily="34" charset="0"/>
+                <a:ea typeface="Aptos" pitchFamily="34" charset="-122"/>
+                <a:cs typeface="Aptos" pitchFamily="34" charset="-120"/>
+              </a:rPr>
+              <a:t>Save the completed artifact as evidence of the decision.</a:t>
+            </a:r>
+            <a:endParaRPr lang="en-US" sz="1380" dirty="0"/>
           </a:p>
         </p:txBody>
       </p:sp>
@@ -17259,13 +14989,11 @@
             </a:avLst>
           </a:prstGeom>
           <a:solidFill>
-            <a:srgbClr val="FFFFFF">
-              <a:alpha val="88000"/>
-            </a:srgbClr>
+            <a:srgbClr val="FFFFFF"/>
           </a:solidFill>
           <a:ln w="12700">
             <a:solidFill>
-              <a:srgbClr val="D6E8F2"/>
+              <a:srgbClr val="B9D7E6"/>
             </a:solidFill>
             <a:prstDash val="solid"/>
           </a:ln>
@@ -17273,30 +15001,42 @@
       </p:sp>
       <p:sp>
         <p:nvSpPr>
-          <p:cNvPr id="14" name="Shape 12"/>
-          <p:cNvSpPr/>
-          <p:nvPr/>
-        </p:nvSpPr>
-        <p:spPr>
-          <a:xfrm>
-            <a:off x="7927848" y="3319272"/>
-            <a:ext cx="792480" cy="749808"/>
-          </a:xfrm>
-          <a:prstGeom prst="roundRect">
-            <a:avLst>
-              <a:gd name="adj" fmla="val 14634"/>
-            </a:avLst>
-          </a:prstGeom>
-          <a:solidFill>
-            <a:srgbClr val="0068B7"/>
-          </a:solidFill>
-          <a:ln w="12700">
-            <a:solidFill>
-              <a:srgbClr val="0068B7"/>
-            </a:solidFill>
-            <a:prstDash val="solid"/>
-          </a:ln>
-        </p:spPr>
+          <p:cNvPr id="14" name="Text 12"/>
+          <p:cNvSpPr/>
+          <p:nvPr/>
+        </p:nvSpPr>
+        <p:spPr>
+          <a:xfrm>
+            <a:off x="7799832" y="2935224"/>
+            <a:ext cx="3145536" cy="256032"/>
+          </a:xfrm>
+          <a:prstGeom prst="rect">
+            <a:avLst/>
+          </a:prstGeom>
+          <a:noFill/>
+          <a:ln/>
+        </p:spPr>
+        <p:txBody>
+          <a:bodyPr wrap="square" lIns="0" tIns="0" rIns="0" bIns="0" rtlCol="0" anchor="ctr"/>
+          <a:lstStyle/>
+          <a:p>
+            <a:pPr indent="0" marL="0">
+              <a:buNone/>
+            </a:pPr>
+            <a:r>
+              <a:rPr lang="en-US" sz="1300" b="1" dirty="0">
+                <a:solidFill>
+                  <a:srgbClr val="0068B7"/>
+                </a:solidFill>
+                <a:latin typeface="Aptos" pitchFamily="34" charset="0"/>
+                <a:ea typeface="Aptos" pitchFamily="34" charset="-122"/>
+                <a:cs typeface="Aptos" pitchFamily="34" charset="-120"/>
+              </a:rPr>
+              <a:t>Concept checkpoints</a:t>
+            </a:r>
+            <a:endParaRPr lang="en-US" sz="1300" dirty="0"/>
+          </a:p>
+        </p:txBody>
       </p:sp>
       <p:sp>
         <p:nvSpPr>
@@ -17306,240 +15046,53 @@
         </p:nvSpPr>
         <p:spPr>
           <a:xfrm>
-            <a:off x="8001000" y="3511296"/>
-            <a:ext cx="646176" cy="310896"/>
-          </a:xfrm>
-          <a:prstGeom prst="rect">
-            <a:avLst/>
-          </a:prstGeom>
-          <a:noFill/>
-          <a:ln/>
-        </p:spPr>
-        <p:txBody>
-          <a:bodyPr wrap="square" lIns="0" tIns="0" rIns="0" bIns="0" rtlCol="0" anchor="ctr">
+            <a:off x="7818120" y="3300984"/>
+            <a:ext cx="3090672" cy="877824"/>
+          </a:xfrm>
+          <a:prstGeom prst="rect">
+            <a:avLst/>
+          </a:prstGeom>
+          <a:noFill/>
+          <a:ln/>
+        </p:spPr>
+        <p:txBody>
+          <a:bodyPr wrap="square" lIns="254" tIns="254" rIns="254" bIns="254" rtlCol="0" anchor="t">
             <a:normAutofit/>
           </a:bodyPr>
           <a:lstStyle/>
           <a:p>
-            <a:pPr algn="ctr" indent="0" marL="0">
-              <a:buNone/>
-            </a:pPr>
-            <a:r>
-              <a:rPr lang="en-US" sz="1500" b="1" dirty="0">
-                <a:solidFill>
-                  <a:srgbClr val="FFFFFF"/>
-                </a:solidFill>
-                <a:latin typeface="Aptos" pitchFamily="34" charset="0"/>
-                <a:ea typeface="Aptos" pitchFamily="34" charset="-122"/>
-                <a:cs typeface="Aptos" pitchFamily="34" charset="-120"/>
-              </a:rPr>
-              <a:t>Plan</a:t>
-            </a:r>
-            <a:endParaRPr lang="en-US" sz="1500" dirty="0"/>
+            <a:r>
+              <a:rPr lang="en-US" sz="1380" dirty="0">
+                <a:solidFill>
+                  <a:srgbClr val="17364A"/>
+                </a:solidFill>
+                <a:latin typeface="Aptos" pitchFamily="34" charset="0"/>
+                <a:ea typeface="Aptos" pitchFamily="34" charset="-122"/>
+                <a:cs typeface="Aptos" pitchFamily="34" charset="-120"/>
+              </a:rPr>
+              <a:t>Assess where human approval is required before an AI-triggered action occurs.</a:t>
+            </a:r>
+            <a:endParaRPr lang="en-US" sz="1380" dirty="0"/>
+          </a:p>
+          <a:p>
+            <a:r>
+              <a:rPr lang="en-US" sz="1380" dirty="0">
+                <a:solidFill>
+                  <a:srgbClr val="17364A"/>
+                </a:solidFill>
+                <a:latin typeface="Aptos" pitchFamily="34" charset="0"/>
+                <a:ea typeface="Aptos" pitchFamily="34" charset="-122"/>
+                <a:cs typeface="Aptos" pitchFamily="34" charset="-120"/>
+              </a:rPr>
+              <a:t>Produce an API and event workflow review worksheet.</a:t>
+            </a:r>
+            <a:endParaRPr lang="en-US" sz="1380" dirty="0"/>
           </a:p>
         </p:txBody>
       </p:sp>
       <p:sp>
         <p:nvSpPr>
           <p:cNvPr id="16" name="Shape 14"/>
-          <p:cNvSpPr/>
-          <p:nvPr/>
-        </p:nvSpPr>
-        <p:spPr>
-          <a:xfrm>
-            <a:off x="8976360" y="3319272"/>
-            <a:ext cx="792480" cy="749808"/>
-          </a:xfrm>
-          <a:prstGeom prst="roundRect">
-            <a:avLst>
-              <a:gd name="adj" fmla="val 14634"/>
-            </a:avLst>
-          </a:prstGeom>
-          <a:solidFill>
-            <a:srgbClr val="2F8A28"/>
-          </a:solidFill>
-          <a:ln w="12700">
-            <a:solidFill>
-              <a:srgbClr val="2F8A28"/>
-            </a:solidFill>
-            <a:prstDash val="solid"/>
-          </a:ln>
-        </p:spPr>
-      </p:sp>
-      <p:sp>
-        <p:nvSpPr>
-          <p:cNvPr id="17" name="Text 15"/>
-          <p:cNvSpPr/>
-          <p:nvPr/>
-        </p:nvSpPr>
-        <p:spPr>
-          <a:xfrm>
-            <a:off x="9049512" y="3511296"/>
-            <a:ext cx="646176" cy="310896"/>
-          </a:xfrm>
-          <a:prstGeom prst="rect">
-            <a:avLst/>
-          </a:prstGeom>
-          <a:noFill/>
-          <a:ln/>
-        </p:spPr>
-        <p:txBody>
-          <a:bodyPr wrap="square" lIns="0" tIns="0" rIns="0" bIns="0" rtlCol="0" anchor="ctr">
-            <a:normAutofit/>
-          </a:bodyPr>
-          <a:lstStyle/>
-          <a:p>
-            <a:pPr algn="ctr" indent="0" marL="0">
-              <a:buNone/>
-            </a:pPr>
-            <a:r>
-              <a:rPr lang="en-US" sz="1500" b="1" dirty="0">
-                <a:solidFill>
-                  <a:srgbClr val="FFFFFF"/>
-                </a:solidFill>
-                <a:latin typeface="Aptos" pitchFamily="34" charset="0"/>
-                <a:ea typeface="Aptos" pitchFamily="34" charset="-122"/>
-                <a:cs typeface="Aptos" pitchFamily="34" charset="-120"/>
-              </a:rPr>
-              <a:t>Do</a:t>
-            </a:r>
-            <a:endParaRPr lang="en-US" sz="1500" dirty="0"/>
-          </a:p>
-        </p:txBody>
-      </p:sp>
-      <p:sp>
-        <p:nvSpPr>
-          <p:cNvPr id="18" name="Shape 16"/>
-          <p:cNvSpPr/>
-          <p:nvPr/>
-        </p:nvSpPr>
-        <p:spPr>
-          <a:xfrm>
-            <a:off x="10024872" y="3319272"/>
-            <a:ext cx="792480" cy="749808"/>
-          </a:xfrm>
-          <a:prstGeom prst="roundRect">
-            <a:avLst>
-              <a:gd name="adj" fmla="val 14634"/>
-            </a:avLst>
-          </a:prstGeom>
-          <a:solidFill>
-            <a:srgbClr val="D69A2D"/>
-          </a:solidFill>
-          <a:ln w="12700">
-            <a:solidFill>
-              <a:srgbClr val="D69A2D"/>
-            </a:solidFill>
-            <a:prstDash val="solid"/>
-          </a:ln>
-        </p:spPr>
-      </p:sp>
-      <p:sp>
-        <p:nvSpPr>
-          <p:cNvPr id="19" name="Text 17"/>
-          <p:cNvSpPr/>
-          <p:nvPr/>
-        </p:nvSpPr>
-        <p:spPr>
-          <a:xfrm>
-            <a:off x="10098024" y="3511296"/>
-            <a:ext cx="646176" cy="310896"/>
-          </a:xfrm>
-          <a:prstGeom prst="rect">
-            <a:avLst/>
-          </a:prstGeom>
-          <a:noFill/>
-          <a:ln/>
-        </p:spPr>
-        <p:txBody>
-          <a:bodyPr wrap="square" lIns="0" tIns="0" rIns="0" bIns="0" rtlCol="0" anchor="ctr">
-            <a:normAutofit/>
-          </a:bodyPr>
-          <a:lstStyle/>
-          <a:p>
-            <a:pPr algn="ctr" indent="0" marL="0">
-              <a:buNone/>
-            </a:pPr>
-            <a:r>
-              <a:rPr lang="en-US" sz="1500" b="1" dirty="0">
-                <a:solidFill>
-                  <a:srgbClr val="FFFFFF"/>
-                </a:solidFill>
-                <a:latin typeface="Aptos" pitchFamily="34" charset="0"/>
-                <a:ea typeface="Aptos" pitchFamily="34" charset="-122"/>
-                <a:cs typeface="Aptos" pitchFamily="34" charset="-120"/>
-              </a:rPr>
-              <a:t>Review</a:t>
-            </a:r>
-            <a:endParaRPr lang="en-US" sz="1500" dirty="0"/>
-          </a:p>
-        </p:txBody>
-      </p:sp>
-      <p:sp>
-        <p:nvSpPr>
-          <p:cNvPr id="20" name="Shape 18"/>
-          <p:cNvSpPr/>
-          <p:nvPr/>
-        </p:nvSpPr>
-        <p:spPr>
-          <a:xfrm>
-            <a:off x="8293608" y="4389120"/>
-            <a:ext cx="2157984" cy="0"/>
-          </a:xfrm>
-          <a:prstGeom prst="line">
-            <a:avLst/>
-          </a:prstGeom>
-          <a:noFill/>
-          <a:ln w="25400">
-            <a:solidFill>
-              <a:srgbClr val="8ABBD8"/>
-            </a:solidFill>
-            <a:prstDash val="solid"/>
-          </a:ln>
-        </p:spPr>
-      </p:sp>
-      <p:sp>
-        <p:nvSpPr>
-          <p:cNvPr id="21" name="Text 19"/>
-          <p:cNvSpPr/>
-          <p:nvPr/>
-        </p:nvSpPr>
-        <p:spPr>
-          <a:xfrm>
-            <a:off x="7909560" y="3977640"/>
-            <a:ext cx="2926080" cy="182880"/>
-          </a:xfrm>
-          <a:prstGeom prst="rect">
-            <a:avLst/>
-          </a:prstGeom>
-          <a:noFill/>
-          <a:ln/>
-        </p:spPr>
-        <p:txBody>
-          <a:bodyPr wrap="square" lIns="0" tIns="0" rIns="0" bIns="0" rtlCol="0" anchor="ctr"/>
-          <a:lstStyle/>
-          <a:p>
-            <a:pPr algn="ctr" indent="0" marL="0">
-              <a:buNone/>
-            </a:pPr>
-            <a:r>
-              <a:rPr lang="en-US" sz="1000" dirty="0">
-                <a:solidFill>
-                  <a:srgbClr val="003A63"/>
-                </a:solidFill>
-                <a:latin typeface="Aptos" pitchFamily="34" charset="0"/>
-                <a:ea typeface="Aptos" pitchFamily="34" charset="-122"/>
-                <a:cs typeface="Aptos" pitchFamily="34" charset="-120"/>
-              </a:rPr>
-              <a:t>Dependencies visible</a:t>
-            </a:r>
-            <a:endParaRPr lang="en-US" sz="1000" dirty="0"/>
-          </a:p>
-        </p:txBody>
-      </p:sp>
-      <p:sp>
-        <p:nvSpPr>
-          <p:cNvPr id="22" name="Shape 20"/>
           <p:cNvSpPr/>
           <p:nvPr/>
         </p:nvSpPr>
@@ -17566,7 +15119,7 @@
       </p:sp>
       <p:sp>
         <p:nvSpPr>
-          <p:cNvPr id="23" name="Text 21"/>
+          <p:cNvPr id="17" name="Text 15"/>
           <p:cNvSpPr/>
           <p:nvPr/>
         </p:nvSpPr>
@@ -17605,7 +15158,7 @@
       </p:sp>
       <p:sp>
         <p:nvSpPr>
-          <p:cNvPr id="24" name="Text 22"/>
+          <p:cNvPr id="18" name="Text 16"/>
           <p:cNvSpPr/>
           <p:nvPr/>
         </p:nvSpPr>
@@ -18113,13 +15666,11 @@
             </a:avLst>
           </a:prstGeom>
           <a:solidFill>
-            <a:srgbClr val="FFFFFF">
-              <a:alpha val="88000"/>
-            </a:srgbClr>
+            <a:srgbClr val="FFFFFF"/>
           </a:solidFill>
           <a:ln w="12700">
             <a:solidFill>
-              <a:srgbClr val="D6E8F2"/>
+              <a:srgbClr val="B9D7E6"/>
             </a:solidFill>
             <a:prstDash val="solid"/>
           </a:ln>
@@ -18127,30 +15678,42 @@
       </p:sp>
       <p:sp>
         <p:nvSpPr>
-          <p:cNvPr id="14" name="Shape 12"/>
-          <p:cNvSpPr/>
-          <p:nvPr/>
-        </p:nvSpPr>
-        <p:spPr>
-          <a:xfrm>
-            <a:off x="7927848" y="3319272"/>
-            <a:ext cx="792480" cy="749808"/>
-          </a:xfrm>
-          <a:prstGeom prst="roundRect">
-            <a:avLst>
-              <a:gd name="adj" fmla="val 14634"/>
-            </a:avLst>
-          </a:prstGeom>
-          <a:solidFill>
-            <a:srgbClr val="0068B7"/>
-          </a:solidFill>
-          <a:ln w="12700">
-            <a:solidFill>
-              <a:srgbClr val="0068B7"/>
-            </a:solidFill>
-            <a:prstDash val="solid"/>
-          </a:ln>
-        </p:spPr>
+          <p:cNvPr id="14" name="Text 12"/>
+          <p:cNvSpPr/>
+          <p:nvPr/>
+        </p:nvSpPr>
+        <p:spPr>
+          <a:xfrm>
+            <a:off x="7799832" y="2935224"/>
+            <a:ext cx="3145536" cy="256032"/>
+          </a:xfrm>
+          <a:prstGeom prst="rect">
+            <a:avLst/>
+          </a:prstGeom>
+          <a:noFill/>
+          <a:ln/>
+        </p:spPr>
+        <p:txBody>
+          <a:bodyPr wrap="square" lIns="0" tIns="0" rIns="0" bIns="0" rtlCol="0" anchor="ctr"/>
+          <a:lstStyle/>
+          <a:p>
+            <a:pPr indent="0" marL="0">
+              <a:buNone/>
+            </a:pPr>
+            <a:r>
+              <a:rPr lang="en-US" sz="1300" b="1" dirty="0">
+                <a:solidFill>
+                  <a:srgbClr val="0068B7"/>
+                </a:solidFill>
+                <a:latin typeface="Aptos" pitchFamily="34" charset="0"/>
+                <a:ea typeface="Aptos" pitchFamily="34" charset="-122"/>
+                <a:cs typeface="Aptos" pitchFamily="34" charset="-120"/>
+              </a:rPr>
+              <a:t>Concept checkpoints</a:t>
+            </a:r>
+            <a:endParaRPr lang="en-US" sz="1300" dirty="0"/>
+          </a:p>
+        </p:txBody>
       </p:sp>
       <p:sp>
         <p:nvSpPr>
@@ -18160,240 +15723,53 @@
         </p:nvSpPr>
         <p:spPr>
           <a:xfrm>
-            <a:off x="8001000" y="3511296"/>
-            <a:ext cx="646176" cy="310896"/>
-          </a:xfrm>
-          <a:prstGeom prst="rect">
-            <a:avLst/>
-          </a:prstGeom>
-          <a:noFill/>
-          <a:ln/>
-        </p:spPr>
-        <p:txBody>
-          <a:bodyPr wrap="square" lIns="0" tIns="0" rIns="0" bIns="0" rtlCol="0" anchor="ctr">
+            <a:off x="7818120" y="3300984"/>
+            <a:ext cx="3090672" cy="877824"/>
+          </a:xfrm>
+          <a:prstGeom prst="rect">
+            <a:avLst/>
+          </a:prstGeom>
+          <a:noFill/>
+          <a:ln/>
+        </p:spPr>
+        <p:txBody>
+          <a:bodyPr wrap="square" lIns="254" tIns="254" rIns="254" bIns="254" rtlCol="0" anchor="t">
             <a:normAutofit/>
           </a:bodyPr>
           <a:lstStyle/>
           <a:p>
-            <a:pPr algn="ctr" indent="0" marL="0">
-              <a:buNone/>
-            </a:pPr>
-            <a:r>
-              <a:rPr lang="en-US" sz="1500" b="1" dirty="0">
-                <a:solidFill>
-                  <a:srgbClr val="FFFFFF"/>
-                </a:solidFill>
-                <a:latin typeface="Aptos" pitchFamily="34" charset="0"/>
-                <a:ea typeface="Aptos" pitchFamily="34" charset="-122"/>
-                <a:cs typeface="Aptos" pitchFamily="34" charset="-120"/>
-              </a:rPr>
-              <a:t>Plan</a:t>
-            </a:r>
-            <a:endParaRPr lang="en-US" sz="1500" dirty="0"/>
+            <a:r>
+              <a:rPr lang="en-US" sz="1380" dirty="0">
+                <a:solidFill>
+                  <a:srgbClr val="17364A"/>
+                </a:solidFill>
+                <a:latin typeface="Aptos" pitchFamily="34" charset="0"/>
+                <a:ea typeface="Aptos" pitchFamily="34" charset="-122"/>
+                <a:cs typeface="Aptos" pitchFamily="34" charset="-120"/>
+              </a:rPr>
+              <a:t>They are especially important for AI because many AI tools need to retrieve data, send.</a:t>
+            </a:r>
+            <a:endParaRPr lang="en-US" sz="1380" dirty="0"/>
+          </a:p>
+          <a:p>
+            <a:r>
+              <a:rPr lang="en-US" sz="1380" dirty="0">
+                <a:solidFill>
+                  <a:srgbClr val="17364A"/>
+                </a:solidFill>
+                <a:latin typeface="Aptos" pitchFamily="34" charset="0"/>
+                <a:ea typeface="Aptos" pitchFamily="34" charset="-122"/>
+                <a:cs typeface="Aptos" pitchFamily="34" charset="-120"/>
+              </a:rPr>
+              <a:t>This module teaches non-developer public health staff enough technical understanding to.</a:t>
+            </a:r>
+            <a:endParaRPr lang="en-US" sz="1380" dirty="0"/>
           </a:p>
         </p:txBody>
       </p:sp>
       <p:sp>
         <p:nvSpPr>
           <p:cNvPr id="16" name="Shape 14"/>
-          <p:cNvSpPr/>
-          <p:nvPr/>
-        </p:nvSpPr>
-        <p:spPr>
-          <a:xfrm>
-            <a:off x="8976360" y="3319272"/>
-            <a:ext cx="792480" cy="749808"/>
-          </a:xfrm>
-          <a:prstGeom prst="roundRect">
-            <a:avLst>
-              <a:gd name="adj" fmla="val 14634"/>
-            </a:avLst>
-          </a:prstGeom>
-          <a:solidFill>
-            <a:srgbClr val="2F8A28"/>
-          </a:solidFill>
-          <a:ln w="12700">
-            <a:solidFill>
-              <a:srgbClr val="2F8A28"/>
-            </a:solidFill>
-            <a:prstDash val="solid"/>
-          </a:ln>
-        </p:spPr>
-      </p:sp>
-      <p:sp>
-        <p:nvSpPr>
-          <p:cNvPr id="17" name="Text 15"/>
-          <p:cNvSpPr/>
-          <p:nvPr/>
-        </p:nvSpPr>
-        <p:spPr>
-          <a:xfrm>
-            <a:off x="9049512" y="3511296"/>
-            <a:ext cx="646176" cy="310896"/>
-          </a:xfrm>
-          <a:prstGeom prst="rect">
-            <a:avLst/>
-          </a:prstGeom>
-          <a:noFill/>
-          <a:ln/>
-        </p:spPr>
-        <p:txBody>
-          <a:bodyPr wrap="square" lIns="0" tIns="0" rIns="0" bIns="0" rtlCol="0" anchor="ctr">
-            <a:normAutofit/>
-          </a:bodyPr>
-          <a:lstStyle/>
-          <a:p>
-            <a:pPr algn="ctr" indent="0" marL="0">
-              <a:buNone/>
-            </a:pPr>
-            <a:r>
-              <a:rPr lang="en-US" sz="1500" b="1" dirty="0">
-                <a:solidFill>
-                  <a:srgbClr val="FFFFFF"/>
-                </a:solidFill>
-                <a:latin typeface="Aptos" pitchFamily="34" charset="0"/>
-                <a:ea typeface="Aptos" pitchFamily="34" charset="-122"/>
-                <a:cs typeface="Aptos" pitchFamily="34" charset="-120"/>
-              </a:rPr>
-              <a:t>Do</a:t>
-            </a:r>
-            <a:endParaRPr lang="en-US" sz="1500" dirty="0"/>
-          </a:p>
-        </p:txBody>
-      </p:sp>
-      <p:sp>
-        <p:nvSpPr>
-          <p:cNvPr id="18" name="Shape 16"/>
-          <p:cNvSpPr/>
-          <p:nvPr/>
-        </p:nvSpPr>
-        <p:spPr>
-          <a:xfrm>
-            <a:off x="10024872" y="3319272"/>
-            <a:ext cx="792480" cy="749808"/>
-          </a:xfrm>
-          <a:prstGeom prst="roundRect">
-            <a:avLst>
-              <a:gd name="adj" fmla="val 14634"/>
-            </a:avLst>
-          </a:prstGeom>
-          <a:solidFill>
-            <a:srgbClr val="D69A2D"/>
-          </a:solidFill>
-          <a:ln w="12700">
-            <a:solidFill>
-              <a:srgbClr val="D69A2D"/>
-            </a:solidFill>
-            <a:prstDash val="solid"/>
-          </a:ln>
-        </p:spPr>
-      </p:sp>
-      <p:sp>
-        <p:nvSpPr>
-          <p:cNvPr id="19" name="Text 17"/>
-          <p:cNvSpPr/>
-          <p:nvPr/>
-        </p:nvSpPr>
-        <p:spPr>
-          <a:xfrm>
-            <a:off x="10098024" y="3511296"/>
-            <a:ext cx="646176" cy="310896"/>
-          </a:xfrm>
-          <a:prstGeom prst="rect">
-            <a:avLst/>
-          </a:prstGeom>
-          <a:noFill/>
-          <a:ln/>
-        </p:spPr>
-        <p:txBody>
-          <a:bodyPr wrap="square" lIns="0" tIns="0" rIns="0" bIns="0" rtlCol="0" anchor="ctr">
-            <a:normAutofit/>
-          </a:bodyPr>
-          <a:lstStyle/>
-          <a:p>
-            <a:pPr algn="ctr" indent="0" marL="0">
-              <a:buNone/>
-            </a:pPr>
-            <a:r>
-              <a:rPr lang="en-US" sz="1500" b="1" dirty="0">
-                <a:solidFill>
-                  <a:srgbClr val="FFFFFF"/>
-                </a:solidFill>
-                <a:latin typeface="Aptos" pitchFamily="34" charset="0"/>
-                <a:ea typeface="Aptos" pitchFamily="34" charset="-122"/>
-                <a:cs typeface="Aptos" pitchFamily="34" charset="-120"/>
-              </a:rPr>
-              <a:t>Review</a:t>
-            </a:r>
-            <a:endParaRPr lang="en-US" sz="1500" dirty="0"/>
-          </a:p>
-        </p:txBody>
-      </p:sp>
-      <p:sp>
-        <p:nvSpPr>
-          <p:cNvPr id="20" name="Shape 18"/>
-          <p:cNvSpPr/>
-          <p:nvPr/>
-        </p:nvSpPr>
-        <p:spPr>
-          <a:xfrm>
-            <a:off x="8293608" y="4389120"/>
-            <a:ext cx="2157984" cy="0"/>
-          </a:xfrm>
-          <a:prstGeom prst="line">
-            <a:avLst/>
-          </a:prstGeom>
-          <a:noFill/>
-          <a:ln w="25400">
-            <a:solidFill>
-              <a:srgbClr val="8ABBD8"/>
-            </a:solidFill>
-            <a:prstDash val="solid"/>
-          </a:ln>
-        </p:spPr>
-      </p:sp>
-      <p:sp>
-        <p:nvSpPr>
-          <p:cNvPr id="21" name="Text 19"/>
-          <p:cNvSpPr/>
-          <p:nvPr/>
-        </p:nvSpPr>
-        <p:spPr>
-          <a:xfrm>
-            <a:off x="7909560" y="3977640"/>
-            <a:ext cx="2926080" cy="182880"/>
-          </a:xfrm>
-          <a:prstGeom prst="rect">
-            <a:avLst/>
-          </a:prstGeom>
-          <a:noFill/>
-          <a:ln/>
-        </p:spPr>
-        <p:txBody>
-          <a:bodyPr wrap="square" lIns="0" tIns="0" rIns="0" bIns="0" rtlCol="0" anchor="ctr"/>
-          <a:lstStyle/>
-          <a:p>
-            <a:pPr algn="ctr" indent="0" marL="0">
-              <a:buNone/>
-            </a:pPr>
-            <a:r>
-              <a:rPr lang="en-US" sz="1000" dirty="0">
-                <a:solidFill>
-                  <a:srgbClr val="003A63"/>
-                </a:solidFill>
-                <a:latin typeface="Aptos" pitchFamily="34" charset="0"/>
-                <a:ea typeface="Aptos" pitchFamily="34" charset="-122"/>
-                <a:cs typeface="Aptos" pitchFamily="34" charset="-120"/>
-              </a:rPr>
-              <a:t>Dependencies visible</a:t>
-            </a:r>
-            <a:endParaRPr lang="en-US" sz="1000" dirty="0"/>
-          </a:p>
-        </p:txBody>
-      </p:sp>
-      <p:sp>
-        <p:nvSpPr>
-          <p:cNvPr id="22" name="Shape 20"/>
           <p:cNvSpPr/>
           <p:nvPr/>
         </p:nvSpPr>
@@ -18420,7 +15796,7 @@
       </p:sp>
       <p:sp>
         <p:nvSpPr>
-          <p:cNvPr id="23" name="Text 21"/>
+          <p:cNvPr id="17" name="Text 15"/>
           <p:cNvSpPr/>
           <p:nvPr/>
         </p:nvSpPr>
@@ -18459,7 +15835,7 @@
       </p:sp>
       <p:sp>
         <p:nvSpPr>
-          <p:cNvPr id="24" name="Text 22"/>
+          <p:cNvPr id="18" name="Text 16"/>
           <p:cNvSpPr/>
           <p:nvPr/>
         </p:nvSpPr>
@@ -18967,13 +16343,11 @@
             </a:avLst>
           </a:prstGeom>
           <a:solidFill>
-            <a:srgbClr val="FFFFFF">
-              <a:alpha val="88000"/>
-            </a:srgbClr>
+            <a:srgbClr val="FFFFFF"/>
           </a:solidFill>
           <a:ln w="12700">
             <a:solidFill>
-              <a:srgbClr val="D6E8F2"/>
+              <a:srgbClr val="B9D7E6"/>
             </a:solidFill>
             <a:prstDash val="solid"/>
           </a:ln>
@@ -18981,190 +16355,112 @@
       </p:sp>
       <p:sp>
         <p:nvSpPr>
-          <p:cNvPr id="14" name="Shape 12"/>
-          <p:cNvSpPr/>
-          <p:nvPr/>
-        </p:nvSpPr>
-        <p:spPr>
-          <a:xfrm>
-            <a:off x="7891272" y="3108960"/>
-            <a:ext cx="566928" cy="566928"/>
-          </a:xfrm>
-          <a:prstGeom prst="ellipse">
-            <a:avLst/>
-          </a:prstGeom>
-          <a:solidFill>
-            <a:srgbClr val="0068B7"/>
-          </a:solidFill>
-          <a:ln w="12700">
-            <a:solidFill>
-              <a:srgbClr val="0068B7"/>
-            </a:solidFill>
-            <a:prstDash val="solid"/>
-          </a:ln>
-        </p:spPr>
-      </p:sp>
-      <p:sp>
-        <p:nvSpPr>
-          <p:cNvPr id="15" name="Shape 13"/>
-          <p:cNvSpPr/>
-          <p:nvPr/>
-        </p:nvSpPr>
-        <p:spPr>
-          <a:xfrm>
-            <a:off x="10287000" y="3108960"/>
-            <a:ext cx="566928" cy="566928"/>
-          </a:xfrm>
-          <a:prstGeom prst="ellipse">
-            <a:avLst/>
-          </a:prstGeom>
-          <a:solidFill>
-            <a:srgbClr val="2F8A28"/>
-          </a:solidFill>
-          <a:ln w="12700">
-            <a:solidFill>
-              <a:srgbClr val="2F8A28"/>
-            </a:solidFill>
-            <a:prstDash val="solid"/>
-          </a:ln>
-        </p:spPr>
+          <p:cNvPr id="14" name="Text 12"/>
+          <p:cNvSpPr/>
+          <p:nvPr/>
+        </p:nvSpPr>
+        <p:spPr>
+          <a:xfrm>
+            <a:off x="7799832" y="2935224"/>
+            <a:ext cx="3145536" cy="256032"/>
+          </a:xfrm>
+          <a:prstGeom prst="rect">
+            <a:avLst/>
+          </a:prstGeom>
+          <a:noFill/>
+          <a:ln/>
+        </p:spPr>
+        <p:txBody>
+          <a:bodyPr wrap="square" lIns="0" tIns="0" rIns="0" bIns="0" rtlCol="0" anchor="ctr"/>
+          <a:lstStyle/>
+          <a:p>
+            <a:pPr indent="0" marL="0">
+              <a:buNone/>
+            </a:pPr>
+            <a:r>
+              <a:rPr lang="en-US" sz="1300" b="1" dirty="0">
+                <a:solidFill>
+                  <a:srgbClr val="0068B7"/>
+                </a:solidFill>
+                <a:latin typeface="Aptos" pitchFamily="34" charset="0"/>
+                <a:ea typeface="Aptos" pitchFamily="34" charset="-122"/>
+                <a:cs typeface="Aptos" pitchFamily="34" charset="-120"/>
+              </a:rPr>
+              <a:t>Concept checkpoints</a:t>
+            </a:r>
+            <a:endParaRPr lang="en-US" sz="1300" dirty="0"/>
+          </a:p>
+        </p:txBody>
+      </p:sp>
+      <p:sp>
+        <p:nvSpPr>
+          <p:cNvPr id="15" name="Text 13"/>
+          <p:cNvSpPr/>
+          <p:nvPr/>
+        </p:nvSpPr>
+        <p:spPr>
+          <a:xfrm>
+            <a:off x="7818120" y="3300984"/>
+            <a:ext cx="3090672" cy="877824"/>
+          </a:xfrm>
+          <a:prstGeom prst="rect">
+            <a:avLst/>
+          </a:prstGeom>
+          <a:noFill/>
+          <a:ln/>
+        </p:spPr>
+        <p:txBody>
+          <a:bodyPr wrap="square" lIns="254" tIns="254" rIns="254" bIns="254" rtlCol="0" anchor="t">
+            <a:normAutofit/>
+          </a:bodyPr>
+          <a:lstStyle/>
+          <a:p>
+            <a:r>
+              <a:rPr lang="en-US" sz="1380" dirty="0">
+                <a:solidFill>
+                  <a:srgbClr val="17364A"/>
+                </a:solidFill>
+                <a:latin typeface="Aptos" pitchFamily="34" charset="0"/>
+                <a:ea typeface="Aptos" pitchFamily="34" charset="-122"/>
+                <a:cs typeface="Aptos" pitchFamily="34" charset="-120"/>
+              </a:rPr>
+              <a:t>This national-level module is intended for training and planning purposes.</a:t>
+            </a:r>
+            <a:endParaRPr lang="en-US" sz="1380" dirty="0"/>
+          </a:p>
+          <a:p>
+            <a:r>
+              <a:rPr lang="en-US" sz="1380" dirty="0">
+                <a:solidFill>
+                  <a:srgbClr val="17364A"/>
+                </a:solidFill>
+                <a:latin typeface="Aptos" pitchFamily="34" charset="0"/>
+                <a:ea typeface="Aptos" pitchFamily="34" charset="-122"/>
+                <a:cs typeface="Aptos" pitchFamily="34" charset="-120"/>
+              </a:rPr>
+              <a:t>It does not replace legal, privacy, procurement, civil rights, records, or agency policy.</a:t>
+            </a:r>
+            <a:endParaRPr lang="en-US" sz="1380" dirty="0"/>
+          </a:p>
+          <a:p>
+            <a:r>
+              <a:rPr lang="en-US" sz="1380" dirty="0">
+                <a:solidFill>
+                  <a:srgbClr val="17364A"/>
+                </a:solidFill>
+                <a:latin typeface="Aptos" pitchFamily="34" charset="0"/>
+                <a:ea typeface="Aptos" pitchFamily="34" charset="-122"/>
+                <a:cs typeface="Aptos" pitchFamily="34" charset="-120"/>
+              </a:rPr>
+              <a:t>Learners should confirm applicable requirements in their own jurisdiction and organization.</a:t>
+            </a:r>
+            <a:endParaRPr lang="en-US" sz="1380" dirty="0"/>
+          </a:p>
+        </p:txBody>
       </p:sp>
       <p:sp>
         <p:nvSpPr>
           <p:cNvPr id="16" name="Shape 14"/>
-          <p:cNvSpPr/>
-          <p:nvPr/>
-        </p:nvSpPr>
-        <p:spPr>
-          <a:xfrm>
-            <a:off x="9089136" y="3456432"/>
-            <a:ext cx="566928" cy="566928"/>
-          </a:xfrm>
-          <a:prstGeom prst="ellipse">
-            <a:avLst/>
-          </a:prstGeom>
-          <a:solidFill>
-            <a:srgbClr val="6A4CA3"/>
-          </a:solidFill>
-          <a:ln w="12700">
-            <a:solidFill>
-              <a:srgbClr val="6A4CA3"/>
-            </a:solidFill>
-            <a:prstDash val="solid"/>
-          </a:ln>
-        </p:spPr>
-      </p:sp>
-      <p:sp>
-        <p:nvSpPr>
-          <p:cNvPr id="17" name="Shape 15"/>
-          <p:cNvSpPr/>
-          <p:nvPr/>
-        </p:nvSpPr>
-        <p:spPr>
-          <a:xfrm>
-            <a:off x="8385048" y="3419856"/>
-            <a:ext cx="1975104" cy="0"/>
-          </a:xfrm>
-          <a:prstGeom prst="line">
-            <a:avLst/>
-          </a:prstGeom>
-          <a:noFill/>
-          <a:ln w="25400">
-            <a:solidFill>
-              <a:srgbClr val="8ABBD8"/>
-            </a:solidFill>
-            <a:prstDash val="solid"/>
-          </a:ln>
-        </p:spPr>
-      </p:sp>
-      <p:sp>
-        <p:nvSpPr>
-          <p:cNvPr id="18" name="Shape 16"/>
-          <p:cNvSpPr/>
-          <p:nvPr/>
-        </p:nvSpPr>
-        <p:spPr>
-          <a:xfrm>
-            <a:off x="8202168" y="3630168"/>
-            <a:ext cx="1170432" cy="118872"/>
-          </a:xfrm>
-          <a:prstGeom prst="line">
-            <a:avLst/>
-          </a:prstGeom>
-          <a:noFill/>
-          <a:ln w="25400">
-            <a:solidFill>
-              <a:srgbClr val="8ABBD8"/>
-            </a:solidFill>
-            <a:prstDash val="solid"/>
-          </a:ln>
-        </p:spPr>
-      </p:sp>
-      <p:sp>
-        <p:nvSpPr>
-          <p:cNvPr id="19" name="Shape 17"/>
-          <p:cNvSpPr/>
-          <p:nvPr/>
-        </p:nvSpPr>
-        <p:spPr>
-          <a:xfrm>
-            <a:off x="10543032" y="3630168"/>
-            <a:ext cx="-1170432" cy="118872"/>
-          </a:xfrm>
-          <a:prstGeom prst="line">
-            <a:avLst/>
-          </a:prstGeom>
-          <a:noFill/>
-          <a:ln w="25400">
-            <a:solidFill>
-              <a:srgbClr val="8ABBD8"/>
-            </a:solidFill>
-            <a:prstDash val="solid"/>
-          </a:ln>
-        </p:spPr>
-      </p:sp>
-      <p:sp>
-        <p:nvSpPr>
-          <p:cNvPr id="20" name="Text 18"/>
-          <p:cNvSpPr/>
-          <p:nvPr/>
-        </p:nvSpPr>
-        <p:spPr>
-          <a:xfrm>
-            <a:off x="7863840" y="4069080"/>
-            <a:ext cx="3017520" cy="164592"/>
-          </a:xfrm>
-          <a:prstGeom prst="rect">
-            <a:avLst/>
-          </a:prstGeom>
-          <a:noFill/>
-          <a:ln/>
-        </p:spPr>
-        <p:txBody>
-          <a:bodyPr wrap="square" lIns="0" tIns="0" rIns="0" bIns="0" rtlCol="0" anchor="ctr"/>
-          <a:lstStyle/>
-          <a:p>
-            <a:pPr algn="ctr" indent="0" marL="0">
-              <a:buNone/>
-            </a:pPr>
-            <a:r>
-              <a:rPr lang="en-US" sz="900" b="1" dirty="0">
-                <a:solidFill>
-                  <a:srgbClr val="003A63"/>
-                </a:solidFill>
-                <a:latin typeface="Aptos" pitchFamily="34" charset="0"/>
-                <a:ea typeface="Aptos" pitchFamily="34" charset="-122"/>
-                <a:cs typeface="Aptos" pitchFamily="34" charset="-120"/>
-              </a:rPr>
-              <a:t>Decision rights</a:t>
-            </a:r>
-            <a:endParaRPr lang="en-US" sz="900" dirty="0"/>
-          </a:p>
-        </p:txBody>
-      </p:sp>
-      <p:sp>
-        <p:nvSpPr>
-          <p:cNvPr id="21" name="Shape 19"/>
           <p:cNvSpPr/>
           <p:nvPr/>
         </p:nvSpPr>
@@ -19191,7 +16487,7 @@
       </p:sp>
       <p:sp>
         <p:nvSpPr>
-          <p:cNvPr id="22" name="Text 20"/>
+          <p:cNvPr id="17" name="Text 15"/>
           <p:cNvSpPr/>
           <p:nvPr/>
         </p:nvSpPr>
@@ -19230,7 +16526,7 @@
       </p:sp>
       <p:sp>
         <p:nvSpPr>
-          <p:cNvPr id="23" name="Text 21"/>
+          <p:cNvPr id="18" name="Text 16"/>
           <p:cNvSpPr/>
           <p:nvPr/>
         </p:nvSpPr>
@@ -19738,13 +17034,11 @@
             </a:avLst>
           </a:prstGeom>
           <a:solidFill>
-            <a:srgbClr val="FFFFFF">
-              <a:alpha val="88000"/>
-            </a:srgbClr>
+            <a:srgbClr val="FFFFFF"/>
           </a:solidFill>
           <a:ln w="12700">
             <a:solidFill>
-              <a:srgbClr val="D6E8F2"/>
+              <a:srgbClr val="B9D7E6"/>
             </a:solidFill>
             <a:prstDash val="solid"/>
           </a:ln>
@@ -19752,30 +17046,42 @@
       </p:sp>
       <p:sp>
         <p:nvSpPr>
-          <p:cNvPr id="14" name="Shape 12"/>
-          <p:cNvSpPr/>
-          <p:nvPr/>
-        </p:nvSpPr>
-        <p:spPr>
-          <a:xfrm>
-            <a:off x="7927848" y="3319272"/>
-            <a:ext cx="792480" cy="749808"/>
-          </a:xfrm>
-          <a:prstGeom prst="roundRect">
-            <a:avLst>
-              <a:gd name="adj" fmla="val 14634"/>
-            </a:avLst>
-          </a:prstGeom>
-          <a:solidFill>
-            <a:srgbClr val="0068B7"/>
-          </a:solidFill>
-          <a:ln w="12700">
-            <a:solidFill>
-              <a:srgbClr val="0068B7"/>
-            </a:solidFill>
-            <a:prstDash val="solid"/>
-          </a:ln>
-        </p:spPr>
+          <p:cNvPr id="14" name="Text 12"/>
+          <p:cNvSpPr/>
+          <p:nvPr/>
+        </p:nvSpPr>
+        <p:spPr>
+          <a:xfrm>
+            <a:off x="7799832" y="2935224"/>
+            <a:ext cx="3145536" cy="256032"/>
+          </a:xfrm>
+          <a:prstGeom prst="rect">
+            <a:avLst/>
+          </a:prstGeom>
+          <a:noFill/>
+          <a:ln/>
+        </p:spPr>
+        <p:txBody>
+          <a:bodyPr wrap="square" lIns="0" tIns="0" rIns="0" bIns="0" rtlCol="0" anchor="ctr"/>
+          <a:lstStyle/>
+          <a:p>
+            <a:pPr indent="0" marL="0">
+              <a:buNone/>
+            </a:pPr>
+            <a:r>
+              <a:rPr lang="en-US" sz="1300" b="1" dirty="0">
+                <a:solidFill>
+                  <a:srgbClr val="0068B7"/>
+                </a:solidFill>
+                <a:latin typeface="Aptos" pitchFamily="34" charset="0"/>
+                <a:ea typeface="Aptos" pitchFamily="34" charset="-122"/>
+                <a:cs typeface="Aptos" pitchFamily="34" charset="-120"/>
+              </a:rPr>
+              <a:t>Concept checkpoints</a:t>
+            </a:r>
+            <a:endParaRPr lang="en-US" sz="1300" dirty="0"/>
+          </a:p>
+        </p:txBody>
       </p:sp>
       <p:sp>
         <p:nvSpPr>
@@ -19785,240 +17091,67 @@
         </p:nvSpPr>
         <p:spPr>
           <a:xfrm>
-            <a:off x="8001000" y="3511296"/>
-            <a:ext cx="646176" cy="310896"/>
-          </a:xfrm>
-          <a:prstGeom prst="rect">
-            <a:avLst/>
-          </a:prstGeom>
-          <a:noFill/>
-          <a:ln/>
-        </p:spPr>
-        <p:txBody>
-          <a:bodyPr wrap="square" lIns="0" tIns="0" rIns="0" bIns="0" rtlCol="0" anchor="ctr">
+            <a:off x="7818120" y="3300984"/>
+            <a:ext cx="3090672" cy="877824"/>
+          </a:xfrm>
+          <a:prstGeom prst="rect">
+            <a:avLst/>
+          </a:prstGeom>
+          <a:noFill/>
+          <a:ln/>
+        </p:spPr>
+        <p:txBody>
+          <a:bodyPr wrap="square" lIns="254" tIns="254" rIns="254" bIns="254" rtlCol="0" anchor="t">
             <a:normAutofit/>
           </a:bodyPr>
           <a:lstStyle/>
           <a:p>
-            <a:pPr algn="ctr" indent="0" marL="0">
-              <a:buNone/>
-            </a:pPr>
-            <a:r>
-              <a:rPr lang="en-US" sz="1500" b="1" dirty="0">
-                <a:solidFill>
-                  <a:srgbClr val="FFFFFF"/>
-                </a:solidFill>
-                <a:latin typeface="Aptos" pitchFamily="34" charset="0"/>
-                <a:ea typeface="Aptos" pitchFamily="34" charset="-122"/>
-                <a:cs typeface="Aptos" pitchFamily="34" charset="-120"/>
-              </a:rPr>
-              <a:t>Plan</a:t>
-            </a:r>
-            <a:endParaRPr lang="en-US" sz="1500" dirty="0"/>
+            <a:r>
+              <a:rPr lang="en-US" sz="1380" dirty="0">
+                <a:solidFill>
+                  <a:srgbClr val="17364A"/>
+                </a:solidFill>
+                <a:latin typeface="Aptos" pitchFamily="34" charset="0"/>
+                <a:ea typeface="Aptos" pitchFamily="34" charset="-122"/>
+                <a:cs typeface="Aptos" pitchFamily="34" charset="-120"/>
+              </a:rPr>
+              <a:t>In public health, APIs may retrieve case information, query FHIR resources, send status.</a:t>
+            </a:r>
+            <a:endParaRPr lang="en-US" sz="1380" dirty="0"/>
+          </a:p>
+          <a:p>
+            <a:r>
+              <a:rPr lang="en-US" sz="1380" dirty="0">
+                <a:solidFill>
+                  <a:srgbClr val="17364A"/>
+                </a:solidFill>
+                <a:latin typeface="Aptos" pitchFamily="34" charset="0"/>
+                <a:ea typeface="Aptos" pitchFamily="34" charset="-122"/>
+                <a:cs typeface="Aptos" pitchFamily="34" charset="-120"/>
+              </a:rPr>
+              <a:t>Webhooks can notify a system when a defined event occurs, such as receipt of a new lab.</a:t>
+            </a:r>
+            <a:endParaRPr lang="en-US" sz="1380" dirty="0"/>
+          </a:p>
+          <a:p>
+            <a:r>
+              <a:rPr lang="en-US" sz="1380" dirty="0">
+                <a:solidFill>
+                  <a:srgbClr val="17364A"/>
+                </a:solidFill>
+                <a:latin typeface="Aptos" pitchFamily="34" charset="0"/>
+                <a:ea typeface="Aptos" pitchFamily="34" charset="-122"/>
+                <a:cs typeface="Aptos" pitchFamily="34" charset="-120"/>
+              </a:rPr>
+              <a:t>Event-driven workflows can help public health teams respond faster, but they also require.</a:t>
+            </a:r>
+            <a:endParaRPr lang="en-US" sz="1380" dirty="0"/>
           </a:p>
         </p:txBody>
       </p:sp>
       <p:sp>
         <p:nvSpPr>
           <p:cNvPr id="16" name="Shape 14"/>
-          <p:cNvSpPr/>
-          <p:nvPr/>
-        </p:nvSpPr>
-        <p:spPr>
-          <a:xfrm>
-            <a:off x="8976360" y="3319272"/>
-            <a:ext cx="792480" cy="749808"/>
-          </a:xfrm>
-          <a:prstGeom prst="roundRect">
-            <a:avLst>
-              <a:gd name="adj" fmla="val 14634"/>
-            </a:avLst>
-          </a:prstGeom>
-          <a:solidFill>
-            <a:srgbClr val="2F8A28"/>
-          </a:solidFill>
-          <a:ln w="12700">
-            <a:solidFill>
-              <a:srgbClr val="2F8A28"/>
-            </a:solidFill>
-            <a:prstDash val="solid"/>
-          </a:ln>
-        </p:spPr>
-      </p:sp>
-      <p:sp>
-        <p:nvSpPr>
-          <p:cNvPr id="17" name="Text 15"/>
-          <p:cNvSpPr/>
-          <p:nvPr/>
-        </p:nvSpPr>
-        <p:spPr>
-          <a:xfrm>
-            <a:off x="9049512" y="3511296"/>
-            <a:ext cx="646176" cy="310896"/>
-          </a:xfrm>
-          <a:prstGeom prst="rect">
-            <a:avLst/>
-          </a:prstGeom>
-          <a:noFill/>
-          <a:ln/>
-        </p:spPr>
-        <p:txBody>
-          <a:bodyPr wrap="square" lIns="0" tIns="0" rIns="0" bIns="0" rtlCol="0" anchor="ctr">
-            <a:normAutofit/>
-          </a:bodyPr>
-          <a:lstStyle/>
-          <a:p>
-            <a:pPr algn="ctr" indent="0" marL="0">
-              <a:buNone/>
-            </a:pPr>
-            <a:r>
-              <a:rPr lang="en-US" sz="1500" b="1" dirty="0">
-                <a:solidFill>
-                  <a:srgbClr val="FFFFFF"/>
-                </a:solidFill>
-                <a:latin typeface="Aptos" pitchFamily="34" charset="0"/>
-                <a:ea typeface="Aptos" pitchFamily="34" charset="-122"/>
-                <a:cs typeface="Aptos" pitchFamily="34" charset="-120"/>
-              </a:rPr>
-              <a:t>Do</a:t>
-            </a:r>
-            <a:endParaRPr lang="en-US" sz="1500" dirty="0"/>
-          </a:p>
-        </p:txBody>
-      </p:sp>
-      <p:sp>
-        <p:nvSpPr>
-          <p:cNvPr id="18" name="Shape 16"/>
-          <p:cNvSpPr/>
-          <p:nvPr/>
-        </p:nvSpPr>
-        <p:spPr>
-          <a:xfrm>
-            <a:off x="10024872" y="3319272"/>
-            <a:ext cx="792480" cy="749808"/>
-          </a:xfrm>
-          <a:prstGeom prst="roundRect">
-            <a:avLst>
-              <a:gd name="adj" fmla="val 14634"/>
-            </a:avLst>
-          </a:prstGeom>
-          <a:solidFill>
-            <a:srgbClr val="D69A2D"/>
-          </a:solidFill>
-          <a:ln w="12700">
-            <a:solidFill>
-              <a:srgbClr val="D69A2D"/>
-            </a:solidFill>
-            <a:prstDash val="solid"/>
-          </a:ln>
-        </p:spPr>
-      </p:sp>
-      <p:sp>
-        <p:nvSpPr>
-          <p:cNvPr id="19" name="Text 17"/>
-          <p:cNvSpPr/>
-          <p:nvPr/>
-        </p:nvSpPr>
-        <p:spPr>
-          <a:xfrm>
-            <a:off x="10098024" y="3511296"/>
-            <a:ext cx="646176" cy="310896"/>
-          </a:xfrm>
-          <a:prstGeom prst="rect">
-            <a:avLst/>
-          </a:prstGeom>
-          <a:noFill/>
-          <a:ln/>
-        </p:spPr>
-        <p:txBody>
-          <a:bodyPr wrap="square" lIns="0" tIns="0" rIns="0" bIns="0" rtlCol="0" anchor="ctr">
-            <a:normAutofit/>
-          </a:bodyPr>
-          <a:lstStyle/>
-          <a:p>
-            <a:pPr algn="ctr" indent="0" marL="0">
-              <a:buNone/>
-            </a:pPr>
-            <a:r>
-              <a:rPr lang="en-US" sz="1500" b="1" dirty="0">
-                <a:solidFill>
-                  <a:srgbClr val="FFFFFF"/>
-                </a:solidFill>
-                <a:latin typeface="Aptos" pitchFamily="34" charset="0"/>
-                <a:ea typeface="Aptos" pitchFamily="34" charset="-122"/>
-                <a:cs typeface="Aptos" pitchFamily="34" charset="-120"/>
-              </a:rPr>
-              <a:t>Review</a:t>
-            </a:r>
-            <a:endParaRPr lang="en-US" sz="1500" dirty="0"/>
-          </a:p>
-        </p:txBody>
-      </p:sp>
-      <p:sp>
-        <p:nvSpPr>
-          <p:cNvPr id="20" name="Shape 18"/>
-          <p:cNvSpPr/>
-          <p:nvPr/>
-        </p:nvSpPr>
-        <p:spPr>
-          <a:xfrm>
-            <a:off x="8293608" y="4389120"/>
-            <a:ext cx="2157984" cy="0"/>
-          </a:xfrm>
-          <a:prstGeom prst="line">
-            <a:avLst/>
-          </a:prstGeom>
-          <a:noFill/>
-          <a:ln w="25400">
-            <a:solidFill>
-              <a:srgbClr val="8ABBD8"/>
-            </a:solidFill>
-            <a:prstDash val="solid"/>
-          </a:ln>
-        </p:spPr>
-      </p:sp>
-      <p:sp>
-        <p:nvSpPr>
-          <p:cNvPr id="21" name="Text 19"/>
-          <p:cNvSpPr/>
-          <p:nvPr/>
-        </p:nvSpPr>
-        <p:spPr>
-          <a:xfrm>
-            <a:off x="7909560" y="3977640"/>
-            <a:ext cx="2926080" cy="182880"/>
-          </a:xfrm>
-          <a:prstGeom prst="rect">
-            <a:avLst/>
-          </a:prstGeom>
-          <a:noFill/>
-          <a:ln/>
-        </p:spPr>
-        <p:txBody>
-          <a:bodyPr wrap="square" lIns="0" tIns="0" rIns="0" bIns="0" rtlCol="0" anchor="ctr"/>
-          <a:lstStyle/>
-          <a:p>
-            <a:pPr algn="ctr" indent="0" marL="0">
-              <a:buNone/>
-            </a:pPr>
-            <a:r>
-              <a:rPr lang="en-US" sz="1000" dirty="0">
-                <a:solidFill>
-                  <a:srgbClr val="003A63"/>
-                </a:solidFill>
-                <a:latin typeface="Aptos" pitchFamily="34" charset="0"/>
-                <a:ea typeface="Aptos" pitchFamily="34" charset="-122"/>
-                <a:cs typeface="Aptos" pitchFamily="34" charset="-120"/>
-              </a:rPr>
-              <a:t>Dependencies visible</a:t>
-            </a:r>
-            <a:endParaRPr lang="en-US" sz="1000" dirty="0"/>
-          </a:p>
-        </p:txBody>
-      </p:sp>
-      <p:sp>
-        <p:nvSpPr>
-          <p:cNvPr id="22" name="Shape 20"/>
           <p:cNvSpPr/>
           <p:nvPr/>
         </p:nvSpPr>
@@ -20045,7 +17178,7 @@
       </p:sp>
       <p:sp>
         <p:nvSpPr>
-          <p:cNvPr id="23" name="Text 21"/>
+          <p:cNvPr id="17" name="Text 15"/>
           <p:cNvSpPr/>
           <p:nvPr/>
         </p:nvSpPr>
@@ -20084,7 +17217,7 @@
       </p:sp>
       <p:sp>
         <p:nvSpPr>
-          <p:cNvPr id="24" name="Text 22"/>
+          <p:cNvPr id="18" name="Text 16"/>
           <p:cNvSpPr/>
           <p:nvPr/>
         </p:nvSpPr>
@@ -20592,13 +17725,11 @@
             </a:avLst>
           </a:prstGeom>
           <a:solidFill>
-            <a:srgbClr val="FFFFFF">
-              <a:alpha val="88000"/>
-            </a:srgbClr>
+            <a:srgbClr val="FFFFFF"/>
           </a:solidFill>
           <a:ln w="12700">
             <a:solidFill>
-              <a:srgbClr val="D6E8F2"/>
+              <a:srgbClr val="B9D7E6"/>
             </a:solidFill>
             <a:prstDash val="solid"/>
           </a:ln>
@@ -20606,30 +17737,42 @@
       </p:sp>
       <p:sp>
         <p:nvSpPr>
-          <p:cNvPr id="14" name="Shape 12"/>
-          <p:cNvSpPr/>
-          <p:nvPr/>
-        </p:nvSpPr>
-        <p:spPr>
-          <a:xfrm>
-            <a:off x="7927848" y="3319272"/>
-            <a:ext cx="792480" cy="749808"/>
-          </a:xfrm>
-          <a:prstGeom prst="roundRect">
-            <a:avLst>
-              <a:gd name="adj" fmla="val 14634"/>
-            </a:avLst>
-          </a:prstGeom>
-          <a:solidFill>
-            <a:srgbClr val="0068B7"/>
-          </a:solidFill>
-          <a:ln w="12700">
-            <a:solidFill>
-              <a:srgbClr val="0068B7"/>
-            </a:solidFill>
-            <a:prstDash val="solid"/>
-          </a:ln>
-        </p:spPr>
+          <p:cNvPr id="14" name="Text 12"/>
+          <p:cNvSpPr/>
+          <p:nvPr/>
+        </p:nvSpPr>
+        <p:spPr>
+          <a:xfrm>
+            <a:off x="7799832" y="2935224"/>
+            <a:ext cx="3145536" cy="256032"/>
+          </a:xfrm>
+          <a:prstGeom prst="rect">
+            <a:avLst/>
+          </a:prstGeom>
+          <a:noFill/>
+          <a:ln/>
+        </p:spPr>
+        <p:txBody>
+          <a:bodyPr wrap="square" lIns="0" tIns="0" rIns="0" bIns="0" rtlCol="0" anchor="ctr"/>
+          <a:lstStyle/>
+          <a:p>
+            <a:pPr indent="0" marL="0">
+              <a:buNone/>
+            </a:pPr>
+            <a:r>
+              <a:rPr lang="en-US" sz="1300" b="1" dirty="0">
+                <a:solidFill>
+                  <a:srgbClr val="0068B7"/>
+                </a:solidFill>
+                <a:latin typeface="Aptos" pitchFamily="34" charset="0"/>
+                <a:ea typeface="Aptos" pitchFamily="34" charset="-122"/>
+                <a:cs typeface="Aptos" pitchFamily="34" charset="-120"/>
+              </a:rPr>
+              <a:t>Concept checkpoints</a:t>
+            </a:r>
+            <a:endParaRPr lang="en-US" sz="1300" dirty="0"/>
+          </a:p>
+        </p:txBody>
       </p:sp>
       <p:sp>
         <p:nvSpPr>
@@ -20639,240 +17782,67 @@
         </p:nvSpPr>
         <p:spPr>
           <a:xfrm>
-            <a:off x="8001000" y="3511296"/>
-            <a:ext cx="646176" cy="310896"/>
-          </a:xfrm>
-          <a:prstGeom prst="rect">
-            <a:avLst/>
-          </a:prstGeom>
-          <a:noFill/>
-          <a:ln/>
-        </p:spPr>
-        <p:txBody>
-          <a:bodyPr wrap="square" lIns="0" tIns="0" rIns="0" bIns="0" rtlCol="0" anchor="ctr">
+            <a:off x="7818120" y="3300984"/>
+            <a:ext cx="3090672" cy="877824"/>
+          </a:xfrm>
+          <a:prstGeom prst="rect">
+            <a:avLst/>
+          </a:prstGeom>
+          <a:noFill/>
+          <a:ln/>
+        </p:spPr>
+        <p:txBody>
+          <a:bodyPr wrap="square" lIns="254" tIns="254" rIns="254" bIns="254" rtlCol="0" anchor="t">
             <a:normAutofit/>
           </a:bodyPr>
           <a:lstStyle/>
           <a:p>
-            <a:pPr algn="ctr" indent="0" marL="0">
-              <a:buNone/>
-            </a:pPr>
-            <a:r>
-              <a:rPr lang="en-US" sz="1500" b="1" dirty="0">
-                <a:solidFill>
-                  <a:srgbClr val="FFFFFF"/>
-                </a:solidFill>
-                <a:latin typeface="Aptos" pitchFamily="34" charset="0"/>
-                <a:ea typeface="Aptos" pitchFamily="34" charset="-122"/>
-                <a:cs typeface="Aptos" pitchFamily="34" charset="-120"/>
-              </a:rPr>
-              <a:t>Plan</a:t>
-            </a:r>
-            <a:endParaRPr lang="en-US" sz="1500" dirty="0"/>
+            <a:r>
+              <a:rPr lang="en-US" sz="1380" dirty="0">
+                <a:solidFill>
+                  <a:srgbClr val="17364A"/>
+                </a:solidFill>
+                <a:latin typeface="Aptos" pitchFamily="34" charset="0"/>
+                <a:ea typeface="Aptos" pitchFamily="34" charset="-122"/>
+                <a:cs typeface="Aptos" pitchFamily="34" charset="-120"/>
+              </a:rPr>
+              <a:t>APIs are useful for structured exchange, but they must be governed through authentication,.</a:t>
+            </a:r>
+            <a:endParaRPr lang="en-US" sz="1380" dirty="0"/>
+          </a:p>
+          <a:p>
+            <a:r>
+              <a:rPr lang="en-US" sz="1380" dirty="0">
+                <a:solidFill>
+                  <a:srgbClr val="17364A"/>
+                </a:solidFill>
+                <a:latin typeface="Aptos" pitchFamily="34" charset="0"/>
+                <a:ea typeface="Aptos" pitchFamily="34" charset="-122"/>
+                <a:cs typeface="Aptos" pitchFamily="34" charset="-120"/>
+              </a:rPr>
+              <a:t>Webhook.</a:t>
+            </a:r>
+            <a:endParaRPr lang="en-US" sz="1380" dirty="0"/>
+          </a:p>
+          <a:p>
+            <a:r>
+              <a:rPr lang="en-US" sz="1380" dirty="0">
+                <a:solidFill>
+                  <a:srgbClr val="17364A"/>
+                </a:solidFill>
+                <a:latin typeface="Aptos" pitchFamily="34" charset="0"/>
+                <a:ea typeface="Aptos" pitchFamily="34" charset="-122"/>
+                <a:cs typeface="Aptos" pitchFamily="34" charset="-120"/>
+              </a:rPr>
+              <a:t>A webhook sends information automatically when a defined event occurs.</a:t>
+            </a:r>
+            <a:endParaRPr lang="en-US" sz="1380" dirty="0"/>
           </a:p>
         </p:txBody>
       </p:sp>
       <p:sp>
         <p:nvSpPr>
           <p:cNvPr id="16" name="Shape 14"/>
-          <p:cNvSpPr/>
-          <p:nvPr/>
-        </p:nvSpPr>
-        <p:spPr>
-          <a:xfrm>
-            <a:off x="8976360" y="3319272"/>
-            <a:ext cx="792480" cy="749808"/>
-          </a:xfrm>
-          <a:prstGeom prst="roundRect">
-            <a:avLst>
-              <a:gd name="adj" fmla="val 14634"/>
-            </a:avLst>
-          </a:prstGeom>
-          <a:solidFill>
-            <a:srgbClr val="2F8A28"/>
-          </a:solidFill>
-          <a:ln w="12700">
-            <a:solidFill>
-              <a:srgbClr val="2F8A28"/>
-            </a:solidFill>
-            <a:prstDash val="solid"/>
-          </a:ln>
-        </p:spPr>
-      </p:sp>
-      <p:sp>
-        <p:nvSpPr>
-          <p:cNvPr id="17" name="Text 15"/>
-          <p:cNvSpPr/>
-          <p:nvPr/>
-        </p:nvSpPr>
-        <p:spPr>
-          <a:xfrm>
-            <a:off x="9049512" y="3511296"/>
-            <a:ext cx="646176" cy="310896"/>
-          </a:xfrm>
-          <a:prstGeom prst="rect">
-            <a:avLst/>
-          </a:prstGeom>
-          <a:noFill/>
-          <a:ln/>
-        </p:spPr>
-        <p:txBody>
-          <a:bodyPr wrap="square" lIns="0" tIns="0" rIns="0" bIns="0" rtlCol="0" anchor="ctr">
-            <a:normAutofit/>
-          </a:bodyPr>
-          <a:lstStyle/>
-          <a:p>
-            <a:pPr algn="ctr" indent="0" marL="0">
-              <a:buNone/>
-            </a:pPr>
-            <a:r>
-              <a:rPr lang="en-US" sz="1500" b="1" dirty="0">
-                <a:solidFill>
-                  <a:srgbClr val="FFFFFF"/>
-                </a:solidFill>
-                <a:latin typeface="Aptos" pitchFamily="34" charset="0"/>
-                <a:ea typeface="Aptos" pitchFamily="34" charset="-122"/>
-                <a:cs typeface="Aptos" pitchFamily="34" charset="-120"/>
-              </a:rPr>
-              <a:t>Do</a:t>
-            </a:r>
-            <a:endParaRPr lang="en-US" sz="1500" dirty="0"/>
-          </a:p>
-        </p:txBody>
-      </p:sp>
-      <p:sp>
-        <p:nvSpPr>
-          <p:cNvPr id="18" name="Shape 16"/>
-          <p:cNvSpPr/>
-          <p:nvPr/>
-        </p:nvSpPr>
-        <p:spPr>
-          <a:xfrm>
-            <a:off x="10024872" y="3319272"/>
-            <a:ext cx="792480" cy="749808"/>
-          </a:xfrm>
-          <a:prstGeom prst="roundRect">
-            <a:avLst>
-              <a:gd name="adj" fmla="val 14634"/>
-            </a:avLst>
-          </a:prstGeom>
-          <a:solidFill>
-            <a:srgbClr val="D69A2D"/>
-          </a:solidFill>
-          <a:ln w="12700">
-            <a:solidFill>
-              <a:srgbClr val="D69A2D"/>
-            </a:solidFill>
-            <a:prstDash val="solid"/>
-          </a:ln>
-        </p:spPr>
-      </p:sp>
-      <p:sp>
-        <p:nvSpPr>
-          <p:cNvPr id="19" name="Text 17"/>
-          <p:cNvSpPr/>
-          <p:nvPr/>
-        </p:nvSpPr>
-        <p:spPr>
-          <a:xfrm>
-            <a:off x="10098024" y="3511296"/>
-            <a:ext cx="646176" cy="310896"/>
-          </a:xfrm>
-          <a:prstGeom prst="rect">
-            <a:avLst/>
-          </a:prstGeom>
-          <a:noFill/>
-          <a:ln/>
-        </p:spPr>
-        <p:txBody>
-          <a:bodyPr wrap="square" lIns="0" tIns="0" rIns="0" bIns="0" rtlCol="0" anchor="ctr">
-            <a:normAutofit/>
-          </a:bodyPr>
-          <a:lstStyle/>
-          <a:p>
-            <a:pPr algn="ctr" indent="0" marL="0">
-              <a:buNone/>
-            </a:pPr>
-            <a:r>
-              <a:rPr lang="en-US" sz="1500" b="1" dirty="0">
-                <a:solidFill>
-                  <a:srgbClr val="FFFFFF"/>
-                </a:solidFill>
-                <a:latin typeface="Aptos" pitchFamily="34" charset="0"/>
-                <a:ea typeface="Aptos" pitchFamily="34" charset="-122"/>
-                <a:cs typeface="Aptos" pitchFamily="34" charset="-120"/>
-              </a:rPr>
-              <a:t>Review</a:t>
-            </a:r>
-            <a:endParaRPr lang="en-US" sz="1500" dirty="0"/>
-          </a:p>
-        </p:txBody>
-      </p:sp>
-      <p:sp>
-        <p:nvSpPr>
-          <p:cNvPr id="20" name="Shape 18"/>
-          <p:cNvSpPr/>
-          <p:nvPr/>
-        </p:nvSpPr>
-        <p:spPr>
-          <a:xfrm>
-            <a:off x="8293608" y="4389120"/>
-            <a:ext cx="2157984" cy="0"/>
-          </a:xfrm>
-          <a:prstGeom prst="line">
-            <a:avLst/>
-          </a:prstGeom>
-          <a:noFill/>
-          <a:ln w="25400">
-            <a:solidFill>
-              <a:srgbClr val="8ABBD8"/>
-            </a:solidFill>
-            <a:prstDash val="solid"/>
-          </a:ln>
-        </p:spPr>
-      </p:sp>
-      <p:sp>
-        <p:nvSpPr>
-          <p:cNvPr id="21" name="Text 19"/>
-          <p:cNvSpPr/>
-          <p:nvPr/>
-        </p:nvSpPr>
-        <p:spPr>
-          <a:xfrm>
-            <a:off x="7909560" y="3977640"/>
-            <a:ext cx="2926080" cy="182880"/>
-          </a:xfrm>
-          <a:prstGeom prst="rect">
-            <a:avLst/>
-          </a:prstGeom>
-          <a:noFill/>
-          <a:ln/>
-        </p:spPr>
-        <p:txBody>
-          <a:bodyPr wrap="square" lIns="0" tIns="0" rIns="0" bIns="0" rtlCol="0" anchor="ctr"/>
-          <a:lstStyle/>
-          <a:p>
-            <a:pPr algn="ctr" indent="0" marL="0">
-              <a:buNone/>
-            </a:pPr>
-            <a:r>
-              <a:rPr lang="en-US" sz="1000" dirty="0">
-                <a:solidFill>
-                  <a:srgbClr val="003A63"/>
-                </a:solidFill>
-                <a:latin typeface="Aptos" pitchFamily="34" charset="0"/>
-                <a:ea typeface="Aptos" pitchFamily="34" charset="-122"/>
-                <a:cs typeface="Aptos" pitchFamily="34" charset="-120"/>
-              </a:rPr>
-              <a:t>Dependencies visible</a:t>
-            </a:r>
-            <a:endParaRPr lang="en-US" sz="1000" dirty="0"/>
-          </a:p>
-        </p:txBody>
-      </p:sp>
-      <p:sp>
-        <p:nvSpPr>
-          <p:cNvPr id="22" name="Shape 20"/>
           <p:cNvSpPr/>
           <p:nvPr/>
         </p:nvSpPr>
@@ -20899,7 +17869,7 @@
       </p:sp>
       <p:sp>
         <p:nvSpPr>
-          <p:cNvPr id="23" name="Text 21"/>
+          <p:cNvPr id="17" name="Text 15"/>
           <p:cNvSpPr/>
           <p:nvPr/>
         </p:nvSpPr>
@@ -20938,7 +17908,7 @@
       </p:sp>
       <p:sp>
         <p:nvSpPr>
-          <p:cNvPr id="24" name="Text 22"/>
+          <p:cNvPr id="18" name="Text 16"/>
           <p:cNvSpPr/>
           <p:nvPr/>
         </p:nvSpPr>

--- a/downloads/presentations/modules/arc-260.pptx
+++ b/downloads/presentations/modules/arc-260.pptx
@@ -3441,49 +3441,58 @@
           <a:ln/>
         </p:spPr>
         <p:txBody>
-          <a:bodyPr wrap="square" lIns="635" tIns="635" rIns="635" bIns="635" rtlCol="0" anchor="t">
+          <a:bodyPr wrap="square" lIns="1016" tIns="1016" rIns="1016" bIns="1016" rtlCol="0" anchor="t">
             <a:normAutofit/>
           </a:bodyPr>
           <a:lstStyle/>
           <a:p>
+            <a:pPr indent="0" marL="0">
+              <a:buNone/>
+            </a:pPr>
             <a:r>
               <a:rPr lang="en-US" sz="2100" dirty="0">
                 <a:solidFill>
-                  <a:srgbClr val="17364A"/>
-                </a:solidFill>
-                <a:latin typeface="Aptos" pitchFamily="34" charset="0"/>
-                <a:ea typeface="Aptos" pitchFamily="34" charset="-122"/>
-                <a:cs typeface="Aptos" pitchFamily="34" charset="-120"/>
-              </a:rPr>
-              <a:t>Read-only versus write-back.</a:t>
+                  <a:srgbClr val="003A63"/>
+                </a:solidFill>
+                <a:latin typeface="Aptos" pitchFamily="34" charset="0"/>
+                <a:ea typeface="Aptos" pitchFamily="34" charset="-122"/>
+                <a:cs typeface="Aptos" pitchFamily="34" charset="-120"/>
+              </a:rPr>
+              <a:t>• Read-only versus write-back.</a:t>
             </a:r>
             <a:endParaRPr lang="en-US" sz="2100" dirty="0"/>
           </a:p>
           <a:p>
+            <a:pPr indent="0" marL="0">
+              <a:buNone/>
+            </a:pPr>
             <a:r>
               <a:rPr lang="en-US" sz="2100" dirty="0">
                 <a:solidFill>
-                  <a:srgbClr val="17364A"/>
-                </a:solidFill>
-                <a:latin typeface="Aptos" pitchFamily="34" charset="0"/>
-                <a:ea typeface="Aptos" pitchFamily="34" charset="-122"/>
-                <a:cs typeface="Aptos" pitchFamily="34" charset="-120"/>
-              </a:rPr>
-              <a:t>Read-only access allows a tool to view or retrieve information.</a:t>
+                  <a:srgbClr val="003A63"/>
+                </a:solidFill>
+                <a:latin typeface="Aptos" pitchFamily="34" charset="0"/>
+                <a:ea typeface="Aptos" pitchFamily="34" charset="-122"/>
+                <a:cs typeface="Aptos" pitchFamily="34" charset="-120"/>
+              </a:rPr>
+              <a:t>• Read-only access allows a tool to view or retrieve information.</a:t>
             </a:r>
             <a:endParaRPr lang="en-US" sz="2100" dirty="0"/>
           </a:p>
           <a:p>
+            <a:pPr indent="0" marL="0">
+              <a:buNone/>
+            </a:pPr>
             <a:r>
               <a:rPr lang="en-US" sz="2100" dirty="0">
                 <a:solidFill>
-                  <a:srgbClr val="17364A"/>
-                </a:solidFill>
-                <a:latin typeface="Aptos" pitchFamily="34" charset="0"/>
-                <a:ea typeface="Aptos" pitchFamily="34" charset="-122"/>
-                <a:cs typeface="Aptos" pitchFamily="34" charset="-120"/>
-              </a:rPr>
-              <a:t>Write-back allows a tool to update, create, or delete information.</a:t>
+                  <a:srgbClr val="003A63"/>
+                </a:solidFill>
+                <a:latin typeface="Aptos" pitchFamily="34" charset="0"/>
+                <a:ea typeface="Aptos" pitchFamily="34" charset="-122"/>
+                <a:cs typeface="Aptos" pitchFamily="34" charset="-120"/>
+              </a:rPr>
+              <a:t>• Write-back allows a tool to update, create, or delete information.</a:t>
             </a:r>
             <a:endParaRPr lang="en-US" sz="2100" dirty="0"/>
           </a:p>
@@ -3563,17 +3572,17 @@
         </p:nvSpPr>
         <p:spPr>
           <a:xfrm>
-            <a:off x="7799832" y="1828800"/>
-            <a:ext cx="3145536" cy="685800"/>
-          </a:xfrm>
-          <a:prstGeom prst="rect">
-            <a:avLst/>
-          </a:prstGeom>
-          <a:noFill/>
-          <a:ln/>
-        </p:spPr>
-        <p:txBody>
-          <a:bodyPr wrap="square" lIns="0" tIns="0" rIns="0" bIns="0" rtlCol="0" anchor="t">
+            <a:off x="7799832" y="1801368"/>
+            <a:ext cx="3145536" cy="758952"/>
+          </a:xfrm>
+          <a:prstGeom prst="rect">
+            <a:avLst/>
+          </a:prstGeom>
+          <a:noFill/>
+          <a:ln/>
+        </p:spPr>
+        <p:txBody>
+          <a:bodyPr wrap="square" lIns="254" tIns="254" rIns="254" bIns="254" rtlCol="0" anchor="t">
             <a:normAutofit/>
           </a:bodyPr>
           <a:lstStyle/>
@@ -3582,7 +3591,7 @@
               <a:buNone/>
             </a:pPr>
             <a:r>
-              <a:rPr lang="en-US" sz="1550" dirty="0">
+              <a:rPr lang="en-US" sz="1320" dirty="0">
                 <a:solidFill>
                   <a:srgbClr val="17364A"/>
                 </a:solidFill>
@@ -3592,7 +3601,7 @@
               </a:rPr>
               <a:t>Read-only versus write-back.</a:t>
             </a:r>
-            <a:endParaRPr lang="en-US" sz="1550" dirty="0"/>
+            <a:endParaRPr lang="en-US" sz="1320" dirty="0"/>
           </a:p>
         </p:txBody>
       </p:sp>
@@ -3680,13 +3689,16 @@
           <a:ln/>
         </p:spPr>
         <p:txBody>
-          <a:bodyPr wrap="square" lIns="254" tIns="254" rIns="254" bIns="254" rtlCol="0" anchor="t">
+          <a:bodyPr wrap="square" lIns="508" tIns="508" rIns="508" bIns="508" rtlCol="0" anchor="t">
             <a:normAutofit/>
           </a:bodyPr>
           <a:lstStyle/>
           <a:p>
-            <a:r>
-              <a:rPr lang="en-US" sz="1380" dirty="0">
+            <a:pPr indent="0" marL="0">
+              <a:buNone/>
+            </a:pPr>
+            <a:r>
+              <a:rPr lang="en-US" sz="1220" dirty="0">
                 <a:solidFill>
                   <a:srgbClr val="17364A"/>
                 </a:solidFill>
@@ -3696,11 +3708,14 @@
               </a:rPr>
               <a:t>Read-only versus write-back.</a:t>
             </a:r>
-            <a:endParaRPr lang="en-US" sz="1380" dirty="0"/>
-          </a:p>
-          <a:p>
-            <a:r>
-              <a:rPr lang="en-US" sz="1380" dirty="0">
+            <a:endParaRPr lang="en-US" sz="1220" dirty="0"/>
+          </a:p>
+          <a:p>
+            <a:pPr indent="0" marL="0">
+              <a:buNone/>
+            </a:pPr>
+            <a:r>
+              <a:rPr lang="en-US" sz="1220" dirty="0">
                 <a:solidFill>
                   <a:srgbClr val="17364A"/>
                 </a:solidFill>
@@ -3710,11 +3725,14 @@
               </a:rPr>
               <a:t>Read-only access allows a tool to view or retrieve information.</a:t>
             </a:r>
-            <a:endParaRPr lang="en-US" sz="1380" dirty="0"/>
-          </a:p>
-          <a:p>
-            <a:r>
-              <a:rPr lang="en-US" sz="1380" dirty="0">
+            <a:endParaRPr lang="en-US" sz="1220" dirty="0"/>
+          </a:p>
+          <a:p>
+            <a:pPr indent="0" marL="0">
+              <a:buNone/>
+            </a:pPr>
+            <a:r>
+              <a:rPr lang="en-US" sz="1220" dirty="0">
                 <a:solidFill>
                   <a:srgbClr val="17364A"/>
                 </a:solidFill>
@@ -3724,7 +3742,7 @@
               </a:rPr>
               <a:t>Write-back allows a tool to update, create, or delete information.</a:t>
             </a:r>
-            <a:endParaRPr lang="en-US" sz="1380" dirty="0"/>
+            <a:endParaRPr lang="en-US" sz="1220" dirty="0"/>
           </a:p>
         </p:txBody>
       </p:sp>
@@ -3802,17 +3820,17 @@
         </p:nvSpPr>
         <p:spPr>
           <a:xfrm>
-            <a:off x="7799832" y="5001768"/>
-            <a:ext cx="3145536" cy="502920"/>
-          </a:xfrm>
-          <a:prstGeom prst="rect">
-            <a:avLst/>
-          </a:prstGeom>
-          <a:noFill/>
-          <a:ln/>
-        </p:spPr>
-        <p:txBody>
-          <a:bodyPr wrap="square" lIns="0" tIns="0" rIns="0" bIns="0" rtlCol="0" anchor="t">
+            <a:off x="7799832" y="4974336"/>
+            <a:ext cx="3145536" cy="576072"/>
+          </a:xfrm>
+          <a:prstGeom prst="rect">
+            <a:avLst/>
+          </a:prstGeom>
+          <a:noFill/>
+          <a:ln/>
+        </p:spPr>
+        <p:txBody>
+          <a:bodyPr wrap="square" lIns="254" tIns="254" rIns="254" bIns="254" rtlCol="0" anchor="t">
             <a:normAutofit/>
           </a:bodyPr>
           <a:lstStyle/>
@@ -3821,7 +3839,7 @@
               <a:buNone/>
             </a:pPr>
             <a:r>
-              <a:rPr lang="en-US" sz="1550" dirty="0">
+              <a:rPr lang="en-US" sz="1320" dirty="0">
                 <a:solidFill>
                   <a:srgbClr val="17364A"/>
                 </a:solidFill>
@@ -3829,9 +3847,9 @@
                 <a:ea typeface="Aptos" pitchFamily="34" charset="-122"/>
                 <a:cs typeface="Aptos" pitchFamily="34" charset="-120"/>
               </a:rPr>
-              <a:t>Use the concept to clarify workflow changes, dependencies, staffing, procurement requirements, training needs, and implementation checkpoints.</a:t>
-            </a:r>
-            <a:endParaRPr lang="en-US" sz="1550" dirty="0"/>
+              <a:t>Use the concept to clarify workflow changes, dependencies, staffing, procurement requirements, training needs, and.</a:t>
+            </a:r>
+            <a:endParaRPr lang="en-US" sz="1320" dirty="0"/>
           </a:p>
         </p:txBody>
       </p:sp>
@@ -4132,49 +4150,58 @@
           <a:ln/>
         </p:spPr>
         <p:txBody>
-          <a:bodyPr wrap="square" lIns="635" tIns="635" rIns="635" bIns="635" rtlCol="0" anchor="t">
+          <a:bodyPr wrap="square" lIns="1016" tIns="1016" rIns="1016" bIns="1016" rtlCol="0" anchor="t">
             <a:normAutofit/>
           </a:bodyPr>
           <a:lstStyle/>
           <a:p>
+            <a:pPr indent="0" marL="0">
+              <a:buNone/>
+            </a:pPr>
             <a:r>
               <a:rPr lang="en-US" sz="2100" dirty="0">
                 <a:solidFill>
-                  <a:srgbClr val="17364A"/>
-                </a:solidFill>
-                <a:latin typeface="Aptos" pitchFamily="34" charset="0"/>
-                <a:ea typeface="Aptos" pitchFamily="34" charset="-122"/>
-                <a:cs typeface="Aptos" pitchFamily="34" charset="-120"/>
-              </a:rPr>
-              <a:t>An AI tool may be configured to review new environmental health complaints as they arrive and classify.</a:t>
+                  <a:srgbClr val="003A63"/>
+                </a:solidFill>
+                <a:latin typeface="Aptos" pitchFamily="34" charset="0"/>
+                <a:ea typeface="Aptos" pitchFamily="34" charset="-122"/>
+                <a:cs typeface="Aptos" pitchFamily="34" charset="-120"/>
+              </a:rPr>
+              <a:t>• An AI tool may be configured to review new environmental health complaints as they arrive and.</a:t>
             </a:r>
             <a:endParaRPr lang="en-US" sz="2100" dirty="0"/>
           </a:p>
           <a:p>
+            <a:pPr indent="0" marL="0">
+              <a:buNone/>
+            </a:pPr>
             <a:r>
               <a:rPr lang="en-US" sz="2100" dirty="0">
                 <a:solidFill>
-                  <a:srgbClr val="17364A"/>
-                </a:solidFill>
-                <a:latin typeface="Aptos" pitchFamily="34" charset="0"/>
-                <a:ea typeface="Aptos" pitchFamily="34" charset="-122"/>
-                <a:cs typeface="Aptos" pitchFamily="34" charset="-120"/>
-              </a:rPr>
-              <a:t>A webhook could trigger the review when a complaint is submitted.</a:t>
+                  <a:srgbClr val="003A63"/>
+                </a:solidFill>
+                <a:latin typeface="Aptos" pitchFamily="34" charset="0"/>
+                <a:ea typeface="Aptos" pitchFamily="34" charset="-122"/>
+                <a:cs typeface="Aptos" pitchFamily="34" charset="-120"/>
+              </a:rPr>
+              <a:t>• A webhook could trigger the review when a complaint is submitted.</a:t>
             </a:r>
             <a:endParaRPr lang="en-US" sz="2100" dirty="0"/>
           </a:p>
           <a:p>
+            <a:pPr indent="0" marL="0">
+              <a:buNone/>
+            </a:pPr>
             <a:r>
               <a:rPr lang="en-US" sz="2100" dirty="0">
                 <a:solidFill>
-                  <a:srgbClr val="17364A"/>
-                </a:solidFill>
-                <a:latin typeface="Aptos" pitchFamily="34" charset="0"/>
-                <a:ea typeface="Aptos" pitchFamily="34" charset="-122"/>
-                <a:cs typeface="Aptos" pitchFamily="34" charset="-120"/>
-              </a:rPr>
-              <a:t>The tool might assign a category, draft a summary, and create a task for human review.</a:t>
+                  <a:srgbClr val="003A63"/>
+                </a:solidFill>
+                <a:latin typeface="Aptos" pitchFamily="34" charset="0"/>
+                <a:ea typeface="Aptos" pitchFamily="34" charset="-122"/>
+                <a:cs typeface="Aptos" pitchFamily="34" charset="-120"/>
+              </a:rPr>
+              <a:t>• The tool might assign a category, draft a summary, and create a task for human review.</a:t>
             </a:r>
             <a:endParaRPr lang="en-US" sz="2100" dirty="0"/>
           </a:p>
@@ -4254,17 +4281,17 @@
         </p:nvSpPr>
         <p:spPr>
           <a:xfrm>
-            <a:off x="7799832" y="1828800"/>
-            <a:ext cx="3145536" cy="685800"/>
-          </a:xfrm>
-          <a:prstGeom prst="rect">
-            <a:avLst/>
-          </a:prstGeom>
-          <a:noFill/>
-          <a:ln/>
-        </p:spPr>
-        <p:txBody>
-          <a:bodyPr wrap="square" lIns="0" tIns="0" rIns="0" bIns="0" rtlCol="0" anchor="t">
+            <a:off x="7799832" y="1801368"/>
+            <a:ext cx="3145536" cy="758952"/>
+          </a:xfrm>
+          <a:prstGeom prst="rect">
+            <a:avLst/>
+          </a:prstGeom>
+          <a:noFill/>
+          <a:ln/>
+        </p:spPr>
+        <p:txBody>
+          <a:bodyPr wrap="square" lIns="254" tIns="254" rIns="254" bIns="254" rtlCol="0" anchor="t">
             <a:normAutofit/>
           </a:bodyPr>
           <a:lstStyle/>
@@ -4273,7 +4300,7 @@
               <a:buNone/>
             </a:pPr>
             <a:r>
-              <a:rPr lang="en-US" sz="1550" dirty="0">
+              <a:rPr lang="en-US" sz="1320" dirty="0">
                 <a:solidFill>
                   <a:srgbClr val="17364A"/>
                 </a:solidFill>
@@ -4283,7 +4310,7 @@
               </a:rPr>
               <a:t>An AI tool may be configured to review new environmental health complaints as they arrive and classify.</a:t>
             </a:r>
-            <a:endParaRPr lang="en-US" sz="1550" dirty="0"/>
+            <a:endParaRPr lang="en-US" sz="1320" dirty="0"/>
           </a:p>
         </p:txBody>
       </p:sp>
@@ -4371,13 +4398,16 @@
           <a:ln/>
         </p:spPr>
         <p:txBody>
-          <a:bodyPr wrap="square" lIns="254" tIns="254" rIns="254" bIns="254" rtlCol="0" anchor="t">
+          <a:bodyPr wrap="square" lIns="508" tIns="508" rIns="508" bIns="508" rtlCol="0" anchor="t">
             <a:normAutofit/>
           </a:bodyPr>
           <a:lstStyle/>
           <a:p>
-            <a:r>
-              <a:rPr lang="en-US" sz="1380" dirty="0">
+            <a:pPr indent="0" marL="0">
+              <a:buNone/>
+            </a:pPr>
+            <a:r>
+              <a:rPr lang="en-US" sz="1220" dirty="0">
                 <a:solidFill>
                   <a:srgbClr val="17364A"/>
                 </a:solidFill>
@@ -4385,13 +4415,16 @@
                 <a:ea typeface="Aptos" pitchFamily="34" charset="-122"/>
                 <a:cs typeface="Aptos" pitchFamily="34" charset="-120"/>
               </a:rPr>
-              <a:t>An AI tool may be configured to review new environmental health complaints as they arrive.</a:t>
-            </a:r>
-            <a:endParaRPr lang="en-US" sz="1380" dirty="0"/>
-          </a:p>
-          <a:p>
-            <a:r>
-              <a:rPr lang="en-US" sz="1380" dirty="0">
+              <a:t>An AI tool may be configured to review new environmental health.</a:t>
+            </a:r>
+            <a:endParaRPr lang="en-US" sz="1220" dirty="0"/>
+          </a:p>
+          <a:p>
+            <a:pPr indent="0" marL="0">
+              <a:buNone/>
+            </a:pPr>
+            <a:r>
+              <a:rPr lang="en-US" sz="1220" dirty="0">
                 <a:solidFill>
                   <a:srgbClr val="17364A"/>
                 </a:solidFill>
@@ -4399,13 +4432,16 @@
                 <a:ea typeface="Aptos" pitchFamily="34" charset="-122"/>
                 <a:cs typeface="Aptos" pitchFamily="34" charset="-120"/>
               </a:rPr>
-              <a:t>This workflow could improve triage, but it must log the AI classification, preserve the.</a:t>
-            </a:r>
-            <a:endParaRPr lang="en-US" sz="1380" dirty="0"/>
-          </a:p>
-          <a:p>
-            <a:r>
-              <a:rPr lang="en-US" sz="1380" dirty="0">
+              <a:t>This workflow could improve triage, but it must log the AI.</a:t>
+            </a:r>
+            <a:endParaRPr lang="en-US" sz="1220" dirty="0"/>
+          </a:p>
+          <a:p>
+            <a:pPr indent="0" marL="0">
+              <a:buNone/>
+            </a:pPr>
+            <a:r>
+              <a:rPr lang="en-US" sz="1220" dirty="0">
                 <a:solidFill>
                   <a:srgbClr val="17364A"/>
                 </a:solidFill>
@@ -4413,9 +4449,9 @@
                 <a:ea typeface="Aptos" pitchFamily="34" charset="-122"/>
                 <a:cs typeface="Aptos" pitchFamily="34" charset="-120"/>
               </a:rPr>
-              <a:t>A higher-risk example is an agentic tool that updates a case management system after.</a:t>
-            </a:r>
-            <a:endParaRPr lang="en-US" sz="1380" dirty="0"/>
+              <a:t>A higher-risk example is an agentic tool that updates a case.</a:t>
+            </a:r>
+            <a:endParaRPr lang="en-US" sz="1220" dirty="0"/>
           </a:p>
         </p:txBody>
       </p:sp>
@@ -4493,17 +4529,17 @@
         </p:nvSpPr>
         <p:spPr>
           <a:xfrm>
-            <a:off x="7799832" y="5001768"/>
-            <a:ext cx="3145536" cy="502920"/>
-          </a:xfrm>
-          <a:prstGeom prst="rect">
-            <a:avLst/>
-          </a:prstGeom>
-          <a:noFill/>
-          <a:ln/>
-        </p:spPr>
-        <p:txBody>
-          <a:bodyPr wrap="square" lIns="0" tIns="0" rIns="0" bIns="0" rtlCol="0" anchor="t">
+            <a:off x="7799832" y="4974336"/>
+            <a:ext cx="3145536" cy="576072"/>
+          </a:xfrm>
+          <a:prstGeom prst="rect">
+            <a:avLst/>
+          </a:prstGeom>
+          <a:noFill/>
+          <a:ln/>
+        </p:spPr>
+        <p:txBody>
+          <a:bodyPr wrap="square" lIns="254" tIns="254" rIns="254" bIns="254" rtlCol="0" anchor="t">
             <a:normAutofit/>
           </a:bodyPr>
           <a:lstStyle/>
@@ -4512,7 +4548,7 @@
               <a:buNone/>
             </a:pPr>
             <a:r>
-              <a:rPr lang="en-US" sz="1550" dirty="0">
+              <a:rPr lang="en-US" sz="1320" dirty="0">
                 <a:solidFill>
                   <a:srgbClr val="17364A"/>
                 </a:solidFill>
@@ -4520,9 +4556,9 @@
                 <a:ea typeface="Aptos" pitchFamily="34" charset="-122"/>
                 <a:cs typeface="Aptos" pitchFamily="34" charset="-120"/>
               </a:rPr>
-              <a:t>Use the concept to clarify workflow changes, dependencies, staffing, procurement requirements, training needs, and implementation checkpoints.</a:t>
-            </a:r>
-            <a:endParaRPr lang="en-US" sz="1550" dirty="0"/>
+              <a:t>Use the concept to clarify workflow changes, dependencies, staffing, procurement requirements, training needs, and.</a:t>
+            </a:r>
+            <a:endParaRPr lang="en-US" sz="1320" dirty="0"/>
           </a:p>
         </p:txBody>
       </p:sp>
@@ -4823,49 +4859,58 @@
           <a:ln/>
         </p:spPr>
         <p:txBody>
-          <a:bodyPr wrap="square" lIns="635" tIns="635" rIns="635" bIns="635" rtlCol="0" anchor="t">
+          <a:bodyPr wrap="square" lIns="1016" tIns="1016" rIns="1016" bIns="1016" rtlCol="0" anchor="t">
             <a:normAutofit/>
           </a:bodyPr>
           <a:lstStyle/>
           <a:p>
+            <a:pPr indent="0" marL="0">
+              <a:buNone/>
+            </a:pPr>
             <a:r>
               <a:rPr lang="en-US" sz="2100" dirty="0">
                 <a:solidFill>
-                  <a:srgbClr val="17364A"/>
-                </a:solidFill>
-                <a:latin typeface="Aptos" pitchFamily="34" charset="0"/>
-                <a:ea typeface="Aptos" pitchFamily="34" charset="-122"/>
-                <a:cs typeface="Aptos" pitchFamily="34" charset="-120"/>
-              </a:rPr>
-              <a:t>API review should begin with purpose and permissions.</a:t>
+                  <a:srgbClr val="003A63"/>
+                </a:solidFill>
+                <a:latin typeface="Aptos" pitchFamily="34" charset="0"/>
+                <a:ea typeface="Aptos" pitchFamily="34" charset="-122"/>
+                <a:cs typeface="Aptos" pitchFamily="34" charset="-120"/>
+              </a:rPr>
+              <a:t>• API review should begin with purpose and permissions.</a:t>
             </a:r>
             <a:endParaRPr lang="en-US" sz="2100" dirty="0"/>
           </a:p>
           <a:p>
+            <a:pPr indent="0" marL="0">
+              <a:buNone/>
+            </a:pPr>
             <a:r>
               <a:rPr lang="en-US" sz="2100" dirty="0">
                 <a:solidFill>
-                  <a:srgbClr val="17364A"/>
-                </a:solidFill>
-                <a:latin typeface="Aptos" pitchFamily="34" charset="0"/>
-                <a:ea typeface="Aptos" pitchFamily="34" charset="-122"/>
-                <a:cs typeface="Aptos" pitchFamily="34" charset="-120"/>
-              </a:rPr>
-              <a:t>Staff should ask what data the AI tool needs, whether the access is read-only or write-back, which.</a:t>
+                  <a:srgbClr val="003A63"/>
+                </a:solidFill>
+                <a:latin typeface="Aptos" pitchFamily="34" charset="0"/>
+                <a:ea typeface="Aptos" pitchFamily="34" charset="-122"/>
+                <a:cs typeface="Aptos" pitchFamily="34" charset="-120"/>
+              </a:rPr>
+              <a:t>• Staff should ask what data the AI tool needs, whether the access is read-only or write-back,.</a:t>
             </a:r>
             <a:endParaRPr lang="en-US" sz="2100" dirty="0"/>
           </a:p>
           <a:p>
+            <a:pPr indent="0" marL="0">
+              <a:buNone/>
+            </a:pPr>
             <a:r>
               <a:rPr lang="en-US" sz="2100" dirty="0">
                 <a:solidFill>
-                  <a:srgbClr val="17364A"/>
-                </a:solidFill>
-                <a:latin typeface="Aptos" pitchFamily="34" charset="0"/>
-                <a:ea typeface="Aptos" pitchFamily="34" charset="-122"/>
-                <a:cs typeface="Aptos" pitchFamily="34" charset="-120"/>
-              </a:rPr>
-              <a:t>Permissions should follow least privilege, meaning the tool receives only the access required for the.</a:t>
+                  <a:srgbClr val="003A63"/>
+                </a:solidFill>
+                <a:latin typeface="Aptos" pitchFamily="34" charset="0"/>
+                <a:ea typeface="Aptos" pitchFamily="34" charset="-122"/>
+                <a:cs typeface="Aptos" pitchFamily="34" charset="-120"/>
+              </a:rPr>
+              <a:t>• Permissions should follow least privilege, meaning the tool receives only the access required.</a:t>
             </a:r>
             <a:endParaRPr lang="en-US" sz="2100" dirty="0"/>
           </a:p>
@@ -4945,17 +4990,17 @@
         </p:nvSpPr>
         <p:spPr>
           <a:xfrm>
-            <a:off x="7799832" y="1828800"/>
-            <a:ext cx="3145536" cy="685800"/>
-          </a:xfrm>
-          <a:prstGeom prst="rect">
-            <a:avLst/>
-          </a:prstGeom>
-          <a:noFill/>
-          <a:ln/>
-        </p:spPr>
-        <p:txBody>
-          <a:bodyPr wrap="square" lIns="0" tIns="0" rIns="0" bIns="0" rtlCol="0" anchor="t">
+            <a:off x="7799832" y="1801368"/>
+            <a:ext cx="3145536" cy="758952"/>
+          </a:xfrm>
+          <a:prstGeom prst="rect">
+            <a:avLst/>
+          </a:prstGeom>
+          <a:noFill/>
+          <a:ln/>
+        </p:spPr>
+        <p:txBody>
+          <a:bodyPr wrap="square" lIns="254" tIns="254" rIns="254" bIns="254" rtlCol="0" anchor="t">
             <a:normAutofit/>
           </a:bodyPr>
           <a:lstStyle/>
@@ -4964,7 +5009,7 @@
               <a:buNone/>
             </a:pPr>
             <a:r>
-              <a:rPr lang="en-US" sz="1550" dirty="0">
+              <a:rPr lang="en-US" sz="1320" dirty="0">
                 <a:solidFill>
                   <a:srgbClr val="17364A"/>
                 </a:solidFill>
@@ -4974,7 +5019,7 @@
               </a:rPr>
               <a:t>API review should begin with purpose and permissions.</a:t>
             </a:r>
-            <a:endParaRPr lang="en-US" sz="1550" dirty="0"/>
+            <a:endParaRPr lang="en-US" sz="1320" dirty="0"/>
           </a:p>
         </p:txBody>
       </p:sp>
@@ -5062,13 +5107,16 @@
           <a:ln/>
         </p:spPr>
         <p:txBody>
-          <a:bodyPr wrap="square" lIns="254" tIns="254" rIns="254" bIns="254" rtlCol="0" anchor="t">
+          <a:bodyPr wrap="square" lIns="508" tIns="508" rIns="508" bIns="508" rtlCol="0" anchor="t">
             <a:normAutofit/>
           </a:bodyPr>
           <a:lstStyle/>
           <a:p>
-            <a:r>
-              <a:rPr lang="en-US" sz="1380" dirty="0">
+            <a:pPr indent="0" marL="0">
+              <a:buNone/>
+            </a:pPr>
+            <a:r>
+              <a:rPr lang="en-US" sz="1220" dirty="0">
                 <a:solidFill>
                   <a:srgbClr val="17364A"/>
                 </a:solidFill>
@@ -5076,13 +5124,16 @@
                 <a:ea typeface="Aptos" pitchFamily="34" charset="-122"/>
                 <a:cs typeface="Aptos" pitchFamily="34" charset="-120"/>
               </a:rPr>
-              <a:t>Staff should ask what data the AI tool needs, whether the access is read-only or.</a:t>
-            </a:r>
-            <a:endParaRPr lang="en-US" sz="1380" dirty="0"/>
-          </a:p>
-          <a:p>
-            <a:r>
-              <a:rPr lang="en-US" sz="1380" dirty="0">
+              <a:t>Staff should ask what data the AI tool needs, whether the access.</a:t>
+            </a:r>
+            <a:endParaRPr lang="en-US" sz="1220" dirty="0"/>
+          </a:p>
+          <a:p>
+            <a:pPr indent="0" marL="0">
+              <a:buNone/>
+            </a:pPr>
+            <a:r>
+              <a:rPr lang="en-US" sz="1220" dirty="0">
                 <a:solidFill>
                   <a:srgbClr val="17364A"/>
                 </a:solidFill>
@@ -5090,13 +5141,16 @@
                 <a:ea typeface="Aptos" pitchFamily="34" charset="-122"/>
                 <a:cs typeface="Aptos" pitchFamily="34" charset="-120"/>
               </a:rPr>
-              <a:t>Permissions should follow least privilege, meaning the tool receives only the access.</a:t>
-            </a:r>
-            <a:endParaRPr lang="en-US" sz="1380" dirty="0"/>
-          </a:p>
-          <a:p>
-            <a:r>
-              <a:rPr lang="en-US" sz="1380" dirty="0">
+              <a:t>Permissions should follow least privilege, meaning the tool.</a:t>
+            </a:r>
+            <a:endParaRPr lang="en-US" sz="1220" dirty="0"/>
+          </a:p>
+          <a:p>
+            <a:pPr indent="0" marL="0">
+              <a:buNone/>
+            </a:pPr>
+            <a:r>
+              <a:rPr lang="en-US" sz="1220" dirty="0">
                 <a:solidFill>
                   <a:srgbClr val="17364A"/>
                 </a:solidFill>
@@ -5106,7 +5160,7 @@
               </a:rPr>
               <a:t>Event-driven workflows should be designed with failure in mind.</a:t>
             </a:r>
-            <a:endParaRPr lang="en-US" sz="1380" dirty="0"/>
+            <a:endParaRPr lang="en-US" sz="1220" dirty="0"/>
           </a:p>
         </p:txBody>
       </p:sp>
@@ -5184,17 +5238,17 @@
         </p:nvSpPr>
         <p:spPr>
           <a:xfrm>
-            <a:off x="7799832" y="5001768"/>
-            <a:ext cx="3145536" cy="502920"/>
-          </a:xfrm>
-          <a:prstGeom prst="rect">
-            <a:avLst/>
-          </a:prstGeom>
-          <a:noFill/>
-          <a:ln/>
-        </p:spPr>
-        <p:txBody>
-          <a:bodyPr wrap="square" lIns="0" tIns="0" rIns="0" bIns="0" rtlCol="0" anchor="t">
+            <a:off x="7799832" y="4974336"/>
+            <a:ext cx="3145536" cy="576072"/>
+          </a:xfrm>
+          <a:prstGeom prst="rect">
+            <a:avLst/>
+          </a:prstGeom>
+          <a:noFill/>
+          <a:ln/>
+        </p:spPr>
+        <p:txBody>
+          <a:bodyPr wrap="square" lIns="254" tIns="254" rIns="254" bIns="254" rtlCol="0" anchor="t">
             <a:normAutofit/>
           </a:bodyPr>
           <a:lstStyle/>
@@ -5203,7 +5257,7 @@
               <a:buNone/>
             </a:pPr>
             <a:r>
-              <a:rPr lang="en-US" sz="1550" dirty="0">
+              <a:rPr lang="en-US" sz="1320" dirty="0">
                 <a:solidFill>
                   <a:srgbClr val="17364A"/>
                 </a:solidFill>
@@ -5211,9 +5265,9 @@
                 <a:ea typeface="Aptos" pitchFamily="34" charset="-122"/>
                 <a:cs typeface="Aptos" pitchFamily="34" charset="-120"/>
               </a:rPr>
-              <a:t>Use the concept to clarify workflow changes, dependencies, staffing, procurement requirements, training needs, and implementation checkpoints.</a:t>
-            </a:r>
-            <a:endParaRPr lang="en-US" sz="1550" dirty="0"/>
+              <a:t>Use the concept to clarify workflow changes, dependencies, staffing, procurement requirements, training needs, and.</a:t>
+            </a:r>
+            <a:endParaRPr lang="en-US" sz="1320" dirty="0"/>
           </a:p>
         </p:txBody>
       </p:sp>
@@ -5514,49 +5568,58 @@
           <a:ln/>
         </p:spPr>
         <p:txBody>
-          <a:bodyPr wrap="square" lIns="635" tIns="635" rIns="635" bIns="635" rtlCol="0" anchor="t">
+          <a:bodyPr wrap="square" lIns="1016" tIns="1016" rIns="1016" bIns="1016" rtlCol="0" anchor="t">
             <a:normAutofit/>
           </a:bodyPr>
           <a:lstStyle/>
           <a:p>
+            <a:pPr indent="0" marL="0">
+              <a:buNone/>
+            </a:pPr>
             <a:r>
               <a:rPr lang="en-US" sz="2100" dirty="0">
                 <a:solidFill>
-                  <a:srgbClr val="17364A"/>
-                </a:solidFill>
-                <a:latin typeface="Aptos" pitchFamily="34" charset="0"/>
-                <a:ea typeface="Aptos" pitchFamily="34" charset="-122"/>
-                <a:cs typeface="Aptos" pitchFamily="34" charset="-120"/>
-              </a:rPr>
-              <a:t>Over-permissioned integrations.</a:t>
+                  <a:srgbClr val="003A63"/>
+                </a:solidFill>
+                <a:latin typeface="Aptos" pitchFamily="34" charset="0"/>
+                <a:ea typeface="Aptos" pitchFamily="34" charset="-122"/>
+                <a:cs typeface="Aptos" pitchFamily="34" charset="-120"/>
+              </a:rPr>
+              <a:t>• Over-permissioned integrations.</a:t>
             </a:r>
             <a:endParaRPr lang="en-US" sz="2100" dirty="0"/>
           </a:p>
           <a:p>
+            <a:pPr indent="0" marL="0">
+              <a:buNone/>
+            </a:pPr>
             <a:r>
               <a:rPr lang="en-US" sz="2100" dirty="0">
                 <a:solidFill>
-                  <a:srgbClr val="17364A"/>
-                </a:solidFill>
-                <a:latin typeface="Aptos" pitchFamily="34" charset="0"/>
-                <a:ea typeface="Aptos" pitchFamily="34" charset="-122"/>
-                <a:cs typeface="Aptos" pitchFamily="34" charset="-120"/>
-              </a:rPr>
-              <a:t>AI tools may receive broader access than needed.</a:t>
+                  <a:srgbClr val="003A63"/>
+                </a:solidFill>
+                <a:latin typeface="Aptos" pitchFamily="34" charset="0"/>
+                <a:ea typeface="Aptos" pitchFamily="34" charset="-122"/>
+                <a:cs typeface="Aptos" pitchFamily="34" charset="-120"/>
+              </a:rPr>
+              <a:t>• AI tools may receive broader access than needed.</a:t>
             </a:r>
             <a:endParaRPr lang="en-US" sz="2100" dirty="0"/>
           </a:p>
           <a:p>
+            <a:pPr indent="0" marL="0">
+              <a:buNone/>
+            </a:pPr>
             <a:r>
               <a:rPr lang="en-US" sz="2100" dirty="0">
                 <a:solidFill>
-                  <a:srgbClr val="17364A"/>
-                </a:solidFill>
-                <a:latin typeface="Aptos" pitchFamily="34" charset="0"/>
-                <a:ea typeface="Aptos" pitchFamily="34" charset="-122"/>
-                <a:cs typeface="Aptos" pitchFamily="34" charset="-120"/>
-              </a:rPr>
-              <a:t>Guardrails include least-privilege scopes, role-based access, periodic access review, and credential.</a:t>
+                  <a:srgbClr val="003A63"/>
+                </a:solidFill>
+                <a:latin typeface="Aptos" pitchFamily="34" charset="0"/>
+                <a:ea typeface="Aptos" pitchFamily="34" charset="-122"/>
+                <a:cs typeface="Aptos" pitchFamily="34" charset="-120"/>
+              </a:rPr>
+              <a:t>• Guardrails include least-privilege scopes, role-based access, periodic access review, and.</a:t>
             </a:r>
             <a:endParaRPr lang="en-US" sz="2100" dirty="0"/>
           </a:p>
@@ -5636,17 +5699,17 @@
         </p:nvSpPr>
         <p:spPr>
           <a:xfrm>
-            <a:off x="7799832" y="1828800"/>
-            <a:ext cx="3145536" cy="685800"/>
-          </a:xfrm>
-          <a:prstGeom prst="rect">
-            <a:avLst/>
-          </a:prstGeom>
-          <a:noFill/>
-          <a:ln/>
-        </p:spPr>
-        <p:txBody>
-          <a:bodyPr wrap="square" lIns="0" tIns="0" rIns="0" bIns="0" rtlCol="0" anchor="t">
+            <a:off x="7799832" y="1801368"/>
+            <a:ext cx="3145536" cy="758952"/>
+          </a:xfrm>
+          <a:prstGeom prst="rect">
+            <a:avLst/>
+          </a:prstGeom>
+          <a:noFill/>
+          <a:ln/>
+        </p:spPr>
+        <p:txBody>
+          <a:bodyPr wrap="square" lIns="254" tIns="254" rIns="254" bIns="254" rtlCol="0" anchor="t">
             <a:normAutofit/>
           </a:bodyPr>
           <a:lstStyle/>
@@ -5655,7 +5718,7 @@
               <a:buNone/>
             </a:pPr>
             <a:r>
-              <a:rPr lang="en-US" sz="1550" dirty="0">
+              <a:rPr lang="en-US" sz="1320" dirty="0">
                 <a:solidFill>
                   <a:srgbClr val="17364A"/>
                 </a:solidFill>
@@ -5665,7 +5728,7 @@
               </a:rPr>
               <a:t>Over-permissioned integrations.</a:t>
             </a:r>
-            <a:endParaRPr lang="en-US" sz="1550" dirty="0"/>
+            <a:endParaRPr lang="en-US" sz="1320" dirty="0"/>
           </a:p>
         </p:txBody>
       </p:sp>
@@ -5753,13 +5816,16 @@
           <a:ln/>
         </p:spPr>
         <p:txBody>
-          <a:bodyPr wrap="square" lIns="254" tIns="254" rIns="254" bIns="254" rtlCol="0" anchor="t">
+          <a:bodyPr wrap="square" lIns="508" tIns="508" rIns="508" bIns="508" rtlCol="0" anchor="t">
             <a:normAutofit/>
           </a:bodyPr>
           <a:lstStyle/>
           <a:p>
-            <a:r>
-              <a:rPr lang="en-US" sz="1380" dirty="0">
+            <a:pPr indent="0" marL="0">
+              <a:buNone/>
+            </a:pPr>
+            <a:r>
+              <a:rPr lang="en-US" sz="1220" dirty="0">
                 <a:solidFill>
                   <a:srgbClr val="17364A"/>
                 </a:solidFill>
@@ -5767,13 +5833,16 @@
                 <a:ea typeface="Aptos" pitchFamily="34" charset="-122"/>
                 <a:cs typeface="Aptos" pitchFamily="34" charset="-120"/>
               </a:rPr>
-              <a:t>Guardrails include least-privilege scopes, role-based access, periodic access review, and.</a:t>
-            </a:r>
-            <a:endParaRPr lang="en-US" sz="1380" dirty="0"/>
-          </a:p>
-          <a:p>
-            <a:r>
-              <a:rPr lang="en-US" sz="1380" dirty="0">
+              <a:t>Guardrails include least-privilege scopes, role-based access,.</a:t>
+            </a:r>
+            <a:endParaRPr lang="en-US" sz="1220" dirty="0"/>
+          </a:p>
+          <a:p>
+            <a:pPr indent="0" marL="0">
+              <a:buNone/>
+            </a:pPr>
+            <a:r>
+              <a:rPr lang="en-US" sz="1220" dirty="0">
                 <a:solidFill>
                   <a:srgbClr val="17364A"/>
                 </a:solidFill>
@@ -5783,11 +5852,14 @@
               </a:rPr>
               <a:t>Unreviewed write-back.</a:t>
             </a:r>
-            <a:endParaRPr lang="en-US" sz="1380" dirty="0"/>
-          </a:p>
-          <a:p>
-            <a:r>
-              <a:rPr lang="en-US" sz="1380" dirty="0">
+            <a:endParaRPr lang="en-US" sz="1220" dirty="0"/>
+          </a:p>
+          <a:p>
+            <a:pPr indent="0" marL="0">
+              <a:buNone/>
+            </a:pPr>
+            <a:r>
+              <a:rPr lang="en-US" sz="1220" dirty="0">
                 <a:solidFill>
                   <a:srgbClr val="17364A"/>
                 </a:solidFill>
@@ -5795,9 +5867,9 @@
                 <a:ea typeface="Aptos" pitchFamily="34" charset="-122"/>
                 <a:cs typeface="Aptos" pitchFamily="34" charset="-120"/>
               </a:rPr>
-              <a:t>Automated updates can alter official records without adequate oversight.</a:t>
-            </a:r>
-            <a:endParaRPr lang="en-US" sz="1380" dirty="0"/>
+              <a:t>Automated updates can alter official records without adequate.</a:t>
+            </a:r>
+            <a:endParaRPr lang="en-US" sz="1220" dirty="0"/>
           </a:p>
         </p:txBody>
       </p:sp>
@@ -5875,17 +5947,17 @@
         </p:nvSpPr>
         <p:spPr>
           <a:xfrm>
-            <a:off x="7799832" y="5001768"/>
-            <a:ext cx="3145536" cy="502920"/>
-          </a:xfrm>
-          <a:prstGeom prst="rect">
-            <a:avLst/>
-          </a:prstGeom>
-          <a:noFill/>
-          <a:ln/>
-        </p:spPr>
-        <p:txBody>
-          <a:bodyPr wrap="square" lIns="0" tIns="0" rIns="0" bIns="0" rtlCol="0" anchor="t">
+            <a:off x="7799832" y="4974336"/>
+            <a:ext cx="3145536" cy="576072"/>
+          </a:xfrm>
+          <a:prstGeom prst="rect">
+            <a:avLst/>
+          </a:prstGeom>
+          <a:noFill/>
+          <a:ln/>
+        </p:spPr>
+        <p:txBody>
+          <a:bodyPr wrap="square" lIns="254" tIns="254" rIns="254" bIns="254" rtlCol="0" anchor="t">
             <a:normAutofit/>
           </a:bodyPr>
           <a:lstStyle/>
@@ -5894,7 +5966,7 @@
               <a:buNone/>
             </a:pPr>
             <a:r>
-              <a:rPr lang="en-US" sz="1550" dirty="0">
+              <a:rPr lang="en-US" sz="1320" dirty="0">
                 <a:solidFill>
                   <a:srgbClr val="17364A"/>
                 </a:solidFill>
@@ -5902,9 +5974,9 @@
                 <a:ea typeface="Aptos" pitchFamily="34" charset="-122"/>
                 <a:cs typeface="Aptos" pitchFamily="34" charset="-120"/>
               </a:rPr>
-              <a:t>Identify what could go wrong, who could be affected, what safeguards are needed, and what evidence should be reviewed before use expands.</a:t>
-            </a:r>
-            <a:endParaRPr lang="en-US" sz="1550" dirty="0"/>
+              <a:t>Identify what could go wrong, who could be affected, what safeguards are needed, and what evidence should be reviewed.</a:t>
+            </a:r>
+            <a:endParaRPr lang="en-US" sz="1320" dirty="0"/>
           </a:p>
         </p:txBody>
       </p:sp>
@@ -6205,49 +6277,58 @@
           <a:ln/>
         </p:spPr>
         <p:txBody>
-          <a:bodyPr wrap="square" lIns="635" tIns="635" rIns="635" bIns="635" rtlCol="0" anchor="t">
+          <a:bodyPr wrap="square" lIns="1016" tIns="1016" rIns="1016" bIns="1016" rtlCol="0" anchor="t">
             <a:normAutofit/>
           </a:bodyPr>
           <a:lstStyle/>
           <a:p>
+            <a:pPr indent="0" marL="0">
+              <a:buNone/>
+            </a:pPr>
             <a:r>
               <a:rPr lang="en-US" sz="2100" dirty="0">
                 <a:solidFill>
-                  <a:srgbClr val="17364A"/>
-                </a:solidFill>
-                <a:latin typeface="Aptos" pitchFamily="34" charset="0"/>
-                <a:ea typeface="Aptos" pitchFamily="34" charset="-122"/>
-                <a:cs typeface="Aptos" pitchFamily="34" charset="-120"/>
-              </a:rPr>
-              <a:t>Poor error handling.</a:t>
+                  <a:srgbClr val="003A63"/>
+                </a:solidFill>
+                <a:latin typeface="Aptos" pitchFamily="34" charset="0"/>
+                <a:ea typeface="Aptos" pitchFamily="34" charset="-122"/>
+                <a:cs typeface="Aptos" pitchFamily="34" charset="-120"/>
+              </a:rPr>
+              <a:t>• Poor error handling.</a:t>
             </a:r>
             <a:endParaRPr lang="en-US" sz="2100" dirty="0"/>
           </a:p>
           <a:p>
+            <a:pPr indent="0" marL="0">
+              <a:buNone/>
+            </a:pPr>
             <a:r>
               <a:rPr lang="en-US" sz="2100" dirty="0">
                 <a:solidFill>
-                  <a:srgbClr val="17364A"/>
-                </a:solidFill>
-                <a:latin typeface="Aptos" pitchFamily="34" charset="0"/>
-                <a:ea typeface="Aptos" pitchFamily="34" charset="-122"/>
-                <a:cs typeface="Aptos" pitchFamily="34" charset="-120"/>
-              </a:rPr>
-              <a:t>Failed API calls may produce incomplete workflows.</a:t>
+                  <a:srgbClr val="003A63"/>
+                </a:solidFill>
+                <a:latin typeface="Aptos" pitchFamily="34" charset="0"/>
+                <a:ea typeface="Aptos" pitchFamily="34" charset="-122"/>
+                <a:cs typeface="Aptos" pitchFamily="34" charset="-120"/>
+              </a:rPr>
+              <a:t>• Failed API calls may produce incomplete workflows.</a:t>
             </a:r>
             <a:endParaRPr lang="en-US" sz="2100" dirty="0"/>
           </a:p>
           <a:p>
+            <a:pPr indent="0" marL="0">
+              <a:buNone/>
+            </a:pPr>
             <a:r>
               <a:rPr lang="en-US" sz="2100" dirty="0">
                 <a:solidFill>
-                  <a:srgbClr val="17364A"/>
-                </a:solidFill>
-                <a:latin typeface="Aptos" pitchFamily="34" charset="0"/>
-                <a:ea typeface="Aptos" pitchFamily="34" charset="-122"/>
-                <a:cs typeface="Aptos" pitchFamily="34" charset="-120"/>
-              </a:rPr>
-              <a:t>Guardrails include status indicators, retry rules, exception queues, and staff notification.</a:t>
+                  <a:srgbClr val="003A63"/>
+                </a:solidFill>
+                <a:latin typeface="Aptos" pitchFamily="34" charset="0"/>
+                <a:ea typeface="Aptos" pitchFamily="34" charset="-122"/>
+                <a:cs typeface="Aptos" pitchFamily="34" charset="-120"/>
+              </a:rPr>
+              <a:t>• Guardrails include status indicators, retry rules, exception queues, and staff notification.</a:t>
             </a:r>
             <a:endParaRPr lang="en-US" sz="2100" dirty="0"/>
           </a:p>
@@ -6327,17 +6408,17 @@
         </p:nvSpPr>
         <p:spPr>
           <a:xfrm>
-            <a:off x="7799832" y="1828800"/>
-            <a:ext cx="3145536" cy="685800"/>
-          </a:xfrm>
-          <a:prstGeom prst="rect">
-            <a:avLst/>
-          </a:prstGeom>
-          <a:noFill/>
-          <a:ln/>
-        </p:spPr>
-        <p:txBody>
-          <a:bodyPr wrap="square" lIns="0" tIns="0" rIns="0" bIns="0" rtlCol="0" anchor="t">
+            <a:off x="7799832" y="1801368"/>
+            <a:ext cx="3145536" cy="758952"/>
+          </a:xfrm>
+          <a:prstGeom prst="rect">
+            <a:avLst/>
+          </a:prstGeom>
+          <a:noFill/>
+          <a:ln/>
+        </p:spPr>
+        <p:txBody>
+          <a:bodyPr wrap="square" lIns="254" tIns="254" rIns="254" bIns="254" rtlCol="0" anchor="t">
             <a:normAutofit/>
           </a:bodyPr>
           <a:lstStyle/>
@@ -6346,7 +6427,7 @@
               <a:buNone/>
             </a:pPr>
             <a:r>
-              <a:rPr lang="en-US" sz="1550" dirty="0">
+              <a:rPr lang="en-US" sz="1320" dirty="0">
                 <a:solidFill>
                   <a:srgbClr val="17364A"/>
                 </a:solidFill>
@@ -6356,7 +6437,7 @@
               </a:rPr>
               <a:t>Poor error handling.</a:t>
             </a:r>
-            <a:endParaRPr lang="en-US" sz="1550" dirty="0"/>
+            <a:endParaRPr lang="en-US" sz="1320" dirty="0"/>
           </a:p>
         </p:txBody>
       </p:sp>
@@ -6444,13 +6525,16 @@
           <a:ln/>
         </p:spPr>
         <p:txBody>
-          <a:bodyPr wrap="square" lIns="254" tIns="254" rIns="254" bIns="254" rtlCol="0" anchor="t">
+          <a:bodyPr wrap="square" lIns="508" tIns="508" rIns="508" bIns="508" rtlCol="0" anchor="t">
             <a:normAutofit/>
           </a:bodyPr>
           <a:lstStyle/>
           <a:p>
-            <a:r>
-              <a:rPr lang="en-US" sz="1380" dirty="0">
+            <a:pPr indent="0" marL="0">
+              <a:buNone/>
+            </a:pPr>
+            <a:r>
+              <a:rPr lang="en-US" sz="1220" dirty="0">
                 <a:solidFill>
                   <a:srgbClr val="17364A"/>
                 </a:solidFill>
@@ -6460,11 +6544,14 @@
               </a:rPr>
               <a:t>Poor error handling.</a:t>
             </a:r>
-            <a:endParaRPr lang="en-US" sz="1380" dirty="0"/>
-          </a:p>
-          <a:p>
-            <a:r>
-              <a:rPr lang="en-US" sz="1380" dirty="0">
+            <a:endParaRPr lang="en-US" sz="1220" dirty="0"/>
+          </a:p>
+          <a:p>
+            <a:pPr indent="0" marL="0">
+              <a:buNone/>
+            </a:pPr>
+            <a:r>
+              <a:rPr lang="en-US" sz="1220" dirty="0">
                 <a:solidFill>
                   <a:srgbClr val="17364A"/>
                 </a:solidFill>
@@ -6474,11 +6561,14 @@
               </a:rPr>
               <a:t>Failed API calls may produce incomplete workflows.</a:t>
             </a:r>
-            <a:endParaRPr lang="en-US" sz="1380" dirty="0"/>
-          </a:p>
-          <a:p>
-            <a:r>
-              <a:rPr lang="en-US" sz="1380" dirty="0">
+            <a:endParaRPr lang="en-US" sz="1220" dirty="0"/>
+          </a:p>
+          <a:p>
+            <a:pPr indent="0" marL="0">
+              <a:buNone/>
+            </a:pPr>
+            <a:r>
+              <a:rPr lang="en-US" sz="1220" dirty="0">
                 <a:solidFill>
                   <a:srgbClr val="17364A"/>
                 </a:solidFill>
@@ -6486,9 +6576,9 @@
                 <a:ea typeface="Aptos" pitchFamily="34" charset="-122"/>
                 <a:cs typeface="Aptos" pitchFamily="34" charset="-120"/>
               </a:rPr>
-              <a:t>Guardrails include status indicators, retry rules, exception queues, and staff notification.</a:t>
-            </a:r>
-            <a:endParaRPr lang="en-US" sz="1380" dirty="0"/>
+              <a:t>Guardrails include status indicators, retry rules, exception.</a:t>
+            </a:r>
+            <a:endParaRPr lang="en-US" sz="1220" dirty="0"/>
           </a:p>
         </p:txBody>
       </p:sp>
@@ -6566,17 +6656,17 @@
         </p:nvSpPr>
         <p:spPr>
           <a:xfrm>
-            <a:off x="7799832" y="5001768"/>
-            <a:ext cx="3145536" cy="502920"/>
-          </a:xfrm>
-          <a:prstGeom prst="rect">
-            <a:avLst/>
-          </a:prstGeom>
-          <a:noFill/>
-          <a:ln/>
-        </p:spPr>
-        <p:txBody>
-          <a:bodyPr wrap="square" lIns="0" tIns="0" rIns="0" bIns="0" rtlCol="0" anchor="t">
+            <a:off x="7799832" y="4974336"/>
+            <a:ext cx="3145536" cy="576072"/>
+          </a:xfrm>
+          <a:prstGeom prst="rect">
+            <a:avLst/>
+          </a:prstGeom>
+          <a:noFill/>
+          <a:ln/>
+        </p:spPr>
+        <p:txBody>
+          <a:bodyPr wrap="square" lIns="254" tIns="254" rIns="254" bIns="254" rtlCol="0" anchor="t">
             <a:normAutofit/>
           </a:bodyPr>
           <a:lstStyle/>
@@ -6585,7 +6675,7 @@
               <a:buNone/>
             </a:pPr>
             <a:r>
-              <a:rPr lang="en-US" sz="1550" dirty="0">
+              <a:rPr lang="en-US" sz="1320" dirty="0">
                 <a:solidFill>
                   <a:srgbClr val="17364A"/>
                 </a:solidFill>
@@ -6593,9 +6683,9 @@
                 <a:ea typeface="Aptos" pitchFamily="34" charset="-122"/>
                 <a:cs typeface="Aptos" pitchFamily="34" charset="-120"/>
               </a:rPr>
-              <a:t>Identify what could go wrong, who could be affected, what safeguards are needed, and what evidence should be reviewed before use expands.</a:t>
-            </a:r>
-            <a:endParaRPr lang="en-US" sz="1550" dirty="0"/>
+              <a:t>Identify what could go wrong, who could be affected, what safeguards are needed, and what evidence should be reviewed.</a:t>
+            </a:r>
+            <a:endParaRPr lang="en-US" sz="1320" dirty="0"/>
           </a:p>
         </p:txBody>
       </p:sp>
@@ -6896,49 +6986,58 @@
           <a:ln/>
         </p:spPr>
         <p:txBody>
-          <a:bodyPr wrap="square" lIns="635" tIns="635" rIns="635" bIns="635" rtlCol="0" anchor="t">
+          <a:bodyPr wrap="square" lIns="1016" tIns="1016" rIns="1016" bIns="1016" rtlCol="0" anchor="t">
             <a:normAutofit/>
           </a:bodyPr>
           <a:lstStyle/>
           <a:p>
+            <a:pPr indent="0" marL="0">
+              <a:buNone/>
+            </a:pPr>
             <a:r>
               <a:rPr lang="en-US" sz="2100" dirty="0">
                 <a:solidFill>
-                  <a:srgbClr val="17364A"/>
-                </a:solidFill>
-                <a:latin typeface="Aptos" pitchFamily="34" charset="0"/>
-                <a:ea typeface="Aptos" pitchFamily="34" charset="-122"/>
-                <a:cs typeface="Aptos" pitchFamily="34" charset="-120"/>
-              </a:rPr>
-              <a:t>Generative AI may use APIs to retrieve source material for summaries.</a:t>
+                  <a:srgbClr val="003A63"/>
+                </a:solidFill>
+                <a:latin typeface="Aptos" pitchFamily="34" charset="0"/>
+                <a:ea typeface="Aptos" pitchFamily="34" charset="-122"/>
+                <a:cs typeface="Aptos" pitchFamily="34" charset="-120"/>
+              </a:rPr>
+              <a:t>• Generative AI may use APIs to retrieve source material for summaries.</a:t>
             </a:r>
             <a:endParaRPr lang="en-US" sz="2100" dirty="0"/>
           </a:p>
           <a:p>
+            <a:pPr indent="0" marL="0">
+              <a:buNone/>
+            </a:pPr>
             <a:r>
               <a:rPr lang="en-US" sz="2100" dirty="0">
                 <a:solidFill>
-                  <a:srgbClr val="17364A"/>
-                </a:solidFill>
-                <a:latin typeface="Aptos" pitchFamily="34" charset="0"/>
-                <a:ea typeface="Aptos" pitchFamily="34" charset="-122"/>
-                <a:cs typeface="Aptos" pitchFamily="34" charset="-120"/>
-              </a:rPr>
-              <a:t>Predictive tools may call services that return risk scores or features.</a:t>
+                  <a:srgbClr val="003A63"/>
+                </a:solidFill>
+                <a:latin typeface="Aptos" pitchFamily="34" charset="0"/>
+                <a:ea typeface="Aptos" pitchFamily="34" charset="-122"/>
+                <a:cs typeface="Aptos" pitchFamily="34" charset="-120"/>
+              </a:rPr>
+              <a:t>• Predictive tools may call services that return risk scores or features.</a:t>
             </a:r>
             <a:endParaRPr lang="en-US" sz="2100" dirty="0"/>
           </a:p>
           <a:p>
+            <a:pPr indent="0" marL="0">
+              <a:buNone/>
+            </a:pPr>
             <a:r>
               <a:rPr lang="en-US" sz="2100" dirty="0">
                 <a:solidFill>
-                  <a:srgbClr val="17364A"/>
-                </a:solidFill>
-                <a:latin typeface="Aptos" pitchFamily="34" charset="0"/>
-                <a:ea typeface="Aptos" pitchFamily="34" charset="-122"/>
-                <a:cs typeface="Aptos" pitchFamily="34" charset="-120"/>
-              </a:rPr>
-              <a:t>RAG systems may use APIs to retrieve approved documents.</a:t>
+                  <a:srgbClr val="003A63"/>
+                </a:solidFill>
+                <a:latin typeface="Aptos" pitchFamily="34" charset="0"/>
+                <a:ea typeface="Aptos" pitchFamily="34" charset="-122"/>
+                <a:cs typeface="Aptos" pitchFamily="34" charset="-120"/>
+              </a:rPr>
+              <a:t>• RAG systems may use APIs to retrieve approved documents.</a:t>
             </a:r>
             <a:endParaRPr lang="en-US" sz="2100" dirty="0"/>
           </a:p>
@@ -7018,17 +7117,17 @@
         </p:nvSpPr>
         <p:spPr>
           <a:xfrm>
-            <a:off x="7799832" y="1828800"/>
-            <a:ext cx="3145536" cy="685800"/>
-          </a:xfrm>
-          <a:prstGeom prst="rect">
-            <a:avLst/>
-          </a:prstGeom>
-          <a:noFill/>
-          <a:ln/>
-        </p:spPr>
-        <p:txBody>
-          <a:bodyPr wrap="square" lIns="0" tIns="0" rIns="0" bIns="0" rtlCol="0" anchor="t">
+            <a:off x="7799832" y="1801368"/>
+            <a:ext cx="3145536" cy="758952"/>
+          </a:xfrm>
+          <a:prstGeom prst="rect">
+            <a:avLst/>
+          </a:prstGeom>
+          <a:noFill/>
+          <a:ln/>
+        </p:spPr>
+        <p:txBody>
+          <a:bodyPr wrap="square" lIns="254" tIns="254" rIns="254" bIns="254" rtlCol="0" anchor="t">
             <a:normAutofit/>
           </a:bodyPr>
           <a:lstStyle/>
@@ -7037,7 +7136,7 @@
               <a:buNone/>
             </a:pPr>
             <a:r>
-              <a:rPr lang="en-US" sz="1550" dirty="0">
+              <a:rPr lang="en-US" sz="1320" dirty="0">
                 <a:solidFill>
                   <a:srgbClr val="17364A"/>
                 </a:solidFill>
@@ -7047,7 +7146,7 @@
               </a:rPr>
               <a:t>Generative AI may use APIs to retrieve source material for summaries.</a:t>
             </a:r>
-            <a:endParaRPr lang="en-US" sz="1550" dirty="0"/>
+            <a:endParaRPr lang="en-US" sz="1320" dirty="0"/>
           </a:p>
         </p:txBody>
       </p:sp>
@@ -7135,13 +7234,16 @@
           <a:ln/>
         </p:spPr>
         <p:txBody>
-          <a:bodyPr wrap="square" lIns="254" tIns="254" rIns="254" bIns="254" rtlCol="0" anchor="t">
+          <a:bodyPr wrap="square" lIns="508" tIns="508" rIns="508" bIns="508" rtlCol="0" anchor="t">
             <a:normAutofit/>
           </a:bodyPr>
           <a:lstStyle/>
           <a:p>
-            <a:r>
-              <a:rPr lang="en-US" sz="1380" dirty="0">
+            <a:pPr indent="0" marL="0">
+              <a:buNone/>
+            </a:pPr>
+            <a:r>
+              <a:rPr lang="en-US" sz="1220" dirty="0">
                 <a:solidFill>
                   <a:srgbClr val="17364A"/>
                 </a:solidFill>
@@ -7149,13 +7251,16 @@
                 <a:ea typeface="Aptos" pitchFamily="34" charset="-122"/>
                 <a:cs typeface="Aptos" pitchFamily="34" charset="-120"/>
               </a:rPr>
-              <a:t>Generative AI may use APIs to retrieve source material for summaries.</a:t>
-            </a:r>
-            <a:endParaRPr lang="en-US" sz="1380" dirty="0"/>
-          </a:p>
-          <a:p>
-            <a:r>
-              <a:rPr lang="en-US" sz="1380" dirty="0">
+              <a:t>Generative AI may use APIs to retrieve source material for.</a:t>
+            </a:r>
+            <a:endParaRPr lang="en-US" sz="1220" dirty="0"/>
+          </a:p>
+          <a:p>
+            <a:pPr indent="0" marL="0">
+              <a:buNone/>
+            </a:pPr>
+            <a:r>
+              <a:rPr lang="en-US" sz="1220" dirty="0">
                 <a:solidFill>
                   <a:srgbClr val="17364A"/>
                 </a:solidFill>
@@ -7163,13 +7268,16 @@
                 <a:ea typeface="Aptos" pitchFamily="34" charset="-122"/>
                 <a:cs typeface="Aptos" pitchFamily="34" charset="-120"/>
               </a:rPr>
-              <a:t>Predictive tools may call services that return risk scores or features.</a:t>
-            </a:r>
-            <a:endParaRPr lang="en-US" sz="1380" dirty="0"/>
-          </a:p>
-          <a:p>
-            <a:r>
-              <a:rPr lang="en-US" sz="1380" dirty="0">
+              <a:t>Predictive tools may call services that return risk scores or.</a:t>
+            </a:r>
+            <a:endParaRPr lang="en-US" sz="1220" dirty="0"/>
+          </a:p>
+          <a:p>
+            <a:pPr indent="0" marL="0">
+              <a:buNone/>
+            </a:pPr>
+            <a:r>
+              <a:rPr lang="en-US" sz="1220" dirty="0">
                 <a:solidFill>
                   <a:srgbClr val="17364A"/>
                 </a:solidFill>
@@ -7179,7 +7287,7 @@
               </a:rPr>
               <a:t>RAG systems may use APIs to retrieve approved documents.</a:t>
             </a:r>
-            <a:endParaRPr lang="en-US" sz="1380" dirty="0"/>
+            <a:endParaRPr lang="en-US" sz="1220" dirty="0"/>
           </a:p>
         </p:txBody>
       </p:sp>
@@ -7257,17 +7365,17 @@
         </p:nvSpPr>
         <p:spPr>
           <a:xfrm>
-            <a:off x="7799832" y="5001768"/>
-            <a:ext cx="3145536" cy="502920"/>
-          </a:xfrm>
-          <a:prstGeom prst="rect">
-            <a:avLst/>
-          </a:prstGeom>
-          <a:noFill/>
-          <a:ln/>
-        </p:spPr>
-        <p:txBody>
-          <a:bodyPr wrap="square" lIns="0" tIns="0" rIns="0" bIns="0" rtlCol="0" anchor="t">
+            <a:off x="7799832" y="4974336"/>
+            <a:ext cx="3145536" cy="576072"/>
+          </a:xfrm>
+          <a:prstGeom prst="rect">
+            <a:avLst/>
+          </a:prstGeom>
+          <a:noFill/>
+          <a:ln/>
+        </p:spPr>
+        <p:txBody>
+          <a:bodyPr wrap="square" lIns="254" tIns="254" rIns="254" bIns="254" rtlCol="0" anchor="t">
             <a:normAutofit/>
           </a:bodyPr>
           <a:lstStyle/>
@@ -7276,7 +7384,7 @@
               <a:buNone/>
             </a:pPr>
             <a:r>
-              <a:rPr lang="en-US" sz="1550" dirty="0">
+              <a:rPr lang="en-US" sz="1320" dirty="0">
                 <a:solidFill>
                   <a:srgbClr val="17364A"/>
                 </a:solidFill>
@@ -7284,9 +7392,9 @@
                 <a:ea typeface="Aptos" pitchFamily="34" charset="-122"/>
                 <a:cs typeface="Aptos" pitchFamily="34" charset="-120"/>
               </a:rPr>
-              <a:t>Use the concept to clarify workflow changes, dependencies, staffing, procurement requirements, training needs, and implementation checkpoints.</a:t>
-            </a:r>
-            <a:endParaRPr lang="en-US" sz="1550" dirty="0"/>
+              <a:t>Use the concept to clarify workflow changes, dependencies, staffing, procurement requirements, training needs, and.</a:t>
+            </a:r>
+            <a:endParaRPr lang="en-US" sz="1320" dirty="0"/>
           </a:p>
         </p:txBody>
       </p:sp>
@@ -7587,49 +7695,58 @@
           <a:ln/>
         </p:spPr>
         <p:txBody>
-          <a:bodyPr wrap="square" lIns="635" tIns="635" rIns="635" bIns="635" rtlCol="0" anchor="t">
+          <a:bodyPr wrap="square" lIns="1016" tIns="1016" rIns="1016" bIns="1016" rtlCol="0" anchor="t">
             <a:normAutofit/>
           </a:bodyPr>
           <a:lstStyle/>
           <a:p>
+            <a:pPr indent="0" marL="0">
+              <a:buNone/>
+            </a:pPr>
             <a:r>
               <a:rPr lang="en-US" sz="2100" dirty="0">
                 <a:solidFill>
-                  <a:srgbClr val="17364A"/>
-                </a:solidFill>
-                <a:latin typeface="Aptos" pitchFamily="34" charset="0"/>
-                <a:ea typeface="Aptos" pitchFamily="34" charset="-122"/>
-                <a:cs typeface="Aptos" pitchFamily="34" charset="-120"/>
-              </a:rPr>
-              <a:t>Which workflows in your agency are triggered by new data or status changes?</a:t>
+                  <a:srgbClr val="003A63"/>
+                </a:solidFill>
+                <a:latin typeface="Aptos" pitchFamily="34" charset="0"/>
+                <a:ea typeface="Aptos" pitchFamily="34" charset="-122"/>
+                <a:cs typeface="Aptos" pitchFamily="34" charset="-120"/>
+              </a:rPr>
+              <a:t>• Which workflows in your agency are triggered by new data or status changes?</a:t>
             </a:r>
             <a:endParaRPr lang="en-US" sz="2100" dirty="0"/>
           </a:p>
           <a:p>
+            <a:pPr indent="0" marL="0">
+              <a:buNone/>
+            </a:pPr>
             <a:r>
               <a:rPr lang="en-US" sz="2100" dirty="0">
                 <a:solidFill>
-                  <a:srgbClr val="17364A"/>
-                </a:solidFill>
-                <a:latin typeface="Aptos" pitchFamily="34" charset="0"/>
-                <a:ea typeface="Aptos" pitchFamily="34" charset="-122"/>
-                <a:cs typeface="Aptos" pitchFamily="34" charset="-120"/>
-              </a:rPr>
-              <a:t>Which AI-supported actions should be read-only?</a:t>
+                  <a:srgbClr val="003A63"/>
+                </a:solidFill>
+                <a:latin typeface="Aptos" pitchFamily="34" charset="0"/>
+                <a:ea typeface="Aptos" pitchFamily="34" charset="-122"/>
+                <a:cs typeface="Aptos" pitchFamily="34" charset="-120"/>
+              </a:rPr>
+              <a:t>• Which AI-supported actions should be read-only?</a:t>
             </a:r>
             <a:endParaRPr lang="en-US" sz="2100" dirty="0"/>
           </a:p>
           <a:p>
+            <a:pPr indent="0" marL="0">
+              <a:buNone/>
+            </a:pPr>
             <a:r>
               <a:rPr lang="en-US" sz="2100" dirty="0">
                 <a:solidFill>
-                  <a:srgbClr val="17364A"/>
-                </a:solidFill>
-                <a:latin typeface="Aptos" pitchFamily="34" charset="0"/>
-                <a:ea typeface="Aptos" pitchFamily="34" charset="-122"/>
-                <a:cs typeface="Aptos" pitchFamily="34" charset="-120"/>
-              </a:rPr>
-              <a:t>Which actions would require human approval before write-back?</a:t>
+                  <a:srgbClr val="003A63"/>
+                </a:solidFill>
+                <a:latin typeface="Aptos" pitchFamily="34" charset="0"/>
+                <a:ea typeface="Aptos" pitchFamily="34" charset="-122"/>
+                <a:cs typeface="Aptos" pitchFamily="34" charset="-120"/>
+              </a:rPr>
+              <a:t>• Which actions would require human approval before write-back?</a:t>
             </a:r>
             <a:endParaRPr lang="en-US" sz="2100" dirty="0"/>
           </a:p>
@@ -7709,17 +7826,17 @@
         </p:nvSpPr>
         <p:spPr>
           <a:xfrm>
-            <a:off x="7799832" y="1828800"/>
-            <a:ext cx="3145536" cy="685800"/>
-          </a:xfrm>
-          <a:prstGeom prst="rect">
-            <a:avLst/>
-          </a:prstGeom>
-          <a:noFill/>
-          <a:ln/>
-        </p:spPr>
-        <p:txBody>
-          <a:bodyPr wrap="square" lIns="0" tIns="0" rIns="0" bIns="0" rtlCol="0" anchor="t">
+            <a:off x="7799832" y="1801368"/>
+            <a:ext cx="3145536" cy="758952"/>
+          </a:xfrm>
+          <a:prstGeom prst="rect">
+            <a:avLst/>
+          </a:prstGeom>
+          <a:noFill/>
+          <a:ln/>
+        </p:spPr>
+        <p:txBody>
+          <a:bodyPr wrap="square" lIns="254" tIns="254" rIns="254" bIns="254" rtlCol="0" anchor="t">
             <a:normAutofit/>
           </a:bodyPr>
           <a:lstStyle/>
@@ -7728,7 +7845,7 @@
               <a:buNone/>
             </a:pPr>
             <a:r>
-              <a:rPr lang="en-US" sz="1550" dirty="0">
+              <a:rPr lang="en-US" sz="1320" dirty="0">
                 <a:solidFill>
                   <a:srgbClr val="17364A"/>
                 </a:solidFill>
@@ -7738,7 +7855,7 @@
               </a:rPr>
               <a:t>Which workflows in your agency are triggered by new data or status changes?</a:t>
             </a:r>
-            <a:endParaRPr lang="en-US" sz="1550" dirty="0"/>
+            <a:endParaRPr lang="en-US" sz="1320" dirty="0"/>
           </a:p>
         </p:txBody>
       </p:sp>
@@ -7826,13 +7943,16 @@
           <a:ln/>
         </p:spPr>
         <p:txBody>
-          <a:bodyPr wrap="square" lIns="254" tIns="254" rIns="254" bIns="254" rtlCol="0" anchor="t">
+          <a:bodyPr wrap="square" lIns="508" tIns="508" rIns="508" bIns="508" rtlCol="0" anchor="t">
             <a:normAutofit/>
           </a:bodyPr>
           <a:lstStyle/>
           <a:p>
-            <a:r>
-              <a:rPr lang="en-US" sz="1380" dirty="0">
+            <a:pPr indent="0" marL="0">
+              <a:buNone/>
+            </a:pPr>
+            <a:r>
+              <a:rPr lang="en-US" sz="1220" dirty="0">
                 <a:solidFill>
                   <a:srgbClr val="17364A"/>
                 </a:solidFill>
@@ -7840,13 +7960,16 @@
                 <a:ea typeface="Aptos" pitchFamily="34" charset="-122"/>
                 <a:cs typeface="Aptos" pitchFamily="34" charset="-120"/>
               </a:rPr>
-              <a:t>Which workflows in your agency are triggered by new data or status changes?</a:t>
-            </a:r>
-            <a:endParaRPr lang="en-US" sz="1380" dirty="0"/>
-          </a:p>
-          <a:p>
-            <a:r>
-              <a:rPr lang="en-US" sz="1380" dirty="0">
+              <a:t>Which workflows in your agency are triggered by new data or status.</a:t>
+            </a:r>
+            <a:endParaRPr lang="en-US" sz="1220" dirty="0"/>
+          </a:p>
+          <a:p>
+            <a:pPr indent="0" marL="0">
+              <a:buNone/>
+            </a:pPr>
+            <a:r>
+              <a:rPr lang="en-US" sz="1220" dirty="0">
                 <a:solidFill>
                   <a:srgbClr val="17364A"/>
                 </a:solidFill>
@@ -7856,11 +7979,14 @@
               </a:rPr>
               <a:t>Which AI-supported actions should be read-only?</a:t>
             </a:r>
-            <a:endParaRPr lang="en-US" sz="1380" dirty="0"/>
-          </a:p>
-          <a:p>
-            <a:r>
-              <a:rPr lang="en-US" sz="1380" dirty="0">
+            <a:endParaRPr lang="en-US" sz="1220" dirty="0"/>
+          </a:p>
+          <a:p>
+            <a:pPr indent="0" marL="0">
+              <a:buNone/>
+            </a:pPr>
+            <a:r>
+              <a:rPr lang="en-US" sz="1220" dirty="0">
                 <a:solidFill>
                   <a:srgbClr val="17364A"/>
                 </a:solidFill>
@@ -7870,7 +7996,7 @@
               </a:rPr>
               <a:t>Which actions would require human approval before write-back?</a:t>
             </a:r>
-            <a:endParaRPr lang="en-US" sz="1380" dirty="0"/>
+            <a:endParaRPr lang="en-US" sz="1220" dirty="0"/>
           </a:p>
         </p:txBody>
       </p:sp>
@@ -7948,17 +8074,17 @@
         </p:nvSpPr>
         <p:spPr>
           <a:xfrm>
-            <a:off x="7799832" y="5001768"/>
-            <a:ext cx="3145536" cy="502920"/>
-          </a:xfrm>
-          <a:prstGeom prst="rect">
-            <a:avLst/>
-          </a:prstGeom>
-          <a:noFill/>
-          <a:ln/>
-        </p:spPr>
-        <p:txBody>
-          <a:bodyPr wrap="square" lIns="0" tIns="0" rIns="0" bIns="0" rtlCol="0" anchor="t">
+            <a:off x="7799832" y="4974336"/>
+            <a:ext cx="3145536" cy="576072"/>
+          </a:xfrm>
+          <a:prstGeom prst="rect">
+            <a:avLst/>
+          </a:prstGeom>
+          <a:noFill/>
+          <a:ln/>
+        </p:spPr>
+        <p:txBody>
+          <a:bodyPr wrap="square" lIns="254" tIns="254" rIns="254" bIns="254" rtlCol="0" anchor="t">
             <a:normAutofit/>
           </a:bodyPr>
           <a:lstStyle/>
@@ -7967,7 +8093,7 @@
               <a:buNone/>
             </a:pPr>
             <a:r>
-              <a:rPr lang="en-US" sz="1550" dirty="0">
+              <a:rPr lang="en-US" sz="1320" dirty="0">
                 <a:solidFill>
                   <a:srgbClr val="17364A"/>
                 </a:solidFill>
@@ -7975,9 +8101,9 @@
                 <a:ea typeface="Aptos" pitchFamily="34" charset="-122"/>
                 <a:cs typeface="Aptos" pitchFamily="34" charset="-120"/>
               </a:rPr>
-              <a:t>Use the concept to clarify workflow changes, dependencies, staffing, procurement requirements, training needs, and implementation checkpoints.</a:t>
-            </a:r>
-            <a:endParaRPr lang="en-US" sz="1550" dirty="0"/>
+              <a:t>Use the concept to clarify workflow changes, dependencies, staffing, procurement requirements, training needs, and.</a:t>
+            </a:r>
+            <a:endParaRPr lang="en-US" sz="1320" dirty="0"/>
           </a:p>
         </p:txBody>
       </p:sp>
@@ -8278,35 +8404,41 @@
           <a:ln/>
         </p:spPr>
         <p:txBody>
-          <a:bodyPr wrap="square" lIns="635" tIns="635" rIns="635" bIns="635" rtlCol="0" anchor="t">
+          <a:bodyPr wrap="square" lIns="1016" tIns="1016" rIns="1016" bIns="1016" rtlCol="0" anchor="t">
             <a:normAutofit/>
           </a:bodyPr>
           <a:lstStyle/>
           <a:p>
+            <a:pPr indent="0" marL="0">
+              <a:buNone/>
+            </a:pPr>
             <a:r>
               <a:rPr lang="en-US" sz="2100" dirty="0">
                 <a:solidFill>
-                  <a:srgbClr val="17364A"/>
-                </a:solidFill>
-                <a:latin typeface="Aptos" pitchFamily="34" charset="0"/>
-                <a:ea typeface="Aptos" pitchFamily="34" charset="-122"/>
-                <a:cs typeface="Aptos" pitchFamily="34" charset="-120"/>
-              </a:rPr>
-              <a:t>What logs are needed to reconstruct what happened?</a:t>
+                  <a:srgbClr val="003A63"/>
+                </a:solidFill>
+                <a:latin typeface="Aptos" pitchFamily="34" charset="0"/>
+                <a:ea typeface="Aptos" pitchFamily="34" charset="-122"/>
+                <a:cs typeface="Aptos" pitchFamily="34" charset="-120"/>
+              </a:rPr>
+              <a:t>• What logs are needed to reconstruct what happened?</a:t>
             </a:r>
             <a:endParaRPr lang="en-US" sz="2100" dirty="0"/>
           </a:p>
           <a:p>
+            <a:pPr indent="0" marL="0">
+              <a:buNone/>
+            </a:pPr>
             <a:r>
               <a:rPr lang="en-US" sz="2100" dirty="0">
                 <a:solidFill>
-                  <a:srgbClr val="17364A"/>
-                </a:solidFill>
-                <a:latin typeface="Aptos" pitchFamily="34" charset="0"/>
-                <a:ea typeface="Aptos" pitchFamily="34" charset="-122"/>
-                <a:cs typeface="Aptos" pitchFamily="34" charset="-120"/>
-              </a:rPr>
-              <a:t>What should happen if an API call fails or returns unexpected data?</a:t>
+                  <a:srgbClr val="003A63"/>
+                </a:solidFill>
+                <a:latin typeface="Aptos" pitchFamily="34" charset="0"/>
+                <a:ea typeface="Aptos" pitchFamily="34" charset="-122"/>
+                <a:cs typeface="Aptos" pitchFamily="34" charset="-120"/>
+              </a:rPr>
+              <a:t>• What should happen if an API call fails or returns unexpected data?</a:t>
             </a:r>
             <a:endParaRPr lang="en-US" sz="2100" dirty="0"/>
           </a:p>
@@ -8386,17 +8518,17 @@
         </p:nvSpPr>
         <p:spPr>
           <a:xfrm>
-            <a:off x="7799832" y="1828800"/>
-            <a:ext cx="3145536" cy="685800"/>
-          </a:xfrm>
-          <a:prstGeom prst="rect">
-            <a:avLst/>
-          </a:prstGeom>
-          <a:noFill/>
-          <a:ln/>
-        </p:spPr>
-        <p:txBody>
-          <a:bodyPr wrap="square" lIns="0" tIns="0" rIns="0" bIns="0" rtlCol="0" anchor="t">
+            <a:off x="7799832" y="1801368"/>
+            <a:ext cx="3145536" cy="758952"/>
+          </a:xfrm>
+          <a:prstGeom prst="rect">
+            <a:avLst/>
+          </a:prstGeom>
+          <a:noFill/>
+          <a:ln/>
+        </p:spPr>
+        <p:txBody>
+          <a:bodyPr wrap="square" lIns="254" tIns="254" rIns="254" bIns="254" rtlCol="0" anchor="t">
             <a:normAutofit/>
           </a:bodyPr>
           <a:lstStyle/>
@@ -8405,7 +8537,7 @@
               <a:buNone/>
             </a:pPr>
             <a:r>
-              <a:rPr lang="en-US" sz="1550" dirty="0">
+              <a:rPr lang="en-US" sz="1320" dirty="0">
                 <a:solidFill>
                   <a:srgbClr val="17364A"/>
                 </a:solidFill>
@@ -8415,7 +8547,7 @@
               </a:rPr>
               <a:t>What logs are needed to reconstruct what happened?</a:t>
             </a:r>
-            <a:endParaRPr lang="en-US" sz="1550" dirty="0"/>
+            <a:endParaRPr lang="en-US" sz="1320" dirty="0"/>
           </a:p>
         </p:txBody>
       </p:sp>
@@ -8503,13 +8635,16 @@
           <a:ln/>
         </p:spPr>
         <p:txBody>
-          <a:bodyPr wrap="square" lIns="254" tIns="254" rIns="254" bIns="254" rtlCol="0" anchor="t">
+          <a:bodyPr wrap="square" lIns="508" tIns="508" rIns="508" bIns="508" rtlCol="0" anchor="t">
             <a:normAutofit/>
           </a:bodyPr>
           <a:lstStyle/>
           <a:p>
-            <a:r>
-              <a:rPr lang="en-US" sz="1380" dirty="0">
+            <a:pPr indent="0" marL="0">
+              <a:buNone/>
+            </a:pPr>
+            <a:r>
+              <a:rPr lang="en-US" sz="1220" dirty="0">
                 <a:solidFill>
                   <a:srgbClr val="17364A"/>
                 </a:solidFill>
@@ -8519,11 +8654,14 @@
               </a:rPr>
               <a:t>What logs are needed to reconstruct what happened?</a:t>
             </a:r>
-            <a:endParaRPr lang="en-US" sz="1380" dirty="0"/>
-          </a:p>
-          <a:p>
-            <a:r>
-              <a:rPr lang="en-US" sz="1380" dirty="0">
+            <a:endParaRPr lang="en-US" sz="1220" dirty="0"/>
+          </a:p>
+          <a:p>
+            <a:pPr indent="0" marL="0">
+              <a:buNone/>
+            </a:pPr>
+            <a:r>
+              <a:rPr lang="en-US" sz="1220" dirty="0">
                 <a:solidFill>
                   <a:srgbClr val="17364A"/>
                 </a:solidFill>
@@ -8533,7 +8671,7 @@
               </a:rPr>
               <a:t>What should happen if an API call fails or returns unexpected data?</a:t>
             </a:r>
-            <a:endParaRPr lang="en-US" sz="1380" dirty="0"/>
+            <a:endParaRPr lang="en-US" sz="1220" dirty="0"/>
           </a:p>
         </p:txBody>
       </p:sp>
@@ -8611,17 +8749,17 @@
         </p:nvSpPr>
         <p:spPr>
           <a:xfrm>
-            <a:off x="7799832" y="5001768"/>
-            <a:ext cx="3145536" cy="502920"/>
-          </a:xfrm>
-          <a:prstGeom prst="rect">
-            <a:avLst/>
-          </a:prstGeom>
-          <a:noFill/>
-          <a:ln/>
-        </p:spPr>
-        <p:txBody>
-          <a:bodyPr wrap="square" lIns="0" tIns="0" rIns="0" bIns="0" rtlCol="0" anchor="t">
+            <a:off x="7799832" y="4974336"/>
+            <a:ext cx="3145536" cy="576072"/>
+          </a:xfrm>
+          <a:prstGeom prst="rect">
+            <a:avLst/>
+          </a:prstGeom>
+          <a:noFill/>
+          <a:ln/>
+        </p:spPr>
+        <p:txBody>
+          <a:bodyPr wrap="square" lIns="254" tIns="254" rIns="254" bIns="254" rtlCol="0" anchor="t">
             <a:normAutofit/>
           </a:bodyPr>
           <a:lstStyle/>
@@ -8630,7 +8768,7 @@
               <a:buNone/>
             </a:pPr>
             <a:r>
-              <a:rPr lang="en-US" sz="1550" dirty="0">
+              <a:rPr lang="en-US" sz="1320" dirty="0">
                 <a:solidFill>
                   <a:srgbClr val="17364A"/>
                 </a:solidFill>
@@ -8638,9 +8776,9 @@
                 <a:ea typeface="Aptos" pitchFamily="34" charset="-122"/>
                 <a:cs typeface="Aptos" pitchFamily="34" charset="-120"/>
               </a:rPr>
-              <a:t>Use the concept to clarify workflow changes, dependencies, staffing, procurement requirements, training needs, and implementation checkpoints.</a:t>
-            </a:r>
-            <a:endParaRPr lang="en-US" sz="1550" dirty="0"/>
+              <a:t>Use the concept to clarify workflow changes, dependencies, staffing, procurement requirements, training needs, and.</a:t>
+            </a:r>
+            <a:endParaRPr lang="en-US" sz="1320" dirty="0"/>
           </a:p>
         </p:txBody>
       </p:sp>
@@ -8941,35 +9079,41 @@
           <a:ln/>
         </p:spPr>
         <p:txBody>
-          <a:bodyPr wrap="square" lIns="635" tIns="635" rIns="635" bIns="635" rtlCol="0" anchor="t">
+          <a:bodyPr wrap="square" lIns="1016" tIns="1016" rIns="1016" bIns="1016" rtlCol="0" anchor="t">
             <a:normAutofit/>
           </a:bodyPr>
           <a:lstStyle/>
           <a:p>
+            <a:pPr indent="0" marL="0">
+              <a:buNone/>
+            </a:pPr>
             <a:r>
               <a:rPr lang="en-US" sz="2100" dirty="0">
                 <a:solidFill>
-                  <a:srgbClr val="17364A"/>
-                </a:solidFill>
-                <a:latin typeface="Aptos" pitchFamily="34" charset="0"/>
-                <a:ea typeface="Aptos" pitchFamily="34" charset="-122"/>
-                <a:cs typeface="Aptos" pitchFamily="34" charset="-120"/>
-              </a:rPr>
-              <a:t>Create an API and event workflow review worksheet for one proposed AI integration.</a:t>
+                  <a:srgbClr val="003A63"/>
+                </a:solidFill>
+                <a:latin typeface="Aptos" pitchFamily="34" charset="0"/>
+                <a:ea typeface="Aptos" pitchFamily="34" charset="-122"/>
+                <a:cs typeface="Aptos" pitchFamily="34" charset="-120"/>
+              </a:rPr>
+              <a:t>• Create an API and event workflow review worksheet for one proposed AI integration.</a:t>
             </a:r>
             <a:endParaRPr lang="en-US" sz="2100" dirty="0"/>
           </a:p>
           <a:p>
+            <a:pPr indent="0" marL="0">
+              <a:buNone/>
+            </a:pPr>
             <a:r>
               <a:rPr lang="en-US" sz="2100" dirty="0">
                 <a:solidFill>
-                  <a:srgbClr val="17364A"/>
-                </a:solidFill>
-                <a:latin typeface="Aptos" pitchFamily="34" charset="0"/>
-                <a:ea typeface="Aptos" pitchFamily="34" charset="-122"/>
-                <a:cs typeface="Aptos" pitchFamily="34" charset="-120"/>
-              </a:rPr>
-              <a:t>Include the triggering event, systems involved, data exchanged, read/write permissions, authentication.</a:t>
+                  <a:srgbClr val="003A63"/>
+                </a:solidFill>
+                <a:latin typeface="Aptos" pitchFamily="34" charset="0"/>
+                <a:ea typeface="Aptos" pitchFamily="34" charset="-122"/>
+                <a:cs typeface="Aptos" pitchFamily="34" charset="-120"/>
+              </a:rPr>
+              <a:t>• Include the triggering event, systems involved, data exchanged, read/write permissions,.</a:t>
             </a:r>
             <a:endParaRPr lang="en-US" sz="2100" dirty="0"/>
           </a:p>
@@ -9049,17 +9193,17 @@
         </p:nvSpPr>
         <p:spPr>
           <a:xfrm>
-            <a:off x="7799832" y="1828800"/>
-            <a:ext cx="3145536" cy="685800"/>
-          </a:xfrm>
-          <a:prstGeom prst="rect">
-            <a:avLst/>
-          </a:prstGeom>
-          <a:noFill/>
-          <a:ln/>
-        </p:spPr>
-        <p:txBody>
-          <a:bodyPr wrap="square" lIns="0" tIns="0" rIns="0" bIns="0" rtlCol="0" anchor="t">
+            <a:off x="7799832" y="1801368"/>
+            <a:ext cx="3145536" cy="758952"/>
+          </a:xfrm>
+          <a:prstGeom prst="rect">
+            <a:avLst/>
+          </a:prstGeom>
+          <a:noFill/>
+          <a:ln/>
+        </p:spPr>
+        <p:txBody>
+          <a:bodyPr wrap="square" lIns="254" tIns="254" rIns="254" bIns="254" rtlCol="0" anchor="t">
             <a:normAutofit/>
           </a:bodyPr>
           <a:lstStyle/>
@@ -9068,7 +9212,7 @@
               <a:buNone/>
             </a:pPr>
             <a:r>
-              <a:rPr lang="en-US" sz="1550" dirty="0">
+              <a:rPr lang="en-US" sz="1320" dirty="0">
                 <a:solidFill>
                   <a:srgbClr val="17364A"/>
                 </a:solidFill>
@@ -9078,7 +9222,7 @@
               </a:rPr>
               <a:t>Create an API and event workflow review worksheet for one proposed AI integration.</a:t>
             </a:r>
-            <a:endParaRPr lang="en-US" sz="1550" dirty="0"/>
+            <a:endParaRPr lang="en-US" sz="1320" dirty="0"/>
           </a:p>
         </p:txBody>
       </p:sp>
@@ -9166,13 +9310,16 @@
           <a:ln/>
         </p:spPr>
         <p:txBody>
-          <a:bodyPr wrap="square" lIns="254" tIns="254" rIns="254" bIns="254" rtlCol="0" anchor="t">
+          <a:bodyPr wrap="square" lIns="508" tIns="508" rIns="508" bIns="508" rtlCol="0" anchor="t">
             <a:normAutofit/>
           </a:bodyPr>
           <a:lstStyle/>
           <a:p>
-            <a:r>
-              <a:rPr lang="en-US" sz="1380" dirty="0">
+            <a:pPr indent="0" marL="0">
+              <a:buNone/>
+            </a:pPr>
+            <a:r>
+              <a:rPr lang="en-US" sz="1220" dirty="0">
                 <a:solidFill>
                   <a:srgbClr val="17364A"/>
                 </a:solidFill>
@@ -9180,13 +9327,16 @@
                 <a:ea typeface="Aptos" pitchFamily="34" charset="-122"/>
                 <a:cs typeface="Aptos" pitchFamily="34" charset="-120"/>
               </a:rPr>
-              <a:t>Create an API and event workflow review worksheet for one proposed AI integration.</a:t>
-            </a:r>
-            <a:endParaRPr lang="en-US" sz="1380" dirty="0"/>
-          </a:p>
-          <a:p>
-            <a:r>
-              <a:rPr lang="en-US" sz="1380" dirty="0">
+              <a:t>Create an API and event workflow review worksheet for one proposed.</a:t>
+            </a:r>
+            <a:endParaRPr lang="en-US" sz="1220" dirty="0"/>
+          </a:p>
+          <a:p>
+            <a:pPr indent="0" marL="0">
+              <a:buNone/>
+            </a:pPr>
+            <a:r>
+              <a:rPr lang="en-US" sz="1220" dirty="0">
                 <a:solidFill>
                   <a:srgbClr val="17364A"/>
                 </a:solidFill>
@@ -9194,9 +9344,9 @@
                 <a:ea typeface="Aptos" pitchFamily="34" charset="-122"/>
                 <a:cs typeface="Aptos" pitchFamily="34" charset="-120"/>
               </a:rPr>
-              <a:t>Include the triggering event, systems involved, data exchanged, read/write permissions,.</a:t>
-            </a:r>
-            <a:endParaRPr lang="en-US" sz="1380" dirty="0"/>
+              <a:t>Include the triggering event, systems involved, data exchanged,.</a:t>
+            </a:r>
+            <a:endParaRPr lang="en-US" sz="1220" dirty="0"/>
           </a:p>
         </p:txBody>
       </p:sp>
@@ -9274,17 +9424,17 @@
         </p:nvSpPr>
         <p:spPr>
           <a:xfrm>
-            <a:off x="7799832" y="5001768"/>
-            <a:ext cx="3145536" cy="502920"/>
-          </a:xfrm>
-          <a:prstGeom prst="rect">
-            <a:avLst/>
-          </a:prstGeom>
-          <a:noFill/>
-          <a:ln/>
-        </p:spPr>
-        <p:txBody>
-          <a:bodyPr wrap="square" lIns="0" tIns="0" rIns="0" bIns="0" rtlCol="0" anchor="t">
+            <a:off x="7799832" y="4974336"/>
+            <a:ext cx="3145536" cy="576072"/>
+          </a:xfrm>
+          <a:prstGeom prst="rect">
+            <a:avLst/>
+          </a:prstGeom>
+          <a:noFill/>
+          <a:ln/>
+        </p:spPr>
+        <p:txBody>
+          <a:bodyPr wrap="square" lIns="254" tIns="254" rIns="254" bIns="254" rtlCol="0" anchor="t">
             <a:normAutofit/>
           </a:bodyPr>
           <a:lstStyle/>
@@ -9293,7 +9443,7 @@
               <a:buNone/>
             </a:pPr>
             <a:r>
-              <a:rPr lang="en-US" sz="1550" dirty="0">
+              <a:rPr lang="en-US" sz="1320" dirty="0">
                 <a:solidFill>
                   <a:srgbClr val="17364A"/>
                 </a:solidFill>
@@ -9301,9 +9451,9 @@
                 <a:ea typeface="Aptos" pitchFamily="34" charset="-122"/>
                 <a:cs typeface="Aptos" pitchFamily="34" charset="-120"/>
               </a:rPr>
-              <a:t>Use the assignment to test whether you can explain the concept, apply it to a realistic public health situation, and identify what would need review before the work moves forward.</a:t>
-            </a:r>
-            <a:endParaRPr lang="en-US" sz="1550" dirty="0"/>
+              <a:t>Use the assignment to test whether you can explain the concept, apply it to a realistic public health situation, and.</a:t>
+            </a:r>
+            <a:endParaRPr lang="en-US" sz="1320" dirty="0"/>
           </a:p>
         </p:txBody>
       </p:sp>
@@ -9604,49 +9754,58 @@
           <a:ln/>
         </p:spPr>
         <p:txBody>
-          <a:bodyPr wrap="square" lIns="635" tIns="635" rIns="635" bIns="635" rtlCol="0" anchor="t">
+          <a:bodyPr wrap="square" lIns="1016" tIns="1016" rIns="1016" bIns="1016" rtlCol="0" anchor="t">
             <a:normAutofit/>
           </a:bodyPr>
           <a:lstStyle/>
           <a:p>
+            <a:pPr indent="0" marL="0">
+              <a:buNone/>
+            </a:pPr>
             <a:r>
               <a:rPr lang="en-US" sz="2100" dirty="0">
                 <a:solidFill>
-                  <a:srgbClr val="17364A"/>
-                </a:solidFill>
-                <a:latin typeface="Aptos" pitchFamily="34" charset="0"/>
-                <a:ea typeface="Aptos" pitchFamily="34" charset="-122"/>
-                <a:cs typeface="Aptos" pitchFamily="34" charset="-120"/>
-              </a:rPr>
-              <a:t>API and event workflow worksheet</a:t>
+                  <a:srgbClr val="003A63"/>
+                </a:solidFill>
+                <a:latin typeface="Aptos" pitchFamily="34" charset="0"/>
+                <a:ea typeface="Aptos" pitchFamily="34" charset="-122"/>
+                <a:cs typeface="Aptos" pitchFamily="34" charset="-120"/>
+              </a:rPr>
+              <a:t>• API and event workflow worksheet</a:t>
             </a:r>
             <a:endParaRPr lang="en-US" sz="2100" dirty="0"/>
           </a:p>
           <a:p>
+            <a:pPr indent="0" marL="0">
+              <a:buNone/>
+            </a:pPr>
             <a:r>
               <a:rPr lang="en-US" sz="2100" dirty="0">
                 <a:solidFill>
-                  <a:srgbClr val="17364A"/>
-                </a:solidFill>
-                <a:latin typeface="Aptos" pitchFamily="34" charset="0"/>
-                <a:ea typeface="Aptos" pitchFamily="34" charset="-122"/>
-                <a:cs typeface="Aptos" pitchFamily="34" charset="-120"/>
-              </a:rPr>
-              <a:t>Integration risk questions</a:t>
+                  <a:srgbClr val="003A63"/>
+                </a:solidFill>
+                <a:latin typeface="Aptos" pitchFamily="34" charset="0"/>
+                <a:ea typeface="Aptos" pitchFamily="34" charset="-122"/>
+                <a:cs typeface="Aptos" pitchFamily="34" charset="-120"/>
+              </a:rPr>
+              <a:t>• Integration risk questions</a:t>
             </a:r>
             <a:endParaRPr lang="en-US" sz="2100" dirty="0"/>
           </a:p>
           <a:p>
+            <a:pPr indent="0" marL="0">
+              <a:buNone/>
+            </a:pPr>
             <a:r>
               <a:rPr lang="en-US" sz="2100" dirty="0">
                 <a:solidFill>
-                  <a:srgbClr val="17364A"/>
-                </a:solidFill>
-                <a:latin typeface="Aptos" pitchFamily="34" charset="0"/>
-                <a:ea typeface="Aptos" pitchFamily="34" charset="-122"/>
-                <a:cs typeface="Aptos" pitchFamily="34" charset="-120"/>
-              </a:rPr>
-              <a:t>Access control recommendations</a:t>
+                  <a:srgbClr val="003A63"/>
+                </a:solidFill>
+                <a:latin typeface="Aptos" pitchFamily="34" charset="0"/>
+                <a:ea typeface="Aptos" pitchFamily="34" charset="-122"/>
+                <a:cs typeface="Aptos" pitchFamily="34" charset="-120"/>
+              </a:rPr>
+              <a:t>• Access control recommendations</a:t>
             </a:r>
             <a:endParaRPr lang="en-US" sz="2100" dirty="0"/>
           </a:p>
@@ -9726,17 +9885,17 @@
         </p:nvSpPr>
         <p:spPr>
           <a:xfrm>
-            <a:off x="7799832" y="1828800"/>
-            <a:ext cx="3145536" cy="685800"/>
-          </a:xfrm>
-          <a:prstGeom prst="rect">
-            <a:avLst/>
-          </a:prstGeom>
-          <a:noFill/>
-          <a:ln/>
-        </p:spPr>
-        <p:txBody>
-          <a:bodyPr wrap="square" lIns="0" tIns="0" rIns="0" bIns="0" rtlCol="0" anchor="t">
+            <a:off x="7799832" y="1801368"/>
+            <a:ext cx="3145536" cy="758952"/>
+          </a:xfrm>
+          <a:prstGeom prst="rect">
+            <a:avLst/>
+          </a:prstGeom>
+          <a:noFill/>
+          <a:ln/>
+        </p:spPr>
+        <p:txBody>
+          <a:bodyPr wrap="square" lIns="254" tIns="254" rIns="254" bIns="254" rtlCol="0" anchor="t">
             <a:normAutofit/>
           </a:bodyPr>
           <a:lstStyle/>
@@ -9745,7 +9904,7 @@
               <a:buNone/>
             </a:pPr>
             <a:r>
-              <a:rPr lang="en-US" sz="1550" dirty="0">
+              <a:rPr lang="en-US" sz="1320" dirty="0">
                 <a:solidFill>
                   <a:srgbClr val="17364A"/>
                 </a:solidFill>
@@ -9755,7 +9914,7 @@
               </a:rPr>
               <a:t>API and event workflow worksheet</a:t>
             </a:r>
-            <a:endParaRPr lang="en-US" sz="1550" dirty="0"/>
+            <a:endParaRPr lang="en-US" sz="1320" dirty="0"/>
           </a:p>
         </p:txBody>
       </p:sp>
@@ -9843,13 +10002,16 @@
           <a:ln/>
         </p:spPr>
         <p:txBody>
-          <a:bodyPr wrap="square" lIns="254" tIns="254" rIns="254" bIns="254" rtlCol="0" anchor="t">
+          <a:bodyPr wrap="square" lIns="508" tIns="508" rIns="508" bIns="508" rtlCol="0" anchor="t">
             <a:normAutofit/>
           </a:bodyPr>
           <a:lstStyle/>
           <a:p>
-            <a:r>
-              <a:rPr lang="en-US" sz="1380" dirty="0">
+            <a:pPr indent="0" marL="0">
+              <a:buNone/>
+            </a:pPr>
+            <a:r>
+              <a:rPr lang="en-US" sz="1220" dirty="0">
                 <a:solidFill>
                   <a:srgbClr val="17364A"/>
                 </a:solidFill>
@@ -9859,11 +10021,14 @@
               </a:rPr>
               <a:t>API and event workflow worksheet</a:t>
             </a:r>
-            <a:endParaRPr lang="en-US" sz="1380" dirty="0"/>
-          </a:p>
-          <a:p>
-            <a:r>
-              <a:rPr lang="en-US" sz="1380" dirty="0">
+            <a:endParaRPr lang="en-US" sz="1220" dirty="0"/>
+          </a:p>
+          <a:p>
+            <a:pPr indent="0" marL="0">
+              <a:buNone/>
+            </a:pPr>
+            <a:r>
+              <a:rPr lang="en-US" sz="1220" dirty="0">
                 <a:solidFill>
                   <a:srgbClr val="17364A"/>
                 </a:solidFill>
@@ -9873,11 +10038,14 @@
               </a:rPr>
               <a:t>Integration risk questions</a:t>
             </a:r>
-            <a:endParaRPr lang="en-US" sz="1380" dirty="0"/>
-          </a:p>
-          <a:p>
-            <a:r>
-              <a:rPr lang="en-US" sz="1380" dirty="0">
+            <a:endParaRPr lang="en-US" sz="1220" dirty="0"/>
+          </a:p>
+          <a:p>
+            <a:pPr indent="0" marL="0">
+              <a:buNone/>
+            </a:pPr>
+            <a:r>
+              <a:rPr lang="en-US" sz="1220" dirty="0">
                 <a:solidFill>
                   <a:srgbClr val="17364A"/>
                 </a:solidFill>
@@ -9887,7 +10055,7 @@
               </a:rPr>
               <a:t>Access control recommendations</a:t>
             </a:r>
-            <a:endParaRPr lang="en-US" sz="1380" dirty="0"/>
+            <a:endParaRPr lang="en-US" sz="1220" dirty="0"/>
           </a:p>
         </p:txBody>
       </p:sp>
@@ -9965,17 +10133,17 @@
         </p:nvSpPr>
         <p:spPr>
           <a:xfrm>
-            <a:off x="7799832" y="5001768"/>
-            <a:ext cx="3145536" cy="502920"/>
-          </a:xfrm>
-          <a:prstGeom prst="rect">
-            <a:avLst/>
-          </a:prstGeom>
-          <a:noFill/>
-          <a:ln/>
-        </p:spPr>
-        <p:txBody>
-          <a:bodyPr wrap="square" lIns="0" tIns="0" rIns="0" bIns="0" rtlCol="0" anchor="t">
+            <a:off x="7799832" y="4974336"/>
+            <a:ext cx="3145536" cy="576072"/>
+          </a:xfrm>
+          <a:prstGeom prst="rect">
+            <a:avLst/>
+          </a:prstGeom>
+          <a:noFill/>
+          <a:ln/>
+        </p:spPr>
+        <p:txBody>
+          <a:bodyPr wrap="square" lIns="254" tIns="254" rIns="254" bIns="254" rtlCol="0" anchor="t">
             <a:normAutofit/>
           </a:bodyPr>
           <a:lstStyle/>
@@ -9984,7 +10152,7 @@
               <a:buNone/>
             </a:pPr>
             <a:r>
-              <a:rPr lang="en-US" sz="1550" dirty="0">
+              <a:rPr lang="en-US" sz="1320" dirty="0">
                 <a:solidFill>
                   <a:srgbClr val="17364A"/>
                 </a:solidFill>
@@ -9992,9 +10160,9 @@
                 <a:ea typeface="Aptos" pitchFamily="34" charset="-122"/>
                 <a:cs typeface="Aptos" pitchFamily="34" charset="-120"/>
               </a:rPr>
-              <a:t>Use the concept to clarify workflow changes, dependencies, staffing, procurement requirements, training needs, and implementation checkpoints.</a:t>
-            </a:r>
-            <a:endParaRPr lang="en-US" sz="1550" dirty="0"/>
+              <a:t>Use the concept to clarify workflow changes, dependencies, staffing, procurement requirements, training needs, and.</a:t>
+            </a:r>
+            <a:endParaRPr lang="en-US" sz="1320" dirty="0"/>
           </a:p>
         </p:txBody>
       </p:sp>
@@ -10295,49 +10463,58 @@
           <a:ln/>
         </p:spPr>
         <p:txBody>
-          <a:bodyPr wrap="square" lIns="635" tIns="635" rIns="635" bIns="635" rtlCol="0" anchor="t">
+          <a:bodyPr wrap="square" lIns="1016" tIns="1016" rIns="1016" bIns="1016" rtlCol="0" anchor="t">
             <a:normAutofit/>
           </a:bodyPr>
           <a:lstStyle/>
           <a:p>
+            <a:pPr indent="0" marL="0">
+              <a:buNone/>
+            </a:pPr>
             <a:r>
               <a:rPr lang="en-US" sz="2100" dirty="0">
                 <a:solidFill>
-                  <a:srgbClr val="17364A"/>
-                </a:solidFill>
-                <a:latin typeface="Aptos" pitchFamily="34" charset="0"/>
-                <a:ea typeface="Aptos" pitchFamily="34" charset="-122"/>
-                <a:cs typeface="Aptos" pitchFamily="34" charset="-120"/>
-              </a:rPr>
-              <a:t>APIs, webhooks, and event-driven workflows are the mechanisms that allow systems to interact.</a:t>
+                  <a:srgbClr val="003A63"/>
+                </a:solidFill>
+                <a:latin typeface="Aptos" pitchFamily="34" charset="0"/>
+                <a:ea typeface="Aptos" pitchFamily="34" charset="-122"/>
+                <a:cs typeface="Aptos" pitchFamily="34" charset="-120"/>
+              </a:rPr>
+              <a:t>• APIs, webhooks, and event-driven workflows are the mechanisms that allow systems to interact.</a:t>
             </a:r>
             <a:endParaRPr lang="en-US" sz="2100" dirty="0"/>
           </a:p>
           <a:p>
+            <a:pPr indent="0" marL="0">
+              <a:buNone/>
+            </a:pPr>
             <a:r>
               <a:rPr lang="en-US" sz="2100" dirty="0">
                 <a:solidFill>
-                  <a:srgbClr val="17364A"/>
-                </a:solidFill>
-                <a:latin typeface="Aptos" pitchFamily="34" charset="0"/>
-                <a:ea typeface="Aptos" pitchFamily="34" charset="-122"/>
-                <a:cs typeface="Aptos" pitchFamily="34" charset="-120"/>
-              </a:rPr>
-              <a:t>They are especially important for AI because many AI tools need to retrieve data, send notifications, create.</a:t>
+                  <a:srgbClr val="003A63"/>
+                </a:solidFill>
+                <a:latin typeface="Aptos" pitchFamily="34" charset="0"/>
+                <a:ea typeface="Aptos" pitchFamily="34" charset="-122"/>
+                <a:cs typeface="Aptos" pitchFamily="34" charset="-120"/>
+              </a:rPr>
+              <a:t>• They are especially important for AI because many AI tools need to retrieve data, send.</a:t>
             </a:r>
             <a:endParaRPr lang="en-US" sz="2100" dirty="0"/>
           </a:p>
           <a:p>
+            <a:pPr indent="0" marL="0">
+              <a:buNone/>
+            </a:pPr>
             <a:r>
               <a:rPr lang="en-US" sz="2100" dirty="0">
                 <a:solidFill>
-                  <a:srgbClr val="17364A"/>
-                </a:solidFill>
-                <a:latin typeface="Aptos" pitchFamily="34" charset="0"/>
-                <a:ea typeface="Aptos" pitchFamily="34" charset="-122"/>
-                <a:cs typeface="Aptos" pitchFamily="34" charset="-120"/>
-              </a:rPr>
-              <a:t>This module teaches non-developer public health staff enough technical understanding to evaluate integrations,.</a:t>
+                  <a:srgbClr val="003A63"/>
+                </a:solidFill>
+                <a:latin typeface="Aptos" pitchFamily="34" charset="0"/>
+                <a:ea typeface="Aptos" pitchFamily="34" charset="-122"/>
+                <a:cs typeface="Aptos" pitchFamily="34" charset="-120"/>
+              </a:rPr>
+              <a:t>• This module teaches non-developer public health staff enough technical understanding to.</a:t>
             </a:r>
             <a:endParaRPr lang="en-US" sz="2100" dirty="0"/>
           </a:p>
@@ -10417,17 +10594,17 @@
         </p:nvSpPr>
         <p:spPr>
           <a:xfrm>
-            <a:off x="8074152" y="1920240"/>
-            <a:ext cx="2825496" cy="1280160"/>
-          </a:xfrm>
-          <a:prstGeom prst="rect">
-            <a:avLst/>
-          </a:prstGeom>
-          <a:noFill/>
-          <a:ln/>
-        </p:spPr>
-        <p:txBody>
-          <a:bodyPr wrap="square" lIns="0" tIns="0" rIns="0" bIns="0" rtlCol="0" anchor="t">
+            <a:off x="8074152" y="1892808"/>
+            <a:ext cx="2825496" cy="1353312"/>
+          </a:xfrm>
+          <a:prstGeom prst="rect">
+            <a:avLst/>
+          </a:prstGeom>
+          <a:noFill/>
+          <a:ln/>
+        </p:spPr>
+        <p:txBody>
+          <a:bodyPr wrap="square" lIns="254" tIns="254" rIns="254" bIns="254" rtlCol="0" anchor="t">
             <a:normAutofit/>
           </a:bodyPr>
           <a:lstStyle/>
@@ -10436,7 +10613,7 @@
               <a:buNone/>
             </a:pPr>
             <a:r>
-              <a:rPr lang="en-US" sz="1550" dirty="0">
+              <a:rPr lang="en-US" sz="1320" dirty="0">
                 <a:solidFill>
                   <a:srgbClr val="17364A"/>
                 </a:solidFill>
@@ -10444,43 +10621,9 @@
                 <a:ea typeface="Aptos" pitchFamily="34" charset="-122"/>
                 <a:cs typeface="Aptos" pitchFamily="34" charset="-120"/>
               </a:rPr>
-              <a:t>Level: applied/foundational</a:t>
-            </a:r>
-            <a:endParaRPr lang="en-US" sz="1550" dirty="0"/>
-          </a:p>
-          <a:p>
-            <a:pPr indent="0" marL="0">
-              <a:buNone/>
-            </a:pPr>
-            <a:r>
-              <a:rPr lang="en-US" sz="1550" dirty="0">
-                <a:solidFill>
-                  <a:srgbClr val="17364A"/>
-                </a:solidFill>
-                <a:latin typeface="Aptos" pitchFamily="34" charset="0"/>
-                <a:ea typeface="Aptos" pitchFamily="34" charset="-122"/>
-                <a:cs typeface="Aptos" pitchFamily="34" charset="-120"/>
-              </a:rPr>
-              <a:t>Primary track: Technical Architecture Track</a:t>
-            </a:r>
-            <a:endParaRPr lang="en-US" sz="1550" dirty="0"/>
-          </a:p>
-          <a:p>
-            <a:pPr indent="0" marL="0">
-              <a:buNone/>
-            </a:pPr>
-            <a:r>
-              <a:rPr lang="en-US" sz="1550" dirty="0">
-                <a:solidFill>
-                  <a:srgbClr val="17364A"/>
-                </a:solidFill>
-                <a:latin typeface="Aptos" pitchFamily="34" charset="0"/>
-                <a:ea typeface="Aptos" pitchFamily="34" charset="-122"/>
-                <a:cs typeface="Aptos" pitchFamily="34" charset="-120"/>
-              </a:rPr>
-              <a:t>Appears in tracks: technical-architecture</a:t>
-            </a:r>
-            <a:endParaRPr lang="en-US" sz="1550" dirty="0"/>
+              <a:t>Level: applied/foundational Primary track: Technical Architecture Track Appears in tracks: technical-architecture</a:t>
+            </a:r>
+            <a:endParaRPr lang="en-US" sz="1320" dirty="0"/>
           </a:p>
         </p:txBody>
       </p:sp>
@@ -10568,13 +10711,16 @@
           <a:ln/>
         </p:spPr>
         <p:txBody>
-          <a:bodyPr wrap="square" lIns="254" tIns="254" rIns="254" bIns="254" rtlCol="0" anchor="t">
+          <a:bodyPr wrap="square" lIns="508" tIns="508" rIns="508" bIns="508" rtlCol="0" anchor="t">
             <a:normAutofit/>
           </a:bodyPr>
           <a:lstStyle/>
           <a:p>
-            <a:r>
-              <a:rPr lang="en-US" sz="1380" dirty="0">
+            <a:pPr indent="0" marL="0">
+              <a:buNone/>
+            </a:pPr>
+            <a:r>
+              <a:rPr lang="en-US" sz="1220" dirty="0">
                 <a:solidFill>
                   <a:srgbClr val="17364A"/>
                 </a:solidFill>
@@ -10584,11 +10730,14 @@
               </a:rPr>
               <a:t>Read the module for shared vocabulary and context.</a:t>
             </a:r>
-            <a:endParaRPr lang="en-US" sz="1380" dirty="0"/>
-          </a:p>
-          <a:p>
-            <a:r>
-              <a:rPr lang="en-US" sz="1380" dirty="0">
+            <a:endParaRPr lang="en-US" sz="1220" dirty="0"/>
+          </a:p>
+          <a:p>
+            <a:pPr indent="0" marL="0">
+              <a:buNone/>
+            </a:pPr>
+            <a:r>
+              <a:rPr lang="en-US" sz="1220" dirty="0">
                 <a:solidFill>
                   <a:srgbClr val="17364A"/>
                 </a:solidFill>
@@ -10598,11 +10747,14 @@
               </a:rPr>
               <a:t>Complete the practical exercise to apply the concept.</a:t>
             </a:r>
-            <a:endParaRPr lang="en-US" sz="1380" dirty="0"/>
-          </a:p>
-          <a:p>
-            <a:r>
-              <a:rPr lang="en-US" sz="1380" dirty="0">
+            <a:endParaRPr lang="en-US" sz="1220" dirty="0"/>
+          </a:p>
+          <a:p>
+            <a:pPr indent="0" marL="0">
+              <a:buNone/>
+            </a:pPr>
+            <a:r>
+              <a:rPr lang="en-US" sz="1220" dirty="0">
                 <a:solidFill>
                   <a:srgbClr val="17364A"/>
                 </a:solidFill>
@@ -10612,7 +10764,7 @@
               </a:rPr>
               <a:t>Use the notes and references for deeper review.</a:t>
             </a:r>
-            <a:endParaRPr lang="en-US" sz="1380" dirty="0"/>
+            <a:endParaRPr lang="en-US" sz="1220" dirty="0"/>
           </a:p>
         </p:txBody>
       </p:sp>
@@ -10913,21 +11065,24 @@
           <a:ln/>
         </p:spPr>
         <p:txBody>
-          <a:bodyPr wrap="square" lIns="635" tIns="635" rIns="635" bIns="635" rtlCol="0" anchor="t">
+          <a:bodyPr wrap="square" lIns="1016" tIns="1016" rIns="1016" bIns="1016" rtlCol="0" anchor="t">
             <a:normAutofit/>
           </a:bodyPr>
           <a:lstStyle/>
           <a:p>
+            <a:pPr indent="0" marL="0">
+              <a:buNone/>
+            </a:pPr>
             <a:r>
               <a:rPr lang="en-US" sz="2100" dirty="0">
                 <a:solidFill>
-                  <a:srgbClr val="17364A"/>
-                </a:solidFill>
-                <a:latin typeface="Aptos" pitchFamily="34" charset="0"/>
-                <a:ea typeface="Aptos" pitchFamily="34" charset="-122"/>
-                <a:cs typeface="Aptos" pitchFamily="34" charset="-120"/>
-              </a:rPr>
-              <a:t>Audit log requirements</a:t>
+                  <a:srgbClr val="003A63"/>
+                </a:solidFill>
+                <a:latin typeface="Aptos" pitchFamily="34" charset="0"/>
+                <a:ea typeface="Aptos" pitchFamily="34" charset="-122"/>
+                <a:cs typeface="Aptos" pitchFamily="34" charset="-120"/>
+              </a:rPr>
+              <a:t>• Audit log requirements</a:t>
             </a:r>
             <a:endParaRPr lang="en-US" sz="2100" dirty="0"/>
           </a:p>
@@ -11007,17 +11162,17 @@
         </p:nvSpPr>
         <p:spPr>
           <a:xfrm>
-            <a:off x="7799832" y="1828800"/>
-            <a:ext cx="3145536" cy="685800"/>
-          </a:xfrm>
-          <a:prstGeom prst="rect">
-            <a:avLst/>
-          </a:prstGeom>
-          <a:noFill/>
-          <a:ln/>
-        </p:spPr>
-        <p:txBody>
-          <a:bodyPr wrap="square" lIns="0" tIns="0" rIns="0" bIns="0" rtlCol="0" anchor="t">
+            <a:off x="7799832" y="1801368"/>
+            <a:ext cx="3145536" cy="758952"/>
+          </a:xfrm>
+          <a:prstGeom prst="rect">
+            <a:avLst/>
+          </a:prstGeom>
+          <a:noFill/>
+          <a:ln/>
+        </p:spPr>
+        <p:txBody>
+          <a:bodyPr wrap="square" lIns="254" tIns="254" rIns="254" bIns="254" rtlCol="0" anchor="t">
             <a:normAutofit/>
           </a:bodyPr>
           <a:lstStyle/>
@@ -11026,7 +11181,7 @@
               <a:buNone/>
             </a:pPr>
             <a:r>
-              <a:rPr lang="en-US" sz="1550" dirty="0">
+              <a:rPr lang="en-US" sz="1320" dirty="0">
                 <a:solidFill>
                   <a:srgbClr val="17364A"/>
                 </a:solidFill>
@@ -11036,7 +11191,7 @@
               </a:rPr>
               <a:t>Audit log requirements</a:t>
             </a:r>
-            <a:endParaRPr lang="en-US" sz="1550" dirty="0"/>
+            <a:endParaRPr lang="en-US" sz="1320" dirty="0"/>
           </a:p>
         </p:txBody>
       </p:sp>
@@ -11124,13 +11279,16 @@
           <a:ln/>
         </p:spPr>
         <p:txBody>
-          <a:bodyPr wrap="square" lIns="254" tIns="254" rIns="254" bIns="254" rtlCol="0" anchor="t">
+          <a:bodyPr wrap="square" lIns="508" tIns="508" rIns="508" bIns="508" rtlCol="0" anchor="t">
             <a:normAutofit/>
           </a:bodyPr>
           <a:lstStyle/>
           <a:p>
-            <a:r>
-              <a:rPr lang="en-US" sz="1380" dirty="0">
+            <a:pPr indent="0" marL="0">
+              <a:buNone/>
+            </a:pPr>
+            <a:r>
+              <a:rPr lang="en-US" sz="1220" dirty="0">
                 <a:solidFill>
                   <a:srgbClr val="17364A"/>
                 </a:solidFill>
@@ -11140,7 +11298,7 @@
               </a:rPr>
               <a:t>Audit log requirements</a:t>
             </a:r>
-            <a:endParaRPr lang="en-US" sz="1380" dirty="0"/>
+            <a:endParaRPr lang="en-US" sz="1220" dirty="0"/>
           </a:p>
         </p:txBody>
       </p:sp>
@@ -11218,17 +11376,17 @@
         </p:nvSpPr>
         <p:spPr>
           <a:xfrm>
-            <a:off x="7799832" y="5001768"/>
-            <a:ext cx="3145536" cy="502920"/>
-          </a:xfrm>
-          <a:prstGeom prst="rect">
-            <a:avLst/>
-          </a:prstGeom>
-          <a:noFill/>
-          <a:ln/>
-        </p:spPr>
-        <p:txBody>
-          <a:bodyPr wrap="square" lIns="0" tIns="0" rIns="0" bIns="0" rtlCol="0" anchor="t">
+            <a:off x="7799832" y="4974336"/>
+            <a:ext cx="3145536" cy="576072"/>
+          </a:xfrm>
+          <a:prstGeom prst="rect">
+            <a:avLst/>
+          </a:prstGeom>
+          <a:noFill/>
+          <a:ln/>
+        </p:spPr>
+        <p:txBody>
+          <a:bodyPr wrap="square" lIns="254" tIns="254" rIns="254" bIns="254" rtlCol="0" anchor="t">
             <a:normAutofit/>
           </a:bodyPr>
           <a:lstStyle/>
@@ -11237,7 +11395,7 @@
               <a:buNone/>
             </a:pPr>
             <a:r>
-              <a:rPr lang="en-US" sz="1550" dirty="0">
+              <a:rPr lang="en-US" sz="1320" dirty="0">
                 <a:solidFill>
                   <a:srgbClr val="17364A"/>
                 </a:solidFill>
@@ -11245,9 +11403,9 @@
                 <a:ea typeface="Aptos" pitchFamily="34" charset="-122"/>
                 <a:cs typeface="Aptos" pitchFamily="34" charset="-120"/>
               </a:rPr>
-              <a:t>Use the concept to clarify workflow changes, dependencies, staffing, procurement requirements, training needs, and implementation checkpoints.</a:t>
-            </a:r>
-            <a:endParaRPr lang="en-US" sz="1550" dirty="0"/>
+              <a:t>Use the concept to clarify workflow changes, dependencies, staffing, procurement requirements, training needs, and.</a:t>
+            </a:r>
+            <a:endParaRPr lang="en-US" sz="1320" dirty="0"/>
           </a:p>
         </p:txBody>
       </p:sp>
@@ -11548,49 +11706,58 @@
           <a:ln/>
         </p:spPr>
         <p:txBody>
-          <a:bodyPr wrap="square" lIns="635" tIns="635" rIns="635" bIns="635" rtlCol="0" anchor="t">
+          <a:bodyPr wrap="square" lIns="1016" tIns="1016" rIns="1016" bIns="1016" rtlCol="0" anchor="t">
             <a:normAutofit/>
           </a:bodyPr>
           <a:lstStyle/>
           <a:p>
+            <a:pPr indent="0" marL="0">
+              <a:buNone/>
+            </a:pPr>
             <a:r>
               <a:rPr lang="en-US" sz="2100" dirty="0">
                 <a:solidFill>
-                  <a:srgbClr val="17364A"/>
-                </a:solidFill>
-                <a:latin typeface="Aptos" pitchFamily="34" charset="0"/>
-                <a:ea typeface="Aptos" pitchFamily="34" charset="-122"/>
-                <a:cs typeface="Aptos" pitchFamily="34" charset="-120"/>
-              </a:rPr>
-              <a:t>API and event workflow worksheet</a:t>
+                  <a:srgbClr val="003A63"/>
+                </a:solidFill>
+                <a:latin typeface="Aptos" pitchFamily="34" charset="0"/>
+                <a:ea typeface="Aptos" pitchFamily="34" charset="-122"/>
+                <a:cs typeface="Aptos" pitchFamily="34" charset="-120"/>
+              </a:rPr>
+              <a:t>• API and event workflow worksheet</a:t>
             </a:r>
             <a:endParaRPr lang="en-US" sz="2100" dirty="0"/>
           </a:p>
           <a:p>
+            <a:pPr indent="0" marL="0">
+              <a:buNone/>
+            </a:pPr>
             <a:r>
               <a:rPr lang="en-US" sz="2100" dirty="0">
                 <a:solidFill>
-                  <a:srgbClr val="17364A"/>
-                </a:solidFill>
-                <a:latin typeface="Aptos" pitchFamily="34" charset="0"/>
-                <a:ea typeface="Aptos" pitchFamily="34" charset="-122"/>
-                <a:cs typeface="Aptos" pitchFamily="34" charset="-120"/>
-              </a:rPr>
-              <a:t>Integration risk questions</a:t>
+                  <a:srgbClr val="003A63"/>
+                </a:solidFill>
+                <a:latin typeface="Aptos" pitchFamily="34" charset="0"/>
+                <a:ea typeface="Aptos" pitchFamily="34" charset="-122"/>
+                <a:cs typeface="Aptos" pitchFamily="34" charset="-120"/>
+              </a:rPr>
+              <a:t>• Integration risk questions</a:t>
             </a:r>
             <a:endParaRPr lang="en-US" sz="2100" dirty="0"/>
           </a:p>
           <a:p>
+            <a:pPr indent="0" marL="0">
+              <a:buNone/>
+            </a:pPr>
             <a:r>
               <a:rPr lang="en-US" sz="2100" dirty="0">
                 <a:solidFill>
-                  <a:srgbClr val="17364A"/>
-                </a:solidFill>
-                <a:latin typeface="Aptos" pitchFamily="34" charset="0"/>
-                <a:ea typeface="Aptos" pitchFamily="34" charset="-122"/>
-                <a:cs typeface="Aptos" pitchFamily="34" charset="-120"/>
-              </a:rPr>
-              <a:t>Access control recommendations</a:t>
+                  <a:srgbClr val="003A63"/>
+                </a:solidFill>
+                <a:latin typeface="Aptos" pitchFamily="34" charset="0"/>
+                <a:ea typeface="Aptos" pitchFamily="34" charset="-122"/>
+                <a:cs typeface="Aptos" pitchFamily="34" charset="-120"/>
+              </a:rPr>
+              <a:t>• Access control recommendations</a:t>
             </a:r>
             <a:endParaRPr lang="en-US" sz="2100" dirty="0"/>
           </a:p>
@@ -11670,17 +11837,17 @@
         </p:nvSpPr>
         <p:spPr>
           <a:xfrm>
-            <a:off x="7799832" y="1828800"/>
-            <a:ext cx="3145536" cy="685800"/>
-          </a:xfrm>
-          <a:prstGeom prst="rect">
-            <a:avLst/>
-          </a:prstGeom>
-          <a:noFill/>
-          <a:ln/>
-        </p:spPr>
-        <p:txBody>
-          <a:bodyPr wrap="square" lIns="0" tIns="0" rIns="0" bIns="0" rtlCol="0" anchor="t">
+            <a:off x="7799832" y="1801368"/>
+            <a:ext cx="3145536" cy="758952"/>
+          </a:xfrm>
+          <a:prstGeom prst="rect">
+            <a:avLst/>
+          </a:prstGeom>
+          <a:noFill/>
+          <a:ln/>
+        </p:spPr>
+        <p:txBody>
+          <a:bodyPr wrap="square" lIns="254" tIns="254" rIns="254" bIns="254" rtlCol="0" anchor="t">
             <a:normAutofit/>
           </a:bodyPr>
           <a:lstStyle/>
@@ -11689,7 +11856,7 @@
               <a:buNone/>
             </a:pPr>
             <a:r>
-              <a:rPr lang="en-US" sz="1550" dirty="0">
+              <a:rPr lang="en-US" sz="1320" dirty="0">
                 <a:solidFill>
                   <a:srgbClr val="17364A"/>
                 </a:solidFill>
@@ -11699,7 +11866,7 @@
               </a:rPr>
               <a:t>API and event workflow worksheet</a:t>
             </a:r>
-            <a:endParaRPr lang="en-US" sz="1550" dirty="0"/>
+            <a:endParaRPr lang="en-US" sz="1320" dirty="0"/>
           </a:p>
         </p:txBody>
       </p:sp>
@@ -11787,13 +11954,16 @@
           <a:ln/>
         </p:spPr>
         <p:txBody>
-          <a:bodyPr wrap="square" lIns="254" tIns="254" rIns="254" bIns="254" rtlCol="0" anchor="t">
+          <a:bodyPr wrap="square" lIns="508" tIns="508" rIns="508" bIns="508" rtlCol="0" anchor="t">
             <a:normAutofit/>
           </a:bodyPr>
           <a:lstStyle/>
           <a:p>
-            <a:r>
-              <a:rPr lang="en-US" sz="1380" dirty="0">
+            <a:pPr indent="0" marL="0">
+              <a:buNone/>
+            </a:pPr>
+            <a:r>
+              <a:rPr lang="en-US" sz="1220" dirty="0">
                 <a:solidFill>
                   <a:srgbClr val="17364A"/>
                 </a:solidFill>
@@ -11803,11 +11973,14 @@
               </a:rPr>
               <a:t>API and event workflow worksheet</a:t>
             </a:r>
-            <a:endParaRPr lang="en-US" sz="1380" dirty="0"/>
-          </a:p>
-          <a:p>
-            <a:r>
-              <a:rPr lang="en-US" sz="1380" dirty="0">
+            <a:endParaRPr lang="en-US" sz="1220" dirty="0"/>
+          </a:p>
+          <a:p>
+            <a:pPr indent="0" marL="0">
+              <a:buNone/>
+            </a:pPr>
+            <a:r>
+              <a:rPr lang="en-US" sz="1220" dirty="0">
                 <a:solidFill>
                   <a:srgbClr val="17364A"/>
                 </a:solidFill>
@@ -11817,11 +11990,14 @@
               </a:rPr>
               <a:t>Integration risk questions</a:t>
             </a:r>
-            <a:endParaRPr lang="en-US" sz="1380" dirty="0"/>
-          </a:p>
-          <a:p>
-            <a:r>
-              <a:rPr lang="en-US" sz="1380" dirty="0">
+            <a:endParaRPr lang="en-US" sz="1220" dirty="0"/>
+          </a:p>
+          <a:p>
+            <a:pPr indent="0" marL="0">
+              <a:buNone/>
+            </a:pPr>
+            <a:r>
+              <a:rPr lang="en-US" sz="1220" dirty="0">
                 <a:solidFill>
                   <a:srgbClr val="17364A"/>
                 </a:solidFill>
@@ -11831,7 +12007,7 @@
               </a:rPr>
               <a:t>Access control recommendations</a:t>
             </a:r>
-            <a:endParaRPr lang="en-US" sz="1380" dirty="0"/>
+            <a:endParaRPr lang="en-US" sz="1220" dirty="0"/>
           </a:p>
         </p:txBody>
       </p:sp>
@@ -11909,17 +12085,17 @@
         </p:nvSpPr>
         <p:spPr>
           <a:xfrm>
-            <a:off x="7799832" y="5001768"/>
-            <a:ext cx="3145536" cy="502920"/>
-          </a:xfrm>
-          <a:prstGeom prst="rect">
-            <a:avLst/>
-          </a:prstGeom>
-          <a:noFill/>
-          <a:ln/>
-        </p:spPr>
-        <p:txBody>
-          <a:bodyPr wrap="square" lIns="0" tIns="0" rIns="0" bIns="0" rtlCol="0" anchor="t">
+            <a:off x="7799832" y="4974336"/>
+            <a:ext cx="3145536" cy="576072"/>
+          </a:xfrm>
+          <a:prstGeom prst="rect">
+            <a:avLst/>
+          </a:prstGeom>
+          <a:noFill/>
+          <a:ln/>
+        </p:spPr>
+        <p:txBody>
+          <a:bodyPr wrap="square" lIns="254" tIns="254" rIns="254" bIns="254" rtlCol="0" anchor="t">
             <a:normAutofit/>
           </a:bodyPr>
           <a:lstStyle/>
@@ -11928,7 +12104,7 @@
               <a:buNone/>
             </a:pPr>
             <a:r>
-              <a:rPr lang="en-US" sz="1550" dirty="0">
+              <a:rPr lang="en-US" sz="1320" dirty="0">
                 <a:solidFill>
                   <a:srgbClr val="17364A"/>
                 </a:solidFill>
@@ -11936,9 +12112,9 @@
                 <a:ea typeface="Aptos" pitchFamily="34" charset="-122"/>
                 <a:cs typeface="Aptos" pitchFamily="34" charset="-120"/>
               </a:rPr>
-              <a:t>Use the assignment to test whether you can explain the concept, apply it to a realistic public health situation, and identify what would need review before the work moves forward.</a:t>
-            </a:r>
-            <a:endParaRPr lang="en-US" sz="1550" dirty="0"/>
+              <a:t>Use the assignment to test whether you can explain the concept, apply it to a realistic public health situation, and.</a:t>
+            </a:r>
+            <a:endParaRPr lang="en-US" sz="1320" dirty="0"/>
           </a:p>
         </p:txBody>
       </p:sp>
@@ -12239,49 +12415,58 @@
           <a:ln/>
         </p:spPr>
         <p:txBody>
-          <a:bodyPr wrap="square" lIns="635" tIns="635" rIns="635" bIns="635" rtlCol="0" anchor="t">
+          <a:bodyPr wrap="square" lIns="1016" tIns="1016" rIns="1016" bIns="1016" rtlCol="0" anchor="t">
             <a:normAutofit/>
           </a:bodyPr>
           <a:lstStyle/>
           <a:p>
+            <a:pPr indent="0" marL="0">
+              <a:buNone/>
+            </a:pPr>
             <a:r>
               <a:rPr lang="en-US" sz="2100" dirty="0">
                 <a:solidFill>
-                  <a:srgbClr val="17364A"/>
-                </a:solidFill>
-                <a:latin typeface="Aptos" pitchFamily="34" charset="0"/>
-                <a:ea typeface="Aptos" pitchFamily="34" charset="-122"/>
-                <a:cs typeface="Aptos" pitchFamily="34" charset="-120"/>
-              </a:rPr>
-              <a:t>1. What does an API allow systems to do?</a:t>
+                  <a:srgbClr val="003A63"/>
+                </a:solidFill>
+                <a:latin typeface="Aptos" pitchFamily="34" charset="0"/>
+                <a:ea typeface="Aptos" pitchFamily="34" charset="-122"/>
+                <a:cs typeface="Aptos" pitchFamily="34" charset="-120"/>
+              </a:rPr>
+              <a:t>• 1. What does an API allow systems to do?</a:t>
             </a:r>
             <a:endParaRPr lang="en-US" sz="2100" dirty="0"/>
           </a:p>
           <a:p>
+            <a:pPr indent="0" marL="0">
+              <a:buNone/>
+            </a:pPr>
             <a:r>
               <a:rPr lang="en-US" sz="2100" dirty="0">
                 <a:solidFill>
-                  <a:srgbClr val="17364A"/>
-                </a:solidFill>
-                <a:latin typeface="Aptos" pitchFamily="34" charset="0"/>
-                <a:ea typeface="Aptos" pitchFamily="34" charset="-122"/>
-                <a:cs typeface="Aptos" pitchFamily="34" charset="-120"/>
-              </a:rPr>
-              <a:t>2. What is a webhook?</a:t>
+                  <a:srgbClr val="003A63"/>
+                </a:solidFill>
+                <a:latin typeface="Aptos" pitchFamily="34" charset="0"/>
+                <a:ea typeface="Aptos" pitchFamily="34" charset="-122"/>
+                <a:cs typeface="Aptos" pitchFamily="34" charset="-120"/>
+              </a:rPr>
+              <a:t>• 2. What is a webhook?</a:t>
             </a:r>
             <a:endParaRPr lang="en-US" sz="2100" dirty="0"/>
           </a:p>
           <a:p>
+            <a:pPr indent="0" marL="0">
+              <a:buNone/>
+            </a:pPr>
             <a:r>
               <a:rPr lang="en-US" sz="2100" dirty="0">
                 <a:solidFill>
-                  <a:srgbClr val="17364A"/>
-                </a:solidFill>
-                <a:latin typeface="Aptos" pitchFamily="34" charset="0"/>
-                <a:ea typeface="Aptos" pitchFamily="34" charset="-122"/>
-                <a:cs typeface="Aptos" pitchFamily="34" charset="-120"/>
-              </a:rPr>
-              <a:t>3. Why do AI integrations need access controls?</a:t>
+                  <a:srgbClr val="003A63"/>
+                </a:solidFill>
+                <a:latin typeface="Aptos" pitchFamily="34" charset="0"/>
+                <a:ea typeface="Aptos" pitchFamily="34" charset="-122"/>
+                <a:cs typeface="Aptos" pitchFamily="34" charset="-120"/>
+              </a:rPr>
+              <a:t>• 3. Why do AI integrations need access controls?</a:t>
             </a:r>
             <a:endParaRPr lang="en-US" sz="2100" dirty="0"/>
           </a:p>
@@ -12361,17 +12546,17 @@
         </p:nvSpPr>
         <p:spPr>
           <a:xfrm>
-            <a:off x="7799832" y="1828800"/>
-            <a:ext cx="3145536" cy="685800"/>
-          </a:xfrm>
-          <a:prstGeom prst="rect">
-            <a:avLst/>
-          </a:prstGeom>
-          <a:noFill/>
-          <a:ln/>
-        </p:spPr>
-        <p:txBody>
-          <a:bodyPr wrap="square" lIns="0" tIns="0" rIns="0" bIns="0" rtlCol="0" anchor="t">
+            <a:off x="7799832" y="1801368"/>
+            <a:ext cx="3145536" cy="758952"/>
+          </a:xfrm>
+          <a:prstGeom prst="rect">
+            <a:avLst/>
+          </a:prstGeom>
+          <a:noFill/>
+          <a:ln/>
+        </p:spPr>
+        <p:txBody>
+          <a:bodyPr wrap="square" lIns="254" tIns="254" rIns="254" bIns="254" rtlCol="0" anchor="t">
             <a:normAutofit/>
           </a:bodyPr>
           <a:lstStyle/>
@@ -12380,7 +12565,7 @@
               <a:buNone/>
             </a:pPr>
             <a:r>
-              <a:rPr lang="en-US" sz="1550" dirty="0">
+              <a:rPr lang="en-US" sz="1320" dirty="0">
                 <a:solidFill>
                   <a:srgbClr val="17364A"/>
                 </a:solidFill>
@@ -12390,7 +12575,7 @@
               </a:rPr>
               <a:t>1. What does an API allow systems to do?</a:t>
             </a:r>
-            <a:endParaRPr lang="en-US" sz="1550" dirty="0"/>
+            <a:endParaRPr lang="en-US" sz="1320" dirty="0"/>
           </a:p>
         </p:txBody>
       </p:sp>
@@ -12478,13 +12663,16 @@
           <a:ln/>
         </p:spPr>
         <p:txBody>
-          <a:bodyPr wrap="square" lIns="254" tIns="254" rIns="254" bIns="254" rtlCol="0" anchor="t">
+          <a:bodyPr wrap="square" lIns="508" tIns="508" rIns="508" bIns="508" rtlCol="0" anchor="t">
             <a:normAutofit/>
           </a:bodyPr>
           <a:lstStyle/>
           <a:p>
-            <a:r>
-              <a:rPr lang="en-US" sz="1380" dirty="0">
+            <a:pPr indent="0" marL="0">
+              <a:buNone/>
+            </a:pPr>
+            <a:r>
+              <a:rPr lang="en-US" sz="1220" dirty="0">
                 <a:solidFill>
                   <a:srgbClr val="17364A"/>
                 </a:solidFill>
@@ -12494,11 +12682,14 @@
               </a:rPr>
               <a:t>1.</a:t>
             </a:r>
-            <a:endParaRPr lang="en-US" sz="1380" dirty="0"/>
-          </a:p>
-          <a:p>
-            <a:r>
-              <a:rPr lang="en-US" sz="1380" dirty="0">
+            <a:endParaRPr lang="en-US" sz="1220" dirty="0"/>
+          </a:p>
+          <a:p>
+            <a:pPr indent="0" marL="0">
+              <a:buNone/>
+            </a:pPr>
+            <a:r>
+              <a:rPr lang="en-US" sz="1220" dirty="0">
                 <a:solidFill>
                   <a:srgbClr val="17364A"/>
                 </a:solidFill>
@@ -12508,11 +12699,14 @@
               </a:rPr>
               <a:t>What does an API allow systems to do?</a:t>
             </a:r>
-            <a:endParaRPr lang="en-US" sz="1380" dirty="0"/>
-          </a:p>
-          <a:p>
-            <a:r>
-              <a:rPr lang="en-US" sz="1380" dirty="0">
+            <a:endParaRPr lang="en-US" sz="1220" dirty="0"/>
+          </a:p>
+          <a:p>
+            <a:pPr indent="0" marL="0">
+              <a:buNone/>
+            </a:pPr>
+            <a:r>
+              <a:rPr lang="en-US" sz="1220" dirty="0">
                 <a:solidFill>
                   <a:srgbClr val="17364A"/>
                 </a:solidFill>
@@ -12522,7 +12716,7 @@
               </a:rPr>
               <a:t>2.</a:t>
             </a:r>
-            <a:endParaRPr lang="en-US" sz="1380" dirty="0"/>
+            <a:endParaRPr lang="en-US" sz="1220" dirty="0"/>
           </a:p>
         </p:txBody>
       </p:sp>
@@ -12600,17 +12794,17 @@
         </p:nvSpPr>
         <p:spPr>
           <a:xfrm>
-            <a:off x="7799832" y="5001768"/>
-            <a:ext cx="3145536" cy="502920"/>
-          </a:xfrm>
-          <a:prstGeom prst="rect">
-            <a:avLst/>
-          </a:prstGeom>
-          <a:noFill/>
-          <a:ln/>
-        </p:spPr>
-        <p:txBody>
-          <a:bodyPr wrap="square" lIns="0" tIns="0" rIns="0" bIns="0" rtlCol="0" anchor="t">
+            <a:off x="7799832" y="4974336"/>
+            <a:ext cx="3145536" cy="576072"/>
+          </a:xfrm>
+          <a:prstGeom prst="rect">
+            <a:avLst/>
+          </a:prstGeom>
+          <a:noFill/>
+          <a:ln/>
+        </p:spPr>
+        <p:txBody>
+          <a:bodyPr wrap="square" lIns="254" tIns="254" rIns="254" bIns="254" rtlCol="0" anchor="t">
             <a:normAutofit/>
           </a:bodyPr>
           <a:lstStyle/>
@@ -12619,7 +12813,7 @@
               <a:buNone/>
             </a:pPr>
             <a:r>
-              <a:rPr lang="en-US" sz="1550" dirty="0">
+              <a:rPr lang="en-US" sz="1320" dirty="0">
                 <a:solidFill>
                   <a:srgbClr val="17364A"/>
                 </a:solidFill>
@@ -12627,9 +12821,9 @@
                 <a:ea typeface="Aptos" pitchFamily="34" charset="-122"/>
                 <a:cs typeface="Aptos" pitchFamily="34" charset="-120"/>
               </a:rPr>
-              <a:t>Use the assignment to test whether you can explain the concept, apply it to a realistic public health situation, and identify what would need review before the work moves forward.</a:t>
-            </a:r>
-            <a:endParaRPr lang="en-US" sz="1550" dirty="0"/>
+              <a:t>Use the assignment to test whether you can explain the concept, apply it to a realistic public health situation, and.</a:t>
+            </a:r>
+            <a:endParaRPr lang="en-US" sz="1320" dirty="0"/>
           </a:p>
         </p:txBody>
       </p:sp>
@@ -12930,49 +13124,58 @@
           <a:ln/>
         </p:spPr>
         <p:txBody>
-          <a:bodyPr wrap="square" lIns="635" tIns="635" rIns="635" bIns="635" rtlCol="0" anchor="t">
+          <a:bodyPr wrap="square" lIns="1016" tIns="1016" rIns="1016" bIns="1016" rtlCol="0" anchor="t">
             <a:normAutofit/>
           </a:bodyPr>
           <a:lstStyle/>
           <a:p>
+            <a:pPr indent="0" marL="0">
+              <a:buNone/>
+            </a:pPr>
             <a:r>
               <a:rPr lang="en-US" sz="2100" dirty="0">
                 <a:solidFill>
-                  <a:srgbClr val="17364A"/>
-                </a:solidFill>
-                <a:latin typeface="Aptos" pitchFamily="34" charset="0"/>
-                <a:ea typeface="Aptos" pitchFamily="34" charset="-122"/>
-                <a:cs typeface="Aptos" pitchFamily="34" charset="-120"/>
-              </a:rPr>
-              <a:t>HL7 FHIR API documentation: https://hl7.org/fhir/</a:t>
+                  <a:srgbClr val="003A63"/>
+                </a:solidFill>
+                <a:latin typeface="Aptos" pitchFamily="34" charset="0"/>
+                <a:ea typeface="Aptos" pitchFamily="34" charset="-122"/>
+                <a:cs typeface="Aptos" pitchFamily="34" charset="-120"/>
+              </a:rPr>
+              <a:t>• HL7 FHIR API documentation: https://hl7.org/fhir/</a:t>
             </a:r>
             <a:endParaRPr lang="en-US" sz="2100" dirty="0"/>
           </a:p>
           <a:p>
+            <a:pPr indent="0" marL="0">
+              <a:buNone/>
+            </a:pPr>
             <a:r>
               <a:rPr lang="en-US" sz="2100" dirty="0">
                 <a:solidFill>
-                  <a:srgbClr val="17364A"/>
-                </a:solidFill>
-                <a:latin typeface="Aptos" pitchFamily="34" charset="0"/>
-                <a:ea typeface="Aptos" pitchFamily="34" charset="-122"/>
-                <a:cs typeface="Aptos" pitchFamily="34" charset="-120"/>
-              </a:rPr>
-              <a:t>ONC interoperability resources</a:t>
+                  <a:srgbClr val="003A63"/>
+                </a:solidFill>
+                <a:latin typeface="Aptos" pitchFamily="34" charset="0"/>
+                <a:ea typeface="Aptos" pitchFamily="34" charset="-122"/>
+                <a:cs typeface="Aptos" pitchFamily="34" charset="-120"/>
+              </a:rPr>
+              <a:t>• ONC interoperability resources</a:t>
             </a:r>
             <a:endParaRPr lang="en-US" sz="2100" dirty="0"/>
           </a:p>
           <a:p>
+            <a:pPr indent="0" marL="0">
+              <a:buNone/>
+            </a:pPr>
             <a:r>
               <a:rPr lang="en-US" sz="2100" dirty="0">
                 <a:solidFill>
-                  <a:srgbClr val="17364A"/>
-                </a:solidFill>
-                <a:latin typeface="Aptos" pitchFamily="34" charset="0"/>
-                <a:ea typeface="Aptos" pitchFamily="34" charset="-122"/>
-                <a:cs typeface="Aptos" pitchFamily="34" charset="-120"/>
-              </a:rPr>
-              <a:t>Agency cybersecurity and access control policies</a:t>
+                  <a:srgbClr val="003A63"/>
+                </a:solidFill>
+                <a:latin typeface="Aptos" pitchFamily="34" charset="0"/>
+                <a:ea typeface="Aptos" pitchFamily="34" charset="-122"/>
+                <a:cs typeface="Aptos" pitchFamily="34" charset="-120"/>
+              </a:rPr>
+              <a:t>• Agency cybersecurity and access control policies</a:t>
             </a:r>
             <a:endParaRPr lang="en-US" sz="2100" dirty="0"/>
           </a:p>
@@ -13052,17 +13255,17 @@
         </p:nvSpPr>
         <p:spPr>
           <a:xfrm>
-            <a:off x="7799832" y="1828800"/>
-            <a:ext cx="3145536" cy="685800"/>
-          </a:xfrm>
-          <a:prstGeom prst="rect">
-            <a:avLst/>
-          </a:prstGeom>
-          <a:noFill/>
-          <a:ln/>
-        </p:spPr>
-        <p:txBody>
-          <a:bodyPr wrap="square" lIns="0" tIns="0" rIns="0" bIns="0" rtlCol="0" anchor="t">
+            <a:off x="7799832" y="1801368"/>
+            <a:ext cx="3145536" cy="758952"/>
+          </a:xfrm>
+          <a:prstGeom prst="rect">
+            <a:avLst/>
+          </a:prstGeom>
+          <a:noFill/>
+          <a:ln/>
+        </p:spPr>
+        <p:txBody>
+          <a:bodyPr wrap="square" lIns="254" tIns="254" rIns="254" bIns="254" rtlCol="0" anchor="t">
             <a:normAutofit/>
           </a:bodyPr>
           <a:lstStyle/>
@@ -13071,7 +13274,7 @@
               <a:buNone/>
             </a:pPr>
             <a:r>
-              <a:rPr lang="en-US" sz="1550" dirty="0">
+              <a:rPr lang="en-US" sz="1320" dirty="0">
                 <a:solidFill>
                   <a:srgbClr val="17364A"/>
                 </a:solidFill>
@@ -13081,7 +13284,7 @@
               </a:rPr>
               <a:t>HL7 FHIR API documentation: https://hl7.org/fhir/</a:t>
             </a:r>
-            <a:endParaRPr lang="en-US" sz="1550" dirty="0"/>
+            <a:endParaRPr lang="en-US" sz="1320" dirty="0"/>
           </a:p>
         </p:txBody>
       </p:sp>
@@ -13169,13 +13372,16 @@
           <a:ln/>
         </p:spPr>
         <p:txBody>
-          <a:bodyPr wrap="square" lIns="254" tIns="254" rIns="254" bIns="254" rtlCol="0" anchor="t">
+          <a:bodyPr wrap="square" lIns="508" tIns="508" rIns="508" bIns="508" rtlCol="0" anchor="t">
             <a:normAutofit/>
           </a:bodyPr>
           <a:lstStyle/>
           <a:p>
-            <a:r>
-              <a:rPr lang="en-US" sz="1380" dirty="0">
+            <a:pPr indent="0" marL="0">
+              <a:buNone/>
+            </a:pPr>
+            <a:r>
+              <a:rPr lang="en-US" sz="1220" dirty="0">
                 <a:solidFill>
                   <a:srgbClr val="17364A"/>
                 </a:solidFill>
@@ -13185,11 +13391,14 @@
               </a:rPr>
               <a:t>HL7 FHIR API documentation: https://hl7.org/fhir/</a:t>
             </a:r>
-            <a:endParaRPr lang="en-US" sz="1380" dirty="0"/>
-          </a:p>
-          <a:p>
-            <a:r>
-              <a:rPr lang="en-US" sz="1380" dirty="0">
+            <a:endParaRPr lang="en-US" sz="1220" dirty="0"/>
+          </a:p>
+          <a:p>
+            <a:pPr indent="0" marL="0">
+              <a:buNone/>
+            </a:pPr>
+            <a:r>
+              <a:rPr lang="en-US" sz="1220" dirty="0">
                 <a:solidFill>
                   <a:srgbClr val="17364A"/>
                 </a:solidFill>
@@ -13199,11 +13408,14 @@
               </a:rPr>
               <a:t>ONC interoperability resources</a:t>
             </a:r>
-            <a:endParaRPr lang="en-US" sz="1380" dirty="0"/>
-          </a:p>
-          <a:p>
-            <a:r>
-              <a:rPr lang="en-US" sz="1380" dirty="0">
+            <a:endParaRPr lang="en-US" sz="1220" dirty="0"/>
+          </a:p>
+          <a:p>
+            <a:pPr indent="0" marL="0">
+              <a:buNone/>
+            </a:pPr>
+            <a:r>
+              <a:rPr lang="en-US" sz="1220" dirty="0">
                 <a:solidFill>
                   <a:srgbClr val="17364A"/>
                 </a:solidFill>
@@ -13213,7 +13425,7 @@
               </a:rPr>
               <a:t>Agency cybersecurity and access control policies</a:t>
             </a:r>
-            <a:endParaRPr lang="en-US" sz="1380" dirty="0"/>
+            <a:endParaRPr lang="en-US" sz="1220" dirty="0"/>
           </a:p>
         </p:txBody>
       </p:sp>
@@ -13291,17 +13503,17 @@
         </p:nvSpPr>
         <p:spPr>
           <a:xfrm>
-            <a:off x="7799832" y="5001768"/>
-            <a:ext cx="3145536" cy="502920"/>
-          </a:xfrm>
-          <a:prstGeom prst="rect">
-            <a:avLst/>
-          </a:prstGeom>
-          <a:noFill/>
-          <a:ln/>
-        </p:spPr>
-        <p:txBody>
-          <a:bodyPr wrap="square" lIns="0" tIns="0" rIns="0" bIns="0" rtlCol="0" anchor="t">
+            <a:off x="7799832" y="4974336"/>
+            <a:ext cx="3145536" cy="576072"/>
+          </a:xfrm>
+          <a:prstGeom prst="rect">
+            <a:avLst/>
+          </a:prstGeom>
+          <a:noFill/>
+          <a:ln/>
+        </p:spPr>
+        <p:txBody>
+          <a:bodyPr wrap="square" lIns="254" tIns="254" rIns="254" bIns="254" rtlCol="0" anchor="t">
             <a:normAutofit/>
           </a:bodyPr>
           <a:lstStyle/>
@@ -13310,7 +13522,7 @@
               <a:buNone/>
             </a:pPr>
             <a:r>
-              <a:rPr lang="en-US" sz="1550" dirty="0">
+              <a:rPr lang="en-US" sz="1320" dirty="0">
                 <a:solidFill>
                   <a:srgbClr val="17364A"/>
                 </a:solidFill>
@@ -13318,9 +13530,9 @@
                 <a:ea typeface="Aptos" pitchFamily="34" charset="-122"/>
                 <a:cs typeface="Aptos" pitchFamily="34" charset="-120"/>
               </a:rPr>
-              <a:t>Use the concept to clarify workflow changes, dependencies, staffing, procurement requirements, training needs, and implementation checkpoints.</a:t>
-            </a:r>
-            <a:endParaRPr lang="en-US" sz="1550" dirty="0"/>
+              <a:t>Use the concept to clarify workflow changes, dependencies, staffing, procurement requirements, training needs, and.</a:t>
+            </a:r>
+            <a:endParaRPr lang="en-US" sz="1320" dirty="0"/>
           </a:p>
         </p:txBody>
       </p:sp>
@@ -13621,63 +13833,75 @@
           <a:ln/>
         </p:spPr>
         <p:txBody>
-          <a:bodyPr wrap="square" lIns="635" tIns="635" rIns="635" bIns="635" rtlCol="0" anchor="t">
+          <a:bodyPr wrap="square" lIns="1016" tIns="1016" rIns="1016" bIns="1016" rtlCol="0" anchor="t">
             <a:normAutofit/>
           </a:bodyPr>
           <a:lstStyle/>
           <a:p>
+            <a:pPr indent="0" marL="0">
+              <a:buNone/>
+            </a:pPr>
             <a:r>
               <a:rPr lang="en-US" sz="1900" dirty="0">
                 <a:solidFill>
-                  <a:srgbClr val="17364A"/>
-                </a:solidFill>
-                <a:latin typeface="Aptos" pitchFamily="34" charset="0"/>
-                <a:ea typeface="Aptos" pitchFamily="34" charset="-122"/>
-                <a:cs typeface="Aptos" pitchFamily="34" charset="-120"/>
-              </a:rPr>
-              <a:t>Play 11: Build and Deploy AI Solutions - This lesson informs Play 11 by helping learners connect the lesson.</a:t>
+                  <a:srgbClr val="003A63"/>
+                </a:solidFill>
+                <a:latin typeface="Aptos" pitchFamily="34" charset="0"/>
+                <a:ea typeface="Aptos" pitchFamily="34" charset="-122"/>
+                <a:cs typeface="Aptos" pitchFamily="34" charset="-120"/>
+              </a:rPr>
+              <a:t>• Play 11: Build and Deploy AI Solutions - This lesson informs Play 11 by helping learners.</a:t>
             </a:r>
             <a:endParaRPr lang="en-US" sz="1900" dirty="0"/>
           </a:p>
           <a:p>
+            <a:pPr indent="0" marL="0">
+              <a:buNone/>
+            </a:pPr>
             <a:r>
               <a:rPr lang="en-US" sz="1900" dirty="0">
                 <a:solidFill>
-                  <a:srgbClr val="17364A"/>
-                </a:solidFill>
-                <a:latin typeface="Aptos" pitchFamily="34" charset="0"/>
-                <a:ea typeface="Aptos" pitchFamily="34" charset="-122"/>
-                <a:cs typeface="Aptos" pitchFamily="34" charset="-120"/>
-              </a:rPr>
-              <a:t>Play 2: Readiness Assessment - This lesson informs Play 2 by helping learners connect the lesson topic to.</a:t>
+                  <a:srgbClr val="003A63"/>
+                </a:solidFill>
+                <a:latin typeface="Aptos" pitchFamily="34" charset="0"/>
+                <a:ea typeface="Aptos" pitchFamily="34" charset="-122"/>
+                <a:cs typeface="Aptos" pitchFamily="34" charset="-120"/>
+              </a:rPr>
+              <a:t>• Play 2: Readiness Assessment - This lesson informs Play 2 by helping learners connect the.</a:t>
             </a:r>
             <a:endParaRPr lang="en-US" sz="1900" dirty="0"/>
           </a:p>
           <a:p>
+            <a:pPr indent="0" marL="0">
+              <a:buNone/>
+            </a:pPr>
             <a:r>
               <a:rPr lang="en-US" sz="1900" dirty="0">
                 <a:solidFill>
-                  <a:srgbClr val="17364A"/>
-                </a:solidFill>
-                <a:latin typeface="Aptos" pitchFamily="34" charset="0"/>
-                <a:ea typeface="Aptos" pitchFamily="34" charset="-122"/>
-                <a:cs typeface="Aptos" pitchFamily="34" charset="-120"/>
-              </a:rPr>
-              <a:t>Play 1: Vision &amp; Guardrails - This lesson informs Play 1 by helping learners connect the lesson topic to.</a:t>
+                  <a:srgbClr val="003A63"/>
+                </a:solidFill>
+                <a:latin typeface="Aptos" pitchFamily="34" charset="0"/>
+                <a:ea typeface="Aptos" pitchFamily="34" charset="-122"/>
+                <a:cs typeface="Aptos" pitchFamily="34" charset="-120"/>
+              </a:rPr>
+              <a:t>• Play 1: Vision &amp; Guardrails - This lesson informs Play 1 by helping learners connect the.</a:t>
             </a:r>
             <a:endParaRPr lang="en-US" sz="1900" dirty="0"/>
           </a:p>
           <a:p>
+            <a:pPr indent="0" marL="0">
+              <a:buNone/>
+            </a:pPr>
             <a:r>
               <a:rPr lang="en-US" sz="1900" dirty="0">
                 <a:solidFill>
-                  <a:srgbClr val="17364A"/>
-                </a:solidFill>
-                <a:latin typeface="Aptos" pitchFamily="34" charset="0"/>
-                <a:ea typeface="Aptos" pitchFamily="34" charset="-122"/>
-                <a:cs typeface="Aptos" pitchFamily="34" charset="-120"/>
-              </a:rPr>
-              <a:t>Play 7: Prioritize Use Cases - This lesson informs Play 7 by helping learners connect the lesson topic to.</a:t>
+                  <a:srgbClr val="003A63"/>
+                </a:solidFill>
+                <a:latin typeface="Aptos" pitchFamily="34" charset="0"/>
+                <a:ea typeface="Aptos" pitchFamily="34" charset="-122"/>
+                <a:cs typeface="Aptos" pitchFamily="34" charset="-120"/>
+              </a:rPr>
+              <a:t>• Play 7: Prioritize Use Cases - This lesson informs Play 7 by helping learners connect the.</a:t>
             </a:r>
             <a:endParaRPr lang="en-US" sz="1900" dirty="0"/>
           </a:p>
@@ -13757,17 +13981,17 @@
         </p:nvSpPr>
         <p:spPr>
           <a:xfrm>
-            <a:off x="8211312" y="1920240"/>
-            <a:ext cx="2734056" cy="1463040"/>
-          </a:xfrm>
-          <a:prstGeom prst="rect">
-            <a:avLst/>
-          </a:prstGeom>
-          <a:noFill/>
-          <a:ln/>
-        </p:spPr>
-        <p:txBody>
-          <a:bodyPr wrap="square" lIns="0" tIns="0" rIns="0" bIns="0" rtlCol="0" anchor="t">
+            <a:off x="8211312" y="1892808"/>
+            <a:ext cx="2734056" cy="1536192"/>
+          </a:xfrm>
+          <a:prstGeom prst="rect">
+            <a:avLst/>
+          </a:prstGeom>
+          <a:noFill/>
+          <a:ln/>
+        </p:spPr>
+        <p:txBody>
+          <a:bodyPr wrap="square" lIns="254" tIns="254" rIns="254" bIns="254" rtlCol="0" anchor="t">
             <a:normAutofit/>
           </a:bodyPr>
           <a:lstStyle/>
@@ -13776,7 +14000,7 @@
               <a:buNone/>
             </a:pPr>
             <a:r>
-              <a:rPr lang="en-US" sz="1550" dirty="0">
+              <a:rPr lang="en-US" sz="1320" dirty="0">
                 <a:solidFill>
                   <a:srgbClr val="17364A"/>
                 </a:solidFill>
@@ -13784,9 +14008,9 @@
                 <a:ea typeface="Aptos" pitchFamily="34" charset="-122"/>
                 <a:cs typeface="Aptos" pitchFamily="34" charset="-120"/>
               </a:rPr>
-              <a:t>Use the related plays to identify decisions, participants, timing, approvals, and documentation needed for responsible implementation.</a:t>
-            </a:r>
-            <a:endParaRPr lang="en-US" sz="1550" dirty="0"/>
+              <a:t>Use the related plays to identify decisions, participants, timing, approvals, and documentation needed for responsible.</a:t>
+            </a:r>
+            <a:endParaRPr lang="en-US" sz="1320" dirty="0"/>
           </a:p>
         </p:txBody>
       </p:sp>
@@ -13874,13 +14098,16 @@
           <a:ln/>
         </p:spPr>
         <p:txBody>
-          <a:bodyPr wrap="square" lIns="254" tIns="254" rIns="254" bIns="254" rtlCol="0" anchor="t">
+          <a:bodyPr wrap="square" lIns="508" tIns="508" rIns="508" bIns="508" rtlCol="0" anchor="t">
             <a:normAutofit/>
           </a:bodyPr>
           <a:lstStyle/>
           <a:p>
-            <a:r>
-              <a:rPr lang="en-US" sz="1380" dirty="0">
+            <a:pPr indent="0" marL="0">
+              <a:buNone/>
+            </a:pPr>
+            <a:r>
+              <a:rPr lang="en-US" sz="1220" dirty="0">
                 <a:solidFill>
                   <a:srgbClr val="17364A"/>
                 </a:solidFill>
@@ -13890,11 +14117,14 @@
               </a:rPr>
               <a:t>Locate the decision point in the playbook sequence.</a:t>
             </a:r>
-            <a:endParaRPr lang="en-US" sz="1380" dirty="0"/>
-          </a:p>
-          <a:p>
-            <a:r>
-              <a:rPr lang="en-US" sz="1380" dirty="0">
+            <a:endParaRPr lang="en-US" sz="1220" dirty="0"/>
+          </a:p>
+          <a:p>
+            <a:pPr indent="0" marL="0">
+              <a:buNone/>
+            </a:pPr>
+            <a:r>
+              <a:rPr lang="en-US" sz="1220" dirty="0">
                 <a:solidFill>
                   <a:srgbClr val="17364A"/>
                 </a:solidFill>
@@ -13904,11 +14134,14 @@
               </a:rPr>
               <a:t>Identify who should participate in the work.</a:t>
             </a:r>
-            <a:endParaRPr lang="en-US" sz="1380" dirty="0"/>
-          </a:p>
-          <a:p>
-            <a:r>
-              <a:rPr lang="en-US" sz="1380" dirty="0">
+            <a:endParaRPr lang="en-US" sz="1220" dirty="0"/>
+          </a:p>
+          <a:p>
+            <a:pPr indent="0" marL="0">
+              <a:buNone/>
+            </a:pPr>
+            <a:r>
+              <a:rPr lang="en-US" sz="1220" dirty="0">
                 <a:solidFill>
                   <a:srgbClr val="17364A"/>
                 </a:solidFill>
@@ -13918,7 +14151,7 @@
               </a:rPr>
               <a:t>Document the review, approval, or implementation step.</a:t>
             </a:r>
-            <a:endParaRPr lang="en-US" sz="1380" dirty="0"/>
+            <a:endParaRPr lang="en-US" sz="1220" dirty="0"/>
           </a:p>
         </p:txBody>
       </p:sp>
@@ -14219,63 +14452,75 @@
           <a:ln/>
         </p:spPr>
         <p:txBody>
-          <a:bodyPr wrap="square" lIns="635" tIns="635" rIns="635" bIns="635" rtlCol="0" anchor="t">
+          <a:bodyPr wrap="square" lIns="1016" tIns="1016" rIns="1016" bIns="1016" rtlCol="0" anchor="t">
             <a:normAutofit/>
           </a:bodyPr>
           <a:lstStyle/>
           <a:p>
+            <a:pPr indent="0" marL="0">
+              <a:buNone/>
+            </a:pPr>
             <a:r>
               <a:rPr lang="en-US" sz="1850" dirty="0">
                 <a:solidFill>
-                  <a:srgbClr val="17364A"/>
-                </a:solidFill>
-                <a:latin typeface="Aptos" pitchFamily="34" charset="0"/>
-                <a:ea typeface="Aptos" pitchFamily="34" charset="-122"/>
-                <a:cs typeface="Aptos" pitchFamily="34" charset="-120"/>
-              </a:rPr>
-              <a:t>Tool 4: AI Policy Landscape Scan (Worksheet) - Use AI Policy Landscape Scan to translate this lesson into a.</a:t>
+                  <a:srgbClr val="003A63"/>
+                </a:solidFill>
+                <a:latin typeface="Aptos" pitchFamily="34" charset="0"/>
+                <a:ea typeface="Aptos" pitchFamily="34" charset="-122"/>
+                <a:cs typeface="Aptos" pitchFamily="34" charset="-120"/>
+              </a:rPr>
+              <a:t>• Tool 4: AI Policy Landscape Scan (Worksheet) - Use AI Policy Landscape Scan to translate this.</a:t>
             </a:r>
             <a:endParaRPr lang="en-US" sz="1850" dirty="0"/>
           </a:p>
           <a:p>
+            <a:pPr indent="0" marL="0">
+              <a:buNone/>
+            </a:pPr>
             <a:r>
               <a:rPr lang="en-US" sz="1850" dirty="0">
                 <a:solidFill>
-                  <a:srgbClr val="17364A"/>
-                </a:solidFill>
-                <a:latin typeface="Aptos" pitchFamily="34" charset="0"/>
-                <a:ea typeface="Aptos" pitchFamily="34" charset="-122"/>
-                <a:cs typeface="Aptos" pitchFamily="34" charset="-120"/>
-              </a:rPr>
-              <a:t>Tool 5: AI Environmental and Resource Impact Review (Checklist) - Use AI Environmental and Resource Impact.</a:t>
+                  <a:srgbClr val="003A63"/>
+                </a:solidFill>
+                <a:latin typeface="Aptos" pitchFamily="34" charset="0"/>
+                <a:ea typeface="Aptos" pitchFamily="34" charset="-122"/>
+                <a:cs typeface="Aptos" pitchFamily="34" charset="-120"/>
+              </a:rPr>
+              <a:t>• Tool 5: AI Environmental and Resource Impact Review (Checklist) - Use AI Environmental and.</a:t>
             </a:r>
             <a:endParaRPr lang="en-US" sz="1850" dirty="0"/>
           </a:p>
           <a:p>
+            <a:pPr indent="0" marL="0">
+              <a:buNone/>
+            </a:pPr>
             <a:r>
               <a:rPr lang="en-US" sz="1850" dirty="0">
                 <a:solidFill>
-                  <a:srgbClr val="17364A"/>
-                </a:solidFill>
-                <a:latin typeface="Aptos" pitchFamily="34" charset="0"/>
-                <a:ea typeface="Aptos" pitchFamily="34" charset="-122"/>
-                <a:cs typeface="Aptos" pitchFamily="34" charset="-120"/>
-              </a:rPr>
-              <a:t>Tool 6: Human-Centered AI Decision Rule Checklist (Checklist) - Use Human-Centered AI Decision Rule.</a:t>
+                  <a:srgbClr val="003A63"/>
+                </a:solidFill>
+                <a:latin typeface="Aptos" pitchFamily="34" charset="0"/>
+                <a:ea typeface="Aptos" pitchFamily="34" charset="-122"/>
+                <a:cs typeface="Aptos" pitchFamily="34" charset="-120"/>
+              </a:rPr>
+              <a:t>• Tool 6: Human-Centered AI Decision Rule Checklist (Checklist) - Use Human-Centered AI Decision.</a:t>
             </a:r>
             <a:endParaRPr lang="en-US" sz="1850" dirty="0"/>
           </a:p>
           <a:p>
+            <a:pPr indent="0" marL="0">
+              <a:buNone/>
+            </a:pPr>
             <a:r>
               <a:rPr lang="en-US" sz="1850" dirty="0">
                 <a:solidFill>
-                  <a:srgbClr val="17364A"/>
-                </a:solidFill>
-                <a:latin typeface="Aptos" pitchFamily="34" charset="0"/>
-                <a:ea typeface="Aptos" pitchFamily="34" charset="-122"/>
-                <a:cs typeface="Aptos" pitchFamily="34" charset="-120"/>
-              </a:rPr>
-              <a:t>Tool 8: AI Project Charter (Planning) - Use AI Project Charter to translate this lesson into a documented.</a:t>
+                  <a:srgbClr val="003A63"/>
+                </a:solidFill>
+                <a:latin typeface="Aptos" pitchFamily="34" charset="0"/>
+                <a:ea typeface="Aptos" pitchFamily="34" charset="-122"/>
+                <a:cs typeface="Aptos" pitchFamily="34" charset="-120"/>
+              </a:rPr>
+              <a:t>• Tool 8: AI Project Charter (Planning) - Use AI Project Charter to translate this lesson into a.</a:t>
             </a:r>
             <a:endParaRPr lang="en-US" sz="1850" dirty="0"/>
           </a:p>
@@ -14355,17 +14600,17 @@
         </p:nvSpPr>
         <p:spPr>
           <a:xfrm>
-            <a:off x="8211312" y="1920240"/>
-            <a:ext cx="2734056" cy="1463040"/>
-          </a:xfrm>
-          <a:prstGeom prst="rect">
-            <a:avLst/>
-          </a:prstGeom>
-          <a:noFill/>
-          <a:ln/>
-        </p:spPr>
-        <p:txBody>
-          <a:bodyPr wrap="square" lIns="0" tIns="0" rIns="0" bIns="0" rtlCol="0" anchor="t">
+            <a:off x="8211312" y="1892808"/>
+            <a:ext cx="2734056" cy="1536192"/>
+          </a:xfrm>
+          <a:prstGeom prst="rect">
+            <a:avLst/>
+          </a:prstGeom>
+          <a:noFill/>
+          <a:ln/>
+        </p:spPr>
+        <p:txBody>
+          <a:bodyPr wrap="square" lIns="254" tIns="254" rIns="254" bIns="254" rtlCol="0" anchor="t">
             <a:normAutofit/>
           </a:bodyPr>
           <a:lstStyle/>
@@ -14374,7 +14619,7 @@
               <a:buNone/>
             </a:pPr>
             <a:r>
-              <a:rPr lang="en-US" sz="1550" dirty="0">
+              <a:rPr lang="en-US" sz="1320" dirty="0">
                 <a:solidFill>
                   <a:srgbClr val="17364A"/>
                 </a:solidFill>
@@ -14382,9 +14627,9 @@
                 <a:ea typeface="Aptos" pitchFamily="34" charset="-122"/>
                 <a:cs typeface="Aptos" pitchFamily="34" charset="-120"/>
               </a:rPr>
-              <a:t>Use linked tools when your department needs a structured worksheet, template, checklist, review process, or documentation artifact.</a:t>
-            </a:r>
-            <a:endParaRPr lang="en-US" sz="1550" dirty="0"/>
+              <a:t>Use linked tools when your department needs a structured worksheet, template, checklist, review process, or.</a:t>
+            </a:r>
+            <a:endParaRPr lang="en-US" sz="1320" dirty="0"/>
           </a:p>
         </p:txBody>
       </p:sp>
@@ -14472,13 +14717,16 @@
           <a:ln/>
         </p:spPr>
         <p:txBody>
-          <a:bodyPr wrap="square" lIns="254" tIns="254" rIns="254" bIns="254" rtlCol="0" anchor="t">
+          <a:bodyPr wrap="square" lIns="508" tIns="508" rIns="508" bIns="508" rtlCol="0" anchor="t">
             <a:normAutofit/>
           </a:bodyPr>
           <a:lstStyle/>
           <a:p>
-            <a:r>
-              <a:rPr lang="en-US" sz="1380" dirty="0">
+            <a:pPr indent="0" marL="0">
+              <a:buNone/>
+            </a:pPr>
+            <a:r>
+              <a:rPr lang="en-US" sz="1220" dirty="0">
                 <a:solidFill>
                   <a:srgbClr val="17364A"/>
                 </a:solidFill>
@@ -14488,11 +14736,14 @@
               </a:rPr>
               <a:t>Use a tool when no comparable local process exists.</a:t>
             </a:r>
-            <a:endParaRPr lang="en-US" sz="1380" dirty="0"/>
-          </a:p>
-          <a:p>
-            <a:r>
-              <a:rPr lang="en-US" sz="1380" dirty="0">
+            <a:endParaRPr lang="en-US" sz="1220" dirty="0"/>
+          </a:p>
+          <a:p>
+            <a:pPr indent="0" marL="0">
+              <a:buNone/>
+            </a:pPr>
+            <a:r>
+              <a:rPr lang="en-US" sz="1220" dirty="0">
                 <a:solidFill>
                   <a:srgbClr val="17364A"/>
                 </a:solidFill>
@@ -14500,13 +14751,16 @@
                 <a:ea typeface="Aptos" pitchFamily="34" charset="-122"/>
                 <a:cs typeface="Aptos" pitchFamily="34" charset="-120"/>
               </a:rPr>
-              <a:t>Adapt existing department templates when they already fit the purpose.</a:t>
-            </a:r>
-            <a:endParaRPr lang="en-US" sz="1380" dirty="0"/>
-          </a:p>
-          <a:p>
-            <a:r>
-              <a:rPr lang="en-US" sz="1380" dirty="0">
+              <a:t>Adapt existing department templates when they already fit the.</a:t>
+            </a:r>
+            <a:endParaRPr lang="en-US" sz="1220" dirty="0"/>
+          </a:p>
+          <a:p>
+            <a:pPr indent="0" marL="0">
+              <a:buNone/>
+            </a:pPr>
+            <a:r>
+              <a:rPr lang="en-US" sz="1220" dirty="0">
                 <a:solidFill>
                   <a:srgbClr val="17364A"/>
                 </a:solidFill>
@@ -14516,7 +14770,7 @@
               </a:rPr>
               <a:t>Save the completed artifact as evidence of the decision.</a:t>
             </a:r>
-            <a:endParaRPr lang="en-US" sz="1380" dirty="0"/>
+            <a:endParaRPr lang="en-US" sz="1220" dirty="0"/>
           </a:p>
         </p:txBody>
       </p:sp>
@@ -14817,49 +15071,58 @@
           <a:ln/>
         </p:spPr>
         <p:txBody>
-          <a:bodyPr wrap="square" lIns="635" tIns="635" rIns="635" bIns="635" rtlCol="0" anchor="t">
+          <a:bodyPr wrap="square" lIns="1016" tIns="1016" rIns="1016" bIns="1016" rtlCol="0" anchor="t">
             <a:normAutofit/>
           </a:bodyPr>
           <a:lstStyle/>
           <a:p>
+            <a:pPr indent="0" marL="0">
+              <a:buNone/>
+            </a:pPr>
             <a:r>
               <a:rPr lang="en-US" sz="2100" dirty="0">
                 <a:solidFill>
-                  <a:srgbClr val="17364A"/>
-                </a:solidFill>
-                <a:latin typeface="Aptos" pitchFamily="34" charset="0"/>
-                <a:ea typeface="Aptos" pitchFamily="34" charset="-122"/>
-                <a:cs typeface="Aptos" pitchFamily="34" charset="-120"/>
-              </a:rPr>
-              <a:t>Explain what APIs, webhooks, and event-driven workflows do.</a:t>
+                  <a:srgbClr val="003A63"/>
+                </a:solidFill>
+                <a:latin typeface="Aptos" pitchFamily="34" charset="0"/>
+                <a:ea typeface="Aptos" pitchFamily="34" charset="-122"/>
+                <a:cs typeface="Aptos" pitchFamily="34" charset="-120"/>
+              </a:rPr>
+              <a:t>• Explain what APIs, webhooks, and event-driven workflows do.</a:t>
             </a:r>
             <a:endParaRPr lang="en-US" sz="2100" dirty="0"/>
           </a:p>
           <a:p>
+            <a:pPr indent="0" marL="0">
+              <a:buNone/>
+            </a:pPr>
             <a:r>
               <a:rPr lang="en-US" sz="2100" dirty="0">
                 <a:solidFill>
-                  <a:srgbClr val="17364A"/>
-                </a:solidFill>
-                <a:latin typeface="Aptos" pitchFamily="34" charset="0"/>
-                <a:ea typeface="Aptos" pitchFamily="34" charset="-122"/>
-                <a:cs typeface="Aptos" pitchFamily="34" charset="-120"/>
-              </a:rPr>
-              <a:t>Distinguish between read-only access, write-back, and triggered actions.</a:t>
+                  <a:srgbClr val="003A63"/>
+                </a:solidFill>
+                <a:latin typeface="Aptos" pitchFamily="34" charset="0"/>
+                <a:ea typeface="Aptos" pitchFamily="34" charset="-122"/>
+                <a:cs typeface="Aptos" pitchFamily="34" charset="-120"/>
+              </a:rPr>
+              <a:t>• Distinguish between read-only access, write-back, and triggered actions.</a:t>
             </a:r>
             <a:endParaRPr lang="en-US" sz="2100" dirty="0"/>
           </a:p>
           <a:p>
+            <a:pPr indent="0" marL="0">
+              <a:buNone/>
+            </a:pPr>
             <a:r>
               <a:rPr lang="en-US" sz="2100" dirty="0">
                 <a:solidFill>
-                  <a:srgbClr val="17364A"/>
-                </a:solidFill>
-                <a:latin typeface="Aptos" pitchFamily="34" charset="0"/>
-                <a:ea typeface="Aptos" pitchFamily="34" charset="-122"/>
-                <a:cs typeface="Aptos" pitchFamily="34" charset="-120"/>
-              </a:rPr>
-              <a:t>Identify security, privacy, logging, and access-control requirements for AI integrations.</a:t>
+                  <a:srgbClr val="003A63"/>
+                </a:solidFill>
+                <a:latin typeface="Aptos" pitchFamily="34" charset="0"/>
+                <a:ea typeface="Aptos" pitchFamily="34" charset="-122"/>
+                <a:cs typeface="Aptos" pitchFamily="34" charset="-120"/>
+              </a:rPr>
+              <a:t>• Identify security, privacy, logging, and access-control requirements for AI integrations.</a:t>
             </a:r>
             <a:endParaRPr lang="en-US" sz="2100" dirty="0"/>
           </a:p>
@@ -14939,17 +15202,17 @@
         </p:nvSpPr>
         <p:spPr>
           <a:xfrm>
-            <a:off x="7799832" y="1828800"/>
-            <a:ext cx="3145536" cy="685800"/>
-          </a:xfrm>
-          <a:prstGeom prst="rect">
-            <a:avLst/>
-          </a:prstGeom>
-          <a:noFill/>
-          <a:ln/>
-        </p:spPr>
-        <p:txBody>
-          <a:bodyPr wrap="square" lIns="0" tIns="0" rIns="0" bIns="0" rtlCol="0" anchor="t">
+            <a:off x="7799832" y="1801368"/>
+            <a:ext cx="3145536" cy="758952"/>
+          </a:xfrm>
+          <a:prstGeom prst="rect">
+            <a:avLst/>
+          </a:prstGeom>
+          <a:noFill/>
+          <a:ln/>
+        </p:spPr>
+        <p:txBody>
+          <a:bodyPr wrap="square" lIns="254" tIns="254" rIns="254" bIns="254" rtlCol="0" anchor="t">
             <a:normAutofit/>
           </a:bodyPr>
           <a:lstStyle/>
@@ -14958,7 +15221,7 @@
               <a:buNone/>
             </a:pPr>
             <a:r>
-              <a:rPr lang="en-US" sz="1550" dirty="0">
+              <a:rPr lang="en-US" sz="1320" dirty="0">
                 <a:solidFill>
                   <a:srgbClr val="17364A"/>
                 </a:solidFill>
@@ -14968,7 +15231,7 @@
               </a:rPr>
               <a:t>Explain what APIs, webhooks, and event-driven workflows do.</a:t>
             </a:r>
-            <a:endParaRPr lang="en-US" sz="1550" dirty="0"/>
+            <a:endParaRPr lang="en-US" sz="1320" dirty="0"/>
           </a:p>
         </p:txBody>
       </p:sp>
@@ -15056,13 +15319,16 @@
           <a:ln/>
         </p:spPr>
         <p:txBody>
-          <a:bodyPr wrap="square" lIns="254" tIns="254" rIns="254" bIns="254" rtlCol="0" anchor="t">
+          <a:bodyPr wrap="square" lIns="508" tIns="508" rIns="508" bIns="508" rtlCol="0" anchor="t">
             <a:normAutofit/>
           </a:bodyPr>
           <a:lstStyle/>
           <a:p>
-            <a:r>
-              <a:rPr lang="en-US" sz="1380" dirty="0">
+            <a:pPr indent="0" marL="0">
+              <a:buNone/>
+            </a:pPr>
+            <a:r>
+              <a:rPr lang="en-US" sz="1220" dirty="0">
                 <a:solidFill>
                   <a:srgbClr val="17364A"/>
                 </a:solidFill>
@@ -15070,13 +15336,16 @@
                 <a:ea typeface="Aptos" pitchFamily="34" charset="-122"/>
                 <a:cs typeface="Aptos" pitchFamily="34" charset="-120"/>
               </a:rPr>
-              <a:t>Assess where human approval is required before an AI-triggered action occurs.</a:t>
-            </a:r>
-            <a:endParaRPr lang="en-US" sz="1380" dirty="0"/>
-          </a:p>
-          <a:p>
-            <a:r>
-              <a:rPr lang="en-US" sz="1380" dirty="0">
+              <a:t>Assess where human approval is required before an AI-triggered.</a:t>
+            </a:r>
+            <a:endParaRPr lang="en-US" sz="1220" dirty="0"/>
+          </a:p>
+          <a:p>
+            <a:pPr indent="0" marL="0">
+              <a:buNone/>
+            </a:pPr>
+            <a:r>
+              <a:rPr lang="en-US" sz="1220" dirty="0">
                 <a:solidFill>
                   <a:srgbClr val="17364A"/>
                 </a:solidFill>
@@ -15086,7 +15355,7 @@
               </a:rPr>
               <a:t>Produce an API and event workflow review worksheet.</a:t>
             </a:r>
-            <a:endParaRPr lang="en-US" sz="1380" dirty="0"/>
+            <a:endParaRPr lang="en-US" sz="1220" dirty="0"/>
           </a:p>
         </p:txBody>
       </p:sp>
@@ -15164,17 +15433,17 @@
         </p:nvSpPr>
         <p:spPr>
           <a:xfrm>
-            <a:off x="7799832" y="5001768"/>
-            <a:ext cx="3145536" cy="502920"/>
-          </a:xfrm>
-          <a:prstGeom prst="rect">
-            <a:avLst/>
-          </a:prstGeom>
-          <a:noFill/>
-          <a:ln/>
-        </p:spPr>
-        <p:txBody>
-          <a:bodyPr wrap="square" lIns="0" tIns="0" rIns="0" bIns="0" rtlCol="0" anchor="t">
+            <a:off x="7799832" y="4974336"/>
+            <a:ext cx="3145536" cy="576072"/>
+          </a:xfrm>
+          <a:prstGeom prst="rect">
+            <a:avLst/>
+          </a:prstGeom>
+          <a:noFill/>
+          <a:ln/>
+        </p:spPr>
+        <p:txBody>
+          <a:bodyPr wrap="square" lIns="254" tIns="254" rIns="254" bIns="254" rtlCol="0" anchor="t">
             <a:normAutofit/>
           </a:bodyPr>
           <a:lstStyle/>
@@ -15183,7 +15452,7 @@
               <a:buNone/>
             </a:pPr>
             <a:r>
-              <a:rPr lang="en-US" sz="1550" dirty="0">
+              <a:rPr lang="en-US" sz="1320" dirty="0">
                 <a:solidFill>
                   <a:srgbClr val="17364A"/>
                 </a:solidFill>
@@ -15191,9 +15460,9 @@
                 <a:ea typeface="Aptos" pitchFamily="34" charset="-122"/>
                 <a:cs typeface="Aptos" pitchFamily="34" charset="-120"/>
               </a:rPr>
-              <a:t>Use the assignment to test whether you can explain the concept, apply it to a realistic public health situation, and identify what would need review before the work moves forward.</a:t>
-            </a:r>
-            <a:endParaRPr lang="en-US" sz="1550" dirty="0"/>
+              <a:t>Use the assignment to test whether you can explain the concept, apply it to a realistic public health situation, and.</a:t>
+            </a:r>
+            <a:endParaRPr lang="en-US" sz="1320" dirty="0"/>
           </a:p>
         </p:txBody>
       </p:sp>
@@ -15494,49 +15763,58 @@
           <a:ln/>
         </p:spPr>
         <p:txBody>
-          <a:bodyPr wrap="square" lIns="635" tIns="635" rIns="635" bIns="635" rtlCol="0" anchor="t">
+          <a:bodyPr wrap="square" lIns="1016" tIns="1016" rIns="1016" bIns="1016" rtlCol="0" anchor="t">
             <a:normAutofit/>
           </a:bodyPr>
           <a:lstStyle/>
           <a:p>
+            <a:pPr indent="0" marL="0">
+              <a:buNone/>
+            </a:pPr>
             <a:r>
               <a:rPr lang="en-US" sz="2100" dirty="0">
                 <a:solidFill>
-                  <a:srgbClr val="17364A"/>
-                </a:solidFill>
-                <a:latin typeface="Aptos" pitchFamily="34" charset="0"/>
-                <a:ea typeface="Aptos" pitchFamily="34" charset="-122"/>
-                <a:cs typeface="Aptos" pitchFamily="34" charset="-120"/>
-              </a:rPr>
-              <a:t>APIs, webhooks, and event-driven workflows are the mechanisms that allow systems to interact.</a:t>
+                  <a:srgbClr val="003A63"/>
+                </a:solidFill>
+                <a:latin typeface="Aptos" pitchFamily="34" charset="0"/>
+                <a:ea typeface="Aptos" pitchFamily="34" charset="-122"/>
+                <a:cs typeface="Aptos" pitchFamily="34" charset="-120"/>
+              </a:rPr>
+              <a:t>• APIs, webhooks, and event-driven workflows are the mechanisms that allow systems to interact.</a:t>
             </a:r>
             <a:endParaRPr lang="en-US" sz="2100" dirty="0"/>
           </a:p>
           <a:p>
+            <a:pPr indent="0" marL="0">
+              <a:buNone/>
+            </a:pPr>
             <a:r>
               <a:rPr lang="en-US" sz="2100" dirty="0">
                 <a:solidFill>
-                  <a:srgbClr val="17364A"/>
-                </a:solidFill>
-                <a:latin typeface="Aptos" pitchFamily="34" charset="0"/>
-                <a:ea typeface="Aptos" pitchFamily="34" charset="-122"/>
-                <a:cs typeface="Aptos" pitchFamily="34" charset="-120"/>
-              </a:rPr>
-              <a:t>They are especially important for AI because many AI tools need to retrieve data, send notifications,.</a:t>
+                  <a:srgbClr val="003A63"/>
+                </a:solidFill>
+                <a:latin typeface="Aptos" pitchFamily="34" charset="0"/>
+                <a:ea typeface="Aptos" pitchFamily="34" charset="-122"/>
+                <a:cs typeface="Aptos" pitchFamily="34" charset="-120"/>
+              </a:rPr>
+              <a:t>• They are especially important for AI because many AI tools need to retrieve data, send.</a:t>
             </a:r>
             <a:endParaRPr lang="en-US" sz="2100" dirty="0"/>
           </a:p>
           <a:p>
+            <a:pPr indent="0" marL="0">
+              <a:buNone/>
+            </a:pPr>
             <a:r>
               <a:rPr lang="en-US" sz="2100" dirty="0">
                 <a:solidFill>
-                  <a:srgbClr val="17364A"/>
-                </a:solidFill>
-                <a:latin typeface="Aptos" pitchFamily="34" charset="0"/>
-                <a:ea typeface="Aptos" pitchFamily="34" charset="-122"/>
-                <a:cs typeface="Aptos" pitchFamily="34" charset="-120"/>
-              </a:rPr>
-              <a:t>This module teaches non-developer public health staff enough technical understanding to evaluate.</a:t>
+                  <a:srgbClr val="003A63"/>
+                </a:solidFill>
+                <a:latin typeface="Aptos" pitchFamily="34" charset="0"/>
+                <a:ea typeface="Aptos" pitchFamily="34" charset="-122"/>
+                <a:cs typeface="Aptos" pitchFamily="34" charset="-120"/>
+              </a:rPr>
+              <a:t>• This module teaches non-developer public health staff enough technical understanding to.</a:t>
             </a:r>
             <a:endParaRPr lang="en-US" sz="2100" dirty="0"/>
           </a:p>
@@ -15616,17 +15894,17 @@
         </p:nvSpPr>
         <p:spPr>
           <a:xfrm>
-            <a:off x="7799832" y="1828800"/>
-            <a:ext cx="3145536" cy="685800"/>
-          </a:xfrm>
-          <a:prstGeom prst="rect">
-            <a:avLst/>
-          </a:prstGeom>
-          <a:noFill/>
-          <a:ln/>
-        </p:spPr>
-        <p:txBody>
-          <a:bodyPr wrap="square" lIns="0" tIns="0" rIns="0" bIns="0" rtlCol="0" anchor="t">
+            <a:off x="7799832" y="1801368"/>
+            <a:ext cx="3145536" cy="758952"/>
+          </a:xfrm>
+          <a:prstGeom prst="rect">
+            <a:avLst/>
+          </a:prstGeom>
+          <a:noFill/>
+          <a:ln/>
+        </p:spPr>
+        <p:txBody>
+          <a:bodyPr wrap="square" lIns="254" tIns="254" rIns="254" bIns="254" rtlCol="0" anchor="t">
             <a:normAutofit/>
           </a:bodyPr>
           <a:lstStyle/>
@@ -15635,7 +15913,7 @@
               <a:buNone/>
             </a:pPr>
             <a:r>
-              <a:rPr lang="en-US" sz="1550" dirty="0">
+              <a:rPr lang="en-US" sz="1320" dirty="0">
                 <a:solidFill>
                   <a:srgbClr val="17364A"/>
                 </a:solidFill>
@@ -15645,7 +15923,7 @@
               </a:rPr>
               <a:t>APIs, webhooks, and event-driven workflows are the mechanisms that allow systems to interact.</a:t>
             </a:r>
-            <a:endParaRPr lang="en-US" sz="1550" dirty="0"/>
+            <a:endParaRPr lang="en-US" sz="1320" dirty="0"/>
           </a:p>
         </p:txBody>
       </p:sp>
@@ -15733,13 +16011,16 @@
           <a:ln/>
         </p:spPr>
         <p:txBody>
-          <a:bodyPr wrap="square" lIns="254" tIns="254" rIns="254" bIns="254" rtlCol="0" anchor="t">
+          <a:bodyPr wrap="square" lIns="508" tIns="508" rIns="508" bIns="508" rtlCol="0" anchor="t">
             <a:normAutofit/>
           </a:bodyPr>
           <a:lstStyle/>
           <a:p>
-            <a:r>
-              <a:rPr lang="en-US" sz="1380" dirty="0">
+            <a:pPr indent="0" marL="0">
+              <a:buNone/>
+            </a:pPr>
+            <a:r>
+              <a:rPr lang="en-US" sz="1220" dirty="0">
                 <a:solidFill>
                   <a:srgbClr val="17364A"/>
                 </a:solidFill>
@@ -15747,13 +16028,16 @@
                 <a:ea typeface="Aptos" pitchFamily="34" charset="-122"/>
                 <a:cs typeface="Aptos" pitchFamily="34" charset="-120"/>
               </a:rPr>
-              <a:t>They are especially important for AI because many AI tools need to retrieve data, send.</a:t>
-            </a:r>
-            <a:endParaRPr lang="en-US" sz="1380" dirty="0"/>
-          </a:p>
-          <a:p>
-            <a:r>
-              <a:rPr lang="en-US" sz="1380" dirty="0">
+              <a:t>They are especially important for AI because many AI tools need to.</a:t>
+            </a:r>
+            <a:endParaRPr lang="en-US" sz="1220" dirty="0"/>
+          </a:p>
+          <a:p>
+            <a:pPr indent="0" marL="0">
+              <a:buNone/>
+            </a:pPr>
+            <a:r>
+              <a:rPr lang="en-US" sz="1220" dirty="0">
                 <a:solidFill>
                   <a:srgbClr val="17364A"/>
                 </a:solidFill>
@@ -15761,9 +16045,9 @@
                 <a:ea typeface="Aptos" pitchFamily="34" charset="-122"/>
                 <a:cs typeface="Aptos" pitchFamily="34" charset="-120"/>
               </a:rPr>
-              <a:t>This module teaches non-developer public health staff enough technical understanding to.</a:t>
-            </a:r>
-            <a:endParaRPr lang="en-US" sz="1380" dirty="0"/>
+              <a:t>This module teaches non-developer public health staff enough.</a:t>
+            </a:r>
+            <a:endParaRPr lang="en-US" sz="1220" dirty="0"/>
           </a:p>
         </p:txBody>
       </p:sp>
@@ -15841,17 +16125,17 @@
         </p:nvSpPr>
         <p:spPr>
           <a:xfrm>
-            <a:off x="7799832" y="5001768"/>
-            <a:ext cx="3145536" cy="502920"/>
-          </a:xfrm>
-          <a:prstGeom prst="rect">
-            <a:avLst/>
-          </a:prstGeom>
-          <a:noFill/>
-          <a:ln/>
-        </p:spPr>
-        <p:txBody>
-          <a:bodyPr wrap="square" lIns="0" tIns="0" rIns="0" bIns="0" rtlCol="0" anchor="t">
+            <a:off x="7799832" y="4974336"/>
+            <a:ext cx="3145536" cy="576072"/>
+          </a:xfrm>
+          <a:prstGeom prst="rect">
+            <a:avLst/>
+          </a:prstGeom>
+          <a:noFill/>
+          <a:ln/>
+        </p:spPr>
+        <p:txBody>
+          <a:bodyPr wrap="square" lIns="254" tIns="254" rIns="254" bIns="254" rtlCol="0" anchor="t">
             <a:normAutofit/>
           </a:bodyPr>
           <a:lstStyle/>
@@ -15860,7 +16144,7 @@
               <a:buNone/>
             </a:pPr>
             <a:r>
-              <a:rPr lang="en-US" sz="1550" dirty="0">
+              <a:rPr lang="en-US" sz="1320" dirty="0">
                 <a:solidFill>
                   <a:srgbClr val="17364A"/>
                 </a:solidFill>
@@ -15868,9 +16152,9 @@
                 <a:ea typeface="Aptos" pitchFamily="34" charset="-122"/>
                 <a:cs typeface="Aptos" pitchFamily="34" charset="-120"/>
               </a:rPr>
-              <a:t>Use the concept to clarify workflow changes, dependencies, staffing, procurement requirements, training needs, and implementation checkpoints.</a:t>
-            </a:r>
-            <a:endParaRPr lang="en-US" sz="1550" dirty="0"/>
+              <a:t>Use the concept to clarify workflow changes, dependencies, staffing, procurement requirements, training needs, and.</a:t>
+            </a:r>
+            <a:endParaRPr lang="en-US" sz="1320" dirty="0"/>
           </a:p>
         </p:txBody>
       </p:sp>
@@ -16171,49 +16455,58 @@
           <a:ln/>
         </p:spPr>
         <p:txBody>
-          <a:bodyPr wrap="square" lIns="635" tIns="635" rIns="635" bIns="635" rtlCol="0" anchor="t">
+          <a:bodyPr wrap="square" lIns="1016" tIns="1016" rIns="1016" bIns="1016" rtlCol="0" anchor="t">
             <a:normAutofit/>
           </a:bodyPr>
           <a:lstStyle/>
           <a:p>
+            <a:pPr indent="0" marL="0">
+              <a:buNone/>
+            </a:pPr>
             <a:r>
               <a:rPr lang="en-US" sz="2100" dirty="0">
                 <a:solidFill>
-                  <a:srgbClr val="17364A"/>
-                </a:solidFill>
-                <a:latin typeface="Aptos" pitchFamily="34" charset="0"/>
-                <a:ea typeface="Aptos" pitchFamily="34" charset="-122"/>
-                <a:cs typeface="Aptos" pitchFamily="34" charset="-120"/>
-              </a:rPr>
-              <a:t>This national-level module is intended for training and planning purposes.</a:t>
+                  <a:srgbClr val="003A63"/>
+                </a:solidFill>
+                <a:latin typeface="Aptos" pitchFamily="34" charset="0"/>
+                <a:ea typeface="Aptos" pitchFamily="34" charset="-122"/>
+                <a:cs typeface="Aptos" pitchFamily="34" charset="-120"/>
+              </a:rPr>
+              <a:t>• This national-level module is intended for training and planning purposes.</a:t>
             </a:r>
             <a:endParaRPr lang="en-US" sz="2100" dirty="0"/>
           </a:p>
           <a:p>
+            <a:pPr indent="0" marL="0">
+              <a:buNone/>
+            </a:pPr>
             <a:r>
               <a:rPr lang="en-US" sz="2100" dirty="0">
                 <a:solidFill>
-                  <a:srgbClr val="17364A"/>
-                </a:solidFill>
-                <a:latin typeface="Aptos" pitchFamily="34" charset="0"/>
-                <a:ea typeface="Aptos" pitchFamily="34" charset="-122"/>
-                <a:cs typeface="Aptos" pitchFamily="34" charset="-120"/>
-              </a:rPr>
-              <a:t>It does not replace legal, privacy, procurement, civil rights, records, or agency policy review.</a:t>
+                  <a:srgbClr val="003A63"/>
+                </a:solidFill>
+                <a:latin typeface="Aptos" pitchFamily="34" charset="0"/>
+                <a:ea typeface="Aptos" pitchFamily="34" charset="-122"/>
+                <a:cs typeface="Aptos" pitchFamily="34" charset="-120"/>
+              </a:rPr>
+              <a:t>• It does not replace legal, privacy, procurement, civil rights, records, or agency policy review.</a:t>
             </a:r>
             <a:endParaRPr lang="en-US" sz="2100" dirty="0"/>
           </a:p>
           <a:p>
+            <a:pPr indent="0" marL="0">
+              <a:buNone/>
+            </a:pPr>
             <a:r>
               <a:rPr lang="en-US" sz="2100" dirty="0">
                 <a:solidFill>
-                  <a:srgbClr val="17364A"/>
-                </a:solidFill>
-                <a:latin typeface="Aptos" pitchFamily="34" charset="0"/>
-                <a:ea typeface="Aptos" pitchFamily="34" charset="-122"/>
-                <a:cs typeface="Aptos" pitchFamily="34" charset="-120"/>
-              </a:rPr>
-              <a:t>Learners should confirm applicable requirements in their own jurisdiction and organization before.</a:t>
+                  <a:srgbClr val="003A63"/>
+                </a:solidFill>
+                <a:latin typeface="Aptos" pitchFamily="34" charset="0"/>
+                <a:ea typeface="Aptos" pitchFamily="34" charset="-122"/>
+                <a:cs typeface="Aptos" pitchFamily="34" charset="-120"/>
+              </a:rPr>
+              <a:t>• Learners should confirm applicable requirements in their own jurisdiction and organization.</a:t>
             </a:r>
             <a:endParaRPr lang="en-US" sz="2100" dirty="0"/>
           </a:p>
@@ -16293,17 +16586,17 @@
         </p:nvSpPr>
         <p:spPr>
           <a:xfrm>
-            <a:off x="7799832" y="1828800"/>
-            <a:ext cx="3145536" cy="685800"/>
-          </a:xfrm>
-          <a:prstGeom prst="rect">
-            <a:avLst/>
-          </a:prstGeom>
-          <a:noFill/>
-          <a:ln/>
-        </p:spPr>
-        <p:txBody>
-          <a:bodyPr wrap="square" lIns="0" tIns="0" rIns="0" bIns="0" rtlCol="0" anchor="t">
+            <a:off x="7799832" y="1801368"/>
+            <a:ext cx="3145536" cy="758952"/>
+          </a:xfrm>
+          <a:prstGeom prst="rect">
+            <a:avLst/>
+          </a:prstGeom>
+          <a:noFill/>
+          <a:ln/>
+        </p:spPr>
+        <p:txBody>
+          <a:bodyPr wrap="square" lIns="254" tIns="254" rIns="254" bIns="254" rtlCol="0" anchor="t">
             <a:normAutofit/>
           </a:bodyPr>
           <a:lstStyle/>
@@ -16312,7 +16605,7 @@
               <a:buNone/>
             </a:pPr>
             <a:r>
-              <a:rPr lang="en-US" sz="1550" dirty="0">
+              <a:rPr lang="en-US" sz="1320" dirty="0">
                 <a:solidFill>
                   <a:srgbClr val="17364A"/>
                 </a:solidFill>
@@ -16322,7 +16615,7 @@
               </a:rPr>
               <a:t>This national-level module is intended for training and planning purposes.</a:t>
             </a:r>
-            <a:endParaRPr lang="en-US" sz="1550" dirty="0"/>
+            <a:endParaRPr lang="en-US" sz="1320" dirty="0"/>
           </a:p>
         </p:txBody>
       </p:sp>
@@ -16410,13 +16703,16 @@
           <a:ln/>
         </p:spPr>
         <p:txBody>
-          <a:bodyPr wrap="square" lIns="254" tIns="254" rIns="254" bIns="254" rtlCol="0" anchor="t">
+          <a:bodyPr wrap="square" lIns="508" tIns="508" rIns="508" bIns="508" rtlCol="0" anchor="t">
             <a:normAutofit/>
           </a:bodyPr>
           <a:lstStyle/>
           <a:p>
-            <a:r>
-              <a:rPr lang="en-US" sz="1380" dirty="0">
+            <a:pPr indent="0" marL="0">
+              <a:buNone/>
+            </a:pPr>
+            <a:r>
+              <a:rPr lang="en-US" sz="1220" dirty="0">
                 <a:solidFill>
                   <a:srgbClr val="17364A"/>
                 </a:solidFill>
@@ -16424,13 +16720,16 @@
                 <a:ea typeface="Aptos" pitchFamily="34" charset="-122"/>
                 <a:cs typeface="Aptos" pitchFamily="34" charset="-120"/>
               </a:rPr>
-              <a:t>This national-level module is intended for training and planning purposes.</a:t>
-            </a:r>
-            <a:endParaRPr lang="en-US" sz="1380" dirty="0"/>
-          </a:p>
-          <a:p>
-            <a:r>
-              <a:rPr lang="en-US" sz="1380" dirty="0">
+              <a:t>This national-level module is intended for training and planning.</a:t>
+            </a:r>
+            <a:endParaRPr lang="en-US" sz="1220" dirty="0"/>
+          </a:p>
+          <a:p>
+            <a:pPr indent="0" marL="0">
+              <a:buNone/>
+            </a:pPr>
+            <a:r>
+              <a:rPr lang="en-US" sz="1220" dirty="0">
                 <a:solidFill>
                   <a:srgbClr val="17364A"/>
                 </a:solidFill>
@@ -16438,13 +16737,16 @@
                 <a:ea typeface="Aptos" pitchFamily="34" charset="-122"/>
                 <a:cs typeface="Aptos" pitchFamily="34" charset="-120"/>
               </a:rPr>
-              <a:t>It does not replace legal, privacy, procurement, civil rights, records, or agency policy.</a:t>
-            </a:r>
-            <a:endParaRPr lang="en-US" sz="1380" dirty="0"/>
-          </a:p>
-          <a:p>
-            <a:r>
-              <a:rPr lang="en-US" sz="1380" dirty="0">
+              <a:t>It does not replace legal, privacy, procurement, civil rights,.</a:t>
+            </a:r>
+            <a:endParaRPr lang="en-US" sz="1220" dirty="0"/>
+          </a:p>
+          <a:p>
+            <a:pPr indent="0" marL="0">
+              <a:buNone/>
+            </a:pPr>
+            <a:r>
+              <a:rPr lang="en-US" sz="1220" dirty="0">
                 <a:solidFill>
                   <a:srgbClr val="17364A"/>
                 </a:solidFill>
@@ -16452,9 +16754,9 @@
                 <a:ea typeface="Aptos" pitchFamily="34" charset="-122"/>
                 <a:cs typeface="Aptos" pitchFamily="34" charset="-120"/>
               </a:rPr>
-              <a:t>Learners should confirm applicable requirements in their own jurisdiction and organization.</a:t>
-            </a:r>
-            <a:endParaRPr lang="en-US" sz="1380" dirty="0"/>
+              <a:t>Learners should confirm applicable requirements in their own.</a:t>
+            </a:r>
+            <a:endParaRPr lang="en-US" sz="1220" dirty="0"/>
           </a:p>
         </p:txBody>
       </p:sp>
@@ -16532,17 +16834,17 @@
         </p:nvSpPr>
         <p:spPr>
           <a:xfrm>
-            <a:off x="7799832" y="5001768"/>
-            <a:ext cx="3145536" cy="502920"/>
-          </a:xfrm>
-          <a:prstGeom prst="rect">
-            <a:avLst/>
-          </a:prstGeom>
-          <a:noFill/>
-          <a:ln/>
-        </p:spPr>
-        <p:txBody>
-          <a:bodyPr wrap="square" lIns="0" tIns="0" rIns="0" bIns="0" rtlCol="0" anchor="t">
+            <a:off x="7799832" y="4974336"/>
+            <a:ext cx="3145536" cy="576072"/>
+          </a:xfrm>
+          <a:prstGeom prst="rect">
+            <a:avLst/>
+          </a:prstGeom>
+          <a:noFill/>
+          <a:ln/>
+        </p:spPr>
+        <p:txBody>
+          <a:bodyPr wrap="square" lIns="254" tIns="254" rIns="254" bIns="254" rtlCol="0" anchor="t">
             <a:normAutofit/>
           </a:bodyPr>
           <a:lstStyle/>
@@ -16551,7 +16853,7 @@
               <a:buNone/>
             </a:pPr>
             <a:r>
-              <a:rPr lang="en-US" sz="1550" dirty="0">
+              <a:rPr lang="en-US" sz="1320" dirty="0">
                 <a:solidFill>
                   <a:srgbClr val="17364A"/>
                 </a:solidFill>
@@ -16559,9 +16861,9 @@
                 <a:ea typeface="Aptos" pitchFamily="34" charset="-122"/>
                 <a:cs typeface="Aptos" pitchFamily="34" charset="-120"/>
               </a:rPr>
-              <a:t>Translate this concept into clear decision rights, review steps, documentation expectations, and escalation paths before an AI-supported workflow is approved.</a:t>
-            </a:r>
-            <a:endParaRPr lang="en-US" sz="1550" dirty="0"/>
+              <a:t>Translate this concept into clear decision rights, review steps, documentation expectations, and escalation paths before.</a:t>
+            </a:r>
+            <a:endParaRPr lang="en-US" sz="1320" dirty="0"/>
           </a:p>
         </p:txBody>
       </p:sp>
@@ -16862,49 +17164,58 @@
           <a:ln/>
         </p:spPr>
         <p:txBody>
-          <a:bodyPr wrap="square" lIns="635" tIns="635" rIns="635" bIns="635" rtlCol="0" anchor="t">
+          <a:bodyPr wrap="square" lIns="1016" tIns="1016" rIns="1016" bIns="1016" rtlCol="0" anchor="t">
             <a:normAutofit/>
           </a:bodyPr>
           <a:lstStyle/>
           <a:p>
+            <a:pPr indent="0" marL="0">
+              <a:buNone/>
+            </a:pPr>
             <a:r>
               <a:rPr lang="en-US" sz="2100" dirty="0">
                 <a:solidFill>
-                  <a:srgbClr val="17364A"/>
-                </a:solidFill>
-                <a:latin typeface="Aptos" pitchFamily="34" charset="0"/>
-                <a:ea typeface="Aptos" pitchFamily="34" charset="-122"/>
-                <a:cs typeface="Aptos" pitchFamily="34" charset="-120"/>
-              </a:rPr>
-              <a:t>APIs can reduce manual work by allowing systems to exchange data directly.</a:t>
+                  <a:srgbClr val="003A63"/>
+                </a:solidFill>
+                <a:latin typeface="Aptos" pitchFamily="34" charset="0"/>
+                <a:ea typeface="Aptos" pitchFamily="34" charset="-122"/>
+                <a:cs typeface="Aptos" pitchFamily="34" charset="-120"/>
+              </a:rPr>
+              <a:t>• APIs can reduce manual work by allowing systems to exchange data directly.</a:t>
             </a:r>
             <a:endParaRPr lang="en-US" sz="2100" dirty="0"/>
           </a:p>
           <a:p>
+            <a:pPr indent="0" marL="0">
+              <a:buNone/>
+            </a:pPr>
             <a:r>
               <a:rPr lang="en-US" sz="2100" dirty="0">
                 <a:solidFill>
-                  <a:srgbClr val="17364A"/>
-                </a:solidFill>
-                <a:latin typeface="Aptos" pitchFamily="34" charset="0"/>
-                <a:ea typeface="Aptos" pitchFamily="34" charset="-122"/>
-                <a:cs typeface="Aptos" pitchFamily="34" charset="-120"/>
-              </a:rPr>
-              <a:t>In public health, APIs may retrieve case information, query FHIR resources, send status updates, create.</a:t>
+                  <a:srgbClr val="003A63"/>
+                </a:solidFill>
+                <a:latin typeface="Aptos" pitchFamily="34" charset="0"/>
+                <a:ea typeface="Aptos" pitchFamily="34" charset="-122"/>
+                <a:cs typeface="Aptos" pitchFamily="34" charset="-120"/>
+              </a:rPr>
+              <a:t>• In public health, APIs may retrieve case information, query FHIR resources, send status.</a:t>
             </a:r>
             <a:endParaRPr lang="en-US" sz="2100" dirty="0"/>
           </a:p>
           <a:p>
+            <a:pPr indent="0" marL="0">
+              <a:buNone/>
+            </a:pPr>
             <a:r>
               <a:rPr lang="en-US" sz="2100" dirty="0">
                 <a:solidFill>
-                  <a:srgbClr val="17364A"/>
-                </a:solidFill>
-                <a:latin typeface="Aptos" pitchFamily="34" charset="0"/>
-                <a:ea typeface="Aptos" pitchFamily="34" charset="-122"/>
-                <a:cs typeface="Aptos" pitchFamily="34" charset="-120"/>
-              </a:rPr>
-              <a:t>Webhooks can notify a system when a defined event occurs, such as receipt of a new lab result or change.</a:t>
+                  <a:srgbClr val="003A63"/>
+                </a:solidFill>
+                <a:latin typeface="Aptos" pitchFamily="34" charset="0"/>
+                <a:ea typeface="Aptos" pitchFamily="34" charset="-122"/>
+                <a:cs typeface="Aptos" pitchFamily="34" charset="-120"/>
+              </a:rPr>
+              <a:t>• Webhooks can notify a system when a defined event occurs, such as receipt of a new lab result.</a:t>
             </a:r>
             <a:endParaRPr lang="en-US" sz="2100" dirty="0"/>
           </a:p>
@@ -16984,17 +17295,17 @@
         </p:nvSpPr>
         <p:spPr>
           <a:xfrm>
-            <a:off x="7799832" y="1828800"/>
-            <a:ext cx="3145536" cy="685800"/>
-          </a:xfrm>
-          <a:prstGeom prst="rect">
-            <a:avLst/>
-          </a:prstGeom>
-          <a:noFill/>
-          <a:ln/>
-        </p:spPr>
-        <p:txBody>
-          <a:bodyPr wrap="square" lIns="0" tIns="0" rIns="0" bIns="0" rtlCol="0" anchor="t">
+            <a:off x="7799832" y="1801368"/>
+            <a:ext cx="3145536" cy="758952"/>
+          </a:xfrm>
+          <a:prstGeom prst="rect">
+            <a:avLst/>
+          </a:prstGeom>
+          <a:noFill/>
+          <a:ln/>
+        </p:spPr>
+        <p:txBody>
+          <a:bodyPr wrap="square" lIns="254" tIns="254" rIns="254" bIns="254" rtlCol="0" anchor="t">
             <a:normAutofit/>
           </a:bodyPr>
           <a:lstStyle/>
@@ -17003,7 +17314,7 @@
               <a:buNone/>
             </a:pPr>
             <a:r>
-              <a:rPr lang="en-US" sz="1550" dirty="0">
+              <a:rPr lang="en-US" sz="1320" dirty="0">
                 <a:solidFill>
                   <a:srgbClr val="17364A"/>
                 </a:solidFill>
@@ -17013,7 +17324,7 @@
               </a:rPr>
               <a:t>APIs can reduce manual work by allowing systems to exchange data directly.</a:t>
             </a:r>
-            <a:endParaRPr lang="en-US" sz="1550" dirty="0"/>
+            <a:endParaRPr lang="en-US" sz="1320" dirty="0"/>
           </a:p>
         </p:txBody>
       </p:sp>
@@ -17101,13 +17412,16 @@
           <a:ln/>
         </p:spPr>
         <p:txBody>
-          <a:bodyPr wrap="square" lIns="254" tIns="254" rIns="254" bIns="254" rtlCol="0" anchor="t">
+          <a:bodyPr wrap="square" lIns="508" tIns="508" rIns="508" bIns="508" rtlCol="0" anchor="t">
             <a:normAutofit/>
           </a:bodyPr>
           <a:lstStyle/>
           <a:p>
-            <a:r>
-              <a:rPr lang="en-US" sz="1380" dirty="0">
+            <a:pPr indent="0" marL="0">
+              <a:buNone/>
+            </a:pPr>
+            <a:r>
+              <a:rPr lang="en-US" sz="1220" dirty="0">
                 <a:solidFill>
                   <a:srgbClr val="17364A"/>
                 </a:solidFill>
@@ -17115,13 +17429,16 @@
                 <a:ea typeface="Aptos" pitchFamily="34" charset="-122"/>
                 <a:cs typeface="Aptos" pitchFamily="34" charset="-120"/>
               </a:rPr>
-              <a:t>In public health, APIs may retrieve case information, query FHIR resources, send status.</a:t>
-            </a:r>
-            <a:endParaRPr lang="en-US" sz="1380" dirty="0"/>
-          </a:p>
-          <a:p>
-            <a:r>
-              <a:rPr lang="en-US" sz="1380" dirty="0">
+              <a:t>In public health, APIs may retrieve case information, query FHIR.</a:t>
+            </a:r>
+            <a:endParaRPr lang="en-US" sz="1220" dirty="0"/>
+          </a:p>
+          <a:p>
+            <a:pPr indent="0" marL="0">
+              <a:buNone/>
+            </a:pPr>
+            <a:r>
+              <a:rPr lang="en-US" sz="1220" dirty="0">
                 <a:solidFill>
                   <a:srgbClr val="17364A"/>
                 </a:solidFill>
@@ -17129,13 +17446,16 @@
                 <a:ea typeface="Aptos" pitchFamily="34" charset="-122"/>
                 <a:cs typeface="Aptos" pitchFamily="34" charset="-120"/>
               </a:rPr>
-              <a:t>Webhooks can notify a system when a defined event occurs, such as receipt of a new lab.</a:t>
-            </a:r>
-            <a:endParaRPr lang="en-US" sz="1380" dirty="0"/>
-          </a:p>
-          <a:p>
-            <a:r>
-              <a:rPr lang="en-US" sz="1380" dirty="0">
+              <a:t>Webhooks can notify a system when a defined event occurs, such as.</a:t>
+            </a:r>
+            <a:endParaRPr lang="en-US" sz="1220" dirty="0"/>
+          </a:p>
+          <a:p>
+            <a:pPr indent="0" marL="0">
+              <a:buNone/>
+            </a:pPr>
+            <a:r>
+              <a:rPr lang="en-US" sz="1220" dirty="0">
                 <a:solidFill>
                   <a:srgbClr val="17364A"/>
                 </a:solidFill>
@@ -17143,9 +17463,9 @@
                 <a:ea typeface="Aptos" pitchFamily="34" charset="-122"/>
                 <a:cs typeface="Aptos" pitchFamily="34" charset="-120"/>
               </a:rPr>
-              <a:t>Event-driven workflows can help public health teams respond faster, but they also require.</a:t>
-            </a:r>
-            <a:endParaRPr lang="en-US" sz="1380" dirty="0"/>
+              <a:t>Event-driven workflows can help public health teams respond.</a:t>
+            </a:r>
+            <a:endParaRPr lang="en-US" sz="1220" dirty="0"/>
           </a:p>
         </p:txBody>
       </p:sp>
@@ -17223,17 +17543,17 @@
         </p:nvSpPr>
         <p:spPr>
           <a:xfrm>
-            <a:off x="7799832" y="5001768"/>
-            <a:ext cx="3145536" cy="502920"/>
-          </a:xfrm>
-          <a:prstGeom prst="rect">
-            <a:avLst/>
-          </a:prstGeom>
-          <a:noFill/>
-          <a:ln/>
-        </p:spPr>
-        <p:txBody>
-          <a:bodyPr wrap="square" lIns="0" tIns="0" rIns="0" bIns="0" rtlCol="0" anchor="t">
+            <a:off x="7799832" y="4974336"/>
+            <a:ext cx="3145536" cy="576072"/>
+          </a:xfrm>
+          <a:prstGeom prst="rect">
+            <a:avLst/>
+          </a:prstGeom>
+          <a:noFill/>
+          <a:ln/>
+        </p:spPr>
+        <p:txBody>
+          <a:bodyPr wrap="square" lIns="254" tIns="254" rIns="254" bIns="254" rtlCol="0" anchor="t">
             <a:normAutofit/>
           </a:bodyPr>
           <a:lstStyle/>
@@ -17242,7 +17562,7 @@
               <a:buNone/>
             </a:pPr>
             <a:r>
-              <a:rPr lang="en-US" sz="1550" dirty="0">
+              <a:rPr lang="en-US" sz="1320" dirty="0">
                 <a:solidFill>
                   <a:srgbClr val="17364A"/>
                 </a:solidFill>
@@ -17250,9 +17570,9 @@
                 <a:ea typeface="Aptos" pitchFamily="34" charset="-122"/>
                 <a:cs typeface="Aptos" pitchFamily="34" charset="-120"/>
               </a:rPr>
-              <a:t>Use the concept to clarify workflow changes, dependencies, staffing, procurement requirements, training needs, and implementation checkpoints.</a:t>
-            </a:r>
-            <a:endParaRPr lang="en-US" sz="1550" dirty="0"/>
+              <a:t>Use the concept to clarify workflow changes, dependencies, staffing, procurement requirements, training needs, and.</a:t>
+            </a:r>
+            <a:endParaRPr lang="en-US" sz="1320" dirty="0"/>
           </a:p>
         </p:txBody>
       </p:sp>
@@ -17553,49 +17873,58 @@
           <a:ln/>
         </p:spPr>
         <p:txBody>
-          <a:bodyPr wrap="square" lIns="635" tIns="635" rIns="635" bIns="635" rtlCol="0" anchor="t">
+          <a:bodyPr wrap="square" lIns="1016" tIns="1016" rIns="1016" bIns="1016" rtlCol="0" anchor="t">
             <a:normAutofit/>
           </a:bodyPr>
           <a:lstStyle/>
           <a:p>
+            <a:pPr indent="0" marL="0">
+              <a:buNone/>
+            </a:pPr>
             <a:r>
               <a:rPr lang="en-US" sz="2100" dirty="0">
                 <a:solidFill>
-                  <a:srgbClr val="17364A"/>
-                </a:solidFill>
-                <a:latin typeface="Aptos" pitchFamily="34" charset="0"/>
-                <a:ea typeface="Aptos" pitchFamily="34" charset="-122"/>
-                <a:cs typeface="Aptos" pitchFamily="34" charset="-120"/>
-              </a:rPr>
-              <a:t>API.</a:t>
+                  <a:srgbClr val="003A63"/>
+                </a:solidFill>
+                <a:latin typeface="Aptos" pitchFamily="34" charset="0"/>
+                <a:ea typeface="Aptos" pitchFamily="34" charset="-122"/>
+                <a:cs typeface="Aptos" pitchFamily="34" charset="-120"/>
+              </a:rPr>
+              <a:t>• API.</a:t>
             </a:r>
             <a:endParaRPr lang="en-US" sz="2100" dirty="0"/>
           </a:p>
           <a:p>
+            <a:pPr indent="0" marL="0">
+              <a:buNone/>
+            </a:pPr>
             <a:r>
               <a:rPr lang="en-US" sz="2100" dirty="0">
                 <a:solidFill>
-                  <a:srgbClr val="17364A"/>
-                </a:solidFill>
-                <a:latin typeface="Aptos" pitchFamily="34" charset="0"/>
-                <a:ea typeface="Aptos" pitchFamily="34" charset="-122"/>
-                <a:cs typeface="Aptos" pitchFamily="34" charset="-120"/>
-              </a:rPr>
-              <a:t>An application programming interface allows one system to request data or services from another system.</a:t>
+                  <a:srgbClr val="003A63"/>
+                </a:solidFill>
+                <a:latin typeface="Aptos" pitchFamily="34" charset="0"/>
+                <a:ea typeface="Aptos" pitchFamily="34" charset="-122"/>
+                <a:cs typeface="Aptos" pitchFamily="34" charset="-120"/>
+              </a:rPr>
+              <a:t>• An application programming interface allows one system to request data or services from.</a:t>
             </a:r>
             <a:endParaRPr lang="en-US" sz="2100" dirty="0"/>
           </a:p>
           <a:p>
+            <a:pPr indent="0" marL="0">
+              <a:buNone/>
+            </a:pPr>
             <a:r>
               <a:rPr lang="en-US" sz="2100" dirty="0">
                 <a:solidFill>
-                  <a:srgbClr val="17364A"/>
-                </a:solidFill>
-                <a:latin typeface="Aptos" pitchFamily="34" charset="0"/>
-                <a:ea typeface="Aptos" pitchFamily="34" charset="-122"/>
-                <a:cs typeface="Aptos" pitchFamily="34" charset="-120"/>
-              </a:rPr>
-              <a:t>APIs are useful for structured exchange, but they must be governed through authentication,.</a:t>
+                  <a:srgbClr val="003A63"/>
+                </a:solidFill>
+                <a:latin typeface="Aptos" pitchFamily="34" charset="0"/>
+                <a:ea typeface="Aptos" pitchFamily="34" charset="-122"/>
+                <a:cs typeface="Aptos" pitchFamily="34" charset="-120"/>
+              </a:rPr>
+              <a:t>• APIs are useful for structured exchange, but they must be governed through authentication,.</a:t>
             </a:r>
             <a:endParaRPr lang="en-US" sz="2100" dirty="0"/>
           </a:p>
@@ -17675,17 +18004,17 @@
         </p:nvSpPr>
         <p:spPr>
           <a:xfrm>
-            <a:off x="7799832" y="1828800"/>
-            <a:ext cx="3145536" cy="685800"/>
-          </a:xfrm>
-          <a:prstGeom prst="rect">
-            <a:avLst/>
-          </a:prstGeom>
-          <a:noFill/>
-          <a:ln/>
-        </p:spPr>
-        <p:txBody>
-          <a:bodyPr wrap="square" lIns="0" tIns="0" rIns="0" bIns="0" rtlCol="0" anchor="t">
+            <a:off x="7799832" y="1801368"/>
+            <a:ext cx="3145536" cy="758952"/>
+          </a:xfrm>
+          <a:prstGeom prst="rect">
+            <a:avLst/>
+          </a:prstGeom>
+          <a:noFill/>
+          <a:ln/>
+        </p:spPr>
+        <p:txBody>
+          <a:bodyPr wrap="square" lIns="254" tIns="254" rIns="254" bIns="254" rtlCol="0" anchor="t">
             <a:normAutofit/>
           </a:bodyPr>
           <a:lstStyle/>
@@ -17694,7 +18023,7 @@
               <a:buNone/>
             </a:pPr>
             <a:r>
-              <a:rPr lang="en-US" sz="1550" dirty="0">
+              <a:rPr lang="en-US" sz="1320" dirty="0">
                 <a:solidFill>
                   <a:srgbClr val="17364A"/>
                 </a:solidFill>
@@ -17704,7 +18033,7 @@
               </a:rPr>
               <a:t>API.</a:t>
             </a:r>
-            <a:endParaRPr lang="en-US" sz="1550" dirty="0"/>
+            <a:endParaRPr lang="en-US" sz="1320" dirty="0"/>
           </a:p>
         </p:txBody>
       </p:sp>
@@ -17792,13 +18121,16 @@
           <a:ln/>
         </p:spPr>
         <p:txBody>
-          <a:bodyPr wrap="square" lIns="254" tIns="254" rIns="254" bIns="254" rtlCol="0" anchor="t">
+          <a:bodyPr wrap="square" lIns="508" tIns="508" rIns="508" bIns="508" rtlCol="0" anchor="t">
             <a:normAutofit/>
           </a:bodyPr>
           <a:lstStyle/>
           <a:p>
-            <a:r>
-              <a:rPr lang="en-US" sz="1380" dirty="0">
+            <a:pPr indent="0" marL="0">
+              <a:buNone/>
+            </a:pPr>
+            <a:r>
+              <a:rPr lang="en-US" sz="1220" dirty="0">
                 <a:solidFill>
                   <a:srgbClr val="17364A"/>
                 </a:solidFill>
@@ -17806,13 +18138,16 @@
                 <a:ea typeface="Aptos" pitchFamily="34" charset="-122"/>
                 <a:cs typeface="Aptos" pitchFamily="34" charset="-120"/>
               </a:rPr>
-              <a:t>APIs are useful for structured exchange, but they must be governed through authentication,.</a:t>
-            </a:r>
-            <a:endParaRPr lang="en-US" sz="1380" dirty="0"/>
-          </a:p>
-          <a:p>
-            <a:r>
-              <a:rPr lang="en-US" sz="1380" dirty="0">
+              <a:t>APIs are useful for structured exchange, but they must be governed.</a:t>
+            </a:r>
+            <a:endParaRPr lang="en-US" sz="1220" dirty="0"/>
+          </a:p>
+          <a:p>
+            <a:pPr indent="0" marL="0">
+              <a:buNone/>
+            </a:pPr>
+            <a:r>
+              <a:rPr lang="en-US" sz="1220" dirty="0">
                 <a:solidFill>
                   <a:srgbClr val="17364A"/>
                 </a:solidFill>
@@ -17822,11 +18157,14 @@
               </a:rPr>
               <a:t>Webhook.</a:t>
             </a:r>
-            <a:endParaRPr lang="en-US" sz="1380" dirty="0"/>
-          </a:p>
-          <a:p>
-            <a:r>
-              <a:rPr lang="en-US" sz="1380" dirty="0">
+            <a:endParaRPr lang="en-US" sz="1220" dirty="0"/>
+          </a:p>
+          <a:p>
+            <a:pPr indent="0" marL="0">
+              <a:buNone/>
+            </a:pPr>
+            <a:r>
+              <a:rPr lang="en-US" sz="1220" dirty="0">
                 <a:solidFill>
                   <a:srgbClr val="17364A"/>
                 </a:solidFill>
@@ -17834,9 +18172,9 @@
                 <a:ea typeface="Aptos" pitchFamily="34" charset="-122"/>
                 <a:cs typeface="Aptos" pitchFamily="34" charset="-120"/>
               </a:rPr>
-              <a:t>A webhook sends information automatically when a defined event occurs.</a:t>
-            </a:r>
-            <a:endParaRPr lang="en-US" sz="1380" dirty="0"/>
+              <a:t>A webhook sends information automatically when a defined event.</a:t>
+            </a:r>
+            <a:endParaRPr lang="en-US" sz="1220" dirty="0"/>
           </a:p>
         </p:txBody>
       </p:sp>
@@ -17914,17 +18252,17 @@
         </p:nvSpPr>
         <p:spPr>
           <a:xfrm>
-            <a:off x="7799832" y="5001768"/>
-            <a:ext cx="3145536" cy="502920"/>
-          </a:xfrm>
-          <a:prstGeom prst="rect">
-            <a:avLst/>
-          </a:prstGeom>
-          <a:noFill/>
-          <a:ln/>
-        </p:spPr>
-        <p:txBody>
-          <a:bodyPr wrap="square" lIns="0" tIns="0" rIns="0" bIns="0" rtlCol="0" anchor="t">
+            <a:off x="7799832" y="4974336"/>
+            <a:ext cx="3145536" cy="576072"/>
+          </a:xfrm>
+          <a:prstGeom prst="rect">
+            <a:avLst/>
+          </a:prstGeom>
+          <a:noFill/>
+          <a:ln/>
+        </p:spPr>
+        <p:txBody>
+          <a:bodyPr wrap="square" lIns="254" tIns="254" rIns="254" bIns="254" rtlCol="0" anchor="t">
             <a:normAutofit/>
           </a:bodyPr>
           <a:lstStyle/>
@@ -17933,7 +18271,7 @@
               <a:buNone/>
             </a:pPr>
             <a:r>
-              <a:rPr lang="en-US" sz="1550" dirty="0">
+              <a:rPr lang="en-US" sz="1320" dirty="0">
                 <a:solidFill>
                   <a:srgbClr val="17364A"/>
                 </a:solidFill>
@@ -17941,9 +18279,9 @@
                 <a:ea typeface="Aptos" pitchFamily="34" charset="-122"/>
                 <a:cs typeface="Aptos" pitchFamily="34" charset="-120"/>
               </a:rPr>
-              <a:t>Use the concept to clarify workflow changes, dependencies, staffing, procurement requirements, training needs, and implementation checkpoints.</a:t>
-            </a:r>
-            <a:endParaRPr lang="en-US" sz="1550" dirty="0"/>
+              <a:t>Use the concept to clarify workflow changes, dependencies, staffing, procurement requirements, training needs, and.</a:t>
+            </a:r>
+            <a:endParaRPr lang="en-US" sz="1320" dirty="0"/>
           </a:p>
         </p:txBody>
       </p:sp>

--- a/downloads/presentations/modules/arc-260.pptx
+++ b/downloads/presentations/modules/arc-260.pptx
@@ -3507,11 +3507,11 @@
         <p:spPr>
           <a:xfrm>
             <a:off x="7635240" y="1325880"/>
-            <a:ext cx="3474720" cy="1325880"/>
+            <a:ext cx="3474720" cy="1207008"/>
           </a:xfrm>
           <a:prstGeom prst="roundRect">
             <a:avLst>
-              <a:gd name="adj" fmla="val 8276"/>
+              <a:gd name="adj" fmla="val 9091"/>
             </a:avLst>
           </a:prstGeom>
           <a:solidFill>
@@ -3573,7 +3573,7 @@
         <p:spPr>
           <a:xfrm>
             <a:off x="7799832" y="1801368"/>
-            <a:ext cx="3145536" cy="758952"/>
+            <a:ext cx="3145536" cy="640080"/>
           </a:xfrm>
           <a:prstGeom prst="rect">
             <a:avLst/>
@@ -3613,12 +3613,12 @@
         </p:nvSpPr>
         <p:spPr>
           <a:xfrm>
-            <a:off x="7635240" y="2788920"/>
-            <a:ext cx="3474720" cy="1536192"/>
+            <a:off x="7635240" y="2670048"/>
+            <a:ext cx="3474720" cy="1377086"/>
           </a:xfrm>
           <a:prstGeom prst="roundRect">
             <a:avLst>
-              <a:gd name="adj" fmla="val 7143"/>
+              <a:gd name="adj" fmla="val 7968"/>
             </a:avLst>
           </a:prstGeom>
           <a:solidFill>
@@ -3640,7 +3640,7 @@
         </p:nvSpPr>
         <p:spPr>
           <a:xfrm>
-            <a:off x="7799832" y="2935224"/>
+            <a:off x="7799832" y="2816352"/>
             <a:ext cx="3145536" cy="256032"/>
           </a:xfrm>
           <a:prstGeom prst="rect">
@@ -3679,8 +3679,8 @@
         </p:nvSpPr>
         <p:spPr>
           <a:xfrm>
-            <a:off x="7818120" y="3300984"/>
-            <a:ext cx="3090672" cy="877824"/>
+            <a:off x="7818120" y="3182112"/>
+            <a:ext cx="3090672" cy="718718"/>
           </a:xfrm>
           <a:prstGeom prst="rect">
             <a:avLst/>
@@ -3754,12 +3754,12 @@
         </p:nvSpPr>
         <p:spPr>
           <a:xfrm>
-            <a:off x="7635240" y="4498848"/>
-            <a:ext cx="3474720" cy="1143000"/>
+            <a:off x="7635240" y="4184294"/>
+            <a:ext cx="3474720" cy="1466698"/>
           </a:xfrm>
           <a:prstGeom prst="roundRect">
             <a:avLst>
-              <a:gd name="adj" fmla="val 9600"/>
+              <a:gd name="adj" fmla="val 7481"/>
             </a:avLst>
           </a:prstGeom>
           <a:solidFill>
@@ -3781,7 +3781,7 @@
         </p:nvSpPr>
         <p:spPr>
           <a:xfrm>
-            <a:off x="7799832" y="4645152"/>
+            <a:off x="7799832" y="4330598"/>
             <a:ext cx="3145536" cy="256032"/>
           </a:xfrm>
           <a:prstGeom prst="rect">
@@ -3820,8 +3820,8 @@
         </p:nvSpPr>
         <p:spPr>
           <a:xfrm>
-            <a:off x="7799832" y="4974336"/>
-            <a:ext cx="3145536" cy="576072"/>
+            <a:off x="7799832" y="4659782"/>
+            <a:ext cx="3145536" cy="899770"/>
           </a:xfrm>
           <a:prstGeom prst="rect">
             <a:avLst/>
@@ -3847,7 +3847,7 @@
                 <a:ea typeface="Aptos" pitchFamily="34" charset="-122"/>
                 <a:cs typeface="Aptos" pitchFamily="34" charset="-120"/>
               </a:rPr>
-              <a:t>Use the concept to clarify workflow changes, dependencies, staffing, procurement requirements, training needs, and.</a:t>
+              <a:t>Use the concept to clarify workflow changes, dependencies, staffing, procurement requirements, training needs, and implementation checkpoints.</a:t>
             </a:r>
             <a:endParaRPr lang="en-US" sz="1320" dirty="0"/>
           </a:p>
@@ -4216,11 +4216,11 @@
         <p:spPr>
           <a:xfrm>
             <a:off x="7635240" y="1325880"/>
-            <a:ext cx="3474720" cy="1325880"/>
+            <a:ext cx="3474720" cy="1255471"/>
           </a:xfrm>
           <a:prstGeom prst="roundRect">
             <a:avLst>
-              <a:gd name="adj" fmla="val 8276"/>
+              <a:gd name="adj" fmla="val 8740"/>
             </a:avLst>
           </a:prstGeom>
           <a:solidFill>
@@ -4282,7 +4282,7 @@
         <p:spPr>
           <a:xfrm>
             <a:off x="7799832" y="1801368"/>
-            <a:ext cx="3145536" cy="758952"/>
+            <a:ext cx="3145536" cy="688543"/>
           </a:xfrm>
           <a:prstGeom prst="rect">
             <a:avLst/>
@@ -4322,12 +4322,12 @@
         </p:nvSpPr>
         <p:spPr>
           <a:xfrm>
-            <a:off x="7635240" y="2788920"/>
-            <a:ext cx="3474720" cy="1536192"/>
+            <a:off x="7635240" y="2718511"/>
+            <a:ext cx="3474720" cy="1328623"/>
           </a:xfrm>
           <a:prstGeom prst="roundRect">
             <a:avLst>
-              <a:gd name="adj" fmla="val 7143"/>
+              <a:gd name="adj" fmla="val 8259"/>
             </a:avLst>
           </a:prstGeom>
           <a:solidFill>
@@ -4349,7 +4349,7 @@
         </p:nvSpPr>
         <p:spPr>
           <a:xfrm>
-            <a:off x="7799832" y="2935224"/>
+            <a:off x="7799832" y="2864815"/>
             <a:ext cx="3145536" cy="256032"/>
           </a:xfrm>
           <a:prstGeom prst="rect">
@@ -4388,8 +4388,8 @@
         </p:nvSpPr>
         <p:spPr>
           <a:xfrm>
-            <a:off x="7818120" y="3300984"/>
-            <a:ext cx="3090672" cy="877824"/>
+            <a:off x="7818120" y="3230575"/>
+            <a:ext cx="3090672" cy="670255"/>
           </a:xfrm>
           <a:prstGeom prst="rect">
             <a:avLst/>
@@ -4463,12 +4463,12 @@
         </p:nvSpPr>
         <p:spPr>
           <a:xfrm>
-            <a:off x="7635240" y="4498848"/>
-            <a:ext cx="3474720" cy="1143000"/>
+            <a:off x="7635240" y="4184294"/>
+            <a:ext cx="3474720" cy="1466698"/>
           </a:xfrm>
           <a:prstGeom prst="roundRect">
             <a:avLst>
-              <a:gd name="adj" fmla="val 9600"/>
+              <a:gd name="adj" fmla="val 7481"/>
             </a:avLst>
           </a:prstGeom>
           <a:solidFill>
@@ -4490,7 +4490,7 @@
         </p:nvSpPr>
         <p:spPr>
           <a:xfrm>
-            <a:off x="7799832" y="4645152"/>
+            <a:off x="7799832" y="4330598"/>
             <a:ext cx="3145536" cy="256032"/>
           </a:xfrm>
           <a:prstGeom prst="rect">
@@ -4529,8 +4529,8 @@
         </p:nvSpPr>
         <p:spPr>
           <a:xfrm>
-            <a:off x="7799832" y="4974336"/>
-            <a:ext cx="3145536" cy="576072"/>
+            <a:off x="7799832" y="4659782"/>
+            <a:ext cx="3145536" cy="899770"/>
           </a:xfrm>
           <a:prstGeom prst="rect">
             <a:avLst/>
@@ -4556,7 +4556,7 @@
                 <a:ea typeface="Aptos" pitchFamily="34" charset="-122"/>
                 <a:cs typeface="Aptos" pitchFamily="34" charset="-120"/>
               </a:rPr>
-              <a:t>Use the concept to clarify workflow changes, dependencies, staffing, procurement requirements, training needs, and.</a:t>
+              <a:t>Use the concept to clarify workflow changes, dependencies, staffing, procurement requirements, training needs, and implementation checkpoints.</a:t>
             </a:r>
             <a:endParaRPr lang="en-US" sz="1320" dirty="0"/>
           </a:p>
@@ -4925,11 +4925,11 @@
         <p:spPr>
           <a:xfrm>
             <a:off x="7635240" y="1325880"/>
-            <a:ext cx="3474720" cy="1325880"/>
+            <a:ext cx="3474720" cy="1207008"/>
           </a:xfrm>
           <a:prstGeom prst="roundRect">
             <a:avLst>
-              <a:gd name="adj" fmla="val 8276"/>
+              <a:gd name="adj" fmla="val 9091"/>
             </a:avLst>
           </a:prstGeom>
           <a:solidFill>
@@ -4991,7 +4991,7 @@
         <p:spPr>
           <a:xfrm>
             <a:off x="7799832" y="1801368"/>
-            <a:ext cx="3145536" cy="758952"/>
+            <a:ext cx="3145536" cy="640080"/>
           </a:xfrm>
           <a:prstGeom prst="rect">
             <a:avLst/>
@@ -5031,12 +5031,12 @@
         </p:nvSpPr>
         <p:spPr>
           <a:xfrm>
-            <a:off x="7635240" y="2788920"/>
-            <a:ext cx="3474720" cy="1536192"/>
+            <a:off x="7635240" y="2670048"/>
+            <a:ext cx="3474720" cy="1377086"/>
           </a:xfrm>
           <a:prstGeom prst="roundRect">
             <a:avLst>
-              <a:gd name="adj" fmla="val 7143"/>
+              <a:gd name="adj" fmla="val 7968"/>
             </a:avLst>
           </a:prstGeom>
           <a:solidFill>
@@ -5058,7 +5058,7 @@
         </p:nvSpPr>
         <p:spPr>
           <a:xfrm>
-            <a:off x="7799832" y="2935224"/>
+            <a:off x="7799832" y="2816352"/>
             <a:ext cx="3145536" cy="256032"/>
           </a:xfrm>
           <a:prstGeom prst="rect">
@@ -5097,8 +5097,8 @@
         </p:nvSpPr>
         <p:spPr>
           <a:xfrm>
-            <a:off x="7818120" y="3300984"/>
-            <a:ext cx="3090672" cy="877824"/>
+            <a:off x="7818120" y="3182112"/>
+            <a:ext cx="3090672" cy="718718"/>
           </a:xfrm>
           <a:prstGeom prst="rect">
             <a:avLst/>
@@ -5172,12 +5172,12 @@
         </p:nvSpPr>
         <p:spPr>
           <a:xfrm>
-            <a:off x="7635240" y="4498848"/>
-            <a:ext cx="3474720" cy="1143000"/>
+            <a:off x="7635240" y="4184294"/>
+            <a:ext cx="3474720" cy="1466698"/>
           </a:xfrm>
           <a:prstGeom prst="roundRect">
             <a:avLst>
-              <a:gd name="adj" fmla="val 9600"/>
+              <a:gd name="adj" fmla="val 7481"/>
             </a:avLst>
           </a:prstGeom>
           <a:solidFill>
@@ -5199,7 +5199,7 @@
         </p:nvSpPr>
         <p:spPr>
           <a:xfrm>
-            <a:off x="7799832" y="4645152"/>
+            <a:off x="7799832" y="4330598"/>
             <a:ext cx="3145536" cy="256032"/>
           </a:xfrm>
           <a:prstGeom prst="rect">
@@ -5238,8 +5238,8 @@
         </p:nvSpPr>
         <p:spPr>
           <a:xfrm>
-            <a:off x="7799832" y="4974336"/>
-            <a:ext cx="3145536" cy="576072"/>
+            <a:off x="7799832" y="4659782"/>
+            <a:ext cx="3145536" cy="899770"/>
           </a:xfrm>
           <a:prstGeom prst="rect">
             <a:avLst/>
@@ -5265,7 +5265,7 @@
                 <a:ea typeface="Aptos" pitchFamily="34" charset="-122"/>
                 <a:cs typeface="Aptos" pitchFamily="34" charset="-120"/>
               </a:rPr>
-              <a:t>Use the concept to clarify workflow changes, dependencies, staffing, procurement requirements, training needs, and.</a:t>
+              <a:t>Use the concept to clarify workflow changes, dependencies, staffing, procurement requirements, training needs, and implementation checkpoints.</a:t>
             </a:r>
             <a:endParaRPr lang="en-US" sz="1320" dirty="0"/>
           </a:p>
@@ -5634,11 +5634,11 @@
         <p:spPr>
           <a:xfrm>
             <a:off x="7635240" y="1325880"/>
-            <a:ext cx="3474720" cy="1325880"/>
+            <a:ext cx="3474720" cy="1207008"/>
           </a:xfrm>
           <a:prstGeom prst="roundRect">
             <a:avLst>
-              <a:gd name="adj" fmla="val 8276"/>
+              <a:gd name="adj" fmla="val 9091"/>
             </a:avLst>
           </a:prstGeom>
           <a:solidFill>
@@ -5700,7 +5700,7 @@
         <p:spPr>
           <a:xfrm>
             <a:off x="7799832" y="1801368"/>
-            <a:ext cx="3145536" cy="758952"/>
+            <a:ext cx="3145536" cy="640080"/>
           </a:xfrm>
           <a:prstGeom prst="rect">
             <a:avLst/>
@@ -5740,7 +5740,7 @@
         </p:nvSpPr>
         <p:spPr>
           <a:xfrm>
-            <a:off x="7635240" y="2788920"/>
+            <a:off x="7635240" y="2670048"/>
             <a:ext cx="3474720" cy="1536192"/>
           </a:xfrm>
           <a:prstGeom prst="roundRect">
@@ -5767,7 +5767,7 @@
         </p:nvSpPr>
         <p:spPr>
           <a:xfrm>
-            <a:off x="7799832" y="2935224"/>
+            <a:off x="7799832" y="2816352"/>
             <a:ext cx="3145536" cy="256032"/>
           </a:xfrm>
           <a:prstGeom prst="rect">
@@ -5806,7 +5806,7 @@
         </p:nvSpPr>
         <p:spPr>
           <a:xfrm>
-            <a:off x="7818120" y="3300984"/>
+            <a:off x="7818120" y="3182112"/>
             <a:ext cx="3090672" cy="877824"/>
           </a:xfrm>
           <a:prstGeom prst="rect">
@@ -5881,12 +5881,12 @@
         </p:nvSpPr>
         <p:spPr>
           <a:xfrm>
-            <a:off x="7635240" y="4498848"/>
-            <a:ext cx="3474720" cy="1143000"/>
+            <a:off x="7635240" y="4343400"/>
+            <a:ext cx="3474720" cy="1255471"/>
           </a:xfrm>
           <a:prstGeom prst="roundRect">
             <a:avLst>
-              <a:gd name="adj" fmla="val 9600"/>
+              <a:gd name="adj" fmla="val 8740"/>
             </a:avLst>
           </a:prstGeom>
           <a:solidFill>
@@ -5908,7 +5908,7 @@
         </p:nvSpPr>
         <p:spPr>
           <a:xfrm>
-            <a:off x="7799832" y="4645152"/>
+            <a:off x="7799832" y="4489704"/>
             <a:ext cx="3145536" cy="256032"/>
           </a:xfrm>
           <a:prstGeom prst="rect">
@@ -5947,8 +5947,8 @@
         </p:nvSpPr>
         <p:spPr>
           <a:xfrm>
-            <a:off x="7799832" y="4974336"/>
-            <a:ext cx="3145536" cy="576072"/>
+            <a:off x="7799832" y="4818888"/>
+            <a:ext cx="3145536" cy="688543"/>
           </a:xfrm>
           <a:prstGeom prst="rect">
             <a:avLst/>
@@ -5974,7 +5974,7 @@
                 <a:ea typeface="Aptos" pitchFamily="34" charset="-122"/>
                 <a:cs typeface="Aptos" pitchFamily="34" charset="-120"/>
               </a:rPr>
-              <a:t>Identify what could go wrong, who could be affected, what safeguards are needed, and what evidence should be reviewed.</a:t>
+              <a:t>Identify what could go wrong, who could be affected, what safeguards are needed, and what evidence should be reviewed before use.</a:t>
             </a:r>
             <a:endParaRPr lang="en-US" sz="1320" dirty="0"/>
           </a:p>
@@ -6343,11 +6343,11 @@
         <p:spPr>
           <a:xfrm>
             <a:off x="7635240" y="1325880"/>
-            <a:ext cx="3474720" cy="1325880"/>
+            <a:ext cx="3474720" cy="1207008"/>
           </a:xfrm>
           <a:prstGeom prst="roundRect">
             <a:avLst>
-              <a:gd name="adj" fmla="val 8276"/>
+              <a:gd name="adj" fmla="val 9091"/>
             </a:avLst>
           </a:prstGeom>
           <a:solidFill>
@@ -6409,7 +6409,7 @@
         <p:spPr>
           <a:xfrm>
             <a:off x="7799832" y="1801368"/>
-            <a:ext cx="3145536" cy="758952"/>
+            <a:ext cx="3145536" cy="640080"/>
           </a:xfrm>
           <a:prstGeom prst="rect">
             <a:avLst/>
@@ -6449,7 +6449,7 @@
         </p:nvSpPr>
         <p:spPr>
           <a:xfrm>
-            <a:off x="7635240" y="2788920"/>
+            <a:off x="7635240" y="2670048"/>
             <a:ext cx="3474720" cy="1536192"/>
           </a:xfrm>
           <a:prstGeom prst="roundRect">
@@ -6476,7 +6476,7 @@
         </p:nvSpPr>
         <p:spPr>
           <a:xfrm>
-            <a:off x="7799832" y="2935224"/>
+            <a:off x="7799832" y="2816352"/>
             <a:ext cx="3145536" cy="256032"/>
           </a:xfrm>
           <a:prstGeom prst="rect">
@@ -6515,7 +6515,7 @@
         </p:nvSpPr>
         <p:spPr>
           <a:xfrm>
-            <a:off x="7818120" y="3300984"/>
+            <a:off x="7818120" y="3182112"/>
             <a:ext cx="3090672" cy="877824"/>
           </a:xfrm>
           <a:prstGeom prst="rect">
@@ -6590,12 +6590,12 @@
         </p:nvSpPr>
         <p:spPr>
           <a:xfrm>
-            <a:off x="7635240" y="4498848"/>
-            <a:ext cx="3474720" cy="1143000"/>
+            <a:off x="7635240" y="4343400"/>
+            <a:ext cx="3474720" cy="1255471"/>
           </a:xfrm>
           <a:prstGeom prst="roundRect">
             <a:avLst>
-              <a:gd name="adj" fmla="val 9600"/>
+              <a:gd name="adj" fmla="val 8740"/>
             </a:avLst>
           </a:prstGeom>
           <a:solidFill>
@@ -6617,7 +6617,7 @@
         </p:nvSpPr>
         <p:spPr>
           <a:xfrm>
-            <a:off x="7799832" y="4645152"/>
+            <a:off x="7799832" y="4489704"/>
             <a:ext cx="3145536" cy="256032"/>
           </a:xfrm>
           <a:prstGeom prst="rect">
@@ -6656,8 +6656,8 @@
         </p:nvSpPr>
         <p:spPr>
           <a:xfrm>
-            <a:off x="7799832" y="4974336"/>
-            <a:ext cx="3145536" cy="576072"/>
+            <a:off x="7799832" y="4818888"/>
+            <a:ext cx="3145536" cy="688543"/>
           </a:xfrm>
           <a:prstGeom prst="rect">
             <a:avLst/>
@@ -6683,7 +6683,7 @@
                 <a:ea typeface="Aptos" pitchFamily="34" charset="-122"/>
                 <a:cs typeface="Aptos" pitchFamily="34" charset="-120"/>
               </a:rPr>
-              <a:t>Identify what could go wrong, who could be affected, what safeguards are needed, and what evidence should be reviewed.</a:t>
+              <a:t>Identify what could go wrong, who could be affected, what safeguards are needed, and what evidence should be reviewed before use.</a:t>
             </a:r>
             <a:endParaRPr lang="en-US" sz="1320" dirty="0"/>
           </a:p>
@@ -7052,11 +7052,11 @@
         <p:spPr>
           <a:xfrm>
             <a:off x="7635240" y="1325880"/>
-            <a:ext cx="3474720" cy="1325880"/>
+            <a:ext cx="3474720" cy="1207008"/>
           </a:xfrm>
           <a:prstGeom prst="roundRect">
             <a:avLst>
-              <a:gd name="adj" fmla="val 8276"/>
+              <a:gd name="adj" fmla="val 9091"/>
             </a:avLst>
           </a:prstGeom>
           <a:solidFill>
@@ -7118,7 +7118,7 @@
         <p:spPr>
           <a:xfrm>
             <a:off x="7799832" y="1801368"/>
-            <a:ext cx="3145536" cy="758952"/>
+            <a:ext cx="3145536" cy="640080"/>
           </a:xfrm>
           <a:prstGeom prst="rect">
             <a:avLst/>
@@ -7158,12 +7158,12 @@
         </p:nvSpPr>
         <p:spPr>
           <a:xfrm>
-            <a:off x="7635240" y="2788920"/>
-            <a:ext cx="3474720" cy="1536192"/>
+            <a:off x="7635240" y="2670048"/>
+            <a:ext cx="3474720" cy="1377086"/>
           </a:xfrm>
           <a:prstGeom prst="roundRect">
             <a:avLst>
-              <a:gd name="adj" fmla="val 7143"/>
+              <a:gd name="adj" fmla="val 7968"/>
             </a:avLst>
           </a:prstGeom>
           <a:solidFill>
@@ -7185,7 +7185,7 @@
         </p:nvSpPr>
         <p:spPr>
           <a:xfrm>
-            <a:off x="7799832" y="2935224"/>
+            <a:off x="7799832" y="2816352"/>
             <a:ext cx="3145536" cy="256032"/>
           </a:xfrm>
           <a:prstGeom prst="rect">
@@ -7224,8 +7224,8 @@
         </p:nvSpPr>
         <p:spPr>
           <a:xfrm>
-            <a:off x="7818120" y="3300984"/>
-            <a:ext cx="3090672" cy="877824"/>
+            <a:off x="7818120" y="3182112"/>
+            <a:ext cx="3090672" cy="718718"/>
           </a:xfrm>
           <a:prstGeom prst="rect">
             <a:avLst/>
@@ -7299,12 +7299,12 @@
         </p:nvSpPr>
         <p:spPr>
           <a:xfrm>
-            <a:off x="7635240" y="4498848"/>
-            <a:ext cx="3474720" cy="1143000"/>
+            <a:off x="7635240" y="4184294"/>
+            <a:ext cx="3474720" cy="1466698"/>
           </a:xfrm>
           <a:prstGeom prst="roundRect">
             <a:avLst>
-              <a:gd name="adj" fmla="val 9600"/>
+              <a:gd name="adj" fmla="val 7481"/>
             </a:avLst>
           </a:prstGeom>
           <a:solidFill>
@@ -7326,7 +7326,7 @@
         </p:nvSpPr>
         <p:spPr>
           <a:xfrm>
-            <a:off x="7799832" y="4645152"/>
+            <a:off x="7799832" y="4330598"/>
             <a:ext cx="3145536" cy="256032"/>
           </a:xfrm>
           <a:prstGeom prst="rect">
@@ -7365,8 +7365,8 @@
         </p:nvSpPr>
         <p:spPr>
           <a:xfrm>
-            <a:off x="7799832" y="4974336"/>
-            <a:ext cx="3145536" cy="576072"/>
+            <a:off x="7799832" y="4659782"/>
+            <a:ext cx="3145536" cy="899770"/>
           </a:xfrm>
           <a:prstGeom prst="rect">
             <a:avLst/>
@@ -7392,7 +7392,7 @@
                 <a:ea typeface="Aptos" pitchFamily="34" charset="-122"/>
                 <a:cs typeface="Aptos" pitchFamily="34" charset="-120"/>
               </a:rPr>
-              <a:t>Use the concept to clarify workflow changes, dependencies, staffing, procurement requirements, training needs, and.</a:t>
+              <a:t>Use the concept to clarify workflow changes, dependencies, staffing, procurement requirements, training needs, and implementation checkpoints.</a:t>
             </a:r>
             <a:endParaRPr lang="en-US" sz="1320" dirty="0"/>
           </a:p>
@@ -7761,11 +7761,11 @@
         <p:spPr>
           <a:xfrm>
             <a:off x="7635240" y="1325880"/>
-            <a:ext cx="3474720" cy="1325880"/>
+            <a:ext cx="3474720" cy="1207008"/>
           </a:xfrm>
           <a:prstGeom prst="roundRect">
             <a:avLst>
-              <a:gd name="adj" fmla="val 8276"/>
+              <a:gd name="adj" fmla="val 9091"/>
             </a:avLst>
           </a:prstGeom>
           <a:solidFill>
@@ -7827,7 +7827,7 @@
         <p:spPr>
           <a:xfrm>
             <a:off x="7799832" y="1801368"/>
-            <a:ext cx="3145536" cy="758952"/>
+            <a:ext cx="3145536" cy="640080"/>
           </a:xfrm>
           <a:prstGeom prst="rect">
             <a:avLst/>
@@ -7867,12 +7867,12 @@
         </p:nvSpPr>
         <p:spPr>
           <a:xfrm>
-            <a:off x="7635240" y="2788920"/>
-            <a:ext cx="3474720" cy="1536192"/>
+            <a:off x="7635240" y="2670048"/>
+            <a:ext cx="3474720" cy="1377086"/>
           </a:xfrm>
           <a:prstGeom prst="roundRect">
             <a:avLst>
-              <a:gd name="adj" fmla="val 7143"/>
+              <a:gd name="adj" fmla="val 7968"/>
             </a:avLst>
           </a:prstGeom>
           <a:solidFill>
@@ -7894,7 +7894,7 @@
         </p:nvSpPr>
         <p:spPr>
           <a:xfrm>
-            <a:off x="7799832" y="2935224"/>
+            <a:off x="7799832" y="2816352"/>
             <a:ext cx="3145536" cy="256032"/>
           </a:xfrm>
           <a:prstGeom prst="rect">
@@ -7933,8 +7933,8 @@
         </p:nvSpPr>
         <p:spPr>
           <a:xfrm>
-            <a:off x="7818120" y="3300984"/>
-            <a:ext cx="3090672" cy="877824"/>
+            <a:off x="7818120" y="3182112"/>
+            <a:ext cx="3090672" cy="718718"/>
           </a:xfrm>
           <a:prstGeom prst="rect">
             <a:avLst/>
@@ -8008,12 +8008,12 @@
         </p:nvSpPr>
         <p:spPr>
           <a:xfrm>
-            <a:off x="7635240" y="4498848"/>
-            <a:ext cx="3474720" cy="1143000"/>
+            <a:off x="7635240" y="4184294"/>
+            <a:ext cx="3474720" cy="1466698"/>
           </a:xfrm>
           <a:prstGeom prst="roundRect">
             <a:avLst>
-              <a:gd name="adj" fmla="val 9600"/>
+              <a:gd name="adj" fmla="val 7481"/>
             </a:avLst>
           </a:prstGeom>
           <a:solidFill>
@@ -8035,7 +8035,7 @@
         </p:nvSpPr>
         <p:spPr>
           <a:xfrm>
-            <a:off x="7799832" y="4645152"/>
+            <a:off x="7799832" y="4330598"/>
             <a:ext cx="3145536" cy="256032"/>
           </a:xfrm>
           <a:prstGeom prst="rect">
@@ -8074,8 +8074,8 @@
         </p:nvSpPr>
         <p:spPr>
           <a:xfrm>
-            <a:off x="7799832" y="4974336"/>
-            <a:ext cx="3145536" cy="576072"/>
+            <a:off x="7799832" y="4659782"/>
+            <a:ext cx="3145536" cy="899770"/>
           </a:xfrm>
           <a:prstGeom prst="rect">
             <a:avLst/>
@@ -8101,7 +8101,7 @@
                 <a:ea typeface="Aptos" pitchFamily="34" charset="-122"/>
                 <a:cs typeface="Aptos" pitchFamily="34" charset="-120"/>
               </a:rPr>
-              <a:t>Use the concept to clarify workflow changes, dependencies, staffing, procurement requirements, training needs, and.</a:t>
+              <a:t>Use the concept to clarify workflow changes, dependencies, staffing, procurement requirements, training needs, and implementation checkpoints.</a:t>
             </a:r>
             <a:endParaRPr lang="en-US" sz="1320" dirty="0"/>
           </a:p>
@@ -8453,11 +8453,11 @@
         <p:spPr>
           <a:xfrm>
             <a:off x="7635240" y="1325880"/>
-            <a:ext cx="3474720" cy="1325880"/>
+            <a:ext cx="3474720" cy="1207008"/>
           </a:xfrm>
           <a:prstGeom prst="roundRect">
             <a:avLst>
-              <a:gd name="adj" fmla="val 8276"/>
+              <a:gd name="adj" fmla="val 9091"/>
             </a:avLst>
           </a:prstGeom>
           <a:solidFill>
@@ -8519,7 +8519,7 @@
         <p:spPr>
           <a:xfrm>
             <a:off x="7799832" y="1801368"/>
-            <a:ext cx="3145536" cy="758952"/>
+            <a:ext cx="3145536" cy="640080"/>
           </a:xfrm>
           <a:prstGeom prst="rect">
             <a:avLst/>
@@ -8559,12 +8559,12 @@
         </p:nvSpPr>
         <p:spPr>
           <a:xfrm>
-            <a:off x="7635240" y="2788920"/>
-            <a:ext cx="3474720" cy="1536192"/>
+            <a:off x="7635240" y="2670048"/>
+            <a:ext cx="3474720" cy="1377086"/>
           </a:xfrm>
           <a:prstGeom prst="roundRect">
             <a:avLst>
-              <a:gd name="adj" fmla="val 7143"/>
+              <a:gd name="adj" fmla="val 7968"/>
             </a:avLst>
           </a:prstGeom>
           <a:solidFill>
@@ -8586,7 +8586,7 @@
         </p:nvSpPr>
         <p:spPr>
           <a:xfrm>
-            <a:off x="7799832" y="2935224"/>
+            <a:off x="7799832" y="2816352"/>
             <a:ext cx="3145536" cy="256032"/>
           </a:xfrm>
           <a:prstGeom prst="rect">
@@ -8625,8 +8625,8 @@
         </p:nvSpPr>
         <p:spPr>
           <a:xfrm>
-            <a:off x="7818120" y="3300984"/>
-            <a:ext cx="3090672" cy="877824"/>
+            <a:off x="7818120" y="3182112"/>
+            <a:ext cx="3090672" cy="718718"/>
           </a:xfrm>
           <a:prstGeom prst="rect">
             <a:avLst/>
@@ -8683,12 +8683,12 @@
         </p:nvSpPr>
         <p:spPr>
           <a:xfrm>
-            <a:off x="7635240" y="4498848"/>
-            <a:ext cx="3474720" cy="1143000"/>
+            <a:off x="7635240" y="4184294"/>
+            <a:ext cx="3474720" cy="1466698"/>
           </a:xfrm>
           <a:prstGeom prst="roundRect">
             <a:avLst>
-              <a:gd name="adj" fmla="val 9600"/>
+              <a:gd name="adj" fmla="val 7481"/>
             </a:avLst>
           </a:prstGeom>
           <a:solidFill>
@@ -8710,7 +8710,7 @@
         </p:nvSpPr>
         <p:spPr>
           <a:xfrm>
-            <a:off x="7799832" y="4645152"/>
+            <a:off x="7799832" y="4330598"/>
             <a:ext cx="3145536" cy="256032"/>
           </a:xfrm>
           <a:prstGeom prst="rect">
@@ -8749,8 +8749,8 @@
         </p:nvSpPr>
         <p:spPr>
           <a:xfrm>
-            <a:off x="7799832" y="4974336"/>
-            <a:ext cx="3145536" cy="576072"/>
+            <a:off x="7799832" y="4659782"/>
+            <a:ext cx="3145536" cy="899770"/>
           </a:xfrm>
           <a:prstGeom prst="rect">
             <a:avLst/>
@@ -8776,7 +8776,7 @@
                 <a:ea typeface="Aptos" pitchFamily="34" charset="-122"/>
                 <a:cs typeface="Aptos" pitchFamily="34" charset="-120"/>
               </a:rPr>
-              <a:t>Use the concept to clarify workflow changes, dependencies, staffing, procurement requirements, training needs, and.</a:t>
+              <a:t>Use the concept to clarify workflow changes, dependencies, staffing, procurement requirements, training needs, and implementation checkpoints.</a:t>
             </a:r>
             <a:endParaRPr lang="en-US" sz="1320" dirty="0"/>
           </a:p>
@@ -9128,11 +9128,11 @@
         <p:spPr>
           <a:xfrm>
             <a:off x="7635240" y="1325880"/>
-            <a:ext cx="3474720" cy="1325880"/>
+            <a:ext cx="3474720" cy="1207008"/>
           </a:xfrm>
           <a:prstGeom prst="roundRect">
             <a:avLst>
-              <a:gd name="adj" fmla="val 8276"/>
+              <a:gd name="adj" fmla="val 9091"/>
             </a:avLst>
           </a:prstGeom>
           <a:solidFill>
@@ -9194,7 +9194,7 @@
         <p:spPr>
           <a:xfrm>
             <a:off x="7799832" y="1801368"/>
-            <a:ext cx="3145536" cy="758952"/>
+            <a:ext cx="3145536" cy="640080"/>
           </a:xfrm>
           <a:prstGeom prst="rect">
             <a:avLst/>
@@ -9234,12 +9234,12 @@
         </p:nvSpPr>
         <p:spPr>
           <a:xfrm>
-            <a:off x="7635240" y="2788920"/>
-            <a:ext cx="3474720" cy="1536192"/>
+            <a:off x="7635240" y="2670048"/>
+            <a:ext cx="3474720" cy="1377086"/>
           </a:xfrm>
           <a:prstGeom prst="roundRect">
             <a:avLst>
-              <a:gd name="adj" fmla="val 7143"/>
+              <a:gd name="adj" fmla="val 7968"/>
             </a:avLst>
           </a:prstGeom>
           <a:solidFill>
@@ -9261,7 +9261,7 @@
         </p:nvSpPr>
         <p:spPr>
           <a:xfrm>
-            <a:off x="7799832" y="2935224"/>
+            <a:off x="7799832" y="2816352"/>
             <a:ext cx="3145536" cy="256032"/>
           </a:xfrm>
           <a:prstGeom prst="rect">
@@ -9300,8 +9300,8 @@
         </p:nvSpPr>
         <p:spPr>
           <a:xfrm>
-            <a:off x="7818120" y="3300984"/>
-            <a:ext cx="3090672" cy="877824"/>
+            <a:off x="7818120" y="3182112"/>
+            <a:ext cx="3090672" cy="718718"/>
           </a:xfrm>
           <a:prstGeom prst="rect">
             <a:avLst/>
@@ -9358,12 +9358,12 @@
         </p:nvSpPr>
         <p:spPr>
           <a:xfrm>
-            <a:off x="7635240" y="4498848"/>
-            <a:ext cx="3474720" cy="1143000"/>
+            <a:off x="7635240" y="4184294"/>
+            <a:ext cx="3474720" cy="1466698"/>
           </a:xfrm>
           <a:prstGeom prst="roundRect">
             <a:avLst>
-              <a:gd name="adj" fmla="val 9600"/>
+              <a:gd name="adj" fmla="val 7481"/>
             </a:avLst>
           </a:prstGeom>
           <a:solidFill>
@@ -9385,7 +9385,7 @@
         </p:nvSpPr>
         <p:spPr>
           <a:xfrm>
-            <a:off x="7799832" y="4645152"/>
+            <a:off x="7799832" y="4330598"/>
             <a:ext cx="3145536" cy="256032"/>
           </a:xfrm>
           <a:prstGeom prst="rect">
@@ -9424,8 +9424,8 @@
         </p:nvSpPr>
         <p:spPr>
           <a:xfrm>
-            <a:off x="7799832" y="4974336"/>
-            <a:ext cx="3145536" cy="576072"/>
+            <a:off x="7799832" y="4659782"/>
+            <a:ext cx="3145536" cy="899770"/>
           </a:xfrm>
           <a:prstGeom prst="rect">
             <a:avLst/>
@@ -9451,7 +9451,7 @@
                 <a:ea typeface="Aptos" pitchFamily="34" charset="-122"/>
                 <a:cs typeface="Aptos" pitchFamily="34" charset="-120"/>
               </a:rPr>
-              <a:t>Use the assignment to test whether you can explain the concept, apply it to a realistic public health situation, and.</a:t>
+              <a:t>Use the assignment to test whether you can explain the concept, apply it to a realistic public health situation, and identify what would need review before the work moves forward.</a:t>
             </a:r>
             <a:endParaRPr lang="en-US" sz="1320" dirty="0"/>
           </a:p>
@@ -9820,11 +9820,11 @@
         <p:spPr>
           <a:xfrm>
             <a:off x="7635240" y="1325880"/>
-            <a:ext cx="3474720" cy="1325880"/>
+            <a:ext cx="3474720" cy="1207008"/>
           </a:xfrm>
           <a:prstGeom prst="roundRect">
             <a:avLst>
-              <a:gd name="adj" fmla="val 8276"/>
+              <a:gd name="adj" fmla="val 9091"/>
             </a:avLst>
           </a:prstGeom>
           <a:solidFill>
@@ -9886,7 +9886,7 @@
         <p:spPr>
           <a:xfrm>
             <a:off x="7799832" y="1801368"/>
-            <a:ext cx="3145536" cy="758952"/>
+            <a:ext cx="3145536" cy="640080"/>
           </a:xfrm>
           <a:prstGeom prst="rect">
             <a:avLst/>
@@ -9926,12 +9926,12 @@
         </p:nvSpPr>
         <p:spPr>
           <a:xfrm>
-            <a:off x="7635240" y="2788920"/>
-            <a:ext cx="3474720" cy="1536192"/>
+            <a:off x="7635240" y="2670048"/>
+            <a:ext cx="3474720" cy="1377086"/>
           </a:xfrm>
           <a:prstGeom prst="roundRect">
             <a:avLst>
-              <a:gd name="adj" fmla="val 7143"/>
+              <a:gd name="adj" fmla="val 7968"/>
             </a:avLst>
           </a:prstGeom>
           <a:solidFill>
@@ -9953,7 +9953,7 @@
         </p:nvSpPr>
         <p:spPr>
           <a:xfrm>
-            <a:off x="7799832" y="2935224"/>
+            <a:off x="7799832" y="2816352"/>
             <a:ext cx="3145536" cy="256032"/>
           </a:xfrm>
           <a:prstGeom prst="rect">
@@ -9992,8 +9992,8 @@
         </p:nvSpPr>
         <p:spPr>
           <a:xfrm>
-            <a:off x="7818120" y="3300984"/>
-            <a:ext cx="3090672" cy="877824"/>
+            <a:off x="7818120" y="3182112"/>
+            <a:ext cx="3090672" cy="718718"/>
           </a:xfrm>
           <a:prstGeom prst="rect">
             <a:avLst/>
@@ -10067,12 +10067,12 @@
         </p:nvSpPr>
         <p:spPr>
           <a:xfrm>
-            <a:off x="7635240" y="4498848"/>
-            <a:ext cx="3474720" cy="1143000"/>
+            <a:off x="7635240" y="4184294"/>
+            <a:ext cx="3474720" cy="1466698"/>
           </a:xfrm>
           <a:prstGeom prst="roundRect">
             <a:avLst>
-              <a:gd name="adj" fmla="val 9600"/>
+              <a:gd name="adj" fmla="val 7481"/>
             </a:avLst>
           </a:prstGeom>
           <a:solidFill>
@@ -10094,7 +10094,7 @@
         </p:nvSpPr>
         <p:spPr>
           <a:xfrm>
-            <a:off x="7799832" y="4645152"/>
+            <a:off x="7799832" y="4330598"/>
             <a:ext cx="3145536" cy="256032"/>
           </a:xfrm>
           <a:prstGeom prst="rect">
@@ -10133,8 +10133,8 @@
         </p:nvSpPr>
         <p:spPr>
           <a:xfrm>
-            <a:off x="7799832" y="4974336"/>
-            <a:ext cx="3145536" cy="576072"/>
+            <a:off x="7799832" y="4659782"/>
+            <a:ext cx="3145536" cy="899770"/>
           </a:xfrm>
           <a:prstGeom prst="rect">
             <a:avLst/>
@@ -10160,7 +10160,7 @@
                 <a:ea typeface="Aptos" pitchFamily="34" charset="-122"/>
                 <a:cs typeface="Aptos" pitchFamily="34" charset="-120"/>
               </a:rPr>
-              <a:t>Use the concept to clarify workflow changes, dependencies, staffing, procurement requirements, training needs, and.</a:t>
+              <a:t>Use the concept to clarify workflow changes, dependencies, staffing, procurement requirements, training needs, and implementation checkpoints.</a:t>
             </a:r>
             <a:endParaRPr lang="en-US" sz="1320" dirty="0"/>
           </a:p>
@@ -11097,11 +11097,11 @@
         <p:spPr>
           <a:xfrm>
             <a:off x="7635240" y="1325880"/>
-            <a:ext cx="3474720" cy="1325880"/>
+            <a:ext cx="3474720" cy="1207008"/>
           </a:xfrm>
           <a:prstGeom prst="roundRect">
             <a:avLst>
-              <a:gd name="adj" fmla="val 8276"/>
+              <a:gd name="adj" fmla="val 9091"/>
             </a:avLst>
           </a:prstGeom>
           <a:solidFill>
@@ -11163,7 +11163,7 @@
         <p:spPr>
           <a:xfrm>
             <a:off x="7799832" y="1801368"/>
-            <a:ext cx="3145536" cy="758952"/>
+            <a:ext cx="3145536" cy="640080"/>
           </a:xfrm>
           <a:prstGeom prst="rect">
             <a:avLst/>
@@ -11203,12 +11203,12 @@
         </p:nvSpPr>
         <p:spPr>
           <a:xfrm>
-            <a:off x="7635240" y="2788920"/>
-            <a:ext cx="3474720" cy="1536192"/>
+            <a:off x="7635240" y="2670048"/>
+            <a:ext cx="3474720" cy="1377086"/>
           </a:xfrm>
           <a:prstGeom prst="roundRect">
             <a:avLst>
-              <a:gd name="adj" fmla="val 7143"/>
+              <a:gd name="adj" fmla="val 7968"/>
             </a:avLst>
           </a:prstGeom>
           <a:solidFill>
@@ -11230,7 +11230,7 @@
         </p:nvSpPr>
         <p:spPr>
           <a:xfrm>
-            <a:off x="7799832" y="2935224"/>
+            <a:off x="7799832" y="2816352"/>
             <a:ext cx="3145536" cy="256032"/>
           </a:xfrm>
           <a:prstGeom prst="rect">
@@ -11269,8 +11269,8 @@
         </p:nvSpPr>
         <p:spPr>
           <a:xfrm>
-            <a:off x="7818120" y="3300984"/>
-            <a:ext cx="3090672" cy="877824"/>
+            <a:off x="7818120" y="3182112"/>
+            <a:ext cx="3090672" cy="718718"/>
           </a:xfrm>
           <a:prstGeom prst="rect">
             <a:avLst/>
@@ -11310,12 +11310,12 @@
         </p:nvSpPr>
         <p:spPr>
           <a:xfrm>
-            <a:off x="7635240" y="4498848"/>
-            <a:ext cx="3474720" cy="1143000"/>
+            <a:off x="7635240" y="4184294"/>
+            <a:ext cx="3474720" cy="1466698"/>
           </a:xfrm>
           <a:prstGeom prst="roundRect">
             <a:avLst>
-              <a:gd name="adj" fmla="val 9600"/>
+              <a:gd name="adj" fmla="val 7481"/>
             </a:avLst>
           </a:prstGeom>
           <a:solidFill>
@@ -11337,7 +11337,7 @@
         </p:nvSpPr>
         <p:spPr>
           <a:xfrm>
-            <a:off x="7799832" y="4645152"/>
+            <a:off x="7799832" y="4330598"/>
             <a:ext cx="3145536" cy="256032"/>
           </a:xfrm>
           <a:prstGeom prst="rect">
@@ -11376,8 +11376,8 @@
         </p:nvSpPr>
         <p:spPr>
           <a:xfrm>
-            <a:off x="7799832" y="4974336"/>
-            <a:ext cx="3145536" cy="576072"/>
+            <a:off x="7799832" y="4659782"/>
+            <a:ext cx="3145536" cy="899770"/>
           </a:xfrm>
           <a:prstGeom prst="rect">
             <a:avLst/>
@@ -11403,7 +11403,7 @@
                 <a:ea typeface="Aptos" pitchFamily="34" charset="-122"/>
                 <a:cs typeface="Aptos" pitchFamily="34" charset="-120"/>
               </a:rPr>
-              <a:t>Use the concept to clarify workflow changes, dependencies, staffing, procurement requirements, training needs, and.</a:t>
+              <a:t>Use the concept to clarify workflow changes, dependencies, staffing, procurement requirements, training needs, and implementation checkpoints.</a:t>
             </a:r>
             <a:endParaRPr lang="en-US" sz="1320" dirty="0"/>
           </a:p>
@@ -11772,11 +11772,11 @@
         <p:spPr>
           <a:xfrm>
             <a:off x="7635240" y="1325880"/>
-            <a:ext cx="3474720" cy="1325880"/>
+            <a:ext cx="3474720" cy="1207008"/>
           </a:xfrm>
           <a:prstGeom prst="roundRect">
             <a:avLst>
-              <a:gd name="adj" fmla="val 8276"/>
+              <a:gd name="adj" fmla="val 9091"/>
             </a:avLst>
           </a:prstGeom>
           <a:solidFill>
@@ -11838,7 +11838,7 @@
         <p:spPr>
           <a:xfrm>
             <a:off x="7799832" y="1801368"/>
-            <a:ext cx="3145536" cy="758952"/>
+            <a:ext cx="3145536" cy="640080"/>
           </a:xfrm>
           <a:prstGeom prst="rect">
             <a:avLst/>
@@ -11878,12 +11878,12 @@
         </p:nvSpPr>
         <p:spPr>
           <a:xfrm>
-            <a:off x="7635240" y="2788920"/>
-            <a:ext cx="3474720" cy="1536192"/>
+            <a:off x="7635240" y="2670048"/>
+            <a:ext cx="3474720" cy="1377086"/>
           </a:xfrm>
           <a:prstGeom prst="roundRect">
             <a:avLst>
-              <a:gd name="adj" fmla="val 7143"/>
+              <a:gd name="adj" fmla="val 7968"/>
             </a:avLst>
           </a:prstGeom>
           <a:solidFill>
@@ -11905,7 +11905,7 @@
         </p:nvSpPr>
         <p:spPr>
           <a:xfrm>
-            <a:off x="7799832" y="2935224"/>
+            <a:off x="7799832" y="2816352"/>
             <a:ext cx="3145536" cy="256032"/>
           </a:xfrm>
           <a:prstGeom prst="rect">
@@ -11944,8 +11944,8 @@
         </p:nvSpPr>
         <p:spPr>
           <a:xfrm>
-            <a:off x="7818120" y="3300984"/>
-            <a:ext cx="3090672" cy="877824"/>
+            <a:off x="7818120" y="3182112"/>
+            <a:ext cx="3090672" cy="718718"/>
           </a:xfrm>
           <a:prstGeom prst="rect">
             <a:avLst/>
@@ -12019,12 +12019,12 @@
         </p:nvSpPr>
         <p:spPr>
           <a:xfrm>
-            <a:off x="7635240" y="4498848"/>
-            <a:ext cx="3474720" cy="1143000"/>
+            <a:off x="7635240" y="4184294"/>
+            <a:ext cx="3474720" cy="1466698"/>
           </a:xfrm>
           <a:prstGeom prst="roundRect">
             <a:avLst>
-              <a:gd name="adj" fmla="val 9600"/>
+              <a:gd name="adj" fmla="val 7481"/>
             </a:avLst>
           </a:prstGeom>
           <a:solidFill>
@@ -12046,7 +12046,7 @@
         </p:nvSpPr>
         <p:spPr>
           <a:xfrm>
-            <a:off x="7799832" y="4645152"/>
+            <a:off x="7799832" y="4330598"/>
             <a:ext cx="3145536" cy="256032"/>
           </a:xfrm>
           <a:prstGeom prst="rect">
@@ -12085,8 +12085,8 @@
         </p:nvSpPr>
         <p:spPr>
           <a:xfrm>
-            <a:off x="7799832" y="4974336"/>
-            <a:ext cx="3145536" cy="576072"/>
+            <a:off x="7799832" y="4659782"/>
+            <a:ext cx="3145536" cy="899770"/>
           </a:xfrm>
           <a:prstGeom prst="rect">
             <a:avLst/>
@@ -12112,7 +12112,7 @@
                 <a:ea typeface="Aptos" pitchFamily="34" charset="-122"/>
                 <a:cs typeface="Aptos" pitchFamily="34" charset="-120"/>
               </a:rPr>
-              <a:t>Use the assignment to test whether you can explain the concept, apply it to a realistic public health situation, and.</a:t>
+              <a:t>Use the assignment to test whether you can explain the concept, apply it to a realistic public health situation, and identify what would need review before the work moves forward.</a:t>
             </a:r>
             <a:endParaRPr lang="en-US" sz="1320" dirty="0"/>
           </a:p>
@@ -12481,11 +12481,11 @@
         <p:spPr>
           <a:xfrm>
             <a:off x="7635240" y="1325880"/>
-            <a:ext cx="3474720" cy="1325880"/>
+            <a:ext cx="3474720" cy="1207008"/>
           </a:xfrm>
           <a:prstGeom prst="roundRect">
             <a:avLst>
-              <a:gd name="adj" fmla="val 8276"/>
+              <a:gd name="adj" fmla="val 9091"/>
             </a:avLst>
           </a:prstGeom>
           <a:solidFill>
@@ -12547,7 +12547,7 @@
         <p:spPr>
           <a:xfrm>
             <a:off x="7799832" y="1801368"/>
-            <a:ext cx="3145536" cy="758952"/>
+            <a:ext cx="3145536" cy="640080"/>
           </a:xfrm>
           <a:prstGeom prst="rect">
             <a:avLst/>
@@ -12587,12 +12587,12 @@
         </p:nvSpPr>
         <p:spPr>
           <a:xfrm>
-            <a:off x="7635240" y="2788920"/>
-            <a:ext cx="3474720" cy="1536192"/>
+            <a:off x="7635240" y="2670048"/>
+            <a:ext cx="3474720" cy="1377086"/>
           </a:xfrm>
           <a:prstGeom prst="roundRect">
             <a:avLst>
-              <a:gd name="adj" fmla="val 7143"/>
+              <a:gd name="adj" fmla="val 7968"/>
             </a:avLst>
           </a:prstGeom>
           <a:solidFill>
@@ -12614,7 +12614,7 @@
         </p:nvSpPr>
         <p:spPr>
           <a:xfrm>
-            <a:off x="7799832" y="2935224"/>
+            <a:off x="7799832" y="2816352"/>
             <a:ext cx="3145536" cy="256032"/>
           </a:xfrm>
           <a:prstGeom prst="rect">
@@ -12653,8 +12653,8 @@
         </p:nvSpPr>
         <p:spPr>
           <a:xfrm>
-            <a:off x="7818120" y="3300984"/>
-            <a:ext cx="3090672" cy="877824"/>
+            <a:off x="7818120" y="3182112"/>
+            <a:ext cx="3090672" cy="718718"/>
           </a:xfrm>
           <a:prstGeom prst="rect">
             <a:avLst/>
@@ -12728,12 +12728,12 @@
         </p:nvSpPr>
         <p:spPr>
           <a:xfrm>
-            <a:off x="7635240" y="4498848"/>
-            <a:ext cx="3474720" cy="1143000"/>
+            <a:off x="7635240" y="4184294"/>
+            <a:ext cx="3474720" cy="1466698"/>
           </a:xfrm>
           <a:prstGeom prst="roundRect">
             <a:avLst>
-              <a:gd name="adj" fmla="val 9600"/>
+              <a:gd name="adj" fmla="val 7481"/>
             </a:avLst>
           </a:prstGeom>
           <a:solidFill>
@@ -12755,7 +12755,7 @@
         </p:nvSpPr>
         <p:spPr>
           <a:xfrm>
-            <a:off x="7799832" y="4645152"/>
+            <a:off x="7799832" y="4330598"/>
             <a:ext cx="3145536" cy="256032"/>
           </a:xfrm>
           <a:prstGeom prst="rect">
@@ -12794,8 +12794,8 @@
         </p:nvSpPr>
         <p:spPr>
           <a:xfrm>
-            <a:off x="7799832" y="4974336"/>
-            <a:ext cx="3145536" cy="576072"/>
+            <a:off x="7799832" y="4659782"/>
+            <a:ext cx="3145536" cy="899770"/>
           </a:xfrm>
           <a:prstGeom prst="rect">
             <a:avLst/>
@@ -12821,7 +12821,7 @@
                 <a:ea typeface="Aptos" pitchFamily="34" charset="-122"/>
                 <a:cs typeface="Aptos" pitchFamily="34" charset="-120"/>
               </a:rPr>
-              <a:t>Use the assignment to test whether you can explain the concept, apply it to a realistic public health situation, and.</a:t>
+              <a:t>Use the assignment to test whether you can explain the concept, apply it to a realistic public health situation, and identify what would need review before the work moves forward.</a:t>
             </a:r>
             <a:endParaRPr lang="en-US" sz="1320" dirty="0"/>
           </a:p>
@@ -13190,11 +13190,11 @@
         <p:spPr>
           <a:xfrm>
             <a:off x="7635240" y="1325880"/>
-            <a:ext cx="3474720" cy="1325880"/>
+            <a:ext cx="3474720" cy="1207008"/>
           </a:xfrm>
           <a:prstGeom prst="roundRect">
             <a:avLst>
-              <a:gd name="adj" fmla="val 8276"/>
+              <a:gd name="adj" fmla="val 9091"/>
             </a:avLst>
           </a:prstGeom>
           <a:solidFill>
@@ -13256,7 +13256,7 @@
         <p:spPr>
           <a:xfrm>
             <a:off x="7799832" y="1801368"/>
-            <a:ext cx="3145536" cy="758952"/>
+            <a:ext cx="3145536" cy="640080"/>
           </a:xfrm>
           <a:prstGeom prst="rect">
             <a:avLst/>
@@ -13296,12 +13296,12 @@
         </p:nvSpPr>
         <p:spPr>
           <a:xfrm>
-            <a:off x="7635240" y="2788920"/>
-            <a:ext cx="3474720" cy="1536192"/>
+            <a:off x="7635240" y="2670048"/>
+            <a:ext cx="3474720" cy="1377086"/>
           </a:xfrm>
           <a:prstGeom prst="roundRect">
             <a:avLst>
-              <a:gd name="adj" fmla="val 7143"/>
+              <a:gd name="adj" fmla="val 7968"/>
             </a:avLst>
           </a:prstGeom>
           <a:solidFill>
@@ -13323,7 +13323,7 @@
         </p:nvSpPr>
         <p:spPr>
           <a:xfrm>
-            <a:off x="7799832" y="2935224"/>
+            <a:off x="7799832" y="2816352"/>
             <a:ext cx="3145536" cy="256032"/>
           </a:xfrm>
           <a:prstGeom prst="rect">
@@ -13362,8 +13362,8 @@
         </p:nvSpPr>
         <p:spPr>
           <a:xfrm>
-            <a:off x="7818120" y="3300984"/>
-            <a:ext cx="3090672" cy="877824"/>
+            <a:off x="7818120" y="3182112"/>
+            <a:ext cx="3090672" cy="718718"/>
           </a:xfrm>
           <a:prstGeom prst="rect">
             <a:avLst/>
@@ -13437,12 +13437,12 @@
         </p:nvSpPr>
         <p:spPr>
           <a:xfrm>
-            <a:off x="7635240" y="4498848"/>
-            <a:ext cx="3474720" cy="1143000"/>
+            <a:off x="7635240" y="4184294"/>
+            <a:ext cx="3474720" cy="1466698"/>
           </a:xfrm>
           <a:prstGeom prst="roundRect">
             <a:avLst>
-              <a:gd name="adj" fmla="val 9600"/>
+              <a:gd name="adj" fmla="val 7481"/>
             </a:avLst>
           </a:prstGeom>
           <a:solidFill>
@@ -13464,7 +13464,7 @@
         </p:nvSpPr>
         <p:spPr>
           <a:xfrm>
-            <a:off x="7799832" y="4645152"/>
+            <a:off x="7799832" y="4330598"/>
             <a:ext cx="3145536" cy="256032"/>
           </a:xfrm>
           <a:prstGeom prst="rect">
@@ -13503,8 +13503,8 @@
         </p:nvSpPr>
         <p:spPr>
           <a:xfrm>
-            <a:off x="7799832" y="4974336"/>
-            <a:ext cx="3145536" cy="576072"/>
+            <a:off x="7799832" y="4659782"/>
+            <a:ext cx="3145536" cy="899770"/>
           </a:xfrm>
           <a:prstGeom prst="rect">
             <a:avLst/>
@@ -13530,7 +13530,7 @@
                 <a:ea typeface="Aptos" pitchFamily="34" charset="-122"/>
                 <a:cs typeface="Aptos" pitchFamily="34" charset="-120"/>
               </a:rPr>
-              <a:t>Use the concept to clarify workflow changes, dependencies, staffing, procurement requirements, training needs, and.</a:t>
+              <a:t>Use the concept to clarify workflow changes, dependencies, staffing, procurement requirements, training needs, and implementation checkpoints.</a:t>
             </a:r>
             <a:endParaRPr lang="en-US" sz="1320" dirty="0"/>
           </a:p>
@@ -14008,7 +14008,7 @@
                 <a:ea typeface="Aptos" pitchFamily="34" charset="-122"/>
                 <a:cs typeface="Aptos" pitchFamily="34" charset="-120"/>
               </a:rPr>
-              <a:t>Use the related plays to identify decisions, participants, timing, approvals, and documentation needed for responsible.</a:t>
+              <a:t>Use the related plays to identify decisions, participants, timing, approvals, and documentation needed for responsible implementation.</a:t>
             </a:r>
             <a:endParaRPr lang="en-US" sz="1320" dirty="0"/>
           </a:p>
@@ -14627,7 +14627,7 @@
                 <a:ea typeface="Aptos" pitchFamily="34" charset="-122"/>
                 <a:cs typeface="Aptos" pitchFamily="34" charset="-120"/>
               </a:rPr>
-              <a:t>Use linked tools when your department needs a structured worksheet, template, checklist, review process, or.</a:t>
+              <a:t>Use linked tools when your department needs a structured worksheet, template, checklist, review process, or documentation artifact.</a:t>
             </a:r>
             <a:endParaRPr lang="en-US" sz="1320" dirty="0"/>
           </a:p>
@@ -15137,11 +15137,11 @@
         <p:spPr>
           <a:xfrm>
             <a:off x="7635240" y="1325880"/>
-            <a:ext cx="3474720" cy="1325880"/>
+            <a:ext cx="3474720" cy="1207008"/>
           </a:xfrm>
           <a:prstGeom prst="roundRect">
             <a:avLst>
-              <a:gd name="adj" fmla="val 8276"/>
+              <a:gd name="adj" fmla="val 9091"/>
             </a:avLst>
           </a:prstGeom>
           <a:solidFill>
@@ -15203,7 +15203,7 @@
         <p:spPr>
           <a:xfrm>
             <a:off x="7799832" y="1801368"/>
-            <a:ext cx="3145536" cy="758952"/>
+            <a:ext cx="3145536" cy="640080"/>
           </a:xfrm>
           <a:prstGeom prst="rect">
             <a:avLst/>
@@ -15243,12 +15243,12 @@
         </p:nvSpPr>
         <p:spPr>
           <a:xfrm>
-            <a:off x="7635240" y="2788920"/>
-            <a:ext cx="3474720" cy="1536192"/>
+            <a:off x="7635240" y="2670048"/>
+            <a:ext cx="3474720" cy="1377086"/>
           </a:xfrm>
           <a:prstGeom prst="roundRect">
             <a:avLst>
-              <a:gd name="adj" fmla="val 7143"/>
+              <a:gd name="adj" fmla="val 7968"/>
             </a:avLst>
           </a:prstGeom>
           <a:solidFill>
@@ -15270,7 +15270,7 @@
         </p:nvSpPr>
         <p:spPr>
           <a:xfrm>
-            <a:off x="7799832" y="2935224"/>
+            <a:off x="7799832" y="2816352"/>
             <a:ext cx="3145536" cy="256032"/>
           </a:xfrm>
           <a:prstGeom prst="rect">
@@ -15309,8 +15309,8 @@
         </p:nvSpPr>
         <p:spPr>
           <a:xfrm>
-            <a:off x="7818120" y="3300984"/>
-            <a:ext cx="3090672" cy="877824"/>
+            <a:off x="7818120" y="3182112"/>
+            <a:ext cx="3090672" cy="718718"/>
           </a:xfrm>
           <a:prstGeom prst="rect">
             <a:avLst/>
@@ -15367,12 +15367,12 @@
         </p:nvSpPr>
         <p:spPr>
           <a:xfrm>
-            <a:off x="7635240" y="4498848"/>
-            <a:ext cx="3474720" cy="1143000"/>
+            <a:off x="7635240" y="4184294"/>
+            <a:ext cx="3474720" cy="1466698"/>
           </a:xfrm>
           <a:prstGeom prst="roundRect">
             <a:avLst>
-              <a:gd name="adj" fmla="val 9600"/>
+              <a:gd name="adj" fmla="val 7481"/>
             </a:avLst>
           </a:prstGeom>
           <a:solidFill>
@@ -15394,7 +15394,7 @@
         </p:nvSpPr>
         <p:spPr>
           <a:xfrm>
-            <a:off x="7799832" y="4645152"/>
+            <a:off x="7799832" y="4330598"/>
             <a:ext cx="3145536" cy="256032"/>
           </a:xfrm>
           <a:prstGeom prst="rect">
@@ -15433,8 +15433,8 @@
         </p:nvSpPr>
         <p:spPr>
           <a:xfrm>
-            <a:off x="7799832" y="4974336"/>
-            <a:ext cx="3145536" cy="576072"/>
+            <a:off x="7799832" y="4659782"/>
+            <a:ext cx="3145536" cy="899770"/>
           </a:xfrm>
           <a:prstGeom prst="rect">
             <a:avLst/>
@@ -15460,7 +15460,7 @@
                 <a:ea typeface="Aptos" pitchFamily="34" charset="-122"/>
                 <a:cs typeface="Aptos" pitchFamily="34" charset="-120"/>
               </a:rPr>
-              <a:t>Use the assignment to test whether you can explain the concept, apply it to a realistic public health situation, and.</a:t>
+              <a:t>Use the assignment to test whether you can explain the concept, apply it to a realistic public health situation, and identify what would need review before the work moves forward.</a:t>
             </a:r>
             <a:endParaRPr lang="en-US" sz="1320" dirty="0"/>
           </a:p>
@@ -15829,11 +15829,11 @@
         <p:spPr>
           <a:xfrm>
             <a:off x="7635240" y="1325880"/>
-            <a:ext cx="3474720" cy="1325880"/>
+            <a:ext cx="3474720" cy="1207008"/>
           </a:xfrm>
           <a:prstGeom prst="roundRect">
             <a:avLst>
-              <a:gd name="adj" fmla="val 8276"/>
+              <a:gd name="adj" fmla="val 9091"/>
             </a:avLst>
           </a:prstGeom>
           <a:solidFill>
@@ -15895,7 +15895,7 @@
         <p:spPr>
           <a:xfrm>
             <a:off x="7799832" y="1801368"/>
-            <a:ext cx="3145536" cy="758952"/>
+            <a:ext cx="3145536" cy="640080"/>
           </a:xfrm>
           <a:prstGeom prst="rect">
             <a:avLst/>
@@ -15921,7 +15921,7 @@
                 <a:ea typeface="Aptos" pitchFamily="34" charset="-122"/>
                 <a:cs typeface="Aptos" pitchFamily="34" charset="-120"/>
               </a:rPr>
-              <a:t>APIs, webhooks, and event-driven workflows are the mechanisms that allow systems to interact.</a:t>
+              <a:t>APIs, webhooks, and event-driven workflows are the mechanisms that allow systems to.</a:t>
             </a:r>
             <a:endParaRPr lang="en-US" sz="1320" dirty="0"/>
           </a:p>
@@ -15935,12 +15935,12 @@
         </p:nvSpPr>
         <p:spPr>
           <a:xfrm>
-            <a:off x="7635240" y="2788920"/>
-            <a:ext cx="3474720" cy="1536192"/>
+            <a:off x="7635240" y="2670048"/>
+            <a:ext cx="3474720" cy="1377086"/>
           </a:xfrm>
           <a:prstGeom prst="roundRect">
             <a:avLst>
-              <a:gd name="adj" fmla="val 7143"/>
+              <a:gd name="adj" fmla="val 7968"/>
             </a:avLst>
           </a:prstGeom>
           <a:solidFill>
@@ -15962,8 +15962,8 @@
         </p:nvSpPr>
         <p:spPr>
           <a:xfrm>
-            <a:off x="7799832" y="2935224"/>
-            <a:ext cx="3145536" cy="256032"/>
+            <a:off x="7799832" y="2798064"/>
+            <a:ext cx="3145536" cy="237744"/>
           </a:xfrm>
           <a:prstGeom prst="rect">
             <a:avLst/>
@@ -15979,7 +15979,7 @@
               <a:buNone/>
             </a:pPr>
             <a:r>
-              <a:rPr lang="en-US" sz="1300" b="1" dirty="0">
+              <a:rPr lang="en-US" sz="1250" b="1" dirty="0">
                 <a:solidFill>
                   <a:srgbClr val="0068B7"/>
                 </a:solidFill>
@@ -15987,84 +15987,317 @@
                 <a:ea typeface="Aptos" pitchFamily="34" charset="-122"/>
                 <a:cs typeface="Aptos" pitchFamily="34" charset="-120"/>
               </a:rPr>
-              <a:t>Concept checkpoints</a:t>
-            </a:r>
-            <a:endParaRPr lang="en-US" sz="1300" dirty="0"/>
-          </a:p>
-        </p:txBody>
-      </p:sp>
-      <p:sp>
-        <p:nvSpPr>
-          <p:cNvPr id="15" name="Text 13"/>
-          <p:cNvSpPr/>
-          <p:nvPr/>
-        </p:nvSpPr>
-        <p:spPr>
-          <a:xfrm>
-            <a:off x="7818120" y="3300984"/>
-            <a:ext cx="3090672" cy="877824"/>
-          </a:xfrm>
-          <a:prstGeom prst="rect">
-            <a:avLst/>
-          </a:prstGeom>
-          <a:noFill/>
-          <a:ln/>
-        </p:spPr>
-        <p:txBody>
-          <a:bodyPr wrap="square" lIns="508" tIns="508" rIns="508" bIns="508" rtlCol="0" anchor="t">
+              <a:t>Implementation path</a:t>
+            </a:r>
+            <a:endParaRPr lang="en-US" sz="1250" dirty="0"/>
+          </a:p>
+        </p:txBody>
+      </p:sp>
+      <p:sp>
+        <p:nvSpPr>
+          <p:cNvPr id="15" name="Shape 13"/>
+          <p:cNvSpPr/>
+          <p:nvPr/>
+        </p:nvSpPr>
+        <p:spPr>
+          <a:xfrm>
+            <a:off x="8763000" y="3351276"/>
+            <a:ext cx="164592" cy="0"/>
+          </a:xfrm>
+          <a:prstGeom prst="line">
+            <a:avLst/>
+          </a:prstGeom>
+          <a:noFill/>
+          <a:ln w="15240">
+            <a:solidFill>
+              <a:srgbClr val="8ABBD8"/>
+            </a:solidFill>
+            <a:prstDash val="solid"/>
+          </a:ln>
+        </p:spPr>
+      </p:sp>
+      <p:sp>
+        <p:nvSpPr>
+          <p:cNvPr id="16" name="Shape 14"/>
+          <p:cNvSpPr/>
+          <p:nvPr/>
+        </p:nvSpPr>
+        <p:spPr>
+          <a:xfrm>
+            <a:off x="7872984" y="3200400"/>
+            <a:ext cx="890016" cy="301752"/>
+          </a:xfrm>
+          <a:prstGeom prst="roundRect">
+            <a:avLst>
+              <a:gd name="adj" fmla="val 24242"/>
+            </a:avLst>
+          </a:prstGeom>
+          <a:solidFill>
+            <a:srgbClr val="0068B7"/>
+          </a:solidFill>
+          <a:ln w="12700">
+            <a:solidFill>
+              <a:srgbClr val="0068B7"/>
+            </a:solidFill>
+            <a:prstDash val="solid"/>
+          </a:ln>
+        </p:spPr>
+      </p:sp>
+      <p:sp>
+        <p:nvSpPr>
+          <p:cNvPr id="17" name="Text 15"/>
+          <p:cNvSpPr/>
+          <p:nvPr/>
+        </p:nvSpPr>
+        <p:spPr>
+          <a:xfrm>
+            <a:off x="7909560" y="3273552"/>
+            <a:ext cx="816864" cy="146304"/>
+          </a:xfrm>
+          <a:prstGeom prst="rect">
+            <a:avLst/>
+          </a:prstGeom>
+          <a:noFill/>
+          <a:ln/>
+        </p:spPr>
+        <p:txBody>
+          <a:bodyPr wrap="square" lIns="0" tIns="0" rIns="0" bIns="0" rtlCol="0" anchor="ctr">
             <a:normAutofit/>
           </a:bodyPr>
           <a:lstStyle/>
           <a:p>
-            <a:pPr indent="0" marL="0">
-              <a:buNone/>
-            </a:pPr>
-            <a:r>
-              <a:rPr lang="en-US" sz="1220" dirty="0">
-                <a:solidFill>
-                  <a:srgbClr val="17364A"/>
-                </a:solidFill>
-                <a:latin typeface="Aptos" pitchFamily="34" charset="0"/>
-                <a:ea typeface="Aptos" pitchFamily="34" charset="-122"/>
-                <a:cs typeface="Aptos" pitchFamily="34" charset="-120"/>
-              </a:rPr>
-              <a:t>They are especially important for AI because many AI tools need to.</a:t>
-            </a:r>
-            <a:endParaRPr lang="en-US" sz="1220" dirty="0"/>
-          </a:p>
-          <a:p>
-            <a:pPr indent="0" marL="0">
-              <a:buNone/>
-            </a:pPr>
-            <a:r>
-              <a:rPr lang="en-US" sz="1220" dirty="0">
-                <a:solidFill>
-                  <a:srgbClr val="17364A"/>
-                </a:solidFill>
-                <a:latin typeface="Aptos" pitchFamily="34" charset="0"/>
-                <a:ea typeface="Aptos" pitchFamily="34" charset="-122"/>
-                <a:cs typeface="Aptos" pitchFamily="34" charset="-120"/>
-              </a:rPr>
-              <a:t>This module teaches non-developer public health staff enough.</a:t>
-            </a:r>
-            <a:endParaRPr lang="en-US" sz="1220" dirty="0"/>
-          </a:p>
-        </p:txBody>
-      </p:sp>
-      <p:sp>
-        <p:nvSpPr>
-          <p:cNvPr id="16" name="Shape 14"/>
-          <p:cNvSpPr/>
-          <p:nvPr/>
-        </p:nvSpPr>
-        <p:spPr>
-          <a:xfrm>
-            <a:off x="7635240" y="4498848"/>
-            <a:ext cx="3474720" cy="1143000"/>
+            <a:pPr algn="ctr" indent="0" marL="0">
+              <a:buNone/>
+            </a:pPr>
+            <a:r>
+              <a:rPr lang="en-US" sz="880" b="1" dirty="0">
+                <a:solidFill>
+                  <a:srgbClr val="FFFFFF"/>
+                </a:solidFill>
+                <a:latin typeface="Aptos" pitchFamily="34" charset="0"/>
+                <a:ea typeface="Aptos" pitchFamily="34" charset="-122"/>
+                <a:cs typeface="Aptos" pitchFamily="34" charset="-120"/>
+              </a:rPr>
+              <a:t>Need</a:t>
+            </a:r>
+            <a:endParaRPr lang="en-US" sz="880" dirty="0"/>
+          </a:p>
+        </p:txBody>
+      </p:sp>
+      <p:sp>
+        <p:nvSpPr>
+          <p:cNvPr id="18" name="Shape 16"/>
+          <p:cNvSpPr/>
+          <p:nvPr/>
+        </p:nvSpPr>
+        <p:spPr>
+          <a:xfrm>
+            <a:off x="9817608" y="3351276"/>
+            <a:ext cx="164592" cy="0"/>
+          </a:xfrm>
+          <a:prstGeom prst="line">
+            <a:avLst/>
+          </a:prstGeom>
+          <a:noFill/>
+          <a:ln w="15240">
+            <a:solidFill>
+              <a:srgbClr val="8ABBD8"/>
+            </a:solidFill>
+            <a:prstDash val="solid"/>
+          </a:ln>
+        </p:spPr>
+      </p:sp>
+      <p:sp>
+        <p:nvSpPr>
+          <p:cNvPr id="19" name="Shape 17"/>
+          <p:cNvSpPr/>
+          <p:nvPr/>
+        </p:nvSpPr>
+        <p:spPr>
+          <a:xfrm>
+            <a:off x="8927592" y="3200400"/>
+            <a:ext cx="890016" cy="301752"/>
           </a:xfrm>
           <a:prstGeom prst="roundRect">
             <a:avLst>
-              <a:gd name="adj" fmla="val 9600"/>
+              <a:gd name="adj" fmla="val 24242"/>
+            </a:avLst>
+          </a:prstGeom>
+          <a:solidFill>
+            <a:srgbClr val="2F8A28"/>
+          </a:solidFill>
+          <a:ln w="12700">
+            <a:solidFill>
+              <a:srgbClr val="2F8A28"/>
+            </a:solidFill>
+            <a:prstDash val="solid"/>
+          </a:ln>
+        </p:spPr>
+      </p:sp>
+      <p:sp>
+        <p:nvSpPr>
+          <p:cNvPr id="20" name="Text 18"/>
+          <p:cNvSpPr/>
+          <p:nvPr/>
+        </p:nvSpPr>
+        <p:spPr>
+          <a:xfrm>
+            <a:off x="8964168" y="3273552"/>
+            <a:ext cx="816864" cy="146304"/>
+          </a:xfrm>
+          <a:prstGeom prst="rect">
+            <a:avLst/>
+          </a:prstGeom>
+          <a:noFill/>
+          <a:ln/>
+        </p:spPr>
+        <p:txBody>
+          <a:bodyPr wrap="square" lIns="0" tIns="0" rIns="0" bIns="0" rtlCol="0" anchor="ctr">
+            <a:normAutofit/>
+          </a:bodyPr>
+          <a:lstStyle/>
+          <a:p>
+            <a:pPr algn="ctr" indent="0" marL="0">
+              <a:buNone/>
+            </a:pPr>
+            <a:r>
+              <a:rPr lang="en-US" sz="880" b="1" dirty="0">
+                <a:solidFill>
+                  <a:srgbClr val="FFFFFF"/>
+                </a:solidFill>
+                <a:latin typeface="Aptos" pitchFamily="34" charset="0"/>
+                <a:ea typeface="Aptos" pitchFamily="34" charset="-122"/>
+                <a:cs typeface="Aptos" pitchFamily="34" charset="-120"/>
+              </a:rPr>
+              <a:t>Build</a:t>
+            </a:r>
+            <a:endParaRPr lang="en-US" sz="880" dirty="0"/>
+          </a:p>
+        </p:txBody>
+      </p:sp>
+      <p:sp>
+        <p:nvSpPr>
+          <p:cNvPr id="21" name="Shape 19"/>
+          <p:cNvSpPr/>
+          <p:nvPr/>
+        </p:nvSpPr>
+        <p:spPr>
+          <a:xfrm>
+            <a:off x="9982200" y="3200400"/>
+            <a:ext cx="890016" cy="301752"/>
+          </a:xfrm>
+          <a:prstGeom prst="roundRect">
+            <a:avLst>
+              <a:gd name="adj" fmla="val 24242"/>
+            </a:avLst>
+          </a:prstGeom>
+          <a:solidFill>
+            <a:srgbClr val="6A4CA3"/>
+          </a:solidFill>
+          <a:ln w="12700">
+            <a:solidFill>
+              <a:srgbClr val="6A4CA3"/>
+            </a:solidFill>
+            <a:prstDash val="solid"/>
+          </a:ln>
+        </p:spPr>
+      </p:sp>
+      <p:sp>
+        <p:nvSpPr>
+          <p:cNvPr id="22" name="Text 20"/>
+          <p:cNvSpPr/>
+          <p:nvPr/>
+        </p:nvSpPr>
+        <p:spPr>
+          <a:xfrm>
+            <a:off x="10018776" y="3273552"/>
+            <a:ext cx="816864" cy="146304"/>
+          </a:xfrm>
+          <a:prstGeom prst="rect">
+            <a:avLst/>
+          </a:prstGeom>
+          <a:noFill/>
+          <a:ln/>
+        </p:spPr>
+        <p:txBody>
+          <a:bodyPr wrap="square" lIns="0" tIns="0" rIns="0" bIns="0" rtlCol="0" anchor="ctr">
+            <a:normAutofit/>
+          </a:bodyPr>
+          <a:lstStyle/>
+          <a:p>
+            <a:pPr algn="ctr" indent="0" marL="0">
+              <a:buNone/>
+            </a:pPr>
+            <a:r>
+              <a:rPr lang="en-US" sz="880" b="1" dirty="0">
+                <a:solidFill>
+                  <a:srgbClr val="FFFFFF"/>
+                </a:solidFill>
+                <a:latin typeface="Aptos" pitchFamily="34" charset="0"/>
+                <a:ea typeface="Aptos" pitchFamily="34" charset="-122"/>
+                <a:cs typeface="Aptos" pitchFamily="34" charset="-120"/>
+              </a:rPr>
+              <a:t>Adopt</a:t>
+            </a:r>
+            <a:endParaRPr lang="en-US" sz="880" dirty="0"/>
+          </a:p>
+        </p:txBody>
+      </p:sp>
+      <p:sp>
+        <p:nvSpPr>
+          <p:cNvPr id="23" name="Text 21"/>
+          <p:cNvSpPr/>
+          <p:nvPr/>
+        </p:nvSpPr>
+        <p:spPr>
+          <a:xfrm>
+            <a:off x="7854696" y="3694176"/>
+            <a:ext cx="3035808" cy="206654"/>
+          </a:xfrm>
+          <a:prstGeom prst="rect">
+            <a:avLst/>
+          </a:prstGeom>
+          <a:noFill/>
+          <a:ln/>
+        </p:spPr>
+        <p:txBody>
+          <a:bodyPr wrap="square" lIns="254" tIns="254" rIns="254" bIns="254" rtlCol="0" anchor="t">
+            <a:normAutofit/>
+          </a:bodyPr>
+          <a:lstStyle/>
+          <a:p>
+            <a:pPr indent="0" marL="0">
+              <a:buNone/>
+            </a:pPr>
+            <a:r>
+              <a:rPr lang="en-US" sz="1120" dirty="0">
+                <a:solidFill>
+                  <a:srgbClr val="17364A"/>
+                </a:solidFill>
+                <a:latin typeface="Aptos" pitchFamily="34" charset="0"/>
+                <a:ea typeface="Aptos" pitchFamily="34" charset="-122"/>
+                <a:cs typeface="Aptos" pitchFamily="34" charset="-120"/>
+              </a:rPr>
+              <a:t>Implementation work should make dependencies, approvals, training, and sustainment visible before launch.</a:t>
+            </a:r>
+            <a:endParaRPr lang="en-US" sz="1120" dirty="0"/>
+          </a:p>
+        </p:txBody>
+      </p:sp>
+      <p:sp>
+        <p:nvSpPr>
+          <p:cNvPr id="24" name="Shape 22"/>
+          <p:cNvSpPr/>
+          <p:nvPr/>
+        </p:nvSpPr>
+        <p:spPr>
+          <a:xfrm>
+            <a:off x="7635240" y="4184294"/>
+            <a:ext cx="3474720" cy="1466698"/>
+          </a:xfrm>
+          <a:prstGeom prst="roundRect">
+            <a:avLst>
+              <a:gd name="adj" fmla="val 7481"/>
             </a:avLst>
           </a:prstGeom>
           <a:solidFill>
@@ -16080,13 +16313,13 @@
       </p:sp>
       <p:sp>
         <p:nvSpPr>
-          <p:cNvPr id="17" name="Text 15"/>
-          <p:cNvSpPr/>
-          <p:nvPr/>
-        </p:nvSpPr>
-        <p:spPr>
-          <a:xfrm>
-            <a:off x="7799832" y="4645152"/>
+          <p:cNvPr id="25" name="Text 23"/>
+          <p:cNvSpPr/>
+          <p:nvPr/>
+        </p:nvSpPr>
+        <p:spPr>
+          <a:xfrm>
+            <a:off x="7799832" y="4330598"/>
             <a:ext cx="3145536" cy="256032"/>
           </a:xfrm>
           <a:prstGeom prst="rect">
@@ -16119,14 +16352,14 @@
       </p:sp>
       <p:sp>
         <p:nvSpPr>
-          <p:cNvPr id="18" name="Text 16"/>
-          <p:cNvSpPr/>
-          <p:nvPr/>
-        </p:nvSpPr>
-        <p:spPr>
-          <a:xfrm>
-            <a:off x="7799832" y="4974336"/>
-            <a:ext cx="3145536" cy="576072"/>
+          <p:cNvPr id="26" name="Text 24"/>
+          <p:cNvSpPr/>
+          <p:nvPr/>
+        </p:nvSpPr>
+        <p:spPr>
+          <a:xfrm>
+            <a:off x="7799832" y="4659782"/>
+            <a:ext cx="3145536" cy="899770"/>
           </a:xfrm>
           <a:prstGeom prst="rect">
             <a:avLst/>
@@ -16152,7 +16385,7 @@
                 <a:ea typeface="Aptos" pitchFamily="34" charset="-122"/>
                 <a:cs typeface="Aptos" pitchFamily="34" charset="-120"/>
               </a:rPr>
-              <a:t>Use the concept to clarify workflow changes, dependencies, staffing, procurement requirements, training needs, and.</a:t>
+              <a:t>Use the concept to clarify workflow changes, dependencies, staffing, procurement requirements, training needs, and implementation checkpoints.</a:t>
             </a:r>
             <a:endParaRPr lang="en-US" sz="1320" dirty="0"/>
           </a:p>
@@ -16521,11 +16754,11 @@
         <p:spPr>
           <a:xfrm>
             <a:off x="7635240" y="1325880"/>
-            <a:ext cx="3474720" cy="1325880"/>
+            <a:ext cx="3474720" cy="1207008"/>
           </a:xfrm>
           <a:prstGeom prst="roundRect">
             <a:avLst>
-              <a:gd name="adj" fmla="val 8276"/>
+              <a:gd name="adj" fmla="val 9091"/>
             </a:avLst>
           </a:prstGeom>
           <a:solidFill>
@@ -16587,7 +16820,7 @@
         <p:spPr>
           <a:xfrm>
             <a:off x="7799832" y="1801368"/>
-            <a:ext cx="3145536" cy="758952"/>
+            <a:ext cx="3145536" cy="640080"/>
           </a:xfrm>
           <a:prstGeom prst="rect">
             <a:avLst/>
@@ -16627,12 +16860,12 @@
         </p:nvSpPr>
         <p:spPr>
           <a:xfrm>
-            <a:off x="7635240" y="2788920"/>
-            <a:ext cx="3474720" cy="1536192"/>
+            <a:off x="7635240" y="2670048"/>
+            <a:ext cx="3474720" cy="1377086"/>
           </a:xfrm>
           <a:prstGeom prst="roundRect">
             <a:avLst>
-              <a:gd name="adj" fmla="val 7143"/>
+              <a:gd name="adj" fmla="val 7968"/>
             </a:avLst>
           </a:prstGeom>
           <a:solidFill>
@@ -16654,8 +16887,8 @@
         </p:nvSpPr>
         <p:spPr>
           <a:xfrm>
-            <a:off x="7799832" y="2935224"/>
-            <a:ext cx="3145536" cy="256032"/>
+            <a:off x="7799832" y="2798064"/>
+            <a:ext cx="3145536" cy="237744"/>
           </a:xfrm>
           <a:prstGeom prst="rect">
             <a:avLst/>
@@ -16671,7 +16904,7 @@
               <a:buNone/>
             </a:pPr>
             <a:r>
-              <a:rPr lang="en-US" sz="1300" b="1" dirty="0">
+              <a:rPr lang="en-US" sz="1250" b="1" dirty="0">
                 <a:solidFill>
                   <a:srgbClr val="0068B7"/>
                 </a:solidFill>
@@ -16679,101 +16912,317 @@
                 <a:ea typeface="Aptos" pitchFamily="34" charset="-122"/>
                 <a:cs typeface="Aptos" pitchFamily="34" charset="-120"/>
               </a:rPr>
-              <a:t>Concept checkpoints</a:t>
-            </a:r>
-            <a:endParaRPr lang="en-US" sz="1300" dirty="0"/>
-          </a:p>
-        </p:txBody>
-      </p:sp>
-      <p:sp>
-        <p:nvSpPr>
-          <p:cNvPr id="15" name="Text 13"/>
-          <p:cNvSpPr/>
-          <p:nvPr/>
-        </p:nvSpPr>
-        <p:spPr>
-          <a:xfrm>
-            <a:off x="7818120" y="3300984"/>
-            <a:ext cx="3090672" cy="877824"/>
-          </a:xfrm>
-          <a:prstGeom prst="rect">
-            <a:avLst/>
-          </a:prstGeom>
-          <a:noFill/>
-          <a:ln/>
-        </p:spPr>
-        <p:txBody>
-          <a:bodyPr wrap="square" lIns="508" tIns="508" rIns="508" bIns="508" rtlCol="0" anchor="t">
+              <a:t>Governance pathway</a:t>
+            </a:r>
+            <a:endParaRPr lang="en-US" sz="1250" dirty="0"/>
+          </a:p>
+        </p:txBody>
+      </p:sp>
+      <p:sp>
+        <p:nvSpPr>
+          <p:cNvPr id="15" name="Shape 13"/>
+          <p:cNvSpPr/>
+          <p:nvPr/>
+        </p:nvSpPr>
+        <p:spPr>
+          <a:xfrm>
+            <a:off x="8763000" y="3351276"/>
+            <a:ext cx="164592" cy="0"/>
+          </a:xfrm>
+          <a:prstGeom prst="line">
+            <a:avLst/>
+          </a:prstGeom>
+          <a:noFill/>
+          <a:ln w="15240">
+            <a:solidFill>
+              <a:srgbClr val="8ABBD8"/>
+            </a:solidFill>
+            <a:prstDash val="solid"/>
+          </a:ln>
+        </p:spPr>
+      </p:sp>
+      <p:sp>
+        <p:nvSpPr>
+          <p:cNvPr id="16" name="Shape 14"/>
+          <p:cNvSpPr/>
+          <p:nvPr/>
+        </p:nvSpPr>
+        <p:spPr>
+          <a:xfrm>
+            <a:off x="7872984" y="3200400"/>
+            <a:ext cx="890016" cy="301752"/>
+          </a:xfrm>
+          <a:prstGeom prst="roundRect">
+            <a:avLst>
+              <a:gd name="adj" fmla="val 24242"/>
+            </a:avLst>
+          </a:prstGeom>
+          <a:solidFill>
+            <a:srgbClr val="0068B7"/>
+          </a:solidFill>
+          <a:ln w="12700">
+            <a:solidFill>
+              <a:srgbClr val="0068B7"/>
+            </a:solidFill>
+            <a:prstDash val="solid"/>
+          </a:ln>
+        </p:spPr>
+      </p:sp>
+      <p:sp>
+        <p:nvSpPr>
+          <p:cNvPr id="17" name="Text 15"/>
+          <p:cNvSpPr/>
+          <p:nvPr/>
+        </p:nvSpPr>
+        <p:spPr>
+          <a:xfrm>
+            <a:off x="7909560" y="3273552"/>
+            <a:ext cx="816864" cy="146304"/>
+          </a:xfrm>
+          <a:prstGeom prst="rect">
+            <a:avLst/>
+          </a:prstGeom>
+          <a:noFill/>
+          <a:ln/>
+        </p:spPr>
+        <p:txBody>
+          <a:bodyPr wrap="square" lIns="0" tIns="0" rIns="0" bIns="0" rtlCol="0" anchor="ctr">
             <a:normAutofit/>
           </a:bodyPr>
           <a:lstStyle/>
           <a:p>
-            <a:pPr indent="0" marL="0">
-              <a:buNone/>
-            </a:pPr>
-            <a:r>
-              <a:rPr lang="en-US" sz="1220" dirty="0">
-                <a:solidFill>
-                  <a:srgbClr val="17364A"/>
-                </a:solidFill>
-                <a:latin typeface="Aptos" pitchFamily="34" charset="0"/>
-                <a:ea typeface="Aptos" pitchFamily="34" charset="-122"/>
-                <a:cs typeface="Aptos" pitchFamily="34" charset="-120"/>
-              </a:rPr>
-              <a:t>This national-level module is intended for training and planning.</a:t>
-            </a:r>
-            <a:endParaRPr lang="en-US" sz="1220" dirty="0"/>
-          </a:p>
-          <a:p>
-            <a:pPr indent="0" marL="0">
-              <a:buNone/>
-            </a:pPr>
-            <a:r>
-              <a:rPr lang="en-US" sz="1220" dirty="0">
-                <a:solidFill>
-                  <a:srgbClr val="17364A"/>
-                </a:solidFill>
-                <a:latin typeface="Aptos" pitchFamily="34" charset="0"/>
-                <a:ea typeface="Aptos" pitchFamily="34" charset="-122"/>
-                <a:cs typeface="Aptos" pitchFamily="34" charset="-120"/>
-              </a:rPr>
-              <a:t>It does not replace legal, privacy, procurement, civil rights,.</a:t>
-            </a:r>
-            <a:endParaRPr lang="en-US" sz="1220" dirty="0"/>
-          </a:p>
-          <a:p>
-            <a:pPr indent="0" marL="0">
-              <a:buNone/>
-            </a:pPr>
-            <a:r>
-              <a:rPr lang="en-US" sz="1220" dirty="0">
-                <a:solidFill>
-                  <a:srgbClr val="17364A"/>
-                </a:solidFill>
-                <a:latin typeface="Aptos" pitchFamily="34" charset="0"/>
-                <a:ea typeface="Aptos" pitchFamily="34" charset="-122"/>
-                <a:cs typeface="Aptos" pitchFamily="34" charset="-120"/>
-              </a:rPr>
-              <a:t>Learners should confirm applicable requirements in their own.</a:t>
-            </a:r>
-            <a:endParaRPr lang="en-US" sz="1220" dirty="0"/>
-          </a:p>
-        </p:txBody>
-      </p:sp>
-      <p:sp>
-        <p:nvSpPr>
-          <p:cNvPr id="16" name="Shape 14"/>
-          <p:cNvSpPr/>
-          <p:nvPr/>
-        </p:nvSpPr>
-        <p:spPr>
-          <a:xfrm>
-            <a:off x="7635240" y="4498848"/>
-            <a:ext cx="3474720" cy="1143000"/>
+            <a:pPr algn="ctr" indent="0" marL="0">
+              <a:buNone/>
+            </a:pPr>
+            <a:r>
+              <a:rPr lang="en-US" sz="880" b="1" dirty="0">
+                <a:solidFill>
+                  <a:srgbClr val="FFFFFF"/>
+                </a:solidFill>
+                <a:latin typeface="Aptos" pitchFamily="34" charset="0"/>
+                <a:ea typeface="Aptos" pitchFamily="34" charset="-122"/>
+                <a:cs typeface="Aptos" pitchFamily="34" charset="-120"/>
+              </a:rPr>
+              <a:t>Submit</a:t>
+            </a:r>
+            <a:endParaRPr lang="en-US" sz="880" dirty="0"/>
+          </a:p>
+        </p:txBody>
+      </p:sp>
+      <p:sp>
+        <p:nvSpPr>
+          <p:cNvPr id="18" name="Shape 16"/>
+          <p:cNvSpPr/>
+          <p:nvPr/>
+        </p:nvSpPr>
+        <p:spPr>
+          <a:xfrm>
+            <a:off x="9817608" y="3351276"/>
+            <a:ext cx="164592" cy="0"/>
+          </a:xfrm>
+          <a:prstGeom prst="line">
+            <a:avLst/>
+          </a:prstGeom>
+          <a:noFill/>
+          <a:ln w="15240">
+            <a:solidFill>
+              <a:srgbClr val="8ABBD8"/>
+            </a:solidFill>
+            <a:prstDash val="solid"/>
+          </a:ln>
+        </p:spPr>
+      </p:sp>
+      <p:sp>
+        <p:nvSpPr>
+          <p:cNvPr id="19" name="Shape 17"/>
+          <p:cNvSpPr/>
+          <p:nvPr/>
+        </p:nvSpPr>
+        <p:spPr>
+          <a:xfrm>
+            <a:off x="8927592" y="3200400"/>
+            <a:ext cx="890016" cy="301752"/>
           </a:xfrm>
           <a:prstGeom prst="roundRect">
             <a:avLst>
-              <a:gd name="adj" fmla="val 9600"/>
+              <a:gd name="adj" fmla="val 24242"/>
+            </a:avLst>
+          </a:prstGeom>
+          <a:solidFill>
+            <a:srgbClr val="2F8A28"/>
+          </a:solidFill>
+          <a:ln w="12700">
+            <a:solidFill>
+              <a:srgbClr val="2F8A28"/>
+            </a:solidFill>
+            <a:prstDash val="solid"/>
+          </a:ln>
+        </p:spPr>
+      </p:sp>
+      <p:sp>
+        <p:nvSpPr>
+          <p:cNvPr id="20" name="Text 18"/>
+          <p:cNvSpPr/>
+          <p:nvPr/>
+        </p:nvSpPr>
+        <p:spPr>
+          <a:xfrm>
+            <a:off x="8964168" y="3273552"/>
+            <a:ext cx="816864" cy="146304"/>
+          </a:xfrm>
+          <a:prstGeom prst="rect">
+            <a:avLst/>
+          </a:prstGeom>
+          <a:noFill/>
+          <a:ln/>
+        </p:spPr>
+        <p:txBody>
+          <a:bodyPr wrap="square" lIns="0" tIns="0" rIns="0" bIns="0" rtlCol="0" anchor="ctr">
+            <a:normAutofit/>
+          </a:bodyPr>
+          <a:lstStyle/>
+          <a:p>
+            <a:pPr algn="ctr" indent="0" marL="0">
+              <a:buNone/>
+            </a:pPr>
+            <a:r>
+              <a:rPr lang="en-US" sz="880" b="1" dirty="0">
+                <a:solidFill>
+                  <a:srgbClr val="FFFFFF"/>
+                </a:solidFill>
+                <a:latin typeface="Aptos" pitchFamily="34" charset="0"/>
+                <a:ea typeface="Aptos" pitchFamily="34" charset="-122"/>
+                <a:cs typeface="Aptos" pitchFamily="34" charset="-120"/>
+              </a:rPr>
+              <a:t>Review</a:t>
+            </a:r>
+            <a:endParaRPr lang="en-US" sz="880" dirty="0"/>
+          </a:p>
+        </p:txBody>
+      </p:sp>
+      <p:sp>
+        <p:nvSpPr>
+          <p:cNvPr id="21" name="Shape 19"/>
+          <p:cNvSpPr/>
+          <p:nvPr/>
+        </p:nvSpPr>
+        <p:spPr>
+          <a:xfrm>
+            <a:off x="9982200" y="3200400"/>
+            <a:ext cx="890016" cy="301752"/>
+          </a:xfrm>
+          <a:prstGeom prst="roundRect">
+            <a:avLst>
+              <a:gd name="adj" fmla="val 24242"/>
+            </a:avLst>
+          </a:prstGeom>
+          <a:solidFill>
+            <a:srgbClr val="6A4CA3"/>
+          </a:solidFill>
+          <a:ln w="12700">
+            <a:solidFill>
+              <a:srgbClr val="6A4CA3"/>
+            </a:solidFill>
+            <a:prstDash val="solid"/>
+          </a:ln>
+        </p:spPr>
+      </p:sp>
+      <p:sp>
+        <p:nvSpPr>
+          <p:cNvPr id="22" name="Text 20"/>
+          <p:cNvSpPr/>
+          <p:nvPr/>
+        </p:nvSpPr>
+        <p:spPr>
+          <a:xfrm>
+            <a:off x="10018776" y="3273552"/>
+            <a:ext cx="816864" cy="146304"/>
+          </a:xfrm>
+          <a:prstGeom prst="rect">
+            <a:avLst/>
+          </a:prstGeom>
+          <a:noFill/>
+          <a:ln/>
+        </p:spPr>
+        <p:txBody>
+          <a:bodyPr wrap="square" lIns="0" tIns="0" rIns="0" bIns="0" rtlCol="0" anchor="ctr">
+            <a:normAutofit/>
+          </a:bodyPr>
+          <a:lstStyle/>
+          <a:p>
+            <a:pPr algn="ctr" indent="0" marL="0">
+              <a:buNone/>
+            </a:pPr>
+            <a:r>
+              <a:rPr lang="en-US" sz="880" b="1" dirty="0">
+                <a:solidFill>
+                  <a:srgbClr val="FFFFFF"/>
+                </a:solidFill>
+                <a:latin typeface="Aptos" pitchFamily="34" charset="0"/>
+                <a:ea typeface="Aptos" pitchFamily="34" charset="-122"/>
+                <a:cs typeface="Aptos" pitchFamily="34" charset="-120"/>
+              </a:rPr>
+              <a:t>Oversee</a:t>
+            </a:r>
+            <a:endParaRPr lang="en-US" sz="880" dirty="0"/>
+          </a:p>
+        </p:txBody>
+      </p:sp>
+      <p:sp>
+        <p:nvSpPr>
+          <p:cNvPr id="23" name="Text 21"/>
+          <p:cNvSpPr/>
+          <p:nvPr/>
+        </p:nvSpPr>
+        <p:spPr>
+          <a:xfrm>
+            <a:off x="7854696" y="3694176"/>
+            <a:ext cx="3035808" cy="206654"/>
+          </a:xfrm>
+          <a:prstGeom prst="rect">
+            <a:avLst/>
+          </a:prstGeom>
+          <a:noFill/>
+          <a:ln/>
+        </p:spPr>
+        <p:txBody>
+          <a:bodyPr wrap="square" lIns="254" tIns="254" rIns="254" bIns="254" rtlCol="0" anchor="t">
+            <a:normAutofit/>
+          </a:bodyPr>
+          <a:lstStyle/>
+          <a:p>
+            <a:pPr indent="0" marL="0">
+              <a:buNone/>
+            </a:pPr>
+            <a:r>
+              <a:rPr lang="en-US" sz="1120" dirty="0">
+                <a:solidFill>
+                  <a:srgbClr val="17364A"/>
+                </a:solidFill>
+                <a:latin typeface="Aptos" pitchFamily="34" charset="0"/>
+                <a:ea typeface="Aptos" pitchFamily="34" charset="-122"/>
+                <a:cs typeface="Aptos" pitchFamily="34" charset="-120"/>
+              </a:rPr>
+              <a:t>A proposed AI use should move through documented review before it becomes an operational workflow.</a:t>
+            </a:r>
+            <a:endParaRPr lang="en-US" sz="1120" dirty="0"/>
+          </a:p>
+        </p:txBody>
+      </p:sp>
+      <p:sp>
+        <p:nvSpPr>
+          <p:cNvPr id="24" name="Shape 22"/>
+          <p:cNvSpPr/>
+          <p:nvPr/>
+        </p:nvSpPr>
+        <p:spPr>
+          <a:xfrm>
+            <a:off x="7635240" y="4184294"/>
+            <a:ext cx="3474720" cy="1466698"/>
+          </a:xfrm>
+          <a:prstGeom prst="roundRect">
+            <a:avLst>
+              <a:gd name="adj" fmla="val 7481"/>
             </a:avLst>
           </a:prstGeom>
           <a:solidFill>
@@ -16789,13 +17238,13 @@
       </p:sp>
       <p:sp>
         <p:nvSpPr>
-          <p:cNvPr id="17" name="Text 15"/>
-          <p:cNvSpPr/>
-          <p:nvPr/>
-        </p:nvSpPr>
-        <p:spPr>
-          <a:xfrm>
-            <a:off x="7799832" y="4645152"/>
+          <p:cNvPr id="25" name="Text 23"/>
+          <p:cNvSpPr/>
+          <p:nvPr/>
+        </p:nvSpPr>
+        <p:spPr>
+          <a:xfrm>
+            <a:off x="7799832" y="4330598"/>
             <a:ext cx="3145536" cy="256032"/>
           </a:xfrm>
           <a:prstGeom prst="rect">
@@ -16828,14 +17277,14 @@
       </p:sp>
       <p:sp>
         <p:nvSpPr>
-          <p:cNvPr id="18" name="Text 16"/>
-          <p:cNvSpPr/>
-          <p:nvPr/>
-        </p:nvSpPr>
-        <p:spPr>
-          <a:xfrm>
-            <a:off x="7799832" y="4974336"/>
-            <a:ext cx="3145536" cy="576072"/>
+          <p:cNvPr id="26" name="Text 24"/>
+          <p:cNvSpPr/>
+          <p:nvPr/>
+        </p:nvSpPr>
+        <p:spPr>
+          <a:xfrm>
+            <a:off x="7799832" y="4659782"/>
+            <a:ext cx="3145536" cy="899770"/>
           </a:xfrm>
           <a:prstGeom prst="rect">
             <a:avLst/>
@@ -16861,7 +17310,7 @@
                 <a:ea typeface="Aptos" pitchFamily="34" charset="-122"/>
                 <a:cs typeface="Aptos" pitchFamily="34" charset="-120"/>
               </a:rPr>
-              <a:t>Translate this concept into clear decision rights, review steps, documentation expectations, and escalation paths before.</a:t>
+              <a:t>Translate this concept into clear decision rights, review steps, documentation expectations, and escalation paths before an AI-supported workflow is approved.</a:t>
             </a:r>
             <a:endParaRPr lang="en-US" sz="1320" dirty="0"/>
           </a:p>
@@ -17230,11 +17679,11 @@
         <p:spPr>
           <a:xfrm>
             <a:off x="7635240" y="1325880"/>
-            <a:ext cx="3474720" cy="1325880"/>
+            <a:ext cx="3474720" cy="1207008"/>
           </a:xfrm>
           <a:prstGeom prst="roundRect">
             <a:avLst>
-              <a:gd name="adj" fmla="val 8276"/>
+              <a:gd name="adj" fmla="val 9091"/>
             </a:avLst>
           </a:prstGeom>
           <a:solidFill>
@@ -17296,7 +17745,7 @@
         <p:spPr>
           <a:xfrm>
             <a:off x="7799832" y="1801368"/>
-            <a:ext cx="3145536" cy="758952"/>
+            <a:ext cx="3145536" cy="640080"/>
           </a:xfrm>
           <a:prstGeom prst="rect">
             <a:avLst/>
@@ -17336,12 +17785,12 @@
         </p:nvSpPr>
         <p:spPr>
           <a:xfrm>
-            <a:off x="7635240" y="2788920"/>
-            <a:ext cx="3474720" cy="1536192"/>
+            <a:off x="7635240" y="2670048"/>
+            <a:ext cx="3474720" cy="1377086"/>
           </a:xfrm>
           <a:prstGeom prst="roundRect">
             <a:avLst>
-              <a:gd name="adj" fmla="val 7143"/>
+              <a:gd name="adj" fmla="val 7968"/>
             </a:avLst>
           </a:prstGeom>
           <a:solidFill>
@@ -17363,8 +17812,8 @@
         </p:nvSpPr>
         <p:spPr>
           <a:xfrm>
-            <a:off x="7799832" y="2935224"/>
-            <a:ext cx="3145536" cy="256032"/>
+            <a:off x="7799832" y="2798064"/>
+            <a:ext cx="3145536" cy="237744"/>
           </a:xfrm>
           <a:prstGeom prst="rect">
             <a:avLst/>
@@ -17380,7 +17829,7 @@
               <a:buNone/>
             </a:pPr>
             <a:r>
-              <a:rPr lang="en-US" sz="1300" b="1" dirty="0">
+              <a:rPr lang="en-US" sz="1250" b="1" dirty="0">
                 <a:solidFill>
                   <a:srgbClr val="0068B7"/>
                 </a:solidFill>
@@ -17388,101 +17837,317 @@
                 <a:ea typeface="Aptos" pitchFamily="34" charset="-122"/>
                 <a:cs typeface="Aptos" pitchFamily="34" charset="-120"/>
               </a:rPr>
-              <a:t>Concept checkpoints</a:t>
-            </a:r>
-            <a:endParaRPr lang="en-US" sz="1300" dirty="0"/>
-          </a:p>
-        </p:txBody>
-      </p:sp>
-      <p:sp>
-        <p:nvSpPr>
-          <p:cNvPr id="15" name="Text 13"/>
-          <p:cNvSpPr/>
-          <p:nvPr/>
-        </p:nvSpPr>
-        <p:spPr>
-          <a:xfrm>
-            <a:off x="7818120" y="3300984"/>
-            <a:ext cx="3090672" cy="877824"/>
-          </a:xfrm>
-          <a:prstGeom prst="rect">
-            <a:avLst/>
-          </a:prstGeom>
-          <a:noFill/>
-          <a:ln/>
-        </p:spPr>
-        <p:txBody>
-          <a:bodyPr wrap="square" lIns="508" tIns="508" rIns="508" bIns="508" rtlCol="0" anchor="t">
+              <a:t>Implementation path</a:t>
+            </a:r>
+            <a:endParaRPr lang="en-US" sz="1250" dirty="0"/>
+          </a:p>
+        </p:txBody>
+      </p:sp>
+      <p:sp>
+        <p:nvSpPr>
+          <p:cNvPr id="15" name="Shape 13"/>
+          <p:cNvSpPr/>
+          <p:nvPr/>
+        </p:nvSpPr>
+        <p:spPr>
+          <a:xfrm>
+            <a:off x="8763000" y="3351276"/>
+            <a:ext cx="164592" cy="0"/>
+          </a:xfrm>
+          <a:prstGeom prst="line">
+            <a:avLst/>
+          </a:prstGeom>
+          <a:noFill/>
+          <a:ln w="15240">
+            <a:solidFill>
+              <a:srgbClr val="8ABBD8"/>
+            </a:solidFill>
+            <a:prstDash val="solid"/>
+          </a:ln>
+        </p:spPr>
+      </p:sp>
+      <p:sp>
+        <p:nvSpPr>
+          <p:cNvPr id="16" name="Shape 14"/>
+          <p:cNvSpPr/>
+          <p:nvPr/>
+        </p:nvSpPr>
+        <p:spPr>
+          <a:xfrm>
+            <a:off x="7872984" y="3200400"/>
+            <a:ext cx="890016" cy="301752"/>
+          </a:xfrm>
+          <a:prstGeom prst="roundRect">
+            <a:avLst>
+              <a:gd name="adj" fmla="val 24242"/>
+            </a:avLst>
+          </a:prstGeom>
+          <a:solidFill>
+            <a:srgbClr val="0068B7"/>
+          </a:solidFill>
+          <a:ln w="12700">
+            <a:solidFill>
+              <a:srgbClr val="0068B7"/>
+            </a:solidFill>
+            <a:prstDash val="solid"/>
+          </a:ln>
+        </p:spPr>
+      </p:sp>
+      <p:sp>
+        <p:nvSpPr>
+          <p:cNvPr id="17" name="Text 15"/>
+          <p:cNvSpPr/>
+          <p:nvPr/>
+        </p:nvSpPr>
+        <p:spPr>
+          <a:xfrm>
+            <a:off x="7909560" y="3273552"/>
+            <a:ext cx="816864" cy="146304"/>
+          </a:xfrm>
+          <a:prstGeom prst="rect">
+            <a:avLst/>
+          </a:prstGeom>
+          <a:noFill/>
+          <a:ln/>
+        </p:spPr>
+        <p:txBody>
+          <a:bodyPr wrap="square" lIns="0" tIns="0" rIns="0" bIns="0" rtlCol="0" anchor="ctr">
             <a:normAutofit/>
           </a:bodyPr>
           <a:lstStyle/>
           <a:p>
-            <a:pPr indent="0" marL="0">
-              <a:buNone/>
-            </a:pPr>
-            <a:r>
-              <a:rPr lang="en-US" sz="1220" dirty="0">
-                <a:solidFill>
-                  <a:srgbClr val="17364A"/>
-                </a:solidFill>
-                <a:latin typeface="Aptos" pitchFamily="34" charset="0"/>
-                <a:ea typeface="Aptos" pitchFamily="34" charset="-122"/>
-                <a:cs typeface="Aptos" pitchFamily="34" charset="-120"/>
-              </a:rPr>
-              <a:t>In public health, APIs may retrieve case information, query FHIR.</a:t>
-            </a:r>
-            <a:endParaRPr lang="en-US" sz="1220" dirty="0"/>
-          </a:p>
-          <a:p>
-            <a:pPr indent="0" marL="0">
-              <a:buNone/>
-            </a:pPr>
-            <a:r>
-              <a:rPr lang="en-US" sz="1220" dirty="0">
-                <a:solidFill>
-                  <a:srgbClr val="17364A"/>
-                </a:solidFill>
-                <a:latin typeface="Aptos" pitchFamily="34" charset="0"/>
-                <a:ea typeface="Aptos" pitchFamily="34" charset="-122"/>
-                <a:cs typeface="Aptos" pitchFamily="34" charset="-120"/>
-              </a:rPr>
-              <a:t>Webhooks can notify a system when a defined event occurs, such as.</a:t>
-            </a:r>
-            <a:endParaRPr lang="en-US" sz="1220" dirty="0"/>
-          </a:p>
-          <a:p>
-            <a:pPr indent="0" marL="0">
-              <a:buNone/>
-            </a:pPr>
-            <a:r>
-              <a:rPr lang="en-US" sz="1220" dirty="0">
-                <a:solidFill>
-                  <a:srgbClr val="17364A"/>
-                </a:solidFill>
-                <a:latin typeface="Aptos" pitchFamily="34" charset="0"/>
-                <a:ea typeface="Aptos" pitchFamily="34" charset="-122"/>
-                <a:cs typeface="Aptos" pitchFamily="34" charset="-120"/>
-              </a:rPr>
-              <a:t>Event-driven workflows can help public health teams respond.</a:t>
-            </a:r>
-            <a:endParaRPr lang="en-US" sz="1220" dirty="0"/>
-          </a:p>
-        </p:txBody>
-      </p:sp>
-      <p:sp>
-        <p:nvSpPr>
-          <p:cNvPr id="16" name="Shape 14"/>
-          <p:cNvSpPr/>
-          <p:nvPr/>
-        </p:nvSpPr>
-        <p:spPr>
-          <a:xfrm>
-            <a:off x="7635240" y="4498848"/>
-            <a:ext cx="3474720" cy="1143000"/>
+            <a:pPr algn="ctr" indent="0" marL="0">
+              <a:buNone/>
+            </a:pPr>
+            <a:r>
+              <a:rPr lang="en-US" sz="880" b="1" dirty="0">
+                <a:solidFill>
+                  <a:srgbClr val="FFFFFF"/>
+                </a:solidFill>
+                <a:latin typeface="Aptos" pitchFamily="34" charset="0"/>
+                <a:ea typeface="Aptos" pitchFamily="34" charset="-122"/>
+                <a:cs typeface="Aptos" pitchFamily="34" charset="-120"/>
+              </a:rPr>
+              <a:t>Need</a:t>
+            </a:r>
+            <a:endParaRPr lang="en-US" sz="880" dirty="0"/>
+          </a:p>
+        </p:txBody>
+      </p:sp>
+      <p:sp>
+        <p:nvSpPr>
+          <p:cNvPr id="18" name="Shape 16"/>
+          <p:cNvSpPr/>
+          <p:nvPr/>
+        </p:nvSpPr>
+        <p:spPr>
+          <a:xfrm>
+            <a:off x="9817608" y="3351276"/>
+            <a:ext cx="164592" cy="0"/>
+          </a:xfrm>
+          <a:prstGeom prst="line">
+            <a:avLst/>
+          </a:prstGeom>
+          <a:noFill/>
+          <a:ln w="15240">
+            <a:solidFill>
+              <a:srgbClr val="8ABBD8"/>
+            </a:solidFill>
+            <a:prstDash val="solid"/>
+          </a:ln>
+        </p:spPr>
+      </p:sp>
+      <p:sp>
+        <p:nvSpPr>
+          <p:cNvPr id="19" name="Shape 17"/>
+          <p:cNvSpPr/>
+          <p:nvPr/>
+        </p:nvSpPr>
+        <p:spPr>
+          <a:xfrm>
+            <a:off x="8927592" y="3200400"/>
+            <a:ext cx="890016" cy="301752"/>
           </a:xfrm>
           <a:prstGeom prst="roundRect">
             <a:avLst>
-              <a:gd name="adj" fmla="val 9600"/>
+              <a:gd name="adj" fmla="val 24242"/>
+            </a:avLst>
+          </a:prstGeom>
+          <a:solidFill>
+            <a:srgbClr val="2F8A28"/>
+          </a:solidFill>
+          <a:ln w="12700">
+            <a:solidFill>
+              <a:srgbClr val="2F8A28"/>
+            </a:solidFill>
+            <a:prstDash val="solid"/>
+          </a:ln>
+        </p:spPr>
+      </p:sp>
+      <p:sp>
+        <p:nvSpPr>
+          <p:cNvPr id="20" name="Text 18"/>
+          <p:cNvSpPr/>
+          <p:nvPr/>
+        </p:nvSpPr>
+        <p:spPr>
+          <a:xfrm>
+            <a:off x="8964168" y="3273552"/>
+            <a:ext cx="816864" cy="146304"/>
+          </a:xfrm>
+          <a:prstGeom prst="rect">
+            <a:avLst/>
+          </a:prstGeom>
+          <a:noFill/>
+          <a:ln/>
+        </p:spPr>
+        <p:txBody>
+          <a:bodyPr wrap="square" lIns="0" tIns="0" rIns="0" bIns="0" rtlCol="0" anchor="ctr">
+            <a:normAutofit/>
+          </a:bodyPr>
+          <a:lstStyle/>
+          <a:p>
+            <a:pPr algn="ctr" indent="0" marL="0">
+              <a:buNone/>
+            </a:pPr>
+            <a:r>
+              <a:rPr lang="en-US" sz="880" b="1" dirty="0">
+                <a:solidFill>
+                  <a:srgbClr val="FFFFFF"/>
+                </a:solidFill>
+                <a:latin typeface="Aptos" pitchFamily="34" charset="0"/>
+                <a:ea typeface="Aptos" pitchFamily="34" charset="-122"/>
+                <a:cs typeface="Aptos" pitchFamily="34" charset="-120"/>
+              </a:rPr>
+              <a:t>Build</a:t>
+            </a:r>
+            <a:endParaRPr lang="en-US" sz="880" dirty="0"/>
+          </a:p>
+        </p:txBody>
+      </p:sp>
+      <p:sp>
+        <p:nvSpPr>
+          <p:cNvPr id="21" name="Shape 19"/>
+          <p:cNvSpPr/>
+          <p:nvPr/>
+        </p:nvSpPr>
+        <p:spPr>
+          <a:xfrm>
+            <a:off x="9982200" y="3200400"/>
+            <a:ext cx="890016" cy="301752"/>
+          </a:xfrm>
+          <a:prstGeom prst="roundRect">
+            <a:avLst>
+              <a:gd name="adj" fmla="val 24242"/>
+            </a:avLst>
+          </a:prstGeom>
+          <a:solidFill>
+            <a:srgbClr val="6A4CA3"/>
+          </a:solidFill>
+          <a:ln w="12700">
+            <a:solidFill>
+              <a:srgbClr val="6A4CA3"/>
+            </a:solidFill>
+            <a:prstDash val="solid"/>
+          </a:ln>
+        </p:spPr>
+      </p:sp>
+      <p:sp>
+        <p:nvSpPr>
+          <p:cNvPr id="22" name="Text 20"/>
+          <p:cNvSpPr/>
+          <p:nvPr/>
+        </p:nvSpPr>
+        <p:spPr>
+          <a:xfrm>
+            <a:off x="10018776" y="3273552"/>
+            <a:ext cx="816864" cy="146304"/>
+          </a:xfrm>
+          <a:prstGeom prst="rect">
+            <a:avLst/>
+          </a:prstGeom>
+          <a:noFill/>
+          <a:ln/>
+        </p:spPr>
+        <p:txBody>
+          <a:bodyPr wrap="square" lIns="0" tIns="0" rIns="0" bIns="0" rtlCol="0" anchor="ctr">
+            <a:normAutofit/>
+          </a:bodyPr>
+          <a:lstStyle/>
+          <a:p>
+            <a:pPr algn="ctr" indent="0" marL="0">
+              <a:buNone/>
+            </a:pPr>
+            <a:r>
+              <a:rPr lang="en-US" sz="880" b="1" dirty="0">
+                <a:solidFill>
+                  <a:srgbClr val="FFFFFF"/>
+                </a:solidFill>
+                <a:latin typeface="Aptos" pitchFamily="34" charset="0"/>
+                <a:ea typeface="Aptos" pitchFamily="34" charset="-122"/>
+                <a:cs typeface="Aptos" pitchFamily="34" charset="-120"/>
+              </a:rPr>
+              <a:t>Adopt</a:t>
+            </a:r>
+            <a:endParaRPr lang="en-US" sz="880" dirty="0"/>
+          </a:p>
+        </p:txBody>
+      </p:sp>
+      <p:sp>
+        <p:nvSpPr>
+          <p:cNvPr id="23" name="Text 21"/>
+          <p:cNvSpPr/>
+          <p:nvPr/>
+        </p:nvSpPr>
+        <p:spPr>
+          <a:xfrm>
+            <a:off x="7854696" y="3694176"/>
+            <a:ext cx="3035808" cy="206654"/>
+          </a:xfrm>
+          <a:prstGeom prst="rect">
+            <a:avLst/>
+          </a:prstGeom>
+          <a:noFill/>
+          <a:ln/>
+        </p:spPr>
+        <p:txBody>
+          <a:bodyPr wrap="square" lIns="254" tIns="254" rIns="254" bIns="254" rtlCol="0" anchor="t">
+            <a:normAutofit/>
+          </a:bodyPr>
+          <a:lstStyle/>
+          <a:p>
+            <a:pPr indent="0" marL="0">
+              <a:buNone/>
+            </a:pPr>
+            <a:r>
+              <a:rPr lang="en-US" sz="1120" dirty="0">
+                <a:solidFill>
+                  <a:srgbClr val="17364A"/>
+                </a:solidFill>
+                <a:latin typeface="Aptos" pitchFamily="34" charset="0"/>
+                <a:ea typeface="Aptos" pitchFamily="34" charset="-122"/>
+                <a:cs typeface="Aptos" pitchFamily="34" charset="-120"/>
+              </a:rPr>
+              <a:t>Implementation work should make dependencies, approvals, training, and sustainment visible before launch.</a:t>
+            </a:r>
+            <a:endParaRPr lang="en-US" sz="1120" dirty="0"/>
+          </a:p>
+        </p:txBody>
+      </p:sp>
+      <p:sp>
+        <p:nvSpPr>
+          <p:cNvPr id="24" name="Shape 22"/>
+          <p:cNvSpPr/>
+          <p:nvPr/>
+        </p:nvSpPr>
+        <p:spPr>
+          <a:xfrm>
+            <a:off x="7635240" y="4184294"/>
+            <a:ext cx="3474720" cy="1466698"/>
+          </a:xfrm>
+          <a:prstGeom prst="roundRect">
+            <a:avLst>
+              <a:gd name="adj" fmla="val 7481"/>
             </a:avLst>
           </a:prstGeom>
           <a:solidFill>
@@ -17498,13 +18163,13 @@
       </p:sp>
       <p:sp>
         <p:nvSpPr>
-          <p:cNvPr id="17" name="Text 15"/>
-          <p:cNvSpPr/>
-          <p:nvPr/>
-        </p:nvSpPr>
-        <p:spPr>
-          <a:xfrm>
-            <a:off x="7799832" y="4645152"/>
+          <p:cNvPr id="25" name="Text 23"/>
+          <p:cNvSpPr/>
+          <p:nvPr/>
+        </p:nvSpPr>
+        <p:spPr>
+          <a:xfrm>
+            <a:off x="7799832" y="4330598"/>
             <a:ext cx="3145536" cy="256032"/>
           </a:xfrm>
           <a:prstGeom prst="rect">
@@ -17537,14 +18202,14 @@
       </p:sp>
       <p:sp>
         <p:nvSpPr>
-          <p:cNvPr id="18" name="Text 16"/>
-          <p:cNvSpPr/>
-          <p:nvPr/>
-        </p:nvSpPr>
-        <p:spPr>
-          <a:xfrm>
-            <a:off x="7799832" y="4974336"/>
-            <a:ext cx="3145536" cy="576072"/>
+          <p:cNvPr id="26" name="Text 24"/>
+          <p:cNvSpPr/>
+          <p:nvPr/>
+        </p:nvSpPr>
+        <p:spPr>
+          <a:xfrm>
+            <a:off x="7799832" y="4659782"/>
+            <a:ext cx="3145536" cy="899770"/>
           </a:xfrm>
           <a:prstGeom prst="rect">
             <a:avLst/>
@@ -17570,7 +18235,7 @@
                 <a:ea typeface="Aptos" pitchFamily="34" charset="-122"/>
                 <a:cs typeface="Aptos" pitchFamily="34" charset="-120"/>
               </a:rPr>
-              <a:t>Use the concept to clarify workflow changes, dependencies, staffing, procurement requirements, training needs, and.</a:t>
+              <a:t>Use the concept to clarify workflow changes, dependencies, staffing, procurement requirements, training needs, and implementation checkpoints.</a:t>
             </a:r>
             <a:endParaRPr lang="en-US" sz="1320" dirty="0"/>
           </a:p>
@@ -17939,11 +18604,11 @@
         <p:spPr>
           <a:xfrm>
             <a:off x="7635240" y="1325880"/>
-            <a:ext cx="3474720" cy="1325880"/>
+            <a:ext cx="3474720" cy="1207008"/>
           </a:xfrm>
           <a:prstGeom prst="roundRect">
             <a:avLst>
-              <a:gd name="adj" fmla="val 8276"/>
+              <a:gd name="adj" fmla="val 9091"/>
             </a:avLst>
           </a:prstGeom>
           <a:solidFill>
@@ -18005,7 +18670,7 @@
         <p:spPr>
           <a:xfrm>
             <a:off x="7799832" y="1801368"/>
-            <a:ext cx="3145536" cy="758952"/>
+            <a:ext cx="3145536" cy="640080"/>
           </a:xfrm>
           <a:prstGeom prst="rect">
             <a:avLst/>
@@ -18045,12 +18710,12 @@
         </p:nvSpPr>
         <p:spPr>
           <a:xfrm>
-            <a:off x="7635240" y="2788920"/>
-            <a:ext cx="3474720" cy="1536192"/>
+            <a:off x="7635240" y="2670048"/>
+            <a:ext cx="3474720" cy="1377086"/>
           </a:xfrm>
           <a:prstGeom prst="roundRect">
             <a:avLst>
-              <a:gd name="adj" fmla="val 7143"/>
+              <a:gd name="adj" fmla="val 7968"/>
             </a:avLst>
           </a:prstGeom>
           <a:solidFill>
@@ -18072,7 +18737,7 @@
         </p:nvSpPr>
         <p:spPr>
           <a:xfrm>
-            <a:off x="7799832" y="2935224"/>
+            <a:off x="7799832" y="2816352"/>
             <a:ext cx="3145536" cy="256032"/>
           </a:xfrm>
           <a:prstGeom prst="rect">
@@ -18111,8 +18776,8 @@
         </p:nvSpPr>
         <p:spPr>
           <a:xfrm>
-            <a:off x="7818120" y="3300984"/>
-            <a:ext cx="3090672" cy="877824"/>
+            <a:off x="7818120" y="3182112"/>
+            <a:ext cx="3090672" cy="718718"/>
           </a:xfrm>
           <a:prstGeom prst="rect">
             <a:avLst/>
@@ -18186,12 +18851,12 @@
         </p:nvSpPr>
         <p:spPr>
           <a:xfrm>
-            <a:off x="7635240" y="4498848"/>
-            <a:ext cx="3474720" cy="1143000"/>
+            <a:off x="7635240" y="4184294"/>
+            <a:ext cx="3474720" cy="1466698"/>
           </a:xfrm>
           <a:prstGeom prst="roundRect">
             <a:avLst>
-              <a:gd name="adj" fmla="val 9600"/>
+              <a:gd name="adj" fmla="val 7481"/>
             </a:avLst>
           </a:prstGeom>
           <a:solidFill>
@@ -18213,7 +18878,7 @@
         </p:nvSpPr>
         <p:spPr>
           <a:xfrm>
-            <a:off x="7799832" y="4645152"/>
+            <a:off x="7799832" y="4330598"/>
             <a:ext cx="3145536" cy="256032"/>
           </a:xfrm>
           <a:prstGeom prst="rect">
@@ -18252,8 +18917,8 @@
         </p:nvSpPr>
         <p:spPr>
           <a:xfrm>
-            <a:off x="7799832" y="4974336"/>
-            <a:ext cx="3145536" cy="576072"/>
+            <a:off x="7799832" y="4659782"/>
+            <a:ext cx="3145536" cy="899770"/>
           </a:xfrm>
           <a:prstGeom prst="rect">
             <a:avLst/>
@@ -18279,7 +18944,7 @@
                 <a:ea typeface="Aptos" pitchFamily="34" charset="-122"/>
                 <a:cs typeface="Aptos" pitchFamily="34" charset="-120"/>
               </a:rPr>
-              <a:t>Use the concept to clarify workflow changes, dependencies, staffing, procurement requirements, training needs, and.</a:t>
+              <a:t>Use the concept to clarify workflow changes, dependencies, staffing, procurement requirements, training needs, and implementation checkpoints.</a:t>
             </a:r>
             <a:endParaRPr lang="en-US" sz="1320" dirty="0"/>
           </a:p>

--- a/downloads/presentations/modules/arc-260.pptx
+++ b/downloads/presentations/modules/arc-260.pptx
@@ -3431,8 +3431,8 @@
         </p:nvSpPr>
         <p:spPr>
           <a:xfrm>
-            <a:off x="868680" y="1508760"/>
-            <a:ext cx="6309360" cy="4160520"/>
+            <a:off x="822960" y="1463040"/>
+            <a:ext cx="6565392" cy="4343400"/>
           </a:xfrm>
           <a:prstGeom prst="rect">
             <a:avLst/>
@@ -3450,7 +3450,7 @@
               <a:buNone/>
             </a:pPr>
             <a:r>
-              <a:rPr lang="en-US" sz="2100" dirty="0">
+              <a:rPr lang="en-US" sz="1920" dirty="0">
                 <a:solidFill>
                   <a:srgbClr val="003A63"/>
                 </a:solidFill>
@@ -3460,14 +3460,14 @@
               </a:rPr>
               <a:t>• Read-only versus write-back.</a:t>
             </a:r>
-            <a:endParaRPr lang="en-US" sz="2100" dirty="0"/>
-          </a:p>
-          <a:p>
-            <a:pPr indent="0" marL="0">
-              <a:buNone/>
-            </a:pPr>
-            <a:r>
-              <a:rPr lang="en-US" sz="2100" dirty="0">
+            <a:endParaRPr lang="en-US" sz="1920" dirty="0"/>
+          </a:p>
+          <a:p>
+            <a:pPr indent="0" marL="0">
+              <a:buNone/>
+            </a:pPr>
+            <a:r>
+              <a:rPr lang="en-US" sz="1920" dirty="0">
                 <a:solidFill>
                   <a:srgbClr val="003A63"/>
                 </a:solidFill>
@@ -3477,14 +3477,14 @@
               </a:rPr>
               <a:t>• Read-only access allows a tool to view or retrieve information.</a:t>
             </a:r>
-            <a:endParaRPr lang="en-US" sz="2100" dirty="0"/>
-          </a:p>
-          <a:p>
-            <a:pPr indent="0" marL="0">
-              <a:buNone/>
-            </a:pPr>
-            <a:r>
-              <a:rPr lang="en-US" sz="2100" dirty="0">
+            <a:endParaRPr lang="en-US" sz="1920" dirty="0"/>
+          </a:p>
+          <a:p>
+            <a:pPr indent="0" marL="0">
+              <a:buNone/>
+            </a:pPr>
+            <a:r>
+              <a:rPr lang="en-US" sz="1920" dirty="0">
                 <a:solidFill>
                   <a:srgbClr val="003A63"/>
                 </a:solidFill>
@@ -3494,7 +3494,7 @@
               </a:rPr>
               <a:t>• Write-back allows a tool to update, create, or delete information.</a:t>
             </a:r>
-            <a:endParaRPr lang="en-US" sz="2100" dirty="0"/>
+            <a:endParaRPr lang="en-US" sz="1920" dirty="0"/>
           </a:p>
         </p:txBody>
       </p:sp>
@@ -3506,12 +3506,12 @@
         </p:nvSpPr>
         <p:spPr>
           <a:xfrm>
-            <a:off x="7635240" y="1325880"/>
-            <a:ext cx="3474720" cy="1207008"/>
+            <a:off x="7543800" y="1325880"/>
+            <a:ext cx="3611880" cy="1261872"/>
           </a:xfrm>
           <a:prstGeom prst="roundRect">
             <a:avLst>
-              <a:gd name="adj" fmla="val 9091"/>
+              <a:gd name="adj" fmla="val 8696"/>
             </a:avLst>
           </a:prstGeom>
           <a:solidFill>
@@ -3533,8 +3533,8 @@
         </p:nvSpPr>
         <p:spPr>
           <a:xfrm>
-            <a:off x="7799832" y="1472184"/>
-            <a:ext cx="3145536" cy="256032"/>
+            <a:off x="7708392" y="1453896"/>
+            <a:ext cx="3282696" cy="228600"/>
           </a:xfrm>
           <a:prstGeom prst="rect">
             <a:avLst/>
@@ -3550,7 +3550,7 @@
               <a:buNone/>
             </a:pPr>
             <a:r>
-              <a:rPr lang="en-US" sz="1300" b="1" dirty="0">
+              <a:rPr lang="en-US" sz="1220" b="1" dirty="0">
                 <a:solidFill>
                   <a:srgbClr val="0068B7"/>
                 </a:solidFill>
@@ -3560,7 +3560,7 @@
               </a:rPr>
               <a:t>Implementation cue</a:t>
             </a:r>
-            <a:endParaRPr lang="en-US" sz="1300" dirty="0"/>
+            <a:endParaRPr lang="en-US" sz="1220" dirty="0"/>
           </a:p>
         </p:txBody>
       </p:sp>
@@ -3572,8 +3572,8 @@
         </p:nvSpPr>
         <p:spPr>
           <a:xfrm>
-            <a:off x="7799832" y="1801368"/>
-            <a:ext cx="3145536" cy="640080"/>
+            <a:off x="7708392" y="1764792"/>
+            <a:ext cx="3282696" cy="749808"/>
           </a:xfrm>
           <a:prstGeom prst="rect">
             <a:avLst/>
@@ -3591,7 +3591,7 @@
               <a:buNone/>
             </a:pPr>
             <a:r>
-              <a:rPr lang="en-US" sz="1320" dirty="0">
+              <a:rPr lang="en-US" sz="1220" dirty="0">
                 <a:solidFill>
                   <a:srgbClr val="17364A"/>
                 </a:solidFill>
@@ -3601,7 +3601,7 @@
               </a:rPr>
               <a:t>Read-only versus write-back.</a:t>
             </a:r>
-            <a:endParaRPr lang="en-US" sz="1320" dirty="0"/>
+            <a:endParaRPr lang="en-US" sz="1220" dirty="0"/>
           </a:p>
         </p:txBody>
       </p:sp>
@@ -3613,12 +3613,12 @@
         </p:nvSpPr>
         <p:spPr>
           <a:xfrm>
-            <a:off x="7635240" y="2670048"/>
-            <a:ext cx="3474720" cy="1377086"/>
+            <a:off x="7543800" y="2724912"/>
+            <a:ext cx="3611880" cy="1527048"/>
           </a:xfrm>
           <a:prstGeom prst="roundRect">
             <a:avLst>
-              <a:gd name="adj" fmla="val 7968"/>
+              <a:gd name="adj" fmla="val 7186"/>
             </a:avLst>
           </a:prstGeom>
           <a:solidFill>
@@ -3640,8 +3640,8 @@
         </p:nvSpPr>
         <p:spPr>
           <a:xfrm>
-            <a:off x="7799832" y="2816352"/>
-            <a:ext cx="3145536" cy="256032"/>
+            <a:off x="7708392" y="2852928"/>
+            <a:ext cx="3282696" cy="228600"/>
           </a:xfrm>
           <a:prstGeom prst="rect">
             <a:avLst/>
@@ -3657,7 +3657,7 @@
               <a:buNone/>
             </a:pPr>
             <a:r>
-              <a:rPr lang="en-US" sz="1300" b="1" dirty="0">
+              <a:rPr lang="en-US" sz="1220" b="1" dirty="0">
                 <a:solidFill>
                   <a:srgbClr val="0068B7"/>
                 </a:solidFill>
@@ -3667,7 +3667,7 @@
               </a:rPr>
               <a:t>Concept checkpoints</a:t>
             </a:r>
-            <a:endParaRPr lang="en-US" sz="1300" dirty="0"/>
+            <a:endParaRPr lang="en-US" sz="1220" dirty="0"/>
           </a:p>
         </p:txBody>
       </p:sp>
@@ -3679,8 +3679,8 @@
         </p:nvSpPr>
         <p:spPr>
           <a:xfrm>
-            <a:off x="7818120" y="3182112"/>
-            <a:ext cx="3090672" cy="718718"/>
+            <a:off x="7726680" y="3182112"/>
+            <a:ext cx="3227832" cy="960120"/>
           </a:xfrm>
           <a:prstGeom prst="rect">
             <a:avLst/>
@@ -3698,7 +3698,7 @@
               <a:buNone/>
             </a:pPr>
             <a:r>
-              <a:rPr lang="en-US" sz="1220" dirty="0">
+              <a:rPr lang="en-US" sz="1140" dirty="0">
                 <a:solidFill>
                   <a:srgbClr val="17364A"/>
                 </a:solidFill>
@@ -3708,14 +3708,14 @@
               </a:rPr>
               <a:t>Read-only versus write-back.</a:t>
             </a:r>
-            <a:endParaRPr lang="en-US" sz="1220" dirty="0"/>
-          </a:p>
-          <a:p>
-            <a:pPr indent="0" marL="0">
-              <a:buNone/>
-            </a:pPr>
-            <a:r>
-              <a:rPr lang="en-US" sz="1220" dirty="0">
+            <a:endParaRPr lang="en-US" sz="1140" dirty="0"/>
+          </a:p>
+          <a:p>
+            <a:pPr indent="0" marL="0">
+              <a:buNone/>
+            </a:pPr>
+            <a:r>
+              <a:rPr lang="en-US" sz="1140" dirty="0">
                 <a:solidFill>
                   <a:srgbClr val="17364A"/>
                 </a:solidFill>
@@ -3723,16 +3723,16 @@
                 <a:ea typeface="Aptos" pitchFamily="34" charset="-122"/>
                 <a:cs typeface="Aptos" pitchFamily="34" charset="-120"/>
               </a:rPr>
-              <a:t>Read-only access allows a tool to view or retrieve information.</a:t>
-            </a:r>
-            <a:endParaRPr lang="en-US" sz="1220" dirty="0"/>
-          </a:p>
-          <a:p>
-            <a:pPr indent="0" marL="0">
-              <a:buNone/>
-            </a:pPr>
-            <a:r>
-              <a:rPr lang="en-US" sz="1220" dirty="0">
+              <a:t>Read-only access allows a tool to view or retrieve.</a:t>
+            </a:r>
+            <a:endParaRPr lang="en-US" sz="1140" dirty="0"/>
+          </a:p>
+          <a:p>
+            <a:pPr indent="0" marL="0">
+              <a:buNone/>
+            </a:pPr>
+            <a:r>
+              <a:rPr lang="en-US" sz="1140" dirty="0">
                 <a:solidFill>
                   <a:srgbClr val="17364A"/>
                 </a:solidFill>
@@ -3740,9 +3740,9 @@
                 <a:ea typeface="Aptos" pitchFamily="34" charset="-122"/>
                 <a:cs typeface="Aptos" pitchFamily="34" charset="-120"/>
               </a:rPr>
-              <a:t>Write-back allows a tool to update, create, or delete information.</a:t>
-            </a:r>
-            <a:endParaRPr lang="en-US" sz="1220" dirty="0"/>
+              <a:t>Write-back allows a tool to update, create, or.</a:t>
+            </a:r>
+            <a:endParaRPr lang="en-US" sz="1140" dirty="0"/>
           </a:p>
         </p:txBody>
       </p:sp>
@@ -3754,12 +3754,12 @@
         </p:nvSpPr>
         <p:spPr>
           <a:xfrm>
-            <a:off x="7635240" y="4184294"/>
-            <a:ext cx="3474720" cy="1466698"/>
+            <a:off x="7543800" y="4389120"/>
+            <a:ext cx="3611880" cy="1261872"/>
           </a:xfrm>
           <a:prstGeom prst="roundRect">
             <a:avLst>
-              <a:gd name="adj" fmla="val 7481"/>
+              <a:gd name="adj" fmla="val 8696"/>
             </a:avLst>
           </a:prstGeom>
           <a:solidFill>
@@ -3781,8 +3781,8 @@
         </p:nvSpPr>
         <p:spPr>
           <a:xfrm>
-            <a:off x="7799832" y="4330598"/>
-            <a:ext cx="3145536" cy="256032"/>
+            <a:off x="7708392" y="4517136"/>
+            <a:ext cx="3282696" cy="228600"/>
           </a:xfrm>
           <a:prstGeom prst="rect">
             <a:avLst/>
@@ -3798,7 +3798,7 @@
               <a:buNone/>
             </a:pPr>
             <a:r>
-              <a:rPr lang="en-US" sz="1300" b="1" dirty="0">
+              <a:rPr lang="en-US" sz="1220" b="1" dirty="0">
                 <a:solidFill>
                   <a:srgbClr val="0068B7"/>
                 </a:solidFill>
@@ -3808,7 +3808,7 @@
               </a:rPr>
               <a:t>Next action</a:t>
             </a:r>
-            <a:endParaRPr lang="en-US" sz="1300" dirty="0"/>
+            <a:endParaRPr lang="en-US" sz="1220" dirty="0"/>
           </a:p>
         </p:txBody>
       </p:sp>
@@ -3820,8 +3820,8 @@
         </p:nvSpPr>
         <p:spPr>
           <a:xfrm>
-            <a:off x="7799832" y="4659782"/>
-            <a:ext cx="3145536" cy="899770"/>
+            <a:off x="7708392" y="4828032"/>
+            <a:ext cx="3282696" cy="749808"/>
           </a:xfrm>
           <a:prstGeom prst="rect">
             <a:avLst/>
@@ -3839,7 +3839,7 @@
               <a:buNone/>
             </a:pPr>
             <a:r>
-              <a:rPr lang="en-US" sz="1320" dirty="0">
+              <a:rPr lang="en-US" sz="1220" dirty="0">
                 <a:solidFill>
                   <a:srgbClr val="17364A"/>
                 </a:solidFill>
@@ -3847,9 +3847,9 @@
                 <a:ea typeface="Aptos" pitchFamily="34" charset="-122"/>
                 <a:cs typeface="Aptos" pitchFamily="34" charset="-120"/>
               </a:rPr>
-              <a:t>Use the concept to clarify workflow changes, dependencies, staffing, procurement requirements, training needs, and implementation checkpoints.</a:t>
-            </a:r>
-            <a:endParaRPr lang="en-US" sz="1320" dirty="0"/>
+              <a:t>Use the concept to clarify workflow changes, dependencies, staffing, procurement.</a:t>
+            </a:r>
+            <a:endParaRPr lang="en-US" sz="1220" dirty="0"/>
           </a:p>
         </p:txBody>
       </p:sp>
@@ -4140,8 +4140,8 @@
         </p:nvSpPr>
         <p:spPr>
           <a:xfrm>
-            <a:off x="868680" y="1508760"/>
-            <a:ext cx="6309360" cy="4160520"/>
+            <a:off x="822960" y="1463040"/>
+            <a:ext cx="6565392" cy="4343400"/>
           </a:xfrm>
           <a:prstGeom prst="rect">
             <a:avLst/>
@@ -4159,7 +4159,7 @@
               <a:buNone/>
             </a:pPr>
             <a:r>
-              <a:rPr lang="en-US" sz="2100" dirty="0">
+              <a:rPr lang="en-US" sz="1920" dirty="0">
                 <a:solidFill>
                   <a:srgbClr val="003A63"/>
                 </a:solidFill>
@@ -4167,16 +4167,16 @@
                 <a:ea typeface="Aptos" pitchFamily="34" charset="-122"/>
                 <a:cs typeface="Aptos" pitchFamily="34" charset="-120"/>
               </a:rPr>
-              <a:t>• An AI tool may be configured to review new environmental health complaints as they arrive and.</a:t>
-            </a:r>
-            <a:endParaRPr lang="en-US" sz="2100" dirty="0"/>
-          </a:p>
-          <a:p>
-            <a:pPr indent="0" marL="0">
-              <a:buNone/>
-            </a:pPr>
-            <a:r>
-              <a:rPr lang="en-US" sz="2100" dirty="0">
+              <a:t>• An AI tool may be configured to review new environmental health complaints.</a:t>
+            </a:r>
+            <a:endParaRPr lang="en-US" sz="1920" dirty="0"/>
+          </a:p>
+          <a:p>
+            <a:pPr indent="0" marL="0">
+              <a:buNone/>
+            </a:pPr>
+            <a:r>
+              <a:rPr lang="en-US" sz="1920" dirty="0">
                 <a:solidFill>
                   <a:srgbClr val="003A63"/>
                 </a:solidFill>
@@ -4186,14 +4186,14 @@
               </a:rPr>
               <a:t>• A webhook could trigger the review when a complaint is submitted.</a:t>
             </a:r>
-            <a:endParaRPr lang="en-US" sz="2100" dirty="0"/>
-          </a:p>
-          <a:p>
-            <a:pPr indent="0" marL="0">
-              <a:buNone/>
-            </a:pPr>
-            <a:r>
-              <a:rPr lang="en-US" sz="2100" dirty="0">
+            <a:endParaRPr lang="en-US" sz="1920" dirty="0"/>
+          </a:p>
+          <a:p>
+            <a:pPr indent="0" marL="0">
+              <a:buNone/>
+            </a:pPr>
+            <a:r>
+              <a:rPr lang="en-US" sz="1920" dirty="0">
                 <a:solidFill>
                   <a:srgbClr val="003A63"/>
                 </a:solidFill>
@@ -4201,9 +4201,9 @@
                 <a:ea typeface="Aptos" pitchFamily="34" charset="-122"/>
                 <a:cs typeface="Aptos" pitchFamily="34" charset="-120"/>
               </a:rPr>
-              <a:t>• The tool might assign a category, draft a summary, and create a task for human review.</a:t>
-            </a:r>
-            <a:endParaRPr lang="en-US" sz="2100" dirty="0"/>
+              <a:t>• The tool might assign a category, draft a summary, and create a task for.</a:t>
+            </a:r>
+            <a:endParaRPr lang="en-US" sz="1920" dirty="0"/>
           </a:p>
         </p:txBody>
       </p:sp>
@@ -4215,12 +4215,12 @@
         </p:nvSpPr>
         <p:spPr>
           <a:xfrm>
-            <a:off x="7635240" y="1325880"/>
-            <a:ext cx="3474720" cy="1255471"/>
+            <a:off x="7543800" y="1325880"/>
+            <a:ext cx="3611880" cy="1261872"/>
           </a:xfrm>
           <a:prstGeom prst="roundRect">
             <a:avLst>
-              <a:gd name="adj" fmla="val 8740"/>
+              <a:gd name="adj" fmla="val 8696"/>
             </a:avLst>
           </a:prstGeom>
           <a:solidFill>
@@ -4242,8 +4242,8 @@
         </p:nvSpPr>
         <p:spPr>
           <a:xfrm>
-            <a:off x="7799832" y="1472184"/>
-            <a:ext cx="3145536" cy="256032"/>
+            <a:off x="7708392" y="1453896"/>
+            <a:ext cx="3282696" cy="228600"/>
           </a:xfrm>
           <a:prstGeom prst="rect">
             <a:avLst/>
@@ -4259,7 +4259,7 @@
               <a:buNone/>
             </a:pPr>
             <a:r>
-              <a:rPr lang="en-US" sz="1300" b="1" dirty="0">
+              <a:rPr lang="en-US" sz="1220" b="1" dirty="0">
                 <a:solidFill>
                   <a:srgbClr val="0068B7"/>
                 </a:solidFill>
@@ -4269,7 +4269,7 @@
               </a:rPr>
               <a:t>Implementation cue</a:t>
             </a:r>
-            <a:endParaRPr lang="en-US" sz="1300" dirty="0"/>
+            <a:endParaRPr lang="en-US" sz="1220" dirty="0"/>
           </a:p>
         </p:txBody>
       </p:sp>
@@ -4281,8 +4281,8 @@
         </p:nvSpPr>
         <p:spPr>
           <a:xfrm>
-            <a:off x="7799832" y="1801368"/>
-            <a:ext cx="3145536" cy="688543"/>
+            <a:off x="7708392" y="1764792"/>
+            <a:ext cx="3282696" cy="749808"/>
           </a:xfrm>
           <a:prstGeom prst="rect">
             <a:avLst/>
@@ -4300,7 +4300,7 @@
               <a:buNone/>
             </a:pPr>
             <a:r>
-              <a:rPr lang="en-US" sz="1320" dirty="0">
+              <a:rPr lang="en-US" sz="1220" dirty="0">
                 <a:solidFill>
                   <a:srgbClr val="17364A"/>
                 </a:solidFill>
@@ -4308,9 +4308,9 @@
                 <a:ea typeface="Aptos" pitchFamily="34" charset="-122"/>
                 <a:cs typeface="Aptos" pitchFamily="34" charset="-120"/>
               </a:rPr>
-              <a:t>An AI tool may be configured to review new environmental health complaints as they arrive and classify.</a:t>
-            </a:r>
-            <a:endParaRPr lang="en-US" sz="1320" dirty="0"/>
+              <a:t>An AI tool may be configured to review new environmental health complaints as.</a:t>
+            </a:r>
+            <a:endParaRPr lang="en-US" sz="1220" dirty="0"/>
           </a:p>
         </p:txBody>
       </p:sp>
@@ -4322,12 +4322,12 @@
         </p:nvSpPr>
         <p:spPr>
           <a:xfrm>
-            <a:off x="7635240" y="2718511"/>
-            <a:ext cx="3474720" cy="1328623"/>
+            <a:off x="7543800" y="2724912"/>
+            <a:ext cx="3611880" cy="1527048"/>
           </a:xfrm>
           <a:prstGeom prst="roundRect">
             <a:avLst>
-              <a:gd name="adj" fmla="val 8259"/>
+              <a:gd name="adj" fmla="val 7186"/>
             </a:avLst>
           </a:prstGeom>
           <a:solidFill>
@@ -4349,8 +4349,8 @@
         </p:nvSpPr>
         <p:spPr>
           <a:xfrm>
-            <a:off x="7799832" y="2864815"/>
-            <a:ext cx="3145536" cy="256032"/>
+            <a:off x="7708392" y="2852928"/>
+            <a:ext cx="3282696" cy="228600"/>
           </a:xfrm>
           <a:prstGeom prst="rect">
             <a:avLst/>
@@ -4366,7 +4366,7 @@
               <a:buNone/>
             </a:pPr>
             <a:r>
-              <a:rPr lang="en-US" sz="1300" b="1" dirty="0">
+              <a:rPr lang="en-US" sz="1220" b="1" dirty="0">
                 <a:solidFill>
                   <a:srgbClr val="0068B7"/>
                 </a:solidFill>
@@ -4376,7 +4376,7 @@
               </a:rPr>
               <a:t>Concept checkpoints</a:t>
             </a:r>
-            <a:endParaRPr lang="en-US" sz="1300" dirty="0"/>
+            <a:endParaRPr lang="en-US" sz="1220" dirty="0"/>
           </a:p>
         </p:txBody>
       </p:sp>
@@ -4388,8 +4388,8 @@
         </p:nvSpPr>
         <p:spPr>
           <a:xfrm>
-            <a:off x="7818120" y="3230575"/>
-            <a:ext cx="3090672" cy="670255"/>
+            <a:off x="7726680" y="3182112"/>
+            <a:ext cx="3227832" cy="960120"/>
           </a:xfrm>
           <a:prstGeom prst="rect">
             <a:avLst/>
@@ -4407,7 +4407,7 @@
               <a:buNone/>
             </a:pPr>
             <a:r>
-              <a:rPr lang="en-US" sz="1220" dirty="0">
+              <a:rPr lang="en-US" sz="1140" dirty="0">
                 <a:solidFill>
                   <a:srgbClr val="17364A"/>
                 </a:solidFill>
@@ -4415,16 +4415,16 @@
                 <a:ea typeface="Aptos" pitchFamily="34" charset="-122"/>
                 <a:cs typeface="Aptos" pitchFamily="34" charset="-120"/>
               </a:rPr>
-              <a:t>An AI tool may be configured to review new environmental health.</a:t>
-            </a:r>
-            <a:endParaRPr lang="en-US" sz="1220" dirty="0"/>
-          </a:p>
-          <a:p>
-            <a:pPr indent="0" marL="0">
-              <a:buNone/>
-            </a:pPr>
-            <a:r>
-              <a:rPr lang="en-US" sz="1220" dirty="0">
+              <a:t>An AI tool may be configured to review new.</a:t>
+            </a:r>
+            <a:endParaRPr lang="en-US" sz="1140" dirty="0"/>
+          </a:p>
+          <a:p>
+            <a:pPr indent="0" marL="0">
+              <a:buNone/>
+            </a:pPr>
+            <a:r>
+              <a:rPr lang="en-US" sz="1140" dirty="0">
                 <a:solidFill>
                   <a:srgbClr val="17364A"/>
                 </a:solidFill>
@@ -4432,16 +4432,16 @@
                 <a:ea typeface="Aptos" pitchFamily="34" charset="-122"/>
                 <a:cs typeface="Aptos" pitchFamily="34" charset="-120"/>
               </a:rPr>
-              <a:t>This workflow could improve triage, but it must log the AI.</a:t>
-            </a:r>
-            <a:endParaRPr lang="en-US" sz="1220" dirty="0"/>
-          </a:p>
-          <a:p>
-            <a:pPr indent="0" marL="0">
-              <a:buNone/>
-            </a:pPr>
-            <a:r>
-              <a:rPr lang="en-US" sz="1220" dirty="0">
+              <a:t>This workflow could improve triage, but it must.</a:t>
+            </a:r>
+            <a:endParaRPr lang="en-US" sz="1140" dirty="0"/>
+          </a:p>
+          <a:p>
+            <a:pPr indent="0" marL="0">
+              <a:buNone/>
+            </a:pPr>
+            <a:r>
+              <a:rPr lang="en-US" sz="1140" dirty="0">
                 <a:solidFill>
                   <a:srgbClr val="17364A"/>
                 </a:solidFill>
@@ -4449,9 +4449,9 @@
                 <a:ea typeface="Aptos" pitchFamily="34" charset="-122"/>
                 <a:cs typeface="Aptos" pitchFamily="34" charset="-120"/>
               </a:rPr>
-              <a:t>A higher-risk example is an agentic tool that updates a case.</a:t>
-            </a:r>
-            <a:endParaRPr lang="en-US" sz="1220" dirty="0"/>
+              <a:t>A higher-risk example is an agentic tool that.</a:t>
+            </a:r>
+            <a:endParaRPr lang="en-US" sz="1140" dirty="0"/>
           </a:p>
         </p:txBody>
       </p:sp>
@@ -4463,12 +4463,12 @@
         </p:nvSpPr>
         <p:spPr>
           <a:xfrm>
-            <a:off x="7635240" y="4184294"/>
-            <a:ext cx="3474720" cy="1466698"/>
+            <a:off x="7543800" y="4389120"/>
+            <a:ext cx="3611880" cy="1261872"/>
           </a:xfrm>
           <a:prstGeom prst="roundRect">
             <a:avLst>
-              <a:gd name="adj" fmla="val 7481"/>
+              <a:gd name="adj" fmla="val 8696"/>
             </a:avLst>
           </a:prstGeom>
           <a:solidFill>
@@ -4490,8 +4490,8 @@
         </p:nvSpPr>
         <p:spPr>
           <a:xfrm>
-            <a:off x="7799832" y="4330598"/>
-            <a:ext cx="3145536" cy="256032"/>
+            <a:off x="7708392" y="4517136"/>
+            <a:ext cx="3282696" cy="228600"/>
           </a:xfrm>
           <a:prstGeom prst="rect">
             <a:avLst/>
@@ -4507,7 +4507,7 @@
               <a:buNone/>
             </a:pPr>
             <a:r>
-              <a:rPr lang="en-US" sz="1300" b="1" dirty="0">
+              <a:rPr lang="en-US" sz="1220" b="1" dirty="0">
                 <a:solidFill>
                   <a:srgbClr val="0068B7"/>
                 </a:solidFill>
@@ -4517,7 +4517,7 @@
               </a:rPr>
               <a:t>Next action</a:t>
             </a:r>
-            <a:endParaRPr lang="en-US" sz="1300" dirty="0"/>
+            <a:endParaRPr lang="en-US" sz="1220" dirty="0"/>
           </a:p>
         </p:txBody>
       </p:sp>
@@ -4529,8 +4529,8 @@
         </p:nvSpPr>
         <p:spPr>
           <a:xfrm>
-            <a:off x="7799832" y="4659782"/>
-            <a:ext cx="3145536" cy="899770"/>
+            <a:off x="7708392" y="4828032"/>
+            <a:ext cx="3282696" cy="749808"/>
           </a:xfrm>
           <a:prstGeom prst="rect">
             <a:avLst/>
@@ -4548,7 +4548,7 @@
               <a:buNone/>
             </a:pPr>
             <a:r>
-              <a:rPr lang="en-US" sz="1320" dirty="0">
+              <a:rPr lang="en-US" sz="1220" dirty="0">
                 <a:solidFill>
                   <a:srgbClr val="17364A"/>
                 </a:solidFill>
@@ -4556,9 +4556,9 @@
                 <a:ea typeface="Aptos" pitchFamily="34" charset="-122"/>
                 <a:cs typeface="Aptos" pitchFamily="34" charset="-120"/>
               </a:rPr>
-              <a:t>Use the concept to clarify workflow changes, dependencies, staffing, procurement requirements, training needs, and implementation checkpoints.</a:t>
-            </a:r>
-            <a:endParaRPr lang="en-US" sz="1320" dirty="0"/>
+              <a:t>Use the concept to clarify workflow changes, dependencies, staffing, procurement.</a:t>
+            </a:r>
+            <a:endParaRPr lang="en-US" sz="1220" dirty="0"/>
           </a:p>
         </p:txBody>
       </p:sp>
@@ -4849,8 +4849,8 @@
         </p:nvSpPr>
         <p:spPr>
           <a:xfrm>
-            <a:off x="868680" y="1508760"/>
-            <a:ext cx="6309360" cy="4160520"/>
+            <a:off x="822960" y="1463040"/>
+            <a:ext cx="6565392" cy="4343400"/>
           </a:xfrm>
           <a:prstGeom prst="rect">
             <a:avLst/>
@@ -4868,7 +4868,7 @@
               <a:buNone/>
             </a:pPr>
             <a:r>
-              <a:rPr lang="en-US" sz="2100" dirty="0">
+              <a:rPr lang="en-US" sz="1920" dirty="0">
                 <a:solidFill>
                   <a:srgbClr val="003A63"/>
                 </a:solidFill>
@@ -4878,14 +4878,14 @@
               </a:rPr>
               <a:t>• API review should begin with purpose and permissions.</a:t>
             </a:r>
-            <a:endParaRPr lang="en-US" sz="2100" dirty="0"/>
-          </a:p>
-          <a:p>
-            <a:pPr indent="0" marL="0">
-              <a:buNone/>
-            </a:pPr>
-            <a:r>
-              <a:rPr lang="en-US" sz="2100" dirty="0">
+            <a:endParaRPr lang="en-US" sz="1920" dirty="0"/>
+          </a:p>
+          <a:p>
+            <a:pPr indent="0" marL="0">
+              <a:buNone/>
+            </a:pPr>
+            <a:r>
+              <a:rPr lang="en-US" sz="1920" dirty="0">
                 <a:solidFill>
                   <a:srgbClr val="003A63"/>
                 </a:solidFill>
@@ -4893,16 +4893,16 @@
                 <a:ea typeface="Aptos" pitchFamily="34" charset="-122"/>
                 <a:cs typeface="Aptos" pitchFamily="34" charset="-120"/>
               </a:rPr>
-              <a:t>• Staff should ask what data the AI tool needs, whether the access is read-only or write-back,.</a:t>
-            </a:r>
-            <a:endParaRPr lang="en-US" sz="2100" dirty="0"/>
-          </a:p>
-          <a:p>
-            <a:pPr indent="0" marL="0">
-              <a:buNone/>
-            </a:pPr>
-            <a:r>
-              <a:rPr lang="en-US" sz="2100" dirty="0">
+              <a:t>• Staff should ask what data the AI tool needs, whether the access is.</a:t>
+            </a:r>
+            <a:endParaRPr lang="en-US" sz="1920" dirty="0"/>
+          </a:p>
+          <a:p>
+            <a:pPr indent="0" marL="0">
+              <a:buNone/>
+            </a:pPr>
+            <a:r>
+              <a:rPr lang="en-US" sz="1920" dirty="0">
                 <a:solidFill>
                   <a:srgbClr val="003A63"/>
                 </a:solidFill>
@@ -4910,9 +4910,9 @@
                 <a:ea typeface="Aptos" pitchFamily="34" charset="-122"/>
                 <a:cs typeface="Aptos" pitchFamily="34" charset="-120"/>
               </a:rPr>
-              <a:t>• Permissions should follow least privilege, meaning the tool receives only the access required.</a:t>
-            </a:r>
-            <a:endParaRPr lang="en-US" sz="2100" dirty="0"/>
+              <a:t>• Permissions should follow least privilege, meaning the tool receives only.</a:t>
+            </a:r>
+            <a:endParaRPr lang="en-US" sz="1920" dirty="0"/>
           </a:p>
         </p:txBody>
       </p:sp>
@@ -4924,12 +4924,12 @@
         </p:nvSpPr>
         <p:spPr>
           <a:xfrm>
-            <a:off x="7635240" y="1325880"/>
-            <a:ext cx="3474720" cy="1207008"/>
+            <a:off x="7543800" y="1325880"/>
+            <a:ext cx="3611880" cy="1261872"/>
           </a:xfrm>
           <a:prstGeom prst="roundRect">
             <a:avLst>
-              <a:gd name="adj" fmla="val 9091"/>
+              <a:gd name="adj" fmla="val 8696"/>
             </a:avLst>
           </a:prstGeom>
           <a:solidFill>
@@ -4951,8 +4951,8 @@
         </p:nvSpPr>
         <p:spPr>
           <a:xfrm>
-            <a:off x="7799832" y="1472184"/>
-            <a:ext cx="3145536" cy="256032"/>
+            <a:off x="7708392" y="1453896"/>
+            <a:ext cx="3282696" cy="228600"/>
           </a:xfrm>
           <a:prstGeom prst="rect">
             <a:avLst/>
@@ -4968,7 +4968,7 @@
               <a:buNone/>
             </a:pPr>
             <a:r>
-              <a:rPr lang="en-US" sz="1300" b="1" dirty="0">
+              <a:rPr lang="en-US" sz="1220" b="1" dirty="0">
                 <a:solidFill>
                   <a:srgbClr val="0068B7"/>
                 </a:solidFill>
@@ -4978,7 +4978,7 @@
               </a:rPr>
               <a:t>Implementation cue</a:t>
             </a:r>
-            <a:endParaRPr lang="en-US" sz="1300" dirty="0"/>
+            <a:endParaRPr lang="en-US" sz="1220" dirty="0"/>
           </a:p>
         </p:txBody>
       </p:sp>
@@ -4990,8 +4990,8 @@
         </p:nvSpPr>
         <p:spPr>
           <a:xfrm>
-            <a:off x="7799832" y="1801368"/>
-            <a:ext cx="3145536" cy="640080"/>
+            <a:off x="7708392" y="1764792"/>
+            <a:ext cx="3282696" cy="749808"/>
           </a:xfrm>
           <a:prstGeom prst="rect">
             <a:avLst/>
@@ -5009,7 +5009,7 @@
               <a:buNone/>
             </a:pPr>
             <a:r>
-              <a:rPr lang="en-US" sz="1320" dirty="0">
+              <a:rPr lang="en-US" sz="1220" dirty="0">
                 <a:solidFill>
                   <a:srgbClr val="17364A"/>
                 </a:solidFill>
@@ -5019,7 +5019,7 @@
               </a:rPr>
               <a:t>API review should begin with purpose and permissions.</a:t>
             </a:r>
-            <a:endParaRPr lang="en-US" sz="1320" dirty="0"/>
+            <a:endParaRPr lang="en-US" sz="1220" dirty="0"/>
           </a:p>
         </p:txBody>
       </p:sp>
@@ -5031,12 +5031,12 @@
         </p:nvSpPr>
         <p:spPr>
           <a:xfrm>
-            <a:off x="7635240" y="2670048"/>
-            <a:ext cx="3474720" cy="1377086"/>
+            <a:off x="7543800" y="2724912"/>
+            <a:ext cx="3611880" cy="1527048"/>
           </a:xfrm>
           <a:prstGeom prst="roundRect">
             <a:avLst>
-              <a:gd name="adj" fmla="val 7968"/>
+              <a:gd name="adj" fmla="val 7186"/>
             </a:avLst>
           </a:prstGeom>
           <a:solidFill>
@@ -5058,8 +5058,8 @@
         </p:nvSpPr>
         <p:spPr>
           <a:xfrm>
-            <a:off x="7799832" y="2816352"/>
-            <a:ext cx="3145536" cy="256032"/>
+            <a:off x="7708392" y="2852928"/>
+            <a:ext cx="3282696" cy="228600"/>
           </a:xfrm>
           <a:prstGeom prst="rect">
             <a:avLst/>
@@ -5075,7 +5075,7 @@
               <a:buNone/>
             </a:pPr>
             <a:r>
-              <a:rPr lang="en-US" sz="1300" b="1" dirty="0">
+              <a:rPr lang="en-US" sz="1220" b="1" dirty="0">
                 <a:solidFill>
                   <a:srgbClr val="0068B7"/>
                 </a:solidFill>
@@ -5085,7 +5085,7 @@
               </a:rPr>
               <a:t>Concept checkpoints</a:t>
             </a:r>
-            <a:endParaRPr lang="en-US" sz="1300" dirty="0"/>
+            <a:endParaRPr lang="en-US" sz="1220" dirty="0"/>
           </a:p>
         </p:txBody>
       </p:sp>
@@ -5097,8 +5097,8 @@
         </p:nvSpPr>
         <p:spPr>
           <a:xfrm>
-            <a:off x="7818120" y="3182112"/>
-            <a:ext cx="3090672" cy="718718"/>
+            <a:off x="7726680" y="3182112"/>
+            <a:ext cx="3227832" cy="960120"/>
           </a:xfrm>
           <a:prstGeom prst="rect">
             <a:avLst/>
@@ -5116,7 +5116,7 @@
               <a:buNone/>
             </a:pPr>
             <a:r>
-              <a:rPr lang="en-US" sz="1220" dirty="0">
+              <a:rPr lang="en-US" sz="1140" dirty="0">
                 <a:solidFill>
                   <a:srgbClr val="17364A"/>
                 </a:solidFill>
@@ -5124,16 +5124,16 @@
                 <a:ea typeface="Aptos" pitchFamily="34" charset="-122"/>
                 <a:cs typeface="Aptos" pitchFamily="34" charset="-120"/>
               </a:rPr>
-              <a:t>Staff should ask what data the AI tool needs, whether the access.</a:t>
-            </a:r>
-            <a:endParaRPr lang="en-US" sz="1220" dirty="0"/>
-          </a:p>
-          <a:p>
-            <a:pPr indent="0" marL="0">
-              <a:buNone/>
-            </a:pPr>
-            <a:r>
-              <a:rPr lang="en-US" sz="1220" dirty="0">
+              <a:t>Staff should ask what data the AI tool needs,.</a:t>
+            </a:r>
+            <a:endParaRPr lang="en-US" sz="1140" dirty="0"/>
+          </a:p>
+          <a:p>
+            <a:pPr indent="0" marL="0">
+              <a:buNone/>
+            </a:pPr>
+            <a:r>
+              <a:rPr lang="en-US" sz="1140" dirty="0">
                 <a:solidFill>
                   <a:srgbClr val="17364A"/>
                 </a:solidFill>
@@ -5141,16 +5141,16 @@
                 <a:ea typeface="Aptos" pitchFamily="34" charset="-122"/>
                 <a:cs typeface="Aptos" pitchFamily="34" charset="-120"/>
               </a:rPr>
-              <a:t>Permissions should follow least privilege, meaning the tool.</a:t>
-            </a:r>
-            <a:endParaRPr lang="en-US" sz="1220" dirty="0"/>
-          </a:p>
-          <a:p>
-            <a:pPr indent="0" marL="0">
-              <a:buNone/>
-            </a:pPr>
-            <a:r>
-              <a:rPr lang="en-US" sz="1220" dirty="0">
+              <a:t>Permissions should follow least privilege, meaning.</a:t>
+            </a:r>
+            <a:endParaRPr lang="en-US" sz="1140" dirty="0"/>
+          </a:p>
+          <a:p>
+            <a:pPr indent="0" marL="0">
+              <a:buNone/>
+            </a:pPr>
+            <a:r>
+              <a:rPr lang="en-US" sz="1140" dirty="0">
                 <a:solidFill>
                   <a:srgbClr val="17364A"/>
                 </a:solidFill>
@@ -5158,9 +5158,9 @@
                 <a:ea typeface="Aptos" pitchFamily="34" charset="-122"/>
                 <a:cs typeface="Aptos" pitchFamily="34" charset="-120"/>
               </a:rPr>
-              <a:t>Event-driven workflows should be designed with failure in mind.</a:t>
-            </a:r>
-            <a:endParaRPr lang="en-US" sz="1220" dirty="0"/>
+              <a:t>Event-driven workflows should be designed with.</a:t>
+            </a:r>
+            <a:endParaRPr lang="en-US" sz="1140" dirty="0"/>
           </a:p>
         </p:txBody>
       </p:sp>
@@ -5172,12 +5172,12 @@
         </p:nvSpPr>
         <p:spPr>
           <a:xfrm>
-            <a:off x="7635240" y="4184294"/>
-            <a:ext cx="3474720" cy="1466698"/>
+            <a:off x="7543800" y="4389120"/>
+            <a:ext cx="3611880" cy="1261872"/>
           </a:xfrm>
           <a:prstGeom prst="roundRect">
             <a:avLst>
-              <a:gd name="adj" fmla="val 7481"/>
+              <a:gd name="adj" fmla="val 8696"/>
             </a:avLst>
           </a:prstGeom>
           <a:solidFill>
@@ -5199,8 +5199,8 @@
         </p:nvSpPr>
         <p:spPr>
           <a:xfrm>
-            <a:off x="7799832" y="4330598"/>
-            <a:ext cx="3145536" cy="256032"/>
+            <a:off x="7708392" y="4517136"/>
+            <a:ext cx="3282696" cy="228600"/>
           </a:xfrm>
           <a:prstGeom prst="rect">
             <a:avLst/>
@@ -5216,7 +5216,7 @@
               <a:buNone/>
             </a:pPr>
             <a:r>
-              <a:rPr lang="en-US" sz="1300" b="1" dirty="0">
+              <a:rPr lang="en-US" sz="1220" b="1" dirty="0">
                 <a:solidFill>
                   <a:srgbClr val="0068B7"/>
                 </a:solidFill>
@@ -5226,7 +5226,7 @@
               </a:rPr>
               <a:t>Next action</a:t>
             </a:r>
-            <a:endParaRPr lang="en-US" sz="1300" dirty="0"/>
+            <a:endParaRPr lang="en-US" sz="1220" dirty="0"/>
           </a:p>
         </p:txBody>
       </p:sp>
@@ -5238,8 +5238,8 @@
         </p:nvSpPr>
         <p:spPr>
           <a:xfrm>
-            <a:off x="7799832" y="4659782"/>
-            <a:ext cx="3145536" cy="899770"/>
+            <a:off x="7708392" y="4828032"/>
+            <a:ext cx="3282696" cy="749808"/>
           </a:xfrm>
           <a:prstGeom prst="rect">
             <a:avLst/>
@@ -5257,7 +5257,7 @@
               <a:buNone/>
             </a:pPr>
             <a:r>
-              <a:rPr lang="en-US" sz="1320" dirty="0">
+              <a:rPr lang="en-US" sz="1220" dirty="0">
                 <a:solidFill>
                   <a:srgbClr val="17364A"/>
                 </a:solidFill>
@@ -5265,9 +5265,9 @@
                 <a:ea typeface="Aptos" pitchFamily="34" charset="-122"/>
                 <a:cs typeface="Aptos" pitchFamily="34" charset="-120"/>
               </a:rPr>
-              <a:t>Use the concept to clarify workflow changes, dependencies, staffing, procurement requirements, training needs, and implementation checkpoints.</a:t>
-            </a:r>
-            <a:endParaRPr lang="en-US" sz="1320" dirty="0"/>
+              <a:t>Use the concept to clarify workflow changes, dependencies, staffing, procurement.</a:t>
+            </a:r>
+            <a:endParaRPr lang="en-US" sz="1220" dirty="0"/>
           </a:p>
         </p:txBody>
       </p:sp>
@@ -5558,8 +5558,8 @@
         </p:nvSpPr>
         <p:spPr>
           <a:xfrm>
-            <a:off x="868680" y="1508760"/>
-            <a:ext cx="6309360" cy="4160520"/>
+            <a:off x="822960" y="1463040"/>
+            <a:ext cx="6565392" cy="4343400"/>
           </a:xfrm>
           <a:prstGeom prst="rect">
             <a:avLst/>
@@ -5577,7 +5577,7 @@
               <a:buNone/>
             </a:pPr>
             <a:r>
-              <a:rPr lang="en-US" sz="2100" dirty="0">
+              <a:rPr lang="en-US" sz="1920" dirty="0">
                 <a:solidFill>
                   <a:srgbClr val="003A63"/>
                 </a:solidFill>
@@ -5587,14 +5587,14 @@
               </a:rPr>
               <a:t>• Over-permissioned integrations.</a:t>
             </a:r>
-            <a:endParaRPr lang="en-US" sz="2100" dirty="0"/>
-          </a:p>
-          <a:p>
-            <a:pPr indent="0" marL="0">
-              <a:buNone/>
-            </a:pPr>
-            <a:r>
-              <a:rPr lang="en-US" sz="2100" dirty="0">
+            <a:endParaRPr lang="en-US" sz="1920" dirty="0"/>
+          </a:p>
+          <a:p>
+            <a:pPr indent="0" marL="0">
+              <a:buNone/>
+            </a:pPr>
+            <a:r>
+              <a:rPr lang="en-US" sz="1920" dirty="0">
                 <a:solidFill>
                   <a:srgbClr val="003A63"/>
                 </a:solidFill>
@@ -5604,14 +5604,14 @@
               </a:rPr>
               <a:t>• AI tools may receive broader access than needed.</a:t>
             </a:r>
-            <a:endParaRPr lang="en-US" sz="2100" dirty="0"/>
-          </a:p>
-          <a:p>
-            <a:pPr indent="0" marL="0">
-              <a:buNone/>
-            </a:pPr>
-            <a:r>
-              <a:rPr lang="en-US" sz="2100" dirty="0">
+            <a:endParaRPr lang="en-US" sz="1920" dirty="0"/>
+          </a:p>
+          <a:p>
+            <a:pPr indent="0" marL="0">
+              <a:buNone/>
+            </a:pPr>
+            <a:r>
+              <a:rPr lang="en-US" sz="1920" dirty="0">
                 <a:solidFill>
                   <a:srgbClr val="003A63"/>
                 </a:solidFill>
@@ -5619,9 +5619,9 @@
                 <a:ea typeface="Aptos" pitchFamily="34" charset="-122"/>
                 <a:cs typeface="Aptos" pitchFamily="34" charset="-120"/>
               </a:rPr>
-              <a:t>• Guardrails include least-privilege scopes, role-based access, periodic access review, and.</a:t>
-            </a:r>
-            <a:endParaRPr lang="en-US" sz="2100" dirty="0"/>
+              <a:t>• Guardrails include least-privilege scopes, role-based access, periodic.</a:t>
+            </a:r>
+            <a:endParaRPr lang="en-US" sz="1920" dirty="0"/>
           </a:p>
         </p:txBody>
       </p:sp>
@@ -5633,12 +5633,12 @@
         </p:nvSpPr>
         <p:spPr>
           <a:xfrm>
-            <a:off x="7635240" y="1325880"/>
-            <a:ext cx="3474720" cy="1207008"/>
+            <a:off x="7543800" y="1325880"/>
+            <a:ext cx="3611880" cy="1261872"/>
           </a:xfrm>
           <a:prstGeom prst="roundRect">
             <a:avLst>
-              <a:gd name="adj" fmla="val 9091"/>
+              <a:gd name="adj" fmla="val 8696"/>
             </a:avLst>
           </a:prstGeom>
           <a:solidFill>
@@ -5660,8 +5660,8 @@
         </p:nvSpPr>
         <p:spPr>
           <a:xfrm>
-            <a:off x="7799832" y="1472184"/>
-            <a:ext cx="3145536" cy="256032"/>
+            <a:off x="7708392" y="1453896"/>
+            <a:ext cx="3282696" cy="228600"/>
           </a:xfrm>
           <a:prstGeom prst="rect">
             <a:avLst/>
@@ -5677,7 +5677,7 @@
               <a:buNone/>
             </a:pPr>
             <a:r>
-              <a:rPr lang="en-US" sz="1300" b="1" dirty="0">
+              <a:rPr lang="en-US" sz="1220" b="1" dirty="0">
                 <a:solidFill>
                   <a:srgbClr val="0068B7"/>
                 </a:solidFill>
@@ -5687,7 +5687,7 @@
               </a:rPr>
               <a:t>Risk check</a:t>
             </a:r>
-            <a:endParaRPr lang="en-US" sz="1300" dirty="0"/>
+            <a:endParaRPr lang="en-US" sz="1220" dirty="0"/>
           </a:p>
         </p:txBody>
       </p:sp>
@@ -5699,8 +5699,8 @@
         </p:nvSpPr>
         <p:spPr>
           <a:xfrm>
-            <a:off x="7799832" y="1801368"/>
-            <a:ext cx="3145536" cy="640080"/>
+            <a:off x="7708392" y="1764792"/>
+            <a:ext cx="3282696" cy="749808"/>
           </a:xfrm>
           <a:prstGeom prst="rect">
             <a:avLst/>
@@ -5718,7 +5718,7 @@
               <a:buNone/>
             </a:pPr>
             <a:r>
-              <a:rPr lang="en-US" sz="1320" dirty="0">
+              <a:rPr lang="en-US" sz="1220" dirty="0">
                 <a:solidFill>
                   <a:srgbClr val="17364A"/>
                 </a:solidFill>
@@ -5728,7 +5728,7 @@
               </a:rPr>
               <a:t>Over-permissioned integrations.</a:t>
             </a:r>
-            <a:endParaRPr lang="en-US" sz="1320" dirty="0"/>
+            <a:endParaRPr lang="en-US" sz="1220" dirty="0"/>
           </a:p>
         </p:txBody>
       </p:sp>
@@ -5740,12 +5740,12 @@
         </p:nvSpPr>
         <p:spPr>
           <a:xfrm>
-            <a:off x="7635240" y="2670048"/>
-            <a:ext cx="3474720" cy="1536192"/>
+            <a:off x="7543800" y="2724912"/>
+            <a:ext cx="3611880" cy="1527048"/>
           </a:xfrm>
           <a:prstGeom prst="roundRect">
             <a:avLst>
-              <a:gd name="adj" fmla="val 7143"/>
+              <a:gd name="adj" fmla="val 7186"/>
             </a:avLst>
           </a:prstGeom>
           <a:solidFill>
@@ -5767,8 +5767,8 @@
         </p:nvSpPr>
         <p:spPr>
           <a:xfrm>
-            <a:off x="7799832" y="2816352"/>
-            <a:ext cx="3145536" cy="256032"/>
+            <a:off x="7708392" y="2852928"/>
+            <a:ext cx="3282696" cy="228600"/>
           </a:xfrm>
           <a:prstGeom prst="rect">
             <a:avLst/>
@@ -5784,7 +5784,7 @@
               <a:buNone/>
             </a:pPr>
             <a:r>
-              <a:rPr lang="en-US" sz="1300" b="1" dirty="0">
+              <a:rPr lang="en-US" sz="1220" b="1" dirty="0">
                 <a:solidFill>
                   <a:srgbClr val="0068B7"/>
                 </a:solidFill>
@@ -5794,7 +5794,7 @@
               </a:rPr>
               <a:t>Concept checkpoints</a:t>
             </a:r>
-            <a:endParaRPr lang="en-US" sz="1300" dirty="0"/>
+            <a:endParaRPr lang="en-US" sz="1220" dirty="0"/>
           </a:p>
         </p:txBody>
       </p:sp>
@@ -5806,8 +5806,8 @@
         </p:nvSpPr>
         <p:spPr>
           <a:xfrm>
-            <a:off x="7818120" y="3182112"/>
-            <a:ext cx="3090672" cy="877824"/>
+            <a:off x="7726680" y="3182112"/>
+            <a:ext cx="3227832" cy="960120"/>
           </a:xfrm>
           <a:prstGeom prst="rect">
             <a:avLst/>
@@ -5825,7 +5825,7 @@
               <a:buNone/>
             </a:pPr>
             <a:r>
-              <a:rPr lang="en-US" sz="1220" dirty="0">
+              <a:rPr lang="en-US" sz="1140" dirty="0">
                 <a:solidFill>
                   <a:srgbClr val="17364A"/>
                 </a:solidFill>
@@ -5833,16 +5833,16 @@
                 <a:ea typeface="Aptos" pitchFamily="34" charset="-122"/>
                 <a:cs typeface="Aptos" pitchFamily="34" charset="-120"/>
               </a:rPr>
-              <a:t>Guardrails include least-privilege scopes, role-based access,.</a:t>
-            </a:r>
-            <a:endParaRPr lang="en-US" sz="1220" dirty="0"/>
-          </a:p>
-          <a:p>
-            <a:pPr indent="0" marL="0">
-              <a:buNone/>
-            </a:pPr>
-            <a:r>
-              <a:rPr lang="en-US" sz="1220" dirty="0">
+              <a:t>Guardrails include least-privilege scopes,.</a:t>
+            </a:r>
+            <a:endParaRPr lang="en-US" sz="1140" dirty="0"/>
+          </a:p>
+          <a:p>
+            <a:pPr indent="0" marL="0">
+              <a:buNone/>
+            </a:pPr>
+            <a:r>
+              <a:rPr lang="en-US" sz="1140" dirty="0">
                 <a:solidFill>
                   <a:srgbClr val="17364A"/>
                 </a:solidFill>
@@ -5852,14 +5852,14 @@
               </a:rPr>
               <a:t>Unreviewed write-back.</a:t>
             </a:r>
-            <a:endParaRPr lang="en-US" sz="1220" dirty="0"/>
-          </a:p>
-          <a:p>
-            <a:pPr indent="0" marL="0">
-              <a:buNone/>
-            </a:pPr>
-            <a:r>
-              <a:rPr lang="en-US" sz="1220" dirty="0">
+            <a:endParaRPr lang="en-US" sz="1140" dirty="0"/>
+          </a:p>
+          <a:p>
+            <a:pPr indent="0" marL="0">
+              <a:buNone/>
+            </a:pPr>
+            <a:r>
+              <a:rPr lang="en-US" sz="1140" dirty="0">
                 <a:solidFill>
                   <a:srgbClr val="17364A"/>
                 </a:solidFill>
@@ -5867,9 +5867,9 @@
                 <a:ea typeface="Aptos" pitchFamily="34" charset="-122"/>
                 <a:cs typeface="Aptos" pitchFamily="34" charset="-120"/>
               </a:rPr>
-              <a:t>Automated updates can alter official records without adequate.</a:t>
-            </a:r>
-            <a:endParaRPr lang="en-US" sz="1220" dirty="0"/>
+              <a:t>Automated updates can alter official records.</a:t>
+            </a:r>
+            <a:endParaRPr lang="en-US" sz="1140" dirty="0"/>
           </a:p>
         </p:txBody>
       </p:sp>
@@ -5881,12 +5881,12 @@
         </p:nvSpPr>
         <p:spPr>
           <a:xfrm>
-            <a:off x="7635240" y="4343400"/>
-            <a:ext cx="3474720" cy="1255471"/>
+            <a:off x="7543800" y="4389120"/>
+            <a:ext cx="3611880" cy="1261872"/>
           </a:xfrm>
           <a:prstGeom prst="roundRect">
             <a:avLst>
-              <a:gd name="adj" fmla="val 8740"/>
+              <a:gd name="adj" fmla="val 8696"/>
             </a:avLst>
           </a:prstGeom>
           <a:solidFill>
@@ -5908,8 +5908,8 @@
         </p:nvSpPr>
         <p:spPr>
           <a:xfrm>
-            <a:off x="7799832" y="4489704"/>
-            <a:ext cx="3145536" cy="256032"/>
+            <a:off x="7708392" y="4517136"/>
+            <a:ext cx="3282696" cy="228600"/>
           </a:xfrm>
           <a:prstGeom prst="rect">
             <a:avLst/>
@@ -5925,7 +5925,7 @@
               <a:buNone/>
             </a:pPr>
             <a:r>
-              <a:rPr lang="en-US" sz="1300" b="1" dirty="0">
+              <a:rPr lang="en-US" sz="1220" b="1" dirty="0">
                 <a:solidFill>
                   <a:srgbClr val="0068B7"/>
                 </a:solidFill>
@@ -5935,7 +5935,7 @@
               </a:rPr>
               <a:t>Safeguard to plan</a:t>
             </a:r>
-            <a:endParaRPr lang="en-US" sz="1300" dirty="0"/>
+            <a:endParaRPr lang="en-US" sz="1220" dirty="0"/>
           </a:p>
         </p:txBody>
       </p:sp>
@@ -5947,8 +5947,8 @@
         </p:nvSpPr>
         <p:spPr>
           <a:xfrm>
-            <a:off x="7799832" y="4818888"/>
-            <a:ext cx="3145536" cy="688543"/>
+            <a:off x="7708392" y="4828032"/>
+            <a:ext cx="3282696" cy="749808"/>
           </a:xfrm>
           <a:prstGeom prst="rect">
             <a:avLst/>
@@ -5966,7 +5966,7 @@
               <a:buNone/>
             </a:pPr>
             <a:r>
-              <a:rPr lang="en-US" sz="1320" dirty="0">
+              <a:rPr lang="en-US" sz="1220" dirty="0">
                 <a:solidFill>
                   <a:srgbClr val="17364A"/>
                 </a:solidFill>
@@ -5974,9 +5974,9 @@
                 <a:ea typeface="Aptos" pitchFamily="34" charset="-122"/>
                 <a:cs typeface="Aptos" pitchFamily="34" charset="-120"/>
               </a:rPr>
-              <a:t>Identify what could go wrong, who could be affected, what safeguards are needed, and what evidence should be reviewed before use.</a:t>
-            </a:r>
-            <a:endParaRPr lang="en-US" sz="1320" dirty="0"/>
+              <a:t>Identify what could go wrong, who could be affected, what safeguards are needed,.</a:t>
+            </a:r>
+            <a:endParaRPr lang="en-US" sz="1220" dirty="0"/>
           </a:p>
         </p:txBody>
       </p:sp>
@@ -6267,8 +6267,8 @@
         </p:nvSpPr>
         <p:spPr>
           <a:xfrm>
-            <a:off x="868680" y="1508760"/>
-            <a:ext cx="6309360" cy="4160520"/>
+            <a:off x="822960" y="1463040"/>
+            <a:ext cx="6565392" cy="4343400"/>
           </a:xfrm>
           <a:prstGeom prst="rect">
             <a:avLst/>
@@ -6286,7 +6286,7 @@
               <a:buNone/>
             </a:pPr>
             <a:r>
-              <a:rPr lang="en-US" sz="2100" dirty="0">
+              <a:rPr lang="en-US" sz="1920" dirty="0">
                 <a:solidFill>
                   <a:srgbClr val="003A63"/>
                 </a:solidFill>
@@ -6296,14 +6296,14 @@
               </a:rPr>
               <a:t>• Poor error handling.</a:t>
             </a:r>
-            <a:endParaRPr lang="en-US" sz="2100" dirty="0"/>
-          </a:p>
-          <a:p>
-            <a:pPr indent="0" marL="0">
-              <a:buNone/>
-            </a:pPr>
-            <a:r>
-              <a:rPr lang="en-US" sz="2100" dirty="0">
+            <a:endParaRPr lang="en-US" sz="1920" dirty="0"/>
+          </a:p>
+          <a:p>
+            <a:pPr indent="0" marL="0">
+              <a:buNone/>
+            </a:pPr>
+            <a:r>
+              <a:rPr lang="en-US" sz="1920" dirty="0">
                 <a:solidFill>
                   <a:srgbClr val="003A63"/>
                 </a:solidFill>
@@ -6313,14 +6313,14 @@
               </a:rPr>
               <a:t>• Failed API calls may produce incomplete workflows.</a:t>
             </a:r>
-            <a:endParaRPr lang="en-US" sz="2100" dirty="0"/>
-          </a:p>
-          <a:p>
-            <a:pPr indent="0" marL="0">
-              <a:buNone/>
-            </a:pPr>
-            <a:r>
-              <a:rPr lang="en-US" sz="2100" dirty="0">
+            <a:endParaRPr lang="en-US" sz="1920" dirty="0"/>
+          </a:p>
+          <a:p>
+            <a:pPr indent="0" marL="0">
+              <a:buNone/>
+            </a:pPr>
+            <a:r>
+              <a:rPr lang="en-US" sz="1920" dirty="0">
                 <a:solidFill>
                   <a:srgbClr val="003A63"/>
                 </a:solidFill>
@@ -6328,9 +6328,9 @@
                 <a:ea typeface="Aptos" pitchFamily="34" charset="-122"/>
                 <a:cs typeface="Aptos" pitchFamily="34" charset="-120"/>
               </a:rPr>
-              <a:t>• Guardrails include status indicators, retry rules, exception queues, and staff notification.</a:t>
-            </a:r>
-            <a:endParaRPr lang="en-US" sz="2100" dirty="0"/>
+              <a:t>• Guardrails include status indicators, retry rules, exception queues, and.</a:t>
+            </a:r>
+            <a:endParaRPr lang="en-US" sz="1920" dirty="0"/>
           </a:p>
         </p:txBody>
       </p:sp>
@@ -6342,12 +6342,12 @@
         </p:nvSpPr>
         <p:spPr>
           <a:xfrm>
-            <a:off x="7635240" y="1325880"/>
-            <a:ext cx="3474720" cy="1207008"/>
+            <a:off x="7543800" y="1325880"/>
+            <a:ext cx="3611880" cy="1261872"/>
           </a:xfrm>
           <a:prstGeom prst="roundRect">
             <a:avLst>
-              <a:gd name="adj" fmla="val 9091"/>
+              <a:gd name="adj" fmla="val 8696"/>
             </a:avLst>
           </a:prstGeom>
           <a:solidFill>
@@ -6369,8 +6369,8 @@
         </p:nvSpPr>
         <p:spPr>
           <a:xfrm>
-            <a:off x="7799832" y="1472184"/>
-            <a:ext cx="3145536" cy="256032"/>
+            <a:off x="7708392" y="1453896"/>
+            <a:ext cx="3282696" cy="228600"/>
           </a:xfrm>
           <a:prstGeom prst="rect">
             <a:avLst/>
@@ -6386,7 +6386,7 @@
               <a:buNone/>
             </a:pPr>
             <a:r>
-              <a:rPr lang="en-US" sz="1300" b="1" dirty="0">
+              <a:rPr lang="en-US" sz="1220" b="1" dirty="0">
                 <a:solidFill>
                   <a:srgbClr val="0068B7"/>
                 </a:solidFill>
@@ -6396,7 +6396,7 @@
               </a:rPr>
               <a:t>Risk check</a:t>
             </a:r>
-            <a:endParaRPr lang="en-US" sz="1300" dirty="0"/>
+            <a:endParaRPr lang="en-US" sz="1220" dirty="0"/>
           </a:p>
         </p:txBody>
       </p:sp>
@@ -6408,8 +6408,8 @@
         </p:nvSpPr>
         <p:spPr>
           <a:xfrm>
-            <a:off x="7799832" y="1801368"/>
-            <a:ext cx="3145536" cy="640080"/>
+            <a:off x="7708392" y="1764792"/>
+            <a:ext cx="3282696" cy="749808"/>
           </a:xfrm>
           <a:prstGeom prst="rect">
             <a:avLst/>
@@ -6427,7 +6427,7 @@
               <a:buNone/>
             </a:pPr>
             <a:r>
-              <a:rPr lang="en-US" sz="1320" dirty="0">
+              <a:rPr lang="en-US" sz="1220" dirty="0">
                 <a:solidFill>
                   <a:srgbClr val="17364A"/>
                 </a:solidFill>
@@ -6437,7 +6437,7 @@
               </a:rPr>
               <a:t>Poor error handling.</a:t>
             </a:r>
-            <a:endParaRPr lang="en-US" sz="1320" dirty="0"/>
+            <a:endParaRPr lang="en-US" sz="1220" dirty="0"/>
           </a:p>
         </p:txBody>
       </p:sp>
@@ -6449,12 +6449,12 @@
         </p:nvSpPr>
         <p:spPr>
           <a:xfrm>
-            <a:off x="7635240" y="2670048"/>
-            <a:ext cx="3474720" cy="1536192"/>
+            <a:off x="7543800" y="2724912"/>
+            <a:ext cx="3611880" cy="1527048"/>
           </a:xfrm>
           <a:prstGeom prst="roundRect">
             <a:avLst>
-              <a:gd name="adj" fmla="val 7143"/>
+              <a:gd name="adj" fmla="val 7186"/>
             </a:avLst>
           </a:prstGeom>
           <a:solidFill>
@@ -6476,8 +6476,8 @@
         </p:nvSpPr>
         <p:spPr>
           <a:xfrm>
-            <a:off x="7799832" y="2816352"/>
-            <a:ext cx="3145536" cy="256032"/>
+            <a:off x="7708392" y="2852928"/>
+            <a:ext cx="3282696" cy="228600"/>
           </a:xfrm>
           <a:prstGeom prst="rect">
             <a:avLst/>
@@ -6493,7 +6493,7 @@
               <a:buNone/>
             </a:pPr>
             <a:r>
-              <a:rPr lang="en-US" sz="1300" b="1" dirty="0">
+              <a:rPr lang="en-US" sz="1220" b="1" dirty="0">
                 <a:solidFill>
                   <a:srgbClr val="0068B7"/>
                 </a:solidFill>
@@ -6503,7 +6503,7 @@
               </a:rPr>
               <a:t>Concept checkpoints</a:t>
             </a:r>
-            <a:endParaRPr lang="en-US" sz="1300" dirty="0"/>
+            <a:endParaRPr lang="en-US" sz="1220" dirty="0"/>
           </a:p>
         </p:txBody>
       </p:sp>
@@ -6515,8 +6515,8 @@
         </p:nvSpPr>
         <p:spPr>
           <a:xfrm>
-            <a:off x="7818120" y="3182112"/>
-            <a:ext cx="3090672" cy="877824"/>
+            <a:off x="7726680" y="3182112"/>
+            <a:ext cx="3227832" cy="960120"/>
           </a:xfrm>
           <a:prstGeom prst="rect">
             <a:avLst/>
@@ -6534,7 +6534,7 @@
               <a:buNone/>
             </a:pPr>
             <a:r>
-              <a:rPr lang="en-US" sz="1220" dirty="0">
+              <a:rPr lang="en-US" sz="1140" dirty="0">
                 <a:solidFill>
                   <a:srgbClr val="17364A"/>
                 </a:solidFill>
@@ -6544,14 +6544,14 @@
               </a:rPr>
               <a:t>Poor error handling.</a:t>
             </a:r>
-            <a:endParaRPr lang="en-US" sz="1220" dirty="0"/>
-          </a:p>
-          <a:p>
-            <a:pPr indent="0" marL="0">
-              <a:buNone/>
-            </a:pPr>
-            <a:r>
-              <a:rPr lang="en-US" sz="1220" dirty="0">
+            <a:endParaRPr lang="en-US" sz="1140" dirty="0"/>
+          </a:p>
+          <a:p>
+            <a:pPr indent="0" marL="0">
+              <a:buNone/>
+            </a:pPr>
+            <a:r>
+              <a:rPr lang="en-US" sz="1140" dirty="0">
                 <a:solidFill>
                   <a:srgbClr val="17364A"/>
                 </a:solidFill>
@@ -6561,14 +6561,14 @@
               </a:rPr>
               <a:t>Failed API calls may produce incomplete workflows.</a:t>
             </a:r>
-            <a:endParaRPr lang="en-US" sz="1220" dirty="0"/>
-          </a:p>
-          <a:p>
-            <a:pPr indent="0" marL="0">
-              <a:buNone/>
-            </a:pPr>
-            <a:r>
-              <a:rPr lang="en-US" sz="1220" dirty="0">
+            <a:endParaRPr lang="en-US" sz="1140" dirty="0"/>
+          </a:p>
+          <a:p>
+            <a:pPr indent="0" marL="0">
+              <a:buNone/>
+            </a:pPr>
+            <a:r>
+              <a:rPr lang="en-US" sz="1140" dirty="0">
                 <a:solidFill>
                   <a:srgbClr val="17364A"/>
                 </a:solidFill>
@@ -6576,9 +6576,9 @@
                 <a:ea typeface="Aptos" pitchFamily="34" charset="-122"/>
                 <a:cs typeface="Aptos" pitchFamily="34" charset="-120"/>
               </a:rPr>
-              <a:t>Guardrails include status indicators, retry rules, exception.</a:t>
-            </a:r>
-            <a:endParaRPr lang="en-US" sz="1220" dirty="0"/>
+              <a:t>Guardrails include status indicators, retry rules,.</a:t>
+            </a:r>
+            <a:endParaRPr lang="en-US" sz="1140" dirty="0"/>
           </a:p>
         </p:txBody>
       </p:sp>
@@ -6590,12 +6590,12 @@
         </p:nvSpPr>
         <p:spPr>
           <a:xfrm>
-            <a:off x="7635240" y="4343400"/>
-            <a:ext cx="3474720" cy="1255471"/>
+            <a:off x="7543800" y="4389120"/>
+            <a:ext cx="3611880" cy="1261872"/>
           </a:xfrm>
           <a:prstGeom prst="roundRect">
             <a:avLst>
-              <a:gd name="adj" fmla="val 8740"/>
+              <a:gd name="adj" fmla="val 8696"/>
             </a:avLst>
           </a:prstGeom>
           <a:solidFill>
@@ -6617,8 +6617,8 @@
         </p:nvSpPr>
         <p:spPr>
           <a:xfrm>
-            <a:off x="7799832" y="4489704"/>
-            <a:ext cx="3145536" cy="256032"/>
+            <a:off x="7708392" y="4517136"/>
+            <a:ext cx="3282696" cy="228600"/>
           </a:xfrm>
           <a:prstGeom prst="rect">
             <a:avLst/>
@@ -6634,7 +6634,7 @@
               <a:buNone/>
             </a:pPr>
             <a:r>
-              <a:rPr lang="en-US" sz="1300" b="1" dirty="0">
+              <a:rPr lang="en-US" sz="1220" b="1" dirty="0">
                 <a:solidFill>
                   <a:srgbClr val="0068B7"/>
                 </a:solidFill>
@@ -6644,7 +6644,7 @@
               </a:rPr>
               <a:t>Safeguard to plan</a:t>
             </a:r>
-            <a:endParaRPr lang="en-US" sz="1300" dirty="0"/>
+            <a:endParaRPr lang="en-US" sz="1220" dirty="0"/>
           </a:p>
         </p:txBody>
       </p:sp>
@@ -6656,8 +6656,8 @@
         </p:nvSpPr>
         <p:spPr>
           <a:xfrm>
-            <a:off x="7799832" y="4818888"/>
-            <a:ext cx="3145536" cy="688543"/>
+            <a:off x="7708392" y="4828032"/>
+            <a:ext cx="3282696" cy="749808"/>
           </a:xfrm>
           <a:prstGeom prst="rect">
             <a:avLst/>
@@ -6675,7 +6675,7 @@
               <a:buNone/>
             </a:pPr>
             <a:r>
-              <a:rPr lang="en-US" sz="1320" dirty="0">
+              <a:rPr lang="en-US" sz="1220" dirty="0">
                 <a:solidFill>
                   <a:srgbClr val="17364A"/>
                 </a:solidFill>
@@ -6683,9 +6683,9 @@
                 <a:ea typeface="Aptos" pitchFamily="34" charset="-122"/>
                 <a:cs typeface="Aptos" pitchFamily="34" charset="-120"/>
               </a:rPr>
-              <a:t>Identify what could go wrong, who could be affected, what safeguards are needed, and what evidence should be reviewed before use.</a:t>
-            </a:r>
-            <a:endParaRPr lang="en-US" sz="1320" dirty="0"/>
+              <a:t>Identify what could go wrong, who could be affected, what safeguards are needed,.</a:t>
+            </a:r>
+            <a:endParaRPr lang="en-US" sz="1220" dirty="0"/>
           </a:p>
         </p:txBody>
       </p:sp>
@@ -6976,8 +6976,8 @@
         </p:nvSpPr>
         <p:spPr>
           <a:xfrm>
-            <a:off x="868680" y="1508760"/>
-            <a:ext cx="6309360" cy="4160520"/>
+            <a:off x="822960" y="1463040"/>
+            <a:ext cx="6565392" cy="4343400"/>
           </a:xfrm>
           <a:prstGeom prst="rect">
             <a:avLst/>
@@ -6995,7 +6995,7 @@
               <a:buNone/>
             </a:pPr>
             <a:r>
-              <a:rPr lang="en-US" sz="2100" dirty="0">
+              <a:rPr lang="en-US" sz="1920" dirty="0">
                 <a:solidFill>
                   <a:srgbClr val="003A63"/>
                 </a:solidFill>
@@ -7005,14 +7005,14 @@
               </a:rPr>
               <a:t>• Generative AI may use APIs to retrieve source material for summaries.</a:t>
             </a:r>
-            <a:endParaRPr lang="en-US" sz="2100" dirty="0"/>
-          </a:p>
-          <a:p>
-            <a:pPr indent="0" marL="0">
-              <a:buNone/>
-            </a:pPr>
-            <a:r>
-              <a:rPr lang="en-US" sz="2100" dirty="0">
+            <a:endParaRPr lang="en-US" sz="1920" dirty="0"/>
+          </a:p>
+          <a:p>
+            <a:pPr indent="0" marL="0">
+              <a:buNone/>
+            </a:pPr>
+            <a:r>
+              <a:rPr lang="en-US" sz="1920" dirty="0">
                 <a:solidFill>
                   <a:srgbClr val="003A63"/>
                 </a:solidFill>
@@ -7022,14 +7022,14 @@
               </a:rPr>
               <a:t>• Predictive tools may call services that return risk scores or features.</a:t>
             </a:r>
-            <a:endParaRPr lang="en-US" sz="2100" dirty="0"/>
-          </a:p>
-          <a:p>
-            <a:pPr indent="0" marL="0">
-              <a:buNone/>
-            </a:pPr>
-            <a:r>
-              <a:rPr lang="en-US" sz="2100" dirty="0">
+            <a:endParaRPr lang="en-US" sz="1920" dirty="0"/>
+          </a:p>
+          <a:p>
+            <a:pPr indent="0" marL="0">
+              <a:buNone/>
+            </a:pPr>
+            <a:r>
+              <a:rPr lang="en-US" sz="1920" dirty="0">
                 <a:solidFill>
                   <a:srgbClr val="003A63"/>
                 </a:solidFill>
@@ -7039,7 +7039,7 @@
               </a:rPr>
               <a:t>• RAG systems may use APIs to retrieve approved documents.</a:t>
             </a:r>
-            <a:endParaRPr lang="en-US" sz="2100" dirty="0"/>
+            <a:endParaRPr lang="en-US" sz="1920" dirty="0"/>
           </a:p>
         </p:txBody>
       </p:sp>
@@ -7051,12 +7051,12 @@
         </p:nvSpPr>
         <p:spPr>
           <a:xfrm>
-            <a:off x="7635240" y="1325880"/>
-            <a:ext cx="3474720" cy="1207008"/>
+            <a:off x="7543800" y="1325880"/>
+            <a:ext cx="3611880" cy="1261872"/>
           </a:xfrm>
           <a:prstGeom prst="roundRect">
             <a:avLst>
-              <a:gd name="adj" fmla="val 9091"/>
+              <a:gd name="adj" fmla="val 8696"/>
             </a:avLst>
           </a:prstGeom>
           <a:solidFill>
@@ -7078,8 +7078,8 @@
         </p:nvSpPr>
         <p:spPr>
           <a:xfrm>
-            <a:off x="7799832" y="1472184"/>
-            <a:ext cx="3145536" cy="256032"/>
+            <a:off x="7708392" y="1453896"/>
+            <a:ext cx="3282696" cy="228600"/>
           </a:xfrm>
           <a:prstGeom prst="rect">
             <a:avLst/>
@@ -7095,7 +7095,7 @@
               <a:buNone/>
             </a:pPr>
             <a:r>
-              <a:rPr lang="en-US" sz="1300" b="1" dirty="0">
+              <a:rPr lang="en-US" sz="1220" b="1" dirty="0">
                 <a:solidFill>
                   <a:srgbClr val="0068B7"/>
                 </a:solidFill>
@@ -7105,7 +7105,7 @@
               </a:rPr>
               <a:t>Implementation cue</a:t>
             </a:r>
-            <a:endParaRPr lang="en-US" sz="1300" dirty="0"/>
+            <a:endParaRPr lang="en-US" sz="1220" dirty="0"/>
           </a:p>
         </p:txBody>
       </p:sp>
@@ -7117,8 +7117,8 @@
         </p:nvSpPr>
         <p:spPr>
           <a:xfrm>
-            <a:off x="7799832" y="1801368"/>
-            <a:ext cx="3145536" cy="640080"/>
+            <a:off x="7708392" y="1764792"/>
+            <a:ext cx="3282696" cy="749808"/>
           </a:xfrm>
           <a:prstGeom prst="rect">
             <a:avLst/>
@@ -7136,7 +7136,7 @@
               <a:buNone/>
             </a:pPr>
             <a:r>
-              <a:rPr lang="en-US" sz="1320" dirty="0">
+              <a:rPr lang="en-US" sz="1220" dirty="0">
                 <a:solidFill>
                   <a:srgbClr val="17364A"/>
                 </a:solidFill>
@@ -7146,7 +7146,7 @@
               </a:rPr>
               <a:t>Generative AI may use APIs to retrieve source material for summaries.</a:t>
             </a:r>
-            <a:endParaRPr lang="en-US" sz="1320" dirty="0"/>
+            <a:endParaRPr lang="en-US" sz="1220" dirty="0"/>
           </a:p>
         </p:txBody>
       </p:sp>
@@ -7158,12 +7158,12 @@
         </p:nvSpPr>
         <p:spPr>
           <a:xfrm>
-            <a:off x="7635240" y="2670048"/>
-            <a:ext cx="3474720" cy="1377086"/>
+            <a:off x="7543800" y="2724912"/>
+            <a:ext cx="3611880" cy="1527048"/>
           </a:xfrm>
           <a:prstGeom prst="roundRect">
             <a:avLst>
-              <a:gd name="adj" fmla="val 7968"/>
+              <a:gd name="adj" fmla="val 7186"/>
             </a:avLst>
           </a:prstGeom>
           <a:solidFill>
@@ -7185,8 +7185,8 @@
         </p:nvSpPr>
         <p:spPr>
           <a:xfrm>
-            <a:off x="7799832" y="2816352"/>
-            <a:ext cx="3145536" cy="256032"/>
+            <a:off x="7708392" y="2852928"/>
+            <a:ext cx="3282696" cy="228600"/>
           </a:xfrm>
           <a:prstGeom prst="rect">
             <a:avLst/>
@@ -7202,7 +7202,7 @@
               <a:buNone/>
             </a:pPr>
             <a:r>
-              <a:rPr lang="en-US" sz="1300" b="1" dirty="0">
+              <a:rPr lang="en-US" sz="1220" b="1" dirty="0">
                 <a:solidFill>
                   <a:srgbClr val="0068B7"/>
                 </a:solidFill>
@@ -7212,7 +7212,7 @@
               </a:rPr>
               <a:t>Concept checkpoints</a:t>
             </a:r>
-            <a:endParaRPr lang="en-US" sz="1300" dirty="0"/>
+            <a:endParaRPr lang="en-US" sz="1220" dirty="0"/>
           </a:p>
         </p:txBody>
       </p:sp>
@@ -7224,8 +7224,8 @@
         </p:nvSpPr>
         <p:spPr>
           <a:xfrm>
-            <a:off x="7818120" y="3182112"/>
-            <a:ext cx="3090672" cy="718718"/>
+            <a:off x="7726680" y="3182112"/>
+            <a:ext cx="3227832" cy="960120"/>
           </a:xfrm>
           <a:prstGeom prst="rect">
             <a:avLst/>
@@ -7243,7 +7243,7 @@
               <a:buNone/>
             </a:pPr>
             <a:r>
-              <a:rPr lang="en-US" sz="1220" dirty="0">
+              <a:rPr lang="en-US" sz="1140" dirty="0">
                 <a:solidFill>
                   <a:srgbClr val="17364A"/>
                 </a:solidFill>
@@ -7251,16 +7251,16 @@
                 <a:ea typeface="Aptos" pitchFamily="34" charset="-122"/>
                 <a:cs typeface="Aptos" pitchFamily="34" charset="-120"/>
               </a:rPr>
-              <a:t>Generative AI may use APIs to retrieve source material for.</a:t>
-            </a:r>
-            <a:endParaRPr lang="en-US" sz="1220" dirty="0"/>
-          </a:p>
-          <a:p>
-            <a:pPr indent="0" marL="0">
-              <a:buNone/>
-            </a:pPr>
-            <a:r>
-              <a:rPr lang="en-US" sz="1220" dirty="0">
+              <a:t>Generative AI may use APIs to retrieve source.</a:t>
+            </a:r>
+            <a:endParaRPr lang="en-US" sz="1140" dirty="0"/>
+          </a:p>
+          <a:p>
+            <a:pPr indent="0" marL="0">
+              <a:buNone/>
+            </a:pPr>
+            <a:r>
+              <a:rPr lang="en-US" sz="1140" dirty="0">
                 <a:solidFill>
                   <a:srgbClr val="17364A"/>
                 </a:solidFill>
@@ -7268,16 +7268,16 @@
                 <a:ea typeface="Aptos" pitchFamily="34" charset="-122"/>
                 <a:cs typeface="Aptos" pitchFamily="34" charset="-120"/>
               </a:rPr>
-              <a:t>Predictive tools may call services that return risk scores or.</a:t>
-            </a:r>
-            <a:endParaRPr lang="en-US" sz="1220" dirty="0"/>
-          </a:p>
-          <a:p>
-            <a:pPr indent="0" marL="0">
-              <a:buNone/>
-            </a:pPr>
-            <a:r>
-              <a:rPr lang="en-US" sz="1220" dirty="0">
+              <a:t>Predictive tools may call services that return.</a:t>
+            </a:r>
+            <a:endParaRPr lang="en-US" sz="1140" dirty="0"/>
+          </a:p>
+          <a:p>
+            <a:pPr indent="0" marL="0">
+              <a:buNone/>
+            </a:pPr>
+            <a:r>
+              <a:rPr lang="en-US" sz="1140" dirty="0">
                 <a:solidFill>
                   <a:srgbClr val="17364A"/>
                 </a:solidFill>
@@ -7285,9 +7285,9 @@
                 <a:ea typeface="Aptos" pitchFamily="34" charset="-122"/>
                 <a:cs typeface="Aptos" pitchFamily="34" charset="-120"/>
               </a:rPr>
-              <a:t>RAG systems may use APIs to retrieve approved documents.</a:t>
-            </a:r>
-            <a:endParaRPr lang="en-US" sz="1220" dirty="0"/>
+              <a:t>RAG systems may use APIs to retrieve approved.</a:t>
+            </a:r>
+            <a:endParaRPr lang="en-US" sz="1140" dirty="0"/>
           </a:p>
         </p:txBody>
       </p:sp>
@@ -7299,12 +7299,12 @@
         </p:nvSpPr>
         <p:spPr>
           <a:xfrm>
-            <a:off x="7635240" y="4184294"/>
-            <a:ext cx="3474720" cy="1466698"/>
+            <a:off x="7543800" y="4389120"/>
+            <a:ext cx="3611880" cy="1261872"/>
           </a:xfrm>
           <a:prstGeom prst="roundRect">
             <a:avLst>
-              <a:gd name="adj" fmla="val 7481"/>
+              <a:gd name="adj" fmla="val 8696"/>
             </a:avLst>
           </a:prstGeom>
           <a:solidFill>
@@ -7326,8 +7326,8 @@
         </p:nvSpPr>
         <p:spPr>
           <a:xfrm>
-            <a:off x="7799832" y="4330598"/>
-            <a:ext cx="3145536" cy="256032"/>
+            <a:off x="7708392" y="4517136"/>
+            <a:ext cx="3282696" cy="228600"/>
           </a:xfrm>
           <a:prstGeom prst="rect">
             <a:avLst/>
@@ -7343,7 +7343,7 @@
               <a:buNone/>
             </a:pPr>
             <a:r>
-              <a:rPr lang="en-US" sz="1300" b="1" dirty="0">
+              <a:rPr lang="en-US" sz="1220" b="1" dirty="0">
                 <a:solidFill>
                   <a:srgbClr val="0068B7"/>
                 </a:solidFill>
@@ -7353,7 +7353,7 @@
               </a:rPr>
               <a:t>Next action</a:t>
             </a:r>
-            <a:endParaRPr lang="en-US" sz="1300" dirty="0"/>
+            <a:endParaRPr lang="en-US" sz="1220" dirty="0"/>
           </a:p>
         </p:txBody>
       </p:sp>
@@ -7365,8 +7365,8 @@
         </p:nvSpPr>
         <p:spPr>
           <a:xfrm>
-            <a:off x="7799832" y="4659782"/>
-            <a:ext cx="3145536" cy="899770"/>
+            <a:off x="7708392" y="4828032"/>
+            <a:ext cx="3282696" cy="749808"/>
           </a:xfrm>
           <a:prstGeom prst="rect">
             <a:avLst/>
@@ -7384,7 +7384,7 @@
               <a:buNone/>
             </a:pPr>
             <a:r>
-              <a:rPr lang="en-US" sz="1320" dirty="0">
+              <a:rPr lang="en-US" sz="1220" dirty="0">
                 <a:solidFill>
                   <a:srgbClr val="17364A"/>
                 </a:solidFill>
@@ -7392,9 +7392,9 @@
                 <a:ea typeface="Aptos" pitchFamily="34" charset="-122"/>
                 <a:cs typeface="Aptos" pitchFamily="34" charset="-120"/>
               </a:rPr>
-              <a:t>Use the concept to clarify workflow changes, dependencies, staffing, procurement requirements, training needs, and implementation checkpoints.</a:t>
-            </a:r>
-            <a:endParaRPr lang="en-US" sz="1320" dirty="0"/>
+              <a:t>Use the concept to clarify workflow changes, dependencies, staffing, procurement.</a:t>
+            </a:r>
+            <a:endParaRPr lang="en-US" sz="1220" dirty="0"/>
           </a:p>
         </p:txBody>
       </p:sp>
@@ -7685,8 +7685,8 @@
         </p:nvSpPr>
         <p:spPr>
           <a:xfrm>
-            <a:off x="868680" y="1508760"/>
-            <a:ext cx="6309360" cy="4160520"/>
+            <a:off x="822960" y="1463040"/>
+            <a:ext cx="6565392" cy="4343400"/>
           </a:xfrm>
           <a:prstGeom prst="rect">
             <a:avLst/>
@@ -7704,7 +7704,7 @@
               <a:buNone/>
             </a:pPr>
             <a:r>
-              <a:rPr lang="en-US" sz="2100" dirty="0">
+              <a:rPr lang="en-US" sz="1920" dirty="0">
                 <a:solidFill>
                   <a:srgbClr val="003A63"/>
                 </a:solidFill>
@@ -7714,14 +7714,14 @@
               </a:rPr>
               <a:t>• Which workflows in your agency are triggered by new data or status changes?</a:t>
             </a:r>
-            <a:endParaRPr lang="en-US" sz="2100" dirty="0"/>
-          </a:p>
-          <a:p>
-            <a:pPr indent="0" marL="0">
-              <a:buNone/>
-            </a:pPr>
-            <a:r>
-              <a:rPr lang="en-US" sz="2100" dirty="0">
+            <a:endParaRPr lang="en-US" sz="1920" dirty="0"/>
+          </a:p>
+          <a:p>
+            <a:pPr indent="0" marL="0">
+              <a:buNone/>
+            </a:pPr>
+            <a:r>
+              <a:rPr lang="en-US" sz="1920" dirty="0">
                 <a:solidFill>
                   <a:srgbClr val="003A63"/>
                 </a:solidFill>
@@ -7731,14 +7731,14 @@
               </a:rPr>
               <a:t>• Which AI-supported actions should be read-only?</a:t>
             </a:r>
-            <a:endParaRPr lang="en-US" sz="2100" dirty="0"/>
-          </a:p>
-          <a:p>
-            <a:pPr indent="0" marL="0">
-              <a:buNone/>
-            </a:pPr>
-            <a:r>
-              <a:rPr lang="en-US" sz="2100" dirty="0">
+            <a:endParaRPr lang="en-US" sz="1920" dirty="0"/>
+          </a:p>
+          <a:p>
+            <a:pPr indent="0" marL="0">
+              <a:buNone/>
+            </a:pPr>
+            <a:r>
+              <a:rPr lang="en-US" sz="1920" dirty="0">
                 <a:solidFill>
                   <a:srgbClr val="003A63"/>
                 </a:solidFill>
@@ -7748,7 +7748,7 @@
               </a:rPr>
               <a:t>• Which actions would require human approval before write-back?</a:t>
             </a:r>
-            <a:endParaRPr lang="en-US" sz="2100" dirty="0"/>
+            <a:endParaRPr lang="en-US" sz="1920" dirty="0"/>
           </a:p>
         </p:txBody>
       </p:sp>
@@ -7760,12 +7760,12 @@
         </p:nvSpPr>
         <p:spPr>
           <a:xfrm>
-            <a:off x="7635240" y="1325880"/>
-            <a:ext cx="3474720" cy="1207008"/>
+            <a:off x="7543800" y="1325880"/>
+            <a:ext cx="3611880" cy="1261872"/>
           </a:xfrm>
           <a:prstGeom prst="roundRect">
             <a:avLst>
-              <a:gd name="adj" fmla="val 9091"/>
+              <a:gd name="adj" fmla="val 8696"/>
             </a:avLst>
           </a:prstGeom>
           <a:solidFill>
@@ -7787,8 +7787,8 @@
         </p:nvSpPr>
         <p:spPr>
           <a:xfrm>
-            <a:off x="7799832" y="1472184"/>
-            <a:ext cx="3145536" cy="256032"/>
+            <a:off x="7708392" y="1453896"/>
+            <a:ext cx="3282696" cy="228600"/>
           </a:xfrm>
           <a:prstGeom prst="rect">
             <a:avLst/>
@@ -7804,7 +7804,7 @@
               <a:buNone/>
             </a:pPr>
             <a:r>
-              <a:rPr lang="en-US" sz="1300" b="1" dirty="0">
+              <a:rPr lang="en-US" sz="1220" b="1" dirty="0">
                 <a:solidFill>
                   <a:srgbClr val="0068B7"/>
                 </a:solidFill>
@@ -7814,7 +7814,7 @@
               </a:rPr>
               <a:t>Implementation cue</a:t>
             </a:r>
-            <a:endParaRPr lang="en-US" sz="1300" dirty="0"/>
+            <a:endParaRPr lang="en-US" sz="1220" dirty="0"/>
           </a:p>
         </p:txBody>
       </p:sp>
@@ -7826,8 +7826,8 @@
         </p:nvSpPr>
         <p:spPr>
           <a:xfrm>
-            <a:off x="7799832" y="1801368"/>
-            <a:ext cx="3145536" cy="640080"/>
+            <a:off x="7708392" y="1764792"/>
+            <a:ext cx="3282696" cy="749808"/>
           </a:xfrm>
           <a:prstGeom prst="rect">
             <a:avLst/>
@@ -7845,7 +7845,7 @@
               <a:buNone/>
             </a:pPr>
             <a:r>
-              <a:rPr lang="en-US" sz="1320" dirty="0">
+              <a:rPr lang="en-US" sz="1220" dirty="0">
                 <a:solidFill>
                   <a:srgbClr val="17364A"/>
                 </a:solidFill>
@@ -7855,7 +7855,7 @@
               </a:rPr>
               <a:t>Which workflows in your agency are triggered by new data or status changes?</a:t>
             </a:r>
-            <a:endParaRPr lang="en-US" sz="1320" dirty="0"/>
+            <a:endParaRPr lang="en-US" sz="1220" dirty="0"/>
           </a:p>
         </p:txBody>
       </p:sp>
@@ -7867,12 +7867,12 @@
         </p:nvSpPr>
         <p:spPr>
           <a:xfrm>
-            <a:off x="7635240" y="2670048"/>
-            <a:ext cx="3474720" cy="1377086"/>
+            <a:off x="7543800" y="2724912"/>
+            <a:ext cx="3611880" cy="1527048"/>
           </a:xfrm>
           <a:prstGeom prst="roundRect">
             <a:avLst>
-              <a:gd name="adj" fmla="val 7968"/>
+              <a:gd name="adj" fmla="val 7186"/>
             </a:avLst>
           </a:prstGeom>
           <a:solidFill>
@@ -7894,8 +7894,8 @@
         </p:nvSpPr>
         <p:spPr>
           <a:xfrm>
-            <a:off x="7799832" y="2816352"/>
-            <a:ext cx="3145536" cy="256032"/>
+            <a:off x="7708392" y="2852928"/>
+            <a:ext cx="3282696" cy="228600"/>
           </a:xfrm>
           <a:prstGeom prst="rect">
             <a:avLst/>
@@ -7911,7 +7911,7 @@
               <a:buNone/>
             </a:pPr>
             <a:r>
-              <a:rPr lang="en-US" sz="1300" b="1" dirty="0">
+              <a:rPr lang="en-US" sz="1220" b="1" dirty="0">
                 <a:solidFill>
                   <a:srgbClr val="0068B7"/>
                 </a:solidFill>
@@ -7921,7 +7921,7 @@
               </a:rPr>
               <a:t>Concept checkpoints</a:t>
             </a:r>
-            <a:endParaRPr lang="en-US" sz="1300" dirty="0"/>
+            <a:endParaRPr lang="en-US" sz="1220" dirty="0"/>
           </a:p>
         </p:txBody>
       </p:sp>
@@ -7933,8 +7933,8 @@
         </p:nvSpPr>
         <p:spPr>
           <a:xfrm>
-            <a:off x="7818120" y="3182112"/>
-            <a:ext cx="3090672" cy="718718"/>
+            <a:off x="7726680" y="3182112"/>
+            <a:ext cx="3227832" cy="960120"/>
           </a:xfrm>
           <a:prstGeom prst="rect">
             <a:avLst/>
@@ -7952,7 +7952,7 @@
               <a:buNone/>
             </a:pPr>
             <a:r>
-              <a:rPr lang="en-US" sz="1220" dirty="0">
+              <a:rPr lang="en-US" sz="1140" dirty="0">
                 <a:solidFill>
                   <a:srgbClr val="17364A"/>
                 </a:solidFill>
@@ -7960,16 +7960,16 @@
                 <a:ea typeface="Aptos" pitchFamily="34" charset="-122"/>
                 <a:cs typeface="Aptos" pitchFamily="34" charset="-120"/>
               </a:rPr>
-              <a:t>Which workflows in your agency are triggered by new data or status.</a:t>
-            </a:r>
-            <a:endParaRPr lang="en-US" sz="1220" dirty="0"/>
-          </a:p>
-          <a:p>
-            <a:pPr indent="0" marL="0">
-              <a:buNone/>
-            </a:pPr>
-            <a:r>
-              <a:rPr lang="en-US" sz="1220" dirty="0">
+              <a:t>Which workflows in your agency are triggered by.</a:t>
+            </a:r>
+            <a:endParaRPr lang="en-US" sz="1140" dirty="0"/>
+          </a:p>
+          <a:p>
+            <a:pPr indent="0" marL="0">
+              <a:buNone/>
+            </a:pPr>
+            <a:r>
+              <a:rPr lang="en-US" sz="1140" dirty="0">
                 <a:solidFill>
                   <a:srgbClr val="17364A"/>
                 </a:solidFill>
@@ -7979,14 +7979,14 @@
               </a:rPr>
               <a:t>Which AI-supported actions should be read-only?</a:t>
             </a:r>
-            <a:endParaRPr lang="en-US" sz="1220" dirty="0"/>
-          </a:p>
-          <a:p>
-            <a:pPr indent="0" marL="0">
-              <a:buNone/>
-            </a:pPr>
-            <a:r>
-              <a:rPr lang="en-US" sz="1220" dirty="0">
+            <a:endParaRPr lang="en-US" sz="1140" dirty="0"/>
+          </a:p>
+          <a:p>
+            <a:pPr indent="0" marL="0">
+              <a:buNone/>
+            </a:pPr>
+            <a:r>
+              <a:rPr lang="en-US" sz="1140" dirty="0">
                 <a:solidFill>
                   <a:srgbClr val="17364A"/>
                 </a:solidFill>
@@ -7994,9 +7994,9 @@
                 <a:ea typeface="Aptos" pitchFamily="34" charset="-122"/>
                 <a:cs typeface="Aptos" pitchFamily="34" charset="-120"/>
               </a:rPr>
-              <a:t>Which actions would require human approval before write-back?</a:t>
-            </a:r>
-            <a:endParaRPr lang="en-US" sz="1220" dirty="0"/>
+              <a:t>Which actions would require human approval before.</a:t>
+            </a:r>
+            <a:endParaRPr lang="en-US" sz="1140" dirty="0"/>
           </a:p>
         </p:txBody>
       </p:sp>
@@ -8008,12 +8008,12 @@
         </p:nvSpPr>
         <p:spPr>
           <a:xfrm>
-            <a:off x="7635240" y="4184294"/>
-            <a:ext cx="3474720" cy="1466698"/>
+            <a:off x="7543800" y="4389120"/>
+            <a:ext cx="3611880" cy="1261872"/>
           </a:xfrm>
           <a:prstGeom prst="roundRect">
             <a:avLst>
-              <a:gd name="adj" fmla="val 7481"/>
+              <a:gd name="adj" fmla="val 8696"/>
             </a:avLst>
           </a:prstGeom>
           <a:solidFill>
@@ -8035,8 +8035,8 @@
         </p:nvSpPr>
         <p:spPr>
           <a:xfrm>
-            <a:off x="7799832" y="4330598"/>
-            <a:ext cx="3145536" cy="256032"/>
+            <a:off x="7708392" y="4517136"/>
+            <a:ext cx="3282696" cy="228600"/>
           </a:xfrm>
           <a:prstGeom prst="rect">
             <a:avLst/>
@@ -8052,7 +8052,7 @@
               <a:buNone/>
             </a:pPr>
             <a:r>
-              <a:rPr lang="en-US" sz="1300" b="1" dirty="0">
+              <a:rPr lang="en-US" sz="1220" b="1" dirty="0">
                 <a:solidFill>
                   <a:srgbClr val="0068B7"/>
                 </a:solidFill>
@@ -8062,7 +8062,7 @@
               </a:rPr>
               <a:t>Next action</a:t>
             </a:r>
-            <a:endParaRPr lang="en-US" sz="1300" dirty="0"/>
+            <a:endParaRPr lang="en-US" sz="1220" dirty="0"/>
           </a:p>
         </p:txBody>
       </p:sp>
@@ -8074,8 +8074,8 @@
         </p:nvSpPr>
         <p:spPr>
           <a:xfrm>
-            <a:off x="7799832" y="4659782"/>
-            <a:ext cx="3145536" cy="899770"/>
+            <a:off x="7708392" y="4828032"/>
+            <a:ext cx="3282696" cy="749808"/>
           </a:xfrm>
           <a:prstGeom prst="rect">
             <a:avLst/>
@@ -8093,7 +8093,7 @@
               <a:buNone/>
             </a:pPr>
             <a:r>
-              <a:rPr lang="en-US" sz="1320" dirty="0">
+              <a:rPr lang="en-US" sz="1220" dirty="0">
                 <a:solidFill>
                   <a:srgbClr val="17364A"/>
                 </a:solidFill>
@@ -8101,9 +8101,9 @@
                 <a:ea typeface="Aptos" pitchFamily="34" charset="-122"/>
                 <a:cs typeface="Aptos" pitchFamily="34" charset="-120"/>
               </a:rPr>
-              <a:t>Use the concept to clarify workflow changes, dependencies, staffing, procurement requirements, training needs, and implementation checkpoints.</a:t>
-            </a:r>
-            <a:endParaRPr lang="en-US" sz="1320" dirty="0"/>
+              <a:t>Use the concept to clarify workflow changes, dependencies, staffing, procurement.</a:t>
+            </a:r>
+            <a:endParaRPr lang="en-US" sz="1220" dirty="0"/>
           </a:p>
         </p:txBody>
       </p:sp>
@@ -8394,8 +8394,8 @@
         </p:nvSpPr>
         <p:spPr>
           <a:xfrm>
-            <a:off x="868680" y="1508760"/>
-            <a:ext cx="6309360" cy="4160520"/>
+            <a:off x="822960" y="1463040"/>
+            <a:ext cx="6565392" cy="4343400"/>
           </a:xfrm>
           <a:prstGeom prst="rect">
             <a:avLst/>
@@ -8413,7 +8413,7 @@
               <a:buNone/>
             </a:pPr>
             <a:r>
-              <a:rPr lang="en-US" sz="2100" dirty="0">
+              <a:rPr lang="en-US" sz="1920" dirty="0">
                 <a:solidFill>
                   <a:srgbClr val="003A63"/>
                 </a:solidFill>
@@ -8423,14 +8423,14 @@
               </a:rPr>
               <a:t>• What logs are needed to reconstruct what happened?</a:t>
             </a:r>
-            <a:endParaRPr lang="en-US" sz="2100" dirty="0"/>
-          </a:p>
-          <a:p>
-            <a:pPr indent="0" marL="0">
-              <a:buNone/>
-            </a:pPr>
-            <a:r>
-              <a:rPr lang="en-US" sz="2100" dirty="0">
+            <a:endParaRPr lang="en-US" sz="1920" dirty="0"/>
+          </a:p>
+          <a:p>
+            <a:pPr indent="0" marL="0">
+              <a:buNone/>
+            </a:pPr>
+            <a:r>
+              <a:rPr lang="en-US" sz="1920" dirty="0">
                 <a:solidFill>
                   <a:srgbClr val="003A63"/>
                 </a:solidFill>
@@ -8440,7 +8440,7 @@
               </a:rPr>
               <a:t>• What should happen if an API call fails or returns unexpected data?</a:t>
             </a:r>
-            <a:endParaRPr lang="en-US" sz="2100" dirty="0"/>
+            <a:endParaRPr lang="en-US" sz="1920" dirty="0"/>
           </a:p>
         </p:txBody>
       </p:sp>
@@ -8452,12 +8452,12 @@
         </p:nvSpPr>
         <p:spPr>
           <a:xfrm>
-            <a:off x="7635240" y="1325880"/>
-            <a:ext cx="3474720" cy="1207008"/>
+            <a:off x="7543800" y="1325880"/>
+            <a:ext cx="3611880" cy="1261872"/>
           </a:xfrm>
           <a:prstGeom prst="roundRect">
             <a:avLst>
-              <a:gd name="adj" fmla="val 9091"/>
+              <a:gd name="adj" fmla="val 8696"/>
             </a:avLst>
           </a:prstGeom>
           <a:solidFill>
@@ -8479,8 +8479,8 @@
         </p:nvSpPr>
         <p:spPr>
           <a:xfrm>
-            <a:off x="7799832" y="1472184"/>
-            <a:ext cx="3145536" cy="256032"/>
+            <a:off x="7708392" y="1453896"/>
+            <a:ext cx="3282696" cy="228600"/>
           </a:xfrm>
           <a:prstGeom prst="rect">
             <a:avLst/>
@@ -8496,7 +8496,7 @@
               <a:buNone/>
             </a:pPr>
             <a:r>
-              <a:rPr lang="en-US" sz="1300" b="1" dirty="0">
+              <a:rPr lang="en-US" sz="1220" b="1" dirty="0">
                 <a:solidFill>
                   <a:srgbClr val="0068B7"/>
                 </a:solidFill>
@@ -8506,7 +8506,7 @@
               </a:rPr>
               <a:t>Implementation cue</a:t>
             </a:r>
-            <a:endParaRPr lang="en-US" sz="1300" dirty="0"/>
+            <a:endParaRPr lang="en-US" sz="1220" dirty="0"/>
           </a:p>
         </p:txBody>
       </p:sp>
@@ -8518,8 +8518,8 @@
         </p:nvSpPr>
         <p:spPr>
           <a:xfrm>
-            <a:off x="7799832" y="1801368"/>
-            <a:ext cx="3145536" cy="640080"/>
+            <a:off x="7708392" y="1764792"/>
+            <a:ext cx="3282696" cy="749808"/>
           </a:xfrm>
           <a:prstGeom prst="rect">
             <a:avLst/>
@@ -8537,7 +8537,7 @@
               <a:buNone/>
             </a:pPr>
             <a:r>
-              <a:rPr lang="en-US" sz="1320" dirty="0">
+              <a:rPr lang="en-US" sz="1220" dirty="0">
                 <a:solidFill>
                   <a:srgbClr val="17364A"/>
                 </a:solidFill>
@@ -8547,7 +8547,7 @@
               </a:rPr>
               <a:t>What logs are needed to reconstruct what happened?</a:t>
             </a:r>
-            <a:endParaRPr lang="en-US" sz="1320" dirty="0"/>
+            <a:endParaRPr lang="en-US" sz="1220" dirty="0"/>
           </a:p>
         </p:txBody>
       </p:sp>
@@ -8559,12 +8559,12 @@
         </p:nvSpPr>
         <p:spPr>
           <a:xfrm>
-            <a:off x="7635240" y="2670048"/>
-            <a:ext cx="3474720" cy="1377086"/>
+            <a:off x="7543800" y="2724912"/>
+            <a:ext cx="3611880" cy="1527048"/>
           </a:xfrm>
           <a:prstGeom prst="roundRect">
             <a:avLst>
-              <a:gd name="adj" fmla="val 7968"/>
+              <a:gd name="adj" fmla="val 7186"/>
             </a:avLst>
           </a:prstGeom>
           <a:solidFill>
@@ -8586,8 +8586,8 @@
         </p:nvSpPr>
         <p:spPr>
           <a:xfrm>
-            <a:off x="7799832" y="2816352"/>
-            <a:ext cx="3145536" cy="256032"/>
+            <a:off x="7708392" y="2852928"/>
+            <a:ext cx="3282696" cy="228600"/>
           </a:xfrm>
           <a:prstGeom prst="rect">
             <a:avLst/>
@@ -8603,7 +8603,7 @@
               <a:buNone/>
             </a:pPr>
             <a:r>
-              <a:rPr lang="en-US" sz="1300" b="1" dirty="0">
+              <a:rPr lang="en-US" sz="1220" b="1" dirty="0">
                 <a:solidFill>
                   <a:srgbClr val="0068B7"/>
                 </a:solidFill>
@@ -8613,7 +8613,7 @@
               </a:rPr>
               <a:t>Concept checkpoints</a:t>
             </a:r>
-            <a:endParaRPr lang="en-US" sz="1300" dirty="0"/>
+            <a:endParaRPr lang="en-US" sz="1220" dirty="0"/>
           </a:p>
         </p:txBody>
       </p:sp>
@@ -8625,8 +8625,8 @@
         </p:nvSpPr>
         <p:spPr>
           <a:xfrm>
-            <a:off x="7818120" y="3182112"/>
-            <a:ext cx="3090672" cy="718718"/>
+            <a:off x="7726680" y="3182112"/>
+            <a:ext cx="3227832" cy="960120"/>
           </a:xfrm>
           <a:prstGeom prst="rect">
             <a:avLst/>
@@ -8644,7 +8644,7 @@
               <a:buNone/>
             </a:pPr>
             <a:r>
-              <a:rPr lang="en-US" sz="1220" dirty="0">
+              <a:rPr lang="en-US" sz="1140" dirty="0">
                 <a:solidFill>
                   <a:srgbClr val="17364A"/>
                 </a:solidFill>
@@ -8654,14 +8654,14 @@
               </a:rPr>
               <a:t>What logs are needed to reconstruct what happened?</a:t>
             </a:r>
-            <a:endParaRPr lang="en-US" sz="1220" dirty="0"/>
-          </a:p>
-          <a:p>
-            <a:pPr indent="0" marL="0">
-              <a:buNone/>
-            </a:pPr>
-            <a:r>
-              <a:rPr lang="en-US" sz="1220" dirty="0">
+            <a:endParaRPr lang="en-US" sz="1140" dirty="0"/>
+          </a:p>
+          <a:p>
+            <a:pPr indent="0" marL="0">
+              <a:buNone/>
+            </a:pPr>
+            <a:r>
+              <a:rPr lang="en-US" sz="1140" dirty="0">
                 <a:solidFill>
                   <a:srgbClr val="17364A"/>
                 </a:solidFill>
@@ -8669,9 +8669,9 @@
                 <a:ea typeface="Aptos" pitchFamily="34" charset="-122"/>
                 <a:cs typeface="Aptos" pitchFamily="34" charset="-120"/>
               </a:rPr>
-              <a:t>What should happen if an API call fails or returns unexpected data?</a:t>
-            </a:r>
-            <a:endParaRPr lang="en-US" sz="1220" dirty="0"/>
+              <a:t>What should happen if an API call fails or returns.</a:t>
+            </a:r>
+            <a:endParaRPr lang="en-US" sz="1140" dirty="0"/>
           </a:p>
         </p:txBody>
       </p:sp>
@@ -8683,12 +8683,12 @@
         </p:nvSpPr>
         <p:spPr>
           <a:xfrm>
-            <a:off x="7635240" y="4184294"/>
-            <a:ext cx="3474720" cy="1466698"/>
+            <a:off x="7543800" y="4389120"/>
+            <a:ext cx="3611880" cy="1261872"/>
           </a:xfrm>
           <a:prstGeom prst="roundRect">
             <a:avLst>
-              <a:gd name="adj" fmla="val 7481"/>
+              <a:gd name="adj" fmla="val 8696"/>
             </a:avLst>
           </a:prstGeom>
           <a:solidFill>
@@ -8710,8 +8710,8 @@
         </p:nvSpPr>
         <p:spPr>
           <a:xfrm>
-            <a:off x="7799832" y="4330598"/>
-            <a:ext cx="3145536" cy="256032"/>
+            <a:off x="7708392" y="4517136"/>
+            <a:ext cx="3282696" cy="228600"/>
           </a:xfrm>
           <a:prstGeom prst="rect">
             <a:avLst/>
@@ -8727,7 +8727,7 @@
               <a:buNone/>
             </a:pPr>
             <a:r>
-              <a:rPr lang="en-US" sz="1300" b="1" dirty="0">
+              <a:rPr lang="en-US" sz="1220" b="1" dirty="0">
                 <a:solidFill>
                   <a:srgbClr val="0068B7"/>
                 </a:solidFill>
@@ -8737,7 +8737,7 @@
               </a:rPr>
               <a:t>Next action</a:t>
             </a:r>
-            <a:endParaRPr lang="en-US" sz="1300" dirty="0"/>
+            <a:endParaRPr lang="en-US" sz="1220" dirty="0"/>
           </a:p>
         </p:txBody>
       </p:sp>
@@ -8749,8 +8749,8 @@
         </p:nvSpPr>
         <p:spPr>
           <a:xfrm>
-            <a:off x="7799832" y="4659782"/>
-            <a:ext cx="3145536" cy="899770"/>
+            <a:off x="7708392" y="4828032"/>
+            <a:ext cx="3282696" cy="749808"/>
           </a:xfrm>
           <a:prstGeom prst="rect">
             <a:avLst/>
@@ -8768,7 +8768,7 @@
               <a:buNone/>
             </a:pPr>
             <a:r>
-              <a:rPr lang="en-US" sz="1320" dirty="0">
+              <a:rPr lang="en-US" sz="1220" dirty="0">
                 <a:solidFill>
                   <a:srgbClr val="17364A"/>
                 </a:solidFill>
@@ -8776,9 +8776,9 @@
                 <a:ea typeface="Aptos" pitchFamily="34" charset="-122"/>
                 <a:cs typeface="Aptos" pitchFamily="34" charset="-120"/>
               </a:rPr>
-              <a:t>Use the concept to clarify workflow changes, dependencies, staffing, procurement requirements, training needs, and implementation checkpoints.</a:t>
-            </a:r>
-            <a:endParaRPr lang="en-US" sz="1320" dirty="0"/>
+              <a:t>Use the concept to clarify workflow changes, dependencies, staffing, procurement.</a:t>
+            </a:r>
+            <a:endParaRPr lang="en-US" sz="1220" dirty="0"/>
           </a:p>
         </p:txBody>
       </p:sp>
@@ -9069,8 +9069,8 @@
         </p:nvSpPr>
         <p:spPr>
           <a:xfrm>
-            <a:off x="868680" y="1508760"/>
-            <a:ext cx="6309360" cy="4160520"/>
+            <a:off x="822960" y="1463040"/>
+            <a:ext cx="6565392" cy="4343400"/>
           </a:xfrm>
           <a:prstGeom prst="rect">
             <a:avLst/>
@@ -9088,7 +9088,7 @@
               <a:buNone/>
             </a:pPr>
             <a:r>
-              <a:rPr lang="en-US" sz="2100" dirty="0">
+              <a:rPr lang="en-US" sz="1920" dirty="0">
                 <a:solidFill>
                   <a:srgbClr val="003A63"/>
                 </a:solidFill>
@@ -9096,16 +9096,16 @@
                 <a:ea typeface="Aptos" pitchFamily="34" charset="-122"/>
                 <a:cs typeface="Aptos" pitchFamily="34" charset="-120"/>
               </a:rPr>
-              <a:t>• Create an API and event workflow review worksheet for one proposed AI integration.</a:t>
-            </a:r>
-            <a:endParaRPr lang="en-US" sz="2100" dirty="0"/>
-          </a:p>
-          <a:p>
-            <a:pPr indent="0" marL="0">
-              <a:buNone/>
-            </a:pPr>
-            <a:r>
-              <a:rPr lang="en-US" sz="2100" dirty="0">
+              <a:t>• Create an API and event workflow review worksheet for one proposed AI.</a:t>
+            </a:r>
+            <a:endParaRPr lang="en-US" sz="1920" dirty="0"/>
+          </a:p>
+          <a:p>
+            <a:pPr indent="0" marL="0">
+              <a:buNone/>
+            </a:pPr>
+            <a:r>
+              <a:rPr lang="en-US" sz="1920" dirty="0">
                 <a:solidFill>
                   <a:srgbClr val="003A63"/>
                 </a:solidFill>
@@ -9113,9 +9113,9 @@
                 <a:ea typeface="Aptos" pitchFamily="34" charset="-122"/>
                 <a:cs typeface="Aptos" pitchFamily="34" charset="-120"/>
               </a:rPr>
-              <a:t>• Include the triggering event, systems involved, data exchanged, read/write permissions,.</a:t>
-            </a:r>
-            <a:endParaRPr lang="en-US" sz="2100" dirty="0"/>
+              <a:t>• Include the triggering event, systems involved, data exchanged, read/write.</a:t>
+            </a:r>
+            <a:endParaRPr lang="en-US" sz="1920" dirty="0"/>
           </a:p>
         </p:txBody>
       </p:sp>
@@ -9127,12 +9127,12 @@
         </p:nvSpPr>
         <p:spPr>
           <a:xfrm>
-            <a:off x="7635240" y="1325880"/>
-            <a:ext cx="3474720" cy="1207008"/>
+            <a:off x="7543800" y="1325880"/>
+            <a:ext cx="3611880" cy="1261872"/>
           </a:xfrm>
           <a:prstGeom prst="roundRect">
             <a:avLst>
-              <a:gd name="adj" fmla="val 9091"/>
+              <a:gd name="adj" fmla="val 8696"/>
             </a:avLst>
           </a:prstGeom>
           <a:solidFill>
@@ -9154,8 +9154,8 @@
         </p:nvSpPr>
         <p:spPr>
           <a:xfrm>
-            <a:off x="7799832" y="1472184"/>
-            <a:ext cx="3145536" cy="256032"/>
+            <a:off x="7708392" y="1453896"/>
+            <a:ext cx="3282696" cy="228600"/>
           </a:xfrm>
           <a:prstGeom prst="rect">
             <a:avLst/>
@@ -9171,7 +9171,7 @@
               <a:buNone/>
             </a:pPr>
             <a:r>
-              <a:rPr lang="en-US" sz="1300" b="1" dirty="0">
+              <a:rPr lang="en-US" sz="1220" b="1" dirty="0">
                 <a:solidFill>
                   <a:srgbClr val="0068B7"/>
                 </a:solidFill>
@@ -9181,7 +9181,7 @@
               </a:rPr>
               <a:t>Implementation cue</a:t>
             </a:r>
-            <a:endParaRPr lang="en-US" sz="1300" dirty="0"/>
+            <a:endParaRPr lang="en-US" sz="1220" dirty="0"/>
           </a:p>
         </p:txBody>
       </p:sp>
@@ -9193,8 +9193,8 @@
         </p:nvSpPr>
         <p:spPr>
           <a:xfrm>
-            <a:off x="7799832" y="1801368"/>
-            <a:ext cx="3145536" cy="640080"/>
+            <a:off x="7708392" y="1764792"/>
+            <a:ext cx="3282696" cy="749808"/>
           </a:xfrm>
           <a:prstGeom prst="rect">
             <a:avLst/>
@@ -9212,7 +9212,7 @@
               <a:buNone/>
             </a:pPr>
             <a:r>
-              <a:rPr lang="en-US" sz="1320" dirty="0">
+              <a:rPr lang="en-US" sz="1220" dirty="0">
                 <a:solidFill>
                   <a:srgbClr val="17364A"/>
                 </a:solidFill>
@@ -9222,7 +9222,7 @@
               </a:rPr>
               <a:t>Create an API and event workflow review worksheet for one proposed AI integration.</a:t>
             </a:r>
-            <a:endParaRPr lang="en-US" sz="1320" dirty="0"/>
+            <a:endParaRPr lang="en-US" sz="1220" dirty="0"/>
           </a:p>
         </p:txBody>
       </p:sp>
@@ -9234,12 +9234,12 @@
         </p:nvSpPr>
         <p:spPr>
           <a:xfrm>
-            <a:off x="7635240" y="2670048"/>
-            <a:ext cx="3474720" cy="1377086"/>
+            <a:off x="7543800" y="2724912"/>
+            <a:ext cx="3611880" cy="1527048"/>
           </a:xfrm>
           <a:prstGeom prst="roundRect">
             <a:avLst>
-              <a:gd name="adj" fmla="val 7968"/>
+              <a:gd name="adj" fmla="val 7186"/>
             </a:avLst>
           </a:prstGeom>
           <a:solidFill>
@@ -9261,8 +9261,8 @@
         </p:nvSpPr>
         <p:spPr>
           <a:xfrm>
-            <a:off x="7799832" y="2816352"/>
-            <a:ext cx="3145536" cy="256032"/>
+            <a:off x="7708392" y="2852928"/>
+            <a:ext cx="3282696" cy="228600"/>
           </a:xfrm>
           <a:prstGeom prst="rect">
             <a:avLst/>
@@ -9278,7 +9278,7 @@
               <a:buNone/>
             </a:pPr>
             <a:r>
-              <a:rPr lang="en-US" sz="1300" b="1" dirty="0">
+              <a:rPr lang="en-US" sz="1220" b="1" dirty="0">
                 <a:solidFill>
                   <a:srgbClr val="0068B7"/>
                 </a:solidFill>
@@ -9288,7 +9288,7 @@
               </a:rPr>
               <a:t>Concept checkpoints</a:t>
             </a:r>
-            <a:endParaRPr lang="en-US" sz="1300" dirty="0"/>
+            <a:endParaRPr lang="en-US" sz="1220" dirty="0"/>
           </a:p>
         </p:txBody>
       </p:sp>
@@ -9300,8 +9300,8 @@
         </p:nvSpPr>
         <p:spPr>
           <a:xfrm>
-            <a:off x="7818120" y="3182112"/>
-            <a:ext cx="3090672" cy="718718"/>
+            <a:off x="7726680" y="3182112"/>
+            <a:ext cx="3227832" cy="960120"/>
           </a:xfrm>
           <a:prstGeom prst="rect">
             <a:avLst/>
@@ -9319,7 +9319,7 @@
               <a:buNone/>
             </a:pPr>
             <a:r>
-              <a:rPr lang="en-US" sz="1220" dirty="0">
+              <a:rPr lang="en-US" sz="1140" dirty="0">
                 <a:solidFill>
                   <a:srgbClr val="17364A"/>
                 </a:solidFill>
@@ -9327,16 +9327,16 @@
                 <a:ea typeface="Aptos" pitchFamily="34" charset="-122"/>
                 <a:cs typeface="Aptos" pitchFamily="34" charset="-120"/>
               </a:rPr>
-              <a:t>Create an API and event workflow review worksheet for one proposed.</a:t>
-            </a:r>
-            <a:endParaRPr lang="en-US" sz="1220" dirty="0"/>
-          </a:p>
-          <a:p>
-            <a:pPr indent="0" marL="0">
-              <a:buNone/>
-            </a:pPr>
-            <a:r>
-              <a:rPr lang="en-US" sz="1220" dirty="0">
+              <a:t>Create an API and event workflow review worksheet.</a:t>
+            </a:r>
+            <a:endParaRPr lang="en-US" sz="1140" dirty="0"/>
+          </a:p>
+          <a:p>
+            <a:pPr indent="0" marL="0">
+              <a:buNone/>
+            </a:pPr>
+            <a:r>
+              <a:rPr lang="en-US" sz="1140" dirty="0">
                 <a:solidFill>
                   <a:srgbClr val="17364A"/>
                 </a:solidFill>
@@ -9344,9 +9344,9 @@
                 <a:ea typeface="Aptos" pitchFamily="34" charset="-122"/>
                 <a:cs typeface="Aptos" pitchFamily="34" charset="-120"/>
               </a:rPr>
-              <a:t>Include the triggering event, systems involved, data exchanged,.</a:t>
-            </a:r>
-            <a:endParaRPr lang="en-US" sz="1220" dirty="0"/>
+              <a:t>Include the triggering event, systems involved,.</a:t>
+            </a:r>
+            <a:endParaRPr lang="en-US" sz="1140" dirty="0"/>
           </a:p>
         </p:txBody>
       </p:sp>
@@ -9358,12 +9358,12 @@
         </p:nvSpPr>
         <p:spPr>
           <a:xfrm>
-            <a:off x="7635240" y="4184294"/>
-            <a:ext cx="3474720" cy="1466698"/>
+            <a:off x="7543800" y="4389120"/>
+            <a:ext cx="3611880" cy="1261872"/>
           </a:xfrm>
           <a:prstGeom prst="roundRect">
             <a:avLst>
-              <a:gd name="adj" fmla="val 7481"/>
+              <a:gd name="adj" fmla="val 8696"/>
             </a:avLst>
           </a:prstGeom>
           <a:solidFill>
@@ -9385,8 +9385,8 @@
         </p:nvSpPr>
         <p:spPr>
           <a:xfrm>
-            <a:off x="7799832" y="4330598"/>
-            <a:ext cx="3145536" cy="256032"/>
+            <a:off x="7708392" y="4517136"/>
+            <a:ext cx="3282696" cy="228600"/>
           </a:xfrm>
           <a:prstGeom prst="rect">
             <a:avLst/>
@@ -9402,7 +9402,7 @@
               <a:buNone/>
             </a:pPr>
             <a:r>
-              <a:rPr lang="en-US" sz="1300" b="1" dirty="0">
+              <a:rPr lang="en-US" sz="1220" b="1" dirty="0">
                 <a:solidFill>
                   <a:srgbClr val="0068B7"/>
                 </a:solidFill>
@@ -9412,7 +9412,7 @@
               </a:rPr>
               <a:t>Next action</a:t>
             </a:r>
-            <a:endParaRPr lang="en-US" sz="1300" dirty="0"/>
+            <a:endParaRPr lang="en-US" sz="1220" dirty="0"/>
           </a:p>
         </p:txBody>
       </p:sp>
@@ -9424,8 +9424,8 @@
         </p:nvSpPr>
         <p:spPr>
           <a:xfrm>
-            <a:off x="7799832" y="4659782"/>
-            <a:ext cx="3145536" cy="899770"/>
+            <a:off x="7708392" y="4828032"/>
+            <a:ext cx="3282696" cy="749808"/>
           </a:xfrm>
           <a:prstGeom prst="rect">
             <a:avLst/>
@@ -9443,7 +9443,7 @@
               <a:buNone/>
             </a:pPr>
             <a:r>
-              <a:rPr lang="en-US" sz="1320" dirty="0">
+              <a:rPr lang="en-US" sz="1220" dirty="0">
                 <a:solidFill>
                   <a:srgbClr val="17364A"/>
                 </a:solidFill>
@@ -9451,9 +9451,9 @@
                 <a:ea typeface="Aptos" pitchFamily="34" charset="-122"/>
                 <a:cs typeface="Aptos" pitchFamily="34" charset="-120"/>
               </a:rPr>
-              <a:t>Use the assignment to test whether you can explain the concept, apply it to a realistic public health situation, and identify what would need review before the work moves forward.</a:t>
-            </a:r>
-            <a:endParaRPr lang="en-US" sz="1320" dirty="0"/>
+              <a:t>Use the assignment to test whether you can explain the concept, apply it to a.</a:t>
+            </a:r>
+            <a:endParaRPr lang="en-US" sz="1220" dirty="0"/>
           </a:p>
         </p:txBody>
       </p:sp>
@@ -9744,8 +9744,8 @@
         </p:nvSpPr>
         <p:spPr>
           <a:xfrm>
-            <a:off x="868680" y="1508760"/>
-            <a:ext cx="6309360" cy="4160520"/>
+            <a:off x="822960" y="1463040"/>
+            <a:ext cx="6565392" cy="4343400"/>
           </a:xfrm>
           <a:prstGeom prst="rect">
             <a:avLst/>
@@ -9763,7 +9763,7 @@
               <a:buNone/>
             </a:pPr>
             <a:r>
-              <a:rPr lang="en-US" sz="2100" dirty="0">
+              <a:rPr lang="en-US" sz="1920" dirty="0">
                 <a:solidFill>
                   <a:srgbClr val="003A63"/>
                 </a:solidFill>
@@ -9773,14 +9773,14 @@
               </a:rPr>
               <a:t>• API and event workflow worksheet</a:t>
             </a:r>
-            <a:endParaRPr lang="en-US" sz="2100" dirty="0"/>
-          </a:p>
-          <a:p>
-            <a:pPr indent="0" marL="0">
-              <a:buNone/>
-            </a:pPr>
-            <a:r>
-              <a:rPr lang="en-US" sz="2100" dirty="0">
+            <a:endParaRPr lang="en-US" sz="1920" dirty="0"/>
+          </a:p>
+          <a:p>
+            <a:pPr indent="0" marL="0">
+              <a:buNone/>
+            </a:pPr>
+            <a:r>
+              <a:rPr lang="en-US" sz="1920" dirty="0">
                 <a:solidFill>
                   <a:srgbClr val="003A63"/>
                 </a:solidFill>
@@ -9790,14 +9790,14 @@
               </a:rPr>
               <a:t>• Integration risk questions</a:t>
             </a:r>
-            <a:endParaRPr lang="en-US" sz="2100" dirty="0"/>
-          </a:p>
-          <a:p>
-            <a:pPr indent="0" marL="0">
-              <a:buNone/>
-            </a:pPr>
-            <a:r>
-              <a:rPr lang="en-US" sz="2100" dirty="0">
+            <a:endParaRPr lang="en-US" sz="1920" dirty="0"/>
+          </a:p>
+          <a:p>
+            <a:pPr indent="0" marL="0">
+              <a:buNone/>
+            </a:pPr>
+            <a:r>
+              <a:rPr lang="en-US" sz="1920" dirty="0">
                 <a:solidFill>
                   <a:srgbClr val="003A63"/>
                 </a:solidFill>
@@ -9807,7 +9807,7 @@
               </a:rPr>
               <a:t>• Access control recommendations</a:t>
             </a:r>
-            <a:endParaRPr lang="en-US" sz="2100" dirty="0"/>
+            <a:endParaRPr lang="en-US" sz="1920" dirty="0"/>
           </a:p>
         </p:txBody>
       </p:sp>
@@ -9819,12 +9819,12 @@
         </p:nvSpPr>
         <p:spPr>
           <a:xfrm>
-            <a:off x="7635240" y="1325880"/>
-            <a:ext cx="3474720" cy="1207008"/>
+            <a:off x="7543800" y="1325880"/>
+            <a:ext cx="3611880" cy="1261872"/>
           </a:xfrm>
           <a:prstGeom prst="roundRect">
             <a:avLst>
-              <a:gd name="adj" fmla="val 9091"/>
+              <a:gd name="adj" fmla="val 8696"/>
             </a:avLst>
           </a:prstGeom>
           <a:solidFill>
@@ -9846,8 +9846,8 @@
         </p:nvSpPr>
         <p:spPr>
           <a:xfrm>
-            <a:off x="7799832" y="1472184"/>
-            <a:ext cx="3145536" cy="256032"/>
+            <a:off x="7708392" y="1453896"/>
+            <a:ext cx="3282696" cy="228600"/>
           </a:xfrm>
           <a:prstGeom prst="rect">
             <a:avLst/>
@@ -9863,7 +9863,7 @@
               <a:buNone/>
             </a:pPr>
             <a:r>
-              <a:rPr lang="en-US" sz="1300" b="1" dirty="0">
+              <a:rPr lang="en-US" sz="1220" b="1" dirty="0">
                 <a:solidFill>
                   <a:srgbClr val="0068B7"/>
                 </a:solidFill>
@@ -9873,7 +9873,7 @@
               </a:rPr>
               <a:t>Implementation cue</a:t>
             </a:r>
-            <a:endParaRPr lang="en-US" sz="1300" dirty="0"/>
+            <a:endParaRPr lang="en-US" sz="1220" dirty="0"/>
           </a:p>
         </p:txBody>
       </p:sp>
@@ -9885,8 +9885,8 @@
         </p:nvSpPr>
         <p:spPr>
           <a:xfrm>
-            <a:off x="7799832" y="1801368"/>
-            <a:ext cx="3145536" cy="640080"/>
+            <a:off x="7708392" y="1764792"/>
+            <a:ext cx="3282696" cy="749808"/>
           </a:xfrm>
           <a:prstGeom prst="rect">
             <a:avLst/>
@@ -9904,7 +9904,7 @@
               <a:buNone/>
             </a:pPr>
             <a:r>
-              <a:rPr lang="en-US" sz="1320" dirty="0">
+              <a:rPr lang="en-US" sz="1220" dirty="0">
                 <a:solidFill>
                   <a:srgbClr val="17364A"/>
                 </a:solidFill>
@@ -9914,7 +9914,7 @@
               </a:rPr>
               <a:t>API and event workflow worksheet</a:t>
             </a:r>
-            <a:endParaRPr lang="en-US" sz="1320" dirty="0"/>
+            <a:endParaRPr lang="en-US" sz="1220" dirty="0"/>
           </a:p>
         </p:txBody>
       </p:sp>
@@ -9926,12 +9926,12 @@
         </p:nvSpPr>
         <p:spPr>
           <a:xfrm>
-            <a:off x="7635240" y="2670048"/>
-            <a:ext cx="3474720" cy="1377086"/>
+            <a:off x="7543800" y="2724912"/>
+            <a:ext cx="3611880" cy="1527048"/>
           </a:xfrm>
           <a:prstGeom prst="roundRect">
             <a:avLst>
-              <a:gd name="adj" fmla="val 7968"/>
+              <a:gd name="adj" fmla="val 7186"/>
             </a:avLst>
           </a:prstGeom>
           <a:solidFill>
@@ -9953,8 +9953,8 @@
         </p:nvSpPr>
         <p:spPr>
           <a:xfrm>
-            <a:off x="7799832" y="2816352"/>
-            <a:ext cx="3145536" cy="256032"/>
+            <a:off x="7708392" y="2852928"/>
+            <a:ext cx="3282696" cy="228600"/>
           </a:xfrm>
           <a:prstGeom prst="rect">
             <a:avLst/>
@@ -9970,7 +9970,7 @@
               <a:buNone/>
             </a:pPr>
             <a:r>
-              <a:rPr lang="en-US" sz="1300" b="1" dirty="0">
+              <a:rPr lang="en-US" sz="1220" b="1" dirty="0">
                 <a:solidFill>
                   <a:srgbClr val="0068B7"/>
                 </a:solidFill>
@@ -9980,7 +9980,7 @@
               </a:rPr>
               <a:t>Concept checkpoints</a:t>
             </a:r>
-            <a:endParaRPr lang="en-US" sz="1300" dirty="0"/>
+            <a:endParaRPr lang="en-US" sz="1220" dirty="0"/>
           </a:p>
         </p:txBody>
       </p:sp>
@@ -9992,8 +9992,8 @@
         </p:nvSpPr>
         <p:spPr>
           <a:xfrm>
-            <a:off x="7818120" y="3182112"/>
-            <a:ext cx="3090672" cy="718718"/>
+            <a:off x="7726680" y="3182112"/>
+            <a:ext cx="3227832" cy="960120"/>
           </a:xfrm>
           <a:prstGeom prst="rect">
             <a:avLst/>
@@ -10011,7 +10011,7 @@
               <a:buNone/>
             </a:pPr>
             <a:r>
-              <a:rPr lang="en-US" sz="1220" dirty="0">
+              <a:rPr lang="en-US" sz="1140" dirty="0">
                 <a:solidFill>
                   <a:srgbClr val="17364A"/>
                 </a:solidFill>
@@ -10021,14 +10021,14 @@
               </a:rPr>
               <a:t>API and event workflow worksheet</a:t>
             </a:r>
-            <a:endParaRPr lang="en-US" sz="1220" dirty="0"/>
-          </a:p>
-          <a:p>
-            <a:pPr indent="0" marL="0">
-              <a:buNone/>
-            </a:pPr>
-            <a:r>
-              <a:rPr lang="en-US" sz="1220" dirty="0">
+            <a:endParaRPr lang="en-US" sz="1140" dirty="0"/>
+          </a:p>
+          <a:p>
+            <a:pPr indent="0" marL="0">
+              <a:buNone/>
+            </a:pPr>
+            <a:r>
+              <a:rPr lang="en-US" sz="1140" dirty="0">
                 <a:solidFill>
                   <a:srgbClr val="17364A"/>
                 </a:solidFill>
@@ -10038,14 +10038,14 @@
               </a:rPr>
               <a:t>Integration risk questions</a:t>
             </a:r>
-            <a:endParaRPr lang="en-US" sz="1220" dirty="0"/>
-          </a:p>
-          <a:p>
-            <a:pPr indent="0" marL="0">
-              <a:buNone/>
-            </a:pPr>
-            <a:r>
-              <a:rPr lang="en-US" sz="1220" dirty="0">
+            <a:endParaRPr lang="en-US" sz="1140" dirty="0"/>
+          </a:p>
+          <a:p>
+            <a:pPr indent="0" marL="0">
+              <a:buNone/>
+            </a:pPr>
+            <a:r>
+              <a:rPr lang="en-US" sz="1140" dirty="0">
                 <a:solidFill>
                   <a:srgbClr val="17364A"/>
                 </a:solidFill>
@@ -10055,7 +10055,7 @@
               </a:rPr>
               <a:t>Access control recommendations</a:t>
             </a:r>
-            <a:endParaRPr lang="en-US" sz="1220" dirty="0"/>
+            <a:endParaRPr lang="en-US" sz="1140" dirty="0"/>
           </a:p>
         </p:txBody>
       </p:sp>
@@ -10067,12 +10067,12 @@
         </p:nvSpPr>
         <p:spPr>
           <a:xfrm>
-            <a:off x="7635240" y="4184294"/>
-            <a:ext cx="3474720" cy="1466698"/>
+            <a:off x="7543800" y="4389120"/>
+            <a:ext cx="3611880" cy="1261872"/>
           </a:xfrm>
           <a:prstGeom prst="roundRect">
             <a:avLst>
-              <a:gd name="adj" fmla="val 7481"/>
+              <a:gd name="adj" fmla="val 8696"/>
             </a:avLst>
           </a:prstGeom>
           <a:solidFill>
@@ -10094,8 +10094,8 @@
         </p:nvSpPr>
         <p:spPr>
           <a:xfrm>
-            <a:off x="7799832" y="4330598"/>
-            <a:ext cx="3145536" cy="256032"/>
+            <a:off x="7708392" y="4517136"/>
+            <a:ext cx="3282696" cy="228600"/>
           </a:xfrm>
           <a:prstGeom prst="rect">
             <a:avLst/>
@@ -10111,7 +10111,7 @@
               <a:buNone/>
             </a:pPr>
             <a:r>
-              <a:rPr lang="en-US" sz="1300" b="1" dirty="0">
+              <a:rPr lang="en-US" sz="1220" b="1" dirty="0">
                 <a:solidFill>
                   <a:srgbClr val="0068B7"/>
                 </a:solidFill>
@@ -10121,7 +10121,7 @@
               </a:rPr>
               <a:t>Next action</a:t>
             </a:r>
-            <a:endParaRPr lang="en-US" sz="1300" dirty="0"/>
+            <a:endParaRPr lang="en-US" sz="1220" dirty="0"/>
           </a:p>
         </p:txBody>
       </p:sp>
@@ -10133,8 +10133,8 @@
         </p:nvSpPr>
         <p:spPr>
           <a:xfrm>
-            <a:off x="7799832" y="4659782"/>
-            <a:ext cx="3145536" cy="899770"/>
+            <a:off x="7708392" y="4828032"/>
+            <a:ext cx="3282696" cy="749808"/>
           </a:xfrm>
           <a:prstGeom prst="rect">
             <a:avLst/>
@@ -10152,7 +10152,7 @@
               <a:buNone/>
             </a:pPr>
             <a:r>
-              <a:rPr lang="en-US" sz="1320" dirty="0">
+              <a:rPr lang="en-US" sz="1220" dirty="0">
                 <a:solidFill>
                   <a:srgbClr val="17364A"/>
                 </a:solidFill>
@@ -10160,9 +10160,9 @@
                 <a:ea typeface="Aptos" pitchFamily="34" charset="-122"/>
                 <a:cs typeface="Aptos" pitchFamily="34" charset="-120"/>
               </a:rPr>
-              <a:t>Use the concept to clarify workflow changes, dependencies, staffing, procurement requirements, training needs, and implementation checkpoints.</a:t>
-            </a:r>
-            <a:endParaRPr lang="en-US" sz="1320" dirty="0"/>
+              <a:t>Use the concept to clarify workflow changes, dependencies, staffing, procurement.</a:t>
+            </a:r>
+            <a:endParaRPr lang="en-US" sz="1220" dirty="0"/>
           </a:p>
         </p:txBody>
       </p:sp>
@@ -10480,7 +10480,7 @@
                 <a:ea typeface="Aptos" pitchFamily="34" charset="-122"/>
                 <a:cs typeface="Aptos" pitchFamily="34" charset="-120"/>
               </a:rPr>
-              <a:t>• APIs, webhooks, and event-driven workflows are the mechanisms that allow systems to interact.</a:t>
+              <a:t>• APIs, webhooks, and event-driven workflows are the mechanisms that allow.</a:t>
             </a:r>
             <a:endParaRPr lang="en-US" sz="2100" dirty="0"/>
           </a:p>
@@ -10497,7 +10497,7 @@
                 <a:ea typeface="Aptos" pitchFamily="34" charset="-122"/>
                 <a:cs typeface="Aptos" pitchFamily="34" charset="-120"/>
               </a:rPr>
-              <a:t>• They are especially important for AI because many AI tools need to retrieve data, send.</a:t>
+              <a:t>• They are especially important for AI because many AI tools need to retrieve.</a:t>
             </a:r>
             <a:endParaRPr lang="en-US" sz="2100" dirty="0"/>
           </a:p>
@@ -10514,7 +10514,7 @@
                 <a:ea typeface="Aptos" pitchFamily="34" charset="-122"/>
                 <a:cs typeface="Aptos" pitchFamily="34" charset="-120"/>
               </a:rPr>
-              <a:t>• This module teaches non-developer public health staff enough technical understanding to.</a:t>
+              <a:t>• This module teaches non-developer public health staff enough technical.</a:t>
             </a:r>
             <a:endParaRPr lang="en-US" sz="2100" dirty="0"/>
           </a:p>
@@ -10555,8 +10555,8 @@
         </p:nvSpPr>
         <p:spPr>
           <a:xfrm>
-            <a:off x="8074152" y="1563624"/>
-            <a:ext cx="2825496" cy="256032"/>
+            <a:off x="8074152" y="1545336"/>
+            <a:ext cx="2825496" cy="228600"/>
           </a:xfrm>
           <a:prstGeom prst="rect">
             <a:avLst/>
@@ -10572,7 +10572,7 @@
               <a:buNone/>
             </a:pPr>
             <a:r>
-              <a:rPr lang="en-US" sz="1300" b="1" dirty="0">
+              <a:rPr lang="en-US" sz="1220" b="1" dirty="0">
                 <a:solidFill>
                   <a:srgbClr val="0068B7"/>
                 </a:solidFill>
@@ -10582,7 +10582,7 @@
               </a:rPr>
               <a:t>Module details</a:t>
             </a:r>
-            <a:endParaRPr lang="en-US" sz="1300" dirty="0"/>
+            <a:endParaRPr lang="en-US" sz="1220" dirty="0"/>
           </a:p>
         </p:txBody>
       </p:sp>
@@ -10594,8 +10594,8 @@
         </p:nvSpPr>
         <p:spPr>
           <a:xfrm>
-            <a:off x="8074152" y="1892808"/>
-            <a:ext cx="2825496" cy="1353312"/>
+            <a:off x="8074152" y="1856232"/>
+            <a:ext cx="2825496" cy="1408176"/>
           </a:xfrm>
           <a:prstGeom prst="rect">
             <a:avLst/>
@@ -10613,7 +10613,7 @@
               <a:buNone/>
             </a:pPr>
             <a:r>
-              <a:rPr lang="en-US" sz="1320" dirty="0">
+              <a:rPr lang="en-US" sz="1220" dirty="0">
                 <a:solidFill>
                   <a:srgbClr val="17364A"/>
                 </a:solidFill>
@@ -10621,9 +10621,9 @@
                 <a:ea typeface="Aptos" pitchFamily="34" charset="-122"/>
                 <a:cs typeface="Aptos" pitchFamily="34" charset="-120"/>
               </a:rPr>
-              <a:t>Level: applied/foundational Primary track: Technical Architecture Track Appears in tracks: technical-architecture</a:t>
-            </a:r>
-            <a:endParaRPr lang="en-US" sz="1320" dirty="0"/>
+              <a:t>Level: applied/foundational Primary track: Technical Architecture Track Appears.</a:t>
+            </a:r>
+            <a:endParaRPr lang="en-US" sz="1220" dirty="0"/>
           </a:p>
         </p:txBody>
       </p:sp>
@@ -10662,8 +10662,8 @@
         </p:nvSpPr>
         <p:spPr>
           <a:xfrm>
-            <a:off x="8074152" y="3822192"/>
-            <a:ext cx="2825496" cy="256032"/>
+            <a:off x="8074152" y="3803904"/>
+            <a:ext cx="2825496" cy="228600"/>
           </a:xfrm>
           <a:prstGeom prst="rect">
             <a:avLst/>
@@ -10679,7 +10679,7 @@
               <a:buNone/>
             </a:pPr>
             <a:r>
-              <a:rPr lang="en-US" sz="1300" b="1" dirty="0">
+              <a:rPr lang="en-US" sz="1220" b="1" dirty="0">
                 <a:solidFill>
                   <a:srgbClr val="0068B7"/>
                 </a:solidFill>
@@ -10689,7 +10689,7 @@
               </a:rPr>
               <a:t>Learning sequence</a:t>
             </a:r>
-            <a:endParaRPr lang="en-US" sz="1300" dirty="0"/>
+            <a:endParaRPr lang="en-US" sz="1220" dirty="0"/>
           </a:p>
         </p:txBody>
       </p:sp>
@@ -10701,8 +10701,8 @@
         </p:nvSpPr>
         <p:spPr>
           <a:xfrm>
-            <a:off x="8092440" y="4187952"/>
-            <a:ext cx="2770632" cy="1033272"/>
+            <a:off x="8092440" y="4133088"/>
+            <a:ext cx="2770632" cy="1124712"/>
           </a:xfrm>
           <a:prstGeom prst="rect">
             <a:avLst/>
@@ -10720,7 +10720,7 @@
               <a:buNone/>
             </a:pPr>
             <a:r>
-              <a:rPr lang="en-US" sz="1220" dirty="0">
+              <a:rPr lang="en-US" sz="1140" dirty="0">
                 <a:solidFill>
                   <a:srgbClr val="17364A"/>
                 </a:solidFill>
@@ -10730,14 +10730,14 @@
               </a:rPr>
               <a:t>Read the module for shared vocabulary and context.</a:t>
             </a:r>
-            <a:endParaRPr lang="en-US" sz="1220" dirty="0"/>
-          </a:p>
-          <a:p>
-            <a:pPr indent="0" marL="0">
-              <a:buNone/>
-            </a:pPr>
-            <a:r>
-              <a:rPr lang="en-US" sz="1220" dirty="0">
+            <a:endParaRPr lang="en-US" sz="1140" dirty="0"/>
+          </a:p>
+          <a:p>
+            <a:pPr indent="0" marL="0">
+              <a:buNone/>
+            </a:pPr>
+            <a:r>
+              <a:rPr lang="en-US" sz="1140" dirty="0">
                 <a:solidFill>
                   <a:srgbClr val="17364A"/>
                 </a:solidFill>
@@ -10745,16 +10745,16 @@
                 <a:ea typeface="Aptos" pitchFamily="34" charset="-122"/>
                 <a:cs typeface="Aptos" pitchFamily="34" charset="-120"/>
               </a:rPr>
-              <a:t>Complete the practical exercise to apply the concept.</a:t>
-            </a:r>
-            <a:endParaRPr lang="en-US" sz="1220" dirty="0"/>
-          </a:p>
-          <a:p>
-            <a:pPr indent="0" marL="0">
-              <a:buNone/>
-            </a:pPr>
-            <a:r>
-              <a:rPr lang="en-US" sz="1220" dirty="0">
+              <a:t>Complete the practical exercise to apply the.</a:t>
+            </a:r>
+            <a:endParaRPr lang="en-US" sz="1140" dirty="0"/>
+          </a:p>
+          <a:p>
+            <a:pPr indent="0" marL="0">
+              <a:buNone/>
+            </a:pPr>
+            <a:r>
+              <a:rPr lang="en-US" sz="1140" dirty="0">
                 <a:solidFill>
                   <a:srgbClr val="17364A"/>
                 </a:solidFill>
@@ -10764,7 +10764,7 @@
               </a:rPr>
               <a:t>Use the notes and references for deeper review.</a:t>
             </a:r>
-            <a:endParaRPr lang="en-US" sz="1220" dirty="0"/>
+            <a:endParaRPr lang="en-US" sz="1140" dirty="0"/>
           </a:p>
         </p:txBody>
       </p:sp>
@@ -11055,8 +11055,8 @@
         </p:nvSpPr>
         <p:spPr>
           <a:xfrm>
-            <a:off x="868680" y="1508760"/>
-            <a:ext cx="6309360" cy="4160520"/>
+            <a:off x="822960" y="1463040"/>
+            <a:ext cx="6565392" cy="4343400"/>
           </a:xfrm>
           <a:prstGeom prst="rect">
             <a:avLst/>
@@ -11074,7 +11074,7 @@
               <a:buNone/>
             </a:pPr>
             <a:r>
-              <a:rPr lang="en-US" sz="2100" dirty="0">
+              <a:rPr lang="en-US" sz="1920" dirty="0">
                 <a:solidFill>
                   <a:srgbClr val="003A63"/>
                 </a:solidFill>
@@ -11084,7 +11084,7 @@
               </a:rPr>
               <a:t>• Audit log requirements</a:t>
             </a:r>
-            <a:endParaRPr lang="en-US" sz="2100" dirty="0"/>
+            <a:endParaRPr lang="en-US" sz="1920" dirty="0"/>
           </a:p>
         </p:txBody>
       </p:sp>
@@ -11096,12 +11096,12 @@
         </p:nvSpPr>
         <p:spPr>
           <a:xfrm>
-            <a:off x="7635240" y="1325880"/>
-            <a:ext cx="3474720" cy="1207008"/>
+            <a:off x="7543800" y="1325880"/>
+            <a:ext cx="3611880" cy="1261872"/>
           </a:xfrm>
           <a:prstGeom prst="roundRect">
             <a:avLst>
-              <a:gd name="adj" fmla="val 9091"/>
+              <a:gd name="adj" fmla="val 8696"/>
             </a:avLst>
           </a:prstGeom>
           <a:solidFill>
@@ -11123,8 +11123,8 @@
         </p:nvSpPr>
         <p:spPr>
           <a:xfrm>
-            <a:off x="7799832" y="1472184"/>
-            <a:ext cx="3145536" cy="256032"/>
+            <a:off x="7708392" y="1453896"/>
+            <a:ext cx="3282696" cy="228600"/>
           </a:xfrm>
           <a:prstGeom prst="rect">
             <a:avLst/>
@@ -11140,7 +11140,7 @@
               <a:buNone/>
             </a:pPr>
             <a:r>
-              <a:rPr lang="en-US" sz="1300" b="1" dirty="0">
+              <a:rPr lang="en-US" sz="1220" b="1" dirty="0">
                 <a:solidFill>
                   <a:srgbClr val="0068B7"/>
                 </a:solidFill>
@@ -11150,7 +11150,7 @@
               </a:rPr>
               <a:t>Implementation cue</a:t>
             </a:r>
-            <a:endParaRPr lang="en-US" sz="1300" dirty="0"/>
+            <a:endParaRPr lang="en-US" sz="1220" dirty="0"/>
           </a:p>
         </p:txBody>
       </p:sp>
@@ -11162,8 +11162,8 @@
         </p:nvSpPr>
         <p:spPr>
           <a:xfrm>
-            <a:off x="7799832" y="1801368"/>
-            <a:ext cx="3145536" cy="640080"/>
+            <a:off x="7708392" y="1764792"/>
+            <a:ext cx="3282696" cy="749808"/>
           </a:xfrm>
           <a:prstGeom prst="rect">
             <a:avLst/>
@@ -11181,7 +11181,7 @@
               <a:buNone/>
             </a:pPr>
             <a:r>
-              <a:rPr lang="en-US" sz="1320" dirty="0">
+              <a:rPr lang="en-US" sz="1220" dirty="0">
                 <a:solidFill>
                   <a:srgbClr val="17364A"/>
                 </a:solidFill>
@@ -11191,7 +11191,7 @@
               </a:rPr>
               <a:t>Audit log requirements</a:t>
             </a:r>
-            <a:endParaRPr lang="en-US" sz="1320" dirty="0"/>
+            <a:endParaRPr lang="en-US" sz="1220" dirty="0"/>
           </a:p>
         </p:txBody>
       </p:sp>
@@ -11203,12 +11203,12 @@
         </p:nvSpPr>
         <p:spPr>
           <a:xfrm>
-            <a:off x="7635240" y="2670048"/>
-            <a:ext cx="3474720" cy="1377086"/>
+            <a:off x="7543800" y="2724912"/>
+            <a:ext cx="3611880" cy="1527048"/>
           </a:xfrm>
           <a:prstGeom prst="roundRect">
             <a:avLst>
-              <a:gd name="adj" fmla="val 7968"/>
+              <a:gd name="adj" fmla="val 7186"/>
             </a:avLst>
           </a:prstGeom>
           <a:solidFill>
@@ -11230,8 +11230,8 @@
         </p:nvSpPr>
         <p:spPr>
           <a:xfrm>
-            <a:off x="7799832" y="2816352"/>
-            <a:ext cx="3145536" cy="256032"/>
+            <a:off x="7708392" y="2852928"/>
+            <a:ext cx="3282696" cy="228600"/>
           </a:xfrm>
           <a:prstGeom prst="rect">
             <a:avLst/>
@@ -11247,7 +11247,7 @@
               <a:buNone/>
             </a:pPr>
             <a:r>
-              <a:rPr lang="en-US" sz="1300" b="1" dirty="0">
+              <a:rPr lang="en-US" sz="1220" b="1" dirty="0">
                 <a:solidFill>
                   <a:srgbClr val="0068B7"/>
                 </a:solidFill>
@@ -11257,7 +11257,7 @@
               </a:rPr>
               <a:t>Concept checkpoints</a:t>
             </a:r>
-            <a:endParaRPr lang="en-US" sz="1300" dirty="0"/>
+            <a:endParaRPr lang="en-US" sz="1220" dirty="0"/>
           </a:p>
         </p:txBody>
       </p:sp>
@@ -11269,8 +11269,8 @@
         </p:nvSpPr>
         <p:spPr>
           <a:xfrm>
-            <a:off x="7818120" y="3182112"/>
-            <a:ext cx="3090672" cy="718718"/>
+            <a:off x="7726680" y="3182112"/>
+            <a:ext cx="3227832" cy="960120"/>
           </a:xfrm>
           <a:prstGeom prst="rect">
             <a:avLst/>
@@ -11288,7 +11288,7 @@
               <a:buNone/>
             </a:pPr>
             <a:r>
-              <a:rPr lang="en-US" sz="1220" dirty="0">
+              <a:rPr lang="en-US" sz="1140" dirty="0">
                 <a:solidFill>
                   <a:srgbClr val="17364A"/>
                 </a:solidFill>
@@ -11298,7 +11298,7 @@
               </a:rPr>
               <a:t>Audit log requirements</a:t>
             </a:r>
-            <a:endParaRPr lang="en-US" sz="1220" dirty="0"/>
+            <a:endParaRPr lang="en-US" sz="1140" dirty="0"/>
           </a:p>
         </p:txBody>
       </p:sp>
@@ -11310,12 +11310,12 @@
         </p:nvSpPr>
         <p:spPr>
           <a:xfrm>
-            <a:off x="7635240" y="4184294"/>
-            <a:ext cx="3474720" cy="1466698"/>
+            <a:off x="7543800" y="4389120"/>
+            <a:ext cx="3611880" cy="1261872"/>
           </a:xfrm>
           <a:prstGeom prst="roundRect">
             <a:avLst>
-              <a:gd name="adj" fmla="val 7481"/>
+              <a:gd name="adj" fmla="val 8696"/>
             </a:avLst>
           </a:prstGeom>
           <a:solidFill>
@@ -11337,8 +11337,8 @@
         </p:nvSpPr>
         <p:spPr>
           <a:xfrm>
-            <a:off x="7799832" y="4330598"/>
-            <a:ext cx="3145536" cy="256032"/>
+            <a:off x="7708392" y="4517136"/>
+            <a:ext cx="3282696" cy="228600"/>
           </a:xfrm>
           <a:prstGeom prst="rect">
             <a:avLst/>
@@ -11354,7 +11354,7 @@
               <a:buNone/>
             </a:pPr>
             <a:r>
-              <a:rPr lang="en-US" sz="1300" b="1" dirty="0">
+              <a:rPr lang="en-US" sz="1220" b="1" dirty="0">
                 <a:solidFill>
                   <a:srgbClr val="0068B7"/>
                 </a:solidFill>
@@ -11364,7 +11364,7 @@
               </a:rPr>
               <a:t>Next action</a:t>
             </a:r>
-            <a:endParaRPr lang="en-US" sz="1300" dirty="0"/>
+            <a:endParaRPr lang="en-US" sz="1220" dirty="0"/>
           </a:p>
         </p:txBody>
       </p:sp>
@@ -11376,8 +11376,8 @@
         </p:nvSpPr>
         <p:spPr>
           <a:xfrm>
-            <a:off x="7799832" y="4659782"/>
-            <a:ext cx="3145536" cy="899770"/>
+            <a:off x="7708392" y="4828032"/>
+            <a:ext cx="3282696" cy="749808"/>
           </a:xfrm>
           <a:prstGeom prst="rect">
             <a:avLst/>
@@ -11395,7 +11395,7 @@
               <a:buNone/>
             </a:pPr>
             <a:r>
-              <a:rPr lang="en-US" sz="1320" dirty="0">
+              <a:rPr lang="en-US" sz="1220" dirty="0">
                 <a:solidFill>
                   <a:srgbClr val="17364A"/>
                 </a:solidFill>
@@ -11403,9 +11403,9 @@
                 <a:ea typeface="Aptos" pitchFamily="34" charset="-122"/>
                 <a:cs typeface="Aptos" pitchFamily="34" charset="-120"/>
               </a:rPr>
-              <a:t>Use the concept to clarify workflow changes, dependencies, staffing, procurement requirements, training needs, and implementation checkpoints.</a:t>
-            </a:r>
-            <a:endParaRPr lang="en-US" sz="1320" dirty="0"/>
+              <a:t>Use the concept to clarify workflow changes, dependencies, staffing, procurement.</a:t>
+            </a:r>
+            <a:endParaRPr lang="en-US" sz="1220" dirty="0"/>
           </a:p>
         </p:txBody>
       </p:sp>
@@ -11696,8 +11696,8 @@
         </p:nvSpPr>
         <p:spPr>
           <a:xfrm>
-            <a:off x="868680" y="1508760"/>
-            <a:ext cx="6309360" cy="4160520"/>
+            <a:off x="822960" y="1463040"/>
+            <a:ext cx="6565392" cy="4343400"/>
           </a:xfrm>
           <a:prstGeom prst="rect">
             <a:avLst/>
@@ -11715,7 +11715,7 @@
               <a:buNone/>
             </a:pPr>
             <a:r>
-              <a:rPr lang="en-US" sz="2100" dirty="0">
+              <a:rPr lang="en-US" sz="1920" dirty="0">
                 <a:solidFill>
                   <a:srgbClr val="003A63"/>
                 </a:solidFill>
@@ -11725,14 +11725,14 @@
               </a:rPr>
               <a:t>• API and event workflow worksheet</a:t>
             </a:r>
-            <a:endParaRPr lang="en-US" sz="2100" dirty="0"/>
-          </a:p>
-          <a:p>
-            <a:pPr indent="0" marL="0">
-              <a:buNone/>
-            </a:pPr>
-            <a:r>
-              <a:rPr lang="en-US" sz="2100" dirty="0">
+            <a:endParaRPr lang="en-US" sz="1920" dirty="0"/>
+          </a:p>
+          <a:p>
+            <a:pPr indent="0" marL="0">
+              <a:buNone/>
+            </a:pPr>
+            <a:r>
+              <a:rPr lang="en-US" sz="1920" dirty="0">
                 <a:solidFill>
                   <a:srgbClr val="003A63"/>
                 </a:solidFill>
@@ -11742,14 +11742,14 @@
               </a:rPr>
               <a:t>• Integration risk questions</a:t>
             </a:r>
-            <a:endParaRPr lang="en-US" sz="2100" dirty="0"/>
-          </a:p>
-          <a:p>
-            <a:pPr indent="0" marL="0">
-              <a:buNone/>
-            </a:pPr>
-            <a:r>
-              <a:rPr lang="en-US" sz="2100" dirty="0">
+            <a:endParaRPr lang="en-US" sz="1920" dirty="0"/>
+          </a:p>
+          <a:p>
+            <a:pPr indent="0" marL="0">
+              <a:buNone/>
+            </a:pPr>
+            <a:r>
+              <a:rPr lang="en-US" sz="1920" dirty="0">
                 <a:solidFill>
                   <a:srgbClr val="003A63"/>
                 </a:solidFill>
@@ -11759,7 +11759,7 @@
               </a:rPr>
               <a:t>• Access control recommendations</a:t>
             </a:r>
-            <a:endParaRPr lang="en-US" sz="2100" dirty="0"/>
+            <a:endParaRPr lang="en-US" sz="1920" dirty="0"/>
           </a:p>
         </p:txBody>
       </p:sp>
@@ -11771,12 +11771,12 @@
         </p:nvSpPr>
         <p:spPr>
           <a:xfrm>
-            <a:off x="7635240" y="1325880"/>
-            <a:ext cx="3474720" cy="1207008"/>
+            <a:off x="7543800" y="1325880"/>
+            <a:ext cx="3611880" cy="1261872"/>
           </a:xfrm>
           <a:prstGeom prst="roundRect">
             <a:avLst>
-              <a:gd name="adj" fmla="val 9091"/>
+              <a:gd name="adj" fmla="val 8696"/>
             </a:avLst>
           </a:prstGeom>
           <a:solidFill>
@@ -11798,8 +11798,8 @@
         </p:nvSpPr>
         <p:spPr>
           <a:xfrm>
-            <a:off x="7799832" y="1472184"/>
-            <a:ext cx="3145536" cy="256032"/>
+            <a:off x="7708392" y="1453896"/>
+            <a:ext cx="3282696" cy="228600"/>
           </a:xfrm>
           <a:prstGeom prst="rect">
             <a:avLst/>
@@ -11815,7 +11815,7 @@
               <a:buNone/>
             </a:pPr>
             <a:r>
-              <a:rPr lang="en-US" sz="1300" b="1" dirty="0">
+              <a:rPr lang="en-US" sz="1220" b="1" dirty="0">
                 <a:solidFill>
                   <a:srgbClr val="0068B7"/>
                 </a:solidFill>
@@ -11825,7 +11825,7 @@
               </a:rPr>
               <a:t>Implementation cue</a:t>
             </a:r>
-            <a:endParaRPr lang="en-US" sz="1300" dirty="0"/>
+            <a:endParaRPr lang="en-US" sz="1220" dirty="0"/>
           </a:p>
         </p:txBody>
       </p:sp>
@@ -11837,8 +11837,8 @@
         </p:nvSpPr>
         <p:spPr>
           <a:xfrm>
-            <a:off x="7799832" y="1801368"/>
-            <a:ext cx="3145536" cy="640080"/>
+            <a:off x="7708392" y="1764792"/>
+            <a:ext cx="3282696" cy="749808"/>
           </a:xfrm>
           <a:prstGeom prst="rect">
             <a:avLst/>
@@ -11856,7 +11856,7 @@
               <a:buNone/>
             </a:pPr>
             <a:r>
-              <a:rPr lang="en-US" sz="1320" dirty="0">
+              <a:rPr lang="en-US" sz="1220" dirty="0">
                 <a:solidFill>
                   <a:srgbClr val="17364A"/>
                 </a:solidFill>
@@ -11866,7 +11866,7 @@
               </a:rPr>
               <a:t>API and event workflow worksheet</a:t>
             </a:r>
-            <a:endParaRPr lang="en-US" sz="1320" dirty="0"/>
+            <a:endParaRPr lang="en-US" sz="1220" dirty="0"/>
           </a:p>
         </p:txBody>
       </p:sp>
@@ -11878,12 +11878,12 @@
         </p:nvSpPr>
         <p:spPr>
           <a:xfrm>
-            <a:off x="7635240" y="2670048"/>
-            <a:ext cx="3474720" cy="1377086"/>
+            <a:off x="7543800" y="2724912"/>
+            <a:ext cx="3611880" cy="1527048"/>
           </a:xfrm>
           <a:prstGeom prst="roundRect">
             <a:avLst>
-              <a:gd name="adj" fmla="val 7968"/>
+              <a:gd name="adj" fmla="val 7186"/>
             </a:avLst>
           </a:prstGeom>
           <a:solidFill>
@@ -11905,8 +11905,8 @@
         </p:nvSpPr>
         <p:spPr>
           <a:xfrm>
-            <a:off x="7799832" y="2816352"/>
-            <a:ext cx="3145536" cy="256032"/>
+            <a:off x="7708392" y="2852928"/>
+            <a:ext cx="3282696" cy="228600"/>
           </a:xfrm>
           <a:prstGeom prst="rect">
             <a:avLst/>
@@ -11922,7 +11922,7 @@
               <a:buNone/>
             </a:pPr>
             <a:r>
-              <a:rPr lang="en-US" sz="1300" b="1" dirty="0">
+              <a:rPr lang="en-US" sz="1220" b="1" dirty="0">
                 <a:solidFill>
                   <a:srgbClr val="0068B7"/>
                 </a:solidFill>
@@ -11932,7 +11932,7 @@
               </a:rPr>
               <a:t>Concept checkpoints</a:t>
             </a:r>
-            <a:endParaRPr lang="en-US" sz="1300" dirty="0"/>
+            <a:endParaRPr lang="en-US" sz="1220" dirty="0"/>
           </a:p>
         </p:txBody>
       </p:sp>
@@ -11944,8 +11944,8 @@
         </p:nvSpPr>
         <p:spPr>
           <a:xfrm>
-            <a:off x="7818120" y="3182112"/>
-            <a:ext cx="3090672" cy="718718"/>
+            <a:off x="7726680" y="3182112"/>
+            <a:ext cx="3227832" cy="960120"/>
           </a:xfrm>
           <a:prstGeom prst="rect">
             <a:avLst/>
@@ -11963,7 +11963,7 @@
               <a:buNone/>
             </a:pPr>
             <a:r>
-              <a:rPr lang="en-US" sz="1220" dirty="0">
+              <a:rPr lang="en-US" sz="1140" dirty="0">
                 <a:solidFill>
                   <a:srgbClr val="17364A"/>
                 </a:solidFill>
@@ -11973,14 +11973,14 @@
               </a:rPr>
               <a:t>API and event workflow worksheet</a:t>
             </a:r>
-            <a:endParaRPr lang="en-US" sz="1220" dirty="0"/>
-          </a:p>
-          <a:p>
-            <a:pPr indent="0" marL="0">
-              <a:buNone/>
-            </a:pPr>
-            <a:r>
-              <a:rPr lang="en-US" sz="1220" dirty="0">
+            <a:endParaRPr lang="en-US" sz="1140" dirty="0"/>
+          </a:p>
+          <a:p>
+            <a:pPr indent="0" marL="0">
+              <a:buNone/>
+            </a:pPr>
+            <a:r>
+              <a:rPr lang="en-US" sz="1140" dirty="0">
                 <a:solidFill>
                   <a:srgbClr val="17364A"/>
                 </a:solidFill>
@@ -11990,14 +11990,14 @@
               </a:rPr>
               <a:t>Integration risk questions</a:t>
             </a:r>
-            <a:endParaRPr lang="en-US" sz="1220" dirty="0"/>
-          </a:p>
-          <a:p>
-            <a:pPr indent="0" marL="0">
-              <a:buNone/>
-            </a:pPr>
-            <a:r>
-              <a:rPr lang="en-US" sz="1220" dirty="0">
+            <a:endParaRPr lang="en-US" sz="1140" dirty="0"/>
+          </a:p>
+          <a:p>
+            <a:pPr indent="0" marL="0">
+              <a:buNone/>
+            </a:pPr>
+            <a:r>
+              <a:rPr lang="en-US" sz="1140" dirty="0">
                 <a:solidFill>
                   <a:srgbClr val="17364A"/>
                 </a:solidFill>
@@ -12007,7 +12007,7 @@
               </a:rPr>
               <a:t>Access control recommendations</a:t>
             </a:r>
-            <a:endParaRPr lang="en-US" sz="1220" dirty="0"/>
+            <a:endParaRPr lang="en-US" sz="1140" dirty="0"/>
           </a:p>
         </p:txBody>
       </p:sp>
@@ -12019,12 +12019,12 @@
         </p:nvSpPr>
         <p:spPr>
           <a:xfrm>
-            <a:off x="7635240" y="4184294"/>
-            <a:ext cx="3474720" cy="1466698"/>
+            <a:off x="7543800" y="4389120"/>
+            <a:ext cx="3611880" cy="1261872"/>
           </a:xfrm>
           <a:prstGeom prst="roundRect">
             <a:avLst>
-              <a:gd name="adj" fmla="val 7481"/>
+              <a:gd name="adj" fmla="val 8696"/>
             </a:avLst>
           </a:prstGeom>
           <a:solidFill>
@@ -12046,8 +12046,8 @@
         </p:nvSpPr>
         <p:spPr>
           <a:xfrm>
-            <a:off x="7799832" y="4330598"/>
-            <a:ext cx="3145536" cy="256032"/>
+            <a:off x="7708392" y="4517136"/>
+            <a:ext cx="3282696" cy="228600"/>
           </a:xfrm>
           <a:prstGeom prst="rect">
             <a:avLst/>
@@ -12063,7 +12063,7 @@
               <a:buNone/>
             </a:pPr>
             <a:r>
-              <a:rPr lang="en-US" sz="1300" b="1" dirty="0">
+              <a:rPr lang="en-US" sz="1220" b="1" dirty="0">
                 <a:solidFill>
                   <a:srgbClr val="0068B7"/>
                 </a:solidFill>
@@ -12073,7 +12073,7 @@
               </a:rPr>
               <a:t>Next action</a:t>
             </a:r>
-            <a:endParaRPr lang="en-US" sz="1300" dirty="0"/>
+            <a:endParaRPr lang="en-US" sz="1220" dirty="0"/>
           </a:p>
         </p:txBody>
       </p:sp>
@@ -12085,8 +12085,8 @@
         </p:nvSpPr>
         <p:spPr>
           <a:xfrm>
-            <a:off x="7799832" y="4659782"/>
-            <a:ext cx="3145536" cy="899770"/>
+            <a:off x="7708392" y="4828032"/>
+            <a:ext cx="3282696" cy="749808"/>
           </a:xfrm>
           <a:prstGeom prst="rect">
             <a:avLst/>
@@ -12104,7 +12104,7 @@
               <a:buNone/>
             </a:pPr>
             <a:r>
-              <a:rPr lang="en-US" sz="1320" dirty="0">
+              <a:rPr lang="en-US" sz="1220" dirty="0">
                 <a:solidFill>
                   <a:srgbClr val="17364A"/>
                 </a:solidFill>
@@ -12112,9 +12112,9 @@
                 <a:ea typeface="Aptos" pitchFamily="34" charset="-122"/>
                 <a:cs typeface="Aptos" pitchFamily="34" charset="-120"/>
               </a:rPr>
-              <a:t>Use the assignment to test whether you can explain the concept, apply it to a realistic public health situation, and identify what would need review before the work moves forward.</a:t>
-            </a:r>
-            <a:endParaRPr lang="en-US" sz="1320" dirty="0"/>
+              <a:t>Use the assignment to test whether you can explain the concept, apply it to a.</a:t>
+            </a:r>
+            <a:endParaRPr lang="en-US" sz="1220" dirty="0"/>
           </a:p>
         </p:txBody>
       </p:sp>
@@ -12405,8 +12405,8 @@
         </p:nvSpPr>
         <p:spPr>
           <a:xfrm>
-            <a:off x="868680" y="1508760"/>
-            <a:ext cx="6309360" cy="4160520"/>
+            <a:off x="822960" y="1463040"/>
+            <a:ext cx="6565392" cy="4343400"/>
           </a:xfrm>
           <a:prstGeom prst="rect">
             <a:avLst/>
@@ -12424,7 +12424,7 @@
               <a:buNone/>
             </a:pPr>
             <a:r>
-              <a:rPr lang="en-US" sz="2100" dirty="0">
+              <a:rPr lang="en-US" sz="1920" dirty="0">
                 <a:solidFill>
                   <a:srgbClr val="003A63"/>
                 </a:solidFill>
@@ -12434,14 +12434,14 @@
               </a:rPr>
               <a:t>• 1. What does an API allow systems to do?</a:t>
             </a:r>
-            <a:endParaRPr lang="en-US" sz="2100" dirty="0"/>
-          </a:p>
-          <a:p>
-            <a:pPr indent="0" marL="0">
-              <a:buNone/>
-            </a:pPr>
-            <a:r>
-              <a:rPr lang="en-US" sz="2100" dirty="0">
+            <a:endParaRPr lang="en-US" sz="1920" dirty="0"/>
+          </a:p>
+          <a:p>
+            <a:pPr indent="0" marL="0">
+              <a:buNone/>
+            </a:pPr>
+            <a:r>
+              <a:rPr lang="en-US" sz="1920" dirty="0">
                 <a:solidFill>
                   <a:srgbClr val="003A63"/>
                 </a:solidFill>
@@ -12451,14 +12451,14 @@
               </a:rPr>
               <a:t>• 2. What is a webhook?</a:t>
             </a:r>
-            <a:endParaRPr lang="en-US" sz="2100" dirty="0"/>
-          </a:p>
-          <a:p>
-            <a:pPr indent="0" marL="0">
-              <a:buNone/>
-            </a:pPr>
-            <a:r>
-              <a:rPr lang="en-US" sz="2100" dirty="0">
+            <a:endParaRPr lang="en-US" sz="1920" dirty="0"/>
+          </a:p>
+          <a:p>
+            <a:pPr indent="0" marL="0">
+              <a:buNone/>
+            </a:pPr>
+            <a:r>
+              <a:rPr lang="en-US" sz="1920" dirty="0">
                 <a:solidFill>
                   <a:srgbClr val="003A63"/>
                 </a:solidFill>
@@ -12468,7 +12468,7 @@
               </a:rPr>
               <a:t>• 3. Why do AI integrations need access controls?</a:t>
             </a:r>
-            <a:endParaRPr lang="en-US" sz="2100" dirty="0"/>
+            <a:endParaRPr lang="en-US" sz="1920" dirty="0"/>
           </a:p>
         </p:txBody>
       </p:sp>
@@ -12480,12 +12480,12 @@
         </p:nvSpPr>
         <p:spPr>
           <a:xfrm>
-            <a:off x="7635240" y="1325880"/>
-            <a:ext cx="3474720" cy="1207008"/>
+            <a:off x="7543800" y="1325880"/>
+            <a:ext cx="3611880" cy="1261872"/>
           </a:xfrm>
           <a:prstGeom prst="roundRect">
             <a:avLst>
-              <a:gd name="adj" fmla="val 9091"/>
+              <a:gd name="adj" fmla="val 8696"/>
             </a:avLst>
           </a:prstGeom>
           <a:solidFill>
@@ -12507,8 +12507,8 @@
         </p:nvSpPr>
         <p:spPr>
           <a:xfrm>
-            <a:off x="7799832" y="1472184"/>
-            <a:ext cx="3145536" cy="256032"/>
+            <a:off x="7708392" y="1453896"/>
+            <a:ext cx="3282696" cy="228600"/>
           </a:xfrm>
           <a:prstGeom prst="rect">
             <a:avLst/>
@@ -12524,7 +12524,7 @@
               <a:buNone/>
             </a:pPr>
             <a:r>
-              <a:rPr lang="en-US" sz="1300" b="1" dirty="0">
+              <a:rPr lang="en-US" sz="1220" b="1" dirty="0">
                 <a:solidFill>
                   <a:srgbClr val="0068B7"/>
                 </a:solidFill>
@@ -12534,7 +12534,7 @@
               </a:rPr>
               <a:t>Implementation cue</a:t>
             </a:r>
-            <a:endParaRPr lang="en-US" sz="1300" dirty="0"/>
+            <a:endParaRPr lang="en-US" sz="1220" dirty="0"/>
           </a:p>
         </p:txBody>
       </p:sp>
@@ -12546,8 +12546,8 @@
         </p:nvSpPr>
         <p:spPr>
           <a:xfrm>
-            <a:off x="7799832" y="1801368"/>
-            <a:ext cx="3145536" cy="640080"/>
+            <a:off x="7708392" y="1764792"/>
+            <a:ext cx="3282696" cy="749808"/>
           </a:xfrm>
           <a:prstGeom prst="rect">
             <a:avLst/>
@@ -12565,7 +12565,7 @@
               <a:buNone/>
             </a:pPr>
             <a:r>
-              <a:rPr lang="en-US" sz="1320" dirty="0">
+              <a:rPr lang="en-US" sz="1220" dirty="0">
                 <a:solidFill>
                   <a:srgbClr val="17364A"/>
                 </a:solidFill>
@@ -12575,7 +12575,7 @@
               </a:rPr>
               <a:t>1. What does an API allow systems to do?</a:t>
             </a:r>
-            <a:endParaRPr lang="en-US" sz="1320" dirty="0"/>
+            <a:endParaRPr lang="en-US" sz="1220" dirty="0"/>
           </a:p>
         </p:txBody>
       </p:sp>
@@ -12587,12 +12587,12 @@
         </p:nvSpPr>
         <p:spPr>
           <a:xfrm>
-            <a:off x="7635240" y="2670048"/>
-            <a:ext cx="3474720" cy="1377086"/>
+            <a:off x="7543800" y="2724912"/>
+            <a:ext cx="3611880" cy="1527048"/>
           </a:xfrm>
           <a:prstGeom prst="roundRect">
             <a:avLst>
-              <a:gd name="adj" fmla="val 7968"/>
+              <a:gd name="adj" fmla="val 7186"/>
             </a:avLst>
           </a:prstGeom>
           <a:solidFill>
@@ -12614,8 +12614,8 @@
         </p:nvSpPr>
         <p:spPr>
           <a:xfrm>
-            <a:off x="7799832" y="2816352"/>
-            <a:ext cx="3145536" cy="256032"/>
+            <a:off x="7708392" y="2852928"/>
+            <a:ext cx="3282696" cy="228600"/>
           </a:xfrm>
           <a:prstGeom prst="rect">
             <a:avLst/>
@@ -12631,7 +12631,7 @@
               <a:buNone/>
             </a:pPr>
             <a:r>
-              <a:rPr lang="en-US" sz="1300" b="1" dirty="0">
+              <a:rPr lang="en-US" sz="1220" b="1" dirty="0">
                 <a:solidFill>
                   <a:srgbClr val="0068B7"/>
                 </a:solidFill>
@@ -12641,7 +12641,7 @@
               </a:rPr>
               <a:t>Concept checkpoints</a:t>
             </a:r>
-            <a:endParaRPr lang="en-US" sz="1300" dirty="0"/>
+            <a:endParaRPr lang="en-US" sz="1220" dirty="0"/>
           </a:p>
         </p:txBody>
       </p:sp>
@@ -12653,8 +12653,8 @@
         </p:nvSpPr>
         <p:spPr>
           <a:xfrm>
-            <a:off x="7818120" y="3182112"/>
-            <a:ext cx="3090672" cy="718718"/>
+            <a:off x="7726680" y="3182112"/>
+            <a:ext cx="3227832" cy="960120"/>
           </a:xfrm>
           <a:prstGeom prst="rect">
             <a:avLst/>
@@ -12672,7 +12672,7 @@
               <a:buNone/>
             </a:pPr>
             <a:r>
-              <a:rPr lang="en-US" sz="1220" dirty="0">
+              <a:rPr lang="en-US" sz="1140" dirty="0">
                 <a:solidFill>
                   <a:srgbClr val="17364A"/>
                 </a:solidFill>
@@ -12682,14 +12682,14 @@
               </a:rPr>
               <a:t>1.</a:t>
             </a:r>
-            <a:endParaRPr lang="en-US" sz="1220" dirty="0"/>
-          </a:p>
-          <a:p>
-            <a:pPr indent="0" marL="0">
-              <a:buNone/>
-            </a:pPr>
-            <a:r>
-              <a:rPr lang="en-US" sz="1220" dirty="0">
+            <a:endParaRPr lang="en-US" sz="1140" dirty="0"/>
+          </a:p>
+          <a:p>
+            <a:pPr indent="0" marL="0">
+              <a:buNone/>
+            </a:pPr>
+            <a:r>
+              <a:rPr lang="en-US" sz="1140" dirty="0">
                 <a:solidFill>
                   <a:srgbClr val="17364A"/>
                 </a:solidFill>
@@ -12699,14 +12699,14 @@
               </a:rPr>
               <a:t>What does an API allow systems to do?</a:t>
             </a:r>
-            <a:endParaRPr lang="en-US" sz="1220" dirty="0"/>
-          </a:p>
-          <a:p>
-            <a:pPr indent="0" marL="0">
-              <a:buNone/>
-            </a:pPr>
-            <a:r>
-              <a:rPr lang="en-US" sz="1220" dirty="0">
+            <a:endParaRPr lang="en-US" sz="1140" dirty="0"/>
+          </a:p>
+          <a:p>
+            <a:pPr indent="0" marL="0">
+              <a:buNone/>
+            </a:pPr>
+            <a:r>
+              <a:rPr lang="en-US" sz="1140" dirty="0">
                 <a:solidFill>
                   <a:srgbClr val="17364A"/>
                 </a:solidFill>
@@ -12716,7 +12716,7 @@
               </a:rPr>
               <a:t>2.</a:t>
             </a:r>
-            <a:endParaRPr lang="en-US" sz="1220" dirty="0"/>
+            <a:endParaRPr lang="en-US" sz="1140" dirty="0"/>
           </a:p>
         </p:txBody>
       </p:sp>
@@ -12728,12 +12728,12 @@
         </p:nvSpPr>
         <p:spPr>
           <a:xfrm>
-            <a:off x="7635240" y="4184294"/>
-            <a:ext cx="3474720" cy="1466698"/>
+            <a:off x="7543800" y="4389120"/>
+            <a:ext cx="3611880" cy="1261872"/>
           </a:xfrm>
           <a:prstGeom prst="roundRect">
             <a:avLst>
-              <a:gd name="adj" fmla="val 7481"/>
+              <a:gd name="adj" fmla="val 8696"/>
             </a:avLst>
           </a:prstGeom>
           <a:solidFill>
@@ -12755,8 +12755,8 @@
         </p:nvSpPr>
         <p:spPr>
           <a:xfrm>
-            <a:off x="7799832" y="4330598"/>
-            <a:ext cx="3145536" cy="256032"/>
+            <a:off x="7708392" y="4517136"/>
+            <a:ext cx="3282696" cy="228600"/>
           </a:xfrm>
           <a:prstGeom prst="rect">
             <a:avLst/>
@@ -12772,7 +12772,7 @@
               <a:buNone/>
             </a:pPr>
             <a:r>
-              <a:rPr lang="en-US" sz="1300" b="1" dirty="0">
+              <a:rPr lang="en-US" sz="1220" b="1" dirty="0">
                 <a:solidFill>
                   <a:srgbClr val="0068B7"/>
                 </a:solidFill>
@@ -12782,7 +12782,7 @@
               </a:rPr>
               <a:t>Next action</a:t>
             </a:r>
-            <a:endParaRPr lang="en-US" sz="1300" dirty="0"/>
+            <a:endParaRPr lang="en-US" sz="1220" dirty="0"/>
           </a:p>
         </p:txBody>
       </p:sp>
@@ -12794,8 +12794,8 @@
         </p:nvSpPr>
         <p:spPr>
           <a:xfrm>
-            <a:off x="7799832" y="4659782"/>
-            <a:ext cx="3145536" cy="899770"/>
+            <a:off x="7708392" y="4828032"/>
+            <a:ext cx="3282696" cy="749808"/>
           </a:xfrm>
           <a:prstGeom prst="rect">
             <a:avLst/>
@@ -12813,7 +12813,7 @@
               <a:buNone/>
             </a:pPr>
             <a:r>
-              <a:rPr lang="en-US" sz="1320" dirty="0">
+              <a:rPr lang="en-US" sz="1220" dirty="0">
                 <a:solidFill>
                   <a:srgbClr val="17364A"/>
                 </a:solidFill>
@@ -12821,9 +12821,9 @@
                 <a:ea typeface="Aptos" pitchFamily="34" charset="-122"/>
                 <a:cs typeface="Aptos" pitchFamily="34" charset="-120"/>
               </a:rPr>
-              <a:t>Use the assignment to test whether you can explain the concept, apply it to a realistic public health situation, and identify what would need review before the work moves forward.</a:t>
-            </a:r>
-            <a:endParaRPr lang="en-US" sz="1320" dirty="0"/>
+              <a:t>Use the assignment to test whether you can explain the concept, apply it to a.</a:t>
+            </a:r>
+            <a:endParaRPr lang="en-US" sz="1220" dirty="0"/>
           </a:p>
         </p:txBody>
       </p:sp>
@@ -13114,8 +13114,8 @@
         </p:nvSpPr>
         <p:spPr>
           <a:xfrm>
-            <a:off x="868680" y="1508760"/>
-            <a:ext cx="6309360" cy="4160520"/>
+            <a:off x="822960" y="1463040"/>
+            <a:ext cx="6565392" cy="4343400"/>
           </a:xfrm>
           <a:prstGeom prst="rect">
             <a:avLst/>
@@ -13133,7 +13133,7 @@
               <a:buNone/>
             </a:pPr>
             <a:r>
-              <a:rPr lang="en-US" sz="2100" dirty="0">
+              <a:rPr lang="en-US" sz="1920" dirty="0">
                 <a:solidFill>
                   <a:srgbClr val="003A63"/>
                 </a:solidFill>
@@ -13143,14 +13143,14 @@
               </a:rPr>
               <a:t>• HL7 FHIR API documentation: https://hl7.org/fhir/</a:t>
             </a:r>
-            <a:endParaRPr lang="en-US" sz="2100" dirty="0"/>
-          </a:p>
-          <a:p>
-            <a:pPr indent="0" marL="0">
-              <a:buNone/>
-            </a:pPr>
-            <a:r>
-              <a:rPr lang="en-US" sz="2100" dirty="0">
+            <a:endParaRPr lang="en-US" sz="1920" dirty="0"/>
+          </a:p>
+          <a:p>
+            <a:pPr indent="0" marL="0">
+              <a:buNone/>
+            </a:pPr>
+            <a:r>
+              <a:rPr lang="en-US" sz="1920" dirty="0">
                 <a:solidFill>
                   <a:srgbClr val="003A63"/>
                 </a:solidFill>
@@ -13160,14 +13160,14 @@
               </a:rPr>
               <a:t>• ONC interoperability resources</a:t>
             </a:r>
-            <a:endParaRPr lang="en-US" sz="2100" dirty="0"/>
-          </a:p>
-          <a:p>
-            <a:pPr indent="0" marL="0">
-              <a:buNone/>
-            </a:pPr>
-            <a:r>
-              <a:rPr lang="en-US" sz="2100" dirty="0">
+            <a:endParaRPr lang="en-US" sz="1920" dirty="0"/>
+          </a:p>
+          <a:p>
+            <a:pPr indent="0" marL="0">
+              <a:buNone/>
+            </a:pPr>
+            <a:r>
+              <a:rPr lang="en-US" sz="1920" dirty="0">
                 <a:solidFill>
                   <a:srgbClr val="003A63"/>
                 </a:solidFill>
@@ -13177,7 +13177,7 @@
               </a:rPr>
               <a:t>• Agency cybersecurity and access control policies</a:t>
             </a:r>
-            <a:endParaRPr lang="en-US" sz="2100" dirty="0"/>
+            <a:endParaRPr lang="en-US" sz="1920" dirty="0"/>
           </a:p>
         </p:txBody>
       </p:sp>
@@ -13189,12 +13189,12 @@
         </p:nvSpPr>
         <p:spPr>
           <a:xfrm>
-            <a:off x="7635240" y="1325880"/>
-            <a:ext cx="3474720" cy="1207008"/>
+            <a:off x="7543800" y="1325880"/>
+            <a:ext cx="3611880" cy="1261872"/>
           </a:xfrm>
           <a:prstGeom prst="roundRect">
             <a:avLst>
-              <a:gd name="adj" fmla="val 9091"/>
+              <a:gd name="adj" fmla="val 8696"/>
             </a:avLst>
           </a:prstGeom>
           <a:solidFill>
@@ -13216,8 +13216,8 @@
         </p:nvSpPr>
         <p:spPr>
           <a:xfrm>
-            <a:off x="7799832" y="1472184"/>
-            <a:ext cx="3145536" cy="256032"/>
+            <a:off x="7708392" y="1453896"/>
+            <a:ext cx="3282696" cy="228600"/>
           </a:xfrm>
           <a:prstGeom prst="rect">
             <a:avLst/>
@@ -13233,7 +13233,7 @@
               <a:buNone/>
             </a:pPr>
             <a:r>
-              <a:rPr lang="en-US" sz="1300" b="1" dirty="0">
+              <a:rPr lang="en-US" sz="1220" b="1" dirty="0">
                 <a:solidFill>
                   <a:srgbClr val="0068B7"/>
                 </a:solidFill>
@@ -13243,7 +13243,7 @@
               </a:rPr>
               <a:t>Implementation cue</a:t>
             </a:r>
-            <a:endParaRPr lang="en-US" sz="1300" dirty="0"/>
+            <a:endParaRPr lang="en-US" sz="1220" dirty="0"/>
           </a:p>
         </p:txBody>
       </p:sp>
@@ -13255,8 +13255,8 @@
         </p:nvSpPr>
         <p:spPr>
           <a:xfrm>
-            <a:off x="7799832" y="1801368"/>
-            <a:ext cx="3145536" cy="640080"/>
+            <a:off x="7708392" y="1764792"/>
+            <a:ext cx="3282696" cy="749808"/>
           </a:xfrm>
           <a:prstGeom prst="rect">
             <a:avLst/>
@@ -13274,7 +13274,7 @@
               <a:buNone/>
             </a:pPr>
             <a:r>
-              <a:rPr lang="en-US" sz="1320" dirty="0">
+              <a:rPr lang="en-US" sz="1220" dirty="0">
                 <a:solidFill>
                   <a:srgbClr val="17364A"/>
                 </a:solidFill>
@@ -13284,7 +13284,7 @@
               </a:rPr>
               <a:t>HL7 FHIR API documentation: https://hl7.org/fhir/</a:t>
             </a:r>
-            <a:endParaRPr lang="en-US" sz="1320" dirty="0"/>
+            <a:endParaRPr lang="en-US" sz="1220" dirty="0"/>
           </a:p>
         </p:txBody>
       </p:sp>
@@ -13296,12 +13296,12 @@
         </p:nvSpPr>
         <p:spPr>
           <a:xfrm>
-            <a:off x="7635240" y="2670048"/>
-            <a:ext cx="3474720" cy="1377086"/>
+            <a:off x="7543800" y="2724912"/>
+            <a:ext cx="3611880" cy="1527048"/>
           </a:xfrm>
           <a:prstGeom prst="roundRect">
             <a:avLst>
-              <a:gd name="adj" fmla="val 7968"/>
+              <a:gd name="adj" fmla="val 7186"/>
             </a:avLst>
           </a:prstGeom>
           <a:solidFill>
@@ -13323,8 +13323,8 @@
         </p:nvSpPr>
         <p:spPr>
           <a:xfrm>
-            <a:off x="7799832" y="2816352"/>
-            <a:ext cx="3145536" cy="256032"/>
+            <a:off x="7708392" y="2852928"/>
+            <a:ext cx="3282696" cy="228600"/>
           </a:xfrm>
           <a:prstGeom prst="rect">
             <a:avLst/>
@@ -13340,7 +13340,7 @@
               <a:buNone/>
             </a:pPr>
             <a:r>
-              <a:rPr lang="en-US" sz="1300" b="1" dirty="0">
+              <a:rPr lang="en-US" sz="1220" b="1" dirty="0">
                 <a:solidFill>
                   <a:srgbClr val="0068B7"/>
                 </a:solidFill>
@@ -13350,7 +13350,7 @@
               </a:rPr>
               <a:t>Concept checkpoints</a:t>
             </a:r>
-            <a:endParaRPr lang="en-US" sz="1300" dirty="0"/>
+            <a:endParaRPr lang="en-US" sz="1220" dirty="0"/>
           </a:p>
         </p:txBody>
       </p:sp>
@@ -13362,8 +13362,8 @@
         </p:nvSpPr>
         <p:spPr>
           <a:xfrm>
-            <a:off x="7818120" y="3182112"/>
-            <a:ext cx="3090672" cy="718718"/>
+            <a:off x="7726680" y="3182112"/>
+            <a:ext cx="3227832" cy="960120"/>
           </a:xfrm>
           <a:prstGeom prst="rect">
             <a:avLst/>
@@ -13381,7 +13381,7 @@
               <a:buNone/>
             </a:pPr>
             <a:r>
-              <a:rPr lang="en-US" sz="1220" dirty="0">
+              <a:rPr lang="en-US" sz="1140" dirty="0">
                 <a:solidFill>
                   <a:srgbClr val="17364A"/>
                 </a:solidFill>
@@ -13391,14 +13391,14 @@
               </a:rPr>
               <a:t>HL7 FHIR API documentation: https://hl7.org/fhir/</a:t>
             </a:r>
-            <a:endParaRPr lang="en-US" sz="1220" dirty="0"/>
-          </a:p>
-          <a:p>
-            <a:pPr indent="0" marL="0">
-              <a:buNone/>
-            </a:pPr>
-            <a:r>
-              <a:rPr lang="en-US" sz="1220" dirty="0">
+            <a:endParaRPr lang="en-US" sz="1140" dirty="0"/>
+          </a:p>
+          <a:p>
+            <a:pPr indent="0" marL="0">
+              <a:buNone/>
+            </a:pPr>
+            <a:r>
+              <a:rPr lang="en-US" sz="1140" dirty="0">
                 <a:solidFill>
                   <a:srgbClr val="17364A"/>
                 </a:solidFill>
@@ -13408,14 +13408,14 @@
               </a:rPr>
               <a:t>ONC interoperability resources</a:t>
             </a:r>
-            <a:endParaRPr lang="en-US" sz="1220" dirty="0"/>
-          </a:p>
-          <a:p>
-            <a:pPr indent="0" marL="0">
-              <a:buNone/>
-            </a:pPr>
-            <a:r>
-              <a:rPr lang="en-US" sz="1220" dirty="0">
+            <a:endParaRPr lang="en-US" sz="1140" dirty="0"/>
+          </a:p>
+          <a:p>
+            <a:pPr indent="0" marL="0">
+              <a:buNone/>
+            </a:pPr>
+            <a:r>
+              <a:rPr lang="en-US" sz="1140" dirty="0">
                 <a:solidFill>
                   <a:srgbClr val="17364A"/>
                 </a:solidFill>
@@ -13425,7 +13425,7 @@
               </a:rPr>
               <a:t>Agency cybersecurity and access control policies</a:t>
             </a:r>
-            <a:endParaRPr lang="en-US" sz="1220" dirty="0"/>
+            <a:endParaRPr lang="en-US" sz="1140" dirty="0"/>
           </a:p>
         </p:txBody>
       </p:sp>
@@ -13437,12 +13437,12 @@
         </p:nvSpPr>
         <p:spPr>
           <a:xfrm>
-            <a:off x="7635240" y="4184294"/>
-            <a:ext cx="3474720" cy="1466698"/>
+            <a:off x="7543800" y="4389120"/>
+            <a:ext cx="3611880" cy="1261872"/>
           </a:xfrm>
           <a:prstGeom prst="roundRect">
             <a:avLst>
-              <a:gd name="adj" fmla="val 7481"/>
+              <a:gd name="adj" fmla="val 8696"/>
             </a:avLst>
           </a:prstGeom>
           <a:solidFill>
@@ -13464,8 +13464,8 @@
         </p:nvSpPr>
         <p:spPr>
           <a:xfrm>
-            <a:off x="7799832" y="4330598"/>
-            <a:ext cx="3145536" cy="256032"/>
+            <a:off x="7708392" y="4517136"/>
+            <a:ext cx="3282696" cy="228600"/>
           </a:xfrm>
           <a:prstGeom prst="rect">
             <a:avLst/>
@@ -13481,7 +13481,7 @@
               <a:buNone/>
             </a:pPr>
             <a:r>
-              <a:rPr lang="en-US" sz="1300" b="1" dirty="0">
+              <a:rPr lang="en-US" sz="1220" b="1" dirty="0">
                 <a:solidFill>
                   <a:srgbClr val="0068B7"/>
                 </a:solidFill>
@@ -13491,7 +13491,7 @@
               </a:rPr>
               <a:t>Next action</a:t>
             </a:r>
-            <a:endParaRPr lang="en-US" sz="1300" dirty="0"/>
+            <a:endParaRPr lang="en-US" sz="1220" dirty="0"/>
           </a:p>
         </p:txBody>
       </p:sp>
@@ -13503,8 +13503,8 @@
         </p:nvSpPr>
         <p:spPr>
           <a:xfrm>
-            <a:off x="7799832" y="4659782"/>
-            <a:ext cx="3145536" cy="899770"/>
+            <a:off x="7708392" y="4828032"/>
+            <a:ext cx="3282696" cy="749808"/>
           </a:xfrm>
           <a:prstGeom prst="rect">
             <a:avLst/>
@@ -13522,7 +13522,7 @@
               <a:buNone/>
             </a:pPr>
             <a:r>
-              <a:rPr lang="en-US" sz="1320" dirty="0">
+              <a:rPr lang="en-US" sz="1220" dirty="0">
                 <a:solidFill>
                   <a:srgbClr val="17364A"/>
                 </a:solidFill>
@@ -13530,9 +13530,9 @@
                 <a:ea typeface="Aptos" pitchFamily="34" charset="-122"/>
                 <a:cs typeface="Aptos" pitchFamily="34" charset="-120"/>
               </a:rPr>
-              <a:t>Use the concept to clarify workflow changes, dependencies, staffing, procurement requirements, training needs, and implementation checkpoints.</a:t>
-            </a:r>
-            <a:endParaRPr lang="en-US" sz="1320" dirty="0"/>
+              <a:t>Use the concept to clarify workflow changes, dependencies, staffing, procurement.</a:t>
+            </a:r>
+            <a:endParaRPr lang="en-US" sz="1220" dirty="0"/>
           </a:p>
         </p:txBody>
       </p:sp>
@@ -13850,7 +13850,7 @@
                 <a:ea typeface="Aptos" pitchFamily="34" charset="-122"/>
                 <a:cs typeface="Aptos" pitchFamily="34" charset="-120"/>
               </a:rPr>
-              <a:t>• Play 11: Build and Deploy AI Solutions - This lesson informs Play 11 by helping learners.</a:t>
+              <a:t>• Play 11: Build and Deploy AI Solutions - This lesson informs Play 11 by.</a:t>
             </a:r>
             <a:endParaRPr lang="en-US" sz="1900" dirty="0"/>
           </a:p>
@@ -13867,7 +13867,7 @@
                 <a:ea typeface="Aptos" pitchFamily="34" charset="-122"/>
                 <a:cs typeface="Aptos" pitchFamily="34" charset="-120"/>
               </a:rPr>
-              <a:t>• Play 2: Readiness Assessment - This lesson informs Play 2 by helping learners connect the.</a:t>
+              <a:t>• Play 2: Readiness Assessment - This lesson informs Play 2 by helping.</a:t>
             </a:r>
             <a:endParaRPr lang="en-US" sz="1900" dirty="0"/>
           </a:p>
@@ -13884,7 +13884,7 @@
                 <a:ea typeface="Aptos" pitchFamily="34" charset="-122"/>
                 <a:cs typeface="Aptos" pitchFamily="34" charset="-120"/>
               </a:rPr>
-              <a:t>• Play 1: Vision &amp; Guardrails - This lesson informs Play 1 by helping learners connect the.</a:t>
+              <a:t>• Play 1: Vision &amp; Guardrails - This lesson informs Play 1 by helping learners.</a:t>
             </a:r>
             <a:endParaRPr lang="en-US" sz="1900" dirty="0"/>
           </a:p>
@@ -13901,7 +13901,7 @@
                 <a:ea typeface="Aptos" pitchFamily="34" charset="-122"/>
                 <a:cs typeface="Aptos" pitchFamily="34" charset="-120"/>
               </a:rPr>
-              <a:t>• Play 7: Prioritize Use Cases - This lesson informs Play 7 by helping learners connect the.</a:t>
+              <a:t>• Play 7: Prioritize Use Cases - This lesson informs Play 7 by helping.</a:t>
             </a:r>
             <a:endParaRPr lang="en-US" sz="1900" dirty="0"/>
           </a:p>
@@ -13942,8 +13942,8 @@
         </p:nvSpPr>
         <p:spPr>
           <a:xfrm>
-            <a:off x="8211312" y="1563624"/>
-            <a:ext cx="2734056" cy="256032"/>
+            <a:off x="8211312" y="1545336"/>
+            <a:ext cx="2734056" cy="228600"/>
           </a:xfrm>
           <a:prstGeom prst="rect">
             <a:avLst/>
@@ -13959,7 +13959,7 @@
               <a:buNone/>
             </a:pPr>
             <a:r>
-              <a:rPr lang="en-US" sz="1300" b="1" dirty="0">
+              <a:rPr lang="en-US" sz="1220" b="1" dirty="0">
                 <a:solidFill>
                   <a:srgbClr val="0068B7"/>
                 </a:solidFill>
@@ -13969,7 +13969,7 @@
               </a:rPr>
               <a:t>Apply the lesson</a:t>
             </a:r>
-            <a:endParaRPr lang="en-US" sz="1300" dirty="0"/>
+            <a:endParaRPr lang="en-US" sz="1220" dirty="0"/>
           </a:p>
         </p:txBody>
       </p:sp>
@@ -13981,8 +13981,8 @@
         </p:nvSpPr>
         <p:spPr>
           <a:xfrm>
-            <a:off x="8211312" y="1892808"/>
-            <a:ext cx="2734056" cy="1536192"/>
+            <a:off x="8211312" y="1856232"/>
+            <a:ext cx="2734056" cy="1591056"/>
           </a:xfrm>
           <a:prstGeom prst="rect">
             <a:avLst/>
@@ -14000,7 +14000,7 @@
               <a:buNone/>
             </a:pPr>
             <a:r>
-              <a:rPr lang="en-US" sz="1320" dirty="0">
+              <a:rPr lang="en-US" sz="1220" dirty="0">
                 <a:solidFill>
                   <a:srgbClr val="17364A"/>
                 </a:solidFill>
@@ -14008,9 +14008,9 @@
                 <a:ea typeface="Aptos" pitchFamily="34" charset="-122"/>
                 <a:cs typeface="Aptos" pitchFamily="34" charset="-120"/>
               </a:rPr>
-              <a:t>Use the related plays to identify decisions, participants, timing, approvals, and documentation needed for responsible implementation.</a:t>
-            </a:r>
-            <a:endParaRPr lang="en-US" sz="1320" dirty="0"/>
+              <a:t>Use the related plays to identify decisions, participants, timing, approvals,.</a:t>
+            </a:r>
+            <a:endParaRPr lang="en-US" sz="1220" dirty="0"/>
           </a:p>
         </p:txBody>
       </p:sp>
@@ -14049,8 +14049,8 @@
         </p:nvSpPr>
         <p:spPr>
           <a:xfrm>
-            <a:off x="8211312" y="3941064"/>
-            <a:ext cx="2734056" cy="256032"/>
+            <a:off x="8211312" y="3922776"/>
+            <a:ext cx="2734056" cy="228600"/>
           </a:xfrm>
           <a:prstGeom prst="rect">
             <a:avLst/>
@@ -14066,7 +14066,7 @@
               <a:buNone/>
             </a:pPr>
             <a:r>
-              <a:rPr lang="en-US" sz="1300" b="1" dirty="0">
+              <a:rPr lang="en-US" sz="1220" b="1" dirty="0">
                 <a:solidFill>
                   <a:srgbClr val="0068B7"/>
                 </a:solidFill>
@@ -14076,7 +14076,7 @@
               </a:rPr>
               <a:t>Use the play links to</a:t>
             </a:r>
-            <a:endParaRPr lang="en-US" sz="1300" dirty="0"/>
+            <a:endParaRPr lang="en-US" sz="1220" dirty="0"/>
           </a:p>
         </p:txBody>
       </p:sp>
@@ -14088,8 +14088,8 @@
         </p:nvSpPr>
         <p:spPr>
           <a:xfrm>
-            <a:off x="8229600" y="4306824"/>
-            <a:ext cx="2679192" cy="941832"/>
+            <a:off x="8229600" y="4251960"/>
+            <a:ext cx="2679192" cy="1033272"/>
           </a:xfrm>
           <a:prstGeom prst="rect">
             <a:avLst/>
@@ -14107,7 +14107,7 @@
               <a:buNone/>
             </a:pPr>
             <a:r>
-              <a:rPr lang="en-US" sz="1220" dirty="0">
+              <a:rPr lang="en-US" sz="1140" dirty="0">
                 <a:solidFill>
                   <a:srgbClr val="17364A"/>
                 </a:solidFill>
@@ -14117,14 +14117,14 @@
               </a:rPr>
               <a:t>Locate the decision point in the playbook sequence.</a:t>
             </a:r>
-            <a:endParaRPr lang="en-US" sz="1220" dirty="0"/>
-          </a:p>
-          <a:p>
-            <a:pPr indent="0" marL="0">
-              <a:buNone/>
-            </a:pPr>
-            <a:r>
-              <a:rPr lang="en-US" sz="1220" dirty="0">
+            <a:endParaRPr lang="en-US" sz="1140" dirty="0"/>
+          </a:p>
+          <a:p>
+            <a:pPr indent="0" marL="0">
+              <a:buNone/>
+            </a:pPr>
+            <a:r>
+              <a:rPr lang="en-US" sz="1140" dirty="0">
                 <a:solidFill>
                   <a:srgbClr val="17364A"/>
                 </a:solidFill>
@@ -14134,14 +14134,14 @@
               </a:rPr>
               <a:t>Identify who should participate in the work.</a:t>
             </a:r>
-            <a:endParaRPr lang="en-US" sz="1220" dirty="0"/>
-          </a:p>
-          <a:p>
-            <a:pPr indent="0" marL="0">
-              <a:buNone/>
-            </a:pPr>
-            <a:r>
-              <a:rPr lang="en-US" sz="1220" dirty="0">
+            <a:endParaRPr lang="en-US" sz="1140" dirty="0"/>
+          </a:p>
+          <a:p>
+            <a:pPr indent="0" marL="0">
+              <a:buNone/>
+            </a:pPr>
+            <a:r>
+              <a:rPr lang="en-US" sz="1140" dirty="0">
                 <a:solidFill>
                   <a:srgbClr val="17364A"/>
                 </a:solidFill>
@@ -14149,9 +14149,9 @@
                 <a:ea typeface="Aptos" pitchFamily="34" charset="-122"/>
                 <a:cs typeface="Aptos" pitchFamily="34" charset="-120"/>
               </a:rPr>
-              <a:t>Document the review, approval, or implementation step.</a:t>
-            </a:r>
-            <a:endParaRPr lang="en-US" sz="1220" dirty="0"/>
+              <a:t>Document the review, approval, or implementation.</a:t>
+            </a:r>
+            <a:endParaRPr lang="en-US" sz="1140" dirty="0"/>
           </a:p>
         </p:txBody>
       </p:sp>
@@ -14469,7 +14469,7 @@
                 <a:ea typeface="Aptos" pitchFamily="34" charset="-122"/>
                 <a:cs typeface="Aptos" pitchFamily="34" charset="-120"/>
               </a:rPr>
-              <a:t>• Tool 4: AI Policy Landscape Scan (Worksheet) - Use AI Policy Landscape Scan to translate this.</a:t>
+              <a:t>• Tool 4: AI Policy Landscape Scan (Worksheet) - Use AI Policy Landscape Scan.</a:t>
             </a:r>
             <a:endParaRPr lang="en-US" sz="1850" dirty="0"/>
           </a:p>
@@ -14486,7 +14486,7 @@
                 <a:ea typeface="Aptos" pitchFamily="34" charset="-122"/>
                 <a:cs typeface="Aptos" pitchFamily="34" charset="-120"/>
               </a:rPr>
-              <a:t>• Tool 5: AI Environmental and Resource Impact Review (Checklist) - Use AI Environmental and.</a:t>
+              <a:t>• Tool 5: AI Environmental and Resource Impact Review (Checklist) - Use AI.</a:t>
             </a:r>
             <a:endParaRPr lang="en-US" sz="1850" dirty="0"/>
           </a:p>
@@ -14503,7 +14503,7 @@
                 <a:ea typeface="Aptos" pitchFamily="34" charset="-122"/>
                 <a:cs typeface="Aptos" pitchFamily="34" charset="-120"/>
               </a:rPr>
-              <a:t>• Tool 6: Human-Centered AI Decision Rule Checklist (Checklist) - Use Human-Centered AI Decision.</a:t>
+              <a:t>• Tool 6: Human-Centered AI Decision Rule Checklist (Checklist) - Use.</a:t>
             </a:r>
             <a:endParaRPr lang="en-US" sz="1850" dirty="0"/>
           </a:p>
@@ -14520,7 +14520,7 @@
                 <a:ea typeface="Aptos" pitchFamily="34" charset="-122"/>
                 <a:cs typeface="Aptos" pitchFamily="34" charset="-120"/>
               </a:rPr>
-              <a:t>• Tool 8: AI Project Charter (Planning) - Use AI Project Charter to translate this lesson into a.</a:t>
+              <a:t>• Tool 8: AI Project Charter (Planning) - Use AI Project Charter to translate.</a:t>
             </a:r>
             <a:endParaRPr lang="en-US" sz="1850" dirty="0"/>
           </a:p>
@@ -14561,8 +14561,8 @@
         </p:nvSpPr>
         <p:spPr>
           <a:xfrm>
-            <a:off x="8211312" y="1563624"/>
-            <a:ext cx="2734056" cy="256032"/>
+            <a:off x="8211312" y="1545336"/>
+            <a:ext cx="2734056" cy="228600"/>
           </a:xfrm>
           <a:prstGeom prst="rect">
             <a:avLst/>
@@ -14578,7 +14578,7 @@
               <a:buNone/>
             </a:pPr>
             <a:r>
-              <a:rPr lang="en-US" sz="1300" b="1" dirty="0">
+              <a:rPr lang="en-US" sz="1220" b="1" dirty="0">
                 <a:solidFill>
                   <a:srgbClr val="0068B7"/>
                 </a:solidFill>
@@ -14588,7 +14588,7 @@
               </a:rPr>
               <a:t>Use the tools</a:t>
             </a:r>
-            <a:endParaRPr lang="en-US" sz="1300" dirty="0"/>
+            <a:endParaRPr lang="en-US" sz="1220" dirty="0"/>
           </a:p>
         </p:txBody>
       </p:sp>
@@ -14600,8 +14600,8 @@
         </p:nvSpPr>
         <p:spPr>
           <a:xfrm>
-            <a:off x="8211312" y="1892808"/>
-            <a:ext cx="2734056" cy="1536192"/>
+            <a:off x="8211312" y="1856232"/>
+            <a:ext cx="2734056" cy="1591056"/>
           </a:xfrm>
           <a:prstGeom prst="rect">
             <a:avLst/>
@@ -14619,7 +14619,7 @@
               <a:buNone/>
             </a:pPr>
             <a:r>
-              <a:rPr lang="en-US" sz="1320" dirty="0">
+              <a:rPr lang="en-US" sz="1220" dirty="0">
                 <a:solidFill>
                   <a:srgbClr val="17364A"/>
                 </a:solidFill>
@@ -14627,9 +14627,9 @@
                 <a:ea typeface="Aptos" pitchFamily="34" charset="-122"/>
                 <a:cs typeface="Aptos" pitchFamily="34" charset="-120"/>
               </a:rPr>
-              <a:t>Use linked tools when your department needs a structured worksheet, template, checklist, review process, or documentation artifact.</a:t>
-            </a:r>
-            <a:endParaRPr lang="en-US" sz="1320" dirty="0"/>
+              <a:t>Use linked tools when your department needs a structured worksheet, template,.</a:t>
+            </a:r>
+            <a:endParaRPr lang="en-US" sz="1220" dirty="0"/>
           </a:p>
         </p:txBody>
       </p:sp>
@@ -14668,8 +14668,8 @@
         </p:nvSpPr>
         <p:spPr>
           <a:xfrm>
-            <a:off x="8211312" y="3941064"/>
-            <a:ext cx="2734056" cy="256032"/>
+            <a:off x="8211312" y="3922776"/>
+            <a:ext cx="2734056" cy="228600"/>
           </a:xfrm>
           <a:prstGeom prst="rect">
             <a:avLst/>
@@ -14685,7 +14685,7 @@
               <a:buNone/>
             </a:pPr>
             <a:r>
-              <a:rPr lang="en-US" sz="1300" b="1" dirty="0">
+              <a:rPr lang="en-US" sz="1220" b="1" dirty="0">
                 <a:solidFill>
                   <a:srgbClr val="0068B7"/>
                 </a:solidFill>
@@ -14695,7 +14695,7 @@
               </a:rPr>
               <a:t>Tool selection cues</a:t>
             </a:r>
-            <a:endParaRPr lang="en-US" sz="1300" dirty="0"/>
+            <a:endParaRPr lang="en-US" sz="1220" dirty="0"/>
           </a:p>
         </p:txBody>
       </p:sp>
@@ -14707,8 +14707,8 @@
         </p:nvSpPr>
         <p:spPr>
           <a:xfrm>
-            <a:off x="8229600" y="4306824"/>
-            <a:ext cx="2679192" cy="941832"/>
+            <a:off x="8229600" y="4251960"/>
+            <a:ext cx="2679192" cy="1033272"/>
           </a:xfrm>
           <a:prstGeom prst="rect">
             <a:avLst/>
@@ -14726,7 +14726,7 @@
               <a:buNone/>
             </a:pPr>
             <a:r>
-              <a:rPr lang="en-US" sz="1220" dirty="0">
+              <a:rPr lang="en-US" sz="1140" dirty="0">
                 <a:solidFill>
                   <a:srgbClr val="17364A"/>
                 </a:solidFill>
@@ -14736,14 +14736,14 @@
               </a:rPr>
               <a:t>Use a tool when no comparable local process exists.</a:t>
             </a:r>
-            <a:endParaRPr lang="en-US" sz="1220" dirty="0"/>
-          </a:p>
-          <a:p>
-            <a:pPr indent="0" marL="0">
-              <a:buNone/>
-            </a:pPr>
-            <a:r>
-              <a:rPr lang="en-US" sz="1220" dirty="0">
+            <a:endParaRPr lang="en-US" sz="1140" dirty="0"/>
+          </a:p>
+          <a:p>
+            <a:pPr indent="0" marL="0">
+              <a:buNone/>
+            </a:pPr>
+            <a:r>
+              <a:rPr lang="en-US" sz="1140" dirty="0">
                 <a:solidFill>
                   <a:srgbClr val="17364A"/>
                 </a:solidFill>
@@ -14751,16 +14751,16 @@
                 <a:ea typeface="Aptos" pitchFamily="34" charset="-122"/>
                 <a:cs typeface="Aptos" pitchFamily="34" charset="-120"/>
               </a:rPr>
-              <a:t>Adapt existing department templates when they already fit the.</a:t>
-            </a:r>
-            <a:endParaRPr lang="en-US" sz="1220" dirty="0"/>
-          </a:p>
-          <a:p>
-            <a:pPr indent="0" marL="0">
-              <a:buNone/>
-            </a:pPr>
-            <a:r>
-              <a:rPr lang="en-US" sz="1220" dirty="0">
+              <a:t>Adapt existing department templates when they.</a:t>
+            </a:r>
+            <a:endParaRPr lang="en-US" sz="1140" dirty="0"/>
+          </a:p>
+          <a:p>
+            <a:pPr indent="0" marL="0">
+              <a:buNone/>
+            </a:pPr>
+            <a:r>
+              <a:rPr lang="en-US" sz="1140" dirty="0">
                 <a:solidFill>
                   <a:srgbClr val="17364A"/>
                 </a:solidFill>
@@ -14768,9 +14768,9 @@
                 <a:ea typeface="Aptos" pitchFamily="34" charset="-122"/>
                 <a:cs typeface="Aptos" pitchFamily="34" charset="-120"/>
               </a:rPr>
-              <a:t>Save the completed artifact as evidence of the decision.</a:t>
-            </a:r>
-            <a:endParaRPr lang="en-US" sz="1220" dirty="0"/>
+              <a:t>Save the completed artifact as evidence of the.</a:t>
+            </a:r>
+            <a:endParaRPr lang="en-US" sz="1140" dirty="0"/>
           </a:p>
         </p:txBody>
       </p:sp>
@@ -15061,8 +15061,8 @@
         </p:nvSpPr>
         <p:spPr>
           <a:xfrm>
-            <a:off x="868680" y="1508760"/>
-            <a:ext cx="6309360" cy="4160520"/>
+            <a:off x="822960" y="1463040"/>
+            <a:ext cx="6565392" cy="4343400"/>
           </a:xfrm>
           <a:prstGeom prst="rect">
             <a:avLst/>
@@ -15080,7 +15080,7 @@
               <a:buNone/>
             </a:pPr>
             <a:r>
-              <a:rPr lang="en-US" sz="2100" dirty="0">
+              <a:rPr lang="en-US" sz="1920" dirty="0">
                 <a:solidFill>
                   <a:srgbClr val="003A63"/>
                 </a:solidFill>
@@ -15090,14 +15090,14 @@
               </a:rPr>
               <a:t>• Explain what APIs, webhooks, and event-driven workflows do.</a:t>
             </a:r>
-            <a:endParaRPr lang="en-US" sz="2100" dirty="0"/>
-          </a:p>
-          <a:p>
-            <a:pPr indent="0" marL="0">
-              <a:buNone/>
-            </a:pPr>
-            <a:r>
-              <a:rPr lang="en-US" sz="2100" dirty="0">
+            <a:endParaRPr lang="en-US" sz="1920" dirty="0"/>
+          </a:p>
+          <a:p>
+            <a:pPr indent="0" marL="0">
+              <a:buNone/>
+            </a:pPr>
+            <a:r>
+              <a:rPr lang="en-US" sz="1920" dirty="0">
                 <a:solidFill>
                   <a:srgbClr val="003A63"/>
                 </a:solidFill>
@@ -15107,14 +15107,14 @@
               </a:rPr>
               <a:t>• Distinguish between read-only access, write-back, and triggered actions.</a:t>
             </a:r>
-            <a:endParaRPr lang="en-US" sz="2100" dirty="0"/>
-          </a:p>
-          <a:p>
-            <a:pPr indent="0" marL="0">
-              <a:buNone/>
-            </a:pPr>
-            <a:r>
-              <a:rPr lang="en-US" sz="2100" dirty="0">
+            <a:endParaRPr lang="en-US" sz="1920" dirty="0"/>
+          </a:p>
+          <a:p>
+            <a:pPr indent="0" marL="0">
+              <a:buNone/>
+            </a:pPr>
+            <a:r>
+              <a:rPr lang="en-US" sz="1920" dirty="0">
                 <a:solidFill>
                   <a:srgbClr val="003A63"/>
                 </a:solidFill>
@@ -15122,9 +15122,9 @@
                 <a:ea typeface="Aptos" pitchFamily="34" charset="-122"/>
                 <a:cs typeface="Aptos" pitchFamily="34" charset="-120"/>
               </a:rPr>
-              <a:t>• Identify security, privacy, logging, and access-control requirements for AI integrations.</a:t>
-            </a:r>
-            <a:endParaRPr lang="en-US" sz="2100" dirty="0"/>
+              <a:t>• Identify security, privacy, logging, and access-control requirements for AI.</a:t>
+            </a:r>
+            <a:endParaRPr lang="en-US" sz="1920" dirty="0"/>
           </a:p>
         </p:txBody>
       </p:sp>
@@ -15136,12 +15136,12 @@
         </p:nvSpPr>
         <p:spPr>
           <a:xfrm>
-            <a:off x="7635240" y="1325880"/>
-            <a:ext cx="3474720" cy="1207008"/>
+            <a:off x="7543800" y="1325880"/>
+            <a:ext cx="3611880" cy="1261872"/>
           </a:xfrm>
           <a:prstGeom prst="roundRect">
             <a:avLst>
-              <a:gd name="adj" fmla="val 9091"/>
+              <a:gd name="adj" fmla="val 8696"/>
             </a:avLst>
           </a:prstGeom>
           <a:solidFill>
@@ -15163,8 +15163,8 @@
         </p:nvSpPr>
         <p:spPr>
           <a:xfrm>
-            <a:off x="7799832" y="1472184"/>
-            <a:ext cx="3145536" cy="256032"/>
+            <a:off x="7708392" y="1453896"/>
+            <a:ext cx="3282696" cy="228600"/>
           </a:xfrm>
           <a:prstGeom prst="rect">
             <a:avLst/>
@@ -15180,7 +15180,7 @@
               <a:buNone/>
             </a:pPr>
             <a:r>
-              <a:rPr lang="en-US" sz="1300" b="1" dirty="0">
+              <a:rPr lang="en-US" sz="1220" b="1" dirty="0">
                 <a:solidFill>
                   <a:srgbClr val="0068B7"/>
                 </a:solidFill>
@@ -15190,7 +15190,7 @@
               </a:rPr>
               <a:t>Implementation cue</a:t>
             </a:r>
-            <a:endParaRPr lang="en-US" sz="1300" dirty="0"/>
+            <a:endParaRPr lang="en-US" sz="1220" dirty="0"/>
           </a:p>
         </p:txBody>
       </p:sp>
@@ -15202,8 +15202,8 @@
         </p:nvSpPr>
         <p:spPr>
           <a:xfrm>
-            <a:off x="7799832" y="1801368"/>
-            <a:ext cx="3145536" cy="640080"/>
+            <a:off x="7708392" y="1764792"/>
+            <a:ext cx="3282696" cy="749808"/>
           </a:xfrm>
           <a:prstGeom prst="rect">
             <a:avLst/>
@@ -15221,7 +15221,7 @@
               <a:buNone/>
             </a:pPr>
             <a:r>
-              <a:rPr lang="en-US" sz="1320" dirty="0">
+              <a:rPr lang="en-US" sz="1220" dirty="0">
                 <a:solidFill>
                   <a:srgbClr val="17364A"/>
                 </a:solidFill>
@@ -15231,7 +15231,7 @@
               </a:rPr>
               <a:t>Explain what APIs, webhooks, and event-driven workflows do.</a:t>
             </a:r>
-            <a:endParaRPr lang="en-US" sz="1320" dirty="0"/>
+            <a:endParaRPr lang="en-US" sz="1220" dirty="0"/>
           </a:p>
         </p:txBody>
       </p:sp>
@@ -15243,12 +15243,12 @@
         </p:nvSpPr>
         <p:spPr>
           <a:xfrm>
-            <a:off x="7635240" y="2670048"/>
-            <a:ext cx="3474720" cy="1377086"/>
+            <a:off x="7543800" y="2724912"/>
+            <a:ext cx="3611880" cy="1527048"/>
           </a:xfrm>
           <a:prstGeom prst="roundRect">
             <a:avLst>
-              <a:gd name="adj" fmla="val 7968"/>
+              <a:gd name="adj" fmla="val 7186"/>
             </a:avLst>
           </a:prstGeom>
           <a:solidFill>
@@ -15270,8 +15270,8 @@
         </p:nvSpPr>
         <p:spPr>
           <a:xfrm>
-            <a:off x="7799832" y="2816352"/>
-            <a:ext cx="3145536" cy="256032"/>
+            <a:off x="7708392" y="2852928"/>
+            <a:ext cx="3282696" cy="228600"/>
           </a:xfrm>
           <a:prstGeom prst="rect">
             <a:avLst/>
@@ -15287,7 +15287,7 @@
               <a:buNone/>
             </a:pPr>
             <a:r>
-              <a:rPr lang="en-US" sz="1300" b="1" dirty="0">
+              <a:rPr lang="en-US" sz="1220" b="1" dirty="0">
                 <a:solidFill>
                   <a:srgbClr val="0068B7"/>
                 </a:solidFill>
@@ -15297,7 +15297,7 @@
               </a:rPr>
               <a:t>Concept checkpoints</a:t>
             </a:r>
-            <a:endParaRPr lang="en-US" sz="1300" dirty="0"/>
+            <a:endParaRPr lang="en-US" sz="1220" dirty="0"/>
           </a:p>
         </p:txBody>
       </p:sp>
@@ -15309,8 +15309,8 @@
         </p:nvSpPr>
         <p:spPr>
           <a:xfrm>
-            <a:off x="7818120" y="3182112"/>
-            <a:ext cx="3090672" cy="718718"/>
+            <a:off x="7726680" y="3182112"/>
+            <a:ext cx="3227832" cy="960120"/>
           </a:xfrm>
           <a:prstGeom prst="rect">
             <a:avLst/>
@@ -15328,7 +15328,7 @@
               <a:buNone/>
             </a:pPr>
             <a:r>
-              <a:rPr lang="en-US" sz="1220" dirty="0">
+              <a:rPr lang="en-US" sz="1140" dirty="0">
                 <a:solidFill>
                   <a:srgbClr val="17364A"/>
                 </a:solidFill>
@@ -15336,16 +15336,16 @@
                 <a:ea typeface="Aptos" pitchFamily="34" charset="-122"/>
                 <a:cs typeface="Aptos" pitchFamily="34" charset="-120"/>
               </a:rPr>
-              <a:t>Assess where human approval is required before an AI-triggered.</a:t>
-            </a:r>
-            <a:endParaRPr lang="en-US" sz="1220" dirty="0"/>
-          </a:p>
-          <a:p>
-            <a:pPr indent="0" marL="0">
-              <a:buNone/>
-            </a:pPr>
-            <a:r>
-              <a:rPr lang="en-US" sz="1220" dirty="0">
+              <a:t>Assess where human approval is required before an.</a:t>
+            </a:r>
+            <a:endParaRPr lang="en-US" sz="1140" dirty="0"/>
+          </a:p>
+          <a:p>
+            <a:pPr indent="0" marL="0">
+              <a:buNone/>
+            </a:pPr>
+            <a:r>
+              <a:rPr lang="en-US" sz="1140" dirty="0">
                 <a:solidFill>
                   <a:srgbClr val="17364A"/>
                 </a:solidFill>
@@ -15355,7 +15355,7 @@
               </a:rPr>
               <a:t>Produce an API and event workflow review worksheet.</a:t>
             </a:r>
-            <a:endParaRPr lang="en-US" sz="1220" dirty="0"/>
+            <a:endParaRPr lang="en-US" sz="1140" dirty="0"/>
           </a:p>
         </p:txBody>
       </p:sp>
@@ -15367,12 +15367,12 @@
         </p:nvSpPr>
         <p:spPr>
           <a:xfrm>
-            <a:off x="7635240" y="4184294"/>
-            <a:ext cx="3474720" cy="1466698"/>
+            <a:off x="7543800" y="4389120"/>
+            <a:ext cx="3611880" cy="1261872"/>
           </a:xfrm>
           <a:prstGeom prst="roundRect">
             <a:avLst>
-              <a:gd name="adj" fmla="val 7481"/>
+              <a:gd name="adj" fmla="val 8696"/>
             </a:avLst>
           </a:prstGeom>
           <a:solidFill>
@@ -15394,8 +15394,8 @@
         </p:nvSpPr>
         <p:spPr>
           <a:xfrm>
-            <a:off x="7799832" y="4330598"/>
-            <a:ext cx="3145536" cy="256032"/>
+            <a:off x="7708392" y="4517136"/>
+            <a:ext cx="3282696" cy="228600"/>
           </a:xfrm>
           <a:prstGeom prst="rect">
             <a:avLst/>
@@ -15411,7 +15411,7 @@
               <a:buNone/>
             </a:pPr>
             <a:r>
-              <a:rPr lang="en-US" sz="1300" b="1" dirty="0">
+              <a:rPr lang="en-US" sz="1220" b="1" dirty="0">
                 <a:solidFill>
                   <a:srgbClr val="0068B7"/>
                 </a:solidFill>
@@ -15421,7 +15421,7 @@
               </a:rPr>
               <a:t>Next action</a:t>
             </a:r>
-            <a:endParaRPr lang="en-US" sz="1300" dirty="0"/>
+            <a:endParaRPr lang="en-US" sz="1220" dirty="0"/>
           </a:p>
         </p:txBody>
       </p:sp>
@@ -15433,8 +15433,8 @@
         </p:nvSpPr>
         <p:spPr>
           <a:xfrm>
-            <a:off x="7799832" y="4659782"/>
-            <a:ext cx="3145536" cy="899770"/>
+            <a:off x="7708392" y="4828032"/>
+            <a:ext cx="3282696" cy="749808"/>
           </a:xfrm>
           <a:prstGeom prst="rect">
             <a:avLst/>
@@ -15452,7 +15452,7 @@
               <a:buNone/>
             </a:pPr>
             <a:r>
-              <a:rPr lang="en-US" sz="1320" dirty="0">
+              <a:rPr lang="en-US" sz="1220" dirty="0">
                 <a:solidFill>
                   <a:srgbClr val="17364A"/>
                 </a:solidFill>
@@ -15460,9 +15460,9 @@
                 <a:ea typeface="Aptos" pitchFamily="34" charset="-122"/>
                 <a:cs typeface="Aptos" pitchFamily="34" charset="-120"/>
               </a:rPr>
-              <a:t>Use the assignment to test whether you can explain the concept, apply it to a realistic public health situation, and identify what would need review before the work moves forward.</a:t>
-            </a:r>
-            <a:endParaRPr lang="en-US" sz="1320" dirty="0"/>
+              <a:t>Use the assignment to test whether you can explain the concept, apply it to a.</a:t>
+            </a:r>
+            <a:endParaRPr lang="en-US" sz="1220" dirty="0"/>
           </a:p>
         </p:txBody>
       </p:sp>
@@ -15753,8 +15753,8 @@
         </p:nvSpPr>
         <p:spPr>
           <a:xfrm>
-            <a:off x="868680" y="1508760"/>
-            <a:ext cx="6309360" cy="4160520"/>
+            <a:off x="822960" y="1463040"/>
+            <a:ext cx="6565392" cy="4343400"/>
           </a:xfrm>
           <a:prstGeom prst="rect">
             <a:avLst/>
@@ -15772,7 +15772,7 @@
               <a:buNone/>
             </a:pPr>
             <a:r>
-              <a:rPr lang="en-US" sz="2100" dirty="0">
+              <a:rPr lang="en-US" sz="1920" dirty="0">
                 <a:solidFill>
                   <a:srgbClr val="003A63"/>
                 </a:solidFill>
@@ -15780,16 +15780,16 @@
                 <a:ea typeface="Aptos" pitchFamily="34" charset="-122"/>
                 <a:cs typeface="Aptos" pitchFamily="34" charset="-120"/>
               </a:rPr>
-              <a:t>• APIs, webhooks, and event-driven workflows are the mechanisms that allow systems to interact.</a:t>
-            </a:r>
-            <a:endParaRPr lang="en-US" sz="2100" dirty="0"/>
-          </a:p>
-          <a:p>
-            <a:pPr indent="0" marL="0">
-              <a:buNone/>
-            </a:pPr>
-            <a:r>
-              <a:rPr lang="en-US" sz="2100" dirty="0">
+              <a:t>• APIs, webhooks, and event-driven workflows are the mechanisms that allow.</a:t>
+            </a:r>
+            <a:endParaRPr lang="en-US" sz="1920" dirty="0"/>
+          </a:p>
+          <a:p>
+            <a:pPr indent="0" marL="0">
+              <a:buNone/>
+            </a:pPr>
+            <a:r>
+              <a:rPr lang="en-US" sz="1920" dirty="0">
                 <a:solidFill>
                   <a:srgbClr val="003A63"/>
                 </a:solidFill>
@@ -15797,16 +15797,16 @@
                 <a:ea typeface="Aptos" pitchFamily="34" charset="-122"/>
                 <a:cs typeface="Aptos" pitchFamily="34" charset="-120"/>
               </a:rPr>
-              <a:t>• They are especially important for AI because many AI tools need to retrieve data, send.</a:t>
-            </a:r>
-            <a:endParaRPr lang="en-US" sz="2100" dirty="0"/>
-          </a:p>
-          <a:p>
-            <a:pPr indent="0" marL="0">
-              <a:buNone/>
-            </a:pPr>
-            <a:r>
-              <a:rPr lang="en-US" sz="2100" dirty="0">
+              <a:t>• They are especially important for AI because many AI tools need to retrieve.</a:t>
+            </a:r>
+            <a:endParaRPr lang="en-US" sz="1920" dirty="0"/>
+          </a:p>
+          <a:p>
+            <a:pPr indent="0" marL="0">
+              <a:buNone/>
+            </a:pPr>
+            <a:r>
+              <a:rPr lang="en-US" sz="1920" dirty="0">
                 <a:solidFill>
                   <a:srgbClr val="003A63"/>
                 </a:solidFill>
@@ -15814,9 +15814,9 @@
                 <a:ea typeface="Aptos" pitchFamily="34" charset="-122"/>
                 <a:cs typeface="Aptos" pitchFamily="34" charset="-120"/>
               </a:rPr>
-              <a:t>• This module teaches non-developer public health staff enough technical understanding to.</a:t>
-            </a:r>
-            <a:endParaRPr lang="en-US" sz="2100" dirty="0"/>
+              <a:t>• This module teaches non-developer public health staff enough technical.</a:t>
+            </a:r>
+            <a:endParaRPr lang="en-US" sz="1920" dirty="0"/>
           </a:p>
         </p:txBody>
       </p:sp>
@@ -15828,12 +15828,12 @@
         </p:nvSpPr>
         <p:spPr>
           <a:xfrm>
-            <a:off x="7635240" y="1325880"/>
-            <a:ext cx="3474720" cy="1207008"/>
+            <a:off x="7543800" y="1325880"/>
+            <a:ext cx="3611880" cy="1261872"/>
           </a:xfrm>
           <a:prstGeom prst="roundRect">
             <a:avLst>
-              <a:gd name="adj" fmla="val 9091"/>
+              <a:gd name="adj" fmla="val 8696"/>
             </a:avLst>
           </a:prstGeom>
           <a:solidFill>
@@ -15855,8 +15855,8 @@
         </p:nvSpPr>
         <p:spPr>
           <a:xfrm>
-            <a:off x="7799832" y="1472184"/>
-            <a:ext cx="3145536" cy="256032"/>
+            <a:off x="7708392" y="1453896"/>
+            <a:ext cx="3282696" cy="228600"/>
           </a:xfrm>
           <a:prstGeom prst="rect">
             <a:avLst/>
@@ -15872,7 +15872,7 @@
               <a:buNone/>
             </a:pPr>
             <a:r>
-              <a:rPr lang="en-US" sz="1300" b="1" dirty="0">
+              <a:rPr lang="en-US" sz="1220" b="1" dirty="0">
                 <a:solidFill>
                   <a:srgbClr val="0068B7"/>
                 </a:solidFill>
@@ -15882,7 +15882,7 @@
               </a:rPr>
               <a:t>Implementation cue</a:t>
             </a:r>
-            <a:endParaRPr lang="en-US" sz="1300" dirty="0"/>
+            <a:endParaRPr lang="en-US" sz="1220" dirty="0"/>
           </a:p>
         </p:txBody>
       </p:sp>
@@ -15894,8 +15894,8 @@
         </p:nvSpPr>
         <p:spPr>
           <a:xfrm>
-            <a:off x="7799832" y="1801368"/>
-            <a:ext cx="3145536" cy="640080"/>
+            <a:off x="7708392" y="1764792"/>
+            <a:ext cx="3282696" cy="749808"/>
           </a:xfrm>
           <a:prstGeom prst="rect">
             <a:avLst/>
@@ -15913,7 +15913,7 @@
               <a:buNone/>
             </a:pPr>
             <a:r>
-              <a:rPr lang="en-US" sz="1320" dirty="0">
+              <a:rPr lang="en-US" sz="1220" dirty="0">
                 <a:solidFill>
                   <a:srgbClr val="17364A"/>
                 </a:solidFill>
@@ -15921,9 +15921,9 @@
                 <a:ea typeface="Aptos" pitchFamily="34" charset="-122"/>
                 <a:cs typeface="Aptos" pitchFamily="34" charset="-120"/>
               </a:rPr>
-              <a:t>APIs, webhooks, and event-driven workflows are the mechanisms that allow systems to.</a:t>
-            </a:r>
-            <a:endParaRPr lang="en-US" sz="1320" dirty="0"/>
+              <a:t>APIs, webhooks, and event-driven workflows are the mechanisms that allow systems.</a:t>
+            </a:r>
+            <a:endParaRPr lang="en-US" sz="1220" dirty="0"/>
           </a:p>
         </p:txBody>
       </p:sp>
@@ -15935,12 +15935,12 @@
         </p:nvSpPr>
         <p:spPr>
           <a:xfrm>
-            <a:off x="7635240" y="2670048"/>
-            <a:ext cx="3474720" cy="1377086"/>
+            <a:off x="7543800" y="2724912"/>
+            <a:ext cx="3611880" cy="1527048"/>
           </a:xfrm>
           <a:prstGeom prst="roundRect">
             <a:avLst>
-              <a:gd name="adj" fmla="val 7968"/>
+              <a:gd name="adj" fmla="val 7186"/>
             </a:avLst>
           </a:prstGeom>
           <a:solidFill>
@@ -15962,24 +15962,26 @@
         </p:nvSpPr>
         <p:spPr>
           <a:xfrm>
-            <a:off x="7799832" y="2798064"/>
-            <a:ext cx="3145536" cy="237744"/>
-          </a:xfrm>
-          <a:prstGeom prst="rect">
-            <a:avLst/>
-          </a:prstGeom>
-          <a:noFill/>
-          <a:ln/>
-        </p:spPr>
-        <p:txBody>
-          <a:bodyPr wrap="square" lIns="0" tIns="0" rIns="0" bIns="0" rtlCol="0" anchor="ctr"/>
-          <a:lstStyle/>
-          <a:p>
-            <a:pPr indent="0" marL="0">
-              <a:buNone/>
-            </a:pPr>
-            <a:r>
-              <a:rPr lang="en-US" sz="1250" b="1" dirty="0">
+            <a:off x="7708392" y="2852928"/>
+            <a:ext cx="3282696" cy="219456"/>
+          </a:xfrm>
+          <a:prstGeom prst="rect">
+            <a:avLst/>
+          </a:prstGeom>
+          <a:noFill/>
+          <a:ln/>
+        </p:spPr>
+        <p:txBody>
+          <a:bodyPr wrap="square" lIns="0" tIns="0" rIns="0" bIns="0" rtlCol="0" anchor="ctr">
+            <a:normAutofit/>
+          </a:bodyPr>
+          <a:lstStyle/>
+          <a:p>
+            <a:pPr indent="0" marL="0">
+              <a:buNone/>
+            </a:pPr>
+            <a:r>
+              <a:rPr lang="en-US" sz="1160" b="1" dirty="0">
                 <a:solidFill>
                   <a:srgbClr val="0068B7"/>
                 </a:solidFill>
@@ -15989,7 +15991,7 @@
               </a:rPr>
               <a:t>Implementation path</a:t>
             </a:r>
-            <a:endParaRPr lang="en-US" sz="1250" dirty="0"/>
+            <a:endParaRPr lang="en-US" sz="1160" dirty="0"/>
           </a:p>
         </p:txBody>
       </p:sp>
@@ -16001,7 +16003,7 @@
         </p:nvSpPr>
         <p:spPr>
           <a:xfrm>
-            <a:off x="8763000" y="3351276"/>
+            <a:off x="8717280" y="3406140"/>
             <a:ext cx="164592" cy="0"/>
           </a:xfrm>
           <a:prstGeom prst="line">
@@ -16024,8 +16026,8 @@
         </p:nvSpPr>
         <p:spPr>
           <a:xfrm>
-            <a:off x="7872984" y="3200400"/>
-            <a:ext cx="890016" cy="301752"/>
+            <a:off x="7781544" y="3255264"/>
+            <a:ext cx="935736" cy="301752"/>
           </a:xfrm>
           <a:prstGeom prst="roundRect">
             <a:avLst>
@@ -16051,8 +16053,8 @@
         </p:nvSpPr>
         <p:spPr>
           <a:xfrm>
-            <a:off x="7909560" y="3273552"/>
-            <a:ext cx="816864" cy="146304"/>
+            <a:off x="7818120" y="3328416"/>
+            <a:ext cx="862584" cy="146304"/>
           </a:xfrm>
           <a:prstGeom prst="rect">
             <a:avLst/>
@@ -16092,7 +16094,7 @@
         </p:nvSpPr>
         <p:spPr>
           <a:xfrm>
-            <a:off x="9817608" y="3351276"/>
+            <a:off x="9817608" y="3406140"/>
             <a:ext cx="164592" cy="0"/>
           </a:xfrm>
           <a:prstGeom prst="line">
@@ -16115,8 +16117,8 @@
         </p:nvSpPr>
         <p:spPr>
           <a:xfrm>
-            <a:off x="8927592" y="3200400"/>
-            <a:ext cx="890016" cy="301752"/>
+            <a:off x="8881872" y="3255264"/>
+            <a:ext cx="935736" cy="301752"/>
           </a:xfrm>
           <a:prstGeom prst="roundRect">
             <a:avLst>
@@ -16142,8 +16144,8 @@
         </p:nvSpPr>
         <p:spPr>
           <a:xfrm>
-            <a:off x="8964168" y="3273552"/>
-            <a:ext cx="816864" cy="146304"/>
+            <a:off x="8918448" y="3328416"/>
+            <a:ext cx="862584" cy="146304"/>
           </a:xfrm>
           <a:prstGeom prst="rect">
             <a:avLst/>
@@ -16183,8 +16185,8 @@
         </p:nvSpPr>
         <p:spPr>
           <a:xfrm>
-            <a:off x="9982200" y="3200400"/>
-            <a:ext cx="890016" cy="301752"/>
+            <a:off x="9982200" y="3255264"/>
+            <a:ext cx="935736" cy="301752"/>
           </a:xfrm>
           <a:prstGeom prst="roundRect">
             <a:avLst>
@@ -16210,8 +16212,8 @@
         </p:nvSpPr>
         <p:spPr>
           <a:xfrm>
-            <a:off x="10018776" y="3273552"/>
-            <a:ext cx="816864" cy="146304"/>
+            <a:off x="10018776" y="3328416"/>
+            <a:ext cx="862584" cy="146304"/>
           </a:xfrm>
           <a:prstGeom prst="rect">
             <a:avLst/>
@@ -16251,8 +16253,8 @@
         </p:nvSpPr>
         <p:spPr>
           <a:xfrm>
-            <a:off x="7854696" y="3694176"/>
-            <a:ext cx="3035808" cy="206654"/>
+            <a:off x="7763256" y="3749040"/>
+            <a:ext cx="3172968" cy="356616"/>
           </a:xfrm>
           <a:prstGeom prst="rect">
             <a:avLst/>
@@ -16270,7 +16272,7 @@
               <a:buNone/>
             </a:pPr>
             <a:r>
-              <a:rPr lang="en-US" sz="1120" dirty="0">
+              <a:rPr lang="en-US" sz="1040" dirty="0">
                 <a:solidFill>
                   <a:srgbClr val="17364A"/>
                 </a:solidFill>
@@ -16278,9 +16280,9 @@
                 <a:ea typeface="Aptos" pitchFamily="34" charset="-122"/>
                 <a:cs typeface="Aptos" pitchFamily="34" charset="-120"/>
               </a:rPr>
-              <a:t>Implementation work should make dependencies, approvals, training, and sustainment visible before launch.</a:t>
-            </a:r>
-            <a:endParaRPr lang="en-US" sz="1120" dirty="0"/>
+              <a:t>Implementation work should make dependencies, approvals, training, and.</a:t>
+            </a:r>
+            <a:endParaRPr lang="en-US" sz="1040" dirty="0"/>
           </a:p>
         </p:txBody>
       </p:sp>
@@ -16292,12 +16294,12 @@
         </p:nvSpPr>
         <p:spPr>
           <a:xfrm>
-            <a:off x="7635240" y="4184294"/>
-            <a:ext cx="3474720" cy="1466698"/>
+            <a:off x="7543800" y="4389120"/>
+            <a:ext cx="3611880" cy="1261872"/>
           </a:xfrm>
           <a:prstGeom prst="roundRect">
             <a:avLst>
-              <a:gd name="adj" fmla="val 7481"/>
+              <a:gd name="adj" fmla="val 8696"/>
             </a:avLst>
           </a:prstGeom>
           <a:solidFill>
@@ -16319,8 +16321,8 @@
         </p:nvSpPr>
         <p:spPr>
           <a:xfrm>
-            <a:off x="7799832" y="4330598"/>
-            <a:ext cx="3145536" cy="256032"/>
+            <a:off x="7708392" y="4517136"/>
+            <a:ext cx="3282696" cy="228600"/>
           </a:xfrm>
           <a:prstGeom prst="rect">
             <a:avLst/>
@@ -16336,7 +16338,7 @@
               <a:buNone/>
             </a:pPr>
             <a:r>
-              <a:rPr lang="en-US" sz="1300" b="1" dirty="0">
+              <a:rPr lang="en-US" sz="1220" b="1" dirty="0">
                 <a:solidFill>
                   <a:srgbClr val="0068B7"/>
                 </a:solidFill>
@@ -16346,7 +16348,7 @@
               </a:rPr>
               <a:t>Next action</a:t>
             </a:r>
-            <a:endParaRPr lang="en-US" sz="1300" dirty="0"/>
+            <a:endParaRPr lang="en-US" sz="1220" dirty="0"/>
           </a:p>
         </p:txBody>
       </p:sp>
@@ -16358,8 +16360,8 @@
         </p:nvSpPr>
         <p:spPr>
           <a:xfrm>
-            <a:off x="7799832" y="4659782"/>
-            <a:ext cx="3145536" cy="899770"/>
+            <a:off x="7708392" y="4828032"/>
+            <a:ext cx="3282696" cy="749808"/>
           </a:xfrm>
           <a:prstGeom prst="rect">
             <a:avLst/>
@@ -16377,7 +16379,7 @@
               <a:buNone/>
             </a:pPr>
             <a:r>
-              <a:rPr lang="en-US" sz="1320" dirty="0">
+              <a:rPr lang="en-US" sz="1220" dirty="0">
                 <a:solidFill>
                   <a:srgbClr val="17364A"/>
                 </a:solidFill>
@@ -16385,9 +16387,9 @@
                 <a:ea typeface="Aptos" pitchFamily="34" charset="-122"/>
                 <a:cs typeface="Aptos" pitchFamily="34" charset="-120"/>
               </a:rPr>
-              <a:t>Use the concept to clarify workflow changes, dependencies, staffing, procurement requirements, training needs, and implementation checkpoints.</a:t>
-            </a:r>
-            <a:endParaRPr lang="en-US" sz="1320" dirty="0"/>
+              <a:t>Use the concept to clarify workflow changes, dependencies, staffing, procurement.</a:t>
+            </a:r>
+            <a:endParaRPr lang="en-US" sz="1220" dirty="0"/>
           </a:p>
         </p:txBody>
       </p:sp>
@@ -16678,8 +16680,8 @@
         </p:nvSpPr>
         <p:spPr>
           <a:xfrm>
-            <a:off x="868680" y="1508760"/>
-            <a:ext cx="6309360" cy="4160520"/>
+            <a:off x="822960" y="1463040"/>
+            <a:ext cx="6565392" cy="4343400"/>
           </a:xfrm>
           <a:prstGeom prst="rect">
             <a:avLst/>
@@ -16697,7 +16699,7 @@
               <a:buNone/>
             </a:pPr>
             <a:r>
-              <a:rPr lang="en-US" sz="2100" dirty="0">
+              <a:rPr lang="en-US" sz="1920" dirty="0">
                 <a:solidFill>
                   <a:srgbClr val="003A63"/>
                 </a:solidFill>
@@ -16707,14 +16709,14 @@
               </a:rPr>
               <a:t>• This national-level module is intended for training and planning purposes.</a:t>
             </a:r>
-            <a:endParaRPr lang="en-US" sz="2100" dirty="0"/>
-          </a:p>
-          <a:p>
-            <a:pPr indent="0" marL="0">
-              <a:buNone/>
-            </a:pPr>
-            <a:r>
-              <a:rPr lang="en-US" sz="2100" dirty="0">
+            <a:endParaRPr lang="en-US" sz="1920" dirty="0"/>
+          </a:p>
+          <a:p>
+            <a:pPr indent="0" marL="0">
+              <a:buNone/>
+            </a:pPr>
+            <a:r>
+              <a:rPr lang="en-US" sz="1920" dirty="0">
                 <a:solidFill>
                   <a:srgbClr val="003A63"/>
                 </a:solidFill>
@@ -16722,16 +16724,16 @@
                 <a:ea typeface="Aptos" pitchFamily="34" charset="-122"/>
                 <a:cs typeface="Aptos" pitchFamily="34" charset="-120"/>
               </a:rPr>
-              <a:t>• It does not replace legal, privacy, procurement, civil rights, records, or agency policy review.</a:t>
-            </a:r>
-            <a:endParaRPr lang="en-US" sz="2100" dirty="0"/>
-          </a:p>
-          <a:p>
-            <a:pPr indent="0" marL="0">
-              <a:buNone/>
-            </a:pPr>
-            <a:r>
-              <a:rPr lang="en-US" sz="2100" dirty="0">
+              <a:t>• It does not replace legal, privacy, procurement, civil rights, records, or.</a:t>
+            </a:r>
+            <a:endParaRPr lang="en-US" sz="1920" dirty="0"/>
+          </a:p>
+          <a:p>
+            <a:pPr indent="0" marL="0">
+              <a:buNone/>
+            </a:pPr>
+            <a:r>
+              <a:rPr lang="en-US" sz="1920" dirty="0">
                 <a:solidFill>
                   <a:srgbClr val="003A63"/>
                 </a:solidFill>
@@ -16739,9 +16741,9 @@
                 <a:ea typeface="Aptos" pitchFamily="34" charset="-122"/>
                 <a:cs typeface="Aptos" pitchFamily="34" charset="-120"/>
               </a:rPr>
-              <a:t>• Learners should confirm applicable requirements in their own jurisdiction and organization.</a:t>
-            </a:r>
-            <a:endParaRPr lang="en-US" sz="2100" dirty="0"/>
+              <a:t>• Learners should confirm applicable requirements in their own jurisdiction.</a:t>
+            </a:r>
+            <a:endParaRPr lang="en-US" sz="1920" dirty="0"/>
           </a:p>
         </p:txBody>
       </p:sp>
@@ -16753,12 +16755,12 @@
         </p:nvSpPr>
         <p:spPr>
           <a:xfrm>
-            <a:off x="7635240" y="1325880"/>
-            <a:ext cx="3474720" cy="1207008"/>
+            <a:off x="7543800" y="1325880"/>
+            <a:ext cx="3611880" cy="1261872"/>
           </a:xfrm>
           <a:prstGeom prst="roundRect">
             <a:avLst>
-              <a:gd name="adj" fmla="val 9091"/>
+              <a:gd name="adj" fmla="val 8696"/>
             </a:avLst>
           </a:prstGeom>
           <a:solidFill>
@@ -16780,8 +16782,8 @@
         </p:nvSpPr>
         <p:spPr>
           <a:xfrm>
-            <a:off x="7799832" y="1472184"/>
-            <a:ext cx="3145536" cy="256032"/>
+            <a:off x="7708392" y="1453896"/>
+            <a:ext cx="3282696" cy="228600"/>
           </a:xfrm>
           <a:prstGeom prst="rect">
             <a:avLst/>
@@ -16797,7 +16799,7 @@
               <a:buNone/>
             </a:pPr>
             <a:r>
-              <a:rPr lang="en-US" sz="1300" b="1" dirty="0">
+              <a:rPr lang="en-US" sz="1220" b="1" dirty="0">
                 <a:solidFill>
                   <a:srgbClr val="0068B7"/>
                 </a:solidFill>
@@ -16807,7 +16809,7 @@
               </a:rPr>
               <a:t>Governance lens</a:t>
             </a:r>
-            <a:endParaRPr lang="en-US" sz="1300" dirty="0"/>
+            <a:endParaRPr lang="en-US" sz="1220" dirty="0"/>
           </a:p>
         </p:txBody>
       </p:sp>
@@ -16819,8 +16821,8 @@
         </p:nvSpPr>
         <p:spPr>
           <a:xfrm>
-            <a:off x="7799832" y="1801368"/>
-            <a:ext cx="3145536" cy="640080"/>
+            <a:off x="7708392" y="1764792"/>
+            <a:ext cx="3282696" cy="749808"/>
           </a:xfrm>
           <a:prstGeom prst="rect">
             <a:avLst/>
@@ -16838,7 +16840,7 @@
               <a:buNone/>
             </a:pPr>
             <a:r>
-              <a:rPr lang="en-US" sz="1320" dirty="0">
+              <a:rPr lang="en-US" sz="1220" dirty="0">
                 <a:solidFill>
                   <a:srgbClr val="17364A"/>
                 </a:solidFill>
@@ -16848,7 +16850,7 @@
               </a:rPr>
               <a:t>This national-level module is intended for training and planning purposes.</a:t>
             </a:r>
-            <a:endParaRPr lang="en-US" sz="1320" dirty="0"/>
+            <a:endParaRPr lang="en-US" sz="1220" dirty="0"/>
           </a:p>
         </p:txBody>
       </p:sp>
@@ -16860,12 +16862,12 @@
         </p:nvSpPr>
         <p:spPr>
           <a:xfrm>
-            <a:off x="7635240" y="2670048"/>
-            <a:ext cx="3474720" cy="1377086"/>
+            <a:off x="7543800" y="2724912"/>
+            <a:ext cx="3611880" cy="1527048"/>
           </a:xfrm>
           <a:prstGeom prst="roundRect">
             <a:avLst>
-              <a:gd name="adj" fmla="val 7968"/>
+              <a:gd name="adj" fmla="val 7186"/>
             </a:avLst>
           </a:prstGeom>
           <a:solidFill>
@@ -16887,24 +16889,26 @@
         </p:nvSpPr>
         <p:spPr>
           <a:xfrm>
-            <a:off x="7799832" y="2798064"/>
-            <a:ext cx="3145536" cy="237744"/>
-          </a:xfrm>
-          <a:prstGeom prst="rect">
-            <a:avLst/>
-          </a:prstGeom>
-          <a:noFill/>
-          <a:ln/>
-        </p:spPr>
-        <p:txBody>
-          <a:bodyPr wrap="square" lIns="0" tIns="0" rIns="0" bIns="0" rtlCol="0" anchor="ctr"/>
-          <a:lstStyle/>
-          <a:p>
-            <a:pPr indent="0" marL="0">
-              <a:buNone/>
-            </a:pPr>
-            <a:r>
-              <a:rPr lang="en-US" sz="1250" b="1" dirty="0">
+            <a:off x="7708392" y="2852928"/>
+            <a:ext cx="3282696" cy="219456"/>
+          </a:xfrm>
+          <a:prstGeom prst="rect">
+            <a:avLst/>
+          </a:prstGeom>
+          <a:noFill/>
+          <a:ln/>
+        </p:spPr>
+        <p:txBody>
+          <a:bodyPr wrap="square" lIns="0" tIns="0" rIns="0" bIns="0" rtlCol="0" anchor="ctr">
+            <a:normAutofit/>
+          </a:bodyPr>
+          <a:lstStyle/>
+          <a:p>
+            <a:pPr indent="0" marL="0">
+              <a:buNone/>
+            </a:pPr>
+            <a:r>
+              <a:rPr lang="en-US" sz="1160" b="1" dirty="0">
                 <a:solidFill>
                   <a:srgbClr val="0068B7"/>
                 </a:solidFill>
@@ -16914,7 +16918,7 @@
               </a:rPr>
               <a:t>Governance pathway</a:t>
             </a:r>
-            <a:endParaRPr lang="en-US" sz="1250" dirty="0"/>
+            <a:endParaRPr lang="en-US" sz="1160" dirty="0"/>
           </a:p>
         </p:txBody>
       </p:sp>
@@ -16926,7 +16930,7 @@
         </p:nvSpPr>
         <p:spPr>
           <a:xfrm>
-            <a:off x="8763000" y="3351276"/>
+            <a:off x="8717280" y="3406140"/>
             <a:ext cx="164592" cy="0"/>
           </a:xfrm>
           <a:prstGeom prst="line">
@@ -16949,8 +16953,8 @@
         </p:nvSpPr>
         <p:spPr>
           <a:xfrm>
-            <a:off x="7872984" y="3200400"/>
-            <a:ext cx="890016" cy="301752"/>
+            <a:off x="7781544" y="3255264"/>
+            <a:ext cx="935736" cy="301752"/>
           </a:xfrm>
           <a:prstGeom prst="roundRect">
             <a:avLst>
@@ -16976,8 +16980,8 @@
         </p:nvSpPr>
         <p:spPr>
           <a:xfrm>
-            <a:off x="7909560" y="3273552"/>
-            <a:ext cx="816864" cy="146304"/>
+            <a:off x="7818120" y="3328416"/>
+            <a:ext cx="862584" cy="146304"/>
           </a:xfrm>
           <a:prstGeom prst="rect">
             <a:avLst/>
@@ -17017,7 +17021,7 @@
         </p:nvSpPr>
         <p:spPr>
           <a:xfrm>
-            <a:off x="9817608" y="3351276"/>
+            <a:off x="9817608" y="3406140"/>
             <a:ext cx="164592" cy="0"/>
           </a:xfrm>
           <a:prstGeom prst="line">
@@ -17040,8 +17044,8 @@
         </p:nvSpPr>
         <p:spPr>
           <a:xfrm>
-            <a:off x="8927592" y="3200400"/>
-            <a:ext cx="890016" cy="301752"/>
+            <a:off x="8881872" y="3255264"/>
+            <a:ext cx="935736" cy="301752"/>
           </a:xfrm>
           <a:prstGeom prst="roundRect">
             <a:avLst>
@@ -17067,8 +17071,8 @@
         </p:nvSpPr>
         <p:spPr>
           <a:xfrm>
-            <a:off x="8964168" y="3273552"/>
-            <a:ext cx="816864" cy="146304"/>
+            <a:off x="8918448" y="3328416"/>
+            <a:ext cx="862584" cy="146304"/>
           </a:xfrm>
           <a:prstGeom prst="rect">
             <a:avLst/>
@@ -17108,8 +17112,8 @@
         </p:nvSpPr>
         <p:spPr>
           <a:xfrm>
-            <a:off x="9982200" y="3200400"/>
-            <a:ext cx="890016" cy="301752"/>
+            <a:off x="9982200" y="3255264"/>
+            <a:ext cx="935736" cy="301752"/>
           </a:xfrm>
           <a:prstGeom prst="roundRect">
             <a:avLst>
@@ -17135,8 +17139,8 @@
         </p:nvSpPr>
         <p:spPr>
           <a:xfrm>
-            <a:off x="10018776" y="3273552"/>
-            <a:ext cx="816864" cy="146304"/>
+            <a:off x="10018776" y="3328416"/>
+            <a:ext cx="862584" cy="146304"/>
           </a:xfrm>
           <a:prstGeom prst="rect">
             <a:avLst/>
@@ -17176,8 +17180,8 @@
         </p:nvSpPr>
         <p:spPr>
           <a:xfrm>
-            <a:off x="7854696" y="3694176"/>
-            <a:ext cx="3035808" cy="206654"/>
+            <a:off x="7763256" y="3749040"/>
+            <a:ext cx="3172968" cy="356616"/>
           </a:xfrm>
           <a:prstGeom prst="rect">
             <a:avLst/>
@@ -17195,7 +17199,7 @@
               <a:buNone/>
             </a:pPr>
             <a:r>
-              <a:rPr lang="en-US" sz="1120" dirty="0">
+              <a:rPr lang="en-US" sz="1040" dirty="0">
                 <a:solidFill>
                   <a:srgbClr val="17364A"/>
                 </a:solidFill>
@@ -17203,9 +17207,9 @@
                 <a:ea typeface="Aptos" pitchFamily="34" charset="-122"/>
                 <a:cs typeface="Aptos" pitchFamily="34" charset="-120"/>
               </a:rPr>
-              <a:t>A proposed AI use should move through documented review before it becomes an operational workflow.</a:t>
-            </a:r>
-            <a:endParaRPr lang="en-US" sz="1120" dirty="0"/>
+              <a:t>A proposed AI use should move through documented review before it.</a:t>
+            </a:r>
+            <a:endParaRPr lang="en-US" sz="1040" dirty="0"/>
           </a:p>
         </p:txBody>
       </p:sp>
@@ -17217,12 +17221,12 @@
         </p:nvSpPr>
         <p:spPr>
           <a:xfrm>
-            <a:off x="7635240" y="4184294"/>
-            <a:ext cx="3474720" cy="1466698"/>
+            <a:off x="7543800" y="4389120"/>
+            <a:ext cx="3611880" cy="1261872"/>
           </a:xfrm>
           <a:prstGeom prst="roundRect">
             <a:avLst>
-              <a:gd name="adj" fmla="val 7481"/>
+              <a:gd name="adj" fmla="val 8696"/>
             </a:avLst>
           </a:prstGeom>
           <a:solidFill>
@@ -17244,8 +17248,8 @@
         </p:nvSpPr>
         <p:spPr>
           <a:xfrm>
-            <a:off x="7799832" y="4330598"/>
-            <a:ext cx="3145536" cy="256032"/>
+            <a:off x="7708392" y="4517136"/>
+            <a:ext cx="3282696" cy="228600"/>
           </a:xfrm>
           <a:prstGeom prst="rect">
             <a:avLst/>
@@ -17261,7 +17265,7 @@
               <a:buNone/>
             </a:pPr>
             <a:r>
-              <a:rPr lang="en-US" sz="1300" b="1" dirty="0">
+              <a:rPr lang="en-US" sz="1220" b="1" dirty="0">
                 <a:solidFill>
                   <a:srgbClr val="0068B7"/>
                 </a:solidFill>
@@ -17271,7 +17275,7 @@
               </a:rPr>
               <a:t>What to document</a:t>
             </a:r>
-            <a:endParaRPr lang="en-US" sz="1300" dirty="0"/>
+            <a:endParaRPr lang="en-US" sz="1220" dirty="0"/>
           </a:p>
         </p:txBody>
       </p:sp>
@@ -17283,8 +17287,8 @@
         </p:nvSpPr>
         <p:spPr>
           <a:xfrm>
-            <a:off x="7799832" y="4659782"/>
-            <a:ext cx="3145536" cy="899770"/>
+            <a:off x="7708392" y="4828032"/>
+            <a:ext cx="3282696" cy="749808"/>
           </a:xfrm>
           <a:prstGeom prst="rect">
             <a:avLst/>
@@ -17302,7 +17306,7 @@
               <a:buNone/>
             </a:pPr>
             <a:r>
-              <a:rPr lang="en-US" sz="1320" dirty="0">
+              <a:rPr lang="en-US" sz="1220" dirty="0">
                 <a:solidFill>
                   <a:srgbClr val="17364A"/>
                 </a:solidFill>
@@ -17310,9 +17314,9 @@
                 <a:ea typeface="Aptos" pitchFamily="34" charset="-122"/>
                 <a:cs typeface="Aptos" pitchFamily="34" charset="-120"/>
               </a:rPr>
-              <a:t>Translate this concept into clear decision rights, review steps, documentation expectations, and escalation paths before an AI-supported workflow is approved.</a:t>
-            </a:r>
-            <a:endParaRPr lang="en-US" sz="1320" dirty="0"/>
+              <a:t>Translate this concept into clear decision rights, review steps, documentation.</a:t>
+            </a:r>
+            <a:endParaRPr lang="en-US" sz="1220" dirty="0"/>
           </a:p>
         </p:txBody>
       </p:sp>
@@ -17603,8 +17607,8 @@
         </p:nvSpPr>
         <p:spPr>
           <a:xfrm>
-            <a:off x="868680" y="1508760"/>
-            <a:ext cx="6309360" cy="4160520"/>
+            <a:off x="822960" y="1463040"/>
+            <a:ext cx="6565392" cy="4343400"/>
           </a:xfrm>
           <a:prstGeom prst="rect">
             <a:avLst/>
@@ -17622,7 +17626,7 @@
               <a:buNone/>
             </a:pPr>
             <a:r>
-              <a:rPr lang="en-US" sz="2100" dirty="0">
+              <a:rPr lang="en-US" sz="1920" dirty="0">
                 <a:solidFill>
                   <a:srgbClr val="003A63"/>
                 </a:solidFill>
@@ -17632,14 +17636,14 @@
               </a:rPr>
               <a:t>• APIs can reduce manual work by allowing systems to exchange data directly.</a:t>
             </a:r>
-            <a:endParaRPr lang="en-US" sz="2100" dirty="0"/>
-          </a:p>
-          <a:p>
-            <a:pPr indent="0" marL="0">
-              <a:buNone/>
-            </a:pPr>
-            <a:r>
-              <a:rPr lang="en-US" sz="2100" dirty="0">
+            <a:endParaRPr lang="en-US" sz="1920" dirty="0"/>
+          </a:p>
+          <a:p>
+            <a:pPr indent="0" marL="0">
+              <a:buNone/>
+            </a:pPr>
+            <a:r>
+              <a:rPr lang="en-US" sz="1920" dirty="0">
                 <a:solidFill>
                   <a:srgbClr val="003A63"/>
                 </a:solidFill>
@@ -17647,16 +17651,16 @@
                 <a:ea typeface="Aptos" pitchFamily="34" charset="-122"/>
                 <a:cs typeface="Aptos" pitchFamily="34" charset="-120"/>
               </a:rPr>
-              <a:t>• In public health, APIs may retrieve case information, query FHIR resources, send status.</a:t>
-            </a:r>
-            <a:endParaRPr lang="en-US" sz="2100" dirty="0"/>
-          </a:p>
-          <a:p>
-            <a:pPr indent="0" marL="0">
-              <a:buNone/>
-            </a:pPr>
-            <a:r>
-              <a:rPr lang="en-US" sz="2100" dirty="0">
+              <a:t>• In public health, APIs may retrieve case information, query FHIR resources,.</a:t>
+            </a:r>
+            <a:endParaRPr lang="en-US" sz="1920" dirty="0"/>
+          </a:p>
+          <a:p>
+            <a:pPr indent="0" marL="0">
+              <a:buNone/>
+            </a:pPr>
+            <a:r>
+              <a:rPr lang="en-US" sz="1920" dirty="0">
                 <a:solidFill>
                   <a:srgbClr val="003A63"/>
                 </a:solidFill>
@@ -17664,9 +17668,9 @@
                 <a:ea typeface="Aptos" pitchFamily="34" charset="-122"/>
                 <a:cs typeface="Aptos" pitchFamily="34" charset="-120"/>
               </a:rPr>
-              <a:t>• Webhooks can notify a system when a defined event occurs, such as receipt of a new lab result.</a:t>
-            </a:r>
-            <a:endParaRPr lang="en-US" sz="2100" dirty="0"/>
+              <a:t>• Webhooks can notify a system when a defined event occurs, such as receipt of.</a:t>
+            </a:r>
+            <a:endParaRPr lang="en-US" sz="1920" dirty="0"/>
           </a:p>
         </p:txBody>
       </p:sp>
@@ -17678,12 +17682,12 @@
         </p:nvSpPr>
         <p:spPr>
           <a:xfrm>
-            <a:off x="7635240" y="1325880"/>
-            <a:ext cx="3474720" cy="1207008"/>
+            <a:off x="7543800" y="1325880"/>
+            <a:ext cx="3611880" cy="1261872"/>
           </a:xfrm>
           <a:prstGeom prst="roundRect">
             <a:avLst>
-              <a:gd name="adj" fmla="val 9091"/>
+              <a:gd name="adj" fmla="val 8696"/>
             </a:avLst>
           </a:prstGeom>
           <a:solidFill>
@@ -17705,8 +17709,8 @@
         </p:nvSpPr>
         <p:spPr>
           <a:xfrm>
-            <a:off x="7799832" y="1472184"/>
-            <a:ext cx="3145536" cy="256032"/>
+            <a:off x="7708392" y="1453896"/>
+            <a:ext cx="3282696" cy="228600"/>
           </a:xfrm>
           <a:prstGeom prst="rect">
             <a:avLst/>
@@ -17722,7 +17726,7 @@
               <a:buNone/>
             </a:pPr>
             <a:r>
-              <a:rPr lang="en-US" sz="1300" b="1" dirty="0">
+              <a:rPr lang="en-US" sz="1220" b="1" dirty="0">
                 <a:solidFill>
                   <a:srgbClr val="0068B7"/>
                 </a:solidFill>
@@ -17732,7 +17736,7 @@
               </a:rPr>
               <a:t>Implementation cue</a:t>
             </a:r>
-            <a:endParaRPr lang="en-US" sz="1300" dirty="0"/>
+            <a:endParaRPr lang="en-US" sz="1220" dirty="0"/>
           </a:p>
         </p:txBody>
       </p:sp>
@@ -17744,8 +17748,8 @@
         </p:nvSpPr>
         <p:spPr>
           <a:xfrm>
-            <a:off x="7799832" y="1801368"/>
-            <a:ext cx="3145536" cy="640080"/>
+            <a:off x="7708392" y="1764792"/>
+            <a:ext cx="3282696" cy="749808"/>
           </a:xfrm>
           <a:prstGeom prst="rect">
             <a:avLst/>
@@ -17763,7 +17767,7 @@
               <a:buNone/>
             </a:pPr>
             <a:r>
-              <a:rPr lang="en-US" sz="1320" dirty="0">
+              <a:rPr lang="en-US" sz="1220" dirty="0">
                 <a:solidFill>
                   <a:srgbClr val="17364A"/>
                 </a:solidFill>
@@ -17773,7 +17777,7 @@
               </a:rPr>
               <a:t>APIs can reduce manual work by allowing systems to exchange data directly.</a:t>
             </a:r>
-            <a:endParaRPr lang="en-US" sz="1320" dirty="0"/>
+            <a:endParaRPr lang="en-US" sz="1220" dirty="0"/>
           </a:p>
         </p:txBody>
       </p:sp>
@@ -17785,12 +17789,12 @@
         </p:nvSpPr>
         <p:spPr>
           <a:xfrm>
-            <a:off x="7635240" y="2670048"/>
-            <a:ext cx="3474720" cy="1377086"/>
+            <a:off x="7543800" y="2724912"/>
+            <a:ext cx="3611880" cy="1527048"/>
           </a:xfrm>
           <a:prstGeom prst="roundRect">
             <a:avLst>
-              <a:gd name="adj" fmla="val 7968"/>
+              <a:gd name="adj" fmla="val 7186"/>
             </a:avLst>
           </a:prstGeom>
           <a:solidFill>
@@ -17812,24 +17816,26 @@
         </p:nvSpPr>
         <p:spPr>
           <a:xfrm>
-            <a:off x="7799832" y="2798064"/>
-            <a:ext cx="3145536" cy="237744"/>
-          </a:xfrm>
-          <a:prstGeom prst="rect">
-            <a:avLst/>
-          </a:prstGeom>
-          <a:noFill/>
-          <a:ln/>
-        </p:spPr>
-        <p:txBody>
-          <a:bodyPr wrap="square" lIns="0" tIns="0" rIns="0" bIns="0" rtlCol="0" anchor="ctr"/>
-          <a:lstStyle/>
-          <a:p>
-            <a:pPr indent="0" marL="0">
-              <a:buNone/>
-            </a:pPr>
-            <a:r>
-              <a:rPr lang="en-US" sz="1250" b="1" dirty="0">
+            <a:off x="7708392" y="2852928"/>
+            <a:ext cx="3282696" cy="219456"/>
+          </a:xfrm>
+          <a:prstGeom prst="rect">
+            <a:avLst/>
+          </a:prstGeom>
+          <a:noFill/>
+          <a:ln/>
+        </p:spPr>
+        <p:txBody>
+          <a:bodyPr wrap="square" lIns="0" tIns="0" rIns="0" bIns="0" rtlCol="0" anchor="ctr">
+            <a:normAutofit/>
+          </a:bodyPr>
+          <a:lstStyle/>
+          <a:p>
+            <a:pPr indent="0" marL="0">
+              <a:buNone/>
+            </a:pPr>
+            <a:r>
+              <a:rPr lang="en-US" sz="1160" b="1" dirty="0">
                 <a:solidFill>
                   <a:srgbClr val="0068B7"/>
                 </a:solidFill>
@@ -17839,7 +17845,7 @@
               </a:rPr>
               <a:t>Implementation path</a:t>
             </a:r>
-            <a:endParaRPr lang="en-US" sz="1250" dirty="0"/>
+            <a:endParaRPr lang="en-US" sz="1160" dirty="0"/>
           </a:p>
         </p:txBody>
       </p:sp>
@@ -17851,7 +17857,7 @@
         </p:nvSpPr>
         <p:spPr>
           <a:xfrm>
-            <a:off x="8763000" y="3351276"/>
+            <a:off x="8717280" y="3406140"/>
             <a:ext cx="164592" cy="0"/>
           </a:xfrm>
           <a:prstGeom prst="line">
@@ -17874,8 +17880,8 @@
         </p:nvSpPr>
         <p:spPr>
           <a:xfrm>
-            <a:off x="7872984" y="3200400"/>
-            <a:ext cx="890016" cy="301752"/>
+            <a:off x="7781544" y="3255264"/>
+            <a:ext cx="935736" cy="301752"/>
           </a:xfrm>
           <a:prstGeom prst="roundRect">
             <a:avLst>
@@ -17901,8 +17907,8 @@
         </p:nvSpPr>
         <p:spPr>
           <a:xfrm>
-            <a:off x="7909560" y="3273552"/>
-            <a:ext cx="816864" cy="146304"/>
+            <a:off x="7818120" y="3328416"/>
+            <a:ext cx="862584" cy="146304"/>
           </a:xfrm>
           <a:prstGeom prst="rect">
             <a:avLst/>
@@ -17942,7 +17948,7 @@
         </p:nvSpPr>
         <p:spPr>
           <a:xfrm>
-            <a:off x="9817608" y="3351276"/>
+            <a:off x="9817608" y="3406140"/>
             <a:ext cx="164592" cy="0"/>
           </a:xfrm>
           <a:prstGeom prst="line">
@@ -17965,8 +17971,8 @@
         </p:nvSpPr>
         <p:spPr>
           <a:xfrm>
-            <a:off x="8927592" y="3200400"/>
-            <a:ext cx="890016" cy="301752"/>
+            <a:off x="8881872" y="3255264"/>
+            <a:ext cx="935736" cy="301752"/>
           </a:xfrm>
           <a:prstGeom prst="roundRect">
             <a:avLst>
@@ -17992,8 +17998,8 @@
         </p:nvSpPr>
         <p:spPr>
           <a:xfrm>
-            <a:off x="8964168" y="3273552"/>
-            <a:ext cx="816864" cy="146304"/>
+            <a:off x="8918448" y="3328416"/>
+            <a:ext cx="862584" cy="146304"/>
           </a:xfrm>
           <a:prstGeom prst="rect">
             <a:avLst/>
@@ -18033,8 +18039,8 @@
         </p:nvSpPr>
         <p:spPr>
           <a:xfrm>
-            <a:off x="9982200" y="3200400"/>
-            <a:ext cx="890016" cy="301752"/>
+            <a:off x="9982200" y="3255264"/>
+            <a:ext cx="935736" cy="301752"/>
           </a:xfrm>
           <a:prstGeom prst="roundRect">
             <a:avLst>
@@ -18060,8 +18066,8 @@
         </p:nvSpPr>
         <p:spPr>
           <a:xfrm>
-            <a:off x="10018776" y="3273552"/>
-            <a:ext cx="816864" cy="146304"/>
+            <a:off x="10018776" y="3328416"/>
+            <a:ext cx="862584" cy="146304"/>
           </a:xfrm>
           <a:prstGeom prst="rect">
             <a:avLst/>
@@ -18101,8 +18107,8 @@
         </p:nvSpPr>
         <p:spPr>
           <a:xfrm>
-            <a:off x="7854696" y="3694176"/>
-            <a:ext cx="3035808" cy="206654"/>
+            <a:off x="7763256" y="3749040"/>
+            <a:ext cx="3172968" cy="356616"/>
           </a:xfrm>
           <a:prstGeom prst="rect">
             <a:avLst/>
@@ -18120,7 +18126,7 @@
               <a:buNone/>
             </a:pPr>
             <a:r>
-              <a:rPr lang="en-US" sz="1120" dirty="0">
+              <a:rPr lang="en-US" sz="1040" dirty="0">
                 <a:solidFill>
                   <a:srgbClr val="17364A"/>
                 </a:solidFill>
@@ -18128,9 +18134,9 @@
                 <a:ea typeface="Aptos" pitchFamily="34" charset="-122"/>
                 <a:cs typeface="Aptos" pitchFamily="34" charset="-120"/>
               </a:rPr>
-              <a:t>Implementation work should make dependencies, approvals, training, and sustainment visible before launch.</a:t>
-            </a:r>
-            <a:endParaRPr lang="en-US" sz="1120" dirty="0"/>
+              <a:t>Implementation work should make dependencies, approvals, training, and.</a:t>
+            </a:r>
+            <a:endParaRPr lang="en-US" sz="1040" dirty="0"/>
           </a:p>
         </p:txBody>
       </p:sp>
@@ -18142,12 +18148,12 @@
         </p:nvSpPr>
         <p:spPr>
           <a:xfrm>
-            <a:off x="7635240" y="4184294"/>
-            <a:ext cx="3474720" cy="1466698"/>
+            <a:off x="7543800" y="4389120"/>
+            <a:ext cx="3611880" cy="1261872"/>
           </a:xfrm>
           <a:prstGeom prst="roundRect">
             <a:avLst>
-              <a:gd name="adj" fmla="val 7481"/>
+              <a:gd name="adj" fmla="val 8696"/>
             </a:avLst>
           </a:prstGeom>
           <a:solidFill>
@@ -18169,8 +18175,8 @@
         </p:nvSpPr>
         <p:spPr>
           <a:xfrm>
-            <a:off x="7799832" y="4330598"/>
-            <a:ext cx="3145536" cy="256032"/>
+            <a:off x="7708392" y="4517136"/>
+            <a:ext cx="3282696" cy="228600"/>
           </a:xfrm>
           <a:prstGeom prst="rect">
             <a:avLst/>
@@ -18186,7 +18192,7 @@
               <a:buNone/>
             </a:pPr>
             <a:r>
-              <a:rPr lang="en-US" sz="1300" b="1" dirty="0">
+              <a:rPr lang="en-US" sz="1220" b="1" dirty="0">
                 <a:solidFill>
                   <a:srgbClr val="0068B7"/>
                 </a:solidFill>
@@ -18196,7 +18202,7 @@
               </a:rPr>
               <a:t>Next action</a:t>
             </a:r>
-            <a:endParaRPr lang="en-US" sz="1300" dirty="0"/>
+            <a:endParaRPr lang="en-US" sz="1220" dirty="0"/>
           </a:p>
         </p:txBody>
       </p:sp>
@@ -18208,8 +18214,8 @@
         </p:nvSpPr>
         <p:spPr>
           <a:xfrm>
-            <a:off x="7799832" y="4659782"/>
-            <a:ext cx="3145536" cy="899770"/>
+            <a:off x="7708392" y="4828032"/>
+            <a:ext cx="3282696" cy="749808"/>
           </a:xfrm>
           <a:prstGeom prst="rect">
             <a:avLst/>
@@ -18227,7 +18233,7 @@
               <a:buNone/>
             </a:pPr>
             <a:r>
-              <a:rPr lang="en-US" sz="1320" dirty="0">
+              <a:rPr lang="en-US" sz="1220" dirty="0">
                 <a:solidFill>
                   <a:srgbClr val="17364A"/>
                 </a:solidFill>
@@ -18235,9 +18241,9 @@
                 <a:ea typeface="Aptos" pitchFamily="34" charset="-122"/>
                 <a:cs typeface="Aptos" pitchFamily="34" charset="-120"/>
               </a:rPr>
-              <a:t>Use the concept to clarify workflow changes, dependencies, staffing, procurement requirements, training needs, and implementation checkpoints.</a:t>
-            </a:r>
-            <a:endParaRPr lang="en-US" sz="1320" dirty="0"/>
+              <a:t>Use the concept to clarify workflow changes, dependencies, staffing, procurement.</a:t>
+            </a:r>
+            <a:endParaRPr lang="en-US" sz="1220" dirty="0"/>
           </a:p>
         </p:txBody>
       </p:sp>
@@ -18528,8 +18534,8 @@
         </p:nvSpPr>
         <p:spPr>
           <a:xfrm>
-            <a:off x="868680" y="1508760"/>
-            <a:ext cx="6309360" cy="4160520"/>
+            <a:off x="822960" y="1463040"/>
+            <a:ext cx="6565392" cy="4343400"/>
           </a:xfrm>
           <a:prstGeom prst="rect">
             <a:avLst/>
@@ -18547,7 +18553,7 @@
               <a:buNone/>
             </a:pPr>
             <a:r>
-              <a:rPr lang="en-US" sz="2100" dirty="0">
+              <a:rPr lang="en-US" sz="1920" dirty="0">
                 <a:solidFill>
                   <a:srgbClr val="003A63"/>
                 </a:solidFill>
@@ -18557,14 +18563,14 @@
               </a:rPr>
               <a:t>• API.</a:t>
             </a:r>
-            <a:endParaRPr lang="en-US" sz="2100" dirty="0"/>
-          </a:p>
-          <a:p>
-            <a:pPr indent="0" marL="0">
-              <a:buNone/>
-            </a:pPr>
-            <a:r>
-              <a:rPr lang="en-US" sz="2100" dirty="0">
+            <a:endParaRPr lang="en-US" sz="1920" dirty="0"/>
+          </a:p>
+          <a:p>
+            <a:pPr indent="0" marL="0">
+              <a:buNone/>
+            </a:pPr>
+            <a:r>
+              <a:rPr lang="en-US" sz="1920" dirty="0">
                 <a:solidFill>
                   <a:srgbClr val="003A63"/>
                 </a:solidFill>
@@ -18572,16 +18578,16 @@
                 <a:ea typeface="Aptos" pitchFamily="34" charset="-122"/>
                 <a:cs typeface="Aptos" pitchFamily="34" charset="-120"/>
               </a:rPr>
-              <a:t>• An application programming interface allows one system to request data or services from.</a:t>
-            </a:r>
-            <a:endParaRPr lang="en-US" sz="2100" dirty="0"/>
-          </a:p>
-          <a:p>
-            <a:pPr indent="0" marL="0">
-              <a:buNone/>
-            </a:pPr>
-            <a:r>
-              <a:rPr lang="en-US" sz="2100" dirty="0">
+              <a:t>• An application programming interface allows one system to request data or.</a:t>
+            </a:r>
+            <a:endParaRPr lang="en-US" sz="1920" dirty="0"/>
+          </a:p>
+          <a:p>
+            <a:pPr indent="0" marL="0">
+              <a:buNone/>
+            </a:pPr>
+            <a:r>
+              <a:rPr lang="en-US" sz="1920" dirty="0">
                 <a:solidFill>
                   <a:srgbClr val="003A63"/>
                 </a:solidFill>
@@ -18589,9 +18595,9 @@
                 <a:ea typeface="Aptos" pitchFamily="34" charset="-122"/>
                 <a:cs typeface="Aptos" pitchFamily="34" charset="-120"/>
               </a:rPr>
-              <a:t>• APIs are useful for structured exchange, but they must be governed through authentication,.</a:t>
-            </a:r>
-            <a:endParaRPr lang="en-US" sz="2100" dirty="0"/>
+              <a:t>• APIs are useful for structured exchange, but they must be governed through.</a:t>
+            </a:r>
+            <a:endParaRPr lang="en-US" sz="1920" dirty="0"/>
           </a:p>
         </p:txBody>
       </p:sp>
@@ -18603,12 +18609,12 @@
         </p:nvSpPr>
         <p:spPr>
           <a:xfrm>
-            <a:off x="7635240" y="1325880"/>
-            <a:ext cx="3474720" cy="1207008"/>
+            <a:off x="7543800" y="1325880"/>
+            <a:ext cx="3611880" cy="1261872"/>
           </a:xfrm>
           <a:prstGeom prst="roundRect">
             <a:avLst>
-              <a:gd name="adj" fmla="val 9091"/>
+              <a:gd name="adj" fmla="val 8696"/>
             </a:avLst>
           </a:prstGeom>
           <a:solidFill>
@@ -18630,8 +18636,8 @@
         </p:nvSpPr>
         <p:spPr>
           <a:xfrm>
-            <a:off x="7799832" y="1472184"/>
-            <a:ext cx="3145536" cy="256032"/>
+            <a:off x="7708392" y="1453896"/>
+            <a:ext cx="3282696" cy="228600"/>
           </a:xfrm>
           <a:prstGeom prst="rect">
             <a:avLst/>
@@ -18647,7 +18653,7 @@
               <a:buNone/>
             </a:pPr>
             <a:r>
-              <a:rPr lang="en-US" sz="1300" b="1" dirty="0">
+              <a:rPr lang="en-US" sz="1220" b="1" dirty="0">
                 <a:solidFill>
                   <a:srgbClr val="0068B7"/>
                 </a:solidFill>
@@ -18657,7 +18663,7 @@
               </a:rPr>
               <a:t>Implementation cue</a:t>
             </a:r>
-            <a:endParaRPr lang="en-US" sz="1300" dirty="0"/>
+            <a:endParaRPr lang="en-US" sz="1220" dirty="0"/>
           </a:p>
         </p:txBody>
       </p:sp>
@@ -18669,8 +18675,8 @@
         </p:nvSpPr>
         <p:spPr>
           <a:xfrm>
-            <a:off x="7799832" y="1801368"/>
-            <a:ext cx="3145536" cy="640080"/>
+            <a:off x="7708392" y="1764792"/>
+            <a:ext cx="3282696" cy="749808"/>
           </a:xfrm>
           <a:prstGeom prst="rect">
             <a:avLst/>
@@ -18688,7 +18694,7 @@
               <a:buNone/>
             </a:pPr>
             <a:r>
-              <a:rPr lang="en-US" sz="1320" dirty="0">
+              <a:rPr lang="en-US" sz="1220" dirty="0">
                 <a:solidFill>
                   <a:srgbClr val="17364A"/>
                 </a:solidFill>
@@ -18698,7 +18704,7 @@
               </a:rPr>
               <a:t>API.</a:t>
             </a:r>
-            <a:endParaRPr lang="en-US" sz="1320" dirty="0"/>
+            <a:endParaRPr lang="en-US" sz="1220" dirty="0"/>
           </a:p>
         </p:txBody>
       </p:sp>
@@ -18710,12 +18716,12 @@
         </p:nvSpPr>
         <p:spPr>
           <a:xfrm>
-            <a:off x="7635240" y="2670048"/>
-            <a:ext cx="3474720" cy="1377086"/>
+            <a:off x="7543800" y="2724912"/>
+            <a:ext cx="3611880" cy="1527048"/>
           </a:xfrm>
           <a:prstGeom prst="roundRect">
             <a:avLst>
-              <a:gd name="adj" fmla="val 7968"/>
+              <a:gd name="adj" fmla="val 7186"/>
             </a:avLst>
           </a:prstGeom>
           <a:solidFill>
@@ -18737,8 +18743,8 @@
         </p:nvSpPr>
         <p:spPr>
           <a:xfrm>
-            <a:off x="7799832" y="2816352"/>
-            <a:ext cx="3145536" cy="256032"/>
+            <a:off x="7708392" y="2852928"/>
+            <a:ext cx="3282696" cy="228600"/>
           </a:xfrm>
           <a:prstGeom prst="rect">
             <a:avLst/>
@@ -18754,7 +18760,7 @@
               <a:buNone/>
             </a:pPr>
             <a:r>
-              <a:rPr lang="en-US" sz="1300" b="1" dirty="0">
+              <a:rPr lang="en-US" sz="1220" b="1" dirty="0">
                 <a:solidFill>
                   <a:srgbClr val="0068B7"/>
                 </a:solidFill>
@@ -18764,7 +18770,7 @@
               </a:rPr>
               <a:t>Concept checkpoints</a:t>
             </a:r>
-            <a:endParaRPr lang="en-US" sz="1300" dirty="0"/>
+            <a:endParaRPr lang="en-US" sz="1220" dirty="0"/>
           </a:p>
         </p:txBody>
       </p:sp>
@@ -18776,8 +18782,8 @@
         </p:nvSpPr>
         <p:spPr>
           <a:xfrm>
-            <a:off x="7818120" y="3182112"/>
-            <a:ext cx="3090672" cy="718718"/>
+            <a:off x="7726680" y="3182112"/>
+            <a:ext cx="3227832" cy="960120"/>
           </a:xfrm>
           <a:prstGeom prst="rect">
             <a:avLst/>
@@ -18795,7 +18801,7 @@
               <a:buNone/>
             </a:pPr>
             <a:r>
-              <a:rPr lang="en-US" sz="1220" dirty="0">
+              <a:rPr lang="en-US" sz="1140" dirty="0">
                 <a:solidFill>
                   <a:srgbClr val="17364A"/>
                 </a:solidFill>
@@ -18803,16 +18809,16 @@
                 <a:ea typeface="Aptos" pitchFamily="34" charset="-122"/>
                 <a:cs typeface="Aptos" pitchFamily="34" charset="-120"/>
               </a:rPr>
-              <a:t>APIs are useful for structured exchange, but they must be governed.</a:t>
-            </a:r>
-            <a:endParaRPr lang="en-US" sz="1220" dirty="0"/>
-          </a:p>
-          <a:p>
-            <a:pPr indent="0" marL="0">
-              <a:buNone/>
-            </a:pPr>
-            <a:r>
-              <a:rPr lang="en-US" sz="1220" dirty="0">
+              <a:t>APIs are useful for structured exchange, but they.</a:t>
+            </a:r>
+            <a:endParaRPr lang="en-US" sz="1140" dirty="0"/>
+          </a:p>
+          <a:p>
+            <a:pPr indent="0" marL="0">
+              <a:buNone/>
+            </a:pPr>
+            <a:r>
+              <a:rPr lang="en-US" sz="1140" dirty="0">
                 <a:solidFill>
                   <a:srgbClr val="17364A"/>
                 </a:solidFill>
@@ -18822,14 +18828,14 @@
               </a:rPr>
               <a:t>Webhook.</a:t>
             </a:r>
-            <a:endParaRPr lang="en-US" sz="1220" dirty="0"/>
-          </a:p>
-          <a:p>
-            <a:pPr indent="0" marL="0">
-              <a:buNone/>
-            </a:pPr>
-            <a:r>
-              <a:rPr lang="en-US" sz="1220" dirty="0">
+            <a:endParaRPr lang="en-US" sz="1140" dirty="0"/>
+          </a:p>
+          <a:p>
+            <a:pPr indent="0" marL="0">
+              <a:buNone/>
+            </a:pPr>
+            <a:r>
+              <a:rPr lang="en-US" sz="1140" dirty="0">
                 <a:solidFill>
                   <a:srgbClr val="17364A"/>
                 </a:solidFill>
@@ -18837,9 +18843,9 @@
                 <a:ea typeface="Aptos" pitchFamily="34" charset="-122"/>
                 <a:cs typeface="Aptos" pitchFamily="34" charset="-120"/>
               </a:rPr>
-              <a:t>A webhook sends information automatically when a defined event.</a:t>
-            </a:r>
-            <a:endParaRPr lang="en-US" sz="1220" dirty="0"/>
+              <a:t>A webhook sends information automatically when a.</a:t>
+            </a:r>
+            <a:endParaRPr lang="en-US" sz="1140" dirty="0"/>
           </a:p>
         </p:txBody>
       </p:sp>
@@ -18851,12 +18857,12 @@
         </p:nvSpPr>
         <p:spPr>
           <a:xfrm>
-            <a:off x="7635240" y="4184294"/>
-            <a:ext cx="3474720" cy="1466698"/>
+            <a:off x="7543800" y="4389120"/>
+            <a:ext cx="3611880" cy="1261872"/>
           </a:xfrm>
           <a:prstGeom prst="roundRect">
             <a:avLst>
-              <a:gd name="adj" fmla="val 7481"/>
+              <a:gd name="adj" fmla="val 8696"/>
             </a:avLst>
           </a:prstGeom>
           <a:solidFill>
@@ -18878,8 +18884,8 @@
         </p:nvSpPr>
         <p:spPr>
           <a:xfrm>
-            <a:off x="7799832" y="4330598"/>
-            <a:ext cx="3145536" cy="256032"/>
+            <a:off x="7708392" y="4517136"/>
+            <a:ext cx="3282696" cy="228600"/>
           </a:xfrm>
           <a:prstGeom prst="rect">
             <a:avLst/>
@@ -18895,7 +18901,7 @@
               <a:buNone/>
             </a:pPr>
             <a:r>
-              <a:rPr lang="en-US" sz="1300" b="1" dirty="0">
+              <a:rPr lang="en-US" sz="1220" b="1" dirty="0">
                 <a:solidFill>
                   <a:srgbClr val="0068B7"/>
                 </a:solidFill>
@@ -18905,7 +18911,7 @@
               </a:rPr>
               <a:t>Next action</a:t>
             </a:r>
-            <a:endParaRPr lang="en-US" sz="1300" dirty="0"/>
+            <a:endParaRPr lang="en-US" sz="1220" dirty="0"/>
           </a:p>
         </p:txBody>
       </p:sp>
@@ -18917,8 +18923,8 @@
         </p:nvSpPr>
         <p:spPr>
           <a:xfrm>
-            <a:off x="7799832" y="4659782"/>
-            <a:ext cx="3145536" cy="899770"/>
+            <a:off x="7708392" y="4828032"/>
+            <a:ext cx="3282696" cy="749808"/>
           </a:xfrm>
           <a:prstGeom prst="rect">
             <a:avLst/>
@@ -18936,7 +18942,7 @@
               <a:buNone/>
             </a:pPr>
             <a:r>
-              <a:rPr lang="en-US" sz="1320" dirty="0">
+              <a:rPr lang="en-US" sz="1220" dirty="0">
                 <a:solidFill>
                   <a:srgbClr val="17364A"/>
                 </a:solidFill>
@@ -18944,9 +18950,9 @@
                 <a:ea typeface="Aptos" pitchFamily="34" charset="-122"/>
                 <a:cs typeface="Aptos" pitchFamily="34" charset="-120"/>
               </a:rPr>
-              <a:t>Use the concept to clarify workflow changes, dependencies, staffing, procurement requirements, training needs, and implementation checkpoints.</a:t>
-            </a:r>
-            <a:endParaRPr lang="en-US" sz="1320" dirty="0"/>
+              <a:t>Use the concept to clarify workflow changes, dependencies, staffing, procurement.</a:t>
+            </a:r>
+            <a:endParaRPr lang="en-US" sz="1220" dirty="0"/>
           </a:p>
         </p:txBody>
       </p:sp>

--- a/downloads/presentations/modules/arc-260.pptx
+++ b/downloads/presentations/modules/arc-260.pptx
@@ -12432,7 +12432,7 @@
                 <a:ea typeface="Aptos" pitchFamily="34" charset="-122"/>
                 <a:cs typeface="Aptos" pitchFamily="34" charset="-120"/>
               </a:rPr>
-              <a:t>• 1. What does an API allow systems to do?</a:t>
+              <a:t>1. What does an API allow systems to do?</a:t>
             </a:r>
             <a:endParaRPr lang="en-US" sz="1920" dirty="0"/>
           </a:p>
@@ -12449,7 +12449,7 @@
                 <a:ea typeface="Aptos" pitchFamily="34" charset="-122"/>
                 <a:cs typeface="Aptos" pitchFamily="34" charset="-120"/>
               </a:rPr>
-              <a:t>• 2. What is a webhook?</a:t>
+              <a:t>2. What is a webhook?</a:t>
             </a:r>
             <a:endParaRPr lang="en-US" sz="1920" dirty="0"/>
           </a:p>
@@ -12466,7 +12466,7 @@
                 <a:ea typeface="Aptos" pitchFamily="34" charset="-122"/>
                 <a:cs typeface="Aptos" pitchFamily="34" charset="-120"/>
               </a:rPr>
-              <a:t>• 3. Why do AI integrations need access controls?</a:t>
+              <a:t>3. Why do AI integrations need access controls?</a:t>
             </a:r>
             <a:endParaRPr lang="en-US" sz="1920" dirty="0"/>
           </a:p>
@@ -12573,7 +12573,7 @@
                 <a:ea typeface="Aptos" pitchFamily="34" charset="-122"/>
                 <a:cs typeface="Aptos" pitchFamily="34" charset="-120"/>
               </a:rPr>
-              <a:t>1. What does an API allow systems to do?</a:t>
+              <a:t>What does an API allow systems to do?</a:t>
             </a:r>
             <a:endParaRPr lang="en-US" sz="1220" dirty="0"/>
           </a:p>
@@ -12680,41 +12680,7 @@
                 <a:ea typeface="Aptos" pitchFamily="34" charset="-122"/>
                 <a:cs typeface="Aptos" pitchFamily="34" charset="-120"/>
               </a:rPr>
-              <a:t>1.</a:t>
-            </a:r>
-            <a:endParaRPr lang="en-US" sz="1140" dirty="0"/>
-          </a:p>
-          <a:p>
-            <a:pPr indent="0" marL="0">
-              <a:buNone/>
-            </a:pPr>
-            <a:r>
-              <a:rPr lang="en-US" sz="1140" dirty="0">
-                <a:solidFill>
-                  <a:srgbClr val="17364A"/>
-                </a:solidFill>
-                <a:latin typeface="Aptos" pitchFamily="34" charset="0"/>
-                <a:ea typeface="Aptos" pitchFamily="34" charset="-122"/>
-                <a:cs typeface="Aptos" pitchFamily="34" charset="-120"/>
-              </a:rPr>
               <a:t>What does an API allow systems to do?</a:t>
-            </a:r>
-            <a:endParaRPr lang="en-US" sz="1140" dirty="0"/>
-          </a:p>
-          <a:p>
-            <a:pPr indent="0" marL="0">
-              <a:buNone/>
-            </a:pPr>
-            <a:r>
-              <a:rPr lang="en-US" sz="1140" dirty="0">
-                <a:solidFill>
-                  <a:srgbClr val="17364A"/>
-                </a:solidFill>
-                <a:latin typeface="Aptos" pitchFamily="34" charset="0"/>
-                <a:ea typeface="Aptos" pitchFamily="34" charset="-122"/>
-                <a:cs typeface="Aptos" pitchFamily="34" charset="-120"/>
-              </a:rPr>
-              <a:t>2.</a:t>
             </a:r>
             <a:endParaRPr lang="en-US" sz="1140" dirty="0"/>
           </a:p>
